--- a/downloads/presentations/modules/arc-320.pptx
+++ b/downloads/presentations/modules/arc-320.pptx
@@ -3525,13 +3525,11 @@
             </a:avLst>
           </a:prstGeom>
           <a:solidFill>
-            <a:srgbClr val="FFFFFF">
-              <a:alpha val="88000"/>
-            </a:srgbClr>
+            <a:srgbClr val="FFFFFF"/>
           </a:solidFill>
           <a:ln w="12700">
             <a:solidFill>
-              <a:srgbClr val="D6E8F2"/>
+              <a:srgbClr val="B9D7E6"/>
             </a:solidFill>
             <a:prstDash val="solid"/>
           </a:ln>
@@ -3539,30 +3537,42 @@
       </p:sp>
       <p:sp>
         <p:nvSpPr>
-          <p:cNvPr id="14" name="Shape 12"/>
-          <p:cNvSpPr/>
-          <p:nvPr/>
-        </p:nvSpPr>
-        <p:spPr>
-          <a:xfrm>
-            <a:off x="7927848" y="3319272"/>
-            <a:ext cx="792480" cy="749808"/>
-          </a:xfrm>
-          <a:prstGeom prst="roundRect">
-            <a:avLst>
-              <a:gd name="adj" fmla="val 14634"/>
-            </a:avLst>
-          </a:prstGeom>
-          <a:solidFill>
-            <a:srgbClr val="0068B7"/>
-          </a:solidFill>
-          <a:ln w="12700">
-            <a:solidFill>
-              <a:srgbClr val="0068B7"/>
-            </a:solidFill>
-            <a:prstDash val="solid"/>
-          </a:ln>
-        </p:spPr>
+          <p:cNvPr id="14" name="Text 12"/>
+          <p:cNvSpPr/>
+          <p:nvPr/>
+        </p:nvSpPr>
+        <p:spPr>
+          <a:xfrm>
+            <a:off x="7799832" y="2935224"/>
+            <a:ext cx="3145536" cy="256032"/>
+          </a:xfrm>
+          <a:prstGeom prst="rect">
+            <a:avLst/>
+          </a:prstGeom>
+          <a:noFill/>
+          <a:ln/>
+        </p:spPr>
+        <p:txBody>
+          <a:bodyPr wrap="square" lIns="0" tIns="0" rIns="0" bIns="0" rtlCol="0" anchor="ctr"/>
+          <a:lstStyle/>
+          <a:p>
+            <a:pPr indent="0" marL="0">
+              <a:buNone/>
+            </a:pPr>
+            <a:r>
+              <a:rPr lang="en-US" sz="1300" b="1" dirty="0">
+                <a:solidFill>
+                  <a:srgbClr val="0068B7"/>
+                </a:solidFill>
+                <a:latin typeface="Aptos" pitchFamily="34" charset="0"/>
+                <a:ea typeface="Aptos" pitchFamily="34" charset="-122"/>
+                <a:cs typeface="Aptos" pitchFamily="34" charset="-120"/>
+              </a:rPr>
+              <a:t>Concept checkpoints</a:t>
+            </a:r>
+            <a:endParaRPr lang="en-US" sz="1300" dirty="0"/>
+          </a:p>
+        </p:txBody>
       </p:sp>
       <p:sp>
         <p:nvSpPr>
@@ -3572,240 +3582,67 @@
         </p:nvSpPr>
         <p:spPr>
           <a:xfrm>
-            <a:off x="8001000" y="3511296"/>
-            <a:ext cx="646176" cy="310896"/>
-          </a:xfrm>
-          <a:prstGeom prst="rect">
-            <a:avLst/>
-          </a:prstGeom>
-          <a:noFill/>
-          <a:ln/>
-        </p:spPr>
-        <p:txBody>
-          <a:bodyPr wrap="square" lIns="0" tIns="0" rIns="0" bIns="0" rtlCol="0" anchor="ctr">
+            <a:off x="7818120" y="3300984"/>
+            <a:ext cx="3090672" cy="877824"/>
+          </a:xfrm>
+          <a:prstGeom prst="rect">
+            <a:avLst/>
+          </a:prstGeom>
+          <a:noFill/>
+          <a:ln/>
+        </p:spPr>
+        <p:txBody>
+          <a:bodyPr wrap="square" lIns="254" tIns="254" rIns="254" bIns="254" rtlCol="0" anchor="t">
             <a:normAutofit/>
           </a:bodyPr>
           <a:lstStyle/>
           <a:p>
-            <a:pPr algn="ctr" indent="0" marL="0">
-              <a:buNone/>
-            </a:pPr>
-            <a:r>
-              <a:rPr lang="en-US" sz="1500" b="1" dirty="0">
-                <a:solidFill>
-                  <a:srgbClr val="FFFFFF"/>
-                </a:solidFill>
-                <a:latin typeface="Aptos" pitchFamily="34" charset="0"/>
-                <a:ea typeface="Aptos" pitchFamily="34" charset="-122"/>
-                <a:cs typeface="Aptos" pitchFamily="34" charset="-120"/>
-              </a:rPr>
-              <a:t>Plan</a:t>
-            </a:r>
-            <a:endParaRPr lang="en-US" sz="1500" dirty="0"/>
+            <a:r>
+              <a:rPr lang="en-US" sz="1380" dirty="0">
+                <a:solidFill>
+                  <a:srgbClr val="17364A"/>
+                </a:solidFill>
+                <a:latin typeface="Aptos" pitchFamily="34" charset="0"/>
+                <a:ea typeface="Aptos" pitchFamily="34" charset="-122"/>
+                <a:cs typeface="Aptos" pitchFamily="34" charset="-120"/>
+              </a:rPr>
+              <a:t>The goal should be narrow and operationally defined. “Help with surveillance” is too.</a:t>
+            </a:r>
+            <a:endParaRPr lang="en-US" sz="1380" dirty="0"/>
+          </a:p>
+          <a:p>
+            <a:r>
+              <a:rPr lang="en-US" sz="1380" dirty="0">
+                <a:solidFill>
+                  <a:srgbClr val="17364A"/>
+                </a:solidFill>
+                <a:latin typeface="Aptos" pitchFamily="34" charset="0"/>
+                <a:ea typeface="Aptos" pitchFamily="34" charset="-122"/>
+                <a:cs typeface="Aptos" pitchFamily="34" charset="-120"/>
+              </a:rPr>
+              <a:t>Tool access is a central design decision.</a:t>
+            </a:r>
+            <a:endParaRPr lang="en-US" sz="1380" dirty="0"/>
+          </a:p>
+          <a:p>
+            <a:r>
+              <a:rPr lang="en-US" sz="1380" dirty="0">
+                <a:solidFill>
+                  <a:srgbClr val="17364A"/>
+                </a:solidFill>
+                <a:latin typeface="Aptos" pitchFamily="34" charset="0"/>
+                <a:ea typeface="Aptos" pitchFamily="34" charset="-122"/>
+                <a:cs typeface="Aptos" pitchFamily="34" charset="-120"/>
+              </a:rPr>
+              <a:t>An agent may be allowed to search documents, query a database, create a task, send a draft.</a:t>
+            </a:r>
+            <a:endParaRPr lang="en-US" sz="1380" dirty="0"/>
           </a:p>
         </p:txBody>
       </p:sp>
       <p:sp>
         <p:nvSpPr>
           <p:cNvPr id="16" name="Shape 14"/>
-          <p:cNvSpPr/>
-          <p:nvPr/>
-        </p:nvSpPr>
-        <p:spPr>
-          <a:xfrm>
-            <a:off x="8976360" y="3319272"/>
-            <a:ext cx="792480" cy="749808"/>
-          </a:xfrm>
-          <a:prstGeom prst="roundRect">
-            <a:avLst>
-              <a:gd name="adj" fmla="val 14634"/>
-            </a:avLst>
-          </a:prstGeom>
-          <a:solidFill>
-            <a:srgbClr val="2F8A28"/>
-          </a:solidFill>
-          <a:ln w="12700">
-            <a:solidFill>
-              <a:srgbClr val="2F8A28"/>
-            </a:solidFill>
-            <a:prstDash val="solid"/>
-          </a:ln>
-        </p:spPr>
-      </p:sp>
-      <p:sp>
-        <p:nvSpPr>
-          <p:cNvPr id="17" name="Text 15"/>
-          <p:cNvSpPr/>
-          <p:nvPr/>
-        </p:nvSpPr>
-        <p:spPr>
-          <a:xfrm>
-            <a:off x="9049512" y="3511296"/>
-            <a:ext cx="646176" cy="310896"/>
-          </a:xfrm>
-          <a:prstGeom prst="rect">
-            <a:avLst/>
-          </a:prstGeom>
-          <a:noFill/>
-          <a:ln/>
-        </p:spPr>
-        <p:txBody>
-          <a:bodyPr wrap="square" lIns="0" tIns="0" rIns="0" bIns="0" rtlCol="0" anchor="ctr">
-            <a:normAutofit/>
-          </a:bodyPr>
-          <a:lstStyle/>
-          <a:p>
-            <a:pPr algn="ctr" indent="0" marL="0">
-              <a:buNone/>
-            </a:pPr>
-            <a:r>
-              <a:rPr lang="en-US" sz="1500" b="1" dirty="0">
-                <a:solidFill>
-                  <a:srgbClr val="FFFFFF"/>
-                </a:solidFill>
-                <a:latin typeface="Aptos" pitchFamily="34" charset="0"/>
-                <a:ea typeface="Aptos" pitchFamily="34" charset="-122"/>
-                <a:cs typeface="Aptos" pitchFamily="34" charset="-120"/>
-              </a:rPr>
-              <a:t>Do</a:t>
-            </a:r>
-            <a:endParaRPr lang="en-US" sz="1500" dirty="0"/>
-          </a:p>
-        </p:txBody>
-      </p:sp>
-      <p:sp>
-        <p:nvSpPr>
-          <p:cNvPr id="18" name="Shape 16"/>
-          <p:cNvSpPr/>
-          <p:nvPr/>
-        </p:nvSpPr>
-        <p:spPr>
-          <a:xfrm>
-            <a:off x="10024872" y="3319272"/>
-            <a:ext cx="792480" cy="749808"/>
-          </a:xfrm>
-          <a:prstGeom prst="roundRect">
-            <a:avLst>
-              <a:gd name="adj" fmla="val 14634"/>
-            </a:avLst>
-          </a:prstGeom>
-          <a:solidFill>
-            <a:srgbClr val="D69A2D"/>
-          </a:solidFill>
-          <a:ln w="12700">
-            <a:solidFill>
-              <a:srgbClr val="D69A2D"/>
-            </a:solidFill>
-            <a:prstDash val="solid"/>
-          </a:ln>
-        </p:spPr>
-      </p:sp>
-      <p:sp>
-        <p:nvSpPr>
-          <p:cNvPr id="19" name="Text 17"/>
-          <p:cNvSpPr/>
-          <p:nvPr/>
-        </p:nvSpPr>
-        <p:spPr>
-          <a:xfrm>
-            <a:off x="10098024" y="3511296"/>
-            <a:ext cx="646176" cy="310896"/>
-          </a:xfrm>
-          <a:prstGeom prst="rect">
-            <a:avLst/>
-          </a:prstGeom>
-          <a:noFill/>
-          <a:ln/>
-        </p:spPr>
-        <p:txBody>
-          <a:bodyPr wrap="square" lIns="0" tIns="0" rIns="0" bIns="0" rtlCol="0" anchor="ctr">
-            <a:normAutofit/>
-          </a:bodyPr>
-          <a:lstStyle/>
-          <a:p>
-            <a:pPr algn="ctr" indent="0" marL="0">
-              <a:buNone/>
-            </a:pPr>
-            <a:r>
-              <a:rPr lang="en-US" sz="1500" b="1" dirty="0">
-                <a:solidFill>
-                  <a:srgbClr val="FFFFFF"/>
-                </a:solidFill>
-                <a:latin typeface="Aptos" pitchFamily="34" charset="0"/>
-                <a:ea typeface="Aptos" pitchFamily="34" charset="-122"/>
-                <a:cs typeface="Aptos" pitchFamily="34" charset="-120"/>
-              </a:rPr>
-              <a:t>Review</a:t>
-            </a:r>
-            <a:endParaRPr lang="en-US" sz="1500" dirty="0"/>
-          </a:p>
-        </p:txBody>
-      </p:sp>
-      <p:sp>
-        <p:nvSpPr>
-          <p:cNvPr id="20" name="Shape 18"/>
-          <p:cNvSpPr/>
-          <p:nvPr/>
-        </p:nvSpPr>
-        <p:spPr>
-          <a:xfrm>
-            <a:off x="8293608" y="4389120"/>
-            <a:ext cx="2157984" cy="0"/>
-          </a:xfrm>
-          <a:prstGeom prst="line">
-            <a:avLst/>
-          </a:prstGeom>
-          <a:noFill/>
-          <a:ln w="25400">
-            <a:solidFill>
-              <a:srgbClr val="8ABBD8"/>
-            </a:solidFill>
-            <a:prstDash val="solid"/>
-          </a:ln>
-        </p:spPr>
-      </p:sp>
-      <p:sp>
-        <p:nvSpPr>
-          <p:cNvPr id="21" name="Text 19"/>
-          <p:cNvSpPr/>
-          <p:nvPr/>
-        </p:nvSpPr>
-        <p:spPr>
-          <a:xfrm>
-            <a:off x="7909560" y="3977640"/>
-            <a:ext cx="2926080" cy="182880"/>
-          </a:xfrm>
-          <a:prstGeom prst="rect">
-            <a:avLst/>
-          </a:prstGeom>
-          <a:noFill/>
-          <a:ln/>
-        </p:spPr>
-        <p:txBody>
-          <a:bodyPr wrap="square" lIns="0" tIns="0" rIns="0" bIns="0" rtlCol="0" anchor="ctr"/>
-          <a:lstStyle/>
-          <a:p>
-            <a:pPr algn="ctr" indent="0" marL="0">
-              <a:buNone/>
-            </a:pPr>
-            <a:r>
-              <a:rPr lang="en-US" sz="1000" dirty="0">
-                <a:solidFill>
-                  <a:srgbClr val="003A63"/>
-                </a:solidFill>
-                <a:latin typeface="Aptos" pitchFamily="34" charset="0"/>
-                <a:ea typeface="Aptos" pitchFamily="34" charset="-122"/>
-                <a:cs typeface="Aptos" pitchFamily="34" charset="-120"/>
-              </a:rPr>
-              <a:t>Dependencies visible</a:t>
-            </a:r>
-            <a:endParaRPr lang="en-US" sz="1000" dirty="0"/>
-          </a:p>
-        </p:txBody>
-      </p:sp>
-      <p:sp>
-        <p:nvSpPr>
-          <p:cNvPr id="22" name="Shape 20"/>
           <p:cNvSpPr/>
           <p:nvPr/>
         </p:nvSpPr>
@@ -3832,7 +3669,7 @@
       </p:sp>
       <p:sp>
         <p:nvSpPr>
-          <p:cNvPr id="23" name="Text 21"/>
+          <p:cNvPr id="17" name="Text 15"/>
           <p:cNvSpPr/>
           <p:nvPr/>
         </p:nvSpPr>
@@ -3871,7 +3708,7 @@
       </p:sp>
       <p:sp>
         <p:nvSpPr>
-          <p:cNvPr id="24" name="Text 22"/>
+          <p:cNvPr id="18" name="Text 16"/>
           <p:cNvSpPr/>
           <p:nvPr/>
         </p:nvSpPr>
@@ -4379,13 +4216,11 @@
             </a:avLst>
           </a:prstGeom>
           <a:solidFill>
-            <a:srgbClr val="FFFFFF">
-              <a:alpha val="88000"/>
-            </a:srgbClr>
+            <a:srgbClr val="FFFFFF"/>
           </a:solidFill>
           <a:ln w="12700">
             <a:solidFill>
-              <a:srgbClr val="D6E8F2"/>
+              <a:srgbClr val="B9D7E6"/>
             </a:solidFill>
             <a:prstDash val="solid"/>
           </a:ln>
@@ -4393,30 +4228,42 @@
       </p:sp>
       <p:sp>
         <p:nvSpPr>
-          <p:cNvPr id="14" name="Shape 12"/>
-          <p:cNvSpPr/>
-          <p:nvPr/>
-        </p:nvSpPr>
-        <p:spPr>
-          <a:xfrm>
-            <a:off x="7927848" y="3319272"/>
-            <a:ext cx="792480" cy="749808"/>
-          </a:xfrm>
-          <a:prstGeom prst="roundRect">
-            <a:avLst>
-              <a:gd name="adj" fmla="val 14634"/>
-            </a:avLst>
-          </a:prstGeom>
-          <a:solidFill>
-            <a:srgbClr val="0068B7"/>
-          </a:solidFill>
-          <a:ln w="12700">
-            <a:solidFill>
-              <a:srgbClr val="0068B7"/>
-            </a:solidFill>
-            <a:prstDash val="solid"/>
-          </a:ln>
-        </p:spPr>
+          <p:cNvPr id="14" name="Text 12"/>
+          <p:cNvSpPr/>
+          <p:nvPr/>
+        </p:nvSpPr>
+        <p:spPr>
+          <a:xfrm>
+            <a:off x="7799832" y="2935224"/>
+            <a:ext cx="3145536" cy="256032"/>
+          </a:xfrm>
+          <a:prstGeom prst="rect">
+            <a:avLst/>
+          </a:prstGeom>
+          <a:noFill/>
+          <a:ln/>
+        </p:spPr>
+        <p:txBody>
+          <a:bodyPr wrap="square" lIns="0" tIns="0" rIns="0" bIns="0" rtlCol="0" anchor="ctr"/>
+          <a:lstStyle/>
+          <a:p>
+            <a:pPr indent="0" marL="0">
+              <a:buNone/>
+            </a:pPr>
+            <a:r>
+              <a:rPr lang="en-US" sz="1300" b="1" dirty="0">
+                <a:solidFill>
+                  <a:srgbClr val="0068B7"/>
+                </a:solidFill>
+                <a:latin typeface="Aptos" pitchFamily="34" charset="0"/>
+                <a:ea typeface="Aptos" pitchFamily="34" charset="-122"/>
+                <a:cs typeface="Aptos" pitchFamily="34" charset="-120"/>
+              </a:rPr>
+              <a:t>Concept checkpoints</a:t>
+            </a:r>
+            <a:endParaRPr lang="en-US" sz="1300" dirty="0"/>
+          </a:p>
+        </p:txBody>
       </p:sp>
       <p:sp>
         <p:nvSpPr>
@@ -4426,240 +4273,67 @@
         </p:nvSpPr>
         <p:spPr>
           <a:xfrm>
-            <a:off x="8001000" y="3511296"/>
-            <a:ext cx="646176" cy="310896"/>
-          </a:xfrm>
-          <a:prstGeom prst="rect">
-            <a:avLst/>
-          </a:prstGeom>
-          <a:noFill/>
-          <a:ln/>
-        </p:spPr>
-        <p:txBody>
-          <a:bodyPr wrap="square" lIns="0" tIns="0" rIns="0" bIns="0" rtlCol="0" anchor="ctr">
+            <a:off x="7818120" y="3300984"/>
+            <a:ext cx="3090672" cy="877824"/>
+          </a:xfrm>
+          <a:prstGeom prst="rect">
+            <a:avLst/>
+          </a:prstGeom>
+          <a:noFill/>
+          <a:ln/>
+        </p:spPr>
+        <p:txBody>
+          <a:bodyPr wrap="square" lIns="254" tIns="254" rIns="254" bIns="254" rtlCol="0" anchor="t">
             <a:normAutofit/>
           </a:bodyPr>
           <a:lstStyle/>
           <a:p>
-            <a:pPr algn="ctr" indent="0" marL="0">
-              <a:buNone/>
-            </a:pPr>
-            <a:r>
-              <a:rPr lang="en-US" sz="1500" b="1" dirty="0">
-                <a:solidFill>
-                  <a:srgbClr val="FFFFFF"/>
-                </a:solidFill>
-                <a:latin typeface="Aptos" pitchFamily="34" charset="0"/>
-                <a:ea typeface="Aptos" pitchFamily="34" charset="-122"/>
-                <a:cs typeface="Aptos" pitchFamily="34" charset="-120"/>
-              </a:rPr>
-              <a:t>Plan</a:t>
-            </a:r>
-            <a:endParaRPr lang="en-US" sz="1500" dirty="0"/>
+            <a:r>
+              <a:rPr lang="en-US" sz="1380" dirty="0">
+                <a:solidFill>
+                  <a:srgbClr val="17364A"/>
+                </a:solidFill>
+                <a:latin typeface="Aptos" pitchFamily="34" charset="0"/>
+                <a:ea typeface="Aptos" pitchFamily="34" charset="-122"/>
+                <a:cs typeface="Aptos" pitchFamily="34" charset="-120"/>
+              </a:rPr>
+              <a:t>Human-in-the-loop approval is appropriate for actions that affect records, services,.</a:t>
+            </a:r>
+            <a:endParaRPr lang="en-US" sz="1380" dirty="0"/>
+          </a:p>
+          <a:p>
+            <a:r>
+              <a:rPr lang="en-US" sz="1380" dirty="0">
+                <a:solidFill>
+                  <a:srgbClr val="17364A"/>
+                </a:solidFill>
+                <a:latin typeface="Aptos" pitchFamily="34" charset="0"/>
+                <a:ea typeface="Aptos" pitchFamily="34" charset="-122"/>
+                <a:cs typeface="Aptos" pitchFamily="34" charset="-120"/>
+              </a:rPr>
+              <a:t>Human-on-the-loop monitoring may be appropriate for lower-risk background tasks if users.</a:t>
+            </a:r>
+            <a:endParaRPr lang="en-US" sz="1380" dirty="0"/>
+          </a:p>
+          <a:p>
+            <a:r>
+              <a:rPr lang="en-US" sz="1380" dirty="0">
+                <a:solidFill>
+                  <a:srgbClr val="17364A"/>
+                </a:solidFill>
+                <a:latin typeface="Aptos" pitchFamily="34" charset="0"/>
+                <a:ea typeface="Aptos" pitchFamily="34" charset="-122"/>
+                <a:cs typeface="Aptos" pitchFamily="34" charset="-120"/>
+              </a:rPr>
+              <a:t>Fully automated action should be limited to low-risk, well-tested, reversible tasks.</a:t>
+            </a:r>
+            <a:endParaRPr lang="en-US" sz="1380" dirty="0"/>
           </a:p>
         </p:txBody>
       </p:sp>
       <p:sp>
         <p:nvSpPr>
           <p:cNvPr id="16" name="Shape 14"/>
-          <p:cNvSpPr/>
-          <p:nvPr/>
-        </p:nvSpPr>
-        <p:spPr>
-          <a:xfrm>
-            <a:off x="8976360" y="3319272"/>
-            <a:ext cx="792480" cy="749808"/>
-          </a:xfrm>
-          <a:prstGeom prst="roundRect">
-            <a:avLst>
-              <a:gd name="adj" fmla="val 14634"/>
-            </a:avLst>
-          </a:prstGeom>
-          <a:solidFill>
-            <a:srgbClr val="2F8A28"/>
-          </a:solidFill>
-          <a:ln w="12700">
-            <a:solidFill>
-              <a:srgbClr val="2F8A28"/>
-            </a:solidFill>
-            <a:prstDash val="solid"/>
-          </a:ln>
-        </p:spPr>
-      </p:sp>
-      <p:sp>
-        <p:nvSpPr>
-          <p:cNvPr id="17" name="Text 15"/>
-          <p:cNvSpPr/>
-          <p:nvPr/>
-        </p:nvSpPr>
-        <p:spPr>
-          <a:xfrm>
-            <a:off x="9049512" y="3511296"/>
-            <a:ext cx="646176" cy="310896"/>
-          </a:xfrm>
-          <a:prstGeom prst="rect">
-            <a:avLst/>
-          </a:prstGeom>
-          <a:noFill/>
-          <a:ln/>
-        </p:spPr>
-        <p:txBody>
-          <a:bodyPr wrap="square" lIns="0" tIns="0" rIns="0" bIns="0" rtlCol="0" anchor="ctr">
-            <a:normAutofit/>
-          </a:bodyPr>
-          <a:lstStyle/>
-          <a:p>
-            <a:pPr algn="ctr" indent="0" marL="0">
-              <a:buNone/>
-            </a:pPr>
-            <a:r>
-              <a:rPr lang="en-US" sz="1500" b="1" dirty="0">
-                <a:solidFill>
-                  <a:srgbClr val="FFFFFF"/>
-                </a:solidFill>
-                <a:latin typeface="Aptos" pitchFamily="34" charset="0"/>
-                <a:ea typeface="Aptos" pitchFamily="34" charset="-122"/>
-                <a:cs typeface="Aptos" pitchFamily="34" charset="-120"/>
-              </a:rPr>
-              <a:t>Do</a:t>
-            </a:r>
-            <a:endParaRPr lang="en-US" sz="1500" dirty="0"/>
-          </a:p>
-        </p:txBody>
-      </p:sp>
-      <p:sp>
-        <p:nvSpPr>
-          <p:cNvPr id="18" name="Shape 16"/>
-          <p:cNvSpPr/>
-          <p:nvPr/>
-        </p:nvSpPr>
-        <p:spPr>
-          <a:xfrm>
-            <a:off x="10024872" y="3319272"/>
-            <a:ext cx="792480" cy="749808"/>
-          </a:xfrm>
-          <a:prstGeom prst="roundRect">
-            <a:avLst>
-              <a:gd name="adj" fmla="val 14634"/>
-            </a:avLst>
-          </a:prstGeom>
-          <a:solidFill>
-            <a:srgbClr val="D69A2D"/>
-          </a:solidFill>
-          <a:ln w="12700">
-            <a:solidFill>
-              <a:srgbClr val="D69A2D"/>
-            </a:solidFill>
-            <a:prstDash val="solid"/>
-          </a:ln>
-        </p:spPr>
-      </p:sp>
-      <p:sp>
-        <p:nvSpPr>
-          <p:cNvPr id="19" name="Text 17"/>
-          <p:cNvSpPr/>
-          <p:nvPr/>
-        </p:nvSpPr>
-        <p:spPr>
-          <a:xfrm>
-            <a:off x="10098024" y="3511296"/>
-            <a:ext cx="646176" cy="310896"/>
-          </a:xfrm>
-          <a:prstGeom prst="rect">
-            <a:avLst/>
-          </a:prstGeom>
-          <a:noFill/>
-          <a:ln/>
-        </p:spPr>
-        <p:txBody>
-          <a:bodyPr wrap="square" lIns="0" tIns="0" rIns="0" bIns="0" rtlCol="0" anchor="ctr">
-            <a:normAutofit/>
-          </a:bodyPr>
-          <a:lstStyle/>
-          <a:p>
-            <a:pPr algn="ctr" indent="0" marL="0">
-              <a:buNone/>
-            </a:pPr>
-            <a:r>
-              <a:rPr lang="en-US" sz="1500" b="1" dirty="0">
-                <a:solidFill>
-                  <a:srgbClr val="FFFFFF"/>
-                </a:solidFill>
-                <a:latin typeface="Aptos" pitchFamily="34" charset="0"/>
-                <a:ea typeface="Aptos" pitchFamily="34" charset="-122"/>
-                <a:cs typeface="Aptos" pitchFamily="34" charset="-120"/>
-              </a:rPr>
-              <a:t>Review</a:t>
-            </a:r>
-            <a:endParaRPr lang="en-US" sz="1500" dirty="0"/>
-          </a:p>
-        </p:txBody>
-      </p:sp>
-      <p:sp>
-        <p:nvSpPr>
-          <p:cNvPr id="20" name="Shape 18"/>
-          <p:cNvSpPr/>
-          <p:nvPr/>
-        </p:nvSpPr>
-        <p:spPr>
-          <a:xfrm>
-            <a:off x="8293608" y="4389120"/>
-            <a:ext cx="2157984" cy="0"/>
-          </a:xfrm>
-          <a:prstGeom prst="line">
-            <a:avLst/>
-          </a:prstGeom>
-          <a:noFill/>
-          <a:ln w="25400">
-            <a:solidFill>
-              <a:srgbClr val="8ABBD8"/>
-            </a:solidFill>
-            <a:prstDash val="solid"/>
-          </a:ln>
-        </p:spPr>
-      </p:sp>
-      <p:sp>
-        <p:nvSpPr>
-          <p:cNvPr id="21" name="Text 19"/>
-          <p:cNvSpPr/>
-          <p:nvPr/>
-        </p:nvSpPr>
-        <p:spPr>
-          <a:xfrm>
-            <a:off x="7909560" y="3977640"/>
-            <a:ext cx="2926080" cy="182880"/>
-          </a:xfrm>
-          <a:prstGeom prst="rect">
-            <a:avLst/>
-          </a:prstGeom>
-          <a:noFill/>
-          <a:ln/>
-        </p:spPr>
-        <p:txBody>
-          <a:bodyPr wrap="square" lIns="0" tIns="0" rIns="0" bIns="0" rtlCol="0" anchor="ctr"/>
-          <a:lstStyle/>
-          <a:p>
-            <a:pPr algn="ctr" indent="0" marL="0">
-              <a:buNone/>
-            </a:pPr>
-            <a:r>
-              <a:rPr lang="en-US" sz="1000" dirty="0">
-                <a:solidFill>
-                  <a:srgbClr val="003A63"/>
-                </a:solidFill>
-                <a:latin typeface="Aptos" pitchFamily="34" charset="0"/>
-                <a:ea typeface="Aptos" pitchFamily="34" charset="-122"/>
-                <a:cs typeface="Aptos" pitchFamily="34" charset="-120"/>
-              </a:rPr>
-              <a:t>Dependencies visible</a:t>
-            </a:r>
-            <a:endParaRPr lang="en-US" sz="1000" dirty="0"/>
-          </a:p>
-        </p:txBody>
-      </p:sp>
-      <p:sp>
-        <p:nvSpPr>
-          <p:cNvPr id="22" name="Shape 20"/>
           <p:cNvSpPr/>
           <p:nvPr/>
         </p:nvSpPr>
@@ -4686,7 +4360,7 @@
       </p:sp>
       <p:sp>
         <p:nvSpPr>
-          <p:cNvPr id="23" name="Text 21"/>
+          <p:cNvPr id="17" name="Text 15"/>
           <p:cNvSpPr/>
           <p:nvPr/>
         </p:nvSpPr>
@@ -4725,7 +4399,7 @@
       </p:sp>
       <p:sp>
         <p:nvSpPr>
-          <p:cNvPr id="24" name="Text 22"/>
+          <p:cNvPr id="18" name="Text 16"/>
           <p:cNvSpPr/>
           <p:nvPr/>
         </p:nvSpPr>
@@ -5233,13 +4907,11 @@
             </a:avLst>
           </a:prstGeom>
           <a:solidFill>
-            <a:srgbClr val="FFFFFF">
-              <a:alpha val="88000"/>
-            </a:srgbClr>
+            <a:srgbClr val="FFFFFF"/>
           </a:solidFill>
           <a:ln w="12700">
             <a:solidFill>
-              <a:srgbClr val="D6E8F2"/>
+              <a:srgbClr val="B9D7E6"/>
             </a:solidFill>
             <a:prstDash val="solid"/>
           </a:ln>
@@ -5247,26 +4919,42 @@
       </p:sp>
       <p:sp>
         <p:nvSpPr>
-          <p:cNvPr id="14" name="Shape 12"/>
-          <p:cNvSpPr/>
-          <p:nvPr/>
-        </p:nvSpPr>
-        <p:spPr>
-          <a:xfrm>
-            <a:off x="8046720" y="3108960"/>
-            <a:ext cx="2651760" cy="896112"/>
-          </a:xfrm>
-          <a:prstGeom prst="arc">
-            <a:avLst/>
-          </a:prstGeom>
-          <a:noFill/>
-          <a:ln w="25400">
-            <a:solidFill>
-              <a:srgbClr val="0068B7"/>
-            </a:solidFill>
-            <a:prstDash val="solid"/>
-          </a:ln>
-        </p:spPr>
+          <p:cNvPr id="14" name="Text 12"/>
+          <p:cNvSpPr/>
+          <p:nvPr/>
+        </p:nvSpPr>
+        <p:spPr>
+          <a:xfrm>
+            <a:off x="7799832" y="2935224"/>
+            <a:ext cx="3145536" cy="256032"/>
+          </a:xfrm>
+          <a:prstGeom prst="rect">
+            <a:avLst/>
+          </a:prstGeom>
+          <a:noFill/>
+          <a:ln/>
+        </p:spPr>
+        <p:txBody>
+          <a:bodyPr wrap="square" lIns="0" tIns="0" rIns="0" bIns="0" rtlCol="0" anchor="ctr"/>
+          <a:lstStyle/>
+          <a:p>
+            <a:pPr indent="0" marL="0">
+              <a:buNone/>
+            </a:pPr>
+            <a:r>
+              <a:rPr lang="en-US" sz="1300" b="1" dirty="0">
+                <a:solidFill>
+                  <a:srgbClr val="0068B7"/>
+                </a:solidFill>
+                <a:latin typeface="Aptos" pitchFamily="34" charset="0"/>
+                <a:ea typeface="Aptos" pitchFamily="34" charset="-122"/>
+                <a:cs typeface="Aptos" pitchFamily="34" charset="-120"/>
+              </a:rPr>
+              <a:t>Concept checkpoints</a:t>
+            </a:r>
+            <a:endParaRPr lang="en-US" sz="1300" dirty="0"/>
+          </a:p>
+        </p:txBody>
       </p:sp>
       <p:sp>
         <p:nvSpPr>
@@ -5276,102 +4964,67 @@
         </p:nvSpPr>
         <p:spPr>
           <a:xfrm>
-            <a:off x="7909560" y="3099816"/>
-            <a:ext cx="2926080" cy="256032"/>
-          </a:xfrm>
-          <a:prstGeom prst="rect">
-            <a:avLst/>
-          </a:prstGeom>
-          <a:noFill/>
-          <a:ln/>
-        </p:spPr>
-        <p:txBody>
-          <a:bodyPr wrap="square" lIns="0" tIns="0" rIns="0" bIns="0" rtlCol="0" anchor="ctr"/>
-          <a:lstStyle/>
-          <a:p>
-            <a:pPr algn="ctr" indent="0" marL="0">
-              <a:buNone/>
-            </a:pPr>
-            <a:r>
-              <a:rPr lang="en-US" sz="1500" b="1" dirty="0">
-                <a:solidFill>
-                  <a:srgbClr val="003A63"/>
-                </a:solidFill>
-                <a:latin typeface="Aptos" pitchFamily="34" charset="0"/>
-                <a:ea typeface="Aptos" pitchFamily="34" charset="-122"/>
-                <a:cs typeface="Aptos" pitchFamily="34" charset="-120"/>
-              </a:rPr>
-              <a:t>Risk</a:t>
-            </a:r>
-            <a:endParaRPr lang="en-US" sz="1500" dirty="0"/>
+            <a:off x="7818120" y="3300984"/>
+            <a:ext cx="3090672" cy="877824"/>
+          </a:xfrm>
+          <a:prstGeom prst="rect">
+            <a:avLst/>
+          </a:prstGeom>
+          <a:noFill/>
+          <a:ln/>
+        </p:spPr>
+        <p:txBody>
+          <a:bodyPr wrap="square" lIns="254" tIns="254" rIns="254" bIns="254" rtlCol="0" anchor="t">
+            <a:normAutofit/>
+          </a:bodyPr>
+          <a:lstStyle/>
+          <a:p>
+            <a:r>
+              <a:rPr lang="en-US" sz="1380" dirty="0">
+                <a:solidFill>
+                  <a:srgbClr val="17364A"/>
+                </a:solidFill>
+                <a:latin typeface="Aptos" pitchFamily="34" charset="0"/>
+                <a:ea typeface="Aptos" pitchFamily="34" charset="-122"/>
+                <a:cs typeface="Aptos" pitchFamily="34" charset="-120"/>
+              </a:rPr>
+              <a:t>Unauthorized system access.</a:t>
+            </a:r>
+            <a:endParaRPr lang="en-US" sz="1380" dirty="0"/>
+          </a:p>
+          <a:p>
+            <a:r>
+              <a:rPr lang="en-US" sz="1380" dirty="0">
+                <a:solidFill>
+                  <a:srgbClr val="17364A"/>
+                </a:solidFill>
+                <a:latin typeface="Aptos" pitchFamily="34" charset="0"/>
+                <a:ea typeface="Aptos" pitchFamily="34" charset="-122"/>
+                <a:cs typeface="Aptos" pitchFamily="34" charset="-120"/>
+              </a:rPr>
+              <a:t>Tool access may expose sensitive data or functions.</a:t>
+            </a:r>
+            <a:endParaRPr lang="en-US" sz="1380" dirty="0"/>
+          </a:p>
+          <a:p>
+            <a:r>
+              <a:rPr lang="en-US" sz="1380" dirty="0">
+                <a:solidFill>
+                  <a:srgbClr val="17364A"/>
+                </a:solidFill>
+                <a:latin typeface="Aptos" pitchFamily="34" charset="0"/>
+                <a:ea typeface="Aptos" pitchFamily="34" charset="-122"/>
+                <a:cs typeface="Aptos" pitchFamily="34" charset="-120"/>
+              </a:rPr>
+              <a:t>Guardrails include least privilege, scoped credentials, role-based access, and audit logs.</a:t>
+            </a:r>
+            <a:endParaRPr lang="en-US" sz="1380" dirty="0"/>
           </a:p>
         </p:txBody>
       </p:sp>
       <p:sp>
         <p:nvSpPr>
           <p:cNvPr id="16" name="Shape 14"/>
-          <p:cNvSpPr/>
-          <p:nvPr/>
-        </p:nvSpPr>
-        <p:spPr>
-          <a:xfrm>
-            <a:off x="8366760" y="3639312"/>
-            <a:ext cx="2011680" cy="0"/>
-          </a:xfrm>
-          <a:prstGeom prst="line">
-            <a:avLst/>
-          </a:prstGeom>
-          <a:noFill/>
-          <a:ln w="63500">
-            <a:solidFill>
-              <a:srgbClr val="2F8A28"/>
-            </a:solidFill>
-            <a:prstDash val="solid"/>
-          </a:ln>
-        </p:spPr>
-      </p:sp>
-      <p:sp>
-        <p:nvSpPr>
-          <p:cNvPr id="17" name="Text 15"/>
-          <p:cNvSpPr/>
-          <p:nvPr/>
-        </p:nvSpPr>
-        <p:spPr>
-          <a:xfrm>
-            <a:off x="7909560" y="3849624"/>
-            <a:ext cx="2926080" cy="164592"/>
-          </a:xfrm>
-          <a:prstGeom prst="rect">
-            <a:avLst/>
-          </a:prstGeom>
-          <a:noFill/>
-          <a:ln/>
-        </p:spPr>
-        <p:txBody>
-          <a:bodyPr wrap="square" lIns="0" tIns="0" rIns="0" bIns="0" rtlCol="0" anchor="ctr"/>
-          <a:lstStyle/>
-          <a:p>
-            <a:pPr algn="ctr" indent="0" marL="0">
-              <a:buNone/>
-            </a:pPr>
-            <a:r>
-              <a:rPr lang="en-US" sz="900" dirty="0">
-                <a:solidFill>
-                  <a:srgbClr val="003A63"/>
-                </a:solidFill>
-                <a:latin typeface="Aptos" pitchFamily="34" charset="0"/>
-                <a:ea typeface="Aptos" pitchFamily="34" charset="-122"/>
-                <a:cs typeface="Aptos" pitchFamily="34" charset="-120"/>
-              </a:rPr>
-              <a:t>Human review</a:t>
-            </a:r>
-            <a:endParaRPr lang="en-US" sz="900" dirty="0"/>
-          </a:p>
-        </p:txBody>
-      </p:sp>
-      <p:sp>
-        <p:nvSpPr>
-          <p:cNvPr id="18" name="Shape 16"/>
           <p:cNvSpPr/>
           <p:nvPr/>
         </p:nvSpPr>
@@ -5398,7 +5051,7 @@
       </p:sp>
       <p:sp>
         <p:nvSpPr>
-          <p:cNvPr id="19" name="Text 17"/>
+          <p:cNvPr id="17" name="Text 15"/>
           <p:cNvSpPr/>
           <p:nvPr/>
         </p:nvSpPr>
@@ -5437,7 +5090,7 @@
       </p:sp>
       <p:sp>
         <p:nvSpPr>
-          <p:cNvPr id="20" name="Text 18"/>
+          <p:cNvPr id="18" name="Text 16"/>
           <p:cNvSpPr/>
           <p:nvPr/>
         </p:nvSpPr>
@@ -5945,13 +5598,11 @@
             </a:avLst>
           </a:prstGeom>
           <a:solidFill>
-            <a:srgbClr val="FFFFFF">
-              <a:alpha val="88000"/>
-            </a:srgbClr>
+            <a:srgbClr val="FFFFFF"/>
           </a:solidFill>
           <a:ln w="12700">
             <a:solidFill>
-              <a:srgbClr val="D6E8F2"/>
+              <a:srgbClr val="B9D7E6"/>
             </a:solidFill>
             <a:prstDash val="solid"/>
           </a:ln>
@@ -5959,26 +5610,42 @@
       </p:sp>
       <p:sp>
         <p:nvSpPr>
-          <p:cNvPr id="14" name="Shape 12"/>
-          <p:cNvSpPr/>
-          <p:nvPr/>
-        </p:nvSpPr>
-        <p:spPr>
-          <a:xfrm>
-            <a:off x="8046720" y="3108960"/>
-            <a:ext cx="2651760" cy="896112"/>
-          </a:xfrm>
-          <a:prstGeom prst="arc">
-            <a:avLst/>
-          </a:prstGeom>
-          <a:noFill/>
-          <a:ln w="25400">
-            <a:solidFill>
-              <a:srgbClr val="0068B7"/>
-            </a:solidFill>
-            <a:prstDash val="solid"/>
-          </a:ln>
-        </p:spPr>
+          <p:cNvPr id="14" name="Text 12"/>
+          <p:cNvSpPr/>
+          <p:nvPr/>
+        </p:nvSpPr>
+        <p:spPr>
+          <a:xfrm>
+            <a:off x="7799832" y="2935224"/>
+            <a:ext cx="3145536" cy="256032"/>
+          </a:xfrm>
+          <a:prstGeom prst="rect">
+            <a:avLst/>
+          </a:prstGeom>
+          <a:noFill/>
+          <a:ln/>
+        </p:spPr>
+        <p:txBody>
+          <a:bodyPr wrap="square" lIns="0" tIns="0" rIns="0" bIns="0" rtlCol="0" anchor="ctr"/>
+          <a:lstStyle/>
+          <a:p>
+            <a:pPr indent="0" marL="0">
+              <a:buNone/>
+            </a:pPr>
+            <a:r>
+              <a:rPr lang="en-US" sz="1300" b="1" dirty="0">
+                <a:solidFill>
+                  <a:srgbClr val="0068B7"/>
+                </a:solidFill>
+                <a:latin typeface="Aptos" pitchFamily="34" charset="0"/>
+                <a:ea typeface="Aptos" pitchFamily="34" charset="-122"/>
+                <a:cs typeface="Aptos" pitchFamily="34" charset="-120"/>
+              </a:rPr>
+              <a:t>Concept checkpoints</a:t>
+            </a:r>
+            <a:endParaRPr lang="en-US" sz="1300" dirty="0"/>
+          </a:p>
+        </p:txBody>
       </p:sp>
       <p:sp>
         <p:nvSpPr>
@@ -5988,102 +5655,67 @@
         </p:nvSpPr>
         <p:spPr>
           <a:xfrm>
-            <a:off x="7909560" y="3099816"/>
-            <a:ext cx="2926080" cy="256032"/>
-          </a:xfrm>
-          <a:prstGeom prst="rect">
-            <a:avLst/>
-          </a:prstGeom>
-          <a:noFill/>
-          <a:ln/>
-        </p:spPr>
-        <p:txBody>
-          <a:bodyPr wrap="square" lIns="0" tIns="0" rIns="0" bIns="0" rtlCol="0" anchor="ctr"/>
-          <a:lstStyle/>
-          <a:p>
-            <a:pPr algn="ctr" indent="0" marL="0">
-              <a:buNone/>
-            </a:pPr>
-            <a:r>
-              <a:rPr lang="en-US" sz="1500" b="1" dirty="0">
-                <a:solidFill>
-                  <a:srgbClr val="003A63"/>
-                </a:solidFill>
-                <a:latin typeface="Aptos" pitchFamily="34" charset="0"/>
-                <a:ea typeface="Aptos" pitchFamily="34" charset="-122"/>
-                <a:cs typeface="Aptos" pitchFamily="34" charset="-120"/>
-              </a:rPr>
-              <a:t>Risk</a:t>
-            </a:r>
-            <a:endParaRPr lang="en-US" sz="1500" dirty="0"/>
+            <a:off x="7818120" y="3300984"/>
+            <a:ext cx="3090672" cy="877824"/>
+          </a:xfrm>
+          <a:prstGeom prst="rect">
+            <a:avLst/>
+          </a:prstGeom>
+          <a:noFill/>
+          <a:ln/>
+        </p:spPr>
+        <p:txBody>
+          <a:bodyPr wrap="square" lIns="254" tIns="254" rIns="254" bIns="254" rtlCol="0" anchor="t">
+            <a:normAutofit/>
+          </a:bodyPr>
+          <a:lstStyle/>
+          <a:p>
+            <a:r>
+              <a:rPr lang="en-US" sz="1380" dirty="0">
+                <a:solidFill>
+                  <a:srgbClr val="17364A"/>
+                </a:solidFill>
+                <a:latin typeface="Aptos" pitchFamily="34" charset="0"/>
+                <a:ea typeface="Aptos" pitchFamily="34" charset="-122"/>
+                <a:cs typeface="Aptos" pitchFamily="34" charset="-120"/>
+              </a:rPr>
+              <a:t>Unclear accountability.</a:t>
+            </a:r>
+            <a:endParaRPr lang="en-US" sz="1380" dirty="0"/>
+          </a:p>
+          <a:p>
+            <a:r>
+              <a:rPr lang="en-US" sz="1380" dirty="0">
+                <a:solidFill>
+                  <a:srgbClr val="17364A"/>
+                </a:solidFill>
+                <a:latin typeface="Aptos" pitchFamily="34" charset="0"/>
+                <a:ea typeface="Aptos" pitchFamily="34" charset="-122"/>
+                <a:cs typeface="Aptos" pitchFamily="34" charset="-120"/>
+              </a:rPr>
+              <a:t>Staff may not know who is responsible for agent actions.</a:t>
+            </a:r>
+            <a:endParaRPr lang="en-US" sz="1380" dirty="0"/>
+          </a:p>
+          <a:p>
+            <a:r>
+              <a:rPr lang="en-US" sz="1380" dirty="0">
+                <a:solidFill>
+                  <a:srgbClr val="17364A"/>
+                </a:solidFill>
+                <a:latin typeface="Aptos" pitchFamily="34" charset="0"/>
+                <a:ea typeface="Aptos" pitchFamily="34" charset="-122"/>
+                <a:cs typeface="Aptos" pitchFamily="34" charset="-120"/>
+              </a:rPr>
+              <a:t>Guardrails include role definitions, review records, and governance ownership.</a:t>
+            </a:r>
+            <a:endParaRPr lang="en-US" sz="1380" dirty="0"/>
           </a:p>
         </p:txBody>
       </p:sp>
       <p:sp>
         <p:nvSpPr>
           <p:cNvPr id="16" name="Shape 14"/>
-          <p:cNvSpPr/>
-          <p:nvPr/>
-        </p:nvSpPr>
-        <p:spPr>
-          <a:xfrm>
-            <a:off x="8366760" y="3639312"/>
-            <a:ext cx="2011680" cy="0"/>
-          </a:xfrm>
-          <a:prstGeom prst="line">
-            <a:avLst/>
-          </a:prstGeom>
-          <a:noFill/>
-          <a:ln w="63500">
-            <a:solidFill>
-              <a:srgbClr val="2F8A28"/>
-            </a:solidFill>
-            <a:prstDash val="solid"/>
-          </a:ln>
-        </p:spPr>
-      </p:sp>
-      <p:sp>
-        <p:nvSpPr>
-          <p:cNvPr id="17" name="Text 15"/>
-          <p:cNvSpPr/>
-          <p:nvPr/>
-        </p:nvSpPr>
-        <p:spPr>
-          <a:xfrm>
-            <a:off x="7909560" y="3849624"/>
-            <a:ext cx="2926080" cy="164592"/>
-          </a:xfrm>
-          <a:prstGeom prst="rect">
-            <a:avLst/>
-          </a:prstGeom>
-          <a:noFill/>
-          <a:ln/>
-        </p:spPr>
-        <p:txBody>
-          <a:bodyPr wrap="square" lIns="0" tIns="0" rIns="0" bIns="0" rtlCol="0" anchor="ctr"/>
-          <a:lstStyle/>
-          <a:p>
-            <a:pPr algn="ctr" indent="0" marL="0">
-              <a:buNone/>
-            </a:pPr>
-            <a:r>
-              <a:rPr lang="en-US" sz="900" dirty="0">
-                <a:solidFill>
-                  <a:srgbClr val="003A63"/>
-                </a:solidFill>
-                <a:latin typeface="Aptos" pitchFamily="34" charset="0"/>
-                <a:ea typeface="Aptos" pitchFamily="34" charset="-122"/>
-                <a:cs typeface="Aptos" pitchFamily="34" charset="-120"/>
-              </a:rPr>
-              <a:t>Human review</a:t>
-            </a:r>
-            <a:endParaRPr lang="en-US" sz="900" dirty="0"/>
-          </a:p>
-        </p:txBody>
-      </p:sp>
-      <p:sp>
-        <p:nvSpPr>
-          <p:cNvPr id="18" name="Shape 16"/>
           <p:cNvSpPr/>
           <p:nvPr/>
         </p:nvSpPr>
@@ -6110,7 +5742,7 @@
       </p:sp>
       <p:sp>
         <p:nvSpPr>
-          <p:cNvPr id="19" name="Text 17"/>
+          <p:cNvPr id="17" name="Text 15"/>
           <p:cNvSpPr/>
           <p:nvPr/>
         </p:nvSpPr>
@@ -6149,7 +5781,7 @@
       </p:sp>
       <p:sp>
         <p:nvSpPr>
-          <p:cNvPr id="20" name="Text 18"/>
+          <p:cNvPr id="18" name="Text 16"/>
           <p:cNvSpPr/>
           <p:nvPr/>
         </p:nvSpPr>
@@ -6657,13 +6289,11 @@
             </a:avLst>
           </a:prstGeom>
           <a:solidFill>
-            <a:srgbClr val="FFFFFF">
-              <a:alpha val="88000"/>
-            </a:srgbClr>
+            <a:srgbClr val="FFFFFF"/>
           </a:solidFill>
           <a:ln w="12700">
             <a:solidFill>
-              <a:srgbClr val="D6E8F2"/>
+              <a:srgbClr val="B9D7E6"/>
             </a:solidFill>
             <a:prstDash val="solid"/>
           </a:ln>
@@ -6671,30 +6301,42 @@
       </p:sp>
       <p:sp>
         <p:nvSpPr>
-          <p:cNvPr id="14" name="Shape 12"/>
-          <p:cNvSpPr/>
-          <p:nvPr/>
-        </p:nvSpPr>
-        <p:spPr>
-          <a:xfrm>
-            <a:off x="7927848" y="3319272"/>
-            <a:ext cx="792480" cy="749808"/>
-          </a:xfrm>
-          <a:prstGeom prst="roundRect">
-            <a:avLst>
-              <a:gd name="adj" fmla="val 14634"/>
-            </a:avLst>
-          </a:prstGeom>
-          <a:solidFill>
-            <a:srgbClr val="0068B7"/>
-          </a:solidFill>
-          <a:ln w="12700">
-            <a:solidFill>
-              <a:srgbClr val="0068B7"/>
-            </a:solidFill>
-            <a:prstDash val="solid"/>
-          </a:ln>
-        </p:spPr>
+          <p:cNvPr id="14" name="Text 12"/>
+          <p:cNvSpPr/>
+          <p:nvPr/>
+        </p:nvSpPr>
+        <p:spPr>
+          <a:xfrm>
+            <a:off x="7799832" y="2935224"/>
+            <a:ext cx="3145536" cy="256032"/>
+          </a:xfrm>
+          <a:prstGeom prst="rect">
+            <a:avLst/>
+          </a:prstGeom>
+          <a:noFill/>
+          <a:ln/>
+        </p:spPr>
+        <p:txBody>
+          <a:bodyPr wrap="square" lIns="0" tIns="0" rIns="0" bIns="0" rtlCol="0" anchor="ctr"/>
+          <a:lstStyle/>
+          <a:p>
+            <a:pPr indent="0" marL="0">
+              <a:buNone/>
+            </a:pPr>
+            <a:r>
+              <a:rPr lang="en-US" sz="1300" b="1" dirty="0">
+                <a:solidFill>
+                  <a:srgbClr val="0068B7"/>
+                </a:solidFill>
+                <a:latin typeface="Aptos" pitchFamily="34" charset="0"/>
+                <a:ea typeface="Aptos" pitchFamily="34" charset="-122"/>
+                <a:cs typeface="Aptos" pitchFamily="34" charset="-120"/>
+              </a:rPr>
+              <a:t>Concept checkpoints</a:t>
+            </a:r>
+            <a:endParaRPr lang="en-US" sz="1300" dirty="0"/>
+          </a:p>
+        </p:txBody>
       </p:sp>
       <p:sp>
         <p:nvSpPr>
@@ -6704,240 +6346,67 @@
         </p:nvSpPr>
         <p:spPr>
           <a:xfrm>
-            <a:off x="8001000" y="3511296"/>
-            <a:ext cx="646176" cy="310896"/>
-          </a:xfrm>
-          <a:prstGeom prst="rect">
-            <a:avLst/>
-          </a:prstGeom>
-          <a:noFill/>
-          <a:ln/>
-        </p:spPr>
-        <p:txBody>
-          <a:bodyPr wrap="square" lIns="0" tIns="0" rIns="0" bIns="0" rtlCol="0" anchor="ctr">
+            <a:off x="7818120" y="3300984"/>
+            <a:ext cx="3090672" cy="877824"/>
+          </a:xfrm>
+          <a:prstGeom prst="rect">
+            <a:avLst/>
+          </a:prstGeom>
+          <a:noFill/>
+          <a:ln/>
+        </p:spPr>
+        <p:txBody>
+          <a:bodyPr wrap="square" lIns="254" tIns="254" rIns="254" bIns="254" rtlCol="0" anchor="t">
             <a:normAutofit/>
           </a:bodyPr>
           <a:lstStyle/>
           <a:p>
-            <a:pPr algn="ctr" indent="0" marL="0">
-              <a:buNone/>
-            </a:pPr>
-            <a:r>
-              <a:rPr lang="en-US" sz="1500" b="1" dirty="0">
-                <a:solidFill>
-                  <a:srgbClr val="FFFFFF"/>
-                </a:solidFill>
-                <a:latin typeface="Aptos" pitchFamily="34" charset="0"/>
-                <a:ea typeface="Aptos" pitchFamily="34" charset="-122"/>
-                <a:cs typeface="Aptos" pitchFamily="34" charset="-120"/>
-              </a:rPr>
-              <a:t>Plan</a:t>
-            </a:r>
-            <a:endParaRPr lang="en-US" sz="1500" dirty="0"/>
+            <a:r>
+              <a:rPr lang="en-US" sz="1380" dirty="0">
+                <a:solidFill>
+                  <a:srgbClr val="17364A"/>
+                </a:solidFill>
+                <a:latin typeface="Aptos" pitchFamily="34" charset="0"/>
+                <a:ea typeface="Aptos" pitchFamily="34" charset="-122"/>
+                <a:cs typeface="Aptos" pitchFamily="34" charset="-120"/>
+              </a:rPr>
+              <a:t>Agentic workflows may combine RAG, APIs, prompts, classification models, workflow rules,.</a:t>
+            </a:r>
+            <a:endParaRPr lang="en-US" sz="1380" dirty="0"/>
+          </a:p>
+          <a:p>
+            <a:r>
+              <a:rPr lang="en-US" sz="1380" dirty="0">
+                <a:solidFill>
+                  <a:srgbClr val="17364A"/>
+                </a:solidFill>
+                <a:latin typeface="Aptos" pitchFamily="34" charset="0"/>
+                <a:ea typeface="Aptos" pitchFamily="34" charset="-122"/>
+                <a:cs typeface="Aptos" pitchFamily="34" charset="-120"/>
+              </a:rPr>
+              <a:t>They are least appropriate when the task requires complex judgment, legal interpretation,.</a:t>
+            </a:r>
+            <a:endParaRPr lang="en-US" sz="1380" dirty="0"/>
+          </a:p>
+          <a:p>
+            <a:r>
+              <a:rPr lang="en-US" sz="1380" dirty="0">
+                <a:solidFill>
+                  <a:srgbClr val="17364A"/>
+                </a:solidFill>
+                <a:latin typeface="Aptos" pitchFamily="34" charset="0"/>
+                <a:ea typeface="Aptos" pitchFamily="34" charset="-122"/>
+                <a:cs typeface="Aptos" pitchFamily="34" charset="-120"/>
+              </a:rPr>
+              <a:t>Public health agencies should pilot agentic workflows in limited, low-risk settings before.</a:t>
+            </a:r>
+            <a:endParaRPr lang="en-US" sz="1380" dirty="0"/>
           </a:p>
         </p:txBody>
       </p:sp>
       <p:sp>
         <p:nvSpPr>
           <p:cNvPr id="16" name="Shape 14"/>
-          <p:cNvSpPr/>
-          <p:nvPr/>
-        </p:nvSpPr>
-        <p:spPr>
-          <a:xfrm>
-            <a:off x="8976360" y="3319272"/>
-            <a:ext cx="792480" cy="749808"/>
-          </a:xfrm>
-          <a:prstGeom prst="roundRect">
-            <a:avLst>
-              <a:gd name="adj" fmla="val 14634"/>
-            </a:avLst>
-          </a:prstGeom>
-          <a:solidFill>
-            <a:srgbClr val="2F8A28"/>
-          </a:solidFill>
-          <a:ln w="12700">
-            <a:solidFill>
-              <a:srgbClr val="2F8A28"/>
-            </a:solidFill>
-            <a:prstDash val="solid"/>
-          </a:ln>
-        </p:spPr>
-      </p:sp>
-      <p:sp>
-        <p:nvSpPr>
-          <p:cNvPr id="17" name="Text 15"/>
-          <p:cNvSpPr/>
-          <p:nvPr/>
-        </p:nvSpPr>
-        <p:spPr>
-          <a:xfrm>
-            <a:off x="9049512" y="3511296"/>
-            <a:ext cx="646176" cy="310896"/>
-          </a:xfrm>
-          <a:prstGeom prst="rect">
-            <a:avLst/>
-          </a:prstGeom>
-          <a:noFill/>
-          <a:ln/>
-        </p:spPr>
-        <p:txBody>
-          <a:bodyPr wrap="square" lIns="0" tIns="0" rIns="0" bIns="0" rtlCol="0" anchor="ctr">
-            <a:normAutofit/>
-          </a:bodyPr>
-          <a:lstStyle/>
-          <a:p>
-            <a:pPr algn="ctr" indent="0" marL="0">
-              <a:buNone/>
-            </a:pPr>
-            <a:r>
-              <a:rPr lang="en-US" sz="1500" b="1" dirty="0">
-                <a:solidFill>
-                  <a:srgbClr val="FFFFFF"/>
-                </a:solidFill>
-                <a:latin typeface="Aptos" pitchFamily="34" charset="0"/>
-                <a:ea typeface="Aptos" pitchFamily="34" charset="-122"/>
-                <a:cs typeface="Aptos" pitchFamily="34" charset="-120"/>
-              </a:rPr>
-              <a:t>Do</a:t>
-            </a:r>
-            <a:endParaRPr lang="en-US" sz="1500" dirty="0"/>
-          </a:p>
-        </p:txBody>
-      </p:sp>
-      <p:sp>
-        <p:nvSpPr>
-          <p:cNvPr id="18" name="Shape 16"/>
-          <p:cNvSpPr/>
-          <p:nvPr/>
-        </p:nvSpPr>
-        <p:spPr>
-          <a:xfrm>
-            <a:off x="10024872" y="3319272"/>
-            <a:ext cx="792480" cy="749808"/>
-          </a:xfrm>
-          <a:prstGeom prst="roundRect">
-            <a:avLst>
-              <a:gd name="adj" fmla="val 14634"/>
-            </a:avLst>
-          </a:prstGeom>
-          <a:solidFill>
-            <a:srgbClr val="D69A2D"/>
-          </a:solidFill>
-          <a:ln w="12700">
-            <a:solidFill>
-              <a:srgbClr val="D69A2D"/>
-            </a:solidFill>
-            <a:prstDash val="solid"/>
-          </a:ln>
-        </p:spPr>
-      </p:sp>
-      <p:sp>
-        <p:nvSpPr>
-          <p:cNvPr id="19" name="Text 17"/>
-          <p:cNvSpPr/>
-          <p:nvPr/>
-        </p:nvSpPr>
-        <p:spPr>
-          <a:xfrm>
-            <a:off x="10098024" y="3511296"/>
-            <a:ext cx="646176" cy="310896"/>
-          </a:xfrm>
-          <a:prstGeom prst="rect">
-            <a:avLst/>
-          </a:prstGeom>
-          <a:noFill/>
-          <a:ln/>
-        </p:spPr>
-        <p:txBody>
-          <a:bodyPr wrap="square" lIns="0" tIns="0" rIns="0" bIns="0" rtlCol="0" anchor="ctr">
-            <a:normAutofit/>
-          </a:bodyPr>
-          <a:lstStyle/>
-          <a:p>
-            <a:pPr algn="ctr" indent="0" marL="0">
-              <a:buNone/>
-            </a:pPr>
-            <a:r>
-              <a:rPr lang="en-US" sz="1500" b="1" dirty="0">
-                <a:solidFill>
-                  <a:srgbClr val="FFFFFF"/>
-                </a:solidFill>
-                <a:latin typeface="Aptos" pitchFamily="34" charset="0"/>
-                <a:ea typeface="Aptos" pitchFamily="34" charset="-122"/>
-                <a:cs typeface="Aptos" pitchFamily="34" charset="-120"/>
-              </a:rPr>
-              <a:t>Review</a:t>
-            </a:r>
-            <a:endParaRPr lang="en-US" sz="1500" dirty="0"/>
-          </a:p>
-        </p:txBody>
-      </p:sp>
-      <p:sp>
-        <p:nvSpPr>
-          <p:cNvPr id="20" name="Shape 18"/>
-          <p:cNvSpPr/>
-          <p:nvPr/>
-        </p:nvSpPr>
-        <p:spPr>
-          <a:xfrm>
-            <a:off x="8293608" y="4389120"/>
-            <a:ext cx="2157984" cy="0"/>
-          </a:xfrm>
-          <a:prstGeom prst="line">
-            <a:avLst/>
-          </a:prstGeom>
-          <a:noFill/>
-          <a:ln w="25400">
-            <a:solidFill>
-              <a:srgbClr val="8ABBD8"/>
-            </a:solidFill>
-            <a:prstDash val="solid"/>
-          </a:ln>
-        </p:spPr>
-      </p:sp>
-      <p:sp>
-        <p:nvSpPr>
-          <p:cNvPr id="21" name="Text 19"/>
-          <p:cNvSpPr/>
-          <p:nvPr/>
-        </p:nvSpPr>
-        <p:spPr>
-          <a:xfrm>
-            <a:off x="7909560" y="3977640"/>
-            <a:ext cx="2926080" cy="182880"/>
-          </a:xfrm>
-          <a:prstGeom prst="rect">
-            <a:avLst/>
-          </a:prstGeom>
-          <a:noFill/>
-          <a:ln/>
-        </p:spPr>
-        <p:txBody>
-          <a:bodyPr wrap="square" lIns="0" tIns="0" rIns="0" bIns="0" rtlCol="0" anchor="ctr"/>
-          <a:lstStyle/>
-          <a:p>
-            <a:pPr algn="ctr" indent="0" marL="0">
-              <a:buNone/>
-            </a:pPr>
-            <a:r>
-              <a:rPr lang="en-US" sz="1000" dirty="0">
-                <a:solidFill>
-                  <a:srgbClr val="003A63"/>
-                </a:solidFill>
-                <a:latin typeface="Aptos" pitchFamily="34" charset="0"/>
-                <a:ea typeface="Aptos" pitchFamily="34" charset="-122"/>
-                <a:cs typeface="Aptos" pitchFamily="34" charset="-120"/>
-              </a:rPr>
-              <a:t>Dependencies visible</a:t>
-            </a:r>
-            <a:endParaRPr lang="en-US" sz="1000" dirty="0"/>
-          </a:p>
-        </p:txBody>
-      </p:sp>
-      <p:sp>
-        <p:nvSpPr>
-          <p:cNvPr id="22" name="Shape 20"/>
           <p:cNvSpPr/>
           <p:nvPr/>
         </p:nvSpPr>
@@ -6964,7 +6433,7 @@
       </p:sp>
       <p:sp>
         <p:nvSpPr>
-          <p:cNvPr id="23" name="Text 21"/>
+          <p:cNvPr id="17" name="Text 15"/>
           <p:cNvSpPr/>
           <p:nvPr/>
         </p:nvSpPr>
@@ -7003,7 +6472,7 @@
       </p:sp>
       <p:sp>
         <p:nvSpPr>
-          <p:cNvPr id="24" name="Text 22"/>
+          <p:cNvPr id="18" name="Text 16"/>
           <p:cNvSpPr/>
           <p:nvPr/>
         </p:nvSpPr>
@@ -7511,13 +6980,11 @@
             </a:avLst>
           </a:prstGeom>
           <a:solidFill>
-            <a:srgbClr val="FFFFFF">
-              <a:alpha val="88000"/>
-            </a:srgbClr>
+            <a:srgbClr val="FFFFFF"/>
           </a:solidFill>
           <a:ln w="12700">
             <a:solidFill>
-              <a:srgbClr val="D6E8F2"/>
+              <a:srgbClr val="B9D7E6"/>
             </a:solidFill>
             <a:prstDash val="solid"/>
           </a:ln>
@@ -7525,30 +6992,42 @@
       </p:sp>
       <p:sp>
         <p:nvSpPr>
-          <p:cNvPr id="14" name="Shape 12"/>
-          <p:cNvSpPr/>
-          <p:nvPr/>
-        </p:nvSpPr>
-        <p:spPr>
-          <a:xfrm>
-            <a:off x="7927848" y="3319272"/>
-            <a:ext cx="792480" cy="749808"/>
-          </a:xfrm>
-          <a:prstGeom prst="roundRect">
-            <a:avLst>
-              <a:gd name="adj" fmla="val 14634"/>
-            </a:avLst>
-          </a:prstGeom>
-          <a:solidFill>
-            <a:srgbClr val="0068B7"/>
-          </a:solidFill>
-          <a:ln w="12700">
-            <a:solidFill>
-              <a:srgbClr val="0068B7"/>
-            </a:solidFill>
-            <a:prstDash val="solid"/>
-          </a:ln>
-        </p:spPr>
+          <p:cNvPr id="14" name="Text 12"/>
+          <p:cNvSpPr/>
+          <p:nvPr/>
+        </p:nvSpPr>
+        <p:spPr>
+          <a:xfrm>
+            <a:off x="7799832" y="2935224"/>
+            <a:ext cx="3145536" cy="256032"/>
+          </a:xfrm>
+          <a:prstGeom prst="rect">
+            <a:avLst/>
+          </a:prstGeom>
+          <a:noFill/>
+          <a:ln/>
+        </p:spPr>
+        <p:txBody>
+          <a:bodyPr wrap="square" lIns="0" tIns="0" rIns="0" bIns="0" rtlCol="0" anchor="ctr"/>
+          <a:lstStyle/>
+          <a:p>
+            <a:pPr indent="0" marL="0">
+              <a:buNone/>
+            </a:pPr>
+            <a:r>
+              <a:rPr lang="en-US" sz="1300" b="1" dirty="0">
+                <a:solidFill>
+                  <a:srgbClr val="0068B7"/>
+                </a:solidFill>
+                <a:latin typeface="Aptos" pitchFamily="34" charset="0"/>
+                <a:ea typeface="Aptos" pitchFamily="34" charset="-122"/>
+                <a:cs typeface="Aptos" pitchFamily="34" charset="-120"/>
+              </a:rPr>
+              <a:t>Concept checkpoints</a:t>
+            </a:r>
+            <a:endParaRPr lang="en-US" sz="1300" dirty="0"/>
+          </a:p>
+        </p:txBody>
       </p:sp>
       <p:sp>
         <p:nvSpPr>
@@ -7558,240 +7037,67 @@
         </p:nvSpPr>
         <p:spPr>
           <a:xfrm>
-            <a:off x="8001000" y="3511296"/>
-            <a:ext cx="646176" cy="310896"/>
-          </a:xfrm>
-          <a:prstGeom prst="rect">
-            <a:avLst/>
-          </a:prstGeom>
-          <a:noFill/>
-          <a:ln/>
-        </p:spPr>
-        <p:txBody>
-          <a:bodyPr wrap="square" lIns="0" tIns="0" rIns="0" bIns="0" rtlCol="0" anchor="ctr">
+            <a:off x="7818120" y="3300984"/>
+            <a:ext cx="3090672" cy="877824"/>
+          </a:xfrm>
+          <a:prstGeom prst="rect">
+            <a:avLst/>
+          </a:prstGeom>
+          <a:noFill/>
+          <a:ln/>
+        </p:spPr>
+        <p:txBody>
+          <a:bodyPr wrap="square" lIns="254" tIns="254" rIns="254" bIns="254" rtlCol="0" anchor="t">
             <a:normAutofit/>
           </a:bodyPr>
           <a:lstStyle/>
           <a:p>
-            <a:pPr algn="ctr" indent="0" marL="0">
-              <a:buNone/>
-            </a:pPr>
-            <a:r>
-              <a:rPr lang="en-US" sz="1500" b="1" dirty="0">
-                <a:solidFill>
-                  <a:srgbClr val="FFFFFF"/>
-                </a:solidFill>
-                <a:latin typeface="Aptos" pitchFamily="34" charset="0"/>
-                <a:ea typeface="Aptos" pitchFamily="34" charset="-122"/>
-                <a:cs typeface="Aptos" pitchFamily="34" charset="-120"/>
-              </a:rPr>
-              <a:t>Plan</a:t>
-            </a:r>
-            <a:endParaRPr lang="en-US" sz="1500" dirty="0"/>
+            <a:r>
+              <a:rPr lang="en-US" sz="1380" dirty="0">
+                <a:solidFill>
+                  <a:srgbClr val="17364A"/>
+                </a:solidFill>
+                <a:latin typeface="Aptos" pitchFamily="34" charset="0"/>
+                <a:ea typeface="Aptos" pitchFamily="34" charset="-122"/>
+                <a:cs typeface="Aptos" pitchFamily="34" charset="-120"/>
+              </a:rPr>
+              <a:t>What goal would the agent pursue, and how narrowly can it be defined?</a:t>
+            </a:r>
+            <a:endParaRPr lang="en-US" sz="1380" dirty="0"/>
+          </a:p>
+          <a:p>
+            <a:r>
+              <a:rPr lang="en-US" sz="1380" dirty="0">
+                <a:solidFill>
+                  <a:srgbClr val="17364A"/>
+                </a:solidFill>
+                <a:latin typeface="Aptos" pitchFamily="34" charset="0"/>
+                <a:ea typeface="Aptos" pitchFamily="34" charset="-122"/>
+                <a:cs typeface="Aptos" pitchFamily="34" charset="-120"/>
+              </a:rPr>
+              <a:t>Which tools or systems would the agent access?</a:t>
+            </a:r>
+            <a:endParaRPr lang="en-US" sz="1380" dirty="0"/>
+          </a:p>
+          <a:p>
+            <a:r>
+              <a:rPr lang="en-US" sz="1380" dirty="0">
+                <a:solidFill>
+                  <a:srgbClr val="17364A"/>
+                </a:solidFill>
+                <a:latin typeface="Aptos" pitchFamily="34" charset="0"/>
+                <a:ea typeface="Aptos" pitchFamily="34" charset="-122"/>
+                <a:cs typeface="Aptos" pitchFamily="34" charset="-120"/>
+              </a:rPr>
+              <a:t>Which actions are allowed, prohibited, or require human approval?</a:t>
+            </a:r>
+            <a:endParaRPr lang="en-US" sz="1380" dirty="0"/>
           </a:p>
         </p:txBody>
       </p:sp>
       <p:sp>
         <p:nvSpPr>
           <p:cNvPr id="16" name="Shape 14"/>
-          <p:cNvSpPr/>
-          <p:nvPr/>
-        </p:nvSpPr>
-        <p:spPr>
-          <a:xfrm>
-            <a:off x="8976360" y="3319272"/>
-            <a:ext cx="792480" cy="749808"/>
-          </a:xfrm>
-          <a:prstGeom prst="roundRect">
-            <a:avLst>
-              <a:gd name="adj" fmla="val 14634"/>
-            </a:avLst>
-          </a:prstGeom>
-          <a:solidFill>
-            <a:srgbClr val="2F8A28"/>
-          </a:solidFill>
-          <a:ln w="12700">
-            <a:solidFill>
-              <a:srgbClr val="2F8A28"/>
-            </a:solidFill>
-            <a:prstDash val="solid"/>
-          </a:ln>
-        </p:spPr>
-      </p:sp>
-      <p:sp>
-        <p:nvSpPr>
-          <p:cNvPr id="17" name="Text 15"/>
-          <p:cNvSpPr/>
-          <p:nvPr/>
-        </p:nvSpPr>
-        <p:spPr>
-          <a:xfrm>
-            <a:off x="9049512" y="3511296"/>
-            <a:ext cx="646176" cy="310896"/>
-          </a:xfrm>
-          <a:prstGeom prst="rect">
-            <a:avLst/>
-          </a:prstGeom>
-          <a:noFill/>
-          <a:ln/>
-        </p:spPr>
-        <p:txBody>
-          <a:bodyPr wrap="square" lIns="0" tIns="0" rIns="0" bIns="0" rtlCol="0" anchor="ctr">
-            <a:normAutofit/>
-          </a:bodyPr>
-          <a:lstStyle/>
-          <a:p>
-            <a:pPr algn="ctr" indent="0" marL="0">
-              <a:buNone/>
-            </a:pPr>
-            <a:r>
-              <a:rPr lang="en-US" sz="1500" b="1" dirty="0">
-                <a:solidFill>
-                  <a:srgbClr val="FFFFFF"/>
-                </a:solidFill>
-                <a:latin typeface="Aptos" pitchFamily="34" charset="0"/>
-                <a:ea typeface="Aptos" pitchFamily="34" charset="-122"/>
-                <a:cs typeface="Aptos" pitchFamily="34" charset="-120"/>
-              </a:rPr>
-              <a:t>Do</a:t>
-            </a:r>
-            <a:endParaRPr lang="en-US" sz="1500" dirty="0"/>
-          </a:p>
-        </p:txBody>
-      </p:sp>
-      <p:sp>
-        <p:nvSpPr>
-          <p:cNvPr id="18" name="Shape 16"/>
-          <p:cNvSpPr/>
-          <p:nvPr/>
-        </p:nvSpPr>
-        <p:spPr>
-          <a:xfrm>
-            <a:off x="10024872" y="3319272"/>
-            <a:ext cx="792480" cy="749808"/>
-          </a:xfrm>
-          <a:prstGeom prst="roundRect">
-            <a:avLst>
-              <a:gd name="adj" fmla="val 14634"/>
-            </a:avLst>
-          </a:prstGeom>
-          <a:solidFill>
-            <a:srgbClr val="D69A2D"/>
-          </a:solidFill>
-          <a:ln w="12700">
-            <a:solidFill>
-              <a:srgbClr val="D69A2D"/>
-            </a:solidFill>
-            <a:prstDash val="solid"/>
-          </a:ln>
-        </p:spPr>
-      </p:sp>
-      <p:sp>
-        <p:nvSpPr>
-          <p:cNvPr id="19" name="Text 17"/>
-          <p:cNvSpPr/>
-          <p:nvPr/>
-        </p:nvSpPr>
-        <p:spPr>
-          <a:xfrm>
-            <a:off x="10098024" y="3511296"/>
-            <a:ext cx="646176" cy="310896"/>
-          </a:xfrm>
-          <a:prstGeom prst="rect">
-            <a:avLst/>
-          </a:prstGeom>
-          <a:noFill/>
-          <a:ln/>
-        </p:spPr>
-        <p:txBody>
-          <a:bodyPr wrap="square" lIns="0" tIns="0" rIns="0" bIns="0" rtlCol="0" anchor="ctr">
-            <a:normAutofit/>
-          </a:bodyPr>
-          <a:lstStyle/>
-          <a:p>
-            <a:pPr algn="ctr" indent="0" marL="0">
-              <a:buNone/>
-            </a:pPr>
-            <a:r>
-              <a:rPr lang="en-US" sz="1500" b="1" dirty="0">
-                <a:solidFill>
-                  <a:srgbClr val="FFFFFF"/>
-                </a:solidFill>
-                <a:latin typeface="Aptos" pitchFamily="34" charset="0"/>
-                <a:ea typeface="Aptos" pitchFamily="34" charset="-122"/>
-                <a:cs typeface="Aptos" pitchFamily="34" charset="-120"/>
-              </a:rPr>
-              <a:t>Review</a:t>
-            </a:r>
-            <a:endParaRPr lang="en-US" sz="1500" dirty="0"/>
-          </a:p>
-        </p:txBody>
-      </p:sp>
-      <p:sp>
-        <p:nvSpPr>
-          <p:cNvPr id="20" name="Shape 18"/>
-          <p:cNvSpPr/>
-          <p:nvPr/>
-        </p:nvSpPr>
-        <p:spPr>
-          <a:xfrm>
-            <a:off x="8293608" y="4389120"/>
-            <a:ext cx="2157984" cy="0"/>
-          </a:xfrm>
-          <a:prstGeom prst="line">
-            <a:avLst/>
-          </a:prstGeom>
-          <a:noFill/>
-          <a:ln w="25400">
-            <a:solidFill>
-              <a:srgbClr val="8ABBD8"/>
-            </a:solidFill>
-            <a:prstDash val="solid"/>
-          </a:ln>
-        </p:spPr>
-      </p:sp>
-      <p:sp>
-        <p:nvSpPr>
-          <p:cNvPr id="21" name="Text 19"/>
-          <p:cNvSpPr/>
-          <p:nvPr/>
-        </p:nvSpPr>
-        <p:spPr>
-          <a:xfrm>
-            <a:off x="7909560" y="3977640"/>
-            <a:ext cx="2926080" cy="182880"/>
-          </a:xfrm>
-          <a:prstGeom prst="rect">
-            <a:avLst/>
-          </a:prstGeom>
-          <a:noFill/>
-          <a:ln/>
-        </p:spPr>
-        <p:txBody>
-          <a:bodyPr wrap="square" lIns="0" tIns="0" rIns="0" bIns="0" rtlCol="0" anchor="ctr"/>
-          <a:lstStyle/>
-          <a:p>
-            <a:pPr algn="ctr" indent="0" marL="0">
-              <a:buNone/>
-            </a:pPr>
-            <a:r>
-              <a:rPr lang="en-US" sz="1000" dirty="0">
-                <a:solidFill>
-                  <a:srgbClr val="003A63"/>
-                </a:solidFill>
-                <a:latin typeface="Aptos" pitchFamily="34" charset="0"/>
-                <a:ea typeface="Aptos" pitchFamily="34" charset="-122"/>
-                <a:cs typeface="Aptos" pitchFamily="34" charset="-120"/>
-              </a:rPr>
-              <a:t>Dependencies visible</a:t>
-            </a:r>
-            <a:endParaRPr lang="en-US" sz="1000" dirty="0"/>
-          </a:p>
-        </p:txBody>
-      </p:sp>
-      <p:sp>
-        <p:nvSpPr>
-          <p:cNvPr id="22" name="Shape 20"/>
           <p:cNvSpPr/>
           <p:nvPr/>
         </p:nvSpPr>
@@ -7818,7 +7124,7 @@
       </p:sp>
       <p:sp>
         <p:nvSpPr>
-          <p:cNvPr id="23" name="Text 21"/>
+          <p:cNvPr id="17" name="Text 15"/>
           <p:cNvSpPr/>
           <p:nvPr/>
         </p:nvSpPr>
@@ -7857,7 +7163,7 @@
       </p:sp>
       <p:sp>
         <p:nvSpPr>
-          <p:cNvPr id="24" name="Text 22"/>
+          <p:cNvPr id="18" name="Text 16"/>
           <p:cNvSpPr/>
           <p:nvPr/>
         </p:nvSpPr>
@@ -8351,13 +7657,11 @@
             </a:avLst>
           </a:prstGeom>
           <a:solidFill>
-            <a:srgbClr val="FFFFFF">
-              <a:alpha val="88000"/>
-            </a:srgbClr>
+            <a:srgbClr val="FFFFFF"/>
           </a:solidFill>
           <a:ln w="12700">
             <a:solidFill>
-              <a:srgbClr val="D6E8F2"/>
+              <a:srgbClr val="B9D7E6"/>
             </a:solidFill>
             <a:prstDash val="solid"/>
           </a:ln>
@@ -8365,30 +7669,42 @@
       </p:sp>
       <p:sp>
         <p:nvSpPr>
-          <p:cNvPr id="14" name="Shape 12"/>
-          <p:cNvSpPr/>
-          <p:nvPr/>
-        </p:nvSpPr>
-        <p:spPr>
-          <a:xfrm>
-            <a:off x="7927848" y="3319272"/>
-            <a:ext cx="792480" cy="749808"/>
-          </a:xfrm>
-          <a:prstGeom prst="roundRect">
-            <a:avLst>
-              <a:gd name="adj" fmla="val 14634"/>
-            </a:avLst>
-          </a:prstGeom>
-          <a:solidFill>
-            <a:srgbClr val="0068B7"/>
-          </a:solidFill>
-          <a:ln w="12700">
-            <a:solidFill>
-              <a:srgbClr val="0068B7"/>
-            </a:solidFill>
-            <a:prstDash val="solid"/>
-          </a:ln>
-        </p:spPr>
+          <p:cNvPr id="14" name="Text 12"/>
+          <p:cNvSpPr/>
+          <p:nvPr/>
+        </p:nvSpPr>
+        <p:spPr>
+          <a:xfrm>
+            <a:off x="7799832" y="2935224"/>
+            <a:ext cx="3145536" cy="256032"/>
+          </a:xfrm>
+          <a:prstGeom prst="rect">
+            <a:avLst/>
+          </a:prstGeom>
+          <a:noFill/>
+          <a:ln/>
+        </p:spPr>
+        <p:txBody>
+          <a:bodyPr wrap="square" lIns="0" tIns="0" rIns="0" bIns="0" rtlCol="0" anchor="ctr"/>
+          <a:lstStyle/>
+          <a:p>
+            <a:pPr indent="0" marL="0">
+              <a:buNone/>
+            </a:pPr>
+            <a:r>
+              <a:rPr lang="en-US" sz="1300" b="1" dirty="0">
+                <a:solidFill>
+                  <a:srgbClr val="0068B7"/>
+                </a:solidFill>
+                <a:latin typeface="Aptos" pitchFamily="34" charset="0"/>
+                <a:ea typeface="Aptos" pitchFamily="34" charset="-122"/>
+                <a:cs typeface="Aptos" pitchFamily="34" charset="-120"/>
+              </a:rPr>
+              <a:t>Concept checkpoints</a:t>
+            </a:r>
+            <a:endParaRPr lang="en-US" sz="1300" dirty="0"/>
+          </a:p>
+        </p:txBody>
       </p:sp>
       <p:sp>
         <p:nvSpPr>
@@ -8398,240 +7714,53 @@
         </p:nvSpPr>
         <p:spPr>
           <a:xfrm>
-            <a:off x="8001000" y="3511296"/>
-            <a:ext cx="646176" cy="310896"/>
-          </a:xfrm>
-          <a:prstGeom prst="rect">
-            <a:avLst/>
-          </a:prstGeom>
-          <a:noFill/>
-          <a:ln/>
-        </p:spPr>
-        <p:txBody>
-          <a:bodyPr wrap="square" lIns="0" tIns="0" rIns="0" bIns="0" rtlCol="0" anchor="ctr">
+            <a:off x="7818120" y="3300984"/>
+            <a:ext cx="3090672" cy="877824"/>
+          </a:xfrm>
+          <a:prstGeom prst="rect">
+            <a:avLst/>
+          </a:prstGeom>
+          <a:noFill/>
+          <a:ln/>
+        </p:spPr>
+        <p:txBody>
+          <a:bodyPr wrap="square" lIns="254" tIns="254" rIns="254" bIns="254" rtlCol="0" anchor="t">
             <a:normAutofit/>
           </a:bodyPr>
           <a:lstStyle/>
           <a:p>
-            <a:pPr algn="ctr" indent="0" marL="0">
-              <a:buNone/>
-            </a:pPr>
-            <a:r>
-              <a:rPr lang="en-US" sz="1500" b="1" dirty="0">
-                <a:solidFill>
-                  <a:srgbClr val="FFFFFF"/>
-                </a:solidFill>
-                <a:latin typeface="Aptos" pitchFamily="34" charset="0"/>
-                <a:ea typeface="Aptos" pitchFamily="34" charset="-122"/>
-                <a:cs typeface="Aptos" pitchFamily="34" charset="-120"/>
-              </a:rPr>
-              <a:t>Plan</a:t>
-            </a:r>
-            <a:endParaRPr lang="en-US" sz="1500" dirty="0"/>
+            <a:r>
+              <a:rPr lang="en-US" sz="1380" dirty="0">
+                <a:solidFill>
+                  <a:srgbClr val="17364A"/>
+                </a:solidFill>
+                <a:latin typeface="Aptos" pitchFamily="34" charset="0"/>
+                <a:ea typeface="Aptos" pitchFamily="34" charset="-122"/>
+                <a:cs typeface="Aptos" pitchFamily="34" charset="-120"/>
+              </a:rPr>
+              <a:t>What logs are needed to reconstruct agent behavior?</a:t>
+            </a:r>
+            <a:endParaRPr lang="en-US" sz="1380" dirty="0"/>
+          </a:p>
+          <a:p>
+            <a:r>
+              <a:rPr lang="en-US" sz="1380" dirty="0">
+                <a:solidFill>
+                  <a:srgbClr val="17364A"/>
+                </a:solidFill>
+                <a:latin typeface="Aptos" pitchFamily="34" charset="0"/>
+                <a:ea typeface="Aptos" pitchFamily="34" charset="-122"/>
+                <a:cs typeface="Aptos" pitchFamily="34" charset="-120"/>
+              </a:rPr>
+              <a:t>What rollback or correction process is needed if the agent makes an error?</a:t>
+            </a:r>
+            <a:endParaRPr lang="en-US" sz="1380" dirty="0"/>
           </a:p>
         </p:txBody>
       </p:sp>
       <p:sp>
         <p:nvSpPr>
           <p:cNvPr id="16" name="Shape 14"/>
-          <p:cNvSpPr/>
-          <p:nvPr/>
-        </p:nvSpPr>
-        <p:spPr>
-          <a:xfrm>
-            <a:off x="8976360" y="3319272"/>
-            <a:ext cx="792480" cy="749808"/>
-          </a:xfrm>
-          <a:prstGeom prst="roundRect">
-            <a:avLst>
-              <a:gd name="adj" fmla="val 14634"/>
-            </a:avLst>
-          </a:prstGeom>
-          <a:solidFill>
-            <a:srgbClr val="2F8A28"/>
-          </a:solidFill>
-          <a:ln w="12700">
-            <a:solidFill>
-              <a:srgbClr val="2F8A28"/>
-            </a:solidFill>
-            <a:prstDash val="solid"/>
-          </a:ln>
-        </p:spPr>
-      </p:sp>
-      <p:sp>
-        <p:nvSpPr>
-          <p:cNvPr id="17" name="Text 15"/>
-          <p:cNvSpPr/>
-          <p:nvPr/>
-        </p:nvSpPr>
-        <p:spPr>
-          <a:xfrm>
-            <a:off x="9049512" y="3511296"/>
-            <a:ext cx="646176" cy="310896"/>
-          </a:xfrm>
-          <a:prstGeom prst="rect">
-            <a:avLst/>
-          </a:prstGeom>
-          <a:noFill/>
-          <a:ln/>
-        </p:spPr>
-        <p:txBody>
-          <a:bodyPr wrap="square" lIns="0" tIns="0" rIns="0" bIns="0" rtlCol="0" anchor="ctr">
-            <a:normAutofit/>
-          </a:bodyPr>
-          <a:lstStyle/>
-          <a:p>
-            <a:pPr algn="ctr" indent="0" marL="0">
-              <a:buNone/>
-            </a:pPr>
-            <a:r>
-              <a:rPr lang="en-US" sz="1500" b="1" dirty="0">
-                <a:solidFill>
-                  <a:srgbClr val="FFFFFF"/>
-                </a:solidFill>
-                <a:latin typeface="Aptos" pitchFamily="34" charset="0"/>
-                <a:ea typeface="Aptos" pitchFamily="34" charset="-122"/>
-                <a:cs typeface="Aptos" pitchFamily="34" charset="-120"/>
-              </a:rPr>
-              <a:t>Do</a:t>
-            </a:r>
-            <a:endParaRPr lang="en-US" sz="1500" dirty="0"/>
-          </a:p>
-        </p:txBody>
-      </p:sp>
-      <p:sp>
-        <p:nvSpPr>
-          <p:cNvPr id="18" name="Shape 16"/>
-          <p:cNvSpPr/>
-          <p:nvPr/>
-        </p:nvSpPr>
-        <p:spPr>
-          <a:xfrm>
-            <a:off x="10024872" y="3319272"/>
-            <a:ext cx="792480" cy="749808"/>
-          </a:xfrm>
-          <a:prstGeom prst="roundRect">
-            <a:avLst>
-              <a:gd name="adj" fmla="val 14634"/>
-            </a:avLst>
-          </a:prstGeom>
-          <a:solidFill>
-            <a:srgbClr val="D69A2D"/>
-          </a:solidFill>
-          <a:ln w="12700">
-            <a:solidFill>
-              <a:srgbClr val="D69A2D"/>
-            </a:solidFill>
-            <a:prstDash val="solid"/>
-          </a:ln>
-        </p:spPr>
-      </p:sp>
-      <p:sp>
-        <p:nvSpPr>
-          <p:cNvPr id="19" name="Text 17"/>
-          <p:cNvSpPr/>
-          <p:nvPr/>
-        </p:nvSpPr>
-        <p:spPr>
-          <a:xfrm>
-            <a:off x="10098024" y="3511296"/>
-            <a:ext cx="646176" cy="310896"/>
-          </a:xfrm>
-          <a:prstGeom prst="rect">
-            <a:avLst/>
-          </a:prstGeom>
-          <a:noFill/>
-          <a:ln/>
-        </p:spPr>
-        <p:txBody>
-          <a:bodyPr wrap="square" lIns="0" tIns="0" rIns="0" bIns="0" rtlCol="0" anchor="ctr">
-            <a:normAutofit/>
-          </a:bodyPr>
-          <a:lstStyle/>
-          <a:p>
-            <a:pPr algn="ctr" indent="0" marL="0">
-              <a:buNone/>
-            </a:pPr>
-            <a:r>
-              <a:rPr lang="en-US" sz="1500" b="1" dirty="0">
-                <a:solidFill>
-                  <a:srgbClr val="FFFFFF"/>
-                </a:solidFill>
-                <a:latin typeface="Aptos" pitchFamily="34" charset="0"/>
-                <a:ea typeface="Aptos" pitchFamily="34" charset="-122"/>
-                <a:cs typeface="Aptos" pitchFamily="34" charset="-120"/>
-              </a:rPr>
-              <a:t>Review</a:t>
-            </a:r>
-            <a:endParaRPr lang="en-US" sz="1500" dirty="0"/>
-          </a:p>
-        </p:txBody>
-      </p:sp>
-      <p:sp>
-        <p:nvSpPr>
-          <p:cNvPr id="20" name="Shape 18"/>
-          <p:cNvSpPr/>
-          <p:nvPr/>
-        </p:nvSpPr>
-        <p:spPr>
-          <a:xfrm>
-            <a:off x="8293608" y="4389120"/>
-            <a:ext cx="2157984" cy="0"/>
-          </a:xfrm>
-          <a:prstGeom prst="line">
-            <a:avLst/>
-          </a:prstGeom>
-          <a:noFill/>
-          <a:ln w="25400">
-            <a:solidFill>
-              <a:srgbClr val="8ABBD8"/>
-            </a:solidFill>
-            <a:prstDash val="solid"/>
-          </a:ln>
-        </p:spPr>
-      </p:sp>
-      <p:sp>
-        <p:nvSpPr>
-          <p:cNvPr id="21" name="Text 19"/>
-          <p:cNvSpPr/>
-          <p:nvPr/>
-        </p:nvSpPr>
-        <p:spPr>
-          <a:xfrm>
-            <a:off x="7909560" y="3977640"/>
-            <a:ext cx="2926080" cy="182880"/>
-          </a:xfrm>
-          <a:prstGeom prst="rect">
-            <a:avLst/>
-          </a:prstGeom>
-          <a:noFill/>
-          <a:ln/>
-        </p:spPr>
-        <p:txBody>
-          <a:bodyPr wrap="square" lIns="0" tIns="0" rIns="0" bIns="0" rtlCol="0" anchor="ctr"/>
-          <a:lstStyle/>
-          <a:p>
-            <a:pPr algn="ctr" indent="0" marL="0">
-              <a:buNone/>
-            </a:pPr>
-            <a:r>
-              <a:rPr lang="en-US" sz="1000" dirty="0">
-                <a:solidFill>
-                  <a:srgbClr val="003A63"/>
-                </a:solidFill>
-                <a:latin typeface="Aptos" pitchFamily="34" charset="0"/>
-                <a:ea typeface="Aptos" pitchFamily="34" charset="-122"/>
-                <a:cs typeface="Aptos" pitchFamily="34" charset="-120"/>
-              </a:rPr>
-              <a:t>Dependencies visible</a:t>
-            </a:r>
-            <a:endParaRPr lang="en-US" sz="1000" dirty="0"/>
-          </a:p>
-        </p:txBody>
-      </p:sp>
-      <p:sp>
-        <p:nvSpPr>
-          <p:cNvPr id="22" name="Shape 20"/>
           <p:cNvSpPr/>
           <p:nvPr/>
         </p:nvSpPr>
@@ -8658,7 +7787,7 @@
       </p:sp>
       <p:sp>
         <p:nvSpPr>
-          <p:cNvPr id="23" name="Text 21"/>
+          <p:cNvPr id="17" name="Text 15"/>
           <p:cNvSpPr/>
           <p:nvPr/>
         </p:nvSpPr>
@@ -8697,7 +7826,7 @@
       </p:sp>
       <p:sp>
         <p:nvSpPr>
-          <p:cNvPr id="24" name="Text 22"/>
+          <p:cNvPr id="18" name="Text 16"/>
           <p:cNvSpPr/>
           <p:nvPr/>
         </p:nvSpPr>
@@ -9205,13 +8334,11 @@
             </a:avLst>
           </a:prstGeom>
           <a:solidFill>
-            <a:srgbClr val="FFFFFF">
-              <a:alpha val="88000"/>
-            </a:srgbClr>
+            <a:srgbClr val="FFFFFF"/>
           </a:solidFill>
           <a:ln w="12700">
             <a:solidFill>
-              <a:srgbClr val="D6E8F2"/>
+              <a:srgbClr val="B9D7E6"/>
             </a:solidFill>
             <a:prstDash val="solid"/>
           </a:ln>
@@ -9219,30 +8346,42 @@
       </p:sp>
       <p:sp>
         <p:nvSpPr>
-          <p:cNvPr id="14" name="Shape 12"/>
-          <p:cNvSpPr/>
-          <p:nvPr/>
-        </p:nvSpPr>
-        <p:spPr>
-          <a:xfrm>
-            <a:off x="7927848" y="3319272"/>
-            <a:ext cx="792480" cy="749808"/>
-          </a:xfrm>
-          <a:prstGeom prst="roundRect">
-            <a:avLst>
-              <a:gd name="adj" fmla="val 14634"/>
-            </a:avLst>
-          </a:prstGeom>
-          <a:solidFill>
-            <a:srgbClr val="0068B7"/>
-          </a:solidFill>
-          <a:ln w="12700">
-            <a:solidFill>
-              <a:srgbClr val="0068B7"/>
-            </a:solidFill>
-            <a:prstDash val="solid"/>
-          </a:ln>
-        </p:spPr>
+          <p:cNvPr id="14" name="Text 12"/>
+          <p:cNvSpPr/>
+          <p:nvPr/>
+        </p:nvSpPr>
+        <p:spPr>
+          <a:xfrm>
+            <a:off x="7799832" y="2935224"/>
+            <a:ext cx="3145536" cy="256032"/>
+          </a:xfrm>
+          <a:prstGeom prst="rect">
+            <a:avLst/>
+          </a:prstGeom>
+          <a:noFill/>
+          <a:ln/>
+        </p:spPr>
+        <p:txBody>
+          <a:bodyPr wrap="square" lIns="0" tIns="0" rIns="0" bIns="0" rtlCol="0" anchor="ctr"/>
+          <a:lstStyle/>
+          <a:p>
+            <a:pPr indent="0" marL="0">
+              <a:buNone/>
+            </a:pPr>
+            <a:r>
+              <a:rPr lang="en-US" sz="1300" b="1" dirty="0">
+                <a:solidFill>
+                  <a:srgbClr val="0068B7"/>
+                </a:solidFill>
+                <a:latin typeface="Aptos" pitchFamily="34" charset="0"/>
+                <a:ea typeface="Aptos" pitchFamily="34" charset="-122"/>
+                <a:cs typeface="Aptos" pitchFamily="34" charset="-120"/>
+              </a:rPr>
+              <a:t>Concept checkpoints</a:t>
+            </a:r>
+            <a:endParaRPr lang="en-US" sz="1300" dirty="0"/>
+          </a:p>
+        </p:txBody>
       </p:sp>
       <p:sp>
         <p:nvSpPr>
@@ -9252,240 +8391,53 @@
         </p:nvSpPr>
         <p:spPr>
           <a:xfrm>
-            <a:off x="8001000" y="3511296"/>
-            <a:ext cx="646176" cy="310896"/>
-          </a:xfrm>
-          <a:prstGeom prst="rect">
-            <a:avLst/>
-          </a:prstGeom>
-          <a:noFill/>
-          <a:ln/>
-        </p:spPr>
-        <p:txBody>
-          <a:bodyPr wrap="square" lIns="0" tIns="0" rIns="0" bIns="0" rtlCol="0" anchor="ctr">
+            <a:off x="7818120" y="3300984"/>
+            <a:ext cx="3090672" cy="877824"/>
+          </a:xfrm>
+          <a:prstGeom prst="rect">
+            <a:avLst/>
+          </a:prstGeom>
+          <a:noFill/>
+          <a:ln/>
+        </p:spPr>
+        <p:txBody>
+          <a:bodyPr wrap="square" lIns="254" tIns="254" rIns="254" bIns="254" rtlCol="0" anchor="t">
             <a:normAutofit/>
           </a:bodyPr>
           <a:lstStyle/>
           <a:p>
-            <a:pPr algn="ctr" indent="0" marL="0">
-              <a:buNone/>
-            </a:pPr>
-            <a:r>
-              <a:rPr lang="en-US" sz="1500" b="1" dirty="0">
-                <a:solidFill>
-                  <a:srgbClr val="FFFFFF"/>
-                </a:solidFill>
-                <a:latin typeface="Aptos" pitchFamily="34" charset="0"/>
-                <a:ea typeface="Aptos" pitchFamily="34" charset="-122"/>
-                <a:cs typeface="Aptos" pitchFamily="34" charset="-120"/>
-              </a:rPr>
-              <a:t>Plan</a:t>
-            </a:r>
-            <a:endParaRPr lang="en-US" sz="1500" dirty="0"/>
+            <a:r>
+              <a:rPr lang="en-US" sz="1380" dirty="0">
+                <a:solidFill>
+                  <a:srgbClr val="17364A"/>
+                </a:solidFill>
+                <a:latin typeface="Aptos" pitchFamily="34" charset="0"/>
+                <a:ea typeface="Aptos" pitchFamily="34" charset="-122"/>
+                <a:cs typeface="Aptos" pitchFamily="34" charset="-120"/>
+              </a:rPr>
+              <a:t>Include the goal, trigger, data sources, tools, allowed actions, prohibited actions,.</a:t>
+            </a:r>
+            <a:endParaRPr lang="en-US" sz="1380" dirty="0"/>
+          </a:p>
+          <a:p>
+            <a:r>
+              <a:rPr lang="en-US" sz="1380" dirty="0">
+                <a:solidFill>
+                  <a:srgbClr val="17364A"/>
+                </a:solidFill>
+                <a:latin typeface="Aptos" pitchFamily="34" charset="0"/>
+                <a:ea typeface="Aptos" pitchFamily="34" charset="-122"/>
+                <a:cs typeface="Aptos" pitchFamily="34" charset="-120"/>
+              </a:rPr>
+              <a:t>The plan should identify at least one low-risk pilot boundary and one condition that would.</a:t>
+            </a:r>
+            <a:endParaRPr lang="en-US" sz="1380" dirty="0"/>
           </a:p>
         </p:txBody>
       </p:sp>
       <p:sp>
         <p:nvSpPr>
           <p:cNvPr id="16" name="Shape 14"/>
-          <p:cNvSpPr/>
-          <p:nvPr/>
-        </p:nvSpPr>
-        <p:spPr>
-          <a:xfrm>
-            <a:off x="8976360" y="3319272"/>
-            <a:ext cx="792480" cy="749808"/>
-          </a:xfrm>
-          <a:prstGeom prst="roundRect">
-            <a:avLst>
-              <a:gd name="adj" fmla="val 14634"/>
-            </a:avLst>
-          </a:prstGeom>
-          <a:solidFill>
-            <a:srgbClr val="2F8A28"/>
-          </a:solidFill>
-          <a:ln w="12700">
-            <a:solidFill>
-              <a:srgbClr val="2F8A28"/>
-            </a:solidFill>
-            <a:prstDash val="solid"/>
-          </a:ln>
-        </p:spPr>
-      </p:sp>
-      <p:sp>
-        <p:nvSpPr>
-          <p:cNvPr id="17" name="Text 15"/>
-          <p:cNvSpPr/>
-          <p:nvPr/>
-        </p:nvSpPr>
-        <p:spPr>
-          <a:xfrm>
-            <a:off x="9049512" y="3511296"/>
-            <a:ext cx="646176" cy="310896"/>
-          </a:xfrm>
-          <a:prstGeom prst="rect">
-            <a:avLst/>
-          </a:prstGeom>
-          <a:noFill/>
-          <a:ln/>
-        </p:spPr>
-        <p:txBody>
-          <a:bodyPr wrap="square" lIns="0" tIns="0" rIns="0" bIns="0" rtlCol="0" anchor="ctr">
-            <a:normAutofit/>
-          </a:bodyPr>
-          <a:lstStyle/>
-          <a:p>
-            <a:pPr algn="ctr" indent="0" marL="0">
-              <a:buNone/>
-            </a:pPr>
-            <a:r>
-              <a:rPr lang="en-US" sz="1500" b="1" dirty="0">
-                <a:solidFill>
-                  <a:srgbClr val="FFFFFF"/>
-                </a:solidFill>
-                <a:latin typeface="Aptos" pitchFamily="34" charset="0"/>
-                <a:ea typeface="Aptos" pitchFamily="34" charset="-122"/>
-                <a:cs typeface="Aptos" pitchFamily="34" charset="-120"/>
-              </a:rPr>
-              <a:t>Do</a:t>
-            </a:r>
-            <a:endParaRPr lang="en-US" sz="1500" dirty="0"/>
-          </a:p>
-        </p:txBody>
-      </p:sp>
-      <p:sp>
-        <p:nvSpPr>
-          <p:cNvPr id="18" name="Shape 16"/>
-          <p:cNvSpPr/>
-          <p:nvPr/>
-        </p:nvSpPr>
-        <p:spPr>
-          <a:xfrm>
-            <a:off x="10024872" y="3319272"/>
-            <a:ext cx="792480" cy="749808"/>
-          </a:xfrm>
-          <a:prstGeom prst="roundRect">
-            <a:avLst>
-              <a:gd name="adj" fmla="val 14634"/>
-            </a:avLst>
-          </a:prstGeom>
-          <a:solidFill>
-            <a:srgbClr val="D69A2D"/>
-          </a:solidFill>
-          <a:ln w="12700">
-            <a:solidFill>
-              <a:srgbClr val="D69A2D"/>
-            </a:solidFill>
-            <a:prstDash val="solid"/>
-          </a:ln>
-        </p:spPr>
-      </p:sp>
-      <p:sp>
-        <p:nvSpPr>
-          <p:cNvPr id="19" name="Text 17"/>
-          <p:cNvSpPr/>
-          <p:nvPr/>
-        </p:nvSpPr>
-        <p:spPr>
-          <a:xfrm>
-            <a:off x="10098024" y="3511296"/>
-            <a:ext cx="646176" cy="310896"/>
-          </a:xfrm>
-          <a:prstGeom prst="rect">
-            <a:avLst/>
-          </a:prstGeom>
-          <a:noFill/>
-          <a:ln/>
-        </p:spPr>
-        <p:txBody>
-          <a:bodyPr wrap="square" lIns="0" tIns="0" rIns="0" bIns="0" rtlCol="0" anchor="ctr">
-            <a:normAutofit/>
-          </a:bodyPr>
-          <a:lstStyle/>
-          <a:p>
-            <a:pPr algn="ctr" indent="0" marL="0">
-              <a:buNone/>
-            </a:pPr>
-            <a:r>
-              <a:rPr lang="en-US" sz="1500" b="1" dirty="0">
-                <a:solidFill>
-                  <a:srgbClr val="FFFFFF"/>
-                </a:solidFill>
-                <a:latin typeface="Aptos" pitchFamily="34" charset="0"/>
-                <a:ea typeface="Aptos" pitchFamily="34" charset="-122"/>
-                <a:cs typeface="Aptos" pitchFamily="34" charset="-120"/>
-              </a:rPr>
-              <a:t>Review</a:t>
-            </a:r>
-            <a:endParaRPr lang="en-US" sz="1500" dirty="0"/>
-          </a:p>
-        </p:txBody>
-      </p:sp>
-      <p:sp>
-        <p:nvSpPr>
-          <p:cNvPr id="20" name="Shape 18"/>
-          <p:cNvSpPr/>
-          <p:nvPr/>
-        </p:nvSpPr>
-        <p:spPr>
-          <a:xfrm>
-            <a:off x="8293608" y="4389120"/>
-            <a:ext cx="2157984" cy="0"/>
-          </a:xfrm>
-          <a:prstGeom prst="line">
-            <a:avLst/>
-          </a:prstGeom>
-          <a:noFill/>
-          <a:ln w="25400">
-            <a:solidFill>
-              <a:srgbClr val="8ABBD8"/>
-            </a:solidFill>
-            <a:prstDash val="solid"/>
-          </a:ln>
-        </p:spPr>
-      </p:sp>
-      <p:sp>
-        <p:nvSpPr>
-          <p:cNvPr id="21" name="Text 19"/>
-          <p:cNvSpPr/>
-          <p:nvPr/>
-        </p:nvSpPr>
-        <p:spPr>
-          <a:xfrm>
-            <a:off x="7909560" y="3977640"/>
-            <a:ext cx="2926080" cy="182880"/>
-          </a:xfrm>
-          <a:prstGeom prst="rect">
-            <a:avLst/>
-          </a:prstGeom>
-          <a:noFill/>
-          <a:ln/>
-        </p:spPr>
-        <p:txBody>
-          <a:bodyPr wrap="square" lIns="0" tIns="0" rIns="0" bIns="0" rtlCol="0" anchor="ctr"/>
-          <a:lstStyle/>
-          <a:p>
-            <a:pPr algn="ctr" indent="0" marL="0">
-              <a:buNone/>
-            </a:pPr>
-            <a:r>
-              <a:rPr lang="en-US" sz="1000" dirty="0">
-                <a:solidFill>
-                  <a:srgbClr val="003A63"/>
-                </a:solidFill>
-                <a:latin typeface="Aptos" pitchFamily="34" charset="0"/>
-                <a:ea typeface="Aptos" pitchFamily="34" charset="-122"/>
-                <a:cs typeface="Aptos" pitchFamily="34" charset="-120"/>
-              </a:rPr>
-              <a:t>Dependencies visible</a:t>
-            </a:r>
-            <a:endParaRPr lang="en-US" sz="1000" dirty="0"/>
-          </a:p>
-        </p:txBody>
-      </p:sp>
-      <p:sp>
-        <p:nvSpPr>
-          <p:cNvPr id="22" name="Shape 20"/>
           <p:cNvSpPr/>
           <p:nvPr/>
         </p:nvSpPr>
@@ -9512,7 +8464,7 @@
       </p:sp>
       <p:sp>
         <p:nvSpPr>
-          <p:cNvPr id="23" name="Text 21"/>
+          <p:cNvPr id="17" name="Text 15"/>
           <p:cNvSpPr/>
           <p:nvPr/>
         </p:nvSpPr>
@@ -9551,7 +8503,7 @@
       </p:sp>
       <p:sp>
         <p:nvSpPr>
-          <p:cNvPr id="24" name="Text 22"/>
+          <p:cNvPr id="18" name="Text 16"/>
           <p:cNvSpPr/>
           <p:nvPr/>
         </p:nvSpPr>
@@ -10059,13 +9011,11 @@
             </a:avLst>
           </a:prstGeom>
           <a:solidFill>
-            <a:srgbClr val="FFFFFF">
-              <a:alpha val="88000"/>
-            </a:srgbClr>
+            <a:srgbClr val="FFFFFF"/>
           </a:solidFill>
           <a:ln w="12700">
             <a:solidFill>
-              <a:srgbClr val="D6E8F2"/>
+              <a:srgbClr val="B9D7E6"/>
             </a:solidFill>
             <a:prstDash val="solid"/>
           </a:ln>
@@ -10073,30 +9023,42 @@
       </p:sp>
       <p:sp>
         <p:nvSpPr>
-          <p:cNvPr id="14" name="Shape 12"/>
-          <p:cNvSpPr/>
-          <p:nvPr/>
-        </p:nvSpPr>
-        <p:spPr>
-          <a:xfrm>
-            <a:off x="7927848" y="3319272"/>
-            <a:ext cx="792480" cy="749808"/>
-          </a:xfrm>
-          <a:prstGeom prst="roundRect">
-            <a:avLst>
-              <a:gd name="adj" fmla="val 14634"/>
-            </a:avLst>
-          </a:prstGeom>
-          <a:solidFill>
-            <a:srgbClr val="0068B7"/>
-          </a:solidFill>
-          <a:ln w="12700">
-            <a:solidFill>
-              <a:srgbClr val="0068B7"/>
-            </a:solidFill>
-            <a:prstDash val="solid"/>
-          </a:ln>
-        </p:spPr>
+          <p:cNvPr id="14" name="Text 12"/>
+          <p:cNvSpPr/>
+          <p:nvPr/>
+        </p:nvSpPr>
+        <p:spPr>
+          <a:xfrm>
+            <a:off x="7799832" y="2935224"/>
+            <a:ext cx="3145536" cy="256032"/>
+          </a:xfrm>
+          <a:prstGeom prst="rect">
+            <a:avLst/>
+          </a:prstGeom>
+          <a:noFill/>
+          <a:ln/>
+        </p:spPr>
+        <p:txBody>
+          <a:bodyPr wrap="square" lIns="0" tIns="0" rIns="0" bIns="0" rtlCol="0" anchor="ctr"/>
+          <a:lstStyle/>
+          <a:p>
+            <a:pPr indent="0" marL="0">
+              <a:buNone/>
+            </a:pPr>
+            <a:r>
+              <a:rPr lang="en-US" sz="1300" b="1" dirty="0">
+                <a:solidFill>
+                  <a:srgbClr val="0068B7"/>
+                </a:solidFill>
+                <a:latin typeface="Aptos" pitchFamily="34" charset="0"/>
+                <a:ea typeface="Aptos" pitchFamily="34" charset="-122"/>
+                <a:cs typeface="Aptos" pitchFamily="34" charset="-120"/>
+              </a:rPr>
+              <a:t>Concept checkpoints</a:t>
+            </a:r>
+            <a:endParaRPr lang="en-US" sz="1300" dirty="0"/>
+          </a:p>
+        </p:txBody>
       </p:sp>
       <p:sp>
         <p:nvSpPr>
@@ -10106,240 +9068,67 @@
         </p:nvSpPr>
         <p:spPr>
           <a:xfrm>
-            <a:off x="8001000" y="3511296"/>
-            <a:ext cx="646176" cy="310896"/>
-          </a:xfrm>
-          <a:prstGeom prst="rect">
-            <a:avLst/>
-          </a:prstGeom>
-          <a:noFill/>
-          <a:ln/>
-        </p:spPr>
-        <p:txBody>
-          <a:bodyPr wrap="square" lIns="0" tIns="0" rIns="0" bIns="0" rtlCol="0" anchor="ctr">
+            <a:off x="7818120" y="3300984"/>
+            <a:ext cx="3090672" cy="877824"/>
+          </a:xfrm>
+          <a:prstGeom prst="rect">
+            <a:avLst/>
+          </a:prstGeom>
+          <a:noFill/>
+          <a:ln/>
+        </p:spPr>
+        <p:txBody>
+          <a:bodyPr wrap="square" lIns="254" tIns="254" rIns="254" bIns="254" rtlCol="0" anchor="t">
             <a:normAutofit/>
           </a:bodyPr>
           <a:lstStyle/>
           <a:p>
-            <a:pPr algn="ctr" indent="0" marL="0">
-              <a:buNone/>
-            </a:pPr>
-            <a:r>
-              <a:rPr lang="en-US" sz="1500" b="1" dirty="0">
-                <a:solidFill>
-                  <a:srgbClr val="FFFFFF"/>
-                </a:solidFill>
-                <a:latin typeface="Aptos" pitchFamily="34" charset="0"/>
-                <a:ea typeface="Aptos" pitchFamily="34" charset="-122"/>
-                <a:cs typeface="Aptos" pitchFamily="34" charset="-120"/>
-              </a:rPr>
-              <a:t>Plan</a:t>
-            </a:r>
-            <a:endParaRPr lang="en-US" sz="1500" dirty="0"/>
+            <a:r>
+              <a:rPr lang="en-US" sz="1380" dirty="0">
+                <a:solidFill>
+                  <a:srgbClr val="17364A"/>
+                </a:solidFill>
+                <a:latin typeface="Aptos" pitchFamily="34" charset="0"/>
+                <a:ea typeface="Aptos" pitchFamily="34" charset="-122"/>
+                <a:cs typeface="Aptos" pitchFamily="34" charset="-120"/>
+              </a:rPr>
+              <a:t>Agentic workflow control plan</a:t>
+            </a:r>
+            <a:endParaRPr lang="en-US" sz="1380" dirty="0"/>
+          </a:p>
+          <a:p>
+            <a:r>
+              <a:rPr lang="en-US" sz="1380" dirty="0">
+                <a:solidFill>
+                  <a:srgbClr val="17364A"/>
+                </a:solidFill>
+                <a:latin typeface="Aptos" pitchFamily="34" charset="0"/>
+                <a:ea typeface="Aptos" pitchFamily="34" charset="-122"/>
+                <a:cs typeface="Aptos" pitchFamily="34" charset="-120"/>
+              </a:rPr>
+              <a:t>Allowed/prohibited action list</a:t>
+            </a:r>
+            <a:endParaRPr lang="en-US" sz="1380" dirty="0"/>
+          </a:p>
+          <a:p>
+            <a:r>
+              <a:rPr lang="en-US" sz="1380" dirty="0">
+                <a:solidFill>
+                  <a:srgbClr val="17364A"/>
+                </a:solidFill>
+                <a:latin typeface="Aptos" pitchFamily="34" charset="0"/>
+                <a:ea typeface="Aptos" pitchFamily="34" charset="-122"/>
+                <a:cs typeface="Aptos" pitchFamily="34" charset="-120"/>
+              </a:rPr>
+              <a:t>Human approval and escalation map</a:t>
+            </a:r>
+            <a:endParaRPr lang="en-US" sz="1380" dirty="0"/>
           </a:p>
         </p:txBody>
       </p:sp>
       <p:sp>
         <p:nvSpPr>
           <p:cNvPr id="16" name="Shape 14"/>
-          <p:cNvSpPr/>
-          <p:nvPr/>
-        </p:nvSpPr>
-        <p:spPr>
-          <a:xfrm>
-            <a:off x="8976360" y="3319272"/>
-            <a:ext cx="792480" cy="749808"/>
-          </a:xfrm>
-          <a:prstGeom prst="roundRect">
-            <a:avLst>
-              <a:gd name="adj" fmla="val 14634"/>
-            </a:avLst>
-          </a:prstGeom>
-          <a:solidFill>
-            <a:srgbClr val="2F8A28"/>
-          </a:solidFill>
-          <a:ln w="12700">
-            <a:solidFill>
-              <a:srgbClr val="2F8A28"/>
-            </a:solidFill>
-            <a:prstDash val="solid"/>
-          </a:ln>
-        </p:spPr>
-      </p:sp>
-      <p:sp>
-        <p:nvSpPr>
-          <p:cNvPr id="17" name="Text 15"/>
-          <p:cNvSpPr/>
-          <p:nvPr/>
-        </p:nvSpPr>
-        <p:spPr>
-          <a:xfrm>
-            <a:off x="9049512" y="3511296"/>
-            <a:ext cx="646176" cy="310896"/>
-          </a:xfrm>
-          <a:prstGeom prst="rect">
-            <a:avLst/>
-          </a:prstGeom>
-          <a:noFill/>
-          <a:ln/>
-        </p:spPr>
-        <p:txBody>
-          <a:bodyPr wrap="square" lIns="0" tIns="0" rIns="0" bIns="0" rtlCol="0" anchor="ctr">
-            <a:normAutofit/>
-          </a:bodyPr>
-          <a:lstStyle/>
-          <a:p>
-            <a:pPr algn="ctr" indent="0" marL="0">
-              <a:buNone/>
-            </a:pPr>
-            <a:r>
-              <a:rPr lang="en-US" sz="1500" b="1" dirty="0">
-                <a:solidFill>
-                  <a:srgbClr val="FFFFFF"/>
-                </a:solidFill>
-                <a:latin typeface="Aptos" pitchFamily="34" charset="0"/>
-                <a:ea typeface="Aptos" pitchFamily="34" charset="-122"/>
-                <a:cs typeface="Aptos" pitchFamily="34" charset="-120"/>
-              </a:rPr>
-              <a:t>Do</a:t>
-            </a:r>
-            <a:endParaRPr lang="en-US" sz="1500" dirty="0"/>
-          </a:p>
-        </p:txBody>
-      </p:sp>
-      <p:sp>
-        <p:nvSpPr>
-          <p:cNvPr id="18" name="Shape 16"/>
-          <p:cNvSpPr/>
-          <p:nvPr/>
-        </p:nvSpPr>
-        <p:spPr>
-          <a:xfrm>
-            <a:off x="10024872" y="3319272"/>
-            <a:ext cx="792480" cy="749808"/>
-          </a:xfrm>
-          <a:prstGeom prst="roundRect">
-            <a:avLst>
-              <a:gd name="adj" fmla="val 14634"/>
-            </a:avLst>
-          </a:prstGeom>
-          <a:solidFill>
-            <a:srgbClr val="D69A2D"/>
-          </a:solidFill>
-          <a:ln w="12700">
-            <a:solidFill>
-              <a:srgbClr val="D69A2D"/>
-            </a:solidFill>
-            <a:prstDash val="solid"/>
-          </a:ln>
-        </p:spPr>
-      </p:sp>
-      <p:sp>
-        <p:nvSpPr>
-          <p:cNvPr id="19" name="Text 17"/>
-          <p:cNvSpPr/>
-          <p:nvPr/>
-        </p:nvSpPr>
-        <p:spPr>
-          <a:xfrm>
-            <a:off x="10098024" y="3511296"/>
-            <a:ext cx="646176" cy="310896"/>
-          </a:xfrm>
-          <a:prstGeom prst="rect">
-            <a:avLst/>
-          </a:prstGeom>
-          <a:noFill/>
-          <a:ln/>
-        </p:spPr>
-        <p:txBody>
-          <a:bodyPr wrap="square" lIns="0" tIns="0" rIns="0" bIns="0" rtlCol="0" anchor="ctr">
-            <a:normAutofit/>
-          </a:bodyPr>
-          <a:lstStyle/>
-          <a:p>
-            <a:pPr algn="ctr" indent="0" marL="0">
-              <a:buNone/>
-            </a:pPr>
-            <a:r>
-              <a:rPr lang="en-US" sz="1500" b="1" dirty="0">
-                <a:solidFill>
-                  <a:srgbClr val="FFFFFF"/>
-                </a:solidFill>
-                <a:latin typeface="Aptos" pitchFamily="34" charset="0"/>
-                <a:ea typeface="Aptos" pitchFamily="34" charset="-122"/>
-                <a:cs typeface="Aptos" pitchFamily="34" charset="-120"/>
-              </a:rPr>
-              <a:t>Review</a:t>
-            </a:r>
-            <a:endParaRPr lang="en-US" sz="1500" dirty="0"/>
-          </a:p>
-        </p:txBody>
-      </p:sp>
-      <p:sp>
-        <p:nvSpPr>
-          <p:cNvPr id="20" name="Shape 18"/>
-          <p:cNvSpPr/>
-          <p:nvPr/>
-        </p:nvSpPr>
-        <p:spPr>
-          <a:xfrm>
-            <a:off x="8293608" y="4389120"/>
-            <a:ext cx="2157984" cy="0"/>
-          </a:xfrm>
-          <a:prstGeom prst="line">
-            <a:avLst/>
-          </a:prstGeom>
-          <a:noFill/>
-          <a:ln w="25400">
-            <a:solidFill>
-              <a:srgbClr val="8ABBD8"/>
-            </a:solidFill>
-            <a:prstDash val="solid"/>
-          </a:ln>
-        </p:spPr>
-      </p:sp>
-      <p:sp>
-        <p:nvSpPr>
-          <p:cNvPr id="21" name="Text 19"/>
-          <p:cNvSpPr/>
-          <p:nvPr/>
-        </p:nvSpPr>
-        <p:spPr>
-          <a:xfrm>
-            <a:off x="7909560" y="3977640"/>
-            <a:ext cx="2926080" cy="182880"/>
-          </a:xfrm>
-          <a:prstGeom prst="rect">
-            <a:avLst/>
-          </a:prstGeom>
-          <a:noFill/>
-          <a:ln/>
-        </p:spPr>
-        <p:txBody>
-          <a:bodyPr wrap="square" lIns="0" tIns="0" rIns="0" bIns="0" rtlCol="0" anchor="ctr"/>
-          <a:lstStyle/>
-          <a:p>
-            <a:pPr algn="ctr" indent="0" marL="0">
-              <a:buNone/>
-            </a:pPr>
-            <a:r>
-              <a:rPr lang="en-US" sz="1000" dirty="0">
-                <a:solidFill>
-                  <a:srgbClr val="003A63"/>
-                </a:solidFill>
-                <a:latin typeface="Aptos" pitchFamily="34" charset="0"/>
-                <a:ea typeface="Aptos" pitchFamily="34" charset="-122"/>
-                <a:cs typeface="Aptos" pitchFamily="34" charset="-120"/>
-              </a:rPr>
-              <a:t>Dependencies visible</a:t>
-            </a:r>
-            <a:endParaRPr lang="en-US" sz="1000" dirty="0"/>
-          </a:p>
-        </p:txBody>
-      </p:sp>
-      <p:sp>
-        <p:nvSpPr>
-          <p:cNvPr id="22" name="Shape 20"/>
           <p:cNvSpPr/>
           <p:nvPr/>
         </p:nvSpPr>
@@ -10366,7 +9155,7 @@
       </p:sp>
       <p:sp>
         <p:nvSpPr>
-          <p:cNvPr id="23" name="Text 21"/>
+          <p:cNvPr id="17" name="Text 15"/>
           <p:cNvSpPr/>
           <p:nvPr/>
         </p:nvSpPr>
@@ -10405,7 +9194,7 @@
       </p:sp>
       <p:sp>
         <p:nvSpPr>
-          <p:cNvPr id="24" name="Text 22"/>
+          <p:cNvPr id="18" name="Text 16"/>
           <p:cNvSpPr/>
           <p:nvPr/>
         </p:nvSpPr>
@@ -10885,13 +9674,11 @@
             </a:avLst>
           </a:prstGeom>
           <a:solidFill>
-            <a:srgbClr val="FFFFFF">
-              <a:alpha val="88000"/>
-            </a:srgbClr>
+            <a:srgbClr val="FFFFFF"/>
           </a:solidFill>
           <a:ln w="12700">
             <a:solidFill>
-              <a:srgbClr val="D6E8F2"/>
+              <a:srgbClr val="B9D7E6"/>
             </a:solidFill>
             <a:prstDash val="solid"/>
           </a:ln>
@@ -10899,30 +9686,42 @@
       </p:sp>
       <p:sp>
         <p:nvSpPr>
-          <p:cNvPr id="14" name="Shape 12"/>
-          <p:cNvSpPr/>
-          <p:nvPr/>
-        </p:nvSpPr>
-        <p:spPr>
-          <a:xfrm>
-            <a:off x="7927848" y="3319272"/>
-            <a:ext cx="792480" cy="749808"/>
-          </a:xfrm>
-          <a:prstGeom prst="roundRect">
-            <a:avLst>
-              <a:gd name="adj" fmla="val 14634"/>
-            </a:avLst>
-          </a:prstGeom>
-          <a:solidFill>
-            <a:srgbClr val="0068B7"/>
-          </a:solidFill>
-          <a:ln w="12700">
-            <a:solidFill>
-              <a:srgbClr val="0068B7"/>
-            </a:solidFill>
-            <a:prstDash val="solid"/>
-          </a:ln>
-        </p:spPr>
+          <p:cNvPr id="14" name="Text 12"/>
+          <p:cNvSpPr/>
+          <p:nvPr/>
+        </p:nvSpPr>
+        <p:spPr>
+          <a:xfrm>
+            <a:off x="7799832" y="2935224"/>
+            <a:ext cx="3145536" cy="256032"/>
+          </a:xfrm>
+          <a:prstGeom prst="rect">
+            <a:avLst/>
+          </a:prstGeom>
+          <a:noFill/>
+          <a:ln/>
+        </p:spPr>
+        <p:txBody>
+          <a:bodyPr wrap="square" lIns="0" tIns="0" rIns="0" bIns="0" rtlCol="0" anchor="ctr"/>
+          <a:lstStyle/>
+          <a:p>
+            <a:pPr indent="0" marL="0">
+              <a:buNone/>
+            </a:pPr>
+            <a:r>
+              <a:rPr lang="en-US" sz="1300" b="1" dirty="0">
+                <a:solidFill>
+                  <a:srgbClr val="0068B7"/>
+                </a:solidFill>
+                <a:latin typeface="Aptos" pitchFamily="34" charset="0"/>
+                <a:ea typeface="Aptos" pitchFamily="34" charset="-122"/>
+                <a:cs typeface="Aptos" pitchFamily="34" charset="-120"/>
+              </a:rPr>
+              <a:t>Concept checkpoints</a:t>
+            </a:r>
+            <a:endParaRPr lang="en-US" sz="1300" dirty="0"/>
+          </a:p>
+        </p:txBody>
       </p:sp>
       <p:sp>
         <p:nvSpPr>
@@ -10932,240 +9731,39 @@
         </p:nvSpPr>
         <p:spPr>
           <a:xfrm>
-            <a:off x="8001000" y="3511296"/>
-            <a:ext cx="646176" cy="310896"/>
-          </a:xfrm>
-          <a:prstGeom prst="rect">
-            <a:avLst/>
-          </a:prstGeom>
-          <a:noFill/>
-          <a:ln/>
-        </p:spPr>
-        <p:txBody>
-          <a:bodyPr wrap="square" lIns="0" tIns="0" rIns="0" bIns="0" rtlCol="0" anchor="ctr">
+            <a:off x="7818120" y="3300984"/>
+            <a:ext cx="3090672" cy="877824"/>
+          </a:xfrm>
+          <a:prstGeom prst="rect">
+            <a:avLst/>
+          </a:prstGeom>
+          <a:noFill/>
+          <a:ln/>
+        </p:spPr>
+        <p:txBody>
+          <a:bodyPr wrap="square" lIns="254" tIns="254" rIns="254" bIns="254" rtlCol="0" anchor="t">
             <a:normAutofit/>
           </a:bodyPr>
           <a:lstStyle/>
           <a:p>
-            <a:pPr algn="ctr" indent="0" marL="0">
-              <a:buNone/>
-            </a:pPr>
-            <a:r>
-              <a:rPr lang="en-US" sz="1500" b="1" dirty="0">
-                <a:solidFill>
-                  <a:srgbClr val="FFFFFF"/>
-                </a:solidFill>
-                <a:latin typeface="Aptos" pitchFamily="34" charset="0"/>
-                <a:ea typeface="Aptos" pitchFamily="34" charset="-122"/>
-                <a:cs typeface="Aptos" pitchFamily="34" charset="-120"/>
-              </a:rPr>
-              <a:t>Plan</a:t>
-            </a:r>
-            <a:endParaRPr lang="en-US" sz="1500" dirty="0"/>
+            <a:r>
+              <a:rPr lang="en-US" sz="1380" dirty="0">
+                <a:solidFill>
+                  <a:srgbClr val="17364A"/>
+                </a:solidFill>
+                <a:latin typeface="Aptos" pitchFamily="34" charset="0"/>
+                <a:ea typeface="Aptos" pitchFamily="34" charset="-122"/>
+                <a:cs typeface="Aptos" pitchFamily="34" charset="-120"/>
+              </a:rPr>
+              <a:t>Tool-call logging requirements</a:t>
+            </a:r>
+            <a:endParaRPr lang="en-US" sz="1380" dirty="0"/>
           </a:p>
         </p:txBody>
       </p:sp>
       <p:sp>
         <p:nvSpPr>
           <p:cNvPr id="16" name="Shape 14"/>
-          <p:cNvSpPr/>
-          <p:nvPr/>
-        </p:nvSpPr>
-        <p:spPr>
-          <a:xfrm>
-            <a:off x="8976360" y="3319272"/>
-            <a:ext cx="792480" cy="749808"/>
-          </a:xfrm>
-          <a:prstGeom prst="roundRect">
-            <a:avLst>
-              <a:gd name="adj" fmla="val 14634"/>
-            </a:avLst>
-          </a:prstGeom>
-          <a:solidFill>
-            <a:srgbClr val="2F8A28"/>
-          </a:solidFill>
-          <a:ln w="12700">
-            <a:solidFill>
-              <a:srgbClr val="2F8A28"/>
-            </a:solidFill>
-            <a:prstDash val="solid"/>
-          </a:ln>
-        </p:spPr>
-      </p:sp>
-      <p:sp>
-        <p:nvSpPr>
-          <p:cNvPr id="17" name="Text 15"/>
-          <p:cNvSpPr/>
-          <p:nvPr/>
-        </p:nvSpPr>
-        <p:spPr>
-          <a:xfrm>
-            <a:off x="9049512" y="3511296"/>
-            <a:ext cx="646176" cy="310896"/>
-          </a:xfrm>
-          <a:prstGeom prst="rect">
-            <a:avLst/>
-          </a:prstGeom>
-          <a:noFill/>
-          <a:ln/>
-        </p:spPr>
-        <p:txBody>
-          <a:bodyPr wrap="square" lIns="0" tIns="0" rIns="0" bIns="0" rtlCol="0" anchor="ctr">
-            <a:normAutofit/>
-          </a:bodyPr>
-          <a:lstStyle/>
-          <a:p>
-            <a:pPr algn="ctr" indent="0" marL="0">
-              <a:buNone/>
-            </a:pPr>
-            <a:r>
-              <a:rPr lang="en-US" sz="1500" b="1" dirty="0">
-                <a:solidFill>
-                  <a:srgbClr val="FFFFFF"/>
-                </a:solidFill>
-                <a:latin typeface="Aptos" pitchFamily="34" charset="0"/>
-                <a:ea typeface="Aptos" pitchFamily="34" charset="-122"/>
-                <a:cs typeface="Aptos" pitchFamily="34" charset="-120"/>
-              </a:rPr>
-              <a:t>Do</a:t>
-            </a:r>
-            <a:endParaRPr lang="en-US" sz="1500" dirty="0"/>
-          </a:p>
-        </p:txBody>
-      </p:sp>
-      <p:sp>
-        <p:nvSpPr>
-          <p:cNvPr id="18" name="Shape 16"/>
-          <p:cNvSpPr/>
-          <p:nvPr/>
-        </p:nvSpPr>
-        <p:spPr>
-          <a:xfrm>
-            <a:off x="10024872" y="3319272"/>
-            <a:ext cx="792480" cy="749808"/>
-          </a:xfrm>
-          <a:prstGeom prst="roundRect">
-            <a:avLst>
-              <a:gd name="adj" fmla="val 14634"/>
-            </a:avLst>
-          </a:prstGeom>
-          <a:solidFill>
-            <a:srgbClr val="D69A2D"/>
-          </a:solidFill>
-          <a:ln w="12700">
-            <a:solidFill>
-              <a:srgbClr val="D69A2D"/>
-            </a:solidFill>
-            <a:prstDash val="solid"/>
-          </a:ln>
-        </p:spPr>
-      </p:sp>
-      <p:sp>
-        <p:nvSpPr>
-          <p:cNvPr id="19" name="Text 17"/>
-          <p:cNvSpPr/>
-          <p:nvPr/>
-        </p:nvSpPr>
-        <p:spPr>
-          <a:xfrm>
-            <a:off x="10098024" y="3511296"/>
-            <a:ext cx="646176" cy="310896"/>
-          </a:xfrm>
-          <a:prstGeom prst="rect">
-            <a:avLst/>
-          </a:prstGeom>
-          <a:noFill/>
-          <a:ln/>
-        </p:spPr>
-        <p:txBody>
-          <a:bodyPr wrap="square" lIns="0" tIns="0" rIns="0" bIns="0" rtlCol="0" anchor="ctr">
-            <a:normAutofit/>
-          </a:bodyPr>
-          <a:lstStyle/>
-          <a:p>
-            <a:pPr algn="ctr" indent="0" marL="0">
-              <a:buNone/>
-            </a:pPr>
-            <a:r>
-              <a:rPr lang="en-US" sz="1500" b="1" dirty="0">
-                <a:solidFill>
-                  <a:srgbClr val="FFFFFF"/>
-                </a:solidFill>
-                <a:latin typeface="Aptos" pitchFamily="34" charset="0"/>
-                <a:ea typeface="Aptos" pitchFamily="34" charset="-122"/>
-                <a:cs typeface="Aptos" pitchFamily="34" charset="-120"/>
-              </a:rPr>
-              <a:t>Review</a:t>
-            </a:r>
-            <a:endParaRPr lang="en-US" sz="1500" dirty="0"/>
-          </a:p>
-        </p:txBody>
-      </p:sp>
-      <p:sp>
-        <p:nvSpPr>
-          <p:cNvPr id="20" name="Shape 18"/>
-          <p:cNvSpPr/>
-          <p:nvPr/>
-        </p:nvSpPr>
-        <p:spPr>
-          <a:xfrm>
-            <a:off x="8293608" y="4389120"/>
-            <a:ext cx="2157984" cy="0"/>
-          </a:xfrm>
-          <a:prstGeom prst="line">
-            <a:avLst/>
-          </a:prstGeom>
-          <a:noFill/>
-          <a:ln w="25400">
-            <a:solidFill>
-              <a:srgbClr val="8ABBD8"/>
-            </a:solidFill>
-            <a:prstDash val="solid"/>
-          </a:ln>
-        </p:spPr>
-      </p:sp>
-      <p:sp>
-        <p:nvSpPr>
-          <p:cNvPr id="21" name="Text 19"/>
-          <p:cNvSpPr/>
-          <p:nvPr/>
-        </p:nvSpPr>
-        <p:spPr>
-          <a:xfrm>
-            <a:off x="7909560" y="3977640"/>
-            <a:ext cx="2926080" cy="182880"/>
-          </a:xfrm>
-          <a:prstGeom prst="rect">
-            <a:avLst/>
-          </a:prstGeom>
-          <a:noFill/>
-          <a:ln/>
-        </p:spPr>
-        <p:txBody>
-          <a:bodyPr wrap="square" lIns="0" tIns="0" rIns="0" bIns="0" rtlCol="0" anchor="ctr"/>
-          <a:lstStyle/>
-          <a:p>
-            <a:pPr algn="ctr" indent="0" marL="0">
-              <a:buNone/>
-            </a:pPr>
-            <a:r>
-              <a:rPr lang="en-US" sz="1000" dirty="0">
-                <a:solidFill>
-                  <a:srgbClr val="003A63"/>
-                </a:solidFill>
-                <a:latin typeface="Aptos" pitchFamily="34" charset="0"/>
-                <a:ea typeface="Aptos" pitchFamily="34" charset="-122"/>
-                <a:cs typeface="Aptos" pitchFamily="34" charset="-120"/>
-              </a:rPr>
-              <a:t>Dependencies visible</a:t>
-            </a:r>
-            <a:endParaRPr lang="en-US" sz="1000" dirty="0"/>
-          </a:p>
-        </p:txBody>
-      </p:sp>
-      <p:sp>
-        <p:nvSpPr>
-          <p:cNvPr id="22" name="Shape 20"/>
           <p:cNvSpPr/>
           <p:nvPr/>
         </p:nvSpPr>
@@ -11192,7 +9790,7 @@
       </p:sp>
       <p:sp>
         <p:nvSpPr>
-          <p:cNvPr id="23" name="Text 21"/>
+          <p:cNvPr id="17" name="Text 15"/>
           <p:cNvSpPr/>
           <p:nvPr/>
         </p:nvSpPr>
@@ -11231,7 +9829,7 @@
       </p:sp>
       <p:sp>
         <p:nvSpPr>
-          <p:cNvPr id="24" name="Text 22"/>
+          <p:cNvPr id="18" name="Text 16"/>
           <p:cNvSpPr/>
           <p:nvPr/>
         </p:nvSpPr>
@@ -11764,20 +10362,20 @@
         </p:nvSpPr>
         <p:spPr>
           <a:xfrm>
-            <a:off x="7635240" y="3730752"/>
-            <a:ext cx="1033272" cy="749808"/>
+            <a:off x="7909560" y="3675888"/>
+            <a:ext cx="3154680" cy="1691640"/>
           </a:xfrm>
           <a:prstGeom prst="roundRect">
             <a:avLst>
-              <a:gd name="adj" fmla="val 14634"/>
+              <a:gd name="adj" fmla="val 6486"/>
             </a:avLst>
           </a:prstGeom>
           <a:solidFill>
-            <a:srgbClr val="0068B7"/>
+            <a:srgbClr val="FFFFFF"/>
           </a:solidFill>
           <a:ln w="12700">
             <a:solidFill>
-              <a:srgbClr val="0068B7"/>
+              <a:srgbClr val="B9D7E6"/>
             </a:solidFill>
             <a:prstDash val="solid"/>
           </a:ln>
@@ -11791,172 +10389,100 @@
         </p:nvSpPr>
         <p:spPr>
           <a:xfrm>
-            <a:off x="7708392" y="3922776"/>
-            <a:ext cx="886968" cy="310896"/>
-          </a:xfrm>
-          <a:prstGeom prst="rect">
-            <a:avLst/>
-          </a:prstGeom>
-          <a:noFill/>
-          <a:ln/>
-        </p:spPr>
-        <p:txBody>
-          <a:bodyPr wrap="square" lIns="0" tIns="0" rIns="0" bIns="0" rtlCol="0" anchor="ctr">
+            <a:off x="8074152" y="3822192"/>
+            <a:ext cx="2825496" cy="256032"/>
+          </a:xfrm>
+          <a:prstGeom prst="rect">
+            <a:avLst/>
+          </a:prstGeom>
+          <a:noFill/>
+          <a:ln/>
+        </p:spPr>
+        <p:txBody>
+          <a:bodyPr wrap="square" lIns="0" tIns="0" rIns="0" bIns="0" rtlCol="0" anchor="ctr"/>
+          <a:lstStyle/>
+          <a:p>
+            <a:pPr indent="0" marL="0">
+              <a:buNone/>
+            </a:pPr>
+            <a:r>
+              <a:rPr lang="en-US" sz="1300" b="1" dirty="0">
+                <a:solidFill>
+                  <a:srgbClr val="0068B7"/>
+                </a:solidFill>
+                <a:latin typeface="Aptos" pitchFamily="34" charset="0"/>
+                <a:ea typeface="Aptos" pitchFamily="34" charset="-122"/>
+                <a:cs typeface="Aptos" pitchFamily="34" charset="-120"/>
+              </a:rPr>
+              <a:t>Learning sequence</a:t>
+            </a:r>
+            <a:endParaRPr lang="en-US" sz="1300" dirty="0"/>
+          </a:p>
+        </p:txBody>
+      </p:sp>
+      <p:sp>
+        <p:nvSpPr>
+          <p:cNvPr id="15" name="Text 13"/>
+          <p:cNvSpPr/>
+          <p:nvPr/>
+        </p:nvSpPr>
+        <p:spPr>
+          <a:xfrm>
+            <a:off x="8092440" y="4187952"/>
+            <a:ext cx="2770632" cy="1033272"/>
+          </a:xfrm>
+          <a:prstGeom prst="rect">
+            <a:avLst/>
+          </a:prstGeom>
+          <a:noFill/>
+          <a:ln/>
+        </p:spPr>
+        <p:txBody>
+          <a:bodyPr wrap="square" lIns="254" tIns="254" rIns="254" bIns="254" rtlCol="0" anchor="t">
             <a:normAutofit/>
           </a:bodyPr>
           <a:lstStyle/>
           <a:p>
-            <a:pPr algn="ctr" indent="0" marL="0">
-              <a:buNone/>
-            </a:pPr>
-            <a:r>
-              <a:rPr lang="en-US" sz="1500" b="1" dirty="0">
-                <a:solidFill>
-                  <a:srgbClr val="FFFFFF"/>
-                </a:solidFill>
-                <a:latin typeface="Aptos" pitchFamily="34" charset="0"/>
-                <a:ea typeface="Aptos" pitchFamily="34" charset="-122"/>
-                <a:cs typeface="Aptos" pitchFamily="34" charset="-120"/>
-              </a:rPr>
-              <a:t>Learn</a:t>
-            </a:r>
-            <a:endParaRPr lang="en-US" sz="1500" dirty="0"/>
-          </a:p>
-        </p:txBody>
-      </p:sp>
-      <p:sp>
-        <p:nvSpPr>
-          <p:cNvPr id="15" name="Shape 13"/>
-          <p:cNvSpPr/>
-          <p:nvPr/>
-        </p:nvSpPr>
-        <p:spPr>
-          <a:xfrm>
-            <a:off x="8924544" y="3730752"/>
-            <a:ext cx="1033272" cy="749808"/>
-          </a:xfrm>
-          <a:prstGeom prst="roundRect">
-            <a:avLst>
-              <a:gd name="adj" fmla="val 14634"/>
-            </a:avLst>
-          </a:prstGeom>
-          <a:solidFill>
-            <a:srgbClr val="2F8A28"/>
-          </a:solidFill>
-          <a:ln w="12700">
-            <a:solidFill>
-              <a:srgbClr val="2F8A28"/>
-            </a:solidFill>
-            <a:prstDash val="solid"/>
-          </a:ln>
-        </p:spPr>
-      </p:sp>
-      <p:sp>
-        <p:nvSpPr>
-          <p:cNvPr id="16" name="Text 14"/>
-          <p:cNvSpPr/>
-          <p:nvPr/>
-        </p:nvSpPr>
-        <p:spPr>
-          <a:xfrm>
-            <a:off x="8997696" y="3922776"/>
-            <a:ext cx="886968" cy="310896"/>
-          </a:xfrm>
-          <a:prstGeom prst="rect">
-            <a:avLst/>
-          </a:prstGeom>
-          <a:noFill/>
-          <a:ln/>
-        </p:spPr>
-        <p:txBody>
-          <a:bodyPr wrap="square" lIns="0" tIns="0" rIns="0" bIns="0" rtlCol="0" anchor="ctr">
-            <a:normAutofit/>
-          </a:bodyPr>
-          <a:lstStyle/>
-          <a:p>
-            <a:pPr algn="ctr" indent="0" marL="0">
-              <a:buNone/>
-            </a:pPr>
-            <a:r>
-              <a:rPr lang="en-US" sz="1500" b="1" dirty="0">
-                <a:solidFill>
-                  <a:srgbClr val="FFFFFF"/>
-                </a:solidFill>
-                <a:latin typeface="Aptos" pitchFamily="34" charset="0"/>
-                <a:ea typeface="Aptos" pitchFamily="34" charset="-122"/>
-                <a:cs typeface="Aptos" pitchFamily="34" charset="-120"/>
-              </a:rPr>
-              <a:t>Apply</a:t>
-            </a:r>
-            <a:endParaRPr lang="en-US" sz="1500" dirty="0"/>
-          </a:p>
-        </p:txBody>
-      </p:sp>
-      <p:sp>
-        <p:nvSpPr>
-          <p:cNvPr id="17" name="Shape 15"/>
-          <p:cNvSpPr/>
-          <p:nvPr/>
-        </p:nvSpPr>
-        <p:spPr>
-          <a:xfrm>
-            <a:off x="10213848" y="3730752"/>
-            <a:ext cx="1033272" cy="749808"/>
-          </a:xfrm>
-          <a:prstGeom prst="roundRect">
-            <a:avLst>
-              <a:gd name="adj" fmla="val 14634"/>
-            </a:avLst>
-          </a:prstGeom>
-          <a:solidFill>
-            <a:srgbClr val="6A4CA3"/>
-          </a:solidFill>
-          <a:ln w="12700">
-            <a:solidFill>
-              <a:srgbClr val="6A4CA3"/>
-            </a:solidFill>
-            <a:prstDash val="solid"/>
-          </a:ln>
-        </p:spPr>
-      </p:sp>
-      <p:sp>
-        <p:nvSpPr>
-          <p:cNvPr id="18" name="Text 16"/>
-          <p:cNvSpPr/>
-          <p:nvPr/>
-        </p:nvSpPr>
-        <p:spPr>
-          <a:xfrm>
-            <a:off x="10287000" y="3922776"/>
-            <a:ext cx="886968" cy="310896"/>
-          </a:xfrm>
-          <a:prstGeom prst="rect">
-            <a:avLst/>
-          </a:prstGeom>
-          <a:noFill/>
-          <a:ln/>
-        </p:spPr>
-        <p:txBody>
-          <a:bodyPr wrap="square" lIns="0" tIns="0" rIns="0" bIns="0" rtlCol="0" anchor="ctr">
-            <a:normAutofit/>
-          </a:bodyPr>
-          <a:lstStyle/>
-          <a:p>
-            <a:pPr algn="ctr" indent="0" marL="0">
-              <a:buNone/>
-            </a:pPr>
-            <a:r>
-              <a:rPr lang="en-US" sz="1500" b="1" dirty="0">
-                <a:solidFill>
-                  <a:srgbClr val="FFFFFF"/>
-                </a:solidFill>
-                <a:latin typeface="Aptos" pitchFamily="34" charset="0"/>
-                <a:ea typeface="Aptos" pitchFamily="34" charset="-122"/>
-                <a:cs typeface="Aptos" pitchFamily="34" charset="-120"/>
-              </a:rPr>
-              <a:t>Document</a:t>
-            </a:r>
-            <a:endParaRPr lang="en-US" sz="1500" dirty="0"/>
+            <a:r>
+              <a:rPr lang="en-US" sz="1380" dirty="0">
+                <a:solidFill>
+                  <a:srgbClr val="17364A"/>
+                </a:solidFill>
+                <a:latin typeface="Aptos" pitchFamily="34" charset="0"/>
+                <a:ea typeface="Aptos" pitchFamily="34" charset="-122"/>
+                <a:cs typeface="Aptos" pitchFamily="34" charset="-120"/>
+              </a:rPr>
+              <a:t>Read the module for shared vocabulary and context.</a:t>
+            </a:r>
+            <a:endParaRPr lang="en-US" sz="1380" dirty="0"/>
+          </a:p>
+          <a:p>
+            <a:r>
+              <a:rPr lang="en-US" sz="1380" dirty="0">
+                <a:solidFill>
+                  <a:srgbClr val="17364A"/>
+                </a:solidFill>
+                <a:latin typeface="Aptos" pitchFamily="34" charset="0"/>
+                <a:ea typeface="Aptos" pitchFamily="34" charset="-122"/>
+                <a:cs typeface="Aptos" pitchFamily="34" charset="-120"/>
+              </a:rPr>
+              <a:t>Complete the practical exercise to apply the concept.</a:t>
+            </a:r>
+            <a:endParaRPr lang="en-US" sz="1380" dirty="0"/>
+          </a:p>
+          <a:p>
+            <a:r>
+              <a:rPr lang="en-US" sz="1380" dirty="0">
+                <a:solidFill>
+                  <a:srgbClr val="17364A"/>
+                </a:solidFill>
+                <a:latin typeface="Aptos" pitchFamily="34" charset="0"/>
+                <a:ea typeface="Aptos" pitchFamily="34" charset="-122"/>
+                <a:cs typeface="Aptos" pitchFamily="34" charset="-120"/>
+              </a:rPr>
+              <a:t>Use the notes and references for deeper review.</a:t>
+            </a:r>
+            <a:endParaRPr lang="en-US" sz="1380" dirty="0"/>
           </a:p>
         </p:txBody>
       </p:sp>
@@ -12429,13 +10955,11 @@
             </a:avLst>
           </a:prstGeom>
           <a:solidFill>
-            <a:srgbClr val="FFFFFF">
-              <a:alpha val="88000"/>
-            </a:srgbClr>
+            <a:srgbClr val="FFFFFF"/>
           </a:solidFill>
           <a:ln w="12700">
             <a:solidFill>
-              <a:srgbClr val="D6E8F2"/>
+              <a:srgbClr val="B9D7E6"/>
             </a:solidFill>
             <a:prstDash val="solid"/>
           </a:ln>
@@ -12443,30 +10967,42 @@
       </p:sp>
       <p:sp>
         <p:nvSpPr>
-          <p:cNvPr id="14" name="Shape 12"/>
-          <p:cNvSpPr/>
-          <p:nvPr/>
-        </p:nvSpPr>
-        <p:spPr>
-          <a:xfrm>
-            <a:off x="7927848" y="3319272"/>
-            <a:ext cx="792480" cy="749808"/>
-          </a:xfrm>
-          <a:prstGeom prst="roundRect">
-            <a:avLst>
-              <a:gd name="adj" fmla="val 14634"/>
-            </a:avLst>
-          </a:prstGeom>
-          <a:solidFill>
-            <a:srgbClr val="0068B7"/>
-          </a:solidFill>
-          <a:ln w="12700">
-            <a:solidFill>
-              <a:srgbClr val="0068B7"/>
-            </a:solidFill>
-            <a:prstDash val="solid"/>
-          </a:ln>
-        </p:spPr>
+          <p:cNvPr id="14" name="Text 12"/>
+          <p:cNvSpPr/>
+          <p:nvPr/>
+        </p:nvSpPr>
+        <p:spPr>
+          <a:xfrm>
+            <a:off x="7799832" y="2935224"/>
+            <a:ext cx="3145536" cy="256032"/>
+          </a:xfrm>
+          <a:prstGeom prst="rect">
+            <a:avLst/>
+          </a:prstGeom>
+          <a:noFill/>
+          <a:ln/>
+        </p:spPr>
+        <p:txBody>
+          <a:bodyPr wrap="square" lIns="0" tIns="0" rIns="0" bIns="0" rtlCol="0" anchor="ctr"/>
+          <a:lstStyle/>
+          <a:p>
+            <a:pPr indent="0" marL="0">
+              <a:buNone/>
+            </a:pPr>
+            <a:r>
+              <a:rPr lang="en-US" sz="1300" b="1" dirty="0">
+                <a:solidFill>
+                  <a:srgbClr val="0068B7"/>
+                </a:solidFill>
+                <a:latin typeface="Aptos" pitchFamily="34" charset="0"/>
+                <a:ea typeface="Aptos" pitchFamily="34" charset="-122"/>
+                <a:cs typeface="Aptos" pitchFamily="34" charset="-120"/>
+              </a:rPr>
+              <a:t>Concept checkpoints</a:t>
+            </a:r>
+            <a:endParaRPr lang="en-US" sz="1300" dirty="0"/>
+          </a:p>
+        </p:txBody>
       </p:sp>
       <p:sp>
         <p:nvSpPr>
@@ -12476,240 +11012,67 @@
         </p:nvSpPr>
         <p:spPr>
           <a:xfrm>
-            <a:off x="8001000" y="3511296"/>
-            <a:ext cx="646176" cy="310896"/>
-          </a:xfrm>
-          <a:prstGeom prst="rect">
-            <a:avLst/>
-          </a:prstGeom>
-          <a:noFill/>
-          <a:ln/>
-        </p:spPr>
-        <p:txBody>
-          <a:bodyPr wrap="square" lIns="0" tIns="0" rIns="0" bIns="0" rtlCol="0" anchor="ctr">
+            <a:off x="7818120" y="3300984"/>
+            <a:ext cx="3090672" cy="877824"/>
+          </a:xfrm>
+          <a:prstGeom prst="rect">
+            <a:avLst/>
+          </a:prstGeom>
+          <a:noFill/>
+          <a:ln/>
+        </p:spPr>
+        <p:txBody>
+          <a:bodyPr wrap="square" lIns="254" tIns="254" rIns="254" bIns="254" rtlCol="0" anchor="t">
             <a:normAutofit/>
           </a:bodyPr>
           <a:lstStyle/>
           <a:p>
-            <a:pPr algn="ctr" indent="0" marL="0">
-              <a:buNone/>
-            </a:pPr>
-            <a:r>
-              <a:rPr lang="en-US" sz="1500" b="1" dirty="0">
-                <a:solidFill>
-                  <a:srgbClr val="FFFFFF"/>
-                </a:solidFill>
-                <a:latin typeface="Aptos" pitchFamily="34" charset="0"/>
-                <a:ea typeface="Aptos" pitchFamily="34" charset="-122"/>
-                <a:cs typeface="Aptos" pitchFamily="34" charset="-120"/>
-              </a:rPr>
-              <a:t>Plan</a:t>
-            </a:r>
-            <a:endParaRPr lang="en-US" sz="1500" dirty="0"/>
+            <a:r>
+              <a:rPr lang="en-US" sz="1380" dirty="0">
+                <a:solidFill>
+                  <a:srgbClr val="17364A"/>
+                </a:solidFill>
+                <a:latin typeface="Aptos" pitchFamily="34" charset="0"/>
+                <a:ea typeface="Aptos" pitchFamily="34" charset="-122"/>
+                <a:cs typeface="Aptos" pitchFamily="34" charset="-120"/>
+              </a:rPr>
+              <a:t>Agentic workflow control plan</a:t>
+            </a:r>
+            <a:endParaRPr lang="en-US" sz="1380" dirty="0"/>
+          </a:p>
+          <a:p>
+            <a:r>
+              <a:rPr lang="en-US" sz="1380" dirty="0">
+                <a:solidFill>
+                  <a:srgbClr val="17364A"/>
+                </a:solidFill>
+                <a:latin typeface="Aptos" pitchFamily="34" charset="0"/>
+                <a:ea typeface="Aptos" pitchFamily="34" charset="-122"/>
+                <a:cs typeface="Aptos" pitchFamily="34" charset="-120"/>
+              </a:rPr>
+              <a:t>Allowed/prohibited action list</a:t>
+            </a:r>
+            <a:endParaRPr lang="en-US" sz="1380" dirty="0"/>
+          </a:p>
+          <a:p>
+            <a:r>
+              <a:rPr lang="en-US" sz="1380" dirty="0">
+                <a:solidFill>
+                  <a:srgbClr val="17364A"/>
+                </a:solidFill>
+                <a:latin typeface="Aptos" pitchFamily="34" charset="0"/>
+                <a:ea typeface="Aptos" pitchFamily="34" charset="-122"/>
+                <a:cs typeface="Aptos" pitchFamily="34" charset="-120"/>
+              </a:rPr>
+              <a:t>Human approval and escalation map</a:t>
+            </a:r>
+            <a:endParaRPr lang="en-US" sz="1380" dirty="0"/>
           </a:p>
         </p:txBody>
       </p:sp>
       <p:sp>
         <p:nvSpPr>
           <p:cNvPr id="16" name="Shape 14"/>
-          <p:cNvSpPr/>
-          <p:nvPr/>
-        </p:nvSpPr>
-        <p:spPr>
-          <a:xfrm>
-            <a:off x="8976360" y="3319272"/>
-            <a:ext cx="792480" cy="749808"/>
-          </a:xfrm>
-          <a:prstGeom prst="roundRect">
-            <a:avLst>
-              <a:gd name="adj" fmla="val 14634"/>
-            </a:avLst>
-          </a:prstGeom>
-          <a:solidFill>
-            <a:srgbClr val="2F8A28"/>
-          </a:solidFill>
-          <a:ln w="12700">
-            <a:solidFill>
-              <a:srgbClr val="2F8A28"/>
-            </a:solidFill>
-            <a:prstDash val="solid"/>
-          </a:ln>
-        </p:spPr>
-      </p:sp>
-      <p:sp>
-        <p:nvSpPr>
-          <p:cNvPr id="17" name="Text 15"/>
-          <p:cNvSpPr/>
-          <p:nvPr/>
-        </p:nvSpPr>
-        <p:spPr>
-          <a:xfrm>
-            <a:off x="9049512" y="3511296"/>
-            <a:ext cx="646176" cy="310896"/>
-          </a:xfrm>
-          <a:prstGeom prst="rect">
-            <a:avLst/>
-          </a:prstGeom>
-          <a:noFill/>
-          <a:ln/>
-        </p:spPr>
-        <p:txBody>
-          <a:bodyPr wrap="square" lIns="0" tIns="0" rIns="0" bIns="0" rtlCol="0" anchor="ctr">
-            <a:normAutofit/>
-          </a:bodyPr>
-          <a:lstStyle/>
-          <a:p>
-            <a:pPr algn="ctr" indent="0" marL="0">
-              <a:buNone/>
-            </a:pPr>
-            <a:r>
-              <a:rPr lang="en-US" sz="1500" b="1" dirty="0">
-                <a:solidFill>
-                  <a:srgbClr val="FFFFFF"/>
-                </a:solidFill>
-                <a:latin typeface="Aptos" pitchFamily="34" charset="0"/>
-                <a:ea typeface="Aptos" pitchFamily="34" charset="-122"/>
-                <a:cs typeface="Aptos" pitchFamily="34" charset="-120"/>
-              </a:rPr>
-              <a:t>Do</a:t>
-            </a:r>
-            <a:endParaRPr lang="en-US" sz="1500" dirty="0"/>
-          </a:p>
-        </p:txBody>
-      </p:sp>
-      <p:sp>
-        <p:nvSpPr>
-          <p:cNvPr id="18" name="Shape 16"/>
-          <p:cNvSpPr/>
-          <p:nvPr/>
-        </p:nvSpPr>
-        <p:spPr>
-          <a:xfrm>
-            <a:off x="10024872" y="3319272"/>
-            <a:ext cx="792480" cy="749808"/>
-          </a:xfrm>
-          <a:prstGeom prst="roundRect">
-            <a:avLst>
-              <a:gd name="adj" fmla="val 14634"/>
-            </a:avLst>
-          </a:prstGeom>
-          <a:solidFill>
-            <a:srgbClr val="D69A2D"/>
-          </a:solidFill>
-          <a:ln w="12700">
-            <a:solidFill>
-              <a:srgbClr val="D69A2D"/>
-            </a:solidFill>
-            <a:prstDash val="solid"/>
-          </a:ln>
-        </p:spPr>
-      </p:sp>
-      <p:sp>
-        <p:nvSpPr>
-          <p:cNvPr id="19" name="Text 17"/>
-          <p:cNvSpPr/>
-          <p:nvPr/>
-        </p:nvSpPr>
-        <p:spPr>
-          <a:xfrm>
-            <a:off x="10098024" y="3511296"/>
-            <a:ext cx="646176" cy="310896"/>
-          </a:xfrm>
-          <a:prstGeom prst="rect">
-            <a:avLst/>
-          </a:prstGeom>
-          <a:noFill/>
-          <a:ln/>
-        </p:spPr>
-        <p:txBody>
-          <a:bodyPr wrap="square" lIns="0" tIns="0" rIns="0" bIns="0" rtlCol="0" anchor="ctr">
-            <a:normAutofit/>
-          </a:bodyPr>
-          <a:lstStyle/>
-          <a:p>
-            <a:pPr algn="ctr" indent="0" marL="0">
-              <a:buNone/>
-            </a:pPr>
-            <a:r>
-              <a:rPr lang="en-US" sz="1500" b="1" dirty="0">
-                <a:solidFill>
-                  <a:srgbClr val="FFFFFF"/>
-                </a:solidFill>
-                <a:latin typeface="Aptos" pitchFamily="34" charset="0"/>
-                <a:ea typeface="Aptos" pitchFamily="34" charset="-122"/>
-                <a:cs typeface="Aptos" pitchFamily="34" charset="-120"/>
-              </a:rPr>
-              <a:t>Review</a:t>
-            </a:r>
-            <a:endParaRPr lang="en-US" sz="1500" dirty="0"/>
-          </a:p>
-        </p:txBody>
-      </p:sp>
-      <p:sp>
-        <p:nvSpPr>
-          <p:cNvPr id="20" name="Shape 18"/>
-          <p:cNvSpPr/>
-          <p:nvPr/>
-        </p:nvSpPr>
-        <p:spPr>
-          <a:xfrm>
-            <a:off x="8293608" y="4389120"/>
-            <a:ext cx="2157984" cy="0"/>
-          </a:xfrm>
-          <a:prstGeom prst="line">
-            <a:avLst/>
-          </a:prstGeom>
-          <a:noFill/>
-          <a:ln w="25400">
-            <a:solidFill>
-              <a:srgbClr val="8ABBD8"/>
-            </a:solidFill>
-            <a:prstDash val="solid"/>
-          </a:ln>
-        </p:spPr>
-      </p:sp>
-      <p:sp>
-        <p:nvSpPr>
-          <p:cNvPr id="21" name="Text 19"/>
-          <p:cNvSpPr/>
-          <p:nvPr/>
-        </p:nvSpPr>
-        <p:spPr>
-          <a:xfrm>
-            <a:off x="7909560" y="3977640"/>
-            <a:ext cx="2926080" cy="182880"/>
-          </a:xfrm>
-          <a:prstGeom prst="rect">
-            <a:avLst/>
-          </a:prstGeom>
-          <a:noFill/>
-          <a:ln/>
-        </p:spPr>
-        <p:txBody>
-          <a:bodyPr wrap="square" lIns="0" tIns="0" rIns="0" bIns="0" rtlCol="0" anchor="ctr"/>
-          <a:lstStyle/>
-          <a:p>
-            <a:pPr algn="ctr" indent="0" marL="0">
-              <a:buNone/>
-            </a:pPr>
-            <a:r>
-              <a:rPr lang="en-US" sz="1000" dirty="0">
-                <a:solidFill>
-                  <a:srgbClr val="003A63"/>
-                </a:solidFill>
-                <a:latin typeface="Aptos" pitchFamily="34" charset="0"/>
-                <a:ea typeface="Aptos" pitchFamily="34" charset="-122"/>
-                <a:cs typeface="Aptos" pitchFamily="34" charset="-120"/>
-              </a:rPr>
-              <a:t>Dependencies visible</a:t>
-            </a:r>
-            <a:endParaRPr lang="en-US" sz="1000" dirty="0"/>
-          </a:p>
-        </p:txBody>
-      </p:sp>
-      <p:sp>
-        <p:nvSpPr>
-          <p:cNvPr id="22" name="Shape 20"/>
           <p:cNvSpPr/>
           <p:nvPr/>
         </p:nvSpPr>
@@ -12736,7 +11099,7 @@
       </p:sp>
       <p:sp>
         <p:nvSpPr>
-          <p:cNvPr id="23" name="Text 21"/>
+          <p:cNvPr id="17" name="Text 15"/>
           <p:cNvSpPr/>
           <p:nvPr/>
         </p:nvSpPr>
@@ -12775,7 +11138,7 @@
       </p:sp>
       <p:sp>
         <p:nvSpPr>
-          <p:cNvPr id="24" name="Text 22"/>
+          <p:cNvPr id="18" name="Text 16"/>
           <p:cNvSpPr/>
           <p:nvPr/>
         </p:nvSpPr>
@@ -13283,13 +11646,11 @@
             </a:avLst>
           </a:prstGeom>
           <a:solidFill>
-            <a:srgbClr val="FFFFFF">
-              <a:alpha val="88000"/>
-            </a:srgbClr>
+            <a:srgbClr val="FFFFFF"/>
           </a:solidFill>
           <a:ln w="12700">
             <a:solidFill>
-              <a:srgbClr val="D6E8F2"/>
+              <a:srgbClr val="B9D7E6"/>
             </a:solidFill>
             <a:prstDash val="solid"/>
           </a:ln>
@@ -13297,30 +11658,42 @@
       </p:sp>
       <p:sp>
         <p:nvSpPr>
-          <p:cNvPr id="14" name="Shape 12"/>
-          <p:cNvSpPr/>
-          <p:nvPr/>
-        </p:nvSpPr>
-        <p:spPr>
-          <a:xfrm>
-            <a:off x="7927848" y="3319272"/>
-            <a:ext cx="792480" cy="749808"/>
-          </a:xfrm>
-          <a:prstGeom prst="roundRect">
-            <a:avLst>
-              <a:gd name="adj" fmla="val 14634"/>
-            </a:avLst>
-          </a:prstGeom>
-          <a:solidFill>
-            <a:srgbClr val="0068B7"/>
-          </a:solidFill>
-          <a:ln w="12700">
-            <a:solidFill>
-              <a:srgbClr val="0068B7"/>
-            </a:solidFill>
-            <a:prstDash val="solid"/>
-          </a:ln>
-        </p:spPr>
+          <p:cNvPr id="14" name="Text 12"/>
+          <p:cNvSpPr/>
+          <p:nvPr/>
+        </p:nvSpPr>
+        <p:spPr>
+          <a:xfrm>
+            <a:off x="7799832" y="2935224"/>
+            <a:ext cx="3145536" cy="256032"/>
+          </a:xfrm>
+          <a:prstGeom prst="rect">
+            <a:avLst/>
+          </a:prstGeom>
+          <a:noFill/>
+          <a:ln/>
+        </p:spPr>
+        <p:txBody>
+          <a:bodyPr wrap="square" lIns="0" tIns="0" rIns="0" bIns="0" rtlCol="0" anchor="ctr"/>
+          <a:lstStyle/>
+          <a:p>
+            <a:pPr indent="0" marL="0">
+              <a:buNone/>
+            </a:pPr>
+            <a:r>
+              <a:rPr lang="en-US" sz="1300" b="1" dirty="0">
+                <a:solidFill>
+                  <a:srgbClr val="0068B7"/>
+                </a:solidFill>
+                <a:latin typeface="Aptos" pitchFamily="34" charset="0"/>
+                <a:ea typeface="Aptos" pitchFamily="34" charset="-122"/>
+                <a:cs typeface="Aptos" pitchFamily="34" charset="-120"/>
+              </a:rPr>
+              <a:t>Concept checkpoints</a:t>
+            </a:r>
+            <a:endParaRPr lang="en-US" sz="1300" dirty="0"/>
+          </a:p>
+        </p:txBody>
       </p:sp>
       <p:sp>
         <p:nvSpPr>
@@ -13330,240 +11703,67 @@
         </p:nvSpPr>
         <p:spPr>
           <a:xfrm>
-            <a:off x="8001000" y="3511296"/>
-            <a:ext cx="646176" cy="310896"/>
-          </a:xfrm>
-          <a:prstGeom prst="rect">
-            <a:avLst/>
-          </a:prstGeom>
-          <a:noFill/>
-          <a:ln/>
-        </p:spPr>
-        <p:txBody>
-          <a:bodyPr wrap="square" lIns="0" tIns="0" rIns="0" bIns="0" rtlCol="0" anchor="ctr">
+            <a:off x="7818120" y="3300984"/>
+            <a:ext cx="3090672" cy="877824"/>
+          </a:xfrm>
+          <a:prstGeom prst="rect">
+            <a:avLst/>
+          </a:prstGeom>
+          <a:noFill/>
+          <a:ln/>
+        </p:spPr>
+        <p:txBody>
+          <a:bodyPr wrap="square" lIns="254" tIns="254" rIns="254" bIns="254" rtlCol="0" anchor="t">
             <a:normAutofit/>
           </a:bodyPr>
           <a:lstStyle/>
           <a:p>
-            <a:pPr algn="ctr" indent="0" marL="0">
-              <a:buNone/>
-            </a:pPr>
-            <a:r>
-              <a:rPr lang="en-US" sz="1500" b="1" dirty="0">
-                <a:solidFill>
-                  <a:srgbClr val="FFFFFF"/>
-                </a:solidFill>
-                <a:latin typeface="Aptos" pitchFamily="34" charset="0"/>
-                <a:ea typeface="Aptos" pitchFamily="34" charset="-122"/>
-                <a:cs typeface="Aptos" pitchFamily="34" charset="-120"/>
-              </a:rPr>
-              <a:t>Plan</a:t>
-            </a:r>
-            <a:endParaRPr lang="en-US" sz="1500" dirty="0"/>
+            <a:r>
+              <a:rPr lang="en-US" sz="1380" dirty="0">
+                <a:solidFill>
+                  <a:srgbClr val="17364A"/>
+                </a:solidFill>
+                <a:latin typeface="Aptos" pitchFamily="34" charset="0"/>
+                <a:ea typeface="Aptos" pitchFamily="34" charset="-122"/>
+                <a:cs typeface="Aptos" pitchFamily="34" charset="-120"/>
+              </a:rPr>
+              <a:t>1.</a:t>
+            </a:r>
+            <a:endParaRPr lang="en-US" sz="1380" dirty="0"/>
+          </a:p>
+          <a:p>
+            <a:r>
+              <a:rPr lang="en-US" sz="1380" dirty="0">
+                <a:solidFill>
+                  <a:srgbClr val="17364A"/>
+                </a:solidFill>
+                <a:latin typeface="Aptos" pitchFamily="34" charset="0"/>
+                <a:ea typeface="Aptos" pitchFamily="34" charset="-122"/>
+                <a:cs typeface="Aptos" pitchFamily="34" charset="-120"/>
+              </a:rPr>
+              <a:t>What makes agentic AI different from simple drafting support?</a:t>
+            </a:r>
+            <a:endParaRPr lang="en-US" sz="1380" dirty="0"/>
+          </a:p>
+          <a:p>
+            <a:r>
+              <a:rPr lang="en-US" sz="1380" dirty="0">
+                <a:solidFill>
+                  <a:srgbClr val="17364A"/>
+                </a:solidFill>
+                <a:latin typeface="Aptos" pitchFamily="34" charset="0"/>
+                <a:ea typeface="Aptos" pitchFamily="34" charset="-122"/>
+                <a:cs typeface="Aptos" pitchFamily="34" charset="-120"/>
+              </a:rPr>
+              <a:t>2.</a:t>
+            </a:r>
+            <a:endParaRPr lang="en-US" sz="1380" dirty="0"/>
           </a:p>
         </p:txBody>
       </p:sp>
       <p:sp>
         <p:nvSpPr>
           <p:cNvPr id="16" name="Shape 14"/>
-          <p:cNvSpPr/>
-          <p:nvPr/>
-        </p:nvSpPr>
-        <p:spPr>
-          <a:xfrm>
-            <a:off x="8976360" y="3319272"/>
-            <a:ext cx="792480" cy="749808"/>
-          </a:xfrm>
-          <a:prstGeom prst="roundRect">
-            <a:avLst>
-              <a:gd name="adj" fmla="val 14634"/>
-            </a:avLst>
-          </a:prstGeom>
-          <a:solidFill>
-            <a:srgbClr val="2F8A28"/>
-          </a:solidFill>
-          <a:ln w="12700">
-            <a:solidFill>
-              <a:srgbClr val="2F8A28"/>
-            </a:solidFill>
-            <a:prstDash val="solid"/>
-          </a:ln>
-        </p:spPr>
-      </p:sp>
-      <p:sp>
-        <p:nvSpPr>
-          <p:cNvPr id="17" name="Text 15"/>
-          <p:cNvSpPr/>
-          <p:nvPr/>
-        </p:nvSpPr>
-        <p:spPr>
-          <a:xfrm>
-            <a:off x="9049512" y="3511296"/>
-            <a:ext cx="646176" cy="310896"/>
-          </a:xfrm>
-          <a:prstGeom prst="rect">
-            <a:avLst/>
-          </a:prstGeom>
-          <a:noFill/>
-          <a:ln/>
-        </p:spPr>
-        <p:txBody>
-          <a:bodyPr wrap="square" lIns="0" tIns="0" rIns="0" bIns="0" rtlCol="0" anchor="ctr">
-            <a:normAutofit/>
-          </a:bodyPr>
-          <a:lstStyle/>
-          <a:p>
-            <a:pPr algn="ctr" indent="0" marL="0">
-              <a:buNone/>
-            </a:pPr>
-            <a:r>
-              <a:rPr lang="en-US" sz="1500" b="1" dirty="0">
-                <a:solidFill>
-                  <a:srgbClr val="FFFFFF"/>
-                </a:solidFill>
-                <a:latin typeface="Aptos" pitchFamily="34" charset="0"/>
-                <a:ea typeface="Aptos" pitchFamily="34" charset="-122"/>
-                <a:cs typeface="Aptos" pitchFamily="34" charset="-120"/>
-              </a:rPr>
-              <a:t>Do</a:t>
-            </a:r>
-            <a:endParaRPr lang="en-US" sz="1500" dirty="0"/>
-          </a:p>
-        </p:txBody>
-      </p:sp>
-      <p:sp>
-        <p:nvSpPr>
-          <p:cNvPr id="18" name="Shape 16"/>
-          <p:cNvSpPr/>
-          <p:nvPr/>
-        </p:nvSpPr>
-        <p:spPr>
-          <a:xfrm>
-            <a:off x="10024872" y="3319272"/>
-            <a:ext cx="792480" cy="749808"/>
-          </a:xfrm>
-          <a:prstGeom prst="roundRect">
-            <a:avLst>
-              <a:gd name="adj" fmla="val 14634"/>
-            </a:avLst>
-          </a:prstGeom>
-          <a:solidFill>
-            <a:srgbClr val="D69A2D"/>
-          </a:solidFill>
-          <a:ln w="12700">
-            <a:solidFill>
-              <a:srgbClr val="D69A2D"/>
-            </a:solidFill>
-            <a:prstDash val="solid"/>
-          </a:ln>
-        </p:spPr>
-      </p:sp>
-      <p:sp>
-        <p:nvSpPr>
-          <p:cNvPr id="19" name="Text 17"/>
-          <p:cNvSpPr/>
-          <p:nvPr/>
-        </p:nvSpPr>
-        <p:spPr>
-          <a:xfrm>
-            <a:off x="10098024" y="3511296"/>
-            <a:ext cx="646176" cy="310896"/>
-          </a:xfrm>
-          <a:prstGeom prst="rect">
-            <a:avLst/>
-          </a:prstGeom>
-          <a:noFill/>
-          <a:ln/>
-        </p:spPr>
-        <p:txBody>
-          <a:bodyPr wrap="square" lIns="0" tIns="0" rIns="0" bIns="0" rtlCol="0" anchor="ctr">
-            <a:normAutofit/>
-          </a:bodyPr>
-          <a:lstStyle/>
-          <a:p>
-            <a:pPr algn="ctr" indent="0" marL="0">
-              <a:buNone/>
-            </a:pPr>
-            <a:r>
-              <a:rPr lang="en-US" sz="1500" b="1" dirty="0">
-                <a:solidFill>
-                  <a:srgbClr val="FFFFFF"/>
-                </a:solidFill>
-                <a:latin typeface="Aptos" pitchFamily="34" charset="0"/>
-                <a:ea typeface="Aptos" pitchFamily="34" charset="-122"/>
-                <a:cs typeface="Aptos" pitchFamily="34" charset="-120"/>
-              </a:rPr>
-              <a:t>Review</a:t>
-            </a:r>
-            <a:endParaRPr lang="en-US" sz="1500" dirty="0"/>
-          </a:p>
-        </p:txBody>
-      </p:sp>
-      <p:sp>
-        <p:nvSpPr>
-          <p:cNvPr id="20" name="Shape 18"/>
-          <p:cNvSpPr/>
-          <p:nvPr/>
-        </p:nvSpPr>
-        <p:spPr>
-          <a:xfrm>
-            <a:off x="8293608" y="4389120"/>
-            <a:ext cx="2157984" cy="0"/>
-          </a:xfrm>
-          <a:prstGeom prst="line">
-            <a:avLst/>
-          </a:prstGeom>
-          <a:noFill/>
-          <a:ln w="25400">
-            <a:solidFill>
-              <a:srgbClr val="8ABBD8"/>
-            </a:solidFill>
-            <a:prstDash val="solid"/>
-          </a:ln>
-        </p:spPr>
-      </p:sp>
-      <p:sp>
-        <p:nvSpPr>
-          <p:cNvPr id="21" name="Text 19"/>
-          <p:cNvSpPr/>
-          <p:nvPr/>
-        </p:nvSpPr>
-        <p:spPr>
-          <a:xfrm>
-            <a:off x="7909560" y="3977640"/>
-            <a:ext cx="2926080" cy="182880"/>
-          </a:xfrm>
-          <a:prstGeom prst="rect">
-            <a:avLst/>
-          </a:prstGeom>
-          <a:noFill/>
-          <a:ln/>
-        </p:spPr>
-        <p:txBody>
-          <a:bodyPr wrap="square" lIns="0" tIns="0" rIns="0" bIns="0" rtlCol="0" anchor="ctr"/>
-          <a:lstStyle/>
-          <a:p>
-            <a:pPr algn="ctr" indent="0" marL="0">
-              <a:buNone/>
-            </a:pPr>
-            <a:r>
-              <a:rPr lang="en-US" sz="1000" dirty="0">
-                <a:solidFill>
-                  <a:srgbClr val="003A63"/>
-                </a:solidFill>
-                <a:latin typeface="Aptos" pitchFamily="34" charset="0"/>
-                <a:ea typeface="Aptos" pitchFamily="34" charset="-122"/>
-                <a:cs typeface="Aptos" pitchFamily="34" charset="-120"/>
-              </a:rPr>
-              <a:t>Dependencies visible</a:t>
-            </a:r>
-            <a:endParaRPr lang="en-US" sz="1000" dirty="0"/>
-          </a:p>
-        </p:txBody>
-      </p:sp>
-      <p:sp>
-        <p:nvSpPr>
-          <p:cNvPr id="22" name="Shape 20"/>
           <p:cNvSpPr/>
           <p:nvPr/>
         </p:nvSpPr>
@@ -13590,7 +11790,7 @@
       </p:sp>
       <p:sp>
         <p:nvSpPr>
-          <p:cNvPr id="23" name="Text 21"/>
+          <p:cNvPr id="17" name="Text 15"/>
           <p:cNvSpPr/>
           <p:nvPr/>
         </p:nvSpPr>
@@ -13629,7 +11829,7 @@
       </p:sp>
       <p:sp>
         <p:nvSpPr>
-          <p:cNvPr id="24" name="Text 22"/>
+          <p:cNvPr id="18" name="Text 16"/>
           <p:cNvSpPr/>
           <p:nvPr/>
         </p:nvSpPr>
@@ -14137,13 +12337,11 @@
             </a:avLst>
           </a:prstGeom>
           <a:solidFill>
-            <a:srgbClr val="FFFFFF">
-              <a:alpha val="88000"/>
-            </a:srgbClr>
+            <a:srgbClr val="FFFFFF"/>
           </a:solidFill>
           <a:ln w="12700">
             <a:solidFill>
-              <a:srgbClr val="D6E8F2"/>
+              <a:srgbClr val="B9D7E6"/>
             </a:solidFill>
             <a:prstDash val="solid"/>
           </a:ln>
@@ -14151,30 +12349,42 @@
       </p:sp>
       <p:sp>
         <p:nvSpPr>
-          <p:cNvPr id="14" name="Shape 12"/>
-          <p:cNvSpPr/>
-          <p:nvPr/>
-        </p:nvSpPr>
-        <p:spPr>
-          <a:xfrm>
-            <a:off x="7927848" y="3319272"/>
-            <a:ext cx="792480" cy="749808"/>
-          </a:xfrm>
-          <a:prstGeom prst="roundRect">
-            <a:avLst>
-              <a:gd name="adj" fmla="val 14634"/>
-            </a:avLst>
-          </a:prstGeom>
-          <a:solidFill>
-            <a:srgbClr val="0068B7"/>
-          </a:solidFill>
-          <a:ln w="12700">
-            <a:solidFill>
-              <a:srgbClr val="0068B7"/>
-            </a:solidFill>
-            <a:prstDash val="solid"/>
-          </a:ln>
-        </p:spPr>
+          <p:cNvPr id="14" name="Text 12"/>
+          <p:cNvSpPr/>
+          <p:nvPr/>
+        </p:nvSpPr>
+        <p:spPr>
+          <a:xfrm>
+            <a:off x="7799832" y="2935224"/>
+            <a:ext cx="3145536" cy="256032"/>
+          </a:xfrm>
+          <a:prstGeom prst="rect">
+            <a:avLst/>
+          </a:prstGeom>
+          <a:noFill/>
+          <a:ln/>
+        </p:spPr>
+        <p:txBody>
+          <a:bodyPr wrap="square" lIns="0" tIns="0" rIns="0" bIns="0" rtlCol="0" anchor="ctr"/>
+          <a:lstStyle/>
+          <a:p>
+            <a:pPr indent="0" marL="0">
+              <a:buNone/>
+            </a:pPr>
+            <a:r>
+              <a:rPr lang="en-US" sz="1300" b="1" dirty="0">
+                <a:solidFill>
+                  <a:srgbClr val="0068B7"/>
+                </a:solidFill>
+                <a:latin typeface="Aptos" pitchFamily="34" charset="0"/>
+                <a:ea typeface="Aptos" pitchFamily="34" charset="-122"/>
+                <a:cs typeface="Aptos" pitchFamily="34" charset="-120"/>
+              </a:rPr>
+              <a:t>Concept checkpoints</a:t>
+            </a:r>
+            <a:endParaRPr lang="en-US" sz="1300" dirty="0"/>
+          </a:p>
+        </p:txBody>
       </p:sp>
       <p:sp>
         <p:nvSpPr>
@@ -14184,240 +12394,53 @@
         </p:nvSpPr>
         <p:spPr>
           <a:xfrm>
-            <a:off x="8001000" y="3511296"/>
-            <a:ext cx="646176" cy="310896"/>
-          </a:xfrm>
-          <a:prstGeom prst="rect">
-            <a:avLst/>
-          </a:prstGeom>
-          <a:noFill/>
-          <a:ln/>
-        </p:spPr>
-        <p:txBody>
-          <a:bodyPr wrap="square" lIns="0" tIns="0" rIns="0" bIns="0" rtlCol="0" anchor="ctr">
+            <a:off x="7818120" y="3300984"/>
+            <a:ext cx="3090672" cy="877824"/>
+          </a:xfrm>
+          <a:prstGeom prst="rect">
+            <a:avLst/>
+          </a:prstGeom>
+          <a:noFill/>
+          <a:ln/>
+        </p:spPr>
+        <p:txBody>
+          <a:bodyPr wrap="square" lIns="254" tIns="254" rIns="254" bIns="254" rtlCol="0" anchor="t">
             <a:normAutofit/>
           </a:bodyPr>
           <a:lstStyle/>
           <a:p>
-            <a:pPr algn="ctr" indent="0" marL="0">
-              <a:buNone/>
-            </a:pPr>
-            <a:r>
-              <a:rPr lang="en-US" sz="1500" b="1" dirty="0">
-                <a:solidFill>
-                  <a:srgbClr val="FFFFFF"/>
-                </a:solidFill>
-                <a:latin typeface="Aptos" pitchFamily="34" charset="0"/>
-                <a:ea typeface="Aptos" pitchFamily="34" charset="-122"/>
-                <a:cs typeface="Aptos" pitchFamily="34" charset="-120"/>
-              </a:rPr>
-              <a:t>Plan</a:t>
-            </a:r>
-            <a:endParaRPr lang="en-US" sz="1500" dirty="0"/>
+            <a:r>
+              <a:rPr lang="en-US" sz="1380" dirty="0">
+                <a:solidFill>
+                  <a:srgbClr val="17364A"/>
+                </a:solidFill>
+                <a:latin typeface="Aptos" pitchFamily="34" charset="0"/>
+                <a:ea typeface="Aptos" pitchFamily="34" charset="-122"/>
+                <a:cs typeface="Aptos" pitchFamily="34" charset="-120"/>
+              </a:rPr>
+              <a:t>NIST Artificial Intelligence Risk Management Framework:.</a:t>
+            </a:r>
+            <a:endParaRPr lang="en-US" sz="1380" dirty="0"/>
+          </a:p>
+          <a:p>
+            <a:r>
+              <a:rPr lang="en-US" sz="1380" dirty="0">
+                <a:solidFill>
+                  <a:srgbClr val="17364A"/>
+                </a:solidFill>
+                <a:latin typeface="Aptos" pitchFamily="34" charset="0"/>
+                <a:ea typeface="Aptos" pitchFamily="34" charset="-122"/>
+                <a:cs typeface="Aptos" pitchFamily="34" charset="-120"/>
+              </a:rPr>
+              <a:t>NIST Privacy Framework: https://www.nist.gov/privacy-framework</a:t>
+            </a:r>
+            <a:endParaRPr lang="en-US" sz="1380" dirty="0"/>
           </a:p>
         </p:txBody>
       </p:sp>
       <p:sp>
         <p:nvSpPr>
           <p:cNvPr id="16" name="Shape 14"/>
-          <p:cNvSpPr/>
-          <p:nvPr/>
-        </p:nvSpPr>
-        <p:spPr>
-          <a:xfrm>
-            <a:off x="8976360" y="3319272"/>
-            <a:ext cx="792480" cy="749808"/>
-          </a:xfrm>
-          <a:prstGeom prst="roundRect">
-            <a:avLst>
-              <a:gd name="adj" fmla="val 14634"/>
-            </a:avLst>
-          </a:prstGeom>
-          <a:solidFill>
-            <a:srgbClr val="2F8A28"/>
-          </a:solidFill>
-          <a:ln w="12700">
-            <a:solidFill>
-              <a:srgbClr val="2F8A28"/>
-            </a:solidFill>
-            <a:prstDash val="solid"/>
-          </a:ln>
-        </p:spPr>
-      </p:sp>
-      <p:sp>
-        <p:nvSpPr>
-          <p:cNvPr id="17" name="Text 15"/>
-          <p:cNvSpPr/>
-          <p:nvPr/>
-        </p:nvSpPr>
-        <p:spPr>
-          <a:xfrm>
-            <a:off x="9049512" y="3511296"/>
-            <a:ext cx="646176" cy="310896"/>
-          </a:xfrm>
-          <a:prstGeom prst="rect">
-            <a:avLst/>
-          </a:prstGeom>
-          <a:noFill/>
-          <a:ln/>
-        </p:spPr>
-        <p:txBody>
-          <a:bodyPr wrap="square" lIns="0" tIns="0" rIns="0" bIns="0" rtlCol="0" anchor="ctr">
-            <a:normAutofit/>
-          </a:bodyPr>
-          <a:lstStyle/>
-          <a:p>
-            <a:pPr algn="ctr" indent="0" marL="0">
-              <a:buNone/>
-            </a:pPr>
-            <a:r>
-              <a:rPr lang="en-US" sz="1500" b="1" dirty="0">
-                <a:solidFill>
-                  <a:srgbClr val="FFFFFF"/>
-                </a:solidFill>
-                <a:latin typeface="Aptos" pitchFamily="34" charset="0"/>
-                <a:ea typeface="Aptos" pitchFamily="34" charset="-122"/>
-                <a:cs typeface="Aptos" pitchFamily="34" charset="-120"/>
-              </a:rPr>
-              <a:t>Do</a:t>
-            </a:r>
-            <a:endParaRPr lang="en-US" sz="1500" dirty="0"/>
-          </a:p>
-        </p:txBody>
-      </p:sp>
-      <p:sp>
-        <p:nvSpPr>
-          <p:cNvPr id="18" name="Shape 16"/>
-          <p:cNvSpPr/>
-          <p:nvPr/>
-        </p:nvSpPr>
-        <p:spPr>
-          <a:xfrm>
-            <a:off x="10024872" y="3319272"/>
-            <a:ext cx="792480" cy="749808"/>
-          </a:xfrm>
-          <a:prstGeom prst="roundRect">
-            <a:avLst>
-              <a:gd name="adj" fmla="val 14634"/>
-            </a:avLst>
-          </a:prstGeom>
-          <a:solidFill>
-            <a:srgbClr val="D69A2D"/>
-          </a:solidFill>
-          <a:ln w="12700">
-            <a:solidFill>
-              <a:srgbClr val="D69A2D"/>
-            </a:solidFill>
-            <a:prstDash val="solid"/>
-          </a:ln>
-        </p:spPr>
-      </p:sp>
-      <p:sp>
-        <p:nvSpPr>
-          <p:cNvPr id="19" name="Text 17"/>
-          <p:cNvSpPr/>
-          <p:nvPr/>
-        </p:nvSpPr>
-        <p:spPr>
-          <a:xfrm>
-            <a:off x="10098024" y="3511296"/>
-            <a:ext cx="646176" cy="310896"/>
-          </a:xfrm>
-          <a:prstGeom prst="rect">
-            <a:avLst/>
-          </a:prstGeom>
-          <a:noFill/>
-          <a:ln/>
-        </p:spPr>
-        <p:txBody>
-          <a:bodyPr wrap="square" lIns="0" tIns="0" rIns="0" bIns="0" rtlCol="0" anchor="ctr">
-            <a:normAutofit/>
-          </a:bodyPr>
-          <a:lstStyle/>
-          <a:p>
-            <a:pPr algn="ctr" indent="0" marL="0">
-              <a:buNone/>
-            </a:pPr>
-            <a:r>
-              <a:rPr lang="en-US" sz="1500" b="1" dirty="0">
-                <a:solidFill>
-                  <a:srgbClr val="FFFFFF"/>
-                </a:solidFill>
-                <a:latin typeface="Aptos" pitchFamily="34" charset="0"/>
-                <a:ea typeface="Aptos" pitchFamily="34" charset="-122"/>
-                <a:cs typeface="Aptos" pitchFamily="34" charset="-120"/>
-              </a:rPr>
-              <a:t>Review</a:t>
-            </a:r>
-            <a:endParaRPr lang="en-US" sz="1500" dirty="0"/>
-          </a:p>
-        </p:txBody>
-      </p:sp>
-      <p:sp>
-        <p:nvSpPr>
-          <p:cNvPr id="20" name="Shape 18"/>
-          <p:cNvSpPr/>
-          <p:nvPr/>
-        </p:nvSpPr>
-        <p:spPr>
-          <a:xfrm>
-            <a:off x="8293608" y="4389120"/>
-            <a:ext cx="2157984" cy="0"/>
-          </a:xfrm>
-          <a:prstGeom prst="line">
-            <a:avLst/>
-          </a:prstGeom>
-          <a:noFill/>
-          <a:ln w="25400">
-            <a:solidFill>
-              <a:srgbClr val="8ABBD8"/>
-            </a:solidFill>
-            <a:prstDash val="solid"/>
-          </a:ln>
-        </p:spPr>
-      </p:sp>
-      <p:sp>
-        <p:nvSpPr>
-          <p:cNvPr id="21" name="Text 19"/>
-          <p:cNvSpPr/>
-          <p:nvPr/>
-        </p:nvSpPr>
-        <p:spPr>
-          <a:xfrm>
-            <a:off x="7909560" y="3977640"/>
-            <a:ext cx="2926080" cy="182880"/>
-          </a:xfrm>
-          <a:prstGeom prst="rect">
-            <a:avLst/>
-          </a:prstGeom>
-          <a:noFill/>
-          <a:ln/>
-        </p:spPr>
-        <p:txBody>
-          <a:bodyPr wrap="square" lIns="0" tIns="0" rIns="0" bIns="0" rtlCol="0" anchor="ctr"/>
-          <a:lstStyle/>
-          <a:p>
-            <a:pPr algn="ctr" indent="0" marL="0">
-              <a:buNone/>
-            </a:pPr>
-            <a:r>
-              <a:rPr lang="en-US" sz="1000" dirty="0">
-                <a:solidFill>
-                  <a:srgbClr val="003A63"/>
-                </a:solidFill>
-                <a:latin typeface="Aptos" pitchFamily="34" charset="0"/>
-                <a:ea typeface="Aptos" pitchFamily="34" charset="-122"/>
-                <a:cs typeface="Aptos" pitchFamily="34" charset="-120"/>
-              </a:rPr>
-              <a:t>Dependencies visible</a:t>
-            </a:r>
-            <a:endParaRPr lang="en-US" sz="1000" dirty="0"/>
-          </a:p>
-        </p:txBody>
-      </p:sp>
-      <p:sp>
-        <p:nvSpPr>
-          <p:cNvPr id="22" name="Shape 20"/>
           <p:cNvSpPr/>
           <p:nvPr/>
         </p:nvSpPr>
@@ -14444,7 +12467,7 @@
       </p:sp>
       <p:sp>
         <p:nvSpPr>
-          <p:cNvPr id="23" name="Text 21"/>
+          <p:cNvPr id="17" name="Text 15"/>
           <p:cNvSpPr/>
           <p:nvPr/>
         </p:nvSpPr>
@@ -14483,7 +12506,7 @@
       </p:sp>
       <p:sp>
         <p:nvSpPr>
-          <p:cNvPr id="24" name="Text 22"/>
+          <p:cNvPr id="18" name="Text 16"/>
           <p:cNvSpPr/>
           <p:nvPr/>
         </p:nvSpPr>
@@ -14996,20 +13019,20 @@
         </p:nvSpPr>
         <p:spPr>
           <a:xfrm>
-            <a:off x="7818120" y="3977640"/>
-            <a:ext cx="972312" cy="749808"/>
+            <a:off x="8046720" y="3794760"/>
+            <a:ext cx="3063240" cy="1600200"/>
           </a:xfrm>
           <a:prstGeom prst="roundRect">
             <a:avLst>
-              <a:gd name="adj" fmla="val 14634"/>
+              <a:gd name="adj" fmla="val 6857"/>
             </a:avLst>
           </a:prstGeom>
           <a:solidFill>
-            <a:srgbClr val="0068B7"/>
+            <a:srgbClr val="FFFFFF"/>
           </a:solidFill>
           <a:ln w="12700">
             <a:solidFill>
-              <a:srgbClr val="0068B7"/>
+              <a:srgbClr val="B9D7E6"/>
             </a:solidFill>
             <a:prstDash val="solid"/>
           </a:ln>
@@ -15023,172 +13046,100 @@
         </p:nvSpPr>
         <p:spPr>
           <a:xfrm>
-            <a:off x="7891272" y="4169664"/>
-            <a:ext cx="826008" cy="310896"/>
-          </a:xfrm>
-          <a:prstGeom prst="rect">
-            <a:avLst/>
-          </a:prstGeom>
-          <a:noFill/>
-          <a:ln/>
-        </p:spPr>
-        <p:txBody>
-          <a:bodyPr wrap="square" lIns="0" tIns="0" rIns="0" bIns="0" rtlCol="0" anchor="ctr">
+            <a:off x="8211312" y="3941064"/>
+            <a:ext cx="2734056" cy="256032"/>
+          </a:xfrm>
+          <a:prstGeom prst="rect">
+            <a:avLst/>
+          </a:prstGeom>
+          <a:noFill/>
+          <a:ln/>
+        </p:spPr>
+        <p:txBody>
+          <a:bodyPr wrap="square" lIns="0" tIns="0" rIns="0" bIns="0" rtlCol="0" anchor="ctr"/>
+          <a:lstStyle/>
+          <a:p>
+            <a:pPr indent="0" marL="0">
+              <a:buNone/>
+            </a:pPr>
+            <a:r>
+              <a:rPr lang="en-US" sz="1300" b="1" dirty="0">
+                <a:solidFill>
+                  <a:srgbClr val="0068B7"/>
+                </a:solidFill>
+                <a:latin typeface="Aptos" pitchFamily="34" charset="0"/>
+                <a:ea typeface="Aptos" pitchFamily="34" charset="-122"/>
+                <a:cs typeface="Aptos" pitchFamily="34" charset="-120"/>
+              </a:rPr>
+              <a:t>Use the play links to</a:t>
+            </a:r>
+            <a:endParaRPr lang="en-US" sz="1300" dirty="0"/>
+          </a:p>
+        </p:txBody>
+      </p:sp>
+      <p:sp>
+        <p:nvSpPr>
+          <p:cNvPr id="15" name="Text 13"/>
+          <p:cNvSpPr/>
+          <p:nvPr/>
+        </p:nvSpPr>
+        <p:spPr>
+          <a:xfrm>
+            <a:off x="8229600" y="4306824"/>
+            <a:ext cx="2679192" cy="941832"/>
+          </a:xfrm>
+          <a:prstGeom prst="rect">
+            <a:avLst/>
+          </a:prstGeom>
+          <a:noFill/>
+          <a:ln/>
+        </p:spPr>
+        <p:txBody>
+          <a:bodyPr wrap="square" lIns="254" tIns="254" rIns="254" bIns="254" rtlCol="0" anchor="t">
             <a:normAutofit/>
           </a:bodyPr>
           <a:lstStyle/>
           <a:p>
-            <a:pPr algn="ctr" indent="0" marL="0">
-              <a:buNone/>
-            </a:pPr>
-            <a:r>
-              <a:rPr lang="en-US" sz="1500" b="1" dirty="0">
-                <a:solidFill>
-                  <a:srgbClr val="FFFFFF"/>
-                </a:solidFill>
-                <a:latin typeface="Aptos" pitchFamily="34" charset="0"/>
-                <a:ea typeface="Aptos" pitchFamily="34" charset="-122"/>
-                <a:cs typeface="Aptos" pitchFamily="34" charset="-120"/>
-              </a:rPr>
-              <a:t>Lesson</a:t>
-            </a:r>
-            <a:endParaRPr lang="en-US" sz="1500" dirty="0"/>
-          </a:p>
-        </p:txBody>
-      </p:sp>
-      <p:sp>
-        <p:nvSpPr>
-          <p:cNvPr id="15" name="Shape 13"/>
-          <p:cNvSpPr/>
-          <p:nvPr/>
-        </p:nvSpPr>
-        <p:spPr>
-          <a:xfrm>
-            <a:off x="9046464" y="3977640"/>
-            <a:ext cx="972312" cy="749808"/>
-          </a:xfrm>
-          <a:prstGeom prst="roundRect">
-            <a:avLst>
-              <a:gd name="adj" fmla="val 14634"/>
-            </a:avLst>
-          </a:prstGeom>
-          <a:solidFill>
-            <a:srgbClr val="2F8A28"/>
-          </a:solidFill>
-          <a:ln w="12700">
-            <a:solidFill>
-              <a:srgbClr val="2F8A28"/>
-            </a:solidFill>
-            <a:prstDash val="solid"/>
-          </a:ln>
-        </p:spPr>
-      </p:sp>
-      <p:sp>
-        <p:nvSpPr>
-          <p:cNvPr id="16" name="Text 14"/>
-          <p:cNvSpPr/>
-          <p:nvPr/>
-        </p:nvSpPr>
-        <p:spPr>
-          <a:xfrm>
-            <a:off x="9119616" y="4169664"/>
-            <a:ext cx="826008" cy="310896"/>
-          </a:xfrm>
-          <a:prstGeom prst="rect">
-            <a:avLst/>
-          </a:prstGeom>
-          <a:noFill/>
-          <a:ln/>
-        </p:spPr>
-        <p:txBody>
-          <a:bodyPr wrap="square" lIns="0" tIns="0" rIns="0" bIns="0" rtlCol="0" anchor="ctr">
-            <a:normAutofit/>
-          </a:bodyPr>
-          <a:lstStyle/>
-          <a:p>
-            <a:pPr algn="ctr" indent="0" marL="0">
-              <a:buNone/>
-            </a:pPr>
-            <a:r>
-              <a:rPr lang="en-US" sz="1500" b="1" dirty="0">
-                <a:solidFill>
-                  <a:srgbClr val="FFFFFF"/>
-                </a:solidFill>
-                <a:latin typeface="Aptos" pitchFamily="34" charset="0"/>
-                <a:ea typeface="Aptos" pitchFamily="34" charset="-122"/>
-                <a:cs typeface="Aptos" pitchFamily="34" charset="-120"/>
-              </a:rPr>
-              <a:t>Plays</a:t>
-            </a:r>
-            <a:endParaRPr lang="en-US" sz="1500" dirty="0"/>
-          </a:p>
-        </p:txBody>
-      </p:sp>
-      <p:sp>
-        <p:nvSpPr>
-          <p:cNvPr id="17" name="Shape 15"/>
-          <p:cNvSpPr/>
-          <p:nvPr/>
-        </p:nvSpPr>
-        <p:spPr>
-          <a:xfrm>
-            <a:off x="10274808" y="3977640"/>
-            <a:ext cx="972312" cy="749808"/>
-          </a:xfrm>
-          <a:prstGeom prst="roundRect">
-            <a:avLst>
-              <a:gd name="adj" fmla="val 14634"/>
-            </a:avLst>
-          </a:prstGeom>
-          <a:solidFill>
-            <a:srgbClr val="6A4CA3"/>
-          </a:solidFill>
-          <a:ln w="12700">
-            <a:solidFill>
-              <a:srgbClr val="6A4CA3"/>
-            </a:solidFill>
-            <a:prstDash val="solid"/>
-          </a:ln>
-        </p:spPr>
-      </p:sp>
-      <p:sp>
-        <p:nvSpPr>
-          <p:cNvPr id="18" name="Text 16"/>
-          <p:cNvSpPr/>
-          <p:nvPr/>
-        </p:nvSpPr>
-        <p:spPr>
-          <a:xfrm>
-            <a:off x="10347960" y="4169664"/>
-            <a:ext cx="826008" cy="310896"/>
-          </a:xfrm>
-          <a:prstGeom prst="rect">
-            <a:avLst/>
-          </a:prstGeom>
-          <a:noFill/>
-          <a:ln/>
-        </p:spPr>
-        <p:txBody>
-          <a:bodyPr wrap="square" lIns="0" tIns="0" rIns="0" bIns="0" rtlCol="0" anchor="ctr">
-            <a:normAutofit/>
-          </a:bodyPr>
-          <a:lstStyle/>
-          <a:p>
-            <a:pPr algn="ctr" indent="0" marL="0">
-              <a:buNone/>
-            </a:pPr>
-            <a:r>
-              <a:rPr lang="en-US" sz="1500" b="1" dirty="0">
-                <a:solidFill>
-                  <a:srgbClr val="FFFFFF"/>
-                </a:solidFill>
-                <a:latin typeface="Aptos" pitchFamily="34" charset="0"/>
-                <a:ea typeface="Aptos" pitchFamily="34" charset="-122"/>
-                <a:cs typeface="Aptos" pitchFamily="34" charset="-120"/>
-              </a:rPr>
-              <a:t>Action</a:t>
-            </a:r>
-            <a:endParaRPr lang="en-US" sz="1500" dirty="0"/>
+            <a:r>
+              <a:rPr lang="en-US" sz="1380" dirty="0">
+                <a:solidFill>
+                  <a:srgbClr val="17364A"/>
+                </a:solidFill>
+                <a:latin typeface="Aptos" pitchFamily="34" charset="0"/>
+                <a:ea typeface="Aptos" pitchFamily="34" charset="-122"/>
+                <a:cs typeface="Aptos" pitchFamily="34" charset="-120"/>
+              </a:rPr>
+              <a:t>Locate the decision point in the playbook sequence.</a:t>
+            </a:r>
+            <a:endParaRPr lang="en-US" sz="1380" dirty="0"/>
+          </a:p>
+          <a:p>
+            <a:r>
+              <a:rPr lang="en-US" sz="1380" dirty="0">
+                <a:solidFill>
+                  <a:srgbClr val="17364A"/>
+                </a:solidFill>
+                <a:latin typeface="Aptos" pitchFamily="34" charset="0"/>
+                <a:ea typeface="Aptos" pitchFamily="34" charset="-122"/>
+                <a:cs typeface="Aptos" pitchFamily="34" charset="-120"/>
+              </a:rPr>
+              <a:t>Identify who should participate in the work.</a:t>
+            </a:r>
+            <a:endParaRPr lang="en-US" sz="1380" dirty="0"/>
+          </a:p>
+          <a:p>
+            <a:r>
+              <a:rPr lang="en-US" sz="1380" dirty="0">
+                <a:solidFill>
+                  <a:srgbClr val="17364A"/>
+                </a:solidFill>
+                <a:latin typeface="Aptos" pitchFamily="34" charset="0"/>
+                <a:ea typeface="Aptos" pitchFamily="34" charset="-122"/>
+                <a:cs typeface="Aptos" pitchFamily="34" charset="-120"/>
+              </a:rPr>
+              <a:t>Document the review, approval, or implementation step.</a:t>
+            </a:r>
+            <a:endParaRPr lang="en-US" sz="1380" dirty="0"/>
           </a:p>
         </p:txBody>
       </p:sp>
@@ -15666,20 +13617,20 @@
         </p:nvSpPr>
         <p:spPr>
           <a:xfrm>
-            <a:off x="7818120" y="3977640"/>
-            <a:ext cx="972312" cy="749808"/>
+            <a:off x="8046720" y="3794760"/>
+            <a:ext cx="3063240" cy="1600200"/>
           </a:xfrm>
           <a:prstGeom prst="roundRect">
             <a:avLst>
-              <a:gd name="adj" fmla="val 14634"/>
+              <a:gd name="adj" fmla="val 6857"/>
             </a:avLst>
           </a:prstGeom>
           <a:solidFill>
-            <a:srgbClr val="0068B7"/>
+            <a:srgbClr val="FFFFFF"/>
           </a:solidFill>
           <a:ln w="12700">
             <a:solidFill>
-              <a:srgbClr val="0068B7"/>
+              <a:srgbClr val="B9D7E6"/>
             </a:solidFill>
             <a:prstDash val="solid"/>
           </a:ln>
@@ -15693,172 +13644,100 @@
         </p:nvSpPr>
         <p:spPr>
           <a:xfrm>
-            <a:off x="7891272" y="4169664"/>
-            <a:ext cx="826008" cy="310896"/>
-          </a:xfrm>
-          <a:prstGeom prst="rect">
-            <a:avLst/>
-          </a:prstGeom>
-          <a:noFill/>
-          <a:ln/>
-        </p:spPr>
-        <p:txBody>
-          <a:bodyPr wrap="square" lIns="0" tIns="0" rIns="0" bIns="0" rtlCol="0" anchor="ctr">
+            <a:off x="8211312" y="3941064"/>
+            <a:ext cx="2734056" cy="256032"/>
+          </a:xfrm>
+          <a:prstGeom prst="rect">
+            <a:avLst/>
+          </a:prstGeom>
+          <a:noFill/>
+          <a:ln/>
+        </p:spPr>
+        <p:txBody>
+          <a:bodyPr wrap="square" lIns="0" tIns="0" rIns="0" bIns="0" rtlCol="0" anchor="ctr"/>
+          <a:lstStyle/>
+          <a:p>
+            <a:pPr indent="0" marL="0">
+              <a:buNone/>
+            </a:pPr>
+            <a:r>
+              <a:rPr lang="en-US" sz="1300" b="1" dirty="0">
+                <a:solidFill>
+                  <a:srgbClr val="0068B7"/>
+                </a:solidFill>
+                <a:latin typeface="Aptos" pitchFamily="34" charset="0"/>
+                <a:ea typeface="Aptos" pitchFamily="34" charset="-122"/>
+                <a:cs typeface="Aptos" pitchFamily="34" charset="-120"/>
+              </a:rPr>
+              <a:t>Tool selection cues</a:t>
+            </a:r>
+            <a:endParaRPr lang="en-US" sz="1300" dirty="0"/>
+          </a:p>
+        </p:txBody>
+      </p:sp>
+      <p:sp>
+        <p:nvSpPr>
+          <p:cNvPr id="15" name="Text 13"/>
+          <p:cNvSpPr/>
+          <p:nvPr/>
+        </p:nvSpPr>
+        <p:spPr>
+          <a:xfrm>
+            <a:off x="8229600" y="4306824"/>
+            <a:ext cx="2679192" cy="941832"/>
+          </a:xfrm>
+          <a:prstGeom prst="rect">
+            <a:avLst/>
+          </a:prstGeom>
+          <a:noFill/>
+          <a:ln/>
+        </p:spPr>
+        <p:txBody>
+          <a:bodyPr wrap="square" lIns="254" tIns="254" rIns="254" bIns="254" rtlCol="0" anchor="t">
             <a:normAutofit/>
           </a:bodyPr>
           <a:lstStyle/>
           <a:p>
-            <a:pPr algn="ctr" indent="0" marL="0">
-              <a:buNone/>
-            </a:pPr>
-            <a:r>
-              <a:rPr lang="en-US" sz="1500" b="1" dirty="0">
-                <a:solidFill>
-                  <a:srgbClr val="FFFFFF"/>
-                </a:solidFill>
-                <a:latin typeface="Aptos" pitchFamily="34" charset="0"/>
-                <a:ea typeface="Aptos" pitchFamily="34" charset="-122"/>
-                <a:cs typeface="Aptos" pitchFamily="34" charset="-120"/>
-              </a:rPr>
-              <a:t>Concept</a:t>
-            </a:r>
-            <a:endParaRPr lang="en-US" sz="1500" dirty="0"/>
-          </a:p>
-        </p:txBody>
-      </p:sp>
-      <p:sp>
-        <p:nvSpPr>
-          <p:cNvPr id="15" name="Shape 13"/>
-          <p:cNvSpPr/>
-          <p:nvPr/>
-        </p:nvSpPr>
-        <p:spPr>
-          <a:xfrm>
-            <a:off x="9046464" y="3977640"/>
-            <a:ext cx="972312" cy="749808"/>
-          </a:xfrm>
-          <a:prstGeom prst="roundRect">
-            <a:avLst>
-              <a:gd name="adj" fmla="val 14634"/>
-            </a:avLst>
-          </a:prstGeom>
-          <a:solidFill>
-            <a:srgbClr val="2F8A28"/>
-          </a:solidFill>
-          <a:ln w="12700">
-            <a:solidFill>
-              <a:srgbClr val="2F8A28"/>
-            </a:solidFill>
-            <a:prstDash val="solid"/>
-          </a:ln>
-        </p:spPr>
-      </p:sp>
-      <p:sp>
-        <p:nvSpPr>
-          <p:cNvPr id="16" name="Text 14"/>
-          <p:cNvSpPr/>
-          <p:nvPr/>
-        </p:nvSpPr>
-        <p:spPr>
-          <a:xfrm>
-            <a:off x="9119616" y="4169664"/>
-            <a:ext cx="826008" cy="310896"/>
-          </a:xfrm>
-          <a:prstGeom prst="rect">
-            <a:avLst/>
-          </a:prstGeom>
-          <a:noFill/>
-          <a:ln/>
-        </p:spPr>
-        <p:txBody>
-          <a:bodyPr wrap="square" lIns="0" tIns="0" rIns="0" bIns="0" rtlCol="0" anchor="ctr">
-            <a:normAutofit/>
-          </a:bodyPr>
-          <a:lstStyle/>
-          <a:p>
-            <a:pPr algn="ctr" indent="0" marL="0">
-              <a:buNone/>
-            </a:pPr>
-            <a:r>
-              <a:rPr lang="en-US" sz="1500" b="1" dirty="0">
-                <a:solidFill>
-                  <a:srgbClr val="FFFFFF"/>
-                </a:solidFill>
-                <a:latin typeface="Aptos" pitchFamily="34" charset="0"/>
-                <a:ea typeface="Aptos" pitchFamily="34" charset="-122"/>
-                <a:cs typeface="Aptos" pitchFamily="34" charset="-120"/>
-              </a:rPr>
-              <a:t>Tool</a:t>
-            </a:r>
-            <a:endParaRPr lang="en-US" sz="1500" dirty="0"/>
-          </a:p>
-        </p:txBody>
-      </p:sp>
-      <p:sp>
-        <p:nvSpPr>
-          <p:cNvPr id="17" name="Shape 15"/>
-          <p:cNvSpPr/>
-          <p:nvPr/>
-        </p:nvSpPr>
-        <p:spPr>
-          <a:xfrm>
-            <a:off x="10274808" y="3977640"/>
-            <a:ext cx="972312" cy="749808"/>
-          </a:xfrm>
-          <a:prstGeom prst="roundRect">
-            <a:avLst>
-              <a:gd name="adj" fmla="val 14634"/>
-            </a:avLst>
-          </a:prstGeom>
-          <a:solidFill>
-            <a:srgbClr val="D69A2D"/>
-          </a:solidFill>
-          <a:ln w="12700">
-            <a:solidFill>
-              <a:srgbClr val="D69A2D"/>
-            </a:solidFill>
-            <a:prstDash val="solid"/>
-          </a:ln>
-        </p:spPr>
-      </p:sp>
-      <p:sp>
-        <p:nvSpPr>
-          <p:cNvPr id="18" name="Text 16"/>
-          <p:cNvSpPr/>
-          <p:nvPr/>
-        </p:nvSpPr>
-        <p:spPr>
-          <a:xfrm>
-            <a:off x="10347960" y="4169664"/>
-            <a:ext cx="826008" cy="310896"/>
-          </a:xfrm>
-          <a:prstGeom prst="rect">
-            <a:avLst/>
-          </a:prstGeom>
-          <a:noFill/>
-          <a:ln/>
-        </p:spPr>
-        <p:txBody>
-          <a:bodyPr wrap="square" lIns="0" tIns="0" rIns="0" bIns="0" rtlCol="0" anchor="ctr">
-            <a:normAutofit/>
-          </a:bodyPr>
-          <a:lstStyle/>
-          <a:p>
-            <a:pPr algn="ctr" indent="0" marL="0">
-              <a:buNone/>
-            </a:pPr>
-            <a:r>
-              <a:rPr lang="en-US" sz="1500" b="1" dirty="0">
-                <a:solidFill>
-                  <a:srgbClr val="FFFFFF"/>
-                </a:solidFill>
-                <a:latin typeface="Aptos" pitchFamily="34" charset="0"/>
-                <a:ea typeface="Aptos" pitchFamily="34" charset="-122"/>
-                <a:cs typeface="Aptos" pitchFamily="34" charset="-120"/>
-              </a:rPr>
-              <a:t>Artifact</a:t>
-            </a:r>
-            <a:endParaRPr lang="en-US" sz="1500" dirty="0"/>
+            <a:r>
+              <a:rPr lang="en-US" sz="1380" dirty="0">
+                <a:solidFill>
+                  <a:srgbClr val="17364A"/>
+                </a:solidFill>
+                <a:latin typeface="Aptos" pitchFamily="34" charset="0"/>
+                <a:ea typeface="Aptos" pitchFamily="34" charset="-122"/>
+                <a:cs typeface="Aptos" pitchFamily="34" charset="-120"/>
+              </a:rPr>
+              <a:t>Use a tool when no comparable local process exists.</a:t>
+            </a:r>
+            <a:endParaRPr lang="en-US" sz="1380" dirty="0"/>
+          </a:p>
+          <a:p>
+            <a:r>
+              <a:rPr lang="en-US" sz="1380" dirty="0">
+                <a:solidFill>
+                  <a:srgbClr val="17364A"/>
+                </a:solidFill>
+                <a:latin typeface="Aptos" pitchFamily="34" charset="0"/>
+                <a:ea typeface="Aptos" pitchFamily="34" charset="-122"/>
+                <a:cs typeface="Aptos" pitchFamily="34" charset="-120"/>
+              </a:rPr>
+              <a:t>Adapt existing department templates when they already fit the purpose.</a:t>
+            </a:r>
+            <a:endParaRPr lang="en-US" sz="1380" dirty="0"/>
+          </a:p>
+          <a:p>
+            <a:r>
+              <a:rPr lang="en-US" sz="1380" dirty="0">
+                <a:solidFill>
+                  <a:srgbClr val="17364A"/>
+                </a:solidFill>
+                <a:latin typeface="Aptos" pitchFamily="34" charset="0"/>
+                <a:ea typeface="Aptos" pitchFamily="34" charset="-122"/>
+                <a:cs typeface="Aptos" pitchFamily="34" charset="-120"/>
+              </a:rPr>
+              <a:t>Save the completed artifact as evidence of the decision.</a:t>
+            </a:r>
+            <a:endParaRPr lang="en-US" sz="1380" dirty="0"/>
           </a:p>
         </p:txBody>
       </p:sp>
@@ -16331,13 +14210,11 @@
             </a:avLst>
           </a:prstGeom>
           <a:solidFill>
-            <a:srgbClr val="FFFFFF">
-              <a:alpha val="88000"/>
-            </a:srgbClr>
+            <a:srgbClr val="FFFFFF"/>
           </a:solidFill>
           <a:ln w="12700">
             <a:solidFill>
-              <a:srgbClr val="D6E8F2"/>
+              <a:srgbClr val="B9D7E6"/>
             </a:solidFill>
             <a:prstDash val="solid"/>
           </a:ln>
@@ -16345,30 +14222,42 @@
       </p:sp>
       <p:sp>
         <p:nvSpPr>
-          <p:cNvPr id="14" name="Shape 12"/>
-          <p:cNvSpPr/>
-          <p:nvPr/>
-        </p:nvSpPr>
-        <p:spPr>
-          <a:xfrm>
-            <a:off x="7927848" y="3319272"/>
-            <a:ext cx="792480" cy="749808"/>
-          </a:xfrm>
-          <a:prstGeom prst="roundRect">
-            <a:avLst>
-              <a:gd name="adj" fmla="val 14634"/>
-            </a:avLst>
-          </a:prstGeom>
-          <a:solidFill>
-            <a:srgbClr val="0068B7"/>
-          </a:solidFill>
-          <a:ln w="12700">
-            <a:solidFill>
-              <a:srgbClr val="0068B7"/>
-            </a:solidFill>
-            <a:prstDash val="solid"/>
-          </a:ln>
-        </p:spPr>
+          <p:cNvPr id="14" name="Text 12"/>
+          <p:cNvSpPr/>
+          <p:nvPr/>
+        </p:nvSpPr>
+        <p:spPr>
+          <a:xfrm>
+            <a:off x="7799832" y="2935224"/>
+            <a:ext cx="3145536" cy="256032"/>
+          </a:xfrm>
+          <a:prstGeom prst="rect">
+            <a:avLst/>
+          </a:prstGeom>
+          <a:noFill/>
+          <a:ln/>
+        </p:spPr>
+        <p:txBody>
+          <a:bodyPr wrap="square" lIns="0" tIns="0" rIns="0" bIns="0" rtlCol="0" anchor="ctr"/>
+          <a:lstStyle/>
+          <a:p>
+            <a:pPr indent="0" marL="0">
+              <a:buNone/>
+            </a:pPr>
+            <a:r>
+              <a:rPr lang="en-US" sz="1300" b="1" dirty="0">
+                <a:solidFill>
+                  <a:srgbClr val="0068B7"/>
+                </a:solidFill>
+                <a:latin typeface="Aptos" pitchFamily="34" charset="0"/>
+                <a:ea typeface="Aptos" pitchFamily="34" charset="-122"/>
+                <a:cs typeface="Aptos" pitchFamily="34" charset="-120"/>
+              </a:rPr>
+              <a:t>Concept checkpoints</a:t>
+            </a:r>
+            <a:endParaRPr lang="en-US" sz="1300" dirty="0"/>
+          </a:p>
+        </p:txBody>
       </p:sp>
       <p:sp>
         <p:nvSpPr>
@@ -16378,240 +14267,67 @@
         </p:nvSpPr>
         <p:spPr>
           <a:xfrm>
-            <a:off x="8001000" y="3511296"/>
-            <a:ext cx="646176" cy="310896"/>
-          </a:xfrm>
-          <a:prstGeom prst="rect">
-            <a:avLst/>
-          </a:prstGeom>
-          <a:noFill/>
-          <a:ln/>
-        </p:spPr>
-        <p:txBody>
-          <a:bodyPr wrap="square" lIns="0" tIns="0" rIns="0" bIns="0" rtlCol="0" anchor="ctr">
+            <a:off x="7818120" y="3300984"/>
+            <a:ext cx="3090672" cy="877824"/>
+          </a:xfrm>
+          <a:prstGeom prst="rect">
+            <a:avLst/>
+          </a:prstGeom>
+          <a:noFill/>
+          <a:ln/>
+        </p:spPr>
+        <p:txBody>
+          <a:bodyPr wrap="square" lIns="254" tIns="254" rIns="254" bIns="254" rtlCol="0" anchor="t">
             <a:normAutofit/>
           </a:bodyPr>
           <a:lstStyle/>
           <a:p>
-            <a:pPr algn="ctr" indent="0" marL="0">
-              <a:buNone/>
-            </a:pPr>
-            <a:r>
-              <a:rPr lang="en-US" sz="1500" b="1" dirty="0">
-                <a:solidFill>
-                  <a:srgbClr val="FFFFFF"/>
-                </a:solidFill>
-                <a:latin typeface="Aptos" pitchFamily="34" charset="0"/>
-                <a:ea typeface="Aptos" pitchFamily="34" charset="-122"/>
-                <a:cs typeface="Aptos" pitchFamily="34" charset="-120"/>
-              </a:rPr>
-              <a:t>Plan</a:t>
-            </a:r>
-            <a:endParaRPr lang="en-US" sz="1500" dirty="0"/>
+            <a:r>
+              <a:rPr lang="en-US" sz="1380" dirty="0">
+                <a:solidFill>
+                  <a:srgbClr val="17364A"/>
+                </a:solidFill>
+                <a:latin typeface="Aptos" pitchFamily="34" charset="0"/>
+                <a:ea typeface="Aptos" pitchFamily="34" charset="-122"/>
+                <a:cs typeface="Aptos" pitchFamily="34" charset="-120"/>
+              </a:rPr>
+              <a:t>Identify the components of an agentic workflow, including goals, tools, permissions,.</a:t>
+            </a:r>
+            <a:endParaRPr lang="en-US" sz="1380" dirty="0"/>
+          </a:p>
+          <a:p>
+            <a:r>
+              <a:rPr lang="en-US" sz="1380" dirty="0">
+                <a:solidFill>
+                  <a:srgbClr val="17364A"/>
+                </a:solidFill>
+                <a:latin typeface="Aptos" pitchFamily="34" charset="0"/>
+                <a:ea typeface="Aptos" pitchFamily="34" charset="-122"/>
+                <a:cs typeface="Aptos" pitchFamily="34" charset="-120"/>
+              </a:rPr>
+              <a:t>Assess risks from excessive agency, unauthorized actions, error propagation, prompt.</a:t>
+            </a:r>
+            <a:endParaRPr lang="en-US" sz="1380" dirty="0"/>
+          </a:p>
+          <a:p>
+            <a:r>
+              <a:rPr lang="en-US" sz="1380" dirty="0">
+                <a:solidFill>
+                  <a:srgbClr val="17364A"/>
+                </a:solidFill>
+                <a:latin typeface="Aptos" pitchFamily="34" charset="0"/>
+                <a:ea typeface="Aptos" pitchFamily="34" charset="-122"/>
+                <a:cs typeface="Aptos" pitchFamily="34" charset="-120"/>
+              </a:rPr>
+              <a:t>Design human-in-the-loop and human-on-the-loop controls for public health workflows.</a:t>
+            </a:r>
+            <a:endParaRPr lang="en-US" sz="1380" dirty="0"/>
           </a:p>
         </p:txBody>
       </p:sp>
       <p:sp>
         <p:nvSpPr>
           <p:cNvPr id="16" name="Shape 14"/>
-          <p:cNvSpPr/>
-          <p:nvPr/>
-        </p:nvSpPr>
-        <p:spPr>
-          <a:xfrm>
-            <a:off x="8976360" y="3319272"/>
-            <a:ext cx="792480" cy="749808"/>
-          </a:xfrm>
-          <a:prstGeom prst="roundRect">
-            <a:avLst>
-              <a:gd name="adj" fmla="val 14634"/>
-            </a:avLst>
-          </a:prstGeom>
-          <a:solidFill>
-            <a:srgbClr val="2F8A28"/>
-          </a:solidFill>
-          <a:ln w="12700">
-            <a:solidFill>
-              <a:srgbClr val="2F8A28"/>
-            </a:solidFill>
-            <a:prstDash val="solid"/>
-          </a:ln>
-        </p:spPr>
-      </p:sp>
-      <p:sp>
-        <p:nvSpPr>
-          <p:cNvPr id="17" name="Text 15"/>
-          <p:cNvSpPr/>
-          <p:nvPr/>
-        </p:nvSpPr>
-        <p:spPr>
-          <a:xfrm>
-            <a:off x="9049512" y="3511296"/>
-            <a:ext cx="646176" cy="310896"/>
-          </a:xfrm>
-          <a:prstGeom prst="rect">
-            <a:avLst/>
-          </a:prstGeom>
-          <a:noFill/>
-          <a:ln/>
-        </p:spPr>
-        <p:txBody>
-          <a:bodyPr wrap="square" lIns="0" tIns="0" rIns="0" bIns="0" rtlCol="0" anchor="ctr">
-            <a:normAutofit/>
-          </a:bodyPr>
-          <a:lstStyle/>
-          <a:p>
-            <a:pPr algn="ctr" indent="0" marL="0">
-              <a:buNone/>
-            </a:pPr>
-            <a:r>
-              <a:rPr lang="en-US" sz="1500" b="1" dirty="0">
-                <a:solidFill>
-                  <a:srgbClr val="FFFFFF"/>
-                </a:solidFill>
-                <a:latin typeface="Aptos" pitchFamily="34" charset="0"/>
-                <a:ea typeface="Aptos" pitchFamily="34" charset="-122"/>
-                <a:cs typeface="Aptos" pitchFamily="34" charset="-120"/>
-              </a:rPr>
-              <a:t>Do</a:t>
-            </a:r>
-            <a:endParaRPr lang="en-US" sz="1500" dirty="0"/>
-          </a:p>
-        </p:txBody>
-      </p:sp>
-      <p:sp>
-        <p:nvSpPr>
-          <p:cNvPr id="18" name="Shape 16"/>
-          <p:cNvSpPr/>
-          <p:nvPr/>
-        </p:nvSpPr>
-        <p:spPr>
-          <a:xfrm>
-            <a:off x="10024872" y="3319272"/>
-            <a:ext cx="792480" cy="749808"/>
-          </a:xfrm>
-          <a:prstGeom prst="roundRect">
-            <a:avLst>
-              <a:gd name="adj" fmla="val 14634"/>
-            </a:avLst>
-          </a:prstGeom>
-          <a:solidFill>
-            <a:srgbClr val="D69A2D"/>
-          </a:solidFill>
-          <a:ln w="12700">
-            <a:solidFill>
-              <a:srgbClr val="D69A2D"/>
-            </a:solidFill>
-            <a:prstDash val="solid"/>
-          </a:ln>
-        </p:spPr>
-      </p:sp>
-      <p:sp>
-        <p:nvSpPr>
-          <p:cNvPr id="19" name="Text 17"/>
-          <p:cNvSpPr/>
-          <p:nvPr/>
-        </p:nvSpPr>
-        <p:spPr>
-          <a:xfrm>
-            <a:off x="10098024" y="3511296"/>
-            <a:ext cx="646176" cy="310896"/>
-          </a:xfrm>
-          <a:prstGeom prst="rect">
-            <a:avLst/>
-          </a:prstGeom>
-          <a:noFill/>
-          <a:ln/>
-        </p:spPr>
-        <p:txBody>
-          <a:bodyPr wrap="square" lIns="0" tIns="0" rIns="0" bIns="0" rtlCol="0" anchor="ctr">
-            <a:normAutofit/>
-          </a:bodyPr>
-          <a:lstStyle/>
-          <a:p>
-            <a:pPr algn="ctr" indent="0" marL="0">
-              <a:buNone/>
-            </a:pPr>
-            <a:r>
-              <a:rPr lang="en-US" sz="1500" b="1" dirty="0">
-                <a:solidFill>
-                  <a:srgbClr val="FFFFFF"/>
-                </a:solidFill>
-                <a:latin typeface="Aptos" pitchFamily="34" charset="0"/>
-                <a:ea typeface="Aptos" pitchFamily="34" charset="-122"/>
-                <a:cs typeface="Aptos" pitchFamily="34" charset="-120"/>
-              </a:rPr>
-              <a:t>Review</a:t>
-            </a:r>
-            <a:endParaRPr lang="en-US" sz="1500" dirty="0"/>
-          </a:p>
-        </p:txBody>
-      </p:sp>
-      <p:sp>
-        <p:nvSpPr>
-          <p:cNvPr id="20" name="Shape 18"/>
-          <p:cNvSpPr/>
-          <p:nvPr/>
-        </p:nvSpPr>
-        <p:spPr>
-          <a:xfrm>
-            <a:off x="8293608" y="4389120"/>
-            <a:ext cx="2157984" cy="0"/>
-          </a:xfrm>
-          <a:prstGeom prst="line">
-            <a:avLst/>
-          </a:prstGeom>
-          <a:noFill/>
-          <a:ln w="25400">
-            <a:solidFill>
-              <a:srgbClr val="8ABBD8"/>
-            </a:solidFill>
-            <a:prstDash val="solid"/>
-          </a:ln>
-        </p:spPr>
-      </p:sp>
-      <p:sp>
-        <p:nvSpPr>
-          <p:cNvPr id="21" name="Text 19"/>
-          <p:cNvSpPr/>
-          <p:nvPr/>
-        </p:nvSpPr>
-        <p:spPr>
-          <a:xfrm>
-            <a:off x="7909560" y="3977640"/>
-            <a:ext cx="2926080" cy="182880"/>
-          </a:xfrm>
-          <a:prstGeom prst="rect">
-            <a:avLst/>
-          </a:prstGeom>
-          <a:noFill/>
-          <a:ln/>
-        </p:spPr>
-        <p:txBody>
-          <a:bodyPr wrap="square" lIns="0" tIns="0" rIns="0" bIns="0" rtlCol="0" anchor="ctr"/>
-          <a:lstStyle/>
-          <a:p>
-            <a:pPr algn="ctr" indent="0" marL="0">
-              <a:buNone/>
-            </a:pPr>
-            <a:r>
-              <a:rPr lang="en-US" sz="1000" dirty="0">
-                <a:solidFill>
-                  <a:srgbClr val="003A63"/>
-                </a:solidFill>
-                <a:latin typeface="Aptos" pitchFamily="34" charset="0"/>
-                <a:ea typeface="Aptos" pitchFamily="34" charset="-122"/>
-                <a:cs typeface="Aptos" pitchFamily="34" charset="-120"/>
-              </a:rPr>
-              <a:t>Dependencies visible</a:t>
-            </a:r>
-            <a:endParaRPr lang="en-US" sz="1000" dirty="0"/>
-          </a:p>
-        </p:txBody>
-      </p:sp>
-      <p:sp>
-        <p:nvSpPr>
-          <p:cNvPr id="22" name="Shape 20"/>
           <p:cNvSpPr/>
           <p:nvPr/>
         </p:nvSpPr>
@@ -16638,7 +14354,7 @@
       </p:sp>
       <p:sp>
         <p:nvSpPr>
-          <p:cNvPr id="23" name="Text 21"/>
+          <p:cNvPr id="17" name="Text 15"/>
           <p:cNvSpPr/>
           <p:nvPr/>
         </p:nvSpPr>
@@ -16677,7 +14393,7 @@
       </p:sp>
       <p:sp>
         <p:nvSpPr>
-          <p:cNvPr id="24" name="Text 22"/>
+          <p:cNvPr id="18" name="Text 16"/>
           <p:cNvSpPr/>
           <p:nvPr/>
         </p:nvSpPr>
@@ -17157,13 +14873,11 @@
             </a:avLst>
           </a:prstGeom>
           <a:solidFill>
-            <a:srgbClr val="FFFFFF">
-              <a:alpha val="88000"/>
-            </a:srgbClr>
+            <a:srgbClr val="FFFFFF"/>
           </a:solidFill>
           <a:ln w="12700">
             <a:solidFill>
-              <a:srgbClr val="D6E8F2"/>
+              <a:srgbClr val="B9D7E6"/>
             </a:solidFill>
             <a:prstDash val="solid"/>
           </a:ln>
@@ -17171,30 +14885,42 @@
       </p:sp>
       <p:sp>
         <p:nvSpPr>
-          <p:cNvPr id="14" name="Shape 12"/>
-          <p:cNvSpPr/>
-          <p:nvPr/>
-        </p:nvSpPr>
-        <p:spPr>
-          <a:xfrm>
-            <a:off x="7927848" y="3319272"/>
-            <a:ext cx="792480" cy="749808"/>
-          </a:xfrm>
-          <a:prstGeom prst="roundRect">
-            <a:avLst>
-              <a:gd name="adj" fmla="val 14634"/>
-            </a:avLst>
-          </a:prstGeom>
-          <a:solidFill>
-            <a:srgbClr val="0068B7"/>
-          </a:solidFill>
-          <a:ln w="12700">
-            <a:solidFill>
-              <a:srgbClr val="0068B7"/>
-            </a:solidFill>
-            <a:prstDash val="solid"/>
-          </a:ln>
-        </p:spPr>
+          <p:cNvPr id="14" name="Text 12"/>
+          <p:cNvSpPr/>
+          <p:nvPr/>
+        </p:nvSpPr>
+        <p:spPr>
+          <a:xfrm>
+            <a:off x="7799832" y="2935224"/>
+            <a:ext cx="3145536" cy="256032"/>
+          </a:xfrm>
+          <a:prstGeom prst="rect">
+            <a:avLst/>
+          </a:prstGeom>
+          <a:noFill/>
+          <a:ln/>
+        </p:spPr>
+        <p:txBody>
+          <a:bodyPr wrap="square" lIns="0" tIns="0" rIns="0" bIns="0" rtlCol="0" anchor="ctr"/>
+          <a:lstStyle/>
+          <a:p>
+            <a:pPr indent="0" marL="0">
+              <a:buNone/>
+            </a:pPr>
+            <a:r>
+              <a:rPr lang="en-US" sz="1300" b="1" dirty="0">
+                <a:solidFill>
+                  <a:srgbClr val="0068B7"/>
+                </a:solidFill>
+                <a:latin typeface="Aptos" pitchFamily="34" charset="0"/>
+                <a:ea typeface="Aptos" pitchFamily="34" charset="-122"/>
+                <a:cs typeface="Aptos" pitchFamily="34" charset="-120"/>
+              </a:rPr>
+              <a:t>Concept checkpoints</a:t>
+            </a:r>
+            <a:endParaRPr lang="en-US" sz="1300" dirty="0"/>
+          </a:p>
+        </p:txBody>
       </p:sp>
       <p:sp>
         <p:nvSpPr>
@@ -17204,240 +14930,39 @@
         </p:nvSpPr>
         <p:spPr>
           <a:xfrm>
-            <a:off x="8001000" y="3511296"/>
-            <a:ext cx="646176" cy="310896"/>
-          </a:xfrm>
-          <a:prstGeom prst="rect">
-            <a:avLst/>
-          </a:prstGeom>
-          <a:noFill/>
-          <a:ln/>
-        </p:spPr>
-        <p:txBody>
-          <a:bodyPr wrap="square" lIns="0" tIns="0" rIns="0" bIns="0" rtlCol="0" anchor="ctr">
+            <a:off x="7818120" y="3300984"/>
+            <a:ext cx="3090672" cy="877824"/>
+          </a:xfrm>
+          <a:prstGeom prst="rect">
+            <a:avLst/>
+          </a:prstGeom>
+          <a:noFill/>
+          <a:ln/>
+        </p:spPr>
+        <p:txBody>
+          <a:bodyPr wrap="square" lIns="254" tIns="254" rIns="254" bIns="254" rtlCol="0" anchor="t">
             <a:normAutofit/>
           </a:bodyPr>
           <a:lstStyle/>
           <a:p>
-            <a:pPr algn="ctr" indent="0" marL="0">
-              <a:buNone/>
-            </a:pPr>
-            <a:r>
-              <a:rPr lang="en-US" sz="1500" b="1" dirty="0">
-                <a:solidFill>
-                  <a:srgbClr val="FFFFFF"/>
-                </a:solidFill>
-                <a:latin typeface="Aptos" pitchFamily="34" charset="0"/>
-                <a:ea typeface="Aptos" pitchFamily="34" charset="-122"/>
-                <a:cs typeface="Aptos" pitchFamily="34" charset="-120"/>
-              </a:rPr>
-              <a:t>Plan</a:t>
-            </a:r>
-            <a:endParaRPr lang="en-US" sz="1500" dirty="0"/>
+            <a:r>
+              <a:rPr lang="en-US" sz="1380" dirty="0">
+                <a:solidFill>
+                  <a:srgbClr val="17364A"/>
+                </a:solidFill>
+                <a:latin typeface="Aptos" pitchFamily="34" charset="0"/>
+                <a:ea typeface="Aptos" pitchFamily="34" charset="-122"/>
+                <a:cs typeface="Aptos" pitchFamily="34" charset="-120"/>
+              </a:rPr>
+              <a:t>Produce an agentic workflow control plan.</a:t>
+            </a:r>
+            <a:endParaRPr lang="en-US" sz="1380" dirty="0"/>
           </a:p>
         </p:txBody>
       </p:sp>
       <p:sp>
         <p:nvSpPr>
           <p:cNvPr id="16" name="Shape 14"/>
-          <p:cNvSpPr/>
-          <p:nvPr/>
-        </p:nvSpPr>
-        <p:spPr>
-          <a:xfrm>
-            <a:off x="8976360" y="3319272"/>
-            <a:ext cx="792480" cy="749808"/>
-          </a:xfrm>
-          <a:prstGeom prst="roundRect">
-            <a:avLst>
-              <a:gd name="adj" fmla="val 14634"/>
-            </a:avLst>
-          </a:prstGeom>
-          <a:solidFill>
-            <a:srgbClr val="2F8A28"/>
-          </a:solidFill>
-          <a:ln w="12700">
-            <a:solidFill>
-              <a:srgbClr val="2F8A28"/>
-            </a:solidFill>
-            <a:prstDash val="solid"/>
-          </a:ln>
-        </p:spPr>
-      </p:sp>
-      <p:sp>
-        <p:nvSpPr>
-          <p:cNvPr id="17" name="Text 15"/>
-          <p:cNvSpPr/>
-          <p:nvPr/>
-        </p:nvSpPr>
-        <p:spPr>
-          <a:xfrm>
-            <a:off x="9049512" y="3511296"/>
-            <a:ext cx="646176" cy="310896"/>
-          </a:xfrm>
-          <a:prstGeom prst="rect">
-            <a:avLst/>
-          </a:prstGeom>
-          <a:noFill/>
-          <a:ln/>
-        </p:spPr>
-        <p:txBody>
-          <a:bodyPr wrap="square" lIns="0" tIns="0" rIns="0" bIns="0" rtlCol="0" anchor="ctr">
-            <a:normAutofit/>
-          </a:bodyPr>
-          <a:lstStyle/>
-          <a:p>
-            <a:pPr algn="ctr" indent="0" marL="0">
-              <a:buNone/>
-            </a:pPr>
-            <a:r>
-              <a:rPr lang="en-US" sz="1500" b="1" dirty="0">
-                <a:solidFill>
-                  <a:srgbClr val="FFFFFF"/>
-                </a:solidFill>
-                <a:latin typeface="Aptos" pitchFamily="34" charset="0"/>
-                <a:ea typeface="Aptos" pitchFamily="34" charset="-122"/>
-                <a:cs typeface="Aptos" pitchFamily="34" charset="-120"/>
-              </a:rPr>
-              <a:t>Do</a:t>
-            </a:r>
-            <a:endParaRPr lang="en-US" sz="1500" dirty="0"/>
-          </a:p>
-        </p:txBody>
-      </p:sp>
-      <p:sp>
-        <p:nvSpPr>
-          <p:cNvPr id="18" name="Shape 16"/>
-          <p:cNvSpPr/>
-          <p:nvPr/>
-        </p:nvSpPr>
-        <p:spPr>
-          <a:xfrm>
-            <a:off x="10024872" y="3319272"/>
-            <a:ext cx="792480" cy="749808"/>
-          </a:xfrm>
-          <a:prstGeom prst="roundRect">
-            <a:avLst>
-              <a:gd name="adj" fmla="val 14634"/>
-            </a:avLst>
-          </a:prstGeom>
-          <a:solidFill>
-            <a:srgbClr val="D69A2D"/>
-          </a:solidFill>
-          <a:ln w="12700">
-            <a:solidFill>
-              <a:srgbClr val="D69A2D"/>
-            </a:solidFill>
-            <a:prstDash val="solid"/>
-          </a:ln>
-        </p:spPr>
-      </p:sp>
-      <p:sp>
-        <p:nvSpPr>
-          <p:cNvPr id="19" name="Text 17"/>
-          <p:cNvSpPr/>
-          <p:nvPr/>
-        </p:nvSpPr>
-        <p:spPr>
-          <a:xfrm>
-            <a:off x="10098024" y="3511296"/>
-            <a:ext cx="646176" cy="310896"/>
-          </a:xfrm>
-          <a:prstGeom prst="rect">
-            <a:avLst/>
-          </a:prstGeom>
-          <a:noFill/>
-          <a:ln/>
-        </p:spPr>
-        <p:txBody>
-          <a:bodyPr wrap="square" lIns="0" tIns="0" rIns="0" bIns="0" rtlCol="0" anchor="ctr">
-            <a:normAutofit/>
-          </a:bodyPr>
-          <a:lstStyle/>
-          <a:p>
-            <a:pPr algn="ctr" indent="0" marL="0">
-              <a:buNone/>
-            </a:pPr>
-            <a:r>
-              <a:rPr lang="en-US" sz="1500" b="1" dirty="0">
-                <a:solidFill>
-                  <a:srgbClr val="FFFFFF"/>
-                </a:solidFill>
-                <a:latin typeface="Aptos" pitchFamily="34" charset="0"/>
-                <a:ea typeface="Aptos" pitchFamily="34" charset="-122"/>
-                <a:cs typeface="Aptos" pitchFamily="34" charset="-120"/>
-              </a:rPr>
-              <a:t>Review</a:t>
-            </a:r>
-            <a:endParaRPr lang="en-US" sz="1500" dirty="0"/>
-          </a:p>
-        </p:txBody>
-      </p:sp>
-      <p:sp>
-        <p:nvSpPr>
-          <p:cNvPr id="20" name="Shape 18"/>
-          <p:cNvSpPr/>
-          <p:nvPr/>
-        </p:nvSpPr>
-        <p:spPr>
-          <a:xfrm>
-            <a:off x="8293608" y="4389120"/>
-            <a:ext cx="2157984" cy="0"/>
-          </a:xfrm>
-          <a:prstGeom prst="line">
-            <a:avLst/>
-          </a:prstGeom>
-          <a:noFill/>
-          <a:ln w="25400">
-            <a:solidFill>
-              <a:srgbClr val="8ABBD8"/>
-            </a:solidFill>
-            <a:prstDash val="solid"/>
-          </a:ln>
-        </p:spPr>
-      </p:sp>
-      <p:sp>
-        <p:nvSpPr>
-          <p:cNvPr id="21" name="Text 19"/>
-          <p:cNvSpPr/>
-          <p:nvPr/>
-        </p:nvSpPr>
-        <p:spPr>
-          <a:xfrm>
-            <a:off x="7909560" y="3977640"/>
-            <a:ext cx="2926080" cy="182880"/>
-          </a:xfrm>
-          <a:prstGeom prst="rect">
-            <a:avLst/>
-          </a:prstGeom>
-          <a:noFill/>
-          <a:ln/>
-        </p:spPr>
-        <p:txBody>
-          <a:bodyPr wrap="square" lIns="0" tIns="0" rIns="0" bIns="0" rtlCol="0" anchor="ctr"/>
-          <a:lstStyle/>
-          <a:p>
-            <a:pPr algn="ctr" indent="0" marL="0">
-              <a:buNone/>
-            </a:pPr>
-            <a:r>
-              <a:rPr lang="en-US" sz="1000" dirty="0">
-                <a:solidFill>
-                  <a:srgbClr val="003A63"/>
-                </a:solidFill>
-                <a:latin typeface="Aptos" pitchFamily="34" charset="0"/>
-                <a:ea typeface="Aptos" pitchFamily="34" charset="-122"/>
-                <a:cs typeface="Aptos" pitchFamily="34" charset="-120"/>
-              </a:rPr>
-              <a:t>Dependencies visible</a:t>
-            </a:r>
-            <a:endParaRPr lang="en-US" sz="1000" dirty="0"/>
-          </a:p>
-        </p:txBody>
-      </p:sp>
-      <p:sp>
-        <p:nvSpPr>
-          <p:cNvPr id="22" name="Shape 20"/>
           <p:cNvSpPr/>
           <p:nvPr/>
         </p:nvSpPr>
@@ -17464,7 +14989,7 @@
       </p:sp>
       <p:sp>
         <p:nvSpPr>
-          <p:cNvPr id="23" name="Text 21"/>
+          <p:cNvPr id="17" name="Text 15"/>
           <p:cNvSpPr/>
           <p:nvPr/>
         </p:nvSpPr>
@@ -17503,7 +15028,7 @@
       </p:sp>
       <p:sp>
         <p:nvSpPr>
-          <p:cNvPr id="24" name="Text 22"/>
+          <p:cNvPr id="18" name="Text 16"/>
           <p:cNvSpPr/>
           <p:nvPr/>
         </p:nvSpPr>
@@ -18011,13 +15536,11 @@
             </a:avLst>
           </a:prstGeom>
           <a:solidFill>
-            <a:srgbClr val="FFFFFF">
-              <a:alpha val="88000"/>
-            </a:srgbClr>
+            <a:srgbClr val="FFFFFF"/>
           </a:solidFill>
           <a:ln w="12700">
             <a:solidFill>
-              <a:srgbClr val="D6E8F2"/>
+              <a:srgbClr val="B9D7E6"/>
             </a:solidFill>
             <a:prstDash val="solid"/>
           </a:ln>
@@ -18025,30 +15548,42 @@
       </p:sp>
       <p:sp>
         <p:nvSpPr>
-          <p:cNvPr id="14" name="Shape 12"/>
-          <p:cNvSpPr/>
-          <p:nvPr/>
-        </p:nvSpPr>
-        <p:spPr>
-          <a:xfrm>
-            <a:off x="7927848" y="3319272"/>
-            <a:ext cx="792480" cy="749808"/>
-          </a:xfrm>
-          <a:prstGeom prst="roundRect">
-            <a:avLst>
-              <a:gd name="adj" fmla="val 14634"/>
-            </a:avLst>
-          </a:prstGeom>
-          <a:solidFill>
-            <a:srgbClr val="0068B7"/>
-          </a:solidFill>
-          <a:ln w="12700">
-            <a:solidFill>
-              <a:srgbClr val="0068B7"/>
-            </a:solidFill>
-            <a:prstDash val="solid"/>
-          </a:ln>
-        </p:spPr>
+          <p:cNvPr id="14" name="Text 12"/>
+          <p:cNvSpPr/>
+          <p:nvPr/>
+        </p:nvSpPr>
+        <p:spPr>
+          <a:xfrm>
+            <a:off x="7799832" y="2935224"/>
+            <a:ext cx="3145536" cy="256032"/>
+          </a:xfrm>
+          <a:prstGeom prst="rect">
+            <a:avLst/>
+          </a:prstGeom>
+          <a:noFill/>
+          <a:ln/>
+        </p:spPr>
+        <p:txBody>
+          <a:bodyPr wrap="square" lIns="0" tIns="0" rIns="0" bIns="0" rtlCol="0" anchor="ctr"/>
+          <a:lstStyle/>
+          <a:p>
+            <a:pPr indent="0" marL="0">
+              <a:buNone/>
+            </a:pPr>
+            <a:r>
+              <a:rPr lang="en-US" sz="1300" b="1" dirty="0">
+                <a:solidFill>
+                  <a:srgbClr val="0068B7"/>
+                </a:solidFill>
+                <a:latin typeface="Aptos" pitchFamily="34" charset="0"/>
+                <a:ea typeface="Aptos" pitchFamily="34" charset="-122"/>
+                <a:cs typeface="Aptos" pitchFamily="34" charset="-120"/>
+              </a:rPr>
+              <a:t>Concept checkpoints</a:t>
+            </a:r>
+            <a:endParaRPr lang="en-US" sz="1300" dirty="0"/>
+          </a:p>
+        </p:txBody>
       </p:sp>
       <p:sp>
         <p:nvSpPr>
@@ -18058,240 +15593,67 @@
         </p:nvSpPr>
         <p:spPr>
           <a:xfrm>
-            <a:off x="8001000" y="3511296"/>
-            <a:ext cx="646176" cy="310896"/>
-          </a:xfrm>
-          <a:prstGeom prst="rect">
-            <a:avLst/>
-          </a:prstGeom>
-          <a:noFill/>
-          <a:ln/>
-        </p:spPr>
-        <p:txBody>
-          <a:bodyPr wrap="square" lIns="0" tIns="0" rIns="0" bIns="0" rtlCol="0" anchor="ctr">
+            <a:off x="7818120" y="3300984"/>
+            <a:ext cx="3090672" cy="877824"/>
+          </a:xfrm>
+          <a:prstGeom prst="rect">
+            <a:avLst/>
+          </a:prstGeom>
+          <a:noFill/>
+          <a:ln/>
+        </p:spPr>
+        <p:txBody>
+          <a:bodyPr wrap="square" lIns="254" tIns="254" rIns="254" bIns="254" rtlCol="0" anchor="t">
             <a:normAutofit/>
           </a:bodyPr>
           <a:lstStyle/>
           <a:p>
-            <a:pPr algn="ctr" indent="0" marL="0">
-              <a:buNone/>
-            </a:pPr>
-            <a:r>
-              <a:rPr lang="en-US" sz="1500" b="1" dirty="0">
-                <a:solidFill>
-                  <a:srgbClr val="FFFFFF"/>
-                </a:solidFill>
-                <a:latin typeface="Aptos" pitchFamily="34" charset="0"/>
-                <a:ea typeface="Aptos" pitchFamily="34" charset="-122"/>
-                <a:cs typeface="Aptos" pitchFamily="34" charset="-120"/>
-              </a:rPr>
-              <a:t>Plan</a:t>
-            </a:r>
-            <a:endParaRPr lang="en-US" sz="1500" dirty="0"/>
+            <a:r>
+              <a:rPr lang="en-US" sz="1380" dirty="0">
+                <a:solidFill>
+                  <a:srgbClr val="17364A"/>
+                </a:solidFill>
+                <a:latin typeface="Aptos" pitchFamily="34" charset="0"/>
+                <a:ea typeface="Aptos" pitchFamily="34" charset="-122"/>
+                <a:cs typeface="Aptos" pitchFamily="34" charset="-120"/>
+              </a:rPr>
+              <a:t>Agentic AI refers to AI systems configured to pursue a goal through multiple steps, often.</a:t>
+            </a:r>
+            <a:endParaRPr lang="en-US" sz="1380" dirty="0"/>
+          </a:p>
+          <a:p>
+            <a:r>
+              <a:rPr lang="en-US" sz="1380" dirty="0">
+                <a:solidFill>
+                  <a:srgbClr val="17364A"/>
+                </a:solidFill>
+                <a:latin typeface="Aptos" pitchFamily="34" charset="0"/>
+                <a:ea typeface="Aptos" pitchFamily="34" charset="-122"/>
+                <a:cs typeface="Aptos" pitchFamily="34" charset="-120"/>
+              </a:rPr>
+              <a:t>In public health, agentic workflows may eventually support intake triage, document.</a:t>
+            </a:r>
+            <a:endParaRPr lang="en-US" sz="1380" dirty="0"/>
+          </a:p>
+          <a:p>
+            <a:r>
+              <a:rPr lang="en-US" sz="1380" dirty="0">
+                <a:solidFill>
+                  <a:srgbClr val="17364A"/>
+                </a:solidFill>
+                <a:latin typeface="Aptos" pitchFamily="34" charset="0"/>
+                <a:ea typeface="Aptos" pitchFamily="34" charset="-122"/>
+                <a:cs typeface="Aptos" pitchFamily="34" charset="-120"/>
+              </a:rPr>
+              <a:t>This module teaches learners how to design agentic workflows with clear boundaries.</a:t>
+            </a:r>
+            <a:endParaRPr lang="en-US" sz="1380" dirty="0"/>
           </a:p>
         </p:txBody>
       </p:sp>
       <p:sp>
         <p:nvSpPr>
           <p:cNvPr id="16" name="Shape 14"/>
-          <p:cNvSpPr/>
-          <p:nvPr/>
-        </p:nvSpPr>
-        <p:spPr>
-          <a:xfrm>
-            <a:off x="8976360" y="3319272"/>
-            <a:ext cx="792480" cy="749808"/>
-          </a:xfrm>
-          <a:prstGeom prst="roundRect">
-            <a:avLst>
-              <a:gd name="adj" fmla="val 14634"/>
-            </a:avLst>
-          </a:prstGeom>
-          <a:solidFill>
-            <a:srgbClr val="2F8A28"/>
-          </a:solidFill>
-          <a:ln w="12700">
-            <a:solidFill>
-              <a:srgbClr val="2F8A28"/>
-            </a:solidFill>
-            <a:prstDash val="solid"/>
-          </a:ln>
-        </p:spPr>
-      </p:sp>
-      <p:sp>
-        <p:nvSpPr>
-          <p:cNvPr id="17" name="Text 15"/>
-          <p:cNvSpPr/>
-          <p:nvPr/>
-        </p:nvSpPr>
-        <p:spPr>
-          <a:xfrm>
-            <a:off x="9049512" y="3511296"/>
-            <a:ext cx="646176" cy="310896"/>
-          </a:xfrm>
-          <a:prstGeom prst="rect">
-            <a:avLst/>
-          </a:prstGeom>
-          <a:noFill/>
-          <a:ln/>
-        </p:spPr>
-        <p:txBody>
-          <a:bodyPr wrap="square" lIns="0" tIns="0" rIns="0" bIns="0" rtlCol="0" anchor="ctr">
-            <a:normAutofit/>
-          </a:bodyPr>
-          <a:lstStyle/>
-          <a:p>
-            <a:pPr algn="ctr" indent="0" marL="0">
-              <a:buNone/>
-            </a:pPr>
-            <a:r>
-              <a:rPr lang="en-US" sz="1500" b="1" dirty="0">
-                <a:solidFill>
-                  <a:srgbClr val="FFFFFF"/>
-                </a:solidFill>
-                <a:latin typeface="Aptos" pitchFamily="34" charset="0"/>
-                <a:ea typeface="Aptos" pitchFamily="34" charset="-122"/>
-                <a:cs typeface="Aptos" pitchFamily="34" charset="-120"/>
-              </a:rPr>
-              <a:t>Do</a:t>
-            </a:r>
-            <a:endParaRPr lang="en-US" sz="1500" dirty="0"/>
-          </a:p>
-        </p:txBody>
-      </p:sp>
-      <p:sp>
-        <p:nvSpPr>
-          <p:cNvPr id="18" name="Shape 16"/>
-          <p:cNvSpPr/>
-          <p:nvPr/>
-        </p:nvSpPr>
-        <p:spPr>
-          <a:xfrm>
-            <a:off x="10024872" y="3319272"/>
-            <a:ext cx="792480" cy="749808"/>
-          </a:xfrm>
-          <a:prstGeom prst="roundRect">
-            <a:avLst>
-              <a:gd name="adj" fmla="val 14634"/>
-            </a:avLst>
-          </a:prstGeom>
-          <a:solidFill>
-            <a:srgbClr val="D69A2D"/>
-          </a:solidFill>
-          <a:ln w="12700">
-            <a:solidFill>
-              <a:srgbClr val="D69A2D"/>
-            </a:solidFill>
-            <a:prstDash val="solid"/>
-          </a:ln>
-        </p:spPr>
-      </p:sp>
-      <p:sp>
-        <p:nvSpPr>
-          <p:cNvPr id="19" name="Text 17"/>
-          <p:cNvSpPr/>
-          <p:nvPr/>
-        </p:nvSpPr>
-        <p:spPr>
-          <a:xfrm>
-            <a:off x="10098024" y="3511296"/>
-            <a:ext cx="646176" cy="310896"/>
-          </a:xfrm>
-          <a:prstGeom prst="rect">
-            <a:avLst/>
-          </a:prstGeom>
-          <a:noFill/>
-          <a:ln/>
-        </p:spPr>
-        <p:txBody>
-          <a:bodyPr wrap="square" lIns="0" tIns="0" rIns="0" bIns="0" rtlCol="0" anchor="ctr">
-            <a:normAutofit/>
-          </a:bodyPr>
-          <a:lstStyle/>
-          <a:p>
-            <a:pPr algn="ctr" indent="0" marL="0">
-              <a:buNone/>
-            </a:pPr>
-            <a:r>
-              <a:rPr lang="en-US" sz="1500" b="1" dirty="0">
-                <a:solidFill>
-                  <a:srgbClr val="FFFFFF"/>
-                </a:solidFill>
-                <a:latin typeface="Aptos" pitchFamily="34" charset="0"/>
-                <a:ea typeface="Aptos" pitchFamily="34" charset="-122"/>
-                <a:cs typeface="Aptos" pitchFamily="34" charset="-120"/>
-              </a:rPr>
-              <a:t>Review</a:t>
-            </a:r>
-            <a:endParaRPr lang="en-US" sz="1500" dirty="0"/>
-          </a:p>
-        </p:txBody>
-      </p:sp>
-      <p:sp>
-        <p:nvSpPr>
-          <p:cNvPr id="20" name="Shape 18"/>
-          <p:cNvSpPr/>
-          <p:nvPr/>
-        </p:nvSpPr>
-        <p:spPr>
-          <a:xfrm>
-            <a:off x="8293608" y="4389120"/>
-            <a:ext cx="2157984" cy="0"/>
-          </a:xfrm>
-          <a:prstGeom prst="line">
-            <a:avLst/>
-          </a:prstGeom>
-          <a:noFill/>
-          <a:ln w="25400">
-            <a:solidFill>
-              <a:srgbClr val="8ABBD8"/>
-            </a:solidFill>
-            <a:prstDash val="solid"/>
-          </a:ln>
-        </p:spPr>
-      </p:sp>
-      <p:sp>
-        <p:nvSpPr>
-          <p:cNvPr id="21" name="Text 19"/>
-          <p:cNvSpPr/>
-          <p:nvPr/>
-        </p:nvSpPr>
-        <p:spPr>
-          <a:xfrm>
-            <a:off x="7909560" y="3977640"/>
-            <a:ext cx="2926080" cy="182880"/>
-          </a:xfrm>
-          <a:prstGeom prst="rect">
-            <a:avLst/>
-          </a:prstGeom>
-          <a:noFill/>
-          <a:ln/>
-        </p:spPr>
-        <p:txBody>
-          <a:bodyPr wrap="square" lIns="0" tIns="0" rIns="0" bIns="0" rtlCol="0" anchor="ctr"/>
-          <a:lstStyle/>
-          <a:p>
-            <a:pPr algn="ctr" indent="0" marL="0">
-              <a:buNone/>
-            </a:pPr>
-            <a:r>
-              <a:rPr lang="en-US" sz="1000" dirty="0">
-                <a:solidFill>
-                  <a:srgbClr val="003A63"/>
-                </a:solidFill>
-                <a:latin typeface="Aptos" pitchFamily="34" charset="0"/>
-                <a:ea typeface="Aptos" pitchFamily="34" charset="-122"/>
-                <a:cs typeface="Aptos" pitchFamily="34" charset="-120"/>
-              </a:rPr>
-              <a:t>Dependencies visible</a:t>
-            </a:r>
-            <a:endParaRPr lang="en-US" sz="1000" dirty="0"/>
-          </a:p>
-        </p:txBody>
-      </p:sp>
-      <p:sp>
-        <p:nvSpPr>
-          <p:cNvPr id="22" name="Shape 20"/>
           <p:cNvSpPr/>
           <p:nvPr/>
         </p:nvSpPr>
@@ -18318,7 +15680,7 @@
       </p:sp>
       <p:sp>
         <p:nvSpPr>
-          <p:cNvPr id="23" name="Text 21"/>
+          <p:cNvPr id="17" name="Text 15"/>
           <p:cNvSpPr/>
           <p:nvPr/>
         </p:nvSpPr>
@@ -18357,7 +15719,7 @@
       </p:sp>
       <p:sp>
         <p:nvSpPr>
-          <p:cNvPr id="24" name="Text 22"/>
+          <p:cNvPr id="18" name="Text 16"/>
           <p:cNvSpPr/>
           <p:nvPr/>
         </p:nvSpPr>
@@ -18865,13 +16227,11 @@
             </a:avLst>
           </a:prstGeom>
           <a:solidFill>
-            <a:srgbClr val="FFFFFF">
-              <a:alpha val="88000"/>
-            </a:srgbClr>
+            <a:srgbClr val="FFFFFF"/>
           </a:solidFill>
           <a:ln w="12700">
             <a:solidFill>
-              <a:srgbClr val="D6E8F2"/>
+              <a:srgbClr val="B9D7E6"/>
             </a:solidFill>
             <a:prstDash val="solid"/>
           </a:ln>
@@ -18879,30 +16239,42 @@
       </p:sp>
       <p:sp>
         <p:nvSpPr>
-          <p:cNvPr id="14" name="Shape 12"/>
-          <p:cNvSpPr/>
-          <p:nvPr/>
-        </p:nvSpPr>
-        <p:spPr>
-          <a:xfrm>
-            <a:off x="7927848" y="3319272"/>
-            <a:ext cx="792480" cy="749808"/>
-          </a:xfrm>
-          <a:prstGeom prst="roundRect">
-            <a:avLst>
-              <a:gd name="adj" fmla="val 14634"/>
-            </a:avLst>
-          </a:prstGeom>
-          <a:solidFill>
-            <a:srgbClr val="0068B7"/>
-          </a:solidFill>
-          <a:ln w="12700">
-            <a:solidFill>
-              <a:srgbClr val="0068B7"/>
-            </a:solidFill>
-            <a:prstDash val="solid"/>
-          </a:ln>
-        </p:spPr>
+          <p:cNvPr id="14" name="Text 12"/>
+          <p:cNvSpPr/>
+          <p:nvPr/>
+        </p:nvSpPr>
+        <p:spPr>
+          <a:xfrm>
+            <a:off x="7799832" y="2935224"/>
+            <a:ext cx="3145536" cy="256032"/>
+          </a:xfrm>
+          <a:prstGeom prst="rect">
+            <a:avLst/>
+          </a:prstGeom>
+          <a:noFill/>
+          <a:ln/>
+        </p:spPr>
+        <p:txBody>
+          <a:bodyPr wrap="square" lIns="0" tIns="0" rIns="0" bIns="0" rtlCol="0" anchor="ctr"/>
+          <a:lstStyle/>
+          <a:p>
+            <a:pPr indent="0" marL="0">
+              <a:buNone/>
+            </a:pPr>
+            <a:r>
+              <a:rPr lang="en-US" sz="1300" b="1" dirty="0">
+                <a:solidFill>
+                  <a:srgbClr val="0068B7"/>
+                </a:solidFill>
+                <a:latin typeface="Aptos" pitchFamily="34" charset="0"/>
+                <a:ea typeface="Aptos" pitchFamily="34" charset="-122"/>
+                <a:cs typeface="Aptos" pitchFamily="34" charset="-120"/>
+              </a:rPr>
+              <a:t>Concept checkpoints</a:t>
+            </a:r>
+            <a:endParaRPr lang="en-US" sz="1300" dirty="0"/>
+          </a:p>
+        </p:txBody>
       </p:sp>
       <p:sp>
         <p:nvSpPr>
@@ -18912,240 +16284,67 @@
         </p:nvSpPr>
         <p:spPr>
           <a:xfrm>
-            <a:off x="8001000" y="3511296"/>
-            <a:ext cx="646176" cy="310896"/>
-          </a:xfrm>
-          <a:prstGeom prst="rect">
-            <a:avLst/>
-          </a:prstGeom>
-          <a:noFill/>
-          <a:ln/>
-        </p:spPr>
-        <p:txBody>
-          <a:bodyPr wrap="square" lIns="0" tIns="0" rIns="0" bIns="0" rtlCol="0" anchor="ctr">
+            <a:off x="7818120" y="3300984"/>
+            <a:ext cx="3090672" cy="877824"/>
+          </a:xfrm>
+          <a:prstGeom prst="rect">
+            <a:avLst/>
+          </a:prstGeom>
+          <a:noFill/>
+          <a:ln/>
+        </p:spPr>
+        <p:txBody>
+          <a:bodyPr wrap="square" lIns="254" tIns="254" rIns="254" bIns="254" rtlCol="0" anchor="t">
             <a:normAutofit/>
           </a:bodyPr>
           <a:lstStyle/>
           <a:p>
-            <a:pPr algn="ctr" indent="0" marL="0">
-              <a:buNone/>
-            </a:pPr>
-            <a:r>
-              <a:rPr lang="en-US" sz="1500" b="1" dirty="0">
-                <a:solidFill>
-                  <a:srgbClr val="FFFFFF"/>
-                </a:solidFill>
-                <a:latin typeface="Aptos" pitchFamily="34" charset="0"/>
-                <a:ea typeface="Aptos" pitchFamily="34" charset="-122"/>
-                <a:cs typeface="Aptos" pitchFamily="34" charset="-120"/>
-              </a:rPr>
-              <a:t>Plan</a:t>
-            </a:r>
-            <a:endParaRPr lang="en-US" sz="1500" dirty="0"/>
+            <a:r>
+              <a:rPr lang="en-US" sz="1380" dirty="0">
+                <a:solidFill>
+                  <a:srgbClr val="17364A"/>
+                </a:solidFill>
+                <a:latin typeface="Aptos" pitchFamily="34" charset="0"/>
+                <a:ea typeface="Aptos" pitchFamily="34" charset="-122"/>
+                <a:cs typeface="Aptos" pitchFamily="34" charset="-120"/>
+              </a:rPr>
+              <a:t>An agent that sends the message, updates a case record, creates a task, or notifies a.</a:t>
+            </a:r>
+            <a:endParaRPr lang="en-US" sz="1380" dirty="0"/>
+          </a:p>
+          <a:p>
+            <a:r>
+              <a:rPr lang="en-US" sz="1380" dirty="0">
+                <a:solidFill>
+                  <a:srgbClr val="17364A"/>
+                </a:solidFill>
+                <a:latin typeface="Aptos" pitchFamily="34" charset="0"/>
+                <a:ea typeface="Aptos" pitchFamily="34" charset="-122"/>
+                <a:cs typeface="Aptos" pitchFamily="34" charset="-120"/>
+              </a:rPr>
+              <a:t>Action-taking systems require explicit governance because errors can propagate quickly.</a:t>
+            </a:r>
+            <a:endParaRPr lang="en-US" sz="1380" dirty="0"/>
+          </a:p>
+          <a:p>
+            <a:r>
+              <a:rPr lang="en-US" sz="1380" dirty="0">
+                <a:solidFill>
+                  <a:srgbClr val="17364A"/>
+                </a:solidFill>
+                <a:latin typeface="Aptos" pitchFamily="34" charset="0"/>
+                <a:ea typeface="Aptos" pitchFamily="34" charset="-122"/>
+                <a:cs typeface="Aptos" pitchFamily="34" charset="-120"/>
+              </a:rPr>
+              <a:t>Public health workflows often involve legal authority, sensitive data, vulnerable.</a:t>
+            </a:r>
+            <a:endParaRPr lang="en-US" sz="1380" dirty="0"/>
           </a:p>
         </p:txBody>
       </p:sp>
       <p:sp>
         <p:nvSpPr>
           <p:cNvPr id="16" name="Shape 14"/>
-          <p:cNvSpPr/>
-          <p:nvPr/>
-        </p:nvSpPr>
-        <p:spPr>
-          <a:xfrm>
-            <a:off x="8976360" y="3319272"/>
-            <a:ext cx="792480" cy="749808"/>
-          </a:xfrm>
-          <a:prstGeom prst="roundRect">
-            <a:avLst>
-              <a:gd name="adj" fmla="val 14634"/>
-            </a:avLst>
-          </a:prstGeom>
-          <a:solidFill>
-            <a:srgbClr val="2F8A28"/>
-          </a:solidFill>
-          <a:ln w="12700">
-            <a:solidFill>
-              <a:srgbClr val="2F8A28"/>
-            </a:solidFill>
-            <a:prstDash val="solid"/>
-          </a:ln>
-        </p:spPr>
-      </p:sp>
-      <p:sp>
-        <p:nvSpPr>
-          <p:cNvPr id="17" name="Text 15"/>
-          <p:cNvSpPr/>
-          <p:nvPr/>
-        </p:nvSpPr>
-        <p:spPr>
-          <a:xfrm>
-            <a:off x="9049512" y="3511296"/>
-            <a:ext cx="646176" cy="310896"/>
-          </a:xfrm>
-          <a:prstGeom prst="rect">
-            <a:avLst/>
-          </a:prstGeom>
-          <a:noFill/>
-          <a:ln/>
-        </p:spPr>
-        <p:txBody>
-          <a:bodyPr wrap="square" lIns="0" tIns="0" rIns="0" bIns="0" rtlCol="0" anchor="ctr">
-            <a:normAutofit/>
-          </a:bodyPr>
-          <a:lstStyle/>
-          <a:p>
-            <a:pPr algn="ctr" indent="0" marL="0">
-              <a:buNone/>
-            </a:pPr>
-            <a:r>
-              <a:rPr lang="en-US" sz="1500" b="1" dirty="0">
-                <a:solidFill>
-                  <a:srgbClr val="FFFFFF"/>
-                </a:solidFill>
-                <a:latin typeface="Aptos" pitchFamily="34" charset="0"/>
-                <a:ea typeface="Aptos" pitchFamily="34" charset="-122"/>
-                <a:cs typeface="Aptos" pitchFamily="34" charset="-120"/>
-              </a:rPr>
-              <a:t>Do</a:t>
-            </a:r>
-            <a:endParaRPr lang="en-US" sz="1500" dirty="0"/>
-          </a:p>
-        </p:txBody>
-      </p:sp>
-      <p:sp>
-        <p:nvSpPr>
-          <p:cNvPr id="18" name="Shape 16"/>
-          <p:cNvSpPr/>
-          <p:nvPr/>
-        </p:nvSpPr>
-        <p:spPr>
-          <a:xfrm>
-            <a:off x="10024872" y="3319272"/>
-            <a:ext cx="792480" cy="749808"/>
-          </a:xfrm>
-          <a:prstGeom prst="roundRect">
-            <a:avLst>
-              <a:gd name="adj" fmla="val 14634"/>
-            </a:avLst>
-          </a:prstGeom>
-          <a:solidFill>
-            <a:srgbClr val="D69A2D"/>
-          </a:solidFill>
-          <a:ln w="12700">
-            <a:solidFill>
-              <a:srgbClr val="D69A2D"/>
-            </a:solidFill>
-            <a:prstDash val="solid"/>
-          </a:ln>
-        </p:spPr>
-      </p:sp>
-      <p:sp>
-        <p:nvSpPr>
-          <p:cNvPr id="19" name="Text 17"/>
-          <p:cNvSpPr/>
-          <p:nvPr/>
-        </p:nvSpPr>
-        <p:spPr>
-          <a:xfrm>
-            <a:off x="10098024" y="3511296"/>
-            <a:ext cx="646176" cy="310896"/>
-          </a:xfrm>
-          <a:prstGeom prst="rect">
-            <a:avLst/>
-          </a:prstGeom>
-          <a:noFill/>
-          <a:ln/>
-        </p:spPr>
-        <p:txBody>
-          <a:bodyPr wrap="square" lIns="0" tIns="0" rIns="0" bIns="0" rtlCol="0" anchor="ctr">
-            <a:normAutofit/>
-          </a:bodyPr>
-          <a:lstStyle/>
-          <a:p>
-            <a:pPr algn="ctr" indent="0" marL="0">
-              <a:buNone/>
-            </a:pPr>
-            <a:r>
-              <a:rPr lang="en-US" sz="1500" b="1" dirty="0">
-                <a:solidFill>
-                  <a:srgbClr val="FFFFFF"/>
-                </a:solidFill>
-                <a:latin typeface="Aptos" pitchFamily="34" charset="0"/>
-                <a:ea typeface="Aptos" pitchFamily="34" charset="-122"/>
-                <a:cs typeface="Aptos" pitchFamily="34" charset="-120"/>
-              </a:rPr>
-              <a:t>Review</a:t>
-            </a:r>
-            <a:endParaRPr lang="en-US" sz="1500" dirty="0"/>
-          </a:p>
-        </p:txBody>
-      </p:sp>
-      <p:sp>
-        <p:nvSpPr>
-          <p:cNvPr id="20" name="Shape 18"/>
-          <p:cNvSpPr/>
-          <p:nvPr/>
-        </p:nvSpPr>
-        <p:spPr>
-          <a:xfrm>
-            <a:off x="8293608" y="4389120"/>
-            <a:ext cx="2157984" cy="0"/>
-          </a:xfrm>
-          <a:prstGeom prst="line">
-            <a:avLst/>
-          </a:prstGeom>
-          <a:noFill/>
-          <a:ln w="25400">
-            <a:solidFill>
-              <a:srgbClr val="8ABBD8"/>
-            </a:solidFill>
-            <a:prstDash val="solid"/>
-          </a:ln>
-        </p:spPr>
-      </p:sp>
-      <p:sp>
-        <p:nvSpPr>
-          <p:cNvPr id="21" name="Text 19"/>
-          <p:cNvSpPr/>
-          <p:nvPr/>
-        </p:nvSpPr>
-        <p:spPr>
-          <a:xfrm>
-            <a:off x="7909560" y="3977640"/>
-            <a:ext cx="2926080" cy="182880"/>
-          </a:xfrm>
-          <a:prstGeom prst="rect">
-            <a:avLst/>
-          </a:prstGeom>
-          <a:noFill/>
-          <a:ln/>
-        </p:spPr>
-        <p:txBody>
-          <a:bodyPr wrap="square" lIns="0" tIns="0" rIns="0" bIns="0" rtlCol="0" anchor="ctr"/>
-          <a:lstStyle/>
-          <a:p>
-            <a:pPr algn="ctr" indent="0" marL="0">
-              <a:buNone/>
-            </a:pPr>
-            <a:r>
-              <a:rPr lang="en-US" sz="1000" dirty="0">
-                <a:solidFill>
-                  <a:srgbClr val="003A63"/>
-                </a:solidFill>
-                <a:latin typeface="Aptos" pitchFamily="34" charset="0"/>
-                <a:ea typeface="Aptos" pitchFamily="34" charset="-122"/>
-                <a:cs typeface="Aptos" pitchFamily="34" charset="-120"/>
-              </a:rPr>
-              <a:t>Dependencies visible</a:t>
-            </a:r>
-            <a:endParaRPr lang="en-US" sz="1000" dirty="0"/>
-          </a:p>
-        </p:txBody>
-      </p:sp>
-      <p:sp>
-        <p:nvSpPr>
-          <p:cNvPr id="22" name="Shape 20"/>
           <p:cNvSpPr/>
           <p:nvPr/>
         </p:nvSpPr>
@@ -19172,7 +16371,7 @@
       </p:sp>
       <p:sp>
         <p:nvSpPr>
-          <p:cNvPr id="23" name="Text 21"/>
+          <p:cNvPr id="17" name="Text 15"/>
           <p:cNvSpPr/>
           <p:nvPr/>
         </p:nvSpPr>
@@ -19211,7 +16410,7 @@
       </p:sp>
       <p:sp>
         <p:nvSpPr>
-          <p:cNvPr id="24" name="Text 22"/>
+          <p:cNvPr id="18" name="Text 16"/>
           <p:cNvSpPr/>
           <p:nvPr/>
         </p:nvSpPr>
@@ -19719,13 +16918,11 @@
             </a:avLst>
           </a:prstGeom>
           <a:solidFill>
-            <a:srgbClr val="FFFFFF">
-              <a:alpha val="88000"/>
-            </a:srgbClr>
+            <a:srgbClr val="FFFFFF"/>
           </a:solidFill>
           <a:ln w="12700">
             <a:solidFill>
-              <a:srgbClr val="D6E8F2"/>
+              <a:srgbClr val="B9D7E6"/>
             </a:solidFill>
             <a:prstDash val="solid"/>
           </a:ln>
@@ -19733,30 +16930,42 @@
       </p:sp>
       <p:sp>
         <p:nvSpPr>
-          <p:cNvPr id="14" name="Shape 12"/>
-          <p:cNvSpPr/>
-          <p:nvPr/>
-        </p:nvSpPr>
-        <p:spPr>
-          <a:xfrm>
-            <a:off x="7927848" y="3319272"/>
-            <a:ext cx="792480" cy="749808"/>
-          </a:xfrm>
-          <a:prstGeom prst="roundRect">
-            <a:avLst>
-              <a:gd name="adj" fmla="val 14634"/>
-            </a:avLst>
-          </a:prstGeom>
-          <a:solidFill>
-            <a:srgbClr val="0068B7"/>
-          </a:solidFill>
-          <a:ln w="12700">
-            <a:solidFill>
-              <a:srgbClr val="0068B7"/>
-            </a:solidFill>
-            <a:prstDash val="solid"/>
-          </a:ln>
-        </p:spPr>
+          <p:cNvPr id="14" name="Text 12"/>
+          <p:cNvSpPr/>
+          <p:nvPr/>
+        </p:nvSpPr>
+        <p:spPr>
+          <a:xfrm>
+            <a:off x="7799832" y="2935224"/>
+            <a:ext cx="3145536" cy="256032"/>
+          </a:xfrm>
+          <a:prstGeom prst="rect">
+            <a:avLst/>
+          </a:prstGeom>
+          <a:noFill/>
+          <a:ln/>
+        </p:spPr>
+        <p:txBody>
+          <a:bodyPr wrap="square" lIns="0" tIns="0" rIns="0" bIns="0" rtlCol="0" anchor="ctr"/>
+          <a:lstStyle/>
+          <a:p>
+            <a:pPr indent="0" marL="0">
+              <a:buNone/>
+            </a:pPr>
+            <a:r>
+              <a:rPr lang="en-US" sz="1300" b="1" dirty="0">
+                <a:solidFill>
+                  <a:srgbClr val="0068B7"/>
+                </a:solidFill>
+                <a:latin typeface="Aptos" pitchFamily="34" charset="0"/>
+                <a:ea typeface="Aptos" pitchFamily="34" charset="-122"/>
+                <a:cs typeface="Aptos" pitchFamily="34" charset="-120"/>
+              </a:rPr>
+              <a:t>Concept checkpoints</a:t>
+            </a:r>
+            <a:endParaRPr lang="en-US" sz="1300" dirty="0"/>
+          </a:p>
+        </p:txBody>
       </p:sp>
       <p:sp>
         <p:nvSpPr>
@@ -19766,240 +16975,67 @@
         </p:nvSpPr>
         <p:spPr>
           <a:xfrm>
-            <a:off x="8001000" y="3511296"/>
-            <a:ext cx="646176" cy="310896"/>
-          </a:xfrm>
-          <a:prstGeom prst="rect">
-            <a:avLst/>
-          </a:prstGeom>
-          <a:noFill/>
-          <a:ln/>
-        </p:spPr>
-        <p:txBody>
-          <a:bodyPr wrap="square" lIns="0" tIns="0" rIns="0" bIns="0" rtlCol="0" anchor="ctr">
+            <a:off x="7818120" y="3300984"/>
+            <a:ext cx="3090672" cy="877824"/>
+          </a:xfrm>
+          <a:prstGeom prst="rect">
+            <a:avLst/>
+          </a:prstGeom>
+          <a:noFill/>
+          <a:ln/>
+        </p:spPr>
+        <p:txBody>
+          <a:bodyPr wrap="square" lIns="254" tIns="254" rIns="254" bIns="254" rtlCol="0" anchor="t">
             <a:normAutofit/>
           </a:bodyPr>
           <a:lstStyle/>
           <a:p>
-            <a:pPr algn="ctr" indent="0" marL="0">
-              <a:buNone/>
-            </a:pPr>
-            <a:r>
-              <a:rPr lang="en-US" sz="1500" b="1" dirty="0">
-                <a:solidFill>
-                  <a:srgbClr val="FFFFFF"/>
-                </a:solidFill>
-                <a:latin typeface="Aptos" pitchFamily="34" charset="0"/>
-                <a:ea typeface="Aptos" pitchFamily="34" charset="-122"/>
-                <a:cs typeface="Aptos" pitchFamily="34" charset="-120"/>
-              </a:rPr>
-              <a:t>Plan</a:t>
-            </a:r>
-            <a:endParaRPr lang="en-US" sz="1500" dirty="0"/>
+            <a:r>
+              <a:rPr lang="en-US" sz="1380" dirty="0">
+                <a:solidFill>
+                  <a:srgbClr val="17364A"/>
+                </a:solidFill>
+                <a:latin typeface="Aptos" pitchFamily="34" charset="0"/>
+                <a:ea typeface="Aptos" pitchFamily="34" charset="-122"/>
+                <a:cs typeface="Aptos" pitchFamily="34" charset="-120"/>
+              </a:rPr>
+              <a:t>The agent could classify the inquiry, retrieve relevant approved guidance, draft a.</a:t>
+            </a:r>
+            <a:endParaRPr lang="en-US" sz="1380" dirty="0"/>
+          </a:p>
+          <a:p>
+            <a:r>
+              <a:rPr lang="en-US" sz="1380" dirty="0">
+                <a:solidFill>
+                  <a:srgbClr val="17364A"/>
+                </a:solidFill>
+                <a:latin typeface="Aptos" pitchFamily="34" charset="0"/>
+                <a:ea typeface="Aptos" pitchFamily="34" charset="-122"/>
+                <a:cs typeface="Aptos" pitchFamily="34" charset="-120"/>
+              </a:rPr>
+              <a:t>For sensitive complaints, reportable disease concerns, media inquiries, or legal issues,.</a:t>
+            </a:r>
+            <a:endParaRPr lang="en-US" sz="1380" dirty="0"/>
+          </a:p>
+          <a:p>
+            <a:r>
+              <a:rPr lang="en-US" sz="1380" dirty="0">
+                <a:solidFill>
+                  <a:srgbClr val="17364A"/>
+                </a:solidFill>
+                <a:latin typeface="Aptos" pitchFamily="34" charset="0"/>
+                <a:ea typeface="Aptos" pitchFamily="34" charset="-122"/>
+                <a:cs typeface="Aptos" pitchFamily="34" charset="-120"/>
+              </a:rPr>
+              <a:t>This design requires orchestration rules.</a:t>
+            </a:r>
+            <a:endParaRPr lang="en-US" sz="1380" dirty="0"/>
           </a:p>
         </p:txBody>
       </p:sp>
       <p:sp>
         <p:nvSpPr>
           <p:cNvPr id="16" name="Shape 14"/>
-          <p:cNvSpPr/>
-          <p:nvPr/>
-        </p:nvSpPr>
-        <p:spPr>
-          <a:xfrm>
-            <a:off x="8976360" y="3319272"/>
-            <a:ext cx="792480" cy="749808"/>
-          </a:xfrm>
-          <a:prstGeom prst="roundRect">
-            <a:avLst>
-              <a:gd name="adj" fmla="val 14634"/>
-            </a:avLst>
-          </a:prstGeom>
-          <a:solidFill>
-            <a:srgbClr val="2F8A28"/>
-          </a:solidFill>
-          <a:ln w="12700">
-            <a:solidFill>
-              <a:srgbClr val="2F8A28"/>
-            </a:solidFill>
-            <a:prstDash val="solid"/>
-          </a:ln>
-        </p:spPr>
-      </p:sp>
-      <p:sp>
-        <p:nvSpPr>
-          <p:cNvPr id="17" name="Text 15"/>
-          <p:cNvSpPr/>
-          <p:nvPr/>
-        </p:nvSpPr>
-        <p:spPr>
-          <a:xfrm>
-            <a:off x="9049512" y="3511296"/>
-            <a:ext cx="646176" cy="310896"/>
-          </a:xfrm>
-          <a:prstGeom prst="rect">
-            <a:avLst/>
-          </a:prstGeom>
-          <a:noFill/>
-          <a:ln/>
-        </p:spPr>
-        <p:txBody>
-          <a:bodyPr wrap="square" lIns="0" tIns="0" rIns="0" bIns="0" rtlCol="0" anchor="ctr">
-            <a:normAutofit/>
-          </a:bodyPr>
-          <a:lstStyle/>
-          <a:p>
-            <a:pPr algn="ctr" indent="0" marL="0">
-              <a:buNone/>
-            </a:pPr>
-            <a:r>
-              <a:rPr lang="en-US" sz="1500" b="1" dirty="0">
-                <a:solidFill>
-                  <a:srgbClr val="FFFFFF"/>
-                </a:solidFill>
-                <a:latin typeface="Aptos" pitchFamily="34" charset="0"/>
-                <a:ea typeface="Aptos" pitchFamily="34" charset="-122"/>
-                <a:cs typeface="Aptos" pitchFamily="34" charset="-120"/>
-              </a:rPr>
-              <a:t>Do</a:t>
-            </a:r>
-            <a:endParaRPr lang="en-US" sz="1500" dirty="0"/>
-          </a:p>
-        </p:txBody>
-      </p:sp>
-      <p:sp>
-        <p:nvSpPr>
-          <p:cNvPr id="18" name="Shape 16"/>
-          <p:cNvSpPr/>
-          <p:nvPr/>
-        </p:nvSpPr>
-        <p:spPr>
-          <a:xfrm>
-            <a:off x="10024872" y="3319272"/>
-            <a:ext cx="792480" cy="749808"/>
-          </a:xfrm>
-          <a:prstGeom prst="roundRect">
-            <a:avLst>
-              <a:gd name="adj" fmla="val 14634"/>
-            </a:avLst>
-          </a:prstGeom>
-          <a:solidFill>
-            <a:srgbClr val="D69A2D"/>
-          </a:solidFill>
-          <a:ln w="12700">
-            <a:solidFill>
-              <a:srgbClr val="D69A2D"/>
-            </a:solidFill>
-            <a:prstDash val="solid"/>
-          </a:ln>
-        </p:spPr>
-      </p:sp>
-      <p:sp>
-        <p:nvSpPr>
-          <p:cNvPr id="19" name="Text 17"/>
-          <p:cNvSpPr/>
-          <p:nvPr/>
-        </p:nvSpPr>
-        <p:spPr>
-          <a:xfrm>
-            <a:off x="10098024" y="3511296"/>
-            <a:ext cx="646176" cy="310896"/>
-          </a:xfrm>
-          <a:prstGeom prst="rect">
-            <a:avLst/>
-          </a:prstGeom>
-          <a:noFill/>
-          <a:ln/>
-        </p:spPr>
-        <p:txBody>
-          <a:bodyPr wrap="square" lIns="0" tIns="0" rIns="0" bIns="0" rtlCol="0" anchor="ctr">
-            <a:normAutofit/>
-          </a:bodyPr>
-          <a:lstStyle/>
-          <a:p>
-            <a:pPr algn="ctr" indent="0" marL="0">
-              <a:buNone/>
-            </a:pPr>
-            <a:r>
-              <a:rPr lang="en-US" sz="1500" b="1" dirty="0">
-                <a:solidFill>
-                  <a:srgbClr val="FFFFFF"/>
-                </a:solidFill>
-                <a:latin typeface="Aptos" pitchFamily="34" charset="0"/>
-                <a:ea typeface="Aptos" pitchFamily="34" charset="-122"/>
-                <a:cs typeface="Aptos" pitchFamily="34" charset="-120"/>
-              </a:rPr>
-              <a:t>Review</a:t>
-            </a:r>
-            <a:endParaRPr lang="en-US" sz="1500" dirty="0"/>
-          </a:p>
-        </p:txBody>
-      </p:sp>
-      <p:sp>
-        <p:nvSpPr>
-          <p:cNvPr id="20" name="Shape 18"/>
-          <p:cNvSpPr/>
-          <p:nvPr/>
-        </p:nvSpPr>
-        <p:spPr>
-          <a:xfrm>
-            <a:off x="8293608" y="4389120"/>
-            <a:ext cx="2157984" cy="0"/>
-          </a:xfrm>
-          <a:prstGeom prst="line">
-            <a:avLst/>
-          </a:prstGeom>
-          <a:noFill/>
-          <a:ln w="25400">
-            <a:solidFill>
-              <a:srgbClr val="8ABBD8"/>
-            </a:solidFill>
-            <a:prstDash val="solid"/>
-          </a:ln>
-        </p:spPr>
-      </p:sp>
-      <p:sp>
-        <p:nvSpPr>
-          <p:cNvPr id="21" name="Text 19"/>
-          <p:cNvSpPr/>
-          <p:nvPr/>
-        </p:nvSpPr>
-        <p:spPr>
-          <a:xfrm>
-            <a:off x="7909560" y="3977640"/>
-            <a:ext cx="2926080" cy="182880"/>
-          </a:xfrm>
-          <a:prstGeom prst="rect">
-            <a:avLst/>
-          </a:prstGeom>
-          <a:noFill/>
-          <a:ln/>
-        </p:spPr>
-        <p:txBody>
-          <a:bodyPr wrap="square" lIns="0" tIns="0" rIns="0" bIns="0" rtlCol="0" anchor="ctr"/>
-          <a:lstStyle/>
-          <a:p>
-            <a:pPr algn="ctr" indent="0" marL="0">
-              <a:buNone/>
-            </a:pPr>
-            <a:r>
-              <a:rPr lang="en-US" sz="1000" dirty="0">
-                <a:solidFill>
-                  <a:srgbClr val="003A63"/>
-                </a:solidFill>
-                <a:latin typeface="Aptos" pitchFamily="34" charset="0"/>
-                <a:ea typeface="Aptos" pitchFamily="34" charset="-122"/>
-                <a:cs typeface="Aptos" pitchFamily="34" charset="-120"/>
-              </a:rPr>
-              <a:t>Dependencies visible</a:t>
-            </a:r>
-            <a:endParaRPr lang="en-US" sz="1000" dirty="0"/>
-          </a:p>
-        </p:txBody>
-      </p:sp>
-      <p:sp>
-        <p:nvSpPr>
-          <p:cNvPr id="22" name="Shape 20"/>
           <p:cNvSpPr/>
           <p:nvPr/>
         </p:nvSpPr>
@@ -20026,7 +17062,7 @@
       </p:sp>
       <p:sp>
         <p:nvSpPr>
-          <p:cNvPr id="23" name="Text 21"/>
+          <p:cNvPr id="17" name="Text 15"/>
           <p:cNvSpPr/>
           <p:nvPr/>
         </p:nvSpPr>
@@ -20065,7 +17101,7 @@
       </p:sp>
       <p:sp>
         <p:nvSpPr>
-          <p:cNvPr id="24" name="Text 22"/>
+          <p:cNvPr id="18" name="Text 16"/>
           <p:cNvSpPr/>
           <p:nvPr/>
         </p:nvSpPr>

--- a/downloads/presentations/modules/arc-320.pptx
+++ b/downloads/presentations/modules/arc-320.pptx
@@ -3353,49 +3353,58 @@
           <a:ln/>
         </p:spPr>
         <p:txBody>
-          <a:bodyPr wrap="square" lIns="635" tIns="635" rIns="635" bIns="635" rtlCol="0" anchor="t">
+          <a:bodyPr wrap="square" lIns="1016" tIns="1016" rIns="1016" bIns="1016" rtlCol="0" anchor="t">
             <a:normAutofit/>
           </a:bodyPr>
           <a:lstStyle/>
           <a:p>
+            <a:pPr indent="0" marL="0">
+              <a:buNone/>
+            </a:pPr>
             <a:r>
               <a:rPr lang="en-US" sz="2100" dirty="0">
                 <a:solidFill>
-                  <a:srgbClr val="17364A"/>
-                </a:solidFill>
-                <a:latin typeface="Aptos" pitchFamily="34" charset="0"/>
-                <a:ea typeface="Aptos" pitchFamily="34" charset="-122"/>
-                <a:cs typeface="Aptos" pitchFamily="34" charset="-120"/>
-              </a:rPr>
-              <a:t>Agentic workflow design begins with the goal.</a:t>
+                  <a:srgbClr val="003A63"/>
+                </a:solidFill>
+                <a:latin typeface="Aptos" pitchFamily="34" charset="0"/>
+                <a:ea typeface="Aptos" pitchFamily="34" charset="-122"/>
+                <a:cs typeface="Aptos" pitchFamily="34" charset="-120"/>
+              </a:rPr>
+              <a:t>• Agentic workflow design begins with the goal.</a:t>
             </a:r>
             <a:endParaRPr lang="en-US" sz="2100" dirty="0"/>
           </a:p>
           <a:p>
+            <a:pPr indent="0" marL="0">
+              <a:buNone/>
+            </a:pPr>
             <a:r>
               <a:rPr lang="en-US" sz="2100" dirty="0">
                 <a:solidFill>
-                  <a:srgbClr val="17364A"/>
-                </a:solidFill>
-                <a:latin typeface="Aptos" pitchFamily="34" charset="0"/>
-                <a:ea typeface="Aptos" pitchFamily="34" charset="-122"/>
-                <a:cs typeface="Aptos" pitchFamily="34" charset="-120"/>
-              </a:rPr>
-              <a:t>The goal should be narrow and operationally defined. “Help with surveillance” is too broad. “Draft a.</a:t>
+                  <a:srgbClr val="003A63"/>
+                </a:solidFill>
+                <a:latin typeface="Aptos" pitchFamily="34" charset="0"/>
+                <a:ea typeface="Aptos" pitchFamily="34" charset="-122"/>
+                <a:cs typeface="Aptos" pitchFamily="34" charset="-120"/>
+              </a:rPr>
+              <a:t>• The goal should be narrow and operationally defined. “Help with surveillance” is too broad..</a:t>
             </a:r>
             <a:endParaRPr lang="en-US" sz="2100" dirty="0"/>
           </a:p>
           <a:p>
+            <a:pPr indent="0" marL="0">
+              <a:buNone/>
+            </a:pPr>
             <a:r>
               <a:rPr lang="en-US" sz="2100" dirty="0">
                 <a:solidFill>
-                  <a:srgbClr val="17364A"/>
-                </a:solidFill>
-                <a:latin typeface="Aptos" pitchFamily="34" charset="0"/>
-                <a:ea typeface="Aptos" pitchFamily="34" charset="-122"/>
-                <a:cs typeface="Aptos" pitchFamily="34" charset="-120"/>
-              </a:rPr>
-              <a:t>Narrow goals make it easier to define tools, permissions, validation, and monitoring.</a:t>
+                  <a:srgbClr val="003A63"/>
+                </a:solidFill>
+                <a:latin typeface="Aptos" pitchFamily="34" charset="0"/>
+                <a:ea typeface="Aptos" pitchFamily="34" charset="-122"/>
+                <a:cs typeface="Aptos" pitchFamily="34" charset="-120"/>
+              </a:rPr>
+              <a:t>• Narrow goals make it easier to define tools, permissions, validation, and monitoring.</a:t>
             </a:r>
             <a:endParaRPr lang="en-US" sz="2100" dirty="0"/>
           </a:p>
@@ -3475,17 +3484,17 @@
         </p:nvSpPr>
         <p:spPr>
           <a:xfrm>
-            <a:off x="7799832" y="1828800"/>
-            <a:ext cx="3145536" cy="685800"/>
-          </a:xfrm>
-          <a:prstGeom prst="rect">
-            <a:avLst/>
-          </a:prstGeom>
-          <a:noFill/>
-          <a:ln/>
-        </p:spPr>
-        <p:txBody>
-          <a:bodyPr wrap="square" lIns="0" tIns="0" rIns="0" bIns="0" rtlCol="0" anchor="t">
+            <a:off x="7799832" y="1801368"/>
+            <a:ext cx="3145536" cy="758952"/>
+          </a:xfrm>
+          <a:prstGeom prst="rect">
+            <a:avLst/>
+          </a:prstGeom>
+          <a:noFill/>
+          <a:ln/>
+        </p:spPr>
+        <p:txBody>
+          <a:bodyPr wrap="square" lIns="254" tIns="254" rIns="254" bIns="254" rtlCol="0" anchor="t">
             <a:normAutofit/>
           </a:bodyPr>
           <a:lstStyle/>
@@ -3494,7 +3503,7 @@
               <a:buNone/>
             </a:pPr>
             <a:r>
-              <a:rPr lang="en-US" sz="1550" dirty="0">
+              <a:rPr lang="en-US" sz="1320" dirty="0">
                 <a:solidFill>
                   <a:srgbClr val="17364A"/>
                 </a:solidFill>
@@ -3504,7 +3513,7 @@
               </a:rPr>
               <a:t>Agentic workflow design begins with the goal.</a:t>
             </a:r>
-            <a:endParaRPr lang="en-US" sz="1550" dirty="0"/>
+            <a:endParaRPr lang="en-US" sz="1320" dirty="0"/>
           </a:p>
         </p:txBody>
       </p:sp>
@@ -3592,13 +3601,16 @@
           <a:ln/>
         </p:spPr>
         <p:txBody>
-          <a:bodyPr wrap="square" lIns="254" tIns="254" rIns="254" bIns="254" rtlCol="0" anchor="t">
+          <a:bodyPr wrap="square" lIns="508" tIns="508" rIns="508" bIns="508" rtlCol="0" anchor="t">
             <a:normAutofit/>
           </a:bodyPr>
           <a:lstStyle/>
           <a:p>
-            <a:r>
-              <a:rPr lang="en-US" sz="1380" dirty="0">
+            <a:pPr indent="0" marL="0">
+              <a:buNone/>
+            </a:pPr>
+            <a:r>
+              <a:rPr lang="en-US" sz="1220" dirty="0">
                 <a:solidFill>
                   <a:srgbClr val="17364A"/>
                 </a:solidFill>
@@ -3606,13 +3618,16 @@
                 <a:ea typeface="Aptos" pitchFamily="34" charset="-122"/>
                 <a:cs typeface="Aptos" pitchFamily="34" charset="-120"/>
               </a:rPr>
-              <a:t>The goal should be narrow and operationally defined. “Help with surveillance” is too.</a:t>
-            </a:r>
-            <a:endParaRPr lang="en-US" sz="1380" dirty="0"/>
-          </a:p>
-          <a:p>
-            <a:r>
-              <a:rPr lang="en-US" sz="1380" dirty="0">
+              <a:t>The goal should be narrow and operationally defined. “Help with.</a:t>
+            </a:r>
+            <a:endParaRPr lang="en-US" sz="1220" dirty="0"/>
+          </a:p>
+          <a:p>
+            <a:pPr indent="0" marL="0">
+              <a:buNone/>
+            </a:pPr>
+            <a:r>
+              <a:rPr lang="en-US" sz="1220" dirty="0">
                 <a:solidFill>
                   <a:srgbClr val="17364A"/>
                 </a:solidFill>
@@ -3622,11 +3637,14 @@
               </a:rPr>
               <a:t>Tool access is a central design decision.</a:t>
             </a:r>
-            <a:endParaRPr lang="en-US" sz="1380" dirty="0"/>
-          </a:p>
-          <a:p>
-            <a:r>
-              <a:rPr lang="en-US" sz="1380" dirty="0">
+            <a:endParaRPr lang="en-US" sz="1220" dirty="0"/>
+          </a:p>
+          <a:p>
+            <a:pPr indent="0" marL="0">
+              <a:buNone/>
+            </a:pPr>
+            <a:r>
+              <a:rPr lang="en-US" sz="1220" dirty="0">
                 <a:solidFill>
                   <a:srgbClr val="17364A"/>
                 </a:solidFill>
@@ -3634,9 +3652,9 @@
                 <a:ea typeface="Aptos" pitchFamily="34" charset="-122"/>
                 <a:cs typeface="Aptos" pitchFamily="34" charset="-120"/>
               </a:rPr>
-              <a:t>An agent may be allowed to search documents, query a database, create a task, send a draft.</a:t>
-            </a:r>
-            <a:endParaRPr lang="en-US" sz="1380" dirty="0"/>
+              <a:t>An agent may be allowed to search documents, query a database,.</a:t>
+            </a:r>
+            <a:endParaRPr lang="en-US" sz="1220" dirty="0"/>
           </a:p>
         </p:txBody>
       </p:sp>
@@ -3714,17 +3732,17 @@
         </p:nvSpPr>
         <p:spPr>
           <a:xfrm>
-            <a:off x="7799832" y="5001768"/>
-            <a:ext cx="3145536" cy="502920"/>
-          </a:xfrm>
-          <a:prstGeom prst="rect">
-            <a:avLst/>
-          </a:prstGeom>
-          <a:noFill/>
-          <a:ln/>
-        </p:spPr>
-        <p:txBody>
-          <a:bodyPr wrap="square" lIns="0" tIns="0" rIns="0" bIns="0" rtlCol="0" anchor="t">
+            <a:off x="7799832" y="4974336"/>
+            <a:ext cx="3145536" cy="576072"/>
+          </a:xfrm>
+          <a:prstGeom prst="rect">
+            <a:avLst/>
+          </a:prstGeom>
+          <a:noFill/>
+          <a:ln/>
+        </p:spPr>
+        <p:txBody>
+          <a:bodyPr wrap="square" lIns="254" tIns="254" rIns="254" bIns="254" rtlCol="0" anchor="t">
             <a:normAutofit/>
           </a:bodyPr>
           <a:lstStyle/>
@@ -3733,7 +3751,7 @@
               <a:buNone/>
             </a:pPr>
             <a:r>
-              <a:rPr lang="en-US" sz="1550" dirty="0">
+              <a:rPr lang="en-US" sz="1320" dirty="0">
                 <a:solidFill>
                   <a:srgbClr val="17364A"/>
                 </a:solidFill>
@@ -3741,9 +3759,9 @@
                 <a:ea typeface="Aptos" pitchFamily="34" charset="-122"/>
                 <a:cs typeface="Aptos" pitchFamily="34" charset="-120"/>
               </a:rPr>
-              <a:t>Use the concept to clarify workflow changes, dependencies, staffing, procurement requirements, training needs, and implementation checkpoints.</a:t>
-            </a:r>
-            <a:endParaRPr lang="en-US" sz="1550" dirty="0"/>
+              <a:t>Use the concept to clarify workflow changes, dependencies, staffing, procurement requirements, training needs, and.</a:t>
+            </a:r>
+            <a:endParaRPr lang="en-US" sz="1320" dirty="0"/>
           </a:p>
         </p:txBody>
       </p:sp>
@@ -4044,49 +4062,58 @@
           <a:ln/>
         </p:spPr>
         <p:txBody>
-          <a:bodyPr wrap="square" lIns="635" tIns="635" rIns="635" bIns="635" rtlCol="0" anchor="t">
+          <a:bodyPr wrap="square" lIns="1016" tIns="1016" rIns="1016" bIns="1016" rtlCol="0" anchor="t">
             <a:normAutofit/>
           </a:bodyPr>
           <a:lstStyle/>
           <a:p>
+            <a:pPr indent="0" marL="0">
+              <a:buNone/>
+            </a:pPr>
             <a:r>
               <a:rPr lang="en-US" sz="2100" dirty="0">
                 <a:solidFill>
-                  <a:srgbClr val="17364A"/>
-                </a:solidFill>
-                <a:latin typeface="Aptos" pitchFamily="34" charset="0"/>
-                <a:ea typeface="Aptos" pitchFamily="34" charset="-122"/>
-                <a:cs typeface="Aptos" pitchFamily="34" charset="-120"/>
-              </a:rPr>
-              <a:t>Human oversight should match risk.</a:t>
+                  <a:srgbClr val="003A63"/>
+                </a:solidFill>
+                <a:latin typeface="Aptos" pitchFamily="34" charset="0"/>
+                <a:ea typeface="Aptos" pitchFamily="34" charset="-122"/>
+                <a:cs typeface="Aptos" pitchFamily="34" charset="-120"/>
+              </a:rPr>
+              <a:t>• Human oversight should match risk.</a:t>
             </a:r>
             <a:endParaRPr lang="en-US" sz="2100" dirty="0"/>
           </a:p>
           <a:p>
+            <a:pPr indent="0" marL="0">
+              <a:buNone/>
+            </a:pPr>
             <a:r>
               <a:rPr lang="en-US" sz="2100" dirty="0">
                 <a:solidFill>
-                  <a:srgbClr val="17364A"/>
-                </a:solidFill>
-                <a:latin typeface="Aptos" pitchFamily="34" charset="0"/>
-                <a:ea typeface="Aptos" pitchFamily="34" charset="-122"/>
-                <a:cs typeface="Aptos" pitchFamily="34" charset="-120"/>
-              </a:rPr>
-              <a:t>Human-in-the-loop approval is appropriate for actions that affect records, services, public.</a:t>
+                  <a:srgbClr val="003A63"/>
+                </a:solidFill>
+                <a:latin typeface="Aptos" pitchFamily="34" charset="0"/>
+                <a:ea typeface="Aptos" pitchFamily="34" charset="-122"/>
+                <a:cs typeface="Aptos" pitchFamily="34" charset="-120"/>
+              </a:rPr>
+              <a:t>• Human-in-the-loop approval is appropriate for actions that affect records, services, public.</a:t>
             </a:r>
             <a:endParaRPr lang="en-US" sz="2100" dirty="0"/>
           </a:p>
           <a:p>
+            <a:pPr indent="0" marL="0">
+              <a:buNone/>
+            </a:pPr>
             <a:r>
               <a:rPr lang="en-US" sz="2100" dirty="0">
                 <a:solidFill>
-                  <a:srgbClr val="17364A"/>
-                </a:solidFill>
-                <a:latin typeface="Aptos" pitchFamily="34" charset="0"/>
-                <a:ea typeface="Aptos" pitchFamily="34" charset="-122"/>
-                <a:cs typeface="Aptos" pitchFamily="34" charset="-120"/>
-              </a:rPr>
-              <a:t>Human-on-the-loop monitoring may be appropriate for lower-risk background tasks if users can intervene.</a:t>
+                  <a:srgbClr val="003A63"/>
+                </a:solidFill>
+                <a:latin typeface="Aptos" pitchFamily="34" charset="0"/>
+                <a:ea typeface="Aptos" pitchFamily="34" charset="-122"/>
+                <a:cs typeface="Aptos" pitchFamily="34" charset="-120"/>
+              </a:rPr>
+              <a:t>• Human-on-the-loop monitoring may be appropriate for lower-risk background tasks if users can.</a:t>
             </a:r>
             <a:endParaRPr lang="en-US" sz="2100" dirty="0"/>
           </a:p>
@@ -4166,17 +4193,17 @@
         </p:nvSpPr>
         <p:spPr>
           <a:xfrm>
-            <a:off x="7799832" y="1828800"/>
-            <a:ext cx="3145536" cy="685800"/>
-          </a:xfrm>
-          <a:prstGeom prst="rect">
-            <a:avLst/>
-          </a:prstGeom>
-          <a:noFill/>
-          <a:ln/>
-        </p:spPr>
-        <p:txBody>
-          <a:bodyPr wrap="square" lIns="0" tIns="0" rIns="0" bIns="0" rtlCol="0" anchor="t">
+            <a:off x="7799832" y="1801368"/>
+            <a:ext cx="3145536" cy="758952"/>
+          </a:xfrm>
+          <a:prstGeom prst="rect">
+            <a:avLst/>
+          </a:prstGeom>
+          <a:noFill/>
+          <a:ln/>
+        </p:spPr>
+        <p:txBody>
+          <a:bodyPr wrap="square" lIns="254" tIns="254" rIns="254" bIns="254" rtlCol="0" anchor="t">
             <a:normAutofit/>
           </a:bodyPr>
           <a:lstStyle/>
@@ -4185,7 +4212,7 @@
               <a:buNone/>
             </a:pPr>
             <a:r>
-              <a:rPr lang="en-US" sz="1550" dirty="0">
+              <a:rPr lang="en-US" sz="1320" dirty="0">
                 <a:solidFill>
                   <a:srgbClr val="17364A"/>
                 </a:solidFill>
@@ -4195,7 +4222,7 @@
               </a:rPr>
               <a:t>Human oversight should match risk.</a:t>
             </a:r>
-            <a:endParaRPr lang="en-US" sz="1550" dirty="0"/>
+            <a:endParaRPr lang="en-US" sz="1320" dirty="0"/>
           </a:p>
         </p:txBody>
       </p:sp>
@@ -4283,13 +4310,16 @@
           <a:ln/>
         </p:spPr>
         <p:txBody>
-          <a:bodyPr wrap="square" lIns="254" tIns="254" rIns="254" bIns="254" rtlCol="0" anchor="t">
+          <a:bodyPr wrap="square" lIns="508" tIns="508" rIns="508" bIns="508" rtlCol="0" anchor="t">
             <a:normAutofit/>
           </a:bodyPr>
           <a:lstStyle/>
           <a:p>
-            <a:r>
-              <a:rPr lang="en-US" sz="1380" dirty="0">
+            <a:pPr indent="0" marL="0">
+              <a:buNone/>
+            </a:pPr>
+            <a:r>
+              <a:rPr lang="en-US" sz="1220" dirty="0">
                 <a:solidFill>
                   <a:srgbClr val="17364A"/>
                 </a:solidFill>
@@ -4297,13 +4327,16 @@
                 <a:ea typeface="Aptos" pitchFamily="34" charset="-122"/>
                 <a:cs typeface="Aptos" pitchFamily="34" charset="-120"/>
               </a:rPr>
-              <a:t>Human-in-the-loop approval is appropriate for actions that affect records, services,.</a:t>
-            </a:r>
-            <a:endParaRPr lang="en-US" sz="1380" dirty="0"/>
-          </a:p>
-          <a:p>
-            <a:r>
-              <a:rPr lang="en-US" sz="1380" dirty="0">
+              <a:t>Human-in-the-loop approval is appropriate for actions that affect.</a:t>
+            </a:r>
+            <a:endParaRPr lang="en-US" sz="1220" dirty="0"/>
+          </a:p>
+          <a:p>
+            <a:pPr indent="0" marL="0">
+              <a:buNone/>
+            </a:pPr>
+            <a:r>
+              <a:rPr lang="en-US" sz="1220" dirty="0">
                 <a:solidFill>
                   <a:srgbClr val="17364A"/>
                 </a:solidFill>
@@ -4311,13 +4344,16 @@
                 <a:ea typeface="Aptos" pitchFamily="34" charset="-122"/>
                 <a:cs typeface="Aptos" pitchFamily="34" charset="-120"/>
               </a:rPr>
-              <a:t>Human-on-the-loop monitoring may be appropriate for lower-risk background tasks if users.</a:t>
-            </a:r>
-            <a:endParaRPr lang="en-US" sz="1380" dirty="0"/>
-          </a:p>
-          <a:p>
-            <a:r>
-              <a:rPr lang="en-US" sz="1380" dirty="0">
+              <a:t>Human-on-the-loop monitoring may be appropriate for lower-risk.</a:t>
+            </a:r>
+            <a:endParaRPr lang="en-US" sz="1220" dirty="0"/>
+          </a:p>
+          <a:p>
+            <a:pPr indent="0" marL="0">
+              <a:buNone/>
+            </a:pPr>
+            <a:r>
+              <a:rPr lang="en-US" sz="1220" dirty="0">
                 <a:solidFill>
                   <a:srgbClr val="17364A"/>
                 </a:solidFill>
@@ -4325,9 +4361,9 @@
                 <a:ea typeface="Aptos" pitchFamily="34" charset="-122"/>
                 <a:cs typeface="Aptos" pitchFamily="34" charset="-120"/>
               </a:rPr>
-              <a:t>Fully automated action should be limited to low-risk, well-tested, reversible tasks.</a:t>
-            </a:r>
-            <a:endParaRPr lang="en-US" sz="1380" dirty="0"/>
+              <a:t>Fully automated action should be limited to low-risk, well-tested,.</a:t>
+            </a:r>
+            <a:endParaRPr lang="en-US" sz="1220" dirty="0"/>
           </a:p>
         </p:txBody>
       </p:sp>
@@ -4405,17 +4441,17 @@
         </p:nvSpPr>
         <p:spPr>
           <a:xfrm>
-            <a:off x="7799832" y="5001768"/>
-            <a:ext cx="3145536" cy="502920"/>
-          </a:xfrm>
-          <a:prstGeom prst="rect">
-            <a:avLst/>
-          </a:prstGeom>
-          <a:noFill/>
-          <a:ln/>
-        </p:spPr>
-        <p:txBody>
-          <a:bodyPr wrap="square" lIns="0" tIns="0" rIns="0" bIns="0" rtlCol="0" anchor="t">
+            <a:off x="7799832" y="4974336"/>
+            <a:ext cx="3145536" cy="576072"/>
+          </a:xfrm>
+          <a:prstGeom prst="rect">
+            <a:avLst/>
+          </a:prstGeom>
+          <a:noFill/>
+          <a:ln/>
+        </p:spPr>
+        <p:txBody>
+          <a:bodyPr wrap="square" lIns="254" tIns="254" rIns="254" bIns="254" rtlCol="0" anchor="t">
             <a:normAutofit/>
           </a:bodyPr>
           <a:lstStyle/>
@@ -4424,7 +4460,7 @@
               <a:buNone/>
             </a:pPr>
             <a:r>
-              <a:rPr lang="en-US" sz="1550" dirty="0">
+              <a:rPr lang="en-US" sz="1320" dirty="0">
                 <a:solidFill>
                   <a:srgbClr val="17364A"/>
                 </a:solidFill>
@@ -4432,9 +4468,9 @@
                 <a:ea typeface="Aptos" pitchFamily="34" charset="-122"/>
                 <a:cs typeface="Aptos" pitchFamily="34" charset="-120"/>
               </a:rPr>
-              <a:t>Use the concept to clarify workflow changes, dependencies, staffing, procurement requirements, training needs, and implementation checkpoints.</a:t>
-            </a:r>
-            <a:endParaRPr lang="en-US" sz="1550" dirty="0"/>
+              <a:t>Use the concept to clarify workflow changes, dependencies, staffing, procurement requirements, training needs, and.</a:t>
+            </a:r>
+            <a:endParaRPr lang="en-US" sz="1320" dirty="0"/>
           </a:p>
         </p:txBody>
       </p:sp>
@@ -4735,49 +4771,58 @@
           <a:ln/>
         </p:spPr>
         <p:txBody>
-          <a:bodyPr wrap="square" lIns="635" tIns="635" rIns="635" bIns="635" rtlCol="0" anchor="t">
+          <a:bodyPr wrap="square" lIns="1016" tIns="1016" rIns="1016" bIns="1016" rtlCol="0" anchor="t">
             <a:normAutofit/>
           </a:bodyPr>
           <a:lstStyle/>
           <a:p>
+            <a:pPr indent="0" marL="0">
+              <a:buNone/>
+            </a:pPr>
             <a:r>
               <a:rPr lang="en-US" sz="2100" dirty="0">
                 <a:solidFill>
-                  <a:srgbClr val="17364A"/>
-                </a:solidFill>
-                <a:latin typeface="Aptos" pitchFamily="34" charset="0"/>
-                <a:ea typeface="Aptos" pitchFamily="34" charset="-122"/>
-                <a:cs typeface="Aptos" pitchFamily="34" charset="-120"/>
-              </a:rPr>
-              <a:t>Excessive agency.</a:t>
+                  <a:srgbClr val="003A63"/>
+                </a:solidFill>
+                <a:latin typeface="Aptos" pitchFamily="34" charset="0"/>
+                <a:ea typeface="Aptos" pitchFamily="34" charset="-122"/>
+                <a:cs typeface="Aptos" pitchFamily="34" charset="-120"/>
+              </a:rPr>
+              <a:t>• Excessive agency.</a:t>
             </a:r>
             <a:endParaRPr lang="en-US" sz="2100" dirty="0"/>
           </a:p>
           <a:p>
+            <a:pPr indent="0" marL="0">
+              <a:buNone/>
+            </a:pPr>
             <a:r>
               <a:rPr lang="en-US" sz="2100" dirty="0">
                 <a:solidFill>
-                  <a:srgbClr val="17364A"/>
-                </a:solidFill>
-                <a:latin typeface="Aptos" pitchFamily="34" charset="0"/>
-                <a:ea typeface="Aptos" pitchFamily="34" charset="-122"/>
-                <a:cs typeface="Aptos" pitchFamily="34" charset="-120"/>
-              </a:rPr>
-              <a:t>An agent may take actions beyond intended scope.</a:t>
+                  <a:srgbClr val="003A63"/>
+                </a:solidFill>
+                <a:latin typeface="Aptos" pitchFamily="34" charset="0"/>
+                <a:ea typeface="Aptos" pitchFamily="34" charset="-122"/>
+                <a:cs typeface="Aptos" pitchFamily="34" charset="-120"/>
+              </a:rPr>
+              <a:t>• An agent may take actions beyond intended scope.</a:t>
             </a:r>
             <a:endParaRPr lang="en-US" sz="2100" dirty="0"/>
           </a:p>
           <a:p>
+            <a:pPr indent="0" marL="0">
+              <a:buNone/>
+            </a:pPr>
             <a:r>
               <a:rPr lang="en-US" sz="2100" dirty="0">
                 <a:solidFill>
-                  <a:srgbClr val="17364A"/>
-                </a:solidFill>
-                <a:latin typeface="Aptos" pitchFamily="34" charset="0"/>
-                <a:ea typeface="Aptos" pitchFamily="34" charset="-122"/>
-                <a:cs typeface="Aptos" pitchFamily="34" charset="-120"/>
-              </a:rPr>
-              <a:t>Guardrails include narrow goals, allowed-action lists, prohibited actions, and approval gates.</a:t>
+                  <a:srgbClr val="003A63"/>
+                </a:solidFill>
+                <a:latin typeface="Aptos" pitchFamily="34" charset="0"/>
+                <a:ea typeface="Aptos" pitchFamily="34" charset="-122"/>
+                <a:cs typeface="Aptos" pitchFamily="34" charset="-120"/>
+              </a:rPr>
+              <a:t>• Guardrails include narrow goals, allowed-action lists, prohibited actions, and approval gates.</a:t>
             </a:r>
             <a:endParaRPr lang="en-US" sz="2100" dirty="0"/>
           </a:p>
@@ -4857,17 +4902,17 @@
         </p:nvSpPr>
         <p:spPr>
           <a:xfrm>
-            <a:off x="7799832" y="1828800"/>
-            <a:ext cx="3145536" cy="685800"/>
-          </a:xfrm>
-          <a:prstGeom prst="rect">
-            <a:avLst/>
-          </a:prstGeom>
-          <a:noFill/>
-          <a:ln/>
-        </p:spPr>
-        <p:txBody>
-          <a:bodyPr wrap="square" lIns="0" tIns="0" rIns="0" bIns="0" rtlCol="0" anchor="t">
+            <a:off x="7799832" y="1801368"/>
+            <a:ext cx="3145536" cy="758952"/>
+          </a:xfrm>
+          <a:prstGeom prst="rect">
+            <a:avLst/>
+          </a:prstGeom>
+          <a:noFill/>
+          <a:ln/>
+        </p:spPr>
+        <p:txBody>
+          <a:bodyPr wrap="square" lIns="254" tIns="254" rIns="254" bIns="254" rtlCol="0" anchor="t">
             <a:normAutofit/>
           </a:bodyPr>
           <a:lstStyle/>
@@ -4876,7 +4921,7 @@
               <a:buNone/>
             </a:pPr>
             <a:r>
-              <a:rPr lang="en-US" sz="1550" dirty="0">
+              <a:rPr lang="en-US" sz="1320" dirty="0">
                 <a:solidFill>
                   <a:srgbClr val="17364A"/>
                 </a:solidFill>
@@ -4886,7 +4931,7 @@
               </a:rPr>
               <a:t>Excessive agency.</a:t>
             </a:r>
-            <a:endParaRPr lang="en-US" sz="1550" dirty="0"/>
+            <a:endParaRPr lang="en-US" sz="1320" dirty="0"/>
           </a:p>
         </p:txBody>
       </p:sp>
@@ -4974,13 +5019,16 @@
           <a:ln/>
         </p:spPr>
         <p:txBody>
-          <a:bodyPr wrap="square" lIns="254" tIns="254" rIns="254" bIns="254" rtlCol="0" anchor="t">
+          <a:bodyPr wrap="square" lIns="508" tIns="508" rIns="508" bIns="508" rtlCol="0" anchor="t">
             <a:normAutofit/>
           </a:bodyPr>
           <a:lstStyle/>
           <a:p>
-            <a:r>
-              <a:rPr lang="en-US" sz="1380" dirty="0">
+            <a:pPr indent="0" marL="0">
+              <a:buNone/>
+            </a:pPr>
+            <a:r>
+              <a:rPr lang="en-US" sz="1220" dirty="0">
                 <a:solidFill>
                   <a:srgbClr val="17364A"/>
                 </a:solidFill>
@@ -4990,11 +5038,14 @@
               </a:rPr>
               <a:t>Unauthorized system access.</a:t>
             </a:r>
-            <a:endParaRPr lang="en-US" sz="1380" dirty="0"/>
-          </a:p>
-          <a:p>
-            <a:r>
-              <a:rPr lang="en-US" sz="1380" dirty="0">
+            <a:endParaRPr lang="en-US" sz="1220" dirty="0"/>
+          </a:p>
+          <a:p>
+            <a:pPr indent="0" marL="0">
+              <a:buNone/>
+            </a:pPr>
+            <a:r>
+              <a:rPr lang="en-US" sz="1220" dirty="0">
                 <a:solidFill>
                   <a:srgbClr val="17364A"/>
                 </a:solidFill>
@@ -5004,11 +5055,14 @@
               </a:rPr>
               <a:t>Tool access may expose sensitive data or functions.</a:t>
             </a:r>
-            <a:endParaRPr lang="en-US" sz="1380" dirty="0"/>
-          </a:p>
-          <a:p>
-            <a:r>
-              <a:rPr lang="en-US" sz="1380" dirty="0">
+            <a:endParaRPr lang="en-US" sz="1220" dirty="0"/>
+          </a:p>
+          <a:p>
+            <a:pPr indent="0" marL="0">
+              <a:buNone/>
+            </a:pPr>
+            <a:r>
+              <a:rPr lang="en-US" sz="1220" dirty="0">
                 <a:solidFill>
                   <a:srgbClr val="17364A"/>
                 </a:solidFill>
@@ -5016,9 +5070,9 @@
                 <a:ea typeface="Aptos" pitchFamily="34" charset="-122"/>
                 <a:cs typeface="Aptos" pitchFamily="34" charset="-120"/>
               </a:rPr>
-              <a:t>Guardrails include least privilege, scoped credentials, role-based access, and audit logs.</a:t>
-            </a:r>
-            <a:endParaRPr lang="en-US" sz="1380" dirty="0"/>
+              <a:t>Guardrails include least privilege, scoped credentials, role-based.</a:t>
+            </a:r>
+            <a:endParaRPr lang="en-US" sz="1220" dirty="0"/>
           </a:p>
         </p:txBody>
       </p:sp>
@@ -5096,17 +5150,17 @@
         </p:nvSpPr>
         <p:spPr>
           <a:xfrm>
-            <a:off x="7799832" y="5001768"/>
-            <a:ext cx="3145536" cy="502920"/>
-          </a:xfrm>
-          <a:prstGeom prst="rect">
-            <a:avLst/>
-          </a:prstGeom>
-          <a:noFill/>
-          <a:ln/>
-        </p:spPr>
-        <p:txBody>
-          <a:bodyPr wrap="square" lIns="0" tIns="0" rIns="0" bIns="0" rtlCol="0" anchor="t">
+            <a:off x="7799832" y="4974336"/>
+            <a:ext cx="3145536" cy="576072"/>
+          </a:xfrm>
+          <a:prstGeom prst="rect">
+            <a:avLst/>
+          </a:prstGeom>
+          <a:noFill/>
+          <a:ln/>
+        </p:spPr>
+        <p:txBody>
+          <a:bodyPr wrap="square" lIns="254" tIns="254" rIns="254" bIns="254" rtlCol="0" anchor="t">
             <a:normAutofit/>
           </a:bodyPr>
           <a:lstStyle/>
@@ -5115,7 +5169,7 @@
               <a:buNone/>
             </a:pPr>
             <a:r>
-              <a:rPr lang="en-US" sz="1550" dirty="0">
+              <a:rPr lang="en-US" sz="1320" dirty="0">
                 <a:solidFill>
                   <a:srgbClr val="17364A"/>
                 </a:solidFill>
@@ -5123,9 +5177,9 @@
                 <a:ea typeface="Aptos" pitchFamily="34" charset="-122"/>
                 <a:cs typeface="Aptos" pitchFamily="34" charset="-120"/>
               </a:rPr>
-              <a:t>Identify what could go wrong, who could be affected, what safeguards are needed, and what evidence should be reviewed before use expands.</a:t>
-            </a:r>
-            <a:endParaRPr lang="en-US" sz="1550" dirty="0"/>
+              <a:t>Identify what could go wrong, who could be affected, what safeguards are needed, and what evidence should be reviewed.</a:t>
+            </a:r>
+            <a:endParaRPr lang="en-US" sz="1320" dirty="0"/>
           </a:p>
         </p:txBody>
       </p:sp>
@@ -5426,49 +5480,58 @@
           <a:ln/>
         </p:spPr>
         <p:txBody>
-          <a:bodyPr wrap="square" lIns="635" tIns="635" rIns="635" bIns="635" rtlCol="0" anchor="t">
+          <a:bodyPr wrap="square" lIns="1016" tIns="1016" rIns="1016" bIns="1016" rtlCol="0" anchor="t">
             <a:normAutofit/>
           </a:bodyPr>
           <a:lstStyle/>
           <a:p>
+            <a:pPr indent="0" marL="0">
+              <a:buNone/>
+            </a:pPr>
             <a:r>
               <a:rPr lang="en-US" sz="2100" dirty="0">
                 <a:solidFill>
-                  <a:srgbClr val="17364A"/>
-                </a:solidFill>
-                <a:latin typeface="Aptos" pitchFamily="34" charset="0"/>
-                <a:ea typeface="Aptos" pitchFamily="34" charset="-122"/>
-                <a:cs typeface="Aptos" pitchFamily="34" charset="-120"/>
-              </a:rPr>
-              <a:t>Unclear accountability.</a:t>
+                  <a:srgbClr val="003A63"/>
+                </a:solidFill>
+                <a:latin typeface="Aptos" pitchFamily="34" charset="0"/>
+                <a:ea typeface="Aptos" pitchFamily="34" charset="-122"/>
+                <a:cs typeface="Aptos" pitchFamily="34" charset="-120"/>
+              </a:rPr>
+              <a:t>• Unclear accountability.</a:t>
             </a:r>
             <a:endParaRPr lang="en-US" sz="2100" dirty="0"/>
           </a:p>
           <a:p>
+            <a:pPr indent="0" marL="0">
+              <a:buNone/>
+            </a:pPr>
             <a:r>
               <a:rPr lang="en-US" sz="2100" dirty="0">
                 <a:solidFill>
-                  <a:srgbClr val="17364A"/>
-                </a:solidFill>
-                <a:latin typeface="Aptos" pitchFamily="34" charset="0"/>
-                <a:ea typeface="Aptos" pitchFamily="34" charset="-122"/>
-                <a:cs typeface="Aptos" pitchFamily="34" charset="-120"/>
-              </a:rPr>
-              <a:t>Staff may not know who is responsible for agent actions.</a:t>
+                  <a:srgbClr val="003A63"/>
+                </a:solidFill>
+                <a:latin typeface="Aptos" pitchFamily="34" charset="0"/>
+                <a:ea typeface="Aptos" pitchFamily="34" charset="-122"/>
+                <a:cs typeface="Aptos" pitchFamily="34" charset="-120"/>
+              </a:rPr>
+              <a:t>• Staff may not know who is responsible for agent actions.</a:t>
             </a:r>
             <a:endParaRPr lang="en-US" sz="2100" dirty="0"/>
           </a:p>
           <a:p>
+            <a:pPr indent="0" marL="0">
+              <a:buNone/>
+            </a:pPr>
             <a:r>
               <a:rPr lang="en-US" sz="2100" dirty="0">
                 <a:solidFill>
-                  <a:srgbClr val="17364A"/>
-                </a:solidFill>
-                <a:latin typeface="Aptos" pitchFamily="34" charset="0"/>
-                <a:ea typeface="Aptos" pitchFamily="34" charset="-122"/>
-                <a:cs typeface="Aptos" pitchFamily="34" charset="-120"/>
-              </a:rPr>
-              <a:t>Guardrails include role definitions, review records, and governance ownership.</a:t>
+                  <a:srgbClr val="003A63"/>
+                </a:solidFill>
+                <a:latin typeface="Aptos" pitchFamily="34" charset="0"/>
+                <a:ea typeface="Aptos" pitchFamily="34" charset="-122"/>
+                <a:cs typeface="Aptos" pitchFamily="34" charset="-120"/>
+              </a:rPr>
+              <a:t>• Guardrails include role definitions, review records, and governance ownership.</a:t>
             </a:r>
             <a:endParaRPr lang="en-US" sz="2100" dirty="0"/>
           </a:p>
@@ -5548,17 +5611,17 @@
         </p:nvSpPr>
         <p:spPr>
           <a:xfrm>
-            <a:off x="7799832" y="1828800"/>
-            <a:ext cx="3145536" cy="685800"/>
-          </a:xfrm>
-          <a:prstGeom prst="rect">
-            <a:avLst/>
-          </a:prstGeom>
-          <a:noFill/>
-          <a:ln/>
-        </p:spPr>
-        <p:txBody>
-          <a:bodyPr wrap="square" lIns="0" tIns="0" rIns="0" bIns="0" rtlCol="0" anchor="t">
+            <a:off x="7799832" y="1801368"/>
+            <a:ext cx="3145536" cy="758952"/>
+          </a:xfrm>
+          <a:prstGeom prst="rect">
+            <a:avLst/>
+          </a:prstGeom>
+          <a:noFill/>
+          <a:ln/>
+        </p:spPr>
+        <p:txBody>
+          <a:bodyPr wrap="square" lIns="254" tIns="254" rIns="254" bIns="254" rtlCol="0" anchor="t">
             <a:normAutofit/>
           </a:bodyPr>
           <a:lstStyle/>
@@ -5567,7 +5630,7 @@
               <a:buNone/>
             </a:pPr>
             <a:r>
-              <a:rPr lang="en-US" sz="1550" dirty="0">
+              <a:rPr lang="en-US" sz="1320" dirty="0">
                 <a:solidFill>
                   <a:srgbClr val="17364A"/>
                 </a:solidFill>
@@ -5577,7 +5640,7 @@
               </a:rPr>
               <a:t>Unclear accountability.</a:t>
             </a:r>
-            <a:endParaRPr lang="en-US" sz="1550" dirty="0"/>
+            <a:endParaRPr lang="en-US" sz="1320" dirty="0"/>
           </a:p>
         </p:txBody>
       </p:sp>
@@ -5665,13 +5728,16 @@
           <a:ln/>
         </p:spPr>
         <p:txBody>
-          <a:bodyPr wrap="square" lIns="254" tIns="254" rIns="254" bIns="254" rtlCol="0" anchor="t">
+          <a:bodyPr wrap="square" lIns="508" tIns="508" rIns="508" bIns="508" rtlCol="0" anchor="t">
             <a:normAutofit/>
           </a:bodyPr>
           <a:lstStyle/>
           <a:p>
-            <a:r>
-              <a:rPr lang="en-US" sz="1380" dirty="0">
+            <a:pPr indent="0" marL="0">
+              <a:buNone/>
+            </a:pPr>
+            <a:r>
+              <a:rPr lang="en-US" sz="1220" dirty="0">
                 <a:solidFill>
                   <a:srgbClr val="17364A"/>
                 </a:solidFill>
@@ -5681,11 +5747,14 @@
               </a:rPr>
               <a:t>Unclear accountability.</a:t>
             </a:r>
-            <a:endParaRPr lang="en-US" sz="1380" dirty="0"/>
-          </a:p>
-          <a:p>
-            <a:r>
-              <a:rPr lang="en-US" sz="1380" dirty="0">
+            <a:endParaRPr lang="en-US" sz="1220" dirty="0"/>
+          </a:p>
+          <a:p>
+            <a:pPr indent="0" marL="0">
+              <a:buNone/>
+            </a:pPr>
+            <a:r>
+              <a:rPr lang="en-US" sz="1220" dirty="0">
                 <a:solidFill>
                   <a:srgbClr val="17364A"/>
                 </a:solidFill>
@@ -5695,11 +5764,14 @@
               </a:rPr>
               <a:t>Staff may not know who is responsible for agent actions.</a:t>
             </a:r>
-            <a:endParaRPr lang="en-US" sz="1380" dirty="0"/>
-          </a:p>
-          <a:p>
-            <a:r>
-              <a:rPr lang="en-US" sz="1380" dirty="0">
+            <a:endParaRPr lang="en-US" sz="1220" dirty="0"/>
+          </a:p>
+          <a:p>
+            <a:pPr indent="0" marL="0">
+              <a:buNone/>
+            </a:pPr>
+            <a:r>
+              <a:rPr lang="en-US" sz="1220" dirty="0">
                 <a:solidFill>
                   <a:srgbClr val="17364A"/>
                 </a:solidFill>
@@ -5707,9 +5779,9 @@
                 <a:ea typeface="Aptos" pitchFamily="34" charset="-122"/>
                 <a:cs typeface="Aptos" pitchFamily="34" charset="-120"/>
               </a:rPr>
-              <a:t>Guardrails include role definitions, review records, and governance ownership.</a:t>
-            </a:r>
-            <a:endParaRPr lang="en-US" sz="1380" dirty="0"/>
+              <a:t>Guardrails include role definitions, review records, and.</a:t>
+            </a:r>
+            <a:endParaRPr lang="en-US" sz="1220" dirty="0"/>
           </a:p>
         </p:txBody>
       </p:sp>
@@ -5787,17 +5859,17 @@
         </p:nvSpPr>
         <p:spPr>
           <a:xfrm>
-            <a:off x="7799832" y="5001768"/>
-            <a:ext cx="3145536" cy="502920"/>
-          </a:xfrm>
-          <a:prstGeom prst="rect">
-            <a:avLst/>
-          </a:prstGeom>
-          <a:noFill/>
-          <a:ln/>
-        </p:spPr>
-        <p:txBody>
-          <a:bodyPr wrap="square" lIns="0" tIns="0" rIns="0" bIns="0" rtlCol="0" anchor="t">
+            <a:off x="7799832" y="4974336"/>
+            <a:ext cx="3145536" cy="576072"/>
+          </a:xfrm>
+          <a:prstGeom prst="rect">
+            <a:avLst/>
+          </a:prstGeom>
+          <a:noFill/>
+          <a:ln/>
+        </p:spPr>
+        <p:txBody>
+          <a:bodyPr wrap="square" lIns="254" tIns="254" rIns="254" bIns="254" rtlCol="0" anchor="t">
             <a:normAutofit/>
           </a:bodyPr>
           <a:lstStyle/>
@@ -5806,7 +5878,7 @@
               <a:buNone/>
             </a:pPr>
             <a:r>
-              <a:rPr lang="en-US" sz="1550" dirty="0">
+              <a:rPr lang="en-US" sz="1320" dirty="0">
                 <a:solidFill>
                   <a:srgbClr val="17364A"/>
                 </a:solidFill>
@@ -5814,9 +5886,9 @@
                 <a:ea typeface="Aptos" pitchFamily="34" charset="-122"/>
                 <a:cs typeface="Aptos" pitchFamily="34" charset="-120"/>
               </a:rPr>
-              <a:t>Identify what could go wrong, who could be affected, what safeguards are needed, and what evidence should be reviewed before use expands.</a:t>
-            </a:r>
-            <a:endParaRPr lang="en-US" sz="1550" dirty="0"/>
+              <a:t>Identify what could go wrong, who could be affected, what safeguards are needed, and what evidence should be reviewed.</a:t>
+            </a:r>
+            <a:endParaRPr lang="en-US" sz="1320" dirty="0"/>
           </a:p>
         </p:txBody>
       </p:sp>
@@ -6117,49 +6189,58 @@
           <a:ln/>
         </p:spPr>
         <p:txBody>
-          <a:bodyPr wrap="square" lIns="635" tIns="635" rIns="635" bIns="635" rtlCol="0" anchor="t">
+          <a:bodyPr wrap="square" lIns="1016" tIns="1016" rIns="1016" bIns="1016" rtlCol="0" anchor="t">
             <a:normAutofit/>
           </a:bodyPr>
           <a:lstStyle/>
           <a:p>
+            <a:pPr indent="0" marL="0">
+              <a:buNone/>
+            </a:pPr>
             <a:r>
               <a:rPr lang="en-US" sz="2100" dirty="0">
                 <a:solidFill>
-                  <a:srgbClr val="17364A"/>
-                </a:solidFill>
-                <a:latin typeface="Aptos" pitchFamily="34" charset="0"/>
-                <a:ea typeface="Aptos" pitchFamily="34" charset="-122"/>
-                <a:cs typeface="Aptos" pitchFamily="34" charset="-120"/>
-              </a:rPr>
-              <a:t>Agentic workflows may combine RAG, APIs, prompts, classification models, workflow rules, and messaging.</a:t>
+                  <a:srgbClr val="003A63"/>
+                </a:solidFill>
+                <a:latin typeface="Aptos" pitchFamily="34" charset="0"/>
+                <a:ea typeface="Aptos" pitchFamily="34" charset="-122"/>
+                <a:cs typeface="Aptos" pitchFamily="34" charset="-120"/>
+              </a:rPr>
+              <a:t>• Agentic workflows may combine RAG, APIs, prompts, classification models, workflow rules, and.</a:t>
             </a:r>
             <a:endParaRPr lang="en-US" sz="2100" dirty="0"/>
           </a:p>
           <a:p>
+            <a:pPr indent="0" marL="0">
+              <a:buNone/>
+            </a:pPr>
             <a:r>
               <a:rPr lang="en-US" sz="2100" dirty="0">
                 <a:solidFill>
-                  <a:srgbClr val="17364A"/>
-                </a:solidFill>
-                <a:latin typeface="Aptos" pitchFamily="34" charset="0"/>
-                <a:ea typeface="Aptos" pitchFamily="34" charset="-122"/>
-                <a:cs typeface="Aptos" pitchFamily="34" charset="-120"/>
-              </a:rPr>
-              <a:t>They are most appropriate when tasks are repetitive, bounded, reviewable, and supported by reliable data.</a:t>
+                  <a:srgbClr val="003A63"/>
+                </a:solidFill>
+                <a:latin typeface="Aptos" pitchFamily="34" charset="0"/>
+                <a:ea typeface="Aptos" pitchFamily="34" charset="-122"/>
+                <a:cs typeface="Aptos" pitchFamily="34" charset="-120"/>
+              </a:rPr>
+              <a:t>• They are most appropriate when tasks are repetitive, bounded, reviewable, and supported by.</a:t>
             </a:r>
             <a:endParaRPr lang="en-US" sz="2100" dirty="0"/>
           </a:p>
           <a:p>
+            <a:pPr indent="0" marL="0">
+              <a:buNone/>
+            </a:pPr>
             <a:r>
               <a:rPr lang="en-US" sz="2100" dirty="0">
                 <a:solidFill>
-                  <a:srgbClr val="17364A"/>
-                </a:solidFill>
-                <a:latin typeface="Aptos" pitchFamily="34" charset="0"/>
-                <a:ea typeface="Aptos" pitchFamily="34" charset="-122"/>
-                <a:cs typeface="Aptos" pitchFamily="34" charset="-120"/>
-              </a:rPr>
-              <a:t>They are least appropriate when the task requires complex judgment, legal interpretation, community.</a:t>
+                  <a:srgbClr val="003A63"/>
+                </a:solidFill>
+                <a:latin typeface="Aptos" pitchFamily="34" charset="0"/>
+                <a:ea typeface="Aptos" pitchFamily="34" charset="-122"/>
+                <a:cs typeface="Aptos" pitchFamily="34" charset="-120"/>
+              </a:rPr>
+              <a:t>• They are least appropriate when the task requires complex judgment, legal interpretation,.</a:t>
             </a:r>
             <a:endParaRPr lang="en-US" sz="2100" dirty="0"/>
           </a:p>
@@ -6239,17 +6320,17 @@
         </p:nvSpPr>
         <p:spPr>
           <a:xfrm>
-            <a:off x="7799832" y="1828800"/>
-            <a:ext cx="3145536" cy="685800"/>
-          </a:xfrm>
-          <a:prstGeom prst="rect">
-            <a:avLst/>
-          </a:prstGeom>
-          <a:noFill/>
-          <a:ln/>
-        </p:spPr>
-        <p:txBody>
-          <a:bodyPr wrap="square" lIns="0" tIns="0" rIns="0" bIns="0" rtlCol="0" anchor="t">
+            <a:off x="7799832" y="1801368"/>
+            <a:ext cx="3145536" cy="758952"/>
+          </a:xfrm>
+          <a:prstGeom prst="rect">
+            <a:avLst/>
+          </a:prstGeom>
+          <a:noFill/>
+          <a:ln/>
+        </p:spPr>
+        <p:txBody>
+          <a:bodyPr wrap="square" lIns="254" tIns="254" rIns="254" bIns="254" rtlCol="0" anchor="t">
             <a:normAutofit/>
           </a:bodyPr>
           <a:lstStyle/>
@@ -6258,7 +6339,7 @@
               <a:buNone/>
             </a:pPr>
             <a:r>
-              <a:rPr lang="en-US" sz="1550" dirty="0">
+              <a:rPr lang="en-US" sz="1320" dirty="0">
                 <a:solidFill>
                   <a:srgbClr val="17364A"/>
                 </a:solidFill>
@@ -6268,7 +6349,7 @@
               </a:rPr>
               <a:t>Agentic workflows may combine RAG, APIs, prompts, classification models, workflow rules, and messaging.</a:t>
             </a:r>
-            <a:endParaRPr lang="en-US" sz="1550" dirty="0"/>
+            <a:endParaRPr lang="en-US" sz="1320" dirty="0"/>
           </a:p>
         </p:txBody>
       </p:sp>
@@ -6356,13 +6437,16 @@
           <a:ln/>
         </p:spPr>
         <p:txBody>
-          <a:bodyPr wrap="square" lIns="254" tIns="254" rIns="254" bIns="254" rtlCol="0" anchor="t">
+          <a:bodyPr wrap="square" lIns="508" tIns="508" rIns="508" bIns="508" rtlCol="0" anchor="t">
             <a:normAutofit/>
           </a:bodyPr>
           <a:lstStyle/>
           <a:p>
-            <a:r>
-              <a:rPr lang="en-US" sz="1380" dirty="0">
+            <a:pPr indent="0" marL="0">
+              <a:buNone/>
+            </a:pPr>
+            <a:r>
+              <a:rPr lang="en-US" sz="1220" dirty="0">
                 <a:solidFill>
                   <a:srgbClr val="17364A"/>
                 </a:solidFill>
@@ -6370,13 +6454,16 @@
                 <a:ea typeface="Aptos" pitchFamily="34" charset="-122"/>
                 <a:cs typeface="Aptos" pitchFamily="34" charset="-120"/>
               </a:rPr>
-              <a:t>Agentic workflows may combine RAG, APIs, prompts, classification models, workflow rules,.</a:t>
-            </a:r>
-            <a:endParaRPr lang="en-US" sz="1380" dirty="0"/>
-          </a:p>
-          <a:p>
-            <a:r>
-              <a:rPr lang="en-US" sz="1380" dirty="0">
+              <a:t>Agentic workflows may combine RAG, APIs, prompts, classification.</a:t>
+            </a:r>
+            <a:endParaRPr lang="en-US" sz="1220" dirty="0"/>
+          </a:p>
+          <a:p>
+            <a:pPr indent="0" marL="0">
+              <a:buNone/>
+            </a:pPr>
+            <a:r>
+              <a:rPr lang="en-US" sz="1220" dirty="0">
                 <a:solidFill>
                   <a:srgbClr val="17364A"/>
                 </a:solidFill>
@@ -6384,13 +6471,16 @@
                 <a:ea typeface="Aptos" pitchFamily="34" charset="-122"/>
                 <a:cs typeface="Aptos" pitchFamily="34" charset="-120"/>
               </a:rPr>
-              <a:t>They are least appropriate when the task requires complex judgment, legal interpretation,.</a:t>
-            </a:r>
-            <a:endParaRPr lang="en-US" sz="1380" dirty="0"/>
-          </a:p>
-          <a:p>
-            <a:r>
-              <a:rPr lang="en-US" sz="1380" dirty="0">
+              <a:t>They are least appropriate when the task requires complex.</a:t>
+            </a:r>
+            <a:endParaRPr lang="en-US" sz="1220" dirty="0"/>
+          </a:p>
+          <a:p>
+            <a:pPr indent="0" marL="0">
+              <a:buNone/>
+            </a:pPr>
+            <a:r>
+              <a:rPr lang="en-US" sz="1220" dirty="0">
                 <a:solidFill>
                   <a:srgbClr val="17364A"/>
                 </a:solidFill>
@@ -6398,9 +6488,9 @@
                 <a:ea typeface="Aptos" pitchFamily="34" charset="-122"/>
                 <a:cs typeface="Aptos" pitchFamily="34" charset="-120"/>
               </a:rPr>
-              <a:t>Public health agencies should pilot agentic workflows in limited, low-risk settings before.</a:t>
-            </a:r>
-            <a:endParaRPr lang="en-US" sz="1380" dirty="0"/>
+              <a:t>Public health agencies should pilot agentic workflows in limited,.</a:t>
+            </a:r>
+            <a:endParaRPr lang="en-US" sz="1220" dirty="0"/>
           </a:p>
         </p:txBody>
       </p:sp>
@@ -6478,17 +6568,17 @@
         </p:nvSpPr>
         <p:spPr>
           <a:xfrm>
-            <a:off x="7799832" y="5001768"/>
-            <a:ext cx="3145536" cy="502920"/>
-          </a:xfrm>
-          <a:prstGeom prst="rect">
-            <a:avLst/>
-          </a:prstGeom>
-          <a:noFill/>
-          <a:ln/>
-        </p:spPr>
-        <p:txBody>
-          <a:bodyPr wrap="square" lIns="0" tIns="0" rIns="0" bIns="0" rtlCol="0" anchor="t">
+            <a:off x="7799832" y="4974336"/>
+            <a:ext cx="3145536" cy="576072"/>
+          </a:xfrm>
+          <a:prstGeom prst="rect">
+            <a:avLst/>
+          </a:prstGeom>
+          <a:noFill/>
+          <a:ln/>
+        </p:spPr>
+        <p:txBody>
+          <a:bodyPr wrap="square" lIns="254" tIns="254" rIns="254" bIns="254" rtlCol="0" anchor="t">
             <a:normAutofit/>
           </a:bodyPr>
           <a:lstStyle/>
@@ -6497,7 +6587,7 @@
               <a:buNone/>
             </a:pPr>
             <a:r>
-              <a:rPr lang="en-US" sz="1550" dirty="0">
+              <a:rPr lang="en-US" sz="1320" dirty="0">
                 <a:solidFill>
                   <a:srgbClr val="17364A"/>
                 </a:solidFill>
@@ -6505,9 +6595,9 @@
                 <a:ea typeface="Aptos" pitchFamily="34" charset="-122"/>
                 <a:cs typeface="Aptos" pitchFamily="34" charset="-120"/>
               </a:rPr>
-              <a:t>Use the concept to clarify workflow changes, dependencies, staffing, procurement requirements, training needs, and implementation checkpoints.</a:t>
-            </a:r>
-            <a:endParaRPr lang="en-US" sz="1550" dirty="0"/>
+              <a:t>Use the concept to clarify workflow changes, dependencies, staffing, procurement requirements, training needs, and.</a:t>
+            </a:r>
+            <a:endParaRPr lang="en-US" sz="1320" dirty="0"/>
           </a:p>
         </p:txBody>
       </p:sp>
@@ -6808,49 +6898,58 @@
           <a:ln/>
         </p:spPr>
         <p:txBody>
-          <a:bodyPr wrap="square" lIns="635" tIns="635" rIns="635" bIns="635" rtlCol="0" anchor="t">
+          <a:bodyPr wrap="square" lIns="1016" tIns="1016" rIns="1016" bIns="1016" rtlCol="0" anchor="t">
             <a:normAutofit/>
           </a:bodyPr>
           <a:lstStyle/>
           <a:p>
+            <a:pPr indent="0" marL="0">
+              <a:buNone/>
+            </a:pPr>
             <a:r>
               <a:rPr lang="en-US" sz="2100" dirty="0">
                 <a:solidFill>
-                  <a:srgbClr val="17364A"/>
-                </a:solidFill>
-                <a:latin typeface="Aptos" pitchFamily="34" charset="0"/>
-                <a:ea typeface="Aptos" pitchFamily="34" charset="-122"/>
-                <a:cs typeface="Aptos" pitchFamily="34" charset="-120"/>
-              </a:rPr>
-              <a:t>What goal would the agent pursue, and how narrowly can it be defined?</a:t>
+                  <a:srgbClr val="003A63"/>
+                </a:solidFill>
+                <a:latin typeface="Aptos" pitchFamily="34" charset="0"/>
+                <a:ea typeface="Aptos" pitchFamily="34" charset="-122"/>
+                <a:cs typeface="Aptos" pitchFamily="34" charset="-120"/>
+              </a:rPr>
+              <a:t>• What goal would the agent pursue, and how narrowly can it be defined?</a:t>
             </a:r>
             <a:endParaRPr lang="en-US" sz="2100" dirty="0"/>
           </a:p>
           <a:p>
+            <a:pPr indent="0" marL="0">
+              <a:buNone/>
+            </a:pPr>
             <a:r>
               <a:rPr lang="en-US" sz="2100" dirty="0">
                 <a:solidFill>
-                  <a:srgbClr val="17364A"/>
-                </a:solidFill>
-                <a:latin typeface="Aptos" pitchFamily="34" charset="0"/>
-                <a:ea typeface="Aptos" pitchFamily="34" charset="-122"/>
-                <a:cs typeface="Aptos" pitchFamily="34" charset="-120"/>
-              </a:rPr>
-              <a:t>Which tools or systems would the agent access?</a:t>
+                  <a:srgbClr val="003A63"/>
+                </a:solidFill>
+                <a:latin typeface="Aptos" pitchFamily="34" charset="0"/>
+                <a:ea typeface="Aptos" pitchFamily="34" charset="-122"/>
+                <a:cs typeface="Aptos" pitchFamily="34" charset="-120"/>
+              </a:rPr>
+              <a:t>• Which tools or systems would the agent access?</a:t>
             </a:r>
             <a:endParaRPr lang="en-US" sz="2100" dirty="0"/>
           </a:p>
           <a:p>
+            <a:pPr indent="0" marL="0">
+              <a:buNone/>
+            </a:pPr>
             <a:r>
               <a:rPr lang="en-US" sz="2100" dirty="0">
                 <a:solidFill>
-                  <a:srgbClr val="17364A"/>
-                </a:solidFill>
-                <a:latin typeface="Aptos" pitchFamily="34" charset="0"/>
-                <a:ea typeface="Aptos" pitchFamily="34" charset="-122"/>
-                <a:cs typeface="Aptos" pitchFamily="34" charset="-120"/>
-              </a:rPr>
-              <a:t>Which actions are allowed, prohibited, or require human approval?</a:t>
+                  <a:srgbClr val="003A63"/>
+                </a:solidFill>
+                <a:latin typeface="Aptos" pitchFamily="34" charset="0"/>
+                <a:ea typeface="Aptos" pitchFamily="34" charset="-122"/>
+                <a:cs typeface="Aptos" pitchFamily="34" charset="-120"/>
+              </a:rPr>
+              <a:t>• Which actions are allowed, prohibited, or require human approval?</a:t>
             </a:r>
             <a:endParaRPr lang="en-US" sz="2100" dirty="0"/>
           </a:p>
@@ -6930,17 +7029,17 @@
         </p:nvSpPr>
         <p:spPr>
           <a:xfrm>
-            <a:off x="7799832" y="1828800"/>
-            <a:ext cx="3145536" cy="685800"/>
-          </a:xfrm>
-          <a:prstGeom prst="rect">
-            <a:avLst/>
-          </a:prstGeom>
-          <a:noFill/>
-          <a:ln/>
-        </p:spPr>
-        <p:txBody>
-          <a:bodyPr wrap="square" lIns="0" tIns="0" rIns="0" bIns="0" rtlCol="0" anchor="t">
+            <a:off x="7799832" y="1801368"/>
+            <a:ext cx="3145536" cy="758952"/>
+          </a:xfrm>
+          <a:prstGeom prst="rect">
+            <a:avLst/>
+          </a:prstGeom>
+          <a:noFill/>
+          <a:ln/>
+        </p:spPr>
+        <p:txBody>
+          <a:bodyPr wrap="square" lIns="254" tIns="254" rIns="254" bIns="254" rtlCol="0" anchor="t">
             <a:normAutofit/>
           </a:bodyPr>
           <a:lstStyle/>
@@ -6949,7 +7048,7 @@
               <a:buNone/>
             </a:pPr>
             <a:r>
-              <a:rPr lang="en-US" sz="1550" dirty="0">
+              <a:rPr lang="en-US" sz="1320" dirty="0">
                 <a:solidFill>
                   <a:srgbClr val="17364A"/>
                 </a:solidFill>
@@ -6959,7 +7058,7 @@
               </a:rPr>
               <a:t>What goal would the agent pursue, and how narrowly can it be defined?</a:t>
             </a:r>
-            <a:endParaRPr lang="en-US" sz="1550" dirty="0"/>
+            <a:endParaRPr lang="en-US" sz="1320" dirty="0"/>
           </a:p>
         </p:txBody>
       </p:sp>
@@ -7047,13 +7146,16 @@
           <a:ln/>
         </p:spPr>
         <p:txBody>
-          <a:bodyPr wrap="square" lIns="254" tIns="254" rIns="254" bIns="254" rtlCol="0" anchor="t">
+          <a:bodyPr wrap="square" lIns="508" tIns="508" rIns="508" bIns="508" rtlCol="0" anchor="t">
             <a:normAutofit/>
           </a:bodyPr>
           <a:lstStyle/>
           <a:p>
-            <a:r>
-              <a:rPr lang="en-US" sz="1380" dirty="0">
+            <a:pPr indent="0" marL="0">
+              <a:buNone/>
+            </a:pPr>
+            <a:r>
+              <a:rPr lang="en-US" sz="1220" dirty="0">
                 <a:solidFill>
                   <a:srgbClr val="17364A"/>
                 </a:solidFill>
@@ -7061,13 +7163,16 @@
                 <a:ea typeface="Aptos" pitchFamily="34" charset="-122"/>
                 <a:cs typeface="Aptos" pitchFamily="34" charset="-120"/>
               </a:rPr>
-              <a:t>What goal would the agent pursue, and how narrowly can it be defined?</a:t>
-            </a:r>
-            <a:endParaRPr lang="en-US" sz="1380" dirty="0"/>
-          </a:p>
-          <a:p>
-            <a:r>
-              <a:rPr lang="en-US" sz="1380" dirty="0">
+              <a:t>What goal would the agent pursue, and how narrowly can it be.</a:t>
+            </a:r>
+            <a:endParaRPr lang="en-US" sz="1220" dirty="0"/>
+          </a:p>
+          <a:p>
+            <a:pPr indent="0" marL="0">
+              <a:buNone/>
+            </a:pPr>
+            <a:r>
+              <a:rPr lang="en-US" sz="1220" dirty="0">
                 <a:solidFill>
                   <a:srgbClr val="17364A"/>
                 </a:solidFill>
@@ -7077,11 +7182,14 @@
               </a:rPr>
               <a:t>Which tools or systems would the agent access?</a:t>
             </a:r>
-            <a:endParaRPr lang="en-US" sz="1380" dirty="0"/>
-          </a:p>
-          <a:p>
-            <a:r>
-              <a:rPr lang="en-US" sz="1380" dirty="0">
+            <a:endParaRPr lang="en-US" sz="1220" dirty="0"/>
+          </a:p>
+          <a:p>
+            <a:pPr indent="0" marL="0">
+              <a:buNone/>
+            </a:pPr>
+            <a:r>
+              <a:rPr lang="en-US" sz="1220" dirty="0">
                 <a:solidFill>
                   <a:srgbClr val="17364A"/>
                 </a:solidFill>
@@ -7091,7 +7199,7 @@
               </a:rPr>
               <a:t>Which actions are allowed, prohibited, or require human approval?</a:t>
             </a:r>
-            <a:endParaRPr lang="en-US" sz="1380" dirty="0"/>
+            <a:endParaRPr lang="en-US" sz="1220" dirty="0"/>
           </a:p>
         </p:txBody>
       </p:sp>
@@ -7169,17 +7277,17 @@
         </p:nvSpPr>
         <p:spPr>
           <a:xfrm>
-            <a:off x="7799832" y="5001768"/>
-            <a:ext cx="3145536" cy="502920"/>
-          </a:xfrm>
-          <a:prstGeom prst="rect">
-            <a:avLst/>
-          </a:prstGeom>
-          <a:noFill/>
-          <a:ln/>
-        </p:spPr>
-        <p:txBody>
-          <a:bodyPr wrap="square" lIns="0" tIns="0" rIns="0" bIns="0" rtlCol="0" anchor="t">
+            <a:off x="7799832" y="4974336"/>
+            <a:ext cx="3145536" cy="576072"/>
+          </a:xfrm>
+          <a:prstGeom prst="rect">
+            <a:avLst/>
+          </a:prstGeom>
+          <a:noFill/>
+          <a:ln/>
+        </p:spPr>
+        <p:txBody>
+          <a:bodyPr wrap="square" lIns="254" tIns="254" rIns="254" bIns="254" rtlCol="0" anchor="t">
             <a:normAutofit/>
           </a:bodyPr>
           <a:lstStyle/>
@@ -7188,7 +7296,7 @@
               <a:buNone/>
             </a:pPr>
             <a:r>
-              <a:rPr lang="en-US" sz="1550" dirty="0">
+              <a:rPr lang="en-US" sz="1320" dirty="0">
                 <a:solidFill>
                   <a:srgbClr val="17364A"/>
                 </a:solidFill>
@@ -7196,9 +7304,9 @@
                 <a:ea typeface="Aptos" pitchFamily="34" charset="-122"/>
                 <a:cs typeface="Aptos" pitchFamily="34" charset="-120"/>
               </a:rPr>
-              <a:t>Use the concept to clarify workflow changes, dependencies, staffing, procurement requirements, training needs, and implementation checkpoints.</a:t>
-            </a:r>
-            <a:endParaRPr lang="en-US" sz="1550" dirty="0"/>
+              <a:t>Use the concept to clarify workflow changes, dependencies, staffing, procurement requirements, training needs, and.</a:t>
+            </a:r>
+            <a:endParaRPr lang="en-US" sz="1320" dirty="0"/>
           </a:p>
         </p:txBody>
       </p:sp>
@@ -7499,35 +7607,41 @@
           <a:ln/>
         </p:spPr>
         <p:txBody>
-          <a:bodyPr wrap="square" lIns="635" tIns="635" rIns="635" bIns="635" rtlCol="0" anchor="t">
+          <a:bodyPr wrap="square" lIns="1016" tIns="1016" rIns="1016" bIns="1016" rtlCol="0" anchor="t">
             <a:normAutofit/>
           </a:bodyPr>
           <a:lstStyle/>
           <a:p>
+            <a:pPr indent="0" marL="0">
+              <a:buNone/>
+            </a:pPr>
             <a:r>
               <a:rPr lang="en-US" sz="2100" dirty="0">
                 <a:solidFill>
-                  <a:srgbClr val="17364A"/>
-                </a:solidFill>
-                <a:latin typeface="Aptos" pitchFamily="34" charset="0"/>
-                <a:ea typeface="Aptos" pitchFamily="34" charset="-122"/>
-                <a:cs typeface="Aptos" pitchFamily="34" charset="-120"/>
-              </a:rPr>
-              <a:t>What logs are needed to reconstruct agent behavior?</a:t>
+                  <a:srgbClr val="003A63"/>
+                </a:solidFill>
+                <a:latin typeface="Aptos" pitchFamily="34" charset="0"/>
+                <a:ea typeface="Aptos" pitchFamily="34" charset="-122"/>
+                <a:cs typeface="Aptos" pitchFamily="34" charset="-120"/>
+              </a:rPr>
+              <a:t>• What logs are needed to reconstruct agent behavior?</a:t>
             </a:r>
             <a:endParaRPr lang="en-US" sz="2100" dirty="0"/>
           </a:p>
           <a:p>
+            <a:pPr indent="0" marL="0">
+              <a:buNone/>
+            </a:pPr>
             <a:r>
               <a:rPr lang="en-US" sz="2100" dirty="0">
                 <a:solidFill>
-                  <a:srgbClr val="17364A"/>
-                </a:solidFill>
-                <a:latin typeface="Aptos" pitchFamily="34" charset="0"/>
-                <a:ea typeface="Aptos" pitchFamily="34" charset="-122"/>
-                <a:cs typeface="Aptos" pitchFamily="34" charset="-120"/>
-              </a:rPr>
-              <a:t>What rollback or correction process is needed if the agent makes an error?</a:t>
+                  <a:srgbClr val="003A63"/>
+                </a:solidFill>
+                <a:latin typeface="Aptos" pitchFamily="34" charset="0"/>
+                <a:ea typeface="Aptos" pitchFamily="34" charset="-122"/>
+                <a:cs typeface="Aptos" pitchFamily="34" charset="-120"/>
+              </a:rPr>
+              <a:t>• What rollback or correction process is needed if the agent makes an error?</a:t>
             </a:r>
             <a:endParaRPr lang="en-US" sz="2100" dirty="0"/>
           </a:p>
@@ -7607,17 +7721,17 @@
         </p:nvSpPr>
         <p:spPr>
           <a:xfrm>
-            <a:off x="7799832" y="1828800"/>
-            <a:ext cx="3145536" cy="685800"/>
-          </a:xfrm>
-          <a:prstGeom prst="rect">
-            <a:avLst/>
-          </a:prstGeom>
-          <a:noFill/>
-          <a:ln/>
-        </p:spPr>
-        <p:txBody>
-          <a:bodyPr wrap="square" lIns="0" tIns="0" rIns="0" bIns="0" rtlCol="0" anchor="t">
+            <a:off x="7799832" y="1801368"/>
+            <a:ext cx="3145536" cy="758952"/>
+          </a:xfrm>
+          <a:prstGeom prst="rect">
+            <a:avLst/>
+          </a:prstGeom>
+          <a:noFill/>
+          <a:ln/>
+        </p:spPr>
+        <p:txBody>
+          <a:bodyPr wrap="square" lIns="254" tIns="254" rIns="254" bIns="254" rtlCol="0" anchor="t">
             <a:normAutofit/>
           </a:bodyPr>
           <a:lstStyle/>
@@ -7626,7 +7740,7 @@
               <a:buNone/>
             </a:pPr>
             <a:r>
-              <a:rPr lang="en-US" sz="1550" dirty="0">
+              <a:rPr lang="en-US" sz="1320" dirty="0">
                 <a:solidFill>
                   <a:srgbClr val="17364A"/>
                 </a:solidFill>
@@ -7636,7 +7750,7 @@
               </a:rPr>
               <a:t>What logs are needed to reconstruct agent behavior?</a:t>
             </a:r>
-            <a:endParaRPr lang="en-US" sz="1550" dirty="0"/>
+            <a:endParaRPr lang="en-US" sz="1320" dirty="0"/>
           </a:p>
         </p:txBody>
       </p:sp>
@@ -7724,13 +7838,16 @@
           <a:ln/>
         </p:spPr>
         <p:txBody>
-          <a:bodyPr wrap="square" lIns="254" tIns="254" rIns="254" bIns="254" rtlCol="0" anchor="t">
+          <a:bodyPr wrap="square" lIns="508" tIns="508" rIns="508" bIns="508" rtlCol="0" anchor="t">
             <a:normAutofit/>
           </a:bodyPr>
           <a:lstStyle/>
           <a:p>
-            <a:r>
-              <a:rPr lang="en-US" sz="1380" dirty="0">
+            <a:pPr indent="0" marL="0">
+              <a:buNone/>
+            </a:pPr>
+            <a:r>
+              <a:rPr lang="en-US" sz="1220" dirty="0">
                 <a:solidFill>
                   <a:srgbClr val="17364A"/>
                 </a:solidFill>
@@ -7740,11 +7857,14 @@
               </a:rPr>
               <a:t>What logs are needed to reconstruct agent behavior?</a:t>
             </a:r>
-            <a:endParaRPr lang="en-US" sz="1380" dirty="0"/>
-          </a:p>
-          <a:p>
-            <a:r>
-              <a:rPr lang="en-US" sz="1380" dirty="0">
+            <a:endParaRPr lang="en-US" sz="1220" dirty="0"/>
+          </a:p>
+          <a:p>
+            <a:pPr indent="0" marL="0">
+              <a:buNone/>
+            </a:pPr>
+            <a:r>
+              <a:rPr lang="en-US" sz="1220" dirty="0">
                 <a:solidFill>
                   <a:srgbClr val="17364A"/>
                 </a:solidFill>
@@ -7752,9 +7872,9 @@
                 <a:ea typeface="Aptos" pitchFamily="34" charset="-122"/>
                 <a:cs typeface="Aptos" pitchFamily="34" charset="-120"/>
               </a:rPr>
-              <a:t>What rollback or correction process is needed if the agent makes an error?</a:t>
-            </a:r>
-            <a:endParaRPr lang="en-US" sz="1380" dirty="0"/>
+              <a:t>What rollback or correction process is needed if the agent makes.</a:t>
+            </a:r>
+            <a:endParaRPr lang="en-US" sz="1220" dirty="0"/>
           </a:p>
         </p:txBody>
       </p:sp>
@@ -7832,17 +7952,17 @@
         </p:nvSpPr>
         <p:spPr>
           <a:xfrm>
-            <a:off x="7799832" y="5001768"/>
-            <a:ext cx="3145536" cy="502920"/>
-          </a:xfrm>
-          <a:prstGeom prst="rect">
-            <a:avLst/>
-          </a:prstGeom>
-          <a:noFill/>
-          <a:ln/>
-        </p:spPr>
-        <p:txBody>
-          <a:bodyPr wrap="square" lIns="0" tIns="0" rIns="0" bIns="0" rtlCol="0" anchor="t">
+            <a:off x="7799832" y="4974336"/>
+            <a:ext cx="3145536" cy="576072"/>
+          </a:xfrm>
+          <a:prstGeom prst="rect">
+            <a:avLst/>
+          </a:prstGeom>
+          <a:noFill/>
+          <a:ln/>
+        </p:spPr>
+        <p:txBody>
+          <a:bodyPr wrap="square" lIns="254" tIns="254" rIns="254" bIns="254" rtlCol="0" anchor="t">
             <a:normAutofit/>
           </a:bodyPr>
           <a:lstStyle/>
@@ -7851,7 +7971,7 @@
               <a:buNone/>
             </a:pPr>
             <a:r>
-              <a:rPr lang="en-US" sz="1550" dirty="0">
+              <a:rPr lang="en-US" sz="1320" dirty="0">
                 <a:solidFill>
                   <a:srgbClr val="17364A"/>
                 </a:solidFill>
@@ -7859,9 +7979,9 @@
                 <a:ea typeface="Aptos" pitchFamily="34" charset="-122"/>
                 <a:cs typeface="Aptos" pitchFamily="34" charset="-120"/>
               </a:rPr>
-              <a:t>Use the concept to clarify workflow changes, dependencies, staffing, procurement requirements, training needs, and implementation checkpoints.</a:t>
-            </a:r>
-            <a:endParaRPr lang="en-US" sz="1550" dirty="0"/>
+              <a:t>Use the concept to clarify workflow changes, dependencies, staffing, procurement requirements, training needs, and.</a:t>
+            </a:r>
+            <a:endParaRPr lang="en-US" sz="1320" dirty="0"/>
           </a:p>
         </p:txBody>
       </p:sp>
@@ -8162,49 +8282,58 @@
           <a:ln/>
         </p:spPr>
         <p:txBody>
-          <a:bodyPr wrap="square" lIns="635" tIns="635" rIns="635" bIns="635" rtlCol="0" anchor="t">
+          <a:bodyPr wrap="square" lIns="1016" tIns="1016" rIns="1016" bIns="1016" rtlCol="0" anchor="t">
             <a:normAutofit/>
           </a:bodyPr>
           <a:lstStyle/>
           <a:p>
+            <a:pPr indent="0" marL="0">
+              <a:buNone/>
+            </a:pPr>
             <a:r>
               <a:rPr lang="en-US" sz="2100" dirty="0">
                 <a:solidFill>
-                  <a:srgbClr val="17364A"/>
-                </a:solidFill>
-                <a:latin typeface="Aptos" pitchFamily="34" charset="0"/>
-                <a:ea typeface="Aptos" pitchFamily="34" charset="-122"/>
-                <a:cs typeface="Aptos" pitchFamily="34" charset="-120"/>
-              </a:rPr>
-              <a:t>Create an agentic workflow control plan.</a:t>
+                  <a:srgbClr val="003A63"/>
+                </a:solidFill>
+                <a:latin typeface="Aptos" pitchFamily="34" charset="0"/>
+                <a:ea typeface="Aptos" pitchFamily="34" charset="-122"/>
+                <a:cs typeface="Aptos" pitchFamily="34" charset="-120"/>
+              </a:rPr>
+              <a:t>• Create an agentic workflow control plan.</a:t>
             </a:r>
             <a:endParaRPr lang="en-US" sz="2100" dirty="0"/>
           </a:p>
           <a:p>
+            <a:pPr indent="0" marL="0">
+              <a:buNone/>
+            </a:pPr>
             <a:r>
               <a:rPr lang="en-US" sz="2100" dirty="0">
                 <a:solidFill>
-                  <a:srgbClr val="17364A"/>
-                </a:solidFill>
-                <a:latin typeface="Aptos" pitchFamily="34" charset="0"/>
-                <a:ea typeface="Aptos" pitchFamily="34" charset="-122"/>
-                <a:cs typeface="Aptos" pitchFamily="34" charset="-120"/>
-              </a:rPr>
-              <a:t>Include the goal, trigger, data sources, tools, allowed actions, prohibited actions, approval points,.</a:t>
+                  <a:srgbClr val="003A63"/>
+                </a:solidFill>
+                <a:latin typeface="Aptos" pitchFamily="34" charset="0"/>
+                <a:ea typeface="Aptos" pitchFamily="34" charset="-122"/>
+                <a:cs typeface="Aptos" pitchFamily="34" charset="-120"/>
+              </a:rPr>
+              <a:t>• Include the goal, trigger, data sources, tools, allowed actions, prohibited actions, approval.</a:t>
             </a:r>
             <a:endParaRPr lang="en-US" sz="2100" dirty="0"/>
           </a:p>
           <a:p>
+            <a:pPr indent="0" marL="0">
+              <a:buNone/>
+            </a:pPr>
             <a:r>
               <a:rPr lang="en-US" sz="2100" dirty="0">
                 <a:solidFill>
-                  <a:srgbClr val="17364A"/>
-                </a:solidFill>
-                <a:latin typeface="Aptos" pitchFamily="34" charset="0"/>
-                <a:ea typeface="Aptos" pitchFamily="34" charset="-122"/>
-                <a:cs typeface="Aptos" pitchFamily="34" charset="-120"/>
-              </a:rPr>
-              <a:t>The plan should identify at least one low-risk pilot boundary and one condition that would require.</a:t>
+                  <a:srgbClr val="003A63"/>
+                </a:solidFill>
+                <a:latin typeface="Aptos" pitchFamily="34" charset="0"/>
+                <a:ea typeface="Aptos" pitchFamily="34" charset="-122"/>
+                <a:cs typeface="Aptos" pitchFamily="34" charset="-120"/>
+              </a:rPr>
+              <a:t>• The plan should identify at least one low-risk pilot boundary and one condition that would.</a:t>
             </a:r>
             <a:endParaRPr lang="en-US" sz="2100" dirty="0"/>
           </a:p>
@@ -8284,17 +8413,17 @@
         </p:nvSpPr>
         <p:spPr>
           <a:xfrm>
-            <a:off x="7799832" y="1828800"/>
-            <a:ext cx="3145536" cy="685800"/>
-          </a:xfrm>
-          <a:prstGeom prst="rect">
-            <a:avLst/>
-          </a:prstGeom>
-          <a:noFill/>
-          <a:ln/>
-        </p:spPr>
-        <p:txBody>
-          <a:bodyPr wrap="square" lIns="0" tIns="0" rIns="0" bIns="0" rtlCol="0" anchor="t">
+            <a:off x="7799832" y="1801368"/>
+            <a:ext cx="3145536" cy="758952"/>
+          </a:xfrm>
+          <a:prstGeom prst="rect">
+            <a:avLst/>
+          </a:prstGeom>
+          <a:noFill/>
+          <a:ln/>
+        </p:spPr>
+        <p:txBody>
+          <a:bodyPr wrap="square" lIns="254" tIns="254" rIns="254" bIns="254" rtlCol="0" anchor="t">
             <a:normAutofit/>
           </a:bodyPr>
           <a:lstStyle/>
@@ -8303,7 +8432,7 @@
               <a:buNone/>
             </a:pPr>
             <a:r>
-              <a:rPr lang="en-US" sz="1550" dirty="0">
+              <a:rPr lang="en-US" sz="1320" dirty="0">
                 <a:solidFill>
                   <a:srgbClr val="17364A"/>
                 </a:solidFill>
@@ -8313,7 +8442,7 @@
               </a:rPr>
               <a:t>Create an agentic workflow control plan.</a:t>
             </a:r>
-            <a:endParaRPr lang="en-US" sz="1550" dirty="0"/>
+            <a:endParaRPr lang="en-US" sz="1320" dirty="0"/>
           </a:p>
         </p:txBody>
       </p:sp>
@@ -8401,13 +8530,16 @@
           <a:ln/>
         </p:spPr>
         <p:txBody>
-          <a:bodyPr wrap="square" lIns="254" tIns="254" rIns="254" bIns="254" rtlCol="0" anchor="t">
+          <a:bodyPr wrap="square" lIns="508" tIns="508" rIns="508" bIns="508" rtlCol="0" anchor="t">
             <a:normAutofit/>
           </a:bodyPr>
           <a:lstStyle/>
           <a:p>
-            <a:r>
-              <a:rPr lang="en-US" sz="1380" dirty="0">
+            <a:pPr indent="0" marL="0">
+              <a:buNone/>
+            </a:pPr>
+            <a:r>
+              <a:rPr lang="en-US" sz="1220" dirty="0">
                 <a:solidFill>
                   <a:srgbClr val="17364A"/>
                 </a:solidFill>
@@ -8415,13 +8547,16 @@
                 <a:ea typeface="Aptos" pitchFamily="34" charset="-122"/>
                 <a:cs typeface="Aptos" pitchFamily="34" charset="-120"/>
               </a:rPr>
-              <a:t>Include the goal, trigger, data sources, tools, allowed actions, prohibited actions,.</a:t>
-            </a:r>
-            <a:endParaRPr lang="en-US" sz="1380" dirty="0"/>
-          </a:p>
-          <a:p>
-            <a:r>
-              <a:rPr lang="en-US" sz="1380" dirty="0">
+              <a:t>Include the goal, trigger, data sources, tools, allowed actions,.</a:t>
+            </a:r>
+            <a:endParaRPr lang="en-US" sz="1220" dirty="0"/>
+          </a:p>
+          <a:p>
+            <a:pPr indent="0" marL="0">
+              <a:buNone/>
+            </a:pPr>
+            <a:r>
+              <a:rPr lang="en-US" sz="1220" dirty="0">
                 <a:solidFill>
                   <a:srgbClr val="17364A"/>
                 </a:solidFill>
@@ -8429,9 +8564,9 @@
                 <a:ea typeface="Aptos" pitchFamily="34" charset="-122"/>
                 <a:cs typeface="Aptos" pitchFamily="34" charset="-120"/>
               </a:rPr>
-              <a:t>The plan should identify at least one low-risk pilot boundary and one condition that would.</a:t>
-            </a:r>
-            <a:endParaRPr lang="en-US" sz="1380" dirty="0"/>
+              <a:t>The plan should identify at least one low-risk pilot boundary and.</a:t>
+            </a:r>
+            <a:endParaRPr lang="en-US" sz="1220" dirty="0"/>
           </a:p>
         </p:txBody>
       </p:sp>
@@ -8509,17 +8644,17 @@
         </p:nvSpPr>
         <p:spPr>
           <a:xfrm>
-            <a:off x="7799832" y="5001768"/>
-            <a:ext cx="3145536" cy="502920"/>
-          </a:xfrm>
-          <a:prstGeom prst="rect">
-            <a:avLst/>
-          </a:prstGeom>
-          <a:noFill/>
-          <a:ln/>
-        </p:spPr>
-        <p:txBody>
-          <a:bodyPr wrap="square" lIns="0" tIns="0" rIns="0" bIns="0" rtlCol="0" anchor="t">
+            <a:off x="7799832" y="4974336"/>
+            <a:ext cx="3145536" cy="576072"/>
+          </a:xfrm>
+          <a:prstGeom prst="rect">
+            <a:avLst/>
+          </a:prstGeom>
+          <a:noFill/>
+          <a:ln/>
+        </p:spPr>
+        <p:txBody>
+          <a:bodyPr wrap="square" lIns="254" tIns="254" rIns="254" bIns="254" rtlCol="0" anchor="t">
             <a:normAutofit/>
           </a:bodyPr>
           <a:lstStyle/>
@@ -8528,7 +8663,7 @@
               <a:buNone/>
             </a:pPr>
             <a:r>
-              <a:rPr lang="en-US" sz="1550" dirty="0">
+              <a:rPr lang="en-US" sz="1320" dirty="0">
                 <a:solidFill>
                   <a:srgbClr val="17364A"/>
                 </a:solidFill>
@@ -8536,9 +8671,9 @@
                 <a:ea typeface="Aptos" pitchFamily="34" charset="-122"/>
                 <a:cs typeface="Aptos" pitchFamily="34" charset="-120"/>
               </a:rPr>
-              <a:t>Use the assignment to test whether you can explain the concept, apply it to a realistic public health situation, and identify what would need review before the work moves forward.</a:t>
-            </a:r>
-            <a:endParaRPr lang="en-US" sz="1550" dirty="0"/>
+              <a:t>Use the assignment to test whether you can explain the concept, apply it to a realistic public health situation, and.</a:t>
+            </a:r>
+            <a:endParaRPr lang="en-US" sz="1320" dirty="0"/>
           </a:p>
         </p:txBody>
       </p:sp>
@@ -8839,49 +8974,58 @@
           <a:ln/>
         </p:spPr>
         <p:txBody>
-          <a:bodyPr wrap="square" lIns="635" tIns="635" rIns="635" bIns="635" rtlCol="0" anchor="t">
+          <a:bodyPr wrap="square" lIns="1016" tIns="1016" rIns="1016" bIns="1016" rtlCol="0" anchor="t">
             <a:normAutofit/>
           </a:bodyPr>
           <a:lstStyle/>
           <a:p>
+            <a:pPr indent="0" marL="0">
+              <a:buNone/>
+            </a:pPr>
             <a:r>
               <a:rPr lang="en-US" sz="2100" dirty="0">
                 <a:solidFill>
-                  <a:srgbClr val="17364A"/>
-                </a:solidFill>
-                <a:latin typeface="Aptos" pitchFamily="34" charset="0"/>
-                <a:ea typeface="Aptos" pitchFamily="34" charset="-122"/>
-                <a:cs typeface="Aptos" pitchFamily="34" charset="-120"/>
-              </a:rPr>
-              <a:t>Agentic workflow control plan</a:t>
+                  <a:srgbClr val="003A63"/>
+                </a:solidFill>
+                <a:latin typeface="Aptos" pitchFamily="34" charset="0"/>
+                <a:ea typeface="Aptos" pitchFamily="34" charset="-122"/>
+                <a:cs typeface="Aptos" pitchFamily="34" charset="-120"/>
+              </a:rPr>
+              <a:t>• Agentic workflow control plan</a:t>
             </a:r>
             <a:endParaRPr lang="en-US" sz="2100" dirty="0"/>
           </a:p>
           <a:p>
+            <a:pPr indent="0" marL="0">
+              <a:buNone/>
+            </a:pPr>
             <a:r>
               <a:rPr lang="en-US" sz="2100" dirty="0">
                 <a:solidFill>
-                  <a:srgbClr val="17364A"/>
-                </a:solidFill>
-                <a:latin typeface="Aptos" pitchFamily="34" charset="0"/>
-                <a:ea typeface="Aptos" pitchFamily="34" charset="-122"/>
-                <a:cs typeface="Aptos" pitchFamily="34" charset="-120"/>
-              </a:rPr>
-              <a:t>Allowed/prohibited action list</a:t>
+                  <a:srgbClr val="003A63"/>
+                </a:solidFill>
+                <a:latin typeface="Aptos" pitchFamily="34" charset="0"/>
+                <a:ea typeface="Aptos" pitchFamily="34" charset="-122"/>
+                <a:cs typeface="Aptos" pitchFamily="34" charset="-120"/>
+              </a:rPr>
+              <a:t>• Allowed/prohibited action list</a:t>
             </a:r>
             <a:endParaRPr lang="en-US" sz="2100" dirty="0"/>
           </a:p>
           <a:p>
+            <a:pPr indent="0" marL="0">
+              <a:buNone/>
+            </a:pPr>
             <a:r>
               <a:rPr lang="en-US" sz="2100" dirty="0">
                 <a:solidFill>
-                  <a:srgbClr val="17364A"/>
-                </a:solidFill>
-                <a:latin typeface="Aptos" pitchFamily="34" charset="0"/>
-                <a:ea typeface="Aptos" pitchFamily="34" charset="-122"/>
-                <a:cs typeface="Aptos" pitchFamily="34" charset="-120"/>
-              </a:rPr>
-              <a:t>Human approval and escalation map</a:t>
+                  <a:srgbClr val="003A63"/>
+                </a:solidFill>
+                <a:latin typeface="Aptos" pitchFamily="34" charset="0"/>
+                <a:ea typeface="Aptos" pitchFamily="34" charset="-122"/>
+                <a:cs typeface="Aptos" pitchFamily="34" charset="-120"/>
+              </a:rPr>
+              <a:t>• Human approval and escalation map</a:t>
             </a:r>
             <a:endParaRPr lang="en-US" sz="2100" dirty="0"/>
           </a:p>
@@ -8961,17 +9105,17 @@
         </p:nvSpPr>
         <p:spPr>
           <a:xfrm>
-            <a:off x="7799832" y="1828800"/>
-            <a:ext cx="3145536" cy="685800"/>
-          </a:xfrm>
-          <a:prstGeom prst="rect">
-            <a:avLst/>
-          </a:prstGeom>
-          <a:noFill/>
-          <a:ln/>
-        </p:spPr>
-        <p:txBody>
-          <a:bodyPr wrap="square" lIns="0" tIns="0" rIns="0" bIns="0" rtlCol="0" anchor="t">
+            <a:off x="7799832" y="1801368"/>
+            <a:ext cx="3145536" cy="758952"/>
+          </a:xfrm>
+          <a:prstGeom prst="rect">
+            <a:avLst/>
+          </a:prstGeom>
+          <a:noFill/>
+          <a:ln/>
+        </p:spPr>
+        <p:txBody>
+          <a:bodyPr wrap="square" lIns="254" tIns="254" rIns="254" bIns="254" rtlCol="0" anchor="t">
             <a:normAutofit/>
           </a:bodyPr>
           <a:lstStyle/>
@@ -8980,7 +9124,7 @@
               <a:buNone/>
             </a:pPr>
             <a:r>
-              <a:rPr lang="en-US" sz="1550" dirty="0">
+              <a:rPr lang="en-US" sz="1320" dirty="0">
                 <a:solidFill>
                   <a:srgbClr val="17364A"/>
                 </a:solidFill>
@@ -8990,7 +9134,7 @@
               </a:rPr>
               <a:t>Agentic workflow control plan</a:t>
             </a:r>
-            <a:endParaRPr lang="en-US" sz="1550" dirty="0"/>
+            <a:endParaRPr lang="en-US" sz="1320" dirty="0"/>
           </a:p>
         </p:txBody>
       </p:sp>
@@ -9078,13 +9222,16 @@
           <a:ln/>
         </p:spPr>
         <p:txBody>
-          <a:bodyPr wrap="square" lIns="254" tIns="254" rIns="254" bIns="254" rtlCol="0" anchor="t">
+          <a:bodyPr wrap="square" lIns="508" tIns="508" rIns="508" bIns="508" rtlCol="0" anchor="t">
             <a:normAutofit/>
           </a:bodyPr>
           <a:lstStyle/>
           <a:p>
-            <a:r>
-              <a:rPr lang="en-US" sz="1380" dirty="0">
+            <a:pPr indent="0" marL="0">
+              <a:buNone/>
+            </a:pPr>
+            <a:r>
+              <a:rPr lang="en-US" sz="1220" dirty="0">
                 <a:solidFill>
                   <a:srgbClr val="17364A"/>
                 </a:solidFill>
@@ -9094,11 +9241,14 @@
               </a:rPr>
               <a:t>Agentic workflow control plan</a:t>
             </a:r>
-            <a:endParaRPr lang="en-US" sz="1380" dirty="0"/>
-          </a:p>
-          <a:p>
-            <a:r>
-              <a:rPr lang="en-US" sz="1380" dirty="0">
+            <a:endParaRPr lang="en-US" sz="1220" dirty="0"/>
+          </a:p>
+          <a:p>
+            <a:pPr indent="0" marL="0">
+              <a:buNone/>
+            </a:pPr>
+            <a:r>
+              <a:rPr lang="en-US" sz="1220" dirty="0">
                 <a:solidFill>
                   <a:srgbClr val="17364A"/>
                 </a:solidFill>
@@ -9108,11 +9258,14 @@
               </a:rPr>
               <a:t>Allowed/prohibited action list</a:t>
             </a:r>
-            <a:endParaRPr lang="en-US" sz="1380" dirty="0"/>
-          </a:p>
-          <a:p>
-            <a:r>
-              <a:rPr lang="en-US" sz="1380" dirty="0">
+            <a:endParaRPr lang="en-US" sz="1220" dirty="0"/>
+          </a:p>
+          <a:p>
+            <a:pPr indent="0" marL="0">
+              <a:buNone/>
+            </a:pPr>
+            <a:r>
+              <a:rPr lang="en-US" sz="1220" dirty="0">
                 <a:solidFill>
                   <a:srgbClr val="17364A"/>
                 </a:solidFill>
@@ -9122,7 +9275,7 @@
               </a:rPr>
               <a:t>Human approval and escalation map</a:t>
             </a:r>
-            <a:endParaRPr lang="en-US" sz="1380" dirty="0"/>
+            <a:endParaRPr lang="en-US" sz="1220" dirty="0"/>
           </a:p>
         </p:txBody>
       </p:sp>
@@ -9200,17 +9353,17 @@
         </p:nvSpPr>
         <p:spPr>
           <a:xfrm>
-            <a:off x="7799832" y="5001768"/>
-            <a:ext cx="3145536" cy="502920"/>
-          </a:xfrm>
-          <a:prstGeom prst="rect">
-            <a:avLst/>
-          </a:prstGeom>
-          <a:noFill/>
-          <a:ln/>
-        </p:spPr>
-        <p:txBody>
-          <a:bodyPr wrap="square" lIns="0" tIns="0" rIns="0" bIns="0" rtlCol="0" anchor="t">
+            <a:off x="7799832" y="4974336"/>
+            <a:ext cx="3145536" cy="576072"/>
+          </a:xfrm>
+          <a:prstGeom prst="rect">
+            <a:avLst/>
+          </a:prstGeom>
+          <a:noFill/>
+          <a:ln/>
+        </p:spPr>
+        <p:txBody>
+          <a:bodyPr wrap="square" lIns="254" tIns="254" rIns="254" bIns="254" rtlCol="0" anchor="t">
             <a:normAutofit/>
           </a:bodyPr>
           <a:lstStyle/>
@@ -9219,7 +9372,7 @@
               <a:buNone/>
             </a:pPr>
             <a:r>
-              <a:rPr lang="en-US" sz="1550" dirty="0">
+              <a:rPr lang="en-US" sz="1320" dirty="0">
                 <a:solidFill>
                   <a:srgbClr val="17364A"/>
                 </a:solidFill>
@@ -9227,9 +9380,9 @@
                 <a:ea typeface="Aptos" pitchFamily="34" charset="-122"/>
                 <a:cs typeface="Aptos" pitchFamily="34" charset="-120"/>
               </a:rPr>
-              <a:t>Use the concept to clarify workflow changes, dependencies, staffing, procurement requirements, training needs, and implementation checkpoints.</a:t>
-            </a:r>
-            <a:endParaRPr lang="en-US" sz="1550" dirty="0"/>
+              <a:t>Use the concept to clarify workflow changes, dependencies, staffing, procurement requirements, training needs, and.</a:t>
+            </a:r>
+            <a:endParaRPr lang="en-US" sz="1320" dirty="0"/>
           </a:p>
         </p:txBody>
       </p:sp>
@@ -9530,21 +9683,24 @@
           <a:ln/>
         </p:spPr>
         <p:txBody>
-          <a:bodyPr wrap="square" lIns="635" tIns="635" rIns="635" bIns="635" rtlCol="0" anchor="t">
+          <a:bodyPr wrap="square" lIns="1016" tIns="1016" rIns="1016" bIns="1016" rtlCol="0" anchor="t">
             <a:normAutofit/>
           </a:bodyPr>
           <a:lstStyle/>
           <a:p>
+            <a:pPr indent="0" marL="0">
+              <a:buNone/>
+            </a:pPr>
             <a:r>
               <a:rPr lang="en-US" sz="2100" dirty="0">
                 <a:solidFill>
-                  <a:srgbClr val="17364A"/>
-                </a:solidFill>
-                <a:latin typeface="Aptos" pitchFamily="34" charset="0"/>
-                <a:ea typeface="Aptos" pitchFamily="34" charset="-122"/>
-                <a:cs typeface="Aptos" pitchFamily="34" charset="-120"/>
-              </a:rPr>
-              <a:t>Tool-call logging requirements</a:t>
+                  <a:srgbClr val="003A63"/>
+                </a:solidFill>
+                <a:latin typeface="Aptos" pitchFamily="34" charset="0"/>
+                <a:ea typeface="Aptos" pitchFamily="34" charset="-122"/>
+                <a:cs typeface="Aptos" pitchFamily="34" charset="-120"/>
+              </a:rPr>
+              <a:t>• Tool-call logging requirements</a:t>
             </a:r>
             <a:endParaRPr lang="en-US" sz="2100" dirty="0"/>
           </a:p>
@@ -9624,17 +9780,17 @@
         </p:nvSpPr>
         <p:spPr>
           <a:xfrm>
-            <a:off x="7799832" y="1828800"/>
-            <a:ext cx="3145536" cy="685800"/>
-          </a:xfrm>
-          <a:prstGeom prst="rect">
-            <a:avLst/>
-          </a:prstGeom>
-          <a:noFill/>
-          <a:ln/>
-        </p:spPr>
-        <p:txBody>
-          <a:bodyPr wrap="square" lIns="0" tIns="0" rIns="0" bIns="0" rtlCol="0" anchor="t">
+            <a:off x="7799832" y="1801368"/>
+            <a:ext cx="3145536" cy="758952"/>
+          </a:xfrm>
+          <a:prstGeom prst="rect">
+            <a:avLst/>
+          </a:prstGeom>
+          <a:noFill/>
+          <a:ln/>
+        </p:spPr>
+        <p:txBody>
+          <a:bodyPr wrap="square" lIns="254" tIns="254" rIns="254" bIns="254" rtlCol="0" anchor="t">
             <a:normAutofit/>
           </a:bodyPr>
           <a:lstStyle/>
@@ -9643,7 +9799,7 @@
               <a:buNone/>
             </a:pPr>
             <a:r>
-              <a:rPr lang="en-US" sz="1550" dirty="0">
+              <a:rPr lang="en-US" sz="1320" dirty="0">
                 <a:solidFill>
                   <a:srgbClr val="17364A"/>
                 </a:solidFill>
@@ -9653,7 +9809,7 @@
               </a:rPr>
               <a:t>Tool-call logging requirements</a:t>
             </a:r>
-            <a:endParaRPr lang="en-US" sz="1550" dirty="0"/>
+            <a:endParaRPr lang="en-US" sz="1320" dirty="0"/>
           </a:p>
         </p:txBody>
       </p:sp>
@@ -9741,13 +9897,16 @@
           <a:ln/>
         </p:spPr>
         <p:txBody>
-          <a:bodyPr wrap="square" lIns="254" tIns="254" rIns="254" bIns="254" rtlCol="0" anchor="t">
+          <a:bodyPr wrap="square" lIns="508" tIns="508" rIns="508" bIns="508" rtlCol="0" anchor="t">
             <a:normAutofit/>
           </a:bodyPr>
           <a:lstStyle/>
           <a:p>
-            <a:r>
-              <a:rPr lang="en-US" sz="1380" dirty="0">
+            <a:pPr indent="0" marL="0">
+              <a:buNone/>
+            </a:pPr>
+            <a:r>
+              <a:rPr lang="en-US" sz="1220" dirty="0">
                 <a:solidFill>
                   <a:srgbClr val="17364A"/>
                 </a:solidFill>
@@ -9757,7 +9916,7 @@
               </a:rPr>
               <a:t>Tool-call logging requirements</a:t>
             </a:r>
-            <a:endParaRPr lang="en-US" sz="1380" dirty="0"/>
+            <a:endParaRPr lang="en-US" sz="1220" dirty="0"/>
           </a:p>
         </p:txBody>
       </p:sp>
@@ -9835,17 +9994,17 @@
         </p:nvSpPr>
         <p:spPr>
           <a:xfrm>
-            <a:off x="7799832" y="5001768"/>
-            <a:ext cx="3145536" cy="502920"/>
-          </a:xfrm>
-          <a:prstGeom prst="rect">
-            <a:avLst/>
-          </a:prstGeom>
-          <a:noFill/>
-          <a:ln/>
-        </p:spPr>
-        <p:txBody>
-          <a:bodyPr wrap="square" lIns="0" tIns="0" rIns="0" bIns="0" rtlCol="0" anchor="t">
+            <a:off x="7799832" y="4974336"/>
+            <a:ext cx="3145536" cy="576072"/>
+          </a:xfrm>
+          <a:prstGeom prst="rect">
+            <a:avLst/>
+          </a:prstGeom>
+          <a:noFill/>
+          <a:ln/>
+        </p:spPr>
+        <p:txBody>
+          <a:bodyPr wrap="square" lIns="254" tIns="254" rIns="254" bIns="254" rtlCol="0" anchor="t">
             <a:normAutofit/>
           </a:bodyPr>
           <a:lstStyle/>
@@ -9854,7 +10013,7 @@
               <a:buNone/>
             </a:pPr>
             <a:r>
-              <a:rPr lang="en-US" sz="1550" dirty="0">
+              <a:rPr lang="en-US" sz="1320" dirty="0">
                 <a:solidFill>
                   <a:srgbClr val="17364A"/>
                 </a:solidFill>
@@ -9862,9 +10021,9 @@
                 <a:ea typeface="Aptos" pitchFamily="34" charset="-122"/>
                 <a:cs typeface="Aptos" pitchFamily="34" charset="-120"/>
               </a:rPr>
-              <a:t>Use the concept to clarify workflow changes, dependencies, staffing, procurement requirements, training needs, and implementation checkpoints.</a:t>
-            </a:r>
-            <a:endParaRPr lang="en-US" sz="1550" dirty="0"/>
+              <a:t>Use the concept to clarify workflow changes, dependencies, staffing, procurement requirements, training needs, and.</a:t>
+            </a:r>
+            <a:endParaRPr lang="en-US" sz="1320" dirty="0"/>
           </a:p>
         </p:txBody>
       </p:sp>
@@ -10165,49 +10324,58 @@
           <a:ln/>
         </p:spPr>
         <p:txBody>
-          <a:bodyPr wrap="square" lIns="635" tIns="635" rIns="635" bIns="635" rtlCol="0" anchor="t">
+          <a:bodyPr wrap="square" lIns="1016" tIns="1016" rIns="1016" bIns="1016" rtlCol="0" anchor="t">
             <a:normAutofit/>
           </a:bodyPr>
           <a:lstStyle/>
           <a:p>
+            <a:pPr indent="0" marL="0">
+              <a:buNone/>
+            </a:pPr>
             <a:r>
               <a:rPr lang="en-US" sz="2100" dirty="0">
                 <a:solidFill>
-                  <a:srgbClr val="17364A"/>
-                </a:solidFill>
-                <a:latin typeface="Aptos" pitchFamily="34" charset="0"/>
-                <a:ea typeface="Aptos" pitchFamily="34" charset="-122"/>
-                <a:cs typeface="Aptos" pitchFamily="34" charset="-120"/>
-              </a:rPr>
-              <a:t>Agentic AI refers to AI systems configured to pursue a goal through multiple steps, often by using tools, calling.</a:t>
+                  <a:srgbClr val="003A63"/>
+                </a:solidFill>
+                <a:latin typeface="Aptos" pitchFamily="34" charset="0"/>
+                <a:ea typeface="Aptos" pitchFamily="34" charset="-122"/>
+                <a:cs typeface="Aptos" pitchFamily="34" charset="-120"/>
+              </a:rPr>
+              <a:t>• Agentic AI refers to AI systems configured to pursue a goal through multiple steps, often by.</a:t>
             </a:r>
             <a:endParaRPr lang="en-US" sz="2100" dirty="0"/>
           </a:p>
           <a:p>
+            <a:pPr indent="0" marL="0">
+              <a:buNone/>
+            </a:pPr>
             <a:r>
               <a:rPr lang="en-US" sz="2100" dirty="0">
                 <a:solidFill>
-                  <a:srgbClr val="17364A"/>
-                </a:solidFill>
-                <a:latin typeface="Aptos" pitchFamily="34" charset="0"/>
-                <a:ea typeface="Aptos" pitchFamily="34" charset="-122"/>
-                <a:cs typeface="Aptos" pitchFamily="34" charset="-120"/>
-              </a:rPr>
-              <a:t>In public health, agentic workflows may eventually support intake triage, document routing, surveillance review,.</a:t>
+                  <a:srgbClr val="003A63"/>
+                </a:solidFill>
+                <a:latin typeface="Aptos" pitchFamily="34" charset="0"/>
+                <a:ea typeface="Aptos" pitchFamily="34" charset="-122"/>
+                <a:cs typeface="Aptos" pitchFamily="34" charset="-120"/>
+              </a:rPr>
+              <a:t>• In public health, agentic workflows may eventually support intake triage, document routing,.</a:t>
             </a:r>
             <a:endParaRPr lang="en-US" sz="2100" dirty="0"/>
           </a:p>
           <a:p>
+            <a:pPr indent="0" marL="0">
+              <a:buNone/>
+            </a:pPr>
             <a:r>
               <a:rPr lang="en-US" sz="2100" dirty="0">
                 <a:solidFill>
-                  <a:srgbClr val="17364A"/>
-                </a:solidFill>
-                <a:latin typeface="Aptos" pitchFamily="34" charset="0"/>
-                <a:ea typeface="Aptos" pitchFamily="34" charset="-122"/>
-                <a:cs typeface="Aptos" pitchFamily="34" charset="-120"/>
-              </a:rPr>
-              <a:t>These uses require stronger controls than simple drafting or summarization.</a:t>
+                  <a:srgbClr val="003A63"/>
+                </a:solidFill>
+                <a:latin typeface="Aptos" pitchFamily="34" charset="0"/>
+                <a:ea typeface="Aptos" pitchFamily="34" charset="-122"/>
+                <a:cs typeface="Aptos" pitchFamily="34" charset="-120"/>
+              </a:rPr>
+              <a:t>• These uses require stronger controls than simple drafting or summarization.</a:t>
             </a:r>
             <a:endParaRPr lang="en-US" sz="2100" dirty="0"/>
           </a:p>
@@ -10287,17 +10455,17 @@
         </p:nvSpPr>
         <p:spPr>
           <a:xfrm>
-            <a:off x="8074152" y="1920240"/>
-            <a:ext cx="2825496" cy="1280160"/>
-          </a:xfrm>
-          <a:prstGeom prst="rect">
-            <a:avLst/>
-          </a:prstGeom>
-          <a:noFill/>
-          <a:ln/>
-        </p:spPr>
-        <p:txBody>
-          <a:bodyPr wrap="square" lIns="0" tIns="0" rIns="0" bIns="0" rtlCol="0" anchor="t">
+            <a:off x="8074152" y="1892808"/>
+            <a:ext cx="2825496" cy="1353312"/>
+          </a:xfrm>
+          <a:prstGeom prst="rect">
+            <a:avLst/>
+          </a:prstGeom>
+          <a:noFill/>
+          <a:ln/>
+        </p:spPr>
+        <p:txBody>
+          <a:bodyPr wrap="square" lIns="254" tIns="254" rIns="254" bIns="254" rtlCol="0" anchor="t">
             <a:normAutofit/>
           </a:bodyPr>
           <a:lstStyle/>
@@ -10306,7 +10474,7 @@
               <a:buNone/>
             </a:pPr>
             <a:r>
-              <a:rPr lang="en-US" sz="1550" dirty="0">
+              <a:rPr lang="en-US" sz="1320" dirty="0">
                 <a:solidFill>
                   <a:srgbClr val="17364A"/>
                 </a:solidFill>
@@ -10314,43 +10482,9 @@
                 <a:ea typeface="Aptos" pitchFamily="34" charset="-122"/>
                 <a:cs typeface="Aptos" pitchFamily="34" charset="-120"/>
               </a:rPr>
-              <a:t>Level: intermediate/practitioner</a:t>
-            </a:r>
-            <a:endParaRPr lang="en-US" sz="1550" dirty="0"/>
-          </a:p>
-          <a:p>
-            <a:pPr indent="0" marL="0">
-              <a:buNone/>
-            </a:pPr>
-            <a:r>
-              <a:rPr lang="en-US" sz="1550" dirty="0">
-                <a:solidFill>
-                  <a:srgbClr val="17364A"/>
-                </a:solidFill>
-                <a:latin typeface="Aptos" pitchFamily="34" charset="0"/>
-                <a:ea typeface="Aptos" pitchFamily="34" charset="-122"/>
-                <a:cs typeface="Aptos" pitchFamily="34" charset="-120"/>
-              </a:rPr>
-              <a:t>Primary track: Technical Architecture Track</a:t>
-            </a:r>
-            <a:endParaRPr lang="en-US" sz="1550" dirty="0"/>
-          </a:p>
-          <a:p>
-            <a:pPr indent="0" marL="0">
-              <a:buNone/>
-            </a:pPr>
-            <a:r>
-              <a:rPr lang="en-US" sz="1550" dirty="0">
-                <a:solidFill>
-                  <a:srgbClr val="17364A"/>
-                </a:solidFill>
-                <a:latin typeface="Aptos" pitchFamily="34" charset="0"/>
-                <a:ea typeface="Aptos" pitchFamily="34" charset="-122"/>
-                <a:cs typeface="Aptos" pitchFamily="34" charset="-120"/>
-              </a:rPr>
-              <a:t>Appears in tracks: analytics-modeling</a:t>
-            </a:r>
-            <a:endParaRPr lang="en-US" sz="1550" dirty="0"/>
+              <a:t>Level: intermediate/practitioner Primary track: Technical Architecture Track Appears in tracks: analytics-modeling</a:t>
+            </a:r>
+            <a:endParaRPr lang="en-US" sz="1320" dirty="0"/>
           </a:p>
         </p:txBody>
       </p:sp>
@@ -10438,13 +10572,16 @@
           <a:ln/>
         </p:spPr>
         <p:txBody>
-          <a:bodyPr wrap="square" lIns="254" tIns="254" rIns="254" bIns="254" rtlCol="0" anchor="t">
+          <a:bodyPr wrap="square" lIns="508" tIns="508" rIns="508" bIns="508" rtlCol="0" anchor="t">
             <a:normAutofit/>
           </a:bodyPr>
           <a:lstStyle/>
           <a:p>
-            <a:r>
-              <a:rPr lang="en-US" sz="1380" dirty="0">
+            <a:pPr indent="0" marL="0">
+              <a:buNone/>
+            </a:pPr>
+            <a:r>
+              <a:rPr lang="en-US" sz="1220" dirty="0">
                 <a:solidFill>
                   <a:srgbClr val="17364A"/>
                 </a:solidFill>
@@ -10454,11 +10591,14 @@
               </a:rPr>
               <a:t>Read the module for shared vocabulary and context.</a:t>
             </a:r>
-            <a:endParaRPr lang="en-US" sz="1380" dirty="0"/>
-          </a:p>
-          <a:p>
-            <a:r>
-              <a:rPr lang="en-US" sz="1380" dirty="0">
+            <a:endParaRPr lang="en-US" sz="1220" dirty="0"/>
+          </a:p>
+          <a:p>
+            <a:pPr indent="0" marL="0">
+              <a:buNone/>
+            </a:pPr>
+            <a:r>
+              <a:rPr lang="en-US" sz="1220" dirty="0">
                 <a:solidFill>
                   <a:srgbClr val="17364A"/>
                 </a:solidFill>
@@ -10468,11 +10608,14 @@
               </a:rPr>
               <a:t>Complete the practical exercise to apply the concept.</a:t>
             </a:r>
-            <a:endParaRPr lang="en-US" sz="1380" dirty="0"/>
-          </a:p>
-          <a:p>
-            <a:r>
-              <a:rPr lang="en-US" sz="1380" dirty="0">
+            <a:endParaRPr lang="en-US" sz="1220" dirty="0"/>
+          </a:p>
+          <a:p>
+            <a:pPr indent="0" marL="0">
+              <a:buNone/>
+            </a:pPr>
+            <a:r>
+              <a:rPr lang="en-US" sz="1220" dirty="0">
                 <a:solidFill>
                   <a:srgbClr val="17364A"/>
                 </a:solidFill>
@@ -10482,7 +10625,7 @@
               </a:rPr>
               <a:t>Use the notes and references for deeper review.</a:t>
             </a:r>
-            <a:endParaRPr lang="en-US" sz="1380" dirty="0"/>
+            <a:endParaRPr lang="en-US" sz="1220" dirty="0"/>
           </a:p>
         </p:txBody>
       </p:sp>
@@ -10783,49 +10926,58 @@
           <a:ln/>
         </p:spPr>
         <p:txBody>
-          <a:bodyPr wrap="square" lIns="635" tIns="635" rIns="635" bIns="635" rtlCol="0" anchor="t">
+          <a:bodyPr wrap="square" lIns="1016" tIns="1016" rIns="1016" bIns="1016" rtlCol="0" anchor="t">
             <a:normAutofit/>
           </a:bodyPr>
           <a:lstStyle/>
           <a:p>
+            <a:pPr indent="0" marL="0">
+              <a:buNone/>
+            </a:pPr>
             <a:r>
               <a:rPr lang="en-US" sz="2100" dirty="0">
                 <a:solidFill>
-                  <a:srgbClr val="17364A"/>
-                </a:solidFill>
-                <a:latin typeface="Aptos" pitchFamily="34" charset="0"/>
-                <a:ea typeface="Aptos" pitchFamily="34" charset="-122"/>
-                <a:cs typeface="Aptos" pitchFamily="34" charset="-120"/>
-              </a:rPr>
-              <a:t>Agentic workflow control plan</a:t>
+                  <a:srgbClr val="003A63"/>
+                </a:solidFill>
+                <a:latin typeface="Aptos" pitchFamily="34" charset="0"/>
+                <a:ea typeface="Aptos" pitchFamily="34" charset="-122"/>
+                <a:cs typeface="Aptos" pitchFamily="34" charset="-120"/>
+              </a:rPr>
+              <a:t>• Agentic workflow control plan</a:t>
             </a:r>
             <a:endParaRPr lang="en-US" sz="2100" dirty="0"/>
           </a:p>
           <a:p>
+            <a:pPr indent="0" marL="0">
+              <a:buNone/>
+            </a:pPr>
             <a:r>
               <a:rPr lang="en-US" sz="2100" dirty="0">
                 <a:solidFill>
-                  <a:srgbClr val="17364A"/>
-                </a:solidFill>
-                <a:latin typeface="Aptos" pitchFamily="34" charset="0"/>
-                <a:ea typeface="Aptos" pitchFamily="34" charset="-122"/>
-                <a:cs typeface="Aptos" pitchFamily="34" charset="-120"/>
-              </a:rPr>
-              <a:t>Allowed/prohibited action list</a:t>
+                  <a:srgbClr val="003A63"/>
+                </a:solidFill>
+                <a:latin typeface="Aptos" pitchFamily="34" charset="0"/>
+                <a:ea typeface="Aptos" pitchFamily="34" charset="-122"/>
+                <a:cs typeface="Aptos" pitchFamily="34" charset="-120"/>
+              </a:rPr>
+              <a:t>• Allowed/prohibited action list</a:t>
             </a:r>
             <a:endParaRPr lang="en-US" sz="2100" dirty="0"/>
           </a:p>
           <a:p>
+            <a:pPr indent="0" marL="0">
+              <a:buNone/>
+            </a:pPr>
             <a:r>
               <a:rPr lang="en-US" sz="2100" dirty="0">
                 <a:solidFill>
-                  <a:srgbClr val="17364A"/>
-                </a:solidFill>
-                <a:latin typeface="Aptos" pitchFamily="34" charset="0"/>
-                <a:ea typeface="Aptos" pitchFamily="34" charset="-122"/>
-                <a:cs typeface="Aptos" pitchFamily="34" charset="-120"/>
-              </a:rPr>
-              <a:t>Human approval and escalation map</a:t>
+                  <a:srgbClr val="003A63"/>
+                </a:solidFill>
+                <a:latin typeface="Aptos" pitchFamily="34" charset="0"/>
+                <a:ea typeface="Aptos" pitchFamily="34" charset="-122"/>
+                <a:cs typeface="Aptos" pitchFamily="34" charset="-120"/>
+              </a:rPr>
+              <a:t>• Human approval and escalation map</a:t>
             </a:r>
             <a:endParaRPr lang="en-US" sz="2100" dirty="0"/>
           </a:p>
@@ -10905,17 +11057,17 @@
         </p:nvSpPr>
         <p:spPr>
           <a:xfrm>
-            <a:off x="7799832" y="1828800"/>
-            <a:ext cx="3145536" cy="685800"/>
-          </a:xfrm>
-          <a:prstGeom prst="rect">
-            <a:avLst/>
-          </a:prstGeom>
-          <a:noFill/>
-          <a:ln/>
-        </p:spPr>
-        <p:txBody>
-          <a:bodyPr wrap="square" lIns="0" tIns="0" rIns="0" bIns="0" rtlCol="0" anchor="t">
+            <a:off x="7799832" y="1801368"/>
+            <a:ext cx="3145536" cy="758952"/>
+          </a:xfrm>
+          <a:prstGeom prst="rect">
+            <a:avLst/>
+          </a:prstGeom>
+          <a:noFill/>
+          <a:ln/>
+        </p:spPr>
+        <p:txBody>
+          <a:bodyPr wrap="square" lIns="254" tIns="254" rIns="254" bIns="254" rtlCol="0" anchor="t">
             <a:normAutofit/>
           </a:bodyPr>
           <a:lstStyle/>
@@ -10924,7 +11076,7 @@
               <a:buNone/>
             </a:pPr>
             <a:r>
-              <a:rPr lang="en-US" sz="1550" dirty="0">
+              <a:rPr lang="en-US" sz="1320" dirty="0">
                 <a:solidFill>
                   <a:srgbClr val="17364A"/>
                 </a:solidFill>
@@ -10934,7 +11086,7 @@
               </a:rPr>
               <a:t>Agentic workflow control plan</a:t>
             </a:r>
-            <a:endParaRPr lang="en-US" sz="1550" dirty="0"/>
+            <a:endParaRPr lang="en-US" sz="1320" dirty="0"/>
           </a:p>
         </p:txBody>
       </p:sp>
@@ -11022,13 +11174,16 @@
           <a:ln/>
         </p:spPr>
         <p:txBody>
-          <a:bodyPr wrap="square" lIns="254" tIns="254" rIns="254" bIns="254" rtlCol="0" anchor="t">
+          <a:bodyPr wrap="square" lIns="508" tIns="508" rIns="508" bIns="508" rtlCol="0" anchor="t">
             <a:normAutofit/>
           </a:bodyPr>
           <a:lstStyle/>
           <a:p>
-            <a:r>
-              <a:rPr lang="en-US" sz="1380" dirty="0">
+            <a:pPr indent="0" marL="0">
+              <a:buNone/>
+            </a:pPr>
+            <a:r>
+              <a:rPr lang="en-US" sz="1220" dirty="0">
                 <a:solidFill>
                   <a:srgbClr val="17364A"/>
                 </a:solidFill>
@@ -11038,11 +11193,14 @@
               </a:rPr>
               <a:t>Agentic workflow control plan</a:t>
             </a:r>
-            <a:endParaRPr lang="en-US" sz="1380" dirty="0"/>
-          </a:p>
-          <a:p>
-            <a:r>
-              <a:rPr lang="en-US" sz="1380" dirty="0">
+            <a:endParaRPr lang="en-US" sz="1220" dirty="0"/>
+          </a:p>
+          <a:p>
+            <a:pPr indent="0" marL="0">
+              <a:buNone/>
+            </a:pPr>
+            <a:r>
+              <a:rPr lang="en-US" sz="1220" dirty="0">
                 <a:solidFill>
                   <a:srgbClr val="17364A"/>
                 </a:solidFill>
@@ -11052,11 +11210,14 @@
               </a:rPr>
               <a:t>Allowed/prohibited action list</a:t>
             </a:r>
-            <a:endParaRPr lang="en-US" sz="1380" dirty="0"/>
-          </a:p>
-          <a:p>
-            <a:r>
-              <a:rPr lang="en-US" sz="1380" dirty="0">
+            <a:endParaRPr lang="en-US" sz="1220" dirty="0"/>
+          </a:p>
+          <a:p>
+            <a:pPr indent="0" marL="0">
+              <a:buNone/>
+            </a:pPr>
+            <a:r>
+              <a:rPr lang="en-US" sz="1220" dirty="0">
                 <a:solidFill>
                   <a:srgbClr val="17364A"/>
                 </a:solidFill>
@@ -11066,7 +11227,7 @@
               </a:rPr>
               <a:t>Human approval and escalation map</a:t>
             </a:r>
-            <a:endParaRPr lang="en-US" sz="1380" dirty="0"/>
+            <a:endParaRPr lang="en-US" sz="1220" dirty="0"/>
           </a:p>
         </p:txBody>
       </p:sp>
@@ -11144,17 +11305,17 @@
         </p:nvSpPr>
         <p:spPr>
           <a:xfrm>
-            <a:off x="7799832" y="5001768"/>
-            <a:ext cx="3145536" cy="502920"/>
-          </a:xfrm>
-          <a:prstGeom prst="rect">
-            <a:avLst/>
-          </a:prstGeom>
-          <a:noFill/>
-          <a:ln/>
-        </p:spPr>
-        <p:txBody>
-          <a:bodyPr wrap="square" lIns="0" tIns="0" rIns="0" bIns="0" rtlCol="0" anchor="t">
+            <a:off x="7799832" y="4974336"/>
+            <a:ext cx="3145536" cy="576072"/>
+          </a:xfrm>
+          <a:prstGeom prst="rect">
+            <a:avLst/>
+          </a:prstGeom>
+          <a:noFill/>
+          <a:ln/>
+        </p:spPr>
+        <p:txBody>
+          <a:bodyPr wrap="square" lIns="254" tIns="254" rIns="254" bIns="254" rtlCol="0" anchor="t">
             <a:normAutofit/>
           </a:bodyPr>
           <a:lstStyle/>
@@ -11163,7 +11324,7 @@
               <a:buNone/>
             </a:pPr>
             <a:r>
-              <a:rPr lang="en-US" sz="1550" dirty="0">
+              <a:rPr lang="en-US" sz="1320" dirty="0">
                 <a:solidFill>
                   <a:srgbClr val="17364A"/>
                 </a:solidFill>
@@ -11171,9 +11332,9 @@
                 <a:ea typeface="Aptos" pitchFamily="34" charset="-122"/>
                 <a:cs typeface="Aptos" pitchFamily="34" charset="-120"/>
               </a:rPr>
-              <a:t>Use the assignment to test whether you can explain the concept, apply it to a realistic public health situation, and identify what would need review before the work moves forward.</a:t>
-            </a:r>
-            <a:endParaRPr lang="en-US" sz="1550" dirty="0"/>
+              <a:t>Use the assignment to test whether you can explain the concept, apply it to a realistic public health situation, and.</a:t>
+            </a:r>
+            <a:endParaRPr lang="en-US" sz="1320" dirty="0"/>
           </a:p>
         </p:txBody>
       </p:sp>
@@ -11474,49 +11635,58 @@
           <a:ln/>
         </p:spPr>
         <p:txBody>
-          <a:bodyPr wrap="square" lIns="635" tIns="635" rIns="635" bIns="635" rtlCol="0" anchor="t">
+          <a:bodyPr wrap="square" lIns="1016" tIns="1016" rIns="1016" bIns="1016" rtlCol="0" anchor="t">
             <a:normAutofit/>
           </a:bodyPr>
           <a:lstStyle/>
           <a:p>
+            <a:pPr indent="0" marL="0">
+              <a:buNone/>
+            </a:pPr>
             <a:r>
               <a:rPr lang="en-US" sz="2100" dirty="0">
                 <a:solidFill>
-                  <a:srgbClr val="17364A"/>
-                </a:solidFill>
-                <a:latin typeface="Aptos" pitchFamily="34" charset="0"/>
-                <a:ea typeface="Aptos" pitchFamily="34" charset="-122"/>
-                <a:cs typeface="Aptos" pitchFamily="34" charset="-120"/>
-              </a:rPr>
-              <a:t>1. What makes agentic AI different from simple drafting support?</a:t>
+                  <a:srgbClr val="003A63"/>
+                </a:solidFill>
+                <a:latin typeface="Aptos" pitchFamily="34" charset="0"/>
+                <a:ea typeface="Aptos" pitchFamily="34" charset="-122"/>
+                <a:cs typeface="Aptos" pitchFamily="34" charset="-120"/>
+              </a:rPr>
+              <a:t>• 1. What makes agentic AI different from simple drafting support?</a:t>
             </a:r>
             <a:endParaRPr lang="en-US" sz="2100" dirty="0"/>
           </a:p>
           <a:p>
+            <a:pPr indent="0" marL="0">
+              <a:buNone/>
+            </a:pPr>
             <a:r>
               <a:rPr lang="en-US" sz="2100" dirty="0">
                 <a:solidFill>
-                  <a:srgbClr val="17364A"/>
-                </a:solidFill>
-                <a:latin typeface="Aptos" pitchFamily="34" charset="0"/>
-                <a:ea typeface="Aptos" pitchFamily="34" charset="-122"/>
-                <a:cs typeface="Aptos" pitchFamily="34" charset="-120"/>
-              </a:rPr>
-              <a:t>2. Which action usually requires stronger oversight?</a:t>
+                  <a:srgbClr val="003A63"/>
+                </a:solidFill>
+                <a:latin typeface="Aptos" pitchFamily="34" charset="0"/>
+                <a:ea typeface="Aptos" pitchFamily="34" charset="-122"/>
+                <a:cs typeface="Aptos" pitchFamily="34" charset="-120"/>
+              </a:rPr>
+              <a:t>• 2. Which action usually requires stronger oversight?</a:t>
             </a:r>
             <a:endParaRPr lang="en-US" sz="2100" dirty="0"/>
           </a:p>
           <a:p>
+            <a:pPr indent="0" marL="0">
+              <a:buNone/>
+            </a:pPr>
             <a:r>
               <a:rPr lang="en-US" sz="2100" dirty="0">
                 <a:solidFill>
-                  <a:srgbClr val="17364A"/>
-                </a:solidFill>
-                <a:latin typeface="Aptos" pitchFamily="34" charset="0"/>
-                <a:ea typeface="Aptos" pitchFamily="34" charset="-122"/>
-                <a:cs typeface="Aptos" pitchFamily="34" charset="-120"/>
-              </a:rPr>
-              <a:t>3. What is orchestration?</a:t>
+                  <a:srgbClr val="003A63"/>
+                </a:solidFill>
+                <a:latin typeface="Aptos" pitchFamily="34" charset="0"/>
+                <a:ea typeface="Aptos" pitchFamily="34" charset="-122"/>
+                <a:cs typeface="Aptos" pitchFamily="34" charset="-120"/>
+              </a:rPr>
+              <a:t>• 3. What is orchestration?</a:t>
             </a:r>
             <a:endParaRPr lang="en-US" sz="2100" dirty="0"/>
           </a:p>
@@ -11596,17 +11766,17 @@
         </p:nvSpPr>
         <p:spPr>
           <a:xfrm>
-            <a:off x="7799832" y="1828800"/>
-            <a:ext cx="3145536" cy="685800"/>
-          </a:xfrm>
-          <a:prstGeom prst="rect">
-            <a:avLst/>
-          </a:prstGeom>
-          <a:noFill/>
-          <a:ln/>
-        </p:spPr>
-        <p:txBody>
-          <a:bodyPr wrap="square" lIns="0" tIns="0" rIns="0" bIns="0" rtlCol="0" anchor="t">
+            <a:off x="7799832" y="1801368"/>
+            <a:ext cx="3145536" cy="758952"/>
+          </a:xfrm>
+          <a:prstGeom prst="rect">
+            <a:avLst/>
+          </a:prstGeom>
+          <a:noFill/>
+          <a:ln/>
+        </p:spPr>
+        <p:txBody>
+          <a:bodyPr wrap="square" lIns="254" tIns="254" rIns="254" bIns="254" rtlCol="0" anchor="t">
             <a:normAutofit/>
           </a:bodyPr>
           <a:lstStyle/>
@@ -11615,7 +11785,7 @@
               <a:buNone/>
             </a:pPr>
             <a:r>
-              <a:rPr lang="en-US" sz="1550" dirty="0">
+              <a:rPr lang="en-US" sz="1320" dirty="0">
                 <a:solidFill>
                   <a:srgbClr val="17364A"/>
                 </a:solidFill>
@@ -11625,7 +11795,7 @@
               </a:rPr>
               <a:t>1. What makes agentic AI different from simple drafting support?</a:t>
             </a:r>
-            <a:endParaRPr lang="en-US" sz="1550" dirty="0"/>
+            <a:endParaRPr lang="en-US" sz="1320" dirty="0"/>
           </a:p>
         </p:txBody>
       </p:sp>
@@ -11713,13 +11883,16 @@
           <a:ln/>
         </p:spPr>
         <p:txBody>
-          <a:bodyPr wrap="square" lIns="254" tIns="254" rIns="254" bIns="254" rtlCol="0" anchor="t">
+          <a:bodyPr wrap="square" lIns="508" tIns="508" rIns="508" bIns="508" rtlCol="0" anchor="t">
             <a:normAutofit/>
           </a:bodyPr>
           <a:lstStyle/>
           <a:p>
-            <a:r>
-              <a:rPr lang="en-US" sz="1380" dirty="0">
+            <a:pPr indent="0" marL="0">
+              <a:buNone/>
+            </a:pPr>
+            <a:r>
+              <a:rPr lang="en-US" sz="1220" dirty="0">
                 <a:solidFill>
                   <a:srgbClr val="17364A"/>
                 </a:solidFill>
@@ -11729,11 +11902,14 @@
               </a:rPr>
               <a:t>1.</a:t>
             </a:r>
-            <a:endParaRPr lang="en-US" sz="1380" dirty="0"/>
-          </a:p>
-          <a:p>
-            <a:r>
-              <a:rPr lang="en-US" sz="1380" dirty="0">
+            <a:endParaRPr lang="en-US" sz="1220" dirty="0"/>
+          </a:p>
+          <a:p>
+            <a:pPr indent="0" marL="0">
+              <a:buNone/>
+            </a:pPr>
+            <a:r>
+              <a:rPr lang="en-US" sz="1220" dirty="0">
                 <a:solidFill>
                   <a:srgbClr val="17364A"/>
                 </a:solidFill>
@@ -11743,11 +11919,14 @@
               </a:rPr>
               <a:t>What makes agentic AI different from simple drafting support?</a:t>
             </a:r>
-            <a:endParaRPr lang="en-US" sz="1380" dirty="0"/>
-          </a:p>
-          <a:p>
-            <a:r>
-              <a:rPr lang="en-US" sz="1380" dirty="0">
+            <a:endParaRPr lang="en-US" sz="1220" dirty="0"/>
+          </a:p>
+          <a:p>
+            <a:pPr indent="0" marL="0">
+              <a:buNone/>
+            </a:pPr>
+            <a:r>
+              <a:rPr lang="en-US" sz="1220" dirty="0">
                 <a:solidFill>
                   <a:srgbClr val="17364A"/>
                 </a:solidFill>
@@ -11757,7 +11936,7 @@
               </a:rPr>
               <a:t>2.</a:t>
             </a:r>
-            <a:endParaRPr lang="en-US" sz="1380" dirty="0"/>
+            <a:endParaRPr lang="en-US" sz="1220" dirty="0"/>
           </a:p>
         </p:txBody>
       </p:sp>
@@ -11835,17 +12014,17 @@
         </p:nvSpPr>
         <p:spPr>
           <a:xfrm>
-            <a:off x="7799832" y="5001768"/>
-            <a:ext cx="3145536" cy="502920"/>
-          </a:xfrm>
-          <a:prstGeom prst="rect">
-            <a:avLst/>
-          </a:prstGeom>
-          <a:noFill/>
-          <a:ln/>
-        </p:spPr>
-        <p:txBody>
-          <a:bodyPr wrap="square" lIns="0" tIns="0" rIns="0" bIns="0" rtlCol="0" anchor="t">
+            <a:off x="7799832" y="4974336"/>
+            <a:ext cx="3145536" cy="576072"/>
+          </a:xfrm>
+          <a:prstGeom prst="rect">
+            <a:avLst/>
+          </a:prstGeom>
+          <a:noFill/>
+          <a:ln/>
+        </p:spPr>
+        <p:txBody>
+          <a:bodyPr wrap="square" lIns="254" tIns="254" rIns="254" bIns="254" rtlCol="0" anchor="t">
             <a:normAutofit/>
           </a:bodyPr>
           <a:lstStyle/>
@@ -11854,7 +12033,7 @@
               <a:buNone/>
             </a:pPr>
             <a:r>
-              <a:rPr lang="en-US" sz="1550" dirty="0">
+              <a:rPr lang="en-US" sz="1320" dirty="0">
                 <a:solidFill>
                   <a:srgbClr val="17364A"/>
                 </a:solidFill>
@@ -11862,9 +12041,9 @@
                 <a:ea typeface="Aptos" pitchFamily="34" charset="-122"/>
                 <a:cs typeface="Aptos" pitchFamily="34" charset="-120"/>
               </a:rPr>
-              <a:t>Use the assignment to test whether you can explain the concept, apply it to a realistic public health situation, and identify what would need review before the work moves forward.</a:t>
-            </a:r>
-            <a:endParaRPr lang="en-US" sz="1550" dirty="0"/>
+              <a:t>Use the assignment to test whether you can explain the concept, apply it to a realistic public health situation, and.</a:t>
+            </a:r>
+            <a:endParaRPr lang="en-US" sz="1320" dirty="0"/>
           </a:p>
         </p:txBody>
       </p:sp>
@@ -12165,49 +12344,58 @@
           <a:ln/>
         </p:spPr>
         <p:txBody>
-          <a:bodyPr wrap="square" lIns="635" tIns="635" rIns="635" bIns="635" rtlCol="0" anchor="t">
+          <a:bodyPr wrap="square" lIns="1016" tIns="1016" rIns="1016" bIns="1016" rtlCol="0" anchor="t">
             <a:normAutofit/>
           </a:bodyPr>
           <a:lstStyle/>
           <a:p>
+            <a:pPr indent="0" marL="0">
+              <a:buNone/>
+            </a:pPr>
             <a:r>
               <a:rPr lang="en-US" sz="2100" dirty="0">
                 <a:solidFill>
-                  <a:srgbClr val="17364A"/>
-                </a:solidFill>
-                <a:latin typeface="Aptos" pitchFamily="34" charset="0"/>
-                <a:ea typeface="Aptos" pitchFamily="34" charset="-122"/>
-                <a:cs typeface="Aptos" pitchFamily="34" charset="-120"/>
-              </a:rPr>
-              <a:t>OWASP Top 10 for Large Language Model Applications:.</a:t>
+                  <a:srgbClr val="003A63"/>
+                </a:solidFill>
+                <a:latin typeface="Aptos" pitchFamily="34" charset="0"/>
+                <a:ea typeface="Aptos" pitchFamily="34" charset="-122"/>
+                <a:cs typeface="Aptos" pitchFamily="34" charset="-120"/>
+              </a:rPr>
+              <a:t>• OWASP Top 10 for Large Language Model Applications:.</a:t>
             </a:r>
             <a:endParaRPr lang="en-US" sz="2100" dirty="0"/>
           </a:p>
           <a:p>
+            <a:pPr indent="0" marL="0">
+              <a:buNone/>
+            </a:pPr>
             <a:r>
               <a:rPr lang="en-US" sz="2100" dirty="0">
                 <a:solidFill>
-                  <a:srgbClr val="17364A"/>
-                </a:solidFill>
-                <a:latin typeface="Aptos" pitchFamily="34" charset="0"/>
-                <a:ea typeface="Aptos" pitchFamily="34" charset="-122"/>
-                <a:cs typeface="Aptos" pitchFamily="34" charset="-120"/>
-              </a:rPr>
-              <a:t>NIST AI RMF Generative AI Profile:.</a:t>
+                  <a:srgbClr val="003A63"/>
+                </a:solidFill>
+                <a:latin typeface="Aptos" pitchFamily="34" charset="0"/>
+                <a:ea typeface="Aptos" pitchFamily="34" charset="-122"/>
+                <a:cs typeface="Aptos" pitchFamily="34" charset="-120"/>
+              </a:rPr>
+              <a:t>• NIST AI RMF Generative AI Profile:.</a:t>
             </a:r>
             <a:endParaRPr lang="en-US" sz="2100" dirty="0"/>
           </a:p>
           <a:p>
+            <a:pPr indent="0" marL="0">
+              <a:buNone/>
+            </a:pPr>
             <a:r>
               <a:rPr lang="en-US" sz="2100" dirty="0">
                 <a:solidFill>
-                  <a:srgbClr val="17364A"/>
-                </a:solidFill>
-                <a:latin typeface="Aptos" pitchFamily="34" charset="0"/>
-                <a:ea typeface="Aptos" pitchFamily="34" charset="-122"/>
-                <a:cs typeface="Aptos" pitchFamily="34" charset="-120"/>
-              </a:rPr>
-              <a:t>NIST Artificial Intelligence Risk Management Framework:.</a:t>
+                  <a:srgbClr val="003A63"/>
+                </a:solidFill>
+                <a:latin typeface="Aptos" pitchFamily="34" charset="0"/>
+                <a:ea typeface="Aptos" pitchFamily="34" charset="-122"/>
+                <a:cs typeface="Aptos" pitchFamily="34" charset="-120"/>
+              </a:rPr>
+              <a:t>• NIST Artificial Intelligence Risk Management Framework:.</a:t>
             </a:r>
             <a:endParaRPr lang="en-US" sz="2100" dirty="0"/>
           </a:p>
@@ -12287,17 +12475,17 @@
         </p:nvSpPr>
         <p:spPr>
           <a:xfrm>
-            <a:off x="7799832" y="1828800"/>
-            <a:ext cx="3145536" cy="685800"/>
-          </a:xfrm>
-          <a:prstGeom prst="rect">
-            <a:avLst/>
-          </a:prstGeom>
-          <a:noFill/>
-          <a:ln/>
-        </p:spPr>
-        <p:txBody>
-          <a:bodyPr wrap="square" lIns="0" tIns="0" rIns="0" bIns="0" rtlCol="0" anchor="t">
+            <a:off x="7799832" y="1801368"/>
+            <a:ext cx="3145536" cy="758952"/>
+          </a:xfrm>
+          <a:prstGeom prst="rect">
+            <a:avLst/>
+          </a:prstGeom>
+          <a:noFill/>
+          <a:ln/>
+        </p:spPr>
+        <p:txBody>
+          <a:bodyPr wrap="square" lIns="254" tIns="254" rIns="254" bIns="254" rtlCol="0" anchor="t">
             <a:normAutofit/>
           </a:bodyPr>
           <a:lstStyle/>
@@ -12306,7 +12494,7 @@
               <a:buNone/>
             </a:pPr>
             <a:r>
-              <a:rPr lang="en-US" sz="1550" dirty="0">
+              <a:rPr lang="en-US" sz="1320" dirty="0">
                 <a:solidFill>
                   <a:srgbClr val="17364A"/>
                 </a:solidFill>
@@ -12316,7 +12504,7 @@
               </a:rPr>
               <a:t>OWASP Top 10 for Large Language Model Applications:.</a:t>
             </a:r>
-            <a:endParaRPr lang="en-US" sz="1550" dirty="0"/>
+            <a:endParaRPr lang="en-US" sz="1320" dirty="0"/>
           </a:p>
         </p:txBody>
       </p:sp>
@@ -12404,13 +12592,16 @@
           <a:ln/>
         </p:spPr>
         <p:txBody>
-          <a:bodyPr wrap="square" lIns="254" tIns="254" rIns="254" bIns="254" rtlCol="0" anchor="t">
+          <a:bodyPr wrap="square" lIns="508" tIns="508" rIns="508" bIns="508" rtlCol="0" anchor="t">
             <a:normAutofit/>
           </a:bodyPr>
           <a:lstStyle/>
           <a:p>
-            <a:r>
-              <a:rPr lang="en-US" sz="1380" dirty="0">
+            <a:pPr indent="0" marL="0">
+              <a:buNone/>
+            </a:pPr>
+            <a:r>
+              <a:rPr lang="en-US" sz="1220" dirty="0">
                 <a:solidFill>
                   <a:srgbClr val="17364A"/>
                 </a:solidFill>
@@ -12420,11 +12611,14 @@
               </a:rPr>
               <a:t>NIST Artificial Intelligence Risk Management Framework:.</a:t>
             </a:r>
-            <a:endParaRPr lang="en-US" sz="1380" dirty="0"/>
-          </a:p>
-          <a:p>
-            <a:r>
-              <a:rPr lang="en-US" sz="1380" dirty="0">
+            <a:endParaRPr lang="en-US" sz="1220" dirty="0"/>
+          </a:p>
+          <a:p>
+            <a:pPr indent="0" marL="0">
+              <a:buNone/>
+            </a:pPr>
+            <a:r>
+              <a:rPr lang="en-US" sz="1220" dirty="0">
                 <a:solidFill>
                   <a:srgbClr val="17364A"/>
                 </a:solidFill>
@@ -12434,7 +12628,7 @@
               </a:rPr>
               <a:t>NIST Privacy Framework: https://www.nist.gov/privacy-framework</a:t>
             </a:r>
-            <a:endParaRPr lang="en-US" sz="1380" dirty="0"/>
+            <a:endParaRPr lang="en-US" sz="1220" dirty="0"/>
           </a:p>
         </p:txBody>
       </p:sp>
@@ -12512,17 +12706,17 @@
         </p:nvSpPr>
         <p:spPr>
           <a:xfrm>
-            <a:off x="7799832" y="5001768"/>
-            <a:ext cx="3145536" cy="502920"/>
-          </a:xfrm>
-          <a:prstGeom prst="rect">
-            <a:avLst/>
-          </a:prstGeom>
-          <a:noFill/>
-          <a:ln/>
-        </p:spPr>
-        <p:txBody>
-          <a:bodyPr wrap="square" lIns="0" tIns="0" rIns="0" bIns="0" rtlCol="0" anchor="t">
+            <a:off x="7799832" y="4974336"/>
+            <a:ext cx="3145536" cy="576072"/>
+          </a:xfrm>
+          <a:prstGeom prst="rect">
+            <a:avLst/>
+          </a:prstGeom>
+          <a:noFill/>
+          <a:ln/>
+        </p:spPr>
+        <p:txBody>
+          <a:bodyPr wrap="square" lIns="254" tIns="254" rIns="254" bIns="254" rtlCol="0" anchor="t">
             <a:normAutofit/>
           </a:bodyPr>
           <a:lstStyle/>
@@ -12531,7 +12725,7 @@
               <a:buNone/>
             </a:pPr>
             <a:r>
-              <a:rPr lang="en-US" sz="1550" dirty="0">
+              <a:rPr lang="en-US" sz="1320" dirty="0">
                 <a:solidFill>
                   <a:srgbClr val="17364A"/>
                 </a:solidFill>
@@ -12539,9 +12733,9 @@
                 <a:ea typeface="Aptos" pitchFamily="34" charset="-122"/>
                 <a:cs typeface="Aptos" pitchFamily="34" charset="-120"/>
               </a:rPr>
-              <a:t>Use the concept to clarify workflow changes, dependencies, staffing, procurement requirements, training needs, and implementation checkpoints.</a:t>
-            </a:r>
-            <a:endParaRPr lang="en-US" sz="1550" dirty="0"/>
+              <a:t>Use the concept to clarify workflow changes, dependencies, staffing, procurement requirements, training needs, and.</a:t>
+            </a:r>
+            <a:endParaRPr lang="en-US" sz="1320" dirty="0"/>
           </a:p>
         </p:txBody>
       </p:sp>
@@ -12842,63 +13036,75 @@
           <a:ln/>
         </p:spPr>
         <p:txBody>
-          <a:bodyPr wrap="square" lIns="635" tIns="635" rIns="635" bIns="635" rtlCol="0" anchor="t">
+          <a:bodyPr wrap="square" lIns="1016" tIns="1016" rIns="1016" bIns="1016" rtlCol="0" anchor="t">
             <a:normAutofit/>
           </a:bodyPr>
           <a:lstStyle/>
           <a:p>
+            <a:pPr indent="0" marL="0">
+              <a:buNone/>
+            </a:pPr>
             <a:r>
               <a:rPr lang="en-US" sz="1900" dirty="0">
                 <a:solidFill>
-                  <a:srgbClr val="17364A"/>
-                </a:solidFill>
-                <a:latin typeface="Aptos" pitchFamily="34" charset="0"/>
-                <a:ea typeface="Aptos" pitchFamily="34" charset="-122"/>
-                <a:cs typeface="Aptos" pitchFamily="34" charset="-120"/>
-              </a:rPr>
-              <a:t>Play 11: Build and Deploy AI Solutions - This lesson informs Play 11 by helping learners connect the lesson.</a:t>
+                  <a:srgbClr val="003A63"/>
+                </a:solidFill>
+                <a:latin typeface="Aptos" pitchFamily="34" charset="0"/>
+                <a:ea typeface="Aptos" pitchFamily="34" charset="-122"/>
+                <a:cs typeface="Aptos" pitchFamily="34" charset="-120"/>
+              </a:rPr>
+              <a:t>• Play 11: Build and Deploy AI Solutions - This lesson informs Play 11 by helping learners.</a:t>
             </a:r>
             <a:endParaRPr lang="en-US" sz="1900" dirty="0"/>
           </a:p>
           <a:p>
+            <a:pPr indent="0" marL="0">
+              <a:buNone/>
+            </a:pPr>
             <a:r>
               <a:rPr lang="en-US" sz="1900" dirty="0">
                 <a:solidFill>
-                  <a:srgbClr val="17364A"/>
-                </a:solidFill>
-                <a:latin typeface="Aptos" pitchFamily="34" charset="0"/>
-                <a:ea typeface="Aptos" pitchFamily="34" charset="-122"/>
-                <a:cs typeface="Aptos" pitchFamily="34" charset="-120"/>
-              </a:rPr>
-              <a:t>Play 3: Establish AI Governance - This lesson informs Play 3 by helping learners connect the lesson topic to.</a:t>
+                  <a:srgbClr val="003A63"/>
+                </a:solidFill>
+                <a:latin typeface="Aptos" pitchFamily="34" charset="0"/>
+                <a:ea typeface="Aptos" pitchFamily="34" charset="-122"/>
+                <a:cs typeface="Aptos" pitchFamily="34" charset="-120"/>
+              </a:rPr>
+              <a:t>• Play 3: Establish AI Governance - This lesson informs Play 3 by helping learners connect the.</a:t>
             </a:r>
             <a:endParaRPr lang="en-US" sz="1900" dirty="0"/>
           </a:p>
           <a:p>
+            <a:pPr indent="0" marL="0">
+              <a:buNone/>
+            </a:pPr>
             <a:r>
               <a:rPr lang="en-US" sz="1900" dirty="0">
                 <a:solidFill>
-                  <a:srgbClr val="17364A"/>
-                </a:solidFill>
-                <a:latin typeface="Aptos" pitchFamily="34" charset="0"/>
-                <a:ea typeface="Aptos" pitchFamily="34" charset="-122"/>
-                <a:cs typeface="Aptos" pitchFamily="34" charset="-120"/>
-              </a:rPr>
-              <a:t>Play 12: Execute Governance and Oversight - This lesson informs Play 12 by helping learners connect the.</a:t>
+                  <a:srgbClr val="003A63"/>
+                </a:solidFill>
+                <a:latin typeface="Aptos" pitchFamily="34" charset="0"/>
+                <a:ea typeface="Aptos" pitchFamily="34" charset="-122"/>
+                <a:cs typeface="Aptos" pitchFamily="34" charset="-120"/>
+              </a:rPr>
+              <a:t>• Play 12: Execute Governance and Oversight - This lesson informs Play 12 by helping learners.</a:t>
             </a:r>
             <a:endParaRPr lang="en-US" sz="1900" dirty="0"/>
           </a:p>
           <a:p>
+            <a:pPr indent="0" marL="0">
+              <a:buNone/>
+            </a:pPr>
             <a:r>
               <a:rPr lang="en-US" sz="1900" dirty="0">
                 <a:solidFill>
-                  <a:srgbClr val="17364A"/>
-                </a:solidFill>
-                <a:latin typeface="Aptos" pitchFamily="34" charset="0"/>
-                <a:ea typeface="Aptos" pitchFamily="34" charset="-122"/>
-                <a:cs typeface="Aptos" pitchFamily="34" charset="-120"/>
-              </a:rPr>
-              <a:t>Play 4: Engage Stakeholders - This lesson informs Play 4 by helping learners connect the lesson topic to.</a:t>
+                  <a:srgbClr val="003A63"/>
+                </a:solidFill>
+                <a:latin typeface="Aptos" pitchFamily="34" charset="0"/>
+                <a:ea typeface="Aptos" pitchFamily="34" charset="-122"/>
+                <a:cs typeface="Aptos" pitchFamily="34" charset="-120"/>
+              </a:rPr>
+              <a:t>• Play 4: Engage Stakeholders - This lesson informs Play 4 by helping learners connect the.</a:t>
             </a:r>
             <a:endParaRPr lang="en-US" sz="1900" dirty="0"/>
           </a:p>
@@ -12978,17 +13184,17 @@
         </p:nvSpPr>
         <p:spPr>
           <a:xfrm>
-            <a:off x="8211312" y="1920240"/>
-            <a:ext cx="2734056" cy="1463040"/>
-          </a:xfrm>
-          <a:prstGeom prst="rect">
-            <a:avLst/>
-          </a:prstGeom>
-          <a:noFill/>
-          <a:ln/>
-        </p:spPr>
-        <p:txBody>
-          <a:bodyPr wrap="square" lIns="0" tIns="0" rIns="0" bIns="0" rtlCol="0" anchor="t">
+            <a:off x="8211312" y="1892808"/>
+            <a:ext cx="2734056" cy="1536192"/>
+          </a:xfrm>
+          <a:prstGeom prst="rect">
+            <a:avLst/>
+          </a:prstGeom>
+          <a:noFill/>
+          <a:ln/>
+        </p:spPr>
+        <p:txBody>
+          <a:bodyPr wrap="square" lIns="254" tIns="254" rIns="254" bIns="254" rtlCol="0" anchor="t">
             <a:normAutofit/>
           </a:bodyPr>
           <a:lstStyle/>
@@ -12997,7 +13203,7 @@
               <a:buNone/>
             </a:pPr>
             <a:r>
-              <a:rPr lang="en-US" sz="1550" dirty="0">
+              <a:rPr lang="en-US" sz="1320" dirty="0">
                 <a:solidFill>
                   <a:srgbClr val="17364A"/>
                 </a:solidFill>
@@ -13005,9 +13211,9 @@
                 <a:ea typeface="Aptos" pitchFamily="34" charset="-122"/>
                 <a:cs typeface="Aptos" pitchFamily="34" charset="-120"/>
               </a:rPr>
-              <a:t>Use the related plays to identify decisions, participants, timing, approvals, and documentation needed for responsible implementation.</a:t>
-            </a:r>
-            <a:endParaRPr lang="en-US" sz="1550" dirty="0"/>
+              <a:t>Use the related plays to identify decisions, participants, timing, approvals, and documentation needed for responsible.</a:t>
+            </a:r>
+            <a:endParaRPr lang="en-US" sz="1320" dirty="0"/>
           </a:p>
         </p:txBody>
       </p:sp>
@@ -13095,13 +13301,16 @@
           <a:ln/>
         </p:spPr>
         <p:txBody>
-          <a:bodyPr wrap="square" lIns="254" tIns="254" rIns="254" bIns="254" rtlCol="0" anchor="t">
+          <a:bodyPr wrap="square" lIns="508" tIns="508" rIns="508" bIns="508" rtlCol="0" anchor="t">
             <a:normAutofit/>
           </a:bodyPr>
           <a:lstStyle/>
           <a:p>
-            <a:r>
-              <a:rPr lang="en-US" sz="1380" dirty="0">
+            <a:pPr indent="0" marL="0">
+              <a:buNone/>
+            </a:pPr>
+            <a:r>
+              <a:rPr lang="en-US" sz="1220" dirty="0">
                 <a:solidFill>
                   <a:srgbClr val="17364A"/>
                 </a:solidFill>
@@ -13111,11 +13320,14 @@
               </a:rPr>
               <a:t>Locate the decision point in the playbook sequence.</a:t>
             </a:r>
-            <a:endParaRPr lang="en-US" sz="1380" dirty="0"/>
-          </a:p>
-          <a:p>
-            <a:r>
-              <a:rPr lang="en-US" sz="1380" dirty="0">
+            <a:endParaRPr lang="en-US" sz="1220" dirty="0"/>
+          </a:p>
+          <a:p>
+            <a:pPr indent="0" marL="0">
+              <a:buNone/>
+            </a:pPr>
+            <a:r>
+              <a:rPr lang="en-US" sz="1220" dirty="0">
                 <a:solidFill>
                   <a:srgbClr val="17364A"/>
                 </a:solidFill>
@@ -13125,11 +13337,14 @@
               </a:rPr>
               <a:t>Identify who should participate in the work.</a:t>
             </a:r>
-            <a:endParaRPr lang="en-US" sz="1380" dirty="0"/>
-          </a:p>
-          <a:p>
-            <a:r>
-              <a:rPr lang="en-US" sz="1380" dirty="0">
+            <a:endParaRPr lang="en-US" sz="1220" dirty="0"/>
+          </a:p>
+          <a:p>
+            <a:pPr indent="0" marL="0">
+              <a:buNone/>
+            </a:pPr>
+            <a:r>
+              <a:rPr lang="en-US" sz="1220" dirty="0">
                 <a:solidFill>
                   <a:srgbClr val="17364A"/>
                 </a:solidFill>
@@ -13139,7 +13354,7 @@
               </a:rPr>
               <a:t>Document the review, approval, or implementation step.</a:t>
             </a:r>
-            <a:endParaRPr lang="en-US" sz="1380" dirty="0"/>
+            <a:endParaRPr lang="en-US" sz="1220" dirty="0"/>
           </a:p>
         </p:txBody>
       </p:sp>
@@ -13440,63 +13655,75 @@
           <a:ln/>
         </p:spPr>
         <p:txBody>
-          <a:bodyPr wrap="square" lIns="635" tIns="635" rIns="635" bIns="635" rtlCol="0" anchor="t">
+          <a:bodyPr wrap="square" lIns="1016" tIns="1016" rIns="1016" bIns="1016" rtlCol="0" anchor="t">
             <a:normAutofit/>
           </a:bodyPr>
           <a:lstStyle/>
           <a:p>
+            <a:pPr indent="0" marL="0">
+              <a:buNone/>
+            </a:pPr>
             <a:r>
               <a:rPr lang="en-US" sz="1850" dirty="0">
                 <a:solidFill>
-                  <a:srgbClr val="17364A"/>
-                </a:solidFill>
-                <a:latin typeface="Aptos" pitchFamily="34" charset="0"/>
-                <a:ea typeface="Aptos" pitchFamily="34" charset="-122"/>
-                <a:cs typeface="Aptos" pitchFamily="34" charset="-120"/>
-              </a:rPr>
-              <a:t>Tool 16: Incident Response Checklist (Checklist) - Use Incident Response Checklist to translate this lesson.</a:t>
+                  <a:srgbClr val="003A63"/>
+                </a:solidFill>
+                <a:latin typeface="Aptos" pitchFamily="34" charset="0"/>
+                <a:ea typeface="Aptos" pitchFamily="34" charset="-122"/>
+                <a:cs typeface="Aptos" pitchFamily="34" charset="-120"/>
+              </a:rPr>
+              <a:t>• Tool 16: Incident Response Checklist (Checklist) - Use Incident Response Checklist to.</a:t>
             </a:r>
             <a:endParaRPr lang="en-US" sz="1850" dirty="0"/>
           </a:p>
           <a:p>
+            <a:pPr indent="0" marL="0">
+              <a:buNone/>
+            </a:pPr>
             <a:r>
               <a:rPr lang="en-US" sz="1850" dirty="0">
                 <a:solidFill>
-                  <a:srgbClr val="17364A"/>
-                </a:solidFill>
-                <a:latin typeface="Aptos" pitchFamily="34" charset="0"/>
-                <a:ea typeface="Aptos" pitchFamily="34" charset="-122"/>
-                <a:cs typeface="Aptos" pitchFamily="34" charset="-120"/>
-              </a:rPr>
-              <a:t>Tool 17: Compliance Audit Checklist (Checklist) - Use Compliance Audit Checklist to translate this lesson.</a:t>
+                  <a:srgbClr val="003A63"/>
+                </a:solidFill>
+                <a:latin typeface="Aptos" pitchFamily="34" charset="0"/>
+                <a:ea typeface="Aptos" pitchFamily="34" charset="-122"/>
+                <a:cs typeface="Aptos" pitchFamily="34" charset="-120"/>
+              </a:rPr>
+              <a:t>• Tool 17: Compliance Audit Checklist (Checklist) - Use Compliance Audit Checklist to translate.</a:t>
             </a:r>
             <a:endParaRPr lang="en-US" sz="1850" dirty="0"/>
           </a:p>
           <a:p>
+            <a:pPr indent="0" marL="0">
+              <a:buNone/>
+            </a:pPr>
             <a:r>
               <a:rPr lang="en-US" sz="1850" dirty="0">
                 <a:solidFill>
-                  <a:srgbClr val="17364A"/>
-                </a:solidFill>
-                <a:latin typeface="Aptos" pitchFamily="34" charset="0"/>
-                <a:ea typeface="Aptos" pitchFamily="34" charset="-122"/>
-                <a:cs typeface="Aptos" pitchFamily="34" charset="-120"/>
-              </a:rPr>
-              <a:t>Tool 18: Policy Update &amp; Version Control Log (Log) - Use this tool to complete or strengthen the practical.</a:t>
+                  <a:srgbClr val="003A63"/>
+                </a:solidFill>
+                <a:latin typeface="Aptos" pitchFamily="34" charset="0"/>
+                <a:ea typeface="Aptos" pitchFamily="34" charset="-122"/>
+                <a:cs typeface="Aptos" pitchFamily="34" charset="-120"/>
+              </a:rPr>
+              <a:t>• Tool 18: Policy Update &amp; Version Control Log (Log) - Use this tool to complete or strengthen.</a:t>
             </a:r>
             <a:endParaRPr lang="en-US" sz="1850" dirty="0"/>
           </a:p>
           <a:p>
+            <a:pPr indent="0" marL="0">
+              <a:buNone/>
+            </a:pPr>
             <a:r>
               <a:rPr lang="en-US" sz="1850" dirty="0">
                 <a:solidFill>
-                  <a:srgbClr val="17364A"/>
-                </a:solidFill>
-                <a:latin typeface="Aptos" pitchFamily="34" charset="0"/>
-                <a:ea typeface="Aptos" pitchFamily="34" charset="-122"/>
-                <a:cs typeface="Aptos" pitchFamily="34" charset="-120"/>
-              </a:rPr>
-              <a:t>Tool 19: Plain-Language AI Public Notice Template (Template) - Use Plain-Language AI Public Notice Template.</a:t>
+                  <a:srgbClr val="003A63"/>
+                </a:solidFill>
+                <a:latin typeface="Aptos" pitchFamily="34" charset="0"/>
+                <a:ea typeface="Aptos" pitchFamily="34" charset="-122"/>
+                <a:cs typeface="Aptos" pitchFamily="34" charset="-120"/>
+              </a:rPr>
+              <a:t>• Tool 19: Plain-Language AI Public Notice Template (Template) - Use Plain-Language AI Public.</a:t>
             </a:r>
             <a:endParaRPr lang="en-US" sz="1850" dirty="0"/>
           </a:p>
@@ -13576,17 +13803,17 @@
         </p:nvSpPr>
         <p:spPr>
           <a:xfrm>
-            <a:off x="8211312" y="1920240"/>
-            <a:ext cx="2734056" cy="1463040"/>
-          </a:xfrm>
-          <a:prstGeom prst="rect">
-            <a:avLst/>
-          </a:prstGeom>
-          <a:noFill/>
-          <a:ln/>
-        </p:spPr>
-        <p:txBody>
-          <a:bodyPr wrap="square" lIns="0" tIns="0" rIns="0" bIns="0" rtlCol="0" anchor="t">
+            <a:off x="8211312" y="1892808"/>
+            <a:ext cx="2734056" cy="1536192"/>
+          </a:xfrm>
+          <a:prstGeom prst="rect">
+            <a:avLst/>
+          </a:prstGeom>
+          <a:noFill/>
+          <a:ln/>
+        </p:spPr>
+        <p:txBody>
+          <a:bodyPr wrap="square" lIns="254" tIns="254" rIns="254" bIns="254" rtlCol="0" anchor="t">
             <a:normAutofit/>
           </a:bodyPr>
           <a:lstStyle/>
@@ -13595,7 +13822,7 @@
               <a:buNone/>
             </a:pPr>
             <a:r>
-              <a:rPr lang="en-US" sz="1550" dirty="0">
+              <a:rPr lang="en-US" sz="1320" dirty="0">
                 <a:solidFill>
                   <a:srgbClr val="17364A"/>
                 </a:solidFill>
@@ -13603,9 +13830,9 @@
                 <a:ea typeface="Aptos" pitchFamily="34" charset="-122"/>
                 <a:cs typeface="Aptos" pitchFamily="34" charset="-120"/>
               </a:rPr>
-              <a:t>Use linked tools when your department needs a structured worksheet, template, checklist, review process, or documentation artifact.</a:t>
-            </a:r>
-            <a:endParaRPr lang="en-US" sz="1550" dirty="0"/>
+              <a:t>Use linked tools when your department needs a structured worksheet, template, checklist, review process, or.</a:t>
+            </a:r>
+            <a:endParaRPr lang="en-US" sz="1320" dirty="0"/>
           </a:p>
         </p:txBody>
       </p:sp>
@@ -13693,13 +13920,16 @@
           <a:ln/>
         </p:spPr>
         <p:txBody>
-          <a:bodyPr wrap="square" lIns="254" tIns="254" rIns="254" bIns="254" rtlCol="0" anchor="t">
+          <a:bodyPr wrap="square" lIns="508" tIns="508" rIns="508" bIns="508" rtlCol="0" anchor="t">
             <a:normAutofit/>
           </a:bodyPr>
           <a:lstStyle/>
           <a:p>
-            <a:r>
-              <a:rPr lang="en-US" sz="1380" dirty="0">
+            <a:pPr indent="0" marL="0">
+              <a:buNone/>
+            </a:pPr>
+            <a:r>
+              <a:rPr lang="en-US" sz="1220" dirty="0">
                 <a:solidFill>
                   <a:srgbClr val="17364A"/>
                 </a:solidFill>
@@ -13709,11 +13939,14 @@
               </a:rPr>
               <a:t>Use a tool when no comparable local process exists.</a:t>
             </a:r>
-            <a:endParaRPr lang="en-US" sz="1380" dirty="0"/>
-          </a:p>
-          <a:p>
-            <a:r>
-              <a:rPr lang="en-US" sz="1380" dirty="0">
+            <a:endParaRPr lang="en-US" sz="1220" dirty="0"/>
+          </a:p>
+          <a:p>
+            <a:pPr indent="0" marL="0">
+              <a:buNone/>
+            </a:pPr>
+            <a:r>
+              <a:rPr lang="en-US" sz="1220" dirty="0">
                 <a:solidFill>
                   <a:srgbClr val="17364A"/>
                 </a:solidFill>
@@ -13721,13 +13954,16 @@
                 <a:ea typeface="Aptos" pitchFamily="34" charset="-122"/>
                 <a:cs typeface="Aptos" pitchFamily="34" charset="-120"/>
               </a:rPr>
-              <a:t>Adapt existing department templates when they already fit the purpose.</a:t>
-            </a:r>
-            <a:endParaRPr lang="en-US" sz="1380" dirty="0"/>
-          </a:p>
-          <a:p>
-            <a:r>
-              <a:rPr lang="en-US" sz="1380" dirty="0">
+              <a:t>Adapt existing department templates when they already fit the.</a:t>
+            </a:r>
+            <a:endParaRPr lang="en-US" sz="1220" dirty="0"/>
+          </a:p>
+          <a:p>
+            <a:pPr indent="0" marL="0">
+              <a:buNone/>
+            </a:pPr>
+            <a:r>
+              <a:rPr lang="en-US" sz="1220" dirty="0">
                 <a:solidFill>
                   <a:srgbClr val="17364A"/>
                 </a:solidFill>
@@ -13737,7 +13973,7 @@
               </a:rPr>
               <a:t>Save the completed artifact as evidence of the decision.</a:t>
             </a:r>
-            <a:endParaRPr lang="en-US" sz="1380" dirty="0"/>
+            <a:endParaRPr lang="en-US" sz="1220" dirty="0"/>
           </a:p>
         </p:txBody>
       </p:sp>
@@ -14038,49 +14274,58 @@
           <a:ln/>
         </p:spPr>
         <p:txBody>
-          <a:bodyPr wrap="square" lIns="635" tIns="635" rIns="635" bIns="635" rtlCol="0" anchor="t">
+          <a:bodyPr wrap="square" lIns="1016" tIns="1016" rIns="1016" bIns="1016" rtlCol="0" anchor="t">
             <a:normAutofit/>
           </a:bodyPr>
           <a:lstStyle/>
           <a:p>
+            <a:pPr indent="0" marL="0">
+              <a:buNone/>
+            </a:pPr>
             <a:r>
               <a:rPr lang="en-US" sz="2100" dirty="0">
                 <a:solidFill>
-                  <a:srgbClr val="17364A"/>
-                </a:solidFill>
-                <a:latin typeface="Aptos" pitchFamily="34" charset="0"/>
-                <a:ea typeface="Aptos" pitchFamily="34" charset="-122"/>
-                <a:cs typeface="Aptos" pitchFamily="34" charset="-120"/>
-              </a:rPr>
-              <a:t>Define agentic AI and orchestration in public health terms.</a:t>
+                  <a:srgbClr val="003A63"/>
+                </a:solidFill>
+                <a:latin typeface="Aptos" pitchFamily="34" charset="0"/>
+                <a:ea typeface="Aptos" pitchFamily="34" charset="-122"/>
+                <a:cs typeface="Aptos" pitchFamily="34" charset="-120"/>
+              </a:rPr>
+              <a:t>• Define agentic AI and orchestration in public health terms.</a:t>
             </a:r>
             <a:endParaRPr lang="en-US" sz="2100" dirty="0"/>
           </a:p>
           <a:p>
+            <a:pPr indent="0" marL="0">
+              <a:buNone/>
+            </a:pPr>
             <a:r>
               <a:rPr lang="en-US" sz="2100" dirty="0">
                 <a:solidFill>
-                  <a:srgbClr val="17364A"/>
-                </a:solidFill>
-                <a:latin typeface="Aptos" pitchFamily="34" charset="0"/>
-                <a:ea typeface="Aptos" pitchFamily="34" charset="-122"/>
-                <a:cs typeface="Aptos" pitchFamily="34" charset="-120"/>
-              </a:rPr>
-              <a:t>Distinguish advisory outputs from tool-using or action-taking AI workflows.</a:t>
+                  <a:srgbClr val="003A63"/>
+                </a:solidFill>
+                <a:latin typeface="Aptos" pitchFamily="34" charset="0"/>
+                <a:ea typeface="Aptos" pitchFamily="34" charset="-122"/>
+                <a:cs typeface="Aptos" pitchFamily="34" charset="-120"/>
+              </a:rPr>
+              <a:t>• Distinguish advisory outputs from tool-using or action-taking AI workflows.</a:t>
             </a:r>
             <a:endParaRPr lang="en-US" sz="2100" dirty="0"/>
           </a:p>
           <a:p>
+            <a:pPr indent="0" marL="0">
+              <a:buNone/>
+            </a:pPr>
             <a:r>
               <a:rPr lang="en-US" sz="2100" dirty="0">
                 <a:solidFill>
-                  <a:srgbClr val="17364A"/>
-                </a:solidFill>
-                <a:latin typeface="Aptos" pitchFamily="34" charset="0"/>
-                <a:ea typeface="Aptos" pitchFamily="34" charset="-122"/>
-                <a:cs typeface="Aptos" pitchFamily="34" charset="-120"/>
-              </a:rPr>
-              <a:t>Identify the components of an agentic workflow, including goals, tools, permissions, memory, planning,.</a:t>
+                  <a:srgbClr val="003A63"/>
+                </a:solidFill>
+                <a:latin typeface="Aptos" pitchFamily="34" charset="0"/>
+                <a:ea typeface="Aptos" pitchFamily="34" charset="-122"/>
+                <a:cs typeface="Aptos" pitchFamily="34" charset="-120"/>
+              </a:rPr>
+              <a:t>• Identify the components of an agentic workflow, including goals, tools, permissions, memory,.</a:t>
             </a:r>
             <a:endParaRPr lang="en-US" sz="2100" dirty="0"/>
           </a:p>
@@ -14160,17 +14405,17 @@
         </p:nvSpPr>
         <p:spPr>
           <a:xfrm>
-            <a:off x="7799832" y="1828800"/>
-            <a:ext cx="3145536" cy="685800"/>
-          </a:xfrm>
-          <a:prstGeom prst="rect">
-            <a:avLst/>
-          </a:prstGeom>
-          <a:noFill/>
-          <a:ln/>
-        </p:spPr>
-        <p:txBody>
-          <a:bodyPr wrap="square" lIns="0" tIns="0" rIns="0" bIns="0" rtlCol="0" anchor="t">
+            <a:off x="7799832" y="1801368"/>
+            <a:ext cx="3145536" cy="758952"/>
+          </a:xfrm>
+          <a:prstGeom prst="rect">
+            <a:avLst/>
+          </a:prstGeom>
+          <a:noFill/>
+          <a:ln/>
+        </p:spPr>
+        <p:txBody>
+          <a:bodyPr wrap="square" lIns="254" tIns="254" rIns="254" bIns="254" rtlCol="0" anchor="t">
             <a:normAutofit/>
           </a:bodyPr>
           <a:lstStyle/>
@@ -14179,7 +14424,7 @@
               <a:buNone/>
             </a:pPr>
             <a:r>
-              <a:rPr lang="en-US" sz="1550" dirty="0">
+              <a:rPr lang="en-US" sz="1320" dirty="0">
                 <a:solidFill>
                   <a:srgbClr val="17364A"/>
                 </a:solidFill>
@@ -14189,7 +14434,7 @@
               </a:rPr>
               <a:t>Define agentic AI and orchestration in public health terms.</a:t>
             </a:r>
-            <a:endParaRPr lang="en-US" sz="1550" dirty="0"/>
+            <a:endParaRPr lang="en-US" sz="1320" dirty="0"/>
           </a:p>
         </p:txBody>
       </p:sp>
@@ -14277,13 +14522,16 @@
           <a:ln/>
         </p:spPr>
         <p:txBody>
-          <a:bodyPr wrap="square" lIns="254" tIns="254" rIns="254" bIns="254" rtlCol="0" anchor="t">
+          <a:bodyPr wrap="square" lIns="508" tIns="508" rIns="508" bIns="508" rtlCol="0" anchor="t">
             <a:normAutofit/>
           </a:bodyPr>
           <a:lstStyle/>
           <a:p>
-            <a:r>
-              <a:rPr lang="en-US" sz="1380" dirty="0">
+            <a:pPr indent="0" marL="0">
+              <a:buNone/>
+            </a:pPr>
+            <a:r>
+              <a:rPr lang="en-US" sz="1220" dirty="0">
                 <a:solidFill>
                   <a:srgbClr val="17364A"/>
                 </a:solidFill>
@@ -14291,13 +14539,16 @@
                 <a:ea typeface="Aptos" pitchFamily="34" charset="-122"/>
                 <a:cs typeface="Aptos" pitchFamily="34" charset="-120"/>
               </a:rPr>
-              <a:t>Identify the components of an agentic workflow, including goals, tools, permissions,.</a:t>
-            </a:r>
-            <a:endParaRPr lang="en-US" sz="1380" dirty="0"/>
-          </a:p>
-          <a:p>
-            <a:r>
-              <a:rPr lang="en-US" sz="1380" dirty="0">
+              <a:t>Identify the components of an agentic workflow, including goals,.</a:t>
+            </a:r>
+            <a:endParaRPr lang="en-US" sz="1220" dirty="0"/>
+          </a:p>
+          <a:p>
+            <a:pPr indent="0" marL="0">
+              <a:buNone/>
+            </a:pPr>
+            <a:r>
+              <a:rPr lang="en-US" sz="1220" dirty="0">
                 <a:solidFill>
                   <a:srgbClr val="17364A"/>
                 </a:solidFill>
@@ -14305,13 +14556,16 @@
                 <a:ea typeface="Aptos" pitchFamily="34" charset="-122"/>
                 <a:cs typeface="Aptos" pitchFamily="34" charset="-120"/>
               </a:rPr>
-              <a:t>Assess risks from excessive agency, unauthorized actions, error propagation, prompt.</a:t>
-            </a:r>
-            <a:endParaRPr lang="en-US" sz="1380" dirty="0"/>
-          </a:p>
-          <a:p>
-            <a:r>
-              <a:rPr lang="en-US" sz="1380" dirty="0">
+              <a:t>Assess risks from excessive agency, unauthorized actions, error.</a:t>
+            </a:r>
+            <a:endParaRPr lang="en-US" sz="1220" dirty="0"/>
+          </a:p>
+          <a:p>
+            <a:pPr indent="0" marL="0">
+              <a:buNone/>
+            </a:pPr>
+            <a:r>
+              <a:rPr lang="en-US" sz="1220" dirty="0">
                 <a:solidFill>
                   <a:srgbClr val="17364A"/>
                 </a:solidFill>
@@ -14319,9 +14573,9 @@
                 <a:ea typeface="Aptos" pitchFamily="34" charset="-122"/>
                 <a:cs typeface="Aptos" pitchFamily="34" charset="-120"/>
               </a:rPr>
-              <a:t>Design human-in-the-loop and human-on-the-loop controls for public health workflows.</a:t>
-            </a:r>
-            <a:endParaRPr lang="en-US" sz="1380" dirty="0"/>
+              <a:t>Design human-in-the-loop and human-on-the-loop controls for public.</a:t>
+            </a:r>
+            <a:endParaRPr lang="en-US" sz="1220" dirty="0"/>
           </a:p>
         </p:txBody>
       </p:sp>
@@ -14399,17 +14653,17 @@
         </p:nvSpPr>
         <p:spPr>
           <a:xfrm>
-            <a:off x="7799832" y="5001768"/>
-            <a:ext cx="3145536" cy="502920"/>
-          </a:xfrm>
-          <a:prstGeom prst="rect">
-            <a:avLst/>
-          </a:prstGeom>
-          <a:noFill/>
-          <a:ln/>
-        </p:spPr>
-        <p:txBody>
-          <a:bodyPr wrap="square" lIns="0" tIns="0" rIns="0" bIns="0" rtlCol="0" anchor="t">
+            <a:off x="7799832" y="4974336"/>
+            <a:ext cx="3145536" cy="576072"/>
+          </a:xfrm>
+          <a:prstGeom prst="rect">
+            <a:avLst/>
+          </a:prstGeom>
+          <a:noFill/>
+          <a:ln/>
+        </p:spPr>
+        <p:txBody>
+          <a:bodyPr wrap="square" lIns="254" tIns="254" rIns="254" bIns="254" rtlCol="0" anchor="t">
             <a:normAutofit/>
           </a:bodyPr>
           <a:lstStyle/>
@@ -14418,7 +14672,7 @@
               <a:buNone/>
             </a:pPr>
             <a:r>
-              <a:rPr lang="en-US" sz="1550" dirty="0">
+              <a:rPr lang="en-US" sz="1320" dirty="0">
                 <a:solidFill>
                   <a:srgbClr val="17364A"/>
                 </a:solidFill>
@@ -14426,9 +14680,9 @@
                 <a:ea typeface="Aptos" pitchFamily="34" charset="-122"/>
                 <a:cs typeface="Aptos" pitchFamily="34" charset="-120"/>
               </a:rPr>
-              <a:t>Use the assignment to test whether you can explain the concept, apply it to a realistic public health situation, and identify what would need review before the work moves forward.</a:t>
-            </a:r>
-            <a:endParaRPr lang="en-US" sz="1550" dirty="0"/>
+              <a:t>Use the assignment to test whether you can explain the concept, apply it to a realistic public health situation, and.</a:t>
+            </a:r>
+            <a:endParaRPr lang="en-US" sz="1320" dirty="0"/>
           </a:p>
         </p:txBody>
       </p:sp>
@@ -14729,21 +14983,24 @@
           <a:ln/>
         </p:spPr>
         <p:txBody>
-          <a:bodyPr wrap="square" lIns="635" tIns="635" rIns="635" bIns="635" rtlCol="0" anchor="t">
+          <a:bodyPr wrap="square" lIns="1016" tIns="1016" rIns="1016" bIns="1016" rtlCol="0" anchor="t">
             <a:normAutofit/>
           </a:bodyPr>
           <a:lstStyle/>
           <a:p>
+            <a:pPr indent="0" marL="0">
+              <a:buNone/>
+            </a:pPr>
             <a:r>
               <a:rPr lang="en-US" sz="2100" dirty="0">
                 <a:solidFill>
-                  <a:srgbClr val="17364A"/>
-                </a:solidFill>
-                <a:latin typeface="Aptos" pitchFamily="34" charset="0"/>
-                <a:ea typeface="Aptos" pitchFamily="34" charset="-122"/>
-                <a:cs typeface="Aptos" pitchFamily="34" charset="-120"/>
-              </a:rPr>
-              <a:t>Produce an agentic workflow control plan.</a:t>
+                  <a:srgbClr val="003A63"/>
+                </a:solidFill>
+                <a:latin typeface="Aptos" pitchFamily="34" charset="0"/>
+                <a:ea typeface="Aptos" pitchFamily="34" charset="-122"/>
+                <a:cs typeface="Aptos" pitchFamily="34" charset="-120"/>
+              </a:rPr>
+              <a:t>• Produce an agentic workflow control plan.</a:t>
             </a:r>
             <a:endParaRPr lang="en-US" sz="2100" dirty="0"/>
           </a:p>
@@ -14823,17 +15080,17 @@
         </p:nvSpPr>
         <p:spPr>
           <a:xfrm>
-            <a:off x="7799832" y="1828800"/>
-            <a:ext cx="3145536" cy="685800"/>
-          </a:xfrm>
-          <a:prstGeom prst="rect">
-            <a:avLst/>
-          </a:prstGeom>
-          <a:noFill/>
-          <a:ln/>
-        </p:spPr>
-        <p:txBody>
-          <a:bodyPr wrap="square" lIns="0" tIns="0" rIns="0" bIns="0" rtlCol="0" anchor="t">
+            <a:off x="7799832" y="1801368"/>
+            <a:ext cx="3145536" cy="758952"/>
+          </a:xfrm>
+          <a:prstGeom prst="rect">
+            <a:avLst/>
+          </a:prstGeom>
+          <a:noFill/>
+          <a:ln/>
+        </p:spPr>
+        <p:txBody>
+          <a:bodyPr wrap="square" lIns="254" tIns="254" rIns="254" bIns="254" rtlCol="0" anchor="t">
             <a:normAutofit/>
           </a:bodyPr>
           <a:lstStyle/>
@@ -14842,7 +15099,7 @@
               <a:buNone/>
             </a:pPr>
             <a:r>
-              <a:rPr lang="en-US" sz="1550" dirty="0">
+              <a:rPr lang="en-US" sz="1320" dirty="0">
                 <a:solidFill>
                   <a:srgbClr val="17364A"/>
                 </a:solidFill>
@@ -14852,7 +15109,7 @@
               </a:rPr>
               <a:t>Produce an agentic workflow control plan.</a:t>
             </a:r>
-            <a:endParaRPr lang="en-US" sz="1550" dirty="0"/>
+            <a:endParaRPr lang="en-US" sz="1320" dirty="0"/>
           </a:p>
         </p:txBody>
       </p:sp>
@@ -14940,13 +15197,16 @@
           <a:ln/>
         </p:spPr>
         <p:txBody>
-          <a:bodyPr wrap="square" lIns="254" tIns="254" rIns="254" bIns="254" rtlCol="0" anchor="t">
+          <a:bodyPr wrap="square" lIns="508" tIns="508" rIns="508" bIns="508" rtlCol="0" anchor="t">
             <a:normAutofit/>
           </a:bodyPr>
           <a:lstStyle/>
           <a:p>
-            <a:r>
-              <a:rPr lang="en-US" sz="1380" dirty="0">
+            <a:pPr indent="0" marL="0">
+              <a:buNone/>
+            </a:pPr>
+            <a:r>
+              <a:rPr lang="en-US" sz="1220" dirty="0">
                 <a:solidFill>
                   <a:srgbClr val="17364A"/>
                 </a:solidFill>
@@ -14956,7 +15216,7 @@
               </a:rPr>
               <a:t>Produce an agentic workflow control plan.</a:t>
             </a:r>
-            <a:endParaRPr lang="en-US" sz="1380" dirty="0"/>
+            <a:endParaRPr lang="en-US" sz="1220" dirty="0"/>
           </a:p>
         </p:txBody>
       </p:sp>
@@ -15034,17 +15294,17 @@
         </p:nvSpPr>
         <p:spPr>
           <a:xfrm>
-            <a:off x="7799832" y="5001768"/>
-            <a:ext cx="3145536" cy="502920"/>
-          </a:xfrm>
-          <a:prstGeom prst="rect">
-            <a:avLst/>
-          </a:prstGeom>
-          <a:noFill/>
-          <a:ln/>
-        </p:spPr>
-        <p:txBody>
-          <a:bodyPr wrap="square" lIns="0" tIns="0" rIns="0" bIns="0" rtlCol="0" anchor="t">
+            <a:off x="7799832" y="4974336"/>
+            <a:ext cx="3145536" cy="576072"/>
+          </a:xfrm>
+          <a:prstGeom prst="rect">
+            <a:avLst/>
+          </a:prstGeom>
+          <a:noFill/>
+          <a:ln/>
+        </p:spPr>
+        <p:txBody>
+          <a:bodyPr wrap="square" lIns="254" tIns="254" rIns="254" bIns="254" rtlCol="0" anchor="t">
             <a:normAutofit/>
           </a:bodyPr>
           <a:lstStyle/>
@@ -15053,7 +15313,7 @@
               <a:buNone/>
             </a:pPr>
             <a:r>
-              <a:rPr lang="en-US" sz="1550" dirty="0">
+              <a:rPr lang="en-US" sz="1320" dirty="0">
                 <a:solidFill>
                   <a:srgbClr val="17364A"/>
                 </a:solidFill>
@@ -15061,9 +15321,9 @@
                 <a:ea typeface="Aptos" pitchFamily="34" charset="-122"/>
                 <a:cs typeface="Aptos" pitchFamily="34" charset="-120"/>
               </a:rPr>
-              <a:t>Use the assignment to test whether you can explain the concept, apply it to a realistic public health situation, and identify what would need review before the work moves forward.</a:t>
-            </a:r>
-            <a:endParaRPr lang="en-US" sz="1550" dirty="0"/>
+              <a:t>Use the assignment to test whether you can explain the concept, apply it to a realistic public health situation, and.</a:t>
+            </a:r>
+            <a:endParaRPr lang="en-US" sz="1320" dirty="0"/>
           </a:p>
         </p:txBody>
       </p:sp>
@@ -15364,49 +15624,58 @@
           <a:ln/>
         </p:spPr>
         <p:txBody>
-          <a:bodyPr wrap="square" lIns="635" tIns="635" rIns="635" bIns="635" rtlCol="0" anchor="t">
+          <a:bodyPr wrap="square" lIns="1016" tIns="1016" rIns="1016" bIns="1016" rtlCol="0" anchor="t">
             <a:normAutofit/>
           </a:bodyPr>
           <a:lstStyle/>
           <a:p>
+            <a:pPr indent="0" marL="0">
+              <a:buNone/>
+            </a:pPr>
             <a:r>
               <a:rPr lang="en-US" sz="2100" dirty="0">
                 <a:solidFill>
-                  <a:srgbClr val="17364A"/>
-                </a:solidFill>
-                <a:latin typeface="Aptos" pitchFamily="34" charset="0"/>
-                <a:ea typeface="Aptos" pitchFamily="34" charset="-122"/>
-                <a:cs typeface="Aptos" pitchFamily="34" charset="-120"/>
-              </a:rPr>
-              <a:t>Agentic AI refers to AI systems configured to pursue a goal through multiple steps, often by using.</a:t>
+                  <a:srgbClr val="003A63"/>
+                </a:solidFill>
+                <a:latin typeface="Aptos" pitchFamily="34" charset="0"/>
+                <a:ea typeface="Aptos" pitchFamily="34" charset="-122"/>
+                <a:cs typeface="Aptos" pitchFamily="34" charset="-120"/>
+              </a:rPr>
+              <a:t>• Agentic AI refers to AI systems configured to pursue a goal through multiple steps, often by.</a:t>
             </a:r>
             <a:endParaRPr lang="en-US" sz="2100" dirty="0"/>
           </a:p>
           <a:p>
+            <a:pPr indent="0" marL="0">
+              <a:buNone/>
+            </a:pPr>
             <a:r>
               <a:rPr lang="en-US" sz="2100" dirty="0">
                 <a:solidFill>
-                  <a:srgbClr val="17364A"/>
-                </a:solidFill>
-                <a:latin typeface="Aptos" pitchFamily="34" charset="0"/>
-                <a:ea typeface="Aptos" pitchFamily="34" charset="-122"/>
-                <a:cs typeface="Aptos" pitchFamily="34" charset="-120"/>
-              </a:rPr>
-              <a:t>In public health, agentic workflows may eventually support intake triage, document routing,.</a:t>
+                  <a:srgbClr val="003A63"/>
+                </a:solidFill>
+                <a:latin typeface="Aptos" pitchFamily="34" charset="0"/>
+                <a:ea typeface="Aptos" pitchFamily="34" charset="-122"/>
+                <a:cs typeface="Aptos" pitchFamily="34" charset="-120"/>
+              </a:rPr>
+              <a:t>• In public health, agentic workflows may eventually support intake triage, document routing,.</a:t>
             </a:r>
             <a:endParaRPr lang="en-US" sz="2100" dirty="0"/>
           </a:p>
           <a:p>
+            <a:pPr indent="0" marL="0">
+              <a:buNone/>
+            </a:pPr>
             <a:r>
               <a:rPr lang="en-US" sz="2100" dirty="0">
                 <a:solidFill>
-                  <a:srgbClr val="17364A"/>
-                </a:solidFill>
-                <a:latin typeface="Aptos" pitchFamily="34" charset="0"/>
-                <a:ea typeface="Aptos" pitchFamily="34" charset="-122"/>
-                <a:cs typeface="Aptos" pitchFamily="34" charset="-120"/>
-              </a:rPr>
-              <a:t>These uses require stronger controls than simple drafting or summarization.</a:t>
+                  <a:srgbClr val="003A63"/>
+                </a:solidFill>
+                <a:latin typeface="Aptos" pitchFamily="34" charset="0"/>
+                <a:ea typeface="Aptos" pitchFamily="34" charset="-122"/>
+                <a:cs typeface="Aptos" pitchFamily="34" charset="-120"/>
+              </a:rPr>
+              <a:t>• These uses require stronger controls than simple drafting or summarization.</a:t>
             </a:r>
             <a:endParaRPr lang="en-US" sz="2100" dirty="0"/>
           </a:p>
@@ -15486,17 +15755,17 @@
         </p:nvSpPr>
         <p:spPr>
           <a:xfrm>
-            <a:off x="7799832" y="1828800"/>
-            <a:ext cx="3145536" cy="685800"/>
-          </a:xfrm>
-          <a:prstGeom prst="rect">
-            <a:avLst/>
-          </a:prstGeom>
-          <a:noFill/>
-          <a:ln/>
-        </p:spPr>
-        <p:txBody>
-          <a:bodyPr wrap="square" lIns="0" tIns="0" rIns="0" bIns="0" rtlCol="0" anchor="t">
+            <a:off x="7799832" y="1801368"/>
+            <a:ext cx="3145536" cy="758952"/>
+          </a:xfrm>
+          <a:prstGeom prst="rect">
+            <a:avLst/>
+          </a:prstGeom>
+          <a:noFill/>
+          <a:ln/>
+        </p:spPr>
+        <p:txBody>
+          <a:bodyPr wrap="square" lIns="254" tIns="254" rIns="254" bIns="254" rtlCol="0" anchor="t">
             <a:normAutofit/>
           </a:bodyPr>
           <a:lstStyle/>
@@ -15505,7 +15774,7 @@
               <a:buNone/>
             </a:pPr>
             <a:r>
-              <a:rPr lang="en-US" sz="1550" dirty="0">
+              <a:rPr lang="en-US" sz="1320" dirty="0">
                 <a:solidFill>
                   <a:srgbClr val="17364A"/>
                 </a:solidFill>
@@ -15515,7 +15784,7 @@
               </a:rPr>
               <a:t>Agentic AI refers to AI systems configured to pursue a goal through multiple steps, often by using.</a:t>
             </a:r>
-            <a:endParaRPr lang="en-US" sz="1550" dirty="0"/>
+            <a:endParaRPr lang="en-US" sz="1320" dirty="0"/>
           </a:p>
         </p:txBody>
       </p:sp>
@@ -15603,13 +15872,16 @@
           <a:ln/>
         </p:spPr>
         <p:txBody>
-          <a:bodyPr wrap="square" lIns="254" tIns="254" rIns="254" bIns="254" rtlCol="0" anchor="t">
+          <a:bodyPr wrap="square" lIns="508" tIns="508" rIns="508" bIns="508" rtlCol="0" anchor="t">
             <a:normAutofit/>
           </a:bodyPr>
           <a:lstStyle/>
           <a:p>
-            <a:r>
-              <a:rPr lang="en-US" sz="1380" dirty="0">
+            <a:pPr indent="0" marL="0">
+              <a:buNone/>
+            </a:pPr>
+            <a:r>
+              <a:rPr lang="en-US" sz="1220" dirty="0">
                 <a:solidFill>
                   <a:srgbClr val="17364A"/>
                 </a:solidFill>
@@ -15617,13 +15889,16 @@
                 <a:ea typeface="Aptos" pitchFamily="34" charset="-122"/>
                 <a:cs typeface="Aptos" pitchFamily="34" charset="-120"/>
               </a:rPr>
-              <a:t>Agentic AI refers to AI systems configured to pursue a goal through multiple steps, often.</a:t>
-            </a:r>
-            <a:endParaRPr lang="en-US" sz="1380" dirty="0"/>
-          </a:p>
-          <a:p>
-            <a:r>
-              <a:rPr lang="en-US" sz="1380" dirty="0">
+              <a:t>Agentic AI refers to AI systems configured to pursue a goal.</a:t>
+            </a:r>
+            <a:endParaRPr lang="en-US" sz="1220" dirty="0"/>
+          </a:p>
+          <a:p>
+            <a:pPr indent="0" marL="0">
+              <a:buNone/>
+            </a:pPr>
+            <a:r>
+              <a:rPr lang="en-US" sz="1220" dirty="0">
                 <a:solidFill>
                   <a:srgbClr val="17364A"/>
                 </a:solidFill>
@@ -15631,13 +15906,16 @@
                 <a:ea typeface="Aptos" pitchFamily="34" charset="-122"/>
                 <a:cs typeface="Aptos" pitchFamily="34" charset="-120"/>
               </a:rPr>
-              <a:t>In public health, agentic workflows may eventually support intake triage, document.</a:t>
-            </a:r>
-            <a:endParaRPr lang="en-US" sz="1380" dirty="0"/>
-          </a:p>
-          <a:p>
-            <a:r>
-              <a:rPr lang="en-US" sz="1380" dirty="0">
+              <a:t>In public health, agentic workflows may eventually support intake.</a:t>
+            </a:r>
+            <a:endParaRPr lang="en-US" sz="1220" dirty="0"/>
+          </a:p>
+          <a:p>
+            <a:pPr indent="0" marL="0">
+              <a:buNone/>
+            </a:pPr>
+            <a:r>
+              <a:rPr lang="en-US" sz="1220" dirty="0">
                 <a:solidFill>
                   <a:srgbClr val="17364A"/>
                 </a:solidFill>
@@ -15645,9 +15923,9 @@
                 <a:ea typeface="Aptos" pitchFamily="34" charset="-122"/>
                 <a:cs typeface="Aptos" pitchFamily="34" charset="-120"/>
               </a:rPr>
-              <a:t>This module teaches learners how to design agentic workflows with clear boundaries.</a:t>
-            </a:r>
-            <a:endParaRPr lang="en-US" sz="1380" dirty="0"/>
+              <a:t>This module teaches learners how to design agentic workflows with.</a:t>
+            </a:r>
+            <a:endParaRPr lang="en-US" sz="1220" dirty="0"/>
           </a:p>
         </p:txBody>
       </p:sp>
@@ -15725,17 +16003,17 @@
         </p:nvSpPr>
         <p:spPr>
           <a:xfrm>
-            <a:off x="7799832" y="5001768"/>
-            <a:ext cx="3145536" cy="502920"/>
-          </a:xfrm>
-          <a:prstGeom prst="rect">
-            <a:avLst/>
-          </a:prstGeom>
-          <a:noFill/>
-          <a:ln/>
-        </p:spPr>
-        <p:txBody>
-          <a:bodyPr wrap="square" lIns="0" tIns="0" rIns="0" bIns="0" rtlCol="0" anchor="t">
+            <a:off x="7799832" y="4974336"/>
+            <a:ext cx="3145536" cy="576072"/>
+          </a:xfrm>
+          <a:prstGeom prst="rect">
+            <a:avLst/>
+          </a:prstGeom>
+          <a:noFill/>
+          <a:ln/>
+        </p:spPr>
+        <p:txBody>
+          <a:bodyPr wrap="square" lIns="254" tIns="254" rIns="254" bIns="254" rtlCol="0" anchor="t">
             <a:normAutofit/>
           </a:bodyPr>
           <a:lstStyle/>
@@ -15744,7 +16022,7 @@
               <a:buNone/>
             </a:pPr>
             <a:r>
-              <a:rPr lang="en-US" sz="1550" dirty="0">
+              <a:rPr lang="en-US" sz="1320" dirty="0">
                 <a:solidFill>
                   <a:srgbClr val="17364A"/>
                 </a:solidFill>
@@ -15752,9 +16030,9 @@
                 <a:ea typeface="Aptos" pitchFamily="34" charset="-122"/>
                 <a:cs typeface="Aptos" pitchFamily="34" charset="-120"/>
               </a:rPr>
-              <a:t>Use the concept to clarify workflow changes, dependencies, staffing, procurement requirements, training needs, and implementation checkpoints.</a:t>
-            </a:r>
-            <a:endParaRPr lang="en-US" sz="1550" dirty="0"/>
+              <a:t>Use the concept to clarify workflow changes, dependencies, staffing, procurement requirements, training needs, and.</a:t>
+            </a:r>
+            <a:endParaRPr lang="en-US" sz="1320" dirty="0"/>
           </a:p>
         </p:txBody>
       </p:sp>
@@ -16055,49 +16333,58 @@
           <a:ln/>
         </p:spPr>
         <p:txBody>
-          <a:bodyPr wrap="square" lIns="635" tIns="635" rIns="635" bIns="635" rtlCol="0" anchor="t">
+          <a:bodyPr wrap="square" lIns="1016" tIns="1016" rIns="1016" bIns="1016" rtlCol="0" anchor="t">
             <a:normAutofit/>
           </a:bodyPr>
           <a:lstStyle/>
           <a:p>
+            <a:pPr indent="0" marL="0">
+              <a:buNone/>
+            </a:pPr>
             <a:r>
               <a:rPr lang="en-US" sz="2100" dirty="0">
                 <a:solidFill>
-                  <a:srgbClr val="17364A"/>
-                </a:solidFill>
-                <a:latin typeface="Aptos" pitchFamily="34" charset="0"/>
-                <a:ea typeface="Aptos" pitchFamily="34" charset="-122"/>
-                <a:cs typeface="Aptos" pitchFamily="34" charset="-120"/>
-              </a:rPr>
-              <a:t>Agentic AI matters because it shifts AI from generating outputs to participating in workflows.</a:t>
+                  <a:srgbClr val="003A63"/>
+                </a:solidFill>
+                <a:latin typeface="Aptos" pitchFamily="34" charset="0"/>
+                <a:ea typeface="Aptos" pitchFamily="34" charset="-122"/>
+                <a:cs typeface="Aptos" pitchFamily="34" charset="-120"/>
+              </a:rPr>
+              <a:t>• Agentic AI matters because it shifts AI from generating outputs to participating in workflows.</a:t>
             </a:r>
             <a:endParaRPr lang="en-US" sz="2100" dirty="0"/>
           </a:p>
           <a:p>
+            <a:pPr indent="0" marL="0">
+              <a:buNone/>
+            </a:pPr>
             <a:r>
               <a:rPr lang="en-US" sz="2100" dirty="0">
                 <a:solidFill>
-                  <a:srgbClr val="17364A"/>
-                </a:solidFill>
-                <a:latin typeface="Aptos" pitchFamily="34" charset="0"/>
-                <a:ea typeface="Aptos" pitchFamily="34" charset="-122"/>
-                <a:cs typeface="Aptos" pitchFamily="34" charset="-120"/>
-              </a:rPr>
-              <a:t>A chatbot that drafts a message is one level of risk.</a:t>
+                  <a:srgbClr val="003A63"/>
+                </a:solidFill>
+                <a:latin typeface="Aptos" pitchFamily="34" charset="0"/>
+                <a:ea typeface="Aptos" pitchFamily="34" charset="-122"/>
+                <a:cs typeface="Aptos" pitchFamily="34" charset="-120"/>
+              </a:rPr>
+              <a:t>• A chatbot that drafts a message is one level of risk.</a:t>
             </a:r>
             <a:endParaRPr lang="en-US" sz="2100" dirty="0"/>
           </a:p>
           <a:p>
+            <a:pPr indent="0" marL="0">
+              <a:buNone/>
+            </a:pPr>
             <a:r>
               <a:rPr lang="en-US" sz="2100" dirty="0">
                 <a:solidFill>
-                  <a:srgbClr val="17364A"/>
-                </a:solidFill>
-                <a:latin typeface="Aptos" pitchFamily="34" charset="0"/>
-                <a:ea typeface="Aptos" pitchFamily="34" charset="-122"/>
-                <a:cs typeface="Aptos" pitchFamily="34" charset="-120"/>
-              </a:rPr>
-              <a:t>An agent that sends the message, updates a case record, creates a task, or notifies a partner is a.</a:t>
+                  <a:srgbClr val="003A63"/>
+                </a:solidFill>
+                <a:latin typeface="Aptos" pitchFamily="34" charset="0"/>
+                <a:ea typeface="Aptos" pitchFamily="34" charset="-122"/>
+                <a:cs typeface="Aptos" pitchFamily="34" charset="-120"/>
+              </a:rPr>
+              <a:t>• An agent that sends the message, updates a case record, creates a task, or notifies a partner.</a:t>
             </a:r>
             <a:endParaRPr lang="en-US" sz="2100" dirty="0"/>
           </a:p>
@@ -16177,17 +16464,17 @@
         </p:nvSpPr>
         <p:spPr>
           <a:xfrm>
-            <a:off x="7799832" y="1828800"/>
-            <a:ext cx="3145536" cy="685800"/>
-          </a:xfrm>
-          <a:prstGeom prst="rect">
-            <a:avLst/>
-          </a:prstGeom>
-          <a:noFill/>
-          <a:ln/>
-        </p:spPr>
-        <p:txBody>
-          <a:bodyPr wrap="square" lIns="0" tIns="0" rIns="0" bIns="0" rtlCol="0" anchor="t">
+            <a:off x="7799832" y="1801368"/>
+            <a:ext cx="3145536" cy="758952"/>
+          </a:xfrm>
+          <a:prstGeom prst="rect">
+            <a:avLst/>
+          </a:prstGeom>
+          <a:noFill/>
+          <a:ln/>
+        </p:spPr>
+        <p:txBody>
+          <a:bodyPr wrap="square" lIns="254" tIns="254" rIns="254" bIns="254" rtlCol="0" anchor="t">
             <a:normAutofit/>
           </a:bodyPr>
           <a:lstStyle/>
@@ -16196,7 +16483,7 @@
               <a:buNone/>
             </a:pPr>
             <a:r>
-              <a:rPr lang="en-US" sz="1550" dirty="0">
+              <a:rPr lang="en-US" sz="1320" dirty="0">
                 <a:solidFill>
                   <a:srgbClr val="17364A"/>
                 </a:solidFill>
@@ -16206,7 +16493,7 @@
               </a:rPr>
               <a:t>Agentic AI matters because it shifts AI from generating outputs to participating in workflows.</a:t>
             </a:r>
-            <a:endParaRPr lang="en-US" sz="1550" dirty="0"/>
+            <a:endParaRPr lang="en-US" sz="1320" dirty="0"/>
           </a:p>
         </p:txBody>
       </p:sp>
@@ -16294,13 +16581,16 @@
           <a:ln/>
         </p:spPr>
         <p:txBody>
-          <a:bodyPr wrap="square" lIns="254" tIns="254" rIns="254" bIns="254" rtlCol="0" anchor="t">
+          <a:bodyPr wrap="square" lIns="508" tIns="508" rIns="508" bIns="508" rtlCol="0" anchor="t">
             <a:normAutofit/>
           </a:bodyPr>
           <a:lstStyle/>
           <a:p>
-            <a:r>
-              <a:rPr lang="en-US" sz="1380" dirty="0">
+            <a:pPr indent="0" marL="0">
+              <a:buNone/>
+            </a:pPr>
+            <a:r>
+              <a:rPr lang="en-US" sz="1220" dirty="0">
                 <a:solidFill>
                   <a:srgbClr val="17364A"/>
                 </a:solidFill>
@@ -16308,13 +16598,16 @@
                 <a:ea typeface="Aptos" pitchFamily="34" charset="-122"/>
                 <a:cs typeface="Aptos" pitchFamily="34" charset="-120"/>
               </a:rPr>
-              <a:t>An agent that sends the message, updates a case record, creates a task, or notifies a.</a:t>
-            </a:r>
-            <a:endParaRPr lang="en-US" sz="1380" dirty="0"/>
-          </a:p>
-          <a:p>
-            <a:r>
-              <a:rPr lang="en-US" sz="1380" dirty="0">
+              <a:t>An agent that sends the message, updates a case record, creates a.</a:t>
+            </a:r>
+            <a:endParaRPr lang="en-US" sz="1220" dirty="0"/>
+          </a:p>
+          <a:p>
+            <a:pPr indent="0" marL="0">
+              <a:buNone/>
+            </a:pPr>
+            <a:r>
+              <a:rPr lang="en-US" sz="1220" dirty="0">
                 <a:solidFill>
                   <a:srgbClr val="17364A"/>
                 </a:solidFill>
@@ -16322,13 +16615,16 @@
                 <a:ea typeface="Aptos" pitchFamily="34" charset="-122"/>
                 <a:cs typeface="Aptos" pitchFamily="34" charset="-120"/>
               </a:rPr>
-              <a:t>Action-taking systems require explicit governance because errors can propagate quickly.</a:t>
-            </a:r>
-            <a:endParaRPr lang="en-US" sz="1380" dirty="0"/>
-          </a:p>
-          <a:p>
-            <a:r>
-              <a:rPr lang="en-US" sz="1380" dirty="0">
+              <a:t>Action-taking systems require explicit governance because errors.</a:t>
+            </a:r>
+            <a:endParaRPr lang="en-US" sz="1220" dirty="0"/>
+          </a:p>
+          <a:p>
+            <a:pPr indent="0" marL="0">
+              <a:buNone/>
+            </a:pPr>
+            <a:r>
+              <a:rPr lang="en-US" sz="1220" dirty="0">
                 <a:solidFill>
                   <a:srgbClr val="17364A"/>
                 </a:solidFill>
@@ -16336,9 +16632,9 @@
                 <a:ea typeface="Aptos" pitchFamily="34" charset="-122"/>
                 <a:cs typeface="Aptos" pitchFamily="34" charset="-120"/>
               </a:rPr>
-              <a:t>Public health workflows often involve legal authority, sensitive data, vulnerable.</a:t>
-            </a:r>
-            <a:endParaRPr lang="en-US" sz="1380" dirty="0"/>
+              <a:t>Public health workflows often involve legal authority, sensitive.</a:t>
+            </a:r>
+            <a:endParaRPr lang="en-US" sz="1220" dirty="0"/>
           </a:p>
         </p:txBody>
       </p:sp>
@@ -16416,17 +16712,17 @@
         </p:nvSpPr>
         <p:spPr>
           <a:xfrm>
-            <a:off x="7799832" y="5001768"/>
-            <a:ext cx="3145536" cy="502920"/>
-          </a:xfrm>
-          <a:prstGeom prst="rect">
-            <a:avLst/>
-          </a:prstGeom>
-          <a:noFill/>
-          <a:ln/>
-        </p:spPr>
-        <p:txBody>
-          <a:bodyPr wrap="square" lIns="0" tIns="0" rIns="0" bIns="0" rtlCol="0" anchor="t">
+            <a:off x="7799832" y="4974336"/>
+            <a:ext cx="3145536" cy="576072"/>
+          </a:xfrm>
+          <a:prstGeom prst="rect">
+            <a:avLst/>
+          </a:prstGeom>
+          <a:noFill/>
+          <a:ln/>
+        </p:spPr>
+        <p:txBody>
+          <a:bodyPr wrap="square" lIns="254" tIns="254" rIns="254" bIns="254" rtlCol="0" anchor="t">
             <a:normAutofit/>
           </a:bodyPr>
           <a:lstStyle/>
@@ -16435,7 +16731,7 @@
               <a:buNone/>
             </a:pPr>
             <a:r>
-              <a:rPr lang="en-US" sz="1550" dirty="0">
+              <a:rPr lang="en-US" sz="1320" dirty="0">
                 <a:solidFill>
                   <a:srgbClr val="17364A"/>
                 </a:solidFill>
@@ -16443,9 +16739,9 @@
                 <a:ea typeface="Aptos" pitchFamily="34" charset="-122"/>
                 <a:cs typeface="Aptos" pitchFamily="34" charset="-120"/>
               </a:rPr>
-              <a:t>Use the concept to clarify workflow changes, dependencies, staffing, procurement requirements, training needs, and implementation checkpoints.</a:t>
-            </a:r>
-            <a:endParaRPr lang="en-US" sz="1550" dirty="0"/>
+              <a:t>Use the concept to clarify workflow changes, dependencies, staffing, procurement requirements, training needs, and.</a:t>
+            </a:r>
+            <a:endParaRPr lang="en-US" sz="1320" dirty="0"/>
           </a:p>
         </p:txBody>
       </p:sp>
@@ -16746,49 +17042,58 @@
           <a:ln/>
         </p:spPr>
         <p:txBody>
-          <a:bodyPr wrap="square" lIns="635" tIns="635" rIns="635" bIns="635" rtlCol="0" anchor="t">
+          <a:bodyPr wrap="square" lIns="1016" tIns="1016" rIns="1016" bIns="1016" rtlCol="0" anchor="t">
             <a:normAutofit/>
           </a:bodyPr>
           <a:lstStyle/>
           <a:p>
+            <a:pPr indent="0" marL="0">
+              <a:buNone/>
+            </a:pPr>
             <a:r>
               <a:rPr lang="en-US" sz="2100" dirty="0">
                 <a:solidFill>
-                  <a:srgbClr val="17364A"/>
-                </a:solidFill>
-                <a:latin typeface="Aptos" pitchFamily="34" charset="0"/>
-                <a:ea typeface="Aptos" pitchFamily="34" charset="-122"/>
-                <a:cs typeface="Aptos" pitchFamily="34" charset="-120"/>
-              </a:rPr>
-              <a:t>A health department may consider an agentic workflow for incoming public health inquiries.</a:t>
+                  <a:srgbClr val="003A63"/>
+                </a:solidFill>
+                <a:latin typeface="Aptos" pitchFamily="34" charset="0"/>
+                <a:ea typeface="Aptos" pitchFamily="34" charset="-122"/>
+                <a:cs typeface="Aptos" pitchFamily="34" charset="-120"/>
+              </a:rPr>
+              <a:t>• A health department may consider an agentic workflow for incoming public health inquiries.</a:t>
             </a:r>
             <a:endParaRPr lang="en-US" sz="2100" dirty="0"/>
           </a:p>
           <a:p>
+            <a:pPr indent="0" marL="0">
+              <a:buNone/>
+            </a:pPr>
             <a:r>
               <a:rPr lang="en-US" sz="2100" dirty="0">
                 <a:solidFill>
-                  <a:srgbClr val="17364A"/>
-                </a:solidFill>
-                <a:latin typeface="Aptos" pitchFamily="34" charset="0"/>
-                <a:ea typeface="Aptos" pitchFamily="34" charset="-122"/>
-                <a:cs typeface="Aptos" pitchFamily="34" charset="-120"/>
-              </a:rPr>
-              <a:t>The agent could classify the inquiry, retrieve relevant approved guidance, draft a response, create a.</a:t>
+                  <a:srgbClr val="003A63"/>
+                </a:solidFill>
+                <a:latin typeface="Aptos" pitchFamily="34" charset="0"/>
+                <a:ea typeface="Aptos" pitchFamily="34" charset="-122"/>
+                <a:cs typeface="Aptos" pitchFamily="34" charset="-120"/>
+              </a:rPr>
+              <a:t>• The agent could classify the inquiry, retrieve relevant approved guidance, draft a response,.</a:t>
             </a:r>
             <a:endParaRPr lang="en-US" sz="2100" dirty="0"/>
           </a:p>
           <a:p>
+            <a:pPr indent="0" marL="0">
+              <a:buNone/>
+            </a:pPr>
             <a:r>
               <a:rPr lang="en-US" sz="2100" dirty="0">
                 <a:solidFill>
-                  <a:srgbClr val="17364A"/>
-                </a:solidFill>
-                <a:latin typeface="Aptos" pitchFamily="34" charset="0"/>
-                <a:ea typeface="Aptos" pitchFamily="34" charset="-122"/>
-                <a:cs typeface="Aptos" pitchFamily="34" charset="-120"/>
-              </a:rPr>
-              <a:t>For low-risk general information, the agent might prepare a draft for staff review.</a:t>
+                  <a:srgbClr val="003A63"/>
+                </a:solidFill>
+                <a:latin typeface="Aptos" pitchFamily="34" charset="0"/>
+                <a:ea typeface="Aptos" pitchFamily="34" charset="-122"/>
+                <a:cs typeface="Aptos" pitchFamily="34" charset="-120"/>
+              </a:rPr>
+              <a:t>• For low-risk general information, the agent might prepare a draft for staff review.</a:t>
             </a:r>
             <a:endParaRPr lang="en-US" sz="2100" dirty="0"/>
           </a:p>
@@ -16868,17 +17173,17 @@
         </p:nvSpPr>
         <p:spPr>
           <a:xfrm>
-            <a:off x="7799832" y="1828800"/>
-            <a:ext cx="3145536" cy="685800"/>
-          </a:xfrm>
-          <a:prstGeom prst="rect">
-            <a:avLst/>
-          </a:prstGeom>
-          <a:noFill/>
-          <a:ln/>
-        </p:spPr>
-        <p:txBody>
-          <a:bodyPr wrap="square" lIns="0" tIns="0" rIns="0" bIns="0" rtlCol="0" anchor="t">
+            <a:off x="7799832" y="1801368"/>
+            <a:ext cx="3145536" cy="758952"/>
+          </a:xfrm>
+          <a:prstGeom prst="rect">
+            <a:avLst/>
+          </a:prstGeom>
+          <a:noFill/>
+          <a:ln/>
+        </p:spPr>
+        <p:txBody>
+          <a:bodyPr wrap="square" lIns="254" tIns="254" rIns="254" bIns="254" rtlCol="0" anchor="t">
             <a:normAutofit/>
           </a:bodyPr>
           <a:lstStyle/>
@@ -16887,7 +17192,7 @@
               <a:buNone/>
             </a:pPr>
             <a:r>
-              <a:rPr lang="en-US" sz="1550" dirty="0">
+              <a:rPr lang="en-US" sz="1320" dirty="0">
                 <a:solidFill>
                   <a:srgbClr val="17364A"/>
                 </a:solidFill>
@@ -16897,7 +17202,7 @@
               </a:rPr>
               <a:t>A health department may consider an agentic workflow for incoming public health inquiries.</a:t>
             </a:r>
-            <a:endParaRPr lang="en-US" sz="1550" dirty="0"/>
+            <a:endParaRPr lang="en-US" sz="1320" dirty="0"/>
           </a:p>
         </p:txBody>
       </p:sp>
@@ -16985,13 +17290,16 @@
           <a:ln/>
         </p:spPr>
         <p:txBody>
-          <a:bodyPr wrap="square" lIns="254" tIns="254" rIns="254" bIns="254" rtlCol="0" anchor="t">
+          <a:bodyPr wrap="square" lIns="508" tIns="508" rIns="508" bIns="508" rtlCol="0" anchor="t">
             <a:normAutofit/>
           </a:bodyPr>
           <a:lstStyle/>
           <a:p>
-            <a:r>
-              <a:rPr lang="en-US" sz="1380" dirty="0">
+            <a:pPr indent="0" marL="0">
+              <a:buNone/>
+            </a:pPr>
+            <a:r>
+              <a:rPr lang="en-US" sz="1220" dirty="0">
                 <a:solidFill>
                   <a:srgbClr val="17364A"/>
                 </a:solidFill>
@@ -16999,13 +17307,16 @@
                 <a:ea typeface="Aptos" pitchFamily="34" charset="-122"/>
                 <a:cs typeface="Aptos" pitchFamily="34" charset="-120"/>
               </a:rPr>
-              <a:t>The agent could classify the inquiry, retrieve relevant approved guidance, draft a.</a:t>
-            </a:r>
-            <a:endParaRPr lang="en-US" sz="1380" dirty="0"/>
-          </a:p>
-          <a:p>
-            <a:r>
-              <a:rPr lang="en-US" sz="1380" dirty="0">
+              <a:t>The agent could classify the inquiry, retrieve relevant approved.</a:t>
+            </a:r>
+            <a:endParaRPr lang="en-US" sz="1220" dirty="0"/>
+          </a:p>
+          <a:p>
+            <a:pPr indent="0" marL="0">
+              <a:buNone/>
+            </a:pPr>
+            <a:r>
+              <a:rPr lang="en-US" sz="1220" dirty="0">
                 <a:solidFill>
                   <a:srgbClr val="17364A"/>
                 </a:solidFill>
@@ -17013,13 +17324,16 @@
                 <a:ea typeface="Aptos" pitchFamily="34" charset="-122"/>
                 <a:cs typeface="Aptos" pitchFamily="34" charset="-120"/>
               </a:rPr>
-              <a:t>For sensitive complaints, reportable disease concerns, media inquiries, or legal issues,.</a:t>
-            </a:r>
-            <a:endParaRPr lang="en-US" sz="1380" dirty="0"/>
-          </a:p>
-          <a:p>
-            <a:r>
-              <a:rPr lang="en-US" sz="1380" dirty="0">
+              <a:t>For sensitive complaints, reportable disease concerns, media.</a:t>
+            </a:r>
+            <a:endParaRPr lang="en-US" sz="1220" dirty="0"/>
+          </a:p>
+          <a:p>
+            <a:pPr indent="0" marL="0">
+              <a:buNone/>
+            </a:pPr>
+            <a:r>
+              <a:rPr lang="en-US" sz="1220" dirty="0">
                 <a:solidFill>
                   <a:srgbClr val="17364A"/>
                 </a:solidFill>
@@ -17029,7 +17343,7 @@
               </a:rPr>
               <a:t>This design requires orchestration rules.</a:t>
             </a:r>
-            <a:endParaRPr lang="en-US" sz="1380" dirty="0"/>
+            <a:endParaRPr lang="en-US" sz="1220" dirty="0"/>
           </a:p>
         </p:txBody>
       </p:sp>
@@ -17107,17 +17421,17 @@
         </p:nvSpPr>
         <p:spPr>
           <a:xfrm>
-            <a:off x="7799832" y="5001768"/>
-            <a:ext cx="3145536" cy="502920"/>
-          </a:xfrm>
-          <a:prstGeom prst="rect">
-            <a:avLst/>
-          </a:prstGeom>
-          <a:noFill/>
-          <a:ln/>
-        </p:spPr>
-        <p:txBody>
-          <a:bodyPr wrap="square" lIns="0" tIns="0" rIns="0" bIns="0" rtlCol="0" anchor="t">
+            <a:off x="7799832" y="4974336"/>
+            <a:ext cx="3145536" cy="576072"/>
+          </a:xfrm>
+          <a:prstGeom prst="rect">
+            <a:avLst/>
+          </a:prstGeom>
+          <a:noFill/>
+          <a:ln/>
+        </p:spPr>
+        <p:txBody>
+          <a:bodyPr wrap="square" lIns="254" tIns="254" rIns="254" bIns="254" rtlCol="0" anchor="t">
             <a:normAutofit/>
           </a:bodyPr>
           <a:lstStyle/>
@@ -17126,7 +17440,7 @@
               <a:buNone/>
             </a:pPr>
             <a:r>
-              <a:rPr lang="en-US" sz="1550" dirty="0">
+              <a:rPr lang="en-US" sz="1320" dirty="0">
                 <a:solidFill>
                   <a:srgbClr val="17364A"/>
                 </a:solidFill>
@@ -17134,9 +17448,9 @@
                 <a:ea typeface="Aptos" pitchFamily="34" charset="-122"/>
                 <a:cs typeface="Aptos" pitchFamily="34" charset="-120"/>
               </a:rPr>
-              <a:t>Use the concept to clarify workflow changes, dependencies, staffing, procurement requirements, training needs, and implementation checkpoints.</a:t>
-            </a:r>
-            <a:endParaRPr lang="en-US" sz="1550" dirty="0"/>
+              <a:t>Use the concept to clarify workflow changes, dependencies, staffing, procurement requirements, training needs, and.</a:t>
+            </a:r>
+            <a:endParaRPr lang="en-US" sz="1320" dirty="0"/>
           </a:p>
         </p:txBody>
       </p:sp>

--- a/downloads/presentations/modules/arc-320.pptx
+++ b/downloads/presentations/modules/arc-320.pptx
@@ -3419,11 +3419,11 @@
         <p:spPr>
           <a:xfrm>
             <a:off x="7635240" y="1325880"/>
-            <a:ext cx="3474720" cy="1325880"/>
+            <a:ext cx="3474720" cy="1207008"/>
           </a:xfrm>
           <a:prstGeom prst="roundRect">
             <a:avLst>
-              <a:gd name="adj" fmla="val 8276"/>
+              <a:gd name="adj" fmla="val 9091"/>
             </a:avLst>
           </a:prstGeom>
           <a:solidFill>
@@ -3485,7 +3485,7 @@
         <p:spPr>
           <a:xfrm>
             <a:off x="7799832" y="1801368"/>
-            <a:ext cx="3145536" cy="758952"/>
+            <a:ext cx="3145536" cy="640080"/>
           </a:xfrm>
           <a:prstGeom prst="rect">
             <a:avLst/>
@@ -3525,12 +3525,12 @@
         </p:nvSpPr>
         <p:spPr>
           <a:xfrm>
-            <a:off x="7635240" y="2788920"/>
-            <a:ext cx="3474720" cy="1536192"/>
+            <a:off x="7635240" y="2670048"/>
+            <a:ext cx="3474720" cy="1377086"/>
           </a:xfrm>
           <a:prstGeom prst="roundRect">
             <a:avLst>
-              <a:gd name="adj" fmla="val 7143"/>
+              <a:gd name="adj" fmla="val 7968"/>
             </a:avLst>
           </a:prstGeom>
           <a:solidFill>
@@ -3552,8 +3552,8 @@
         </p:nvSpPr>
         <p:spPr>
           <a:xfrm>
-            <a:off x="7799832" y="2935224"/>
-            <a:ext cx="3145536" cy="256032"/>
+            <a:off x="7799832" y="2798064"/>
+            <a:ext cx="3145536" cy="237744"/>
           </a:xfrm>
           <a:prstGeom prst="rect">
             <a:avLst/>
@@ -3569,7 +3569,7 @@
               <a:buNone/>
             </a:pPr>
             <a:r>
-              <a:rPr lang="en-US" sz="1300" b="1" dirty="0">
+              <a:rPr lang="en-US" sz="1250" b="1" dirty="0">
                 <a:solidFill>
                   <a:srgbClr val="0068B7"/>
                 </a:solidFill>
@@ -3577,101 +3577,317 @@
                 <a:ea typeface="Aptos" pitchFamily="34" charset="-122"/>
                 <a:cs typeface="Aptos" pitchFamily="34" charset="-120"/>
               </a:rPr>
-              <a:t>Concept checkpoints</a:t>
-            </a:r>
-            <a:endParaRPr lang="en-US" sz="1300" dirty="0"/>
-          </a:p>
-        </p:txBody>
-      </p:sp>
-      <p:sp>
-        <p:nvSpPr>
-          <p:cNvPr id="15" name="Text 13"/>
-          <p:cNvSpPr/>
-          <p:nvPr/>
-        </p:nvSpPr>
-        <p:spPr>
-          <a:xfrm>
-            <a:off x="7818120" y="3300984"/>
-            <a:ext cx="3090672" cy="877824"/>
-          </a:xfrm>
-          <a:prstGeom prst="rect">
-            <a:avLst/>
-          </a:prstGeom>
-          <a:noFill/>
-          <a:ln/>
-        </p:spPr>
-        <p:txBody>
-          <a:bodyPr wrap="square" lIns="508" tIns="508" rIns="508" bIns="508" rtlCol="0" anchor="t">
+              <a:t>Implementation path</a:t>
+            </a:r>
+            <a:endParaRPr lang="en-US" sz="1250" dirty="0"/>
+          </a:p>
+        </p:txBody>
+      </p:sp>
+      <p:sp>
+        <p:nvSpPr>
+          <p:cNvPr id="15" name="Shape 13"/>
+          <p:cNvSpPr/>
+          <p:nvPr/>
+        </p:nvSpPr>
+        <p:spPr>
+          <a:xfrm>
+            <a:off x="8763000" y="3351276"/>
+            <a:ext cx="164592" cy="0"/>
+          </a:xfrm>
+          <a:prstGeom prst="line">
+            <a:avLst/>
+          </a:prstGeom>
+          <a:noFill/>
+          <a:ln w="15240">
+            <a:solidFill>
+              <a:srgbClr val="8ABBD8"/>
+            </a:solidFill>
+            <a:prstDash val="solid"/>
+          </a:ln>
+        </p:spPr>
+      </p:sp>
+      <p:sp>
+        <p:nvSpPr>
+          <p:cNvPr id="16" name="Shape 14"/>
+          <p:cNvSpPr/>
+          <p:nvPr/>
+        </p:nvSpPr>
+        <p:spPr>
+          <a:xfrm>
+            <a:off x="7872984" y="3200400"/>
+            <a:ext cx="890016" cy="301752"/>
+          </a:xfrm>
+          <a:prstGeom prst="roundRect">
+            <a:avLst>
+              <a:gd name="adj" fmla="val 24242"/>
+            </a:avLst>
+          </a:prstGeom>
+          <a:solidFill>
+            <a:srgbClr val="0068B7"/>
+          </a:solidFill>
+          <a:ln w="12700">
+            <a:solidFill>
+              <a:srgbClr val="0068B7"/>
+            </a:solidFill>
+            <a:prstDash val="solid"/>
+          </a:ln>
+        </p:spPr>
+      </p:sp>
+      <p:sp>
+        <p:nvSpPr>
+          <p:cNvPr id="17" name="Text 15"/>
+          <p:cNvSpPr/>
+          <p:nvPr/>
+        </p:nvSpPr>
+        <p:spPr>
+          <a:xfrm>
+            <a:off x="7909560" y="3273552"/>
+            <a:ext cx="816864" cy="146304"/>
+          </a:xfrm>
+          <a:prstGeom prst="rect">
+            <a:avLst/>
+          </a:prstGeom>
+          <a:noFill/>
+          <a:ln/>
+        </p:spPr>
+        <p:txBody>
+          <a:bodyPr wrap="square" lIns="0" tIns="0" rIns="0" bIns="0" rtlCol="0" anchor="ctr">
             <a:normAutofit/>
           </a:bodyPr>
           <a:lstStyle/>
           <a:p>
-            <a:pPr indent="0" marL="0">
-              <a:buNone/>
-            </a:pPr>
-            <a:r>
-              <a:rPr lang="en-US" sz="1220" dirty="0">
-                <a:solidFill>
-                  <a:srgbClr val="17364A"/>
-                </a:solidFill>
-                <a:latin typeface="Aptos" pitchFamily="34" charset="0"/>
-                <a:ea typeface="Aptos" pitchFamily="34" charset="-122"/>
-                <a:cs typeface="Aptos" pitchFamily="34" charset="-120"/>
-              </a:rPr>
-              <a:t>The goal should be narrow and operationally defined. “Help with.</a:t>
-            </a:r>
-            <a:endParaRPr lang="en-US" sz="1220" dirty="0"/>
-          </a:p>
-          <a:p>
-            <a:pPr indent="0" marL="0">
-              <a:buNone/>
-            </a:pPr>
-            <a:r>
-              <a:rPr lang="en-US" sz="1220" dirty="0">
-                <a:solidFill>
-                  <a:srgbClr val="17364A"/>
-                </a:solidFill>
-                <a:latin typeface="Aptos" pitchFamily="34" charset="0"/>
-                <a:ea typeface="Aptos" pitchFamily="34" charset="-122"/>
-                <a:cs typeface="Aptos" pitchFamily="34" charset="-120"/>
-              </a:rPr>
-              <a:t>Tool access is a central design decision.</a:t>
-            </a:r>
-            <a:endParaRPr lang="en-US" sz="1220" dirty="0"/>
-          </a:p>
-          <a:p>
-            <a:pPr indent="0" marL="0">
-              <a:buNone/>
-            </a:pPr>
-            <a:r>
-              <a:rPr lang="en-US" sz="1220" dirty="0">
-                <a:solidFill>
-                  <a:srgbClr val="17364A"/>
-                </a:solidFill>
-                <a:latin typeface="Aptos" pitchFamily="34" charset="0"/>
-                <a:ea typeface="Aptos" pitchFamily="34" charset="-122"/>
-                <a:cs typeface="Aptos" pitchFamily="34" charset="-120"/>
-              </a:rPr>
-              <a:t>An agent may be allowed to search documents, query a database,.</a:t>
-            </a:r>
-            <a:endParaRPr lang="en-US" sz="1220" dirty="0"/>
-          </a:p>
-        </p:txBody>
-      </p:sp>
-      <p:sp>
-        <p:nvSpPr>
-          <p:cNvPr id="16" name="Shape 14"/>
-          <p:cNvSpPr/>
-          <p:nvPr/>
-        </p:nvSpPr>
-        <p:spPr>
-          <a:xfrm>
-            <a:off x="7635240" y="4498848"/>
-            <a:ext cx="3474720" cy="1143000"/>
+            <a:pPr algn="ctr" indent="0" marL="0">
+              <a:buNone/>
+            </a:pPr>
+            <a:r>
+              <a:rPr lang="en-US" sz="880" b="1" dirty="0">
+                <a:solidFill>
+                  <a:srgbClr val="FFFFFF"/>
+                </a:solidFill>
+                <a:latin typeface="Aptos" pitchFamily="34" charset="0"/>
+                <a:ea typeface="Aptos" pitchFamily="34" charset="-122"/>
+                <a:cs typeface="Aptos" pitchFamily="34" charset="-120"/>
+              </a:rPr>
+              <a:t>Need</a:t>
+            </a:r>
+            <a:endParaRPr lang="en-US" sz="880" dirty="0"/>
+          </a:p>
+        </p:txBody>
+      </p:sp>
+      <p:sp>
+        <p:nvSpPr>
+          <p:cNvPr id="18" name="Shape 16"/>
+          <p:cNvSpPr/>
+          <p:nvPr/>
+        </p:nvSpPr>
+        <p:spPr>
+          <a:xfrm>
+            <a:off x="9817608" y="3351276"/>
+            <a:ext cx="164592" cy="0"/>
+          </a:xfrm>
+          <a:prstGeom prst="line">
+            <a:avLst/>
+          </a:prstGeom>
+          <a:noFill/>
+          <a:ln w="15240">
+            <a:solidFill>
+              <a:srgbClr val="8ABBD8"/>
+            </a:solidFill>
+            <a:prstDash val="solid"/>
+          </a:ln>
+        </p:spPr>
+      </p:sp>
+      <p:sp>
+        <p:nvSpPr>
+          <p:cNvPr id="19" name="Shape 17"/>
+          <p:cNvSpPr/>
+          <p:nvPr/>
+        </p:nvSpPr>
+        <p:spPr>
+          <a:xfrm>
+            <a:off x="8927592" y="3200400"/>
+            <a:ext cx="890016" cy="301752"/>
           </a:xfrm>
           <a:prstGeom prst="roundRect">
             <a:avLst>
-              <a:gd name="adj" fmla="val 9600"/>
+              <a:gd name="adj" fmla="val 24242"/>
+            </a:avLst>
+          </a:prstGeom>
+          <a:solidFill>
+            <a:srgbClr val="2F8A28"/>
+          </a:solidFill>
+          <a:ln w="12700">
+            <a:solidFill>
+              <a:srgbClr val="2F8A28"/>
+            </a:solidFill>
+            <a:prstDash val="solid"/>
+          </a:ln>
+        </p:spPr>
+      </p:sp>
+      <p:sp>
+        <p:nvSpPr>
+          <p:cNvPr id="20" name="Text 18"/>
+          <p:cNvSpPr/>
+          <p:nvPr/>
+        </p:nvSpPr>
+        <p:spPr>
+          <a:xfrm>
+            <a:off x="8964168" y="3273552"/>
+            <a:ext cx="816864" cy="146304"/>
+          </a:xfrm>
+          <a:prstGeom prst="rect">
+            <a:avLst/>
+          </a:prstGeom>
+          <a:noFill/>
+          <a:ln/>
+        </p:spPr>
+        <p:txBody>
+          <a:bodyPr wrap="square" lIns="0" tIns="0" rIns="0" bIns="0" rtlCol="0" anchor="ctr">
+            <a:normAutofit/>
+          </a:bodyPr>
+          <a:lstStyle/>
+          <a:p>
+            <a:pPr algn="ctr" indent="0" marL="0">
+              <a:buNone/>
+            </a:pPr>
+            <a:r>
+              <a:rPr lang="en-US" sz="880" b="1" dirty="0">
+                <a:solidFill>
+                  <a:srgbClr val="FFFFFF"/>
+                </a:solidFill>
+                <a:latin typeface="Aptos" pitchFamily="34" charset="0"/>
+                <a:ea typeface="Aptos" pitchFamily="34" charset="-122"/>
+                <a:cs typeface="Aptos" pitchFamily="34" charset="-120"/>
+              </a:rPr>
+              <a:t>Build</a:t>
+            </a:r>
+            <a:endParaRPr lang="en-US" sz="880" dirty="0"/>
+          </a:p>
+        </p:txBody>
+      </p:sp>
+      <p:sp>
+        <p:nvSpPr>
+          <p:cNvPr id="21" name="Shape 19"/>
+          <p:cNvSpPr/>
+          <p:nvPr/>
+        </p:nvSpPr>
+        <p:spPr>
+          <a:xfrm>
+            <a:off x="9982200" y="3200400"/>
+            <a:ext cx="890016" cy="301752"/>
+          </a:xfrm>
+          <a:prstGeom prst="roundRect">
+            <a:avLst>
+              <a:gd name="adj" fmla="val 24242"/>
+            </a:avLst>
+          </a:prstGeom>
+          <a:solidFill>
+            <a:srgbClr val="6A4CA3"/>
+          </a:solidFill>
+          <a:ln w="12700">
+            <a:solidFill>
+              <a:srgbClr val="6A4CA3"/>
+            </a:solidFill>
+            <a:prstDash val="solid"/>
+          </a:ln>
+        </p:spPr>
+      </p:sp>
+      <p:sp>
+        <p:nvSpPr>
+          <p:cNvPr id="22" name="Text 20"/>
+          <p:cNvSpPr/>
+          <p:nvPr/>
+        </p:nvSpPr>
+        <p:spPr>
+          <a:xfrm>
+            <a:off x="10018776" y="3273552"/>
+            <a:ext cx="816864" cy="146304"/>
+          </a:xfrm>
+          <a:prstGeom prst="rect">
+            <a:avLst/>
+          </a:prstGeom>
+          <a:noFill/>
+          <a:ln/>
+        </p:spPr>
+        <p:txBody>
+          <a:bodyPr wrap="square" lIns="0" tIns="0" rIns="0" bIns="0" rtlCol="0" anchor="ctr">
+            <a:normAutofit/>
+          </a:bodyPr>
+          <a:lstStyle/>
+          <a:p>
+            <a:pPr algn="ctr" indent="0" marL="0">
+              <a:buNone/>
+            </a:pPr>
+            <a:r>
+              <a:rPr lang="en-US" sz="880" b="1" dirty="0">
+                <a:solidFill>
+                  <a:srgbClr val="FFFFFF"/>
+                </a:solidFill>
+                <a:latin typeface="Aptos" pitchFamily="34" charset="0"/>
+                <a:ea typeface="Aptos" pitchFamily="34" charset="-122"/>
+                <a:cs typeface="Aptos" pitchFamily="34" charset="-120"/>
+              </a:rPr>
+              <a:t>Adopt</a:t>
+            </a:r>
+            <a:endParaRPr lang="en-US" sz="880" dirty="0"/>
+          </a:p>
+        </p:txBody>
+      </p:sp>
+      <p:sp>
+        <p:nvSpPr>
+          <p:cNvPr id="23" name="Text 21"/>
+          <p:cNvSpPr/>
+          <p:nvPr/>
+        </p:nvSpPr>
+        <p:spPr>
+          <a:xfrm>
+            <a:off x="7854696" y="3694176"/>
+            <a:ext cx="3035808" cy="206654"/>
+          </a:xfrm>
+          <a:prstGeom prst="rect">
+            <a:avLst/>
+          </a:prstGeom>
+          <a:noFill/>
+          <a:ln/>
+        </p:spPr>
+        <p:txBody>
+          <a:bodyPr wrap="square" lIns="254" tIns="254" rIns="254" bIns="254" rtlCol="0" anchor="t">
+            <a:normAutofit/>
+          </a:bodyPr>
+          <a:lstStyle/>
+          <a:p>
+            <a:pPr indent="0" marL="0">
+              <a:buNone/>
+            </a:pPr>
+            <a:r>
+              <a:rPr lang="en-US" sz="1120" dirty="0">
+                <a:solidFill>
+                  <a:srgbClr val="17364A"/>
+                </a:solidFill>
+                <a:latin typeface="Aptos" pitchFamily="34" charset="0"/>
+                <a:ea typeface="Aptos" pitchFamily="34" charset="-122"/>
+                <a:cs typeface="Aptos" pitchFamily="34" charset="-120"/>
+              </a:rPr>
+              <a:t>Implementation work should make dependencies, approvals, training, and sustainment visible before launch.</a:t>
+            </a:r>
+            <a:endParaRPr lang="en-US" sz="1120" dirty="0"/>
+          </a:p>
+        </p:txBody>
+      </p:sp>
+      <p:sp>
+        <p:nvSpPr>
+          <p:cNvPr id="24" name="Shape 22"/>
+          <p:cNvSpPr/>
+          <p:nvPr/>
+        </p:nvSpPr>
+        <p:spPr>
+          <a:xfrm>
+            <a:off x="7635240" y="4184294"/>
+            <a:ext cx="3474720" cy="1466698"/>
+          </a:xfrm>
+          <a:prstGeom prst="roundRect">
+            <a:avLst>
+              <a:gd name="adj" fmla="val 7481"/>
             </a:avLst>
           </a:prstGeom>
           <a:solidFill>
@@ -3687,13 +3903,13 @@
       </p:sp>
       <p:sp>
         <p:nvSpPr>
-          <p:cNvPr id="17" name="Text 15"/>
-          <p:cNvSpPr/>
-          <p:nvPr/>
-        </p:nvSpPr>
-        <p:spPr>
-          <a:xfrm>
-            <a:off x="7799832" y="4645152"/>
+          <p:cNvPr id="25" name="Text 23"/>
+          <p:cNvSpPr/>
+          <p:nvPr/>
+        </p:nvSpPr>
+        <p:spPr>
+          <a:xfrm>
+            <a:off x="7799832" y="4330598"/>
             <a:ext cx="3145536" cy="256032"/>
           </a:xfrm>
           <a:prstGeom prst="rect">
@@ -3726,14 +3942,14 @@
       </p:sp>
       <p:sp>
         <p:nvSpPr>
-          <p:cNvPr id="18" name="Text 16"/>
-          <p:cNvSpPr/>
-          <p:nvPr/>
-        </p:nvSpPr>
-        <p:spPr>
-          <a:xfrm>
-            <a:off x="7799832" y="4974336"/>
-            <a:ext cx="3145536" cy="576072"/>
+          <p:cNvPr id="26" name="Text 24"/>
+          <p:cNvSpPr/>
+          <p:nvPr/>
+        </p:nvSpPr>
+        <p:spPr>
+          <a:xfrm>
+            <a:off x="7799832" y="4659782"/>
+            <a:ext cx="3145536" cy="899770"/>
           </a:xfrm>
           <a:prstGeom prst="rect">
             <a:avLst/>
@@ -3759,7 +3975,7 @@
                 <a:ea typeface="Aptos" pitchFamily="34" charset="-122"/>
                 <a:cs typeface="Aptos" pitchFamily="34" charset="-120"/>
               </a:rPr>
-              <a:t>Use the concept to clarify workflow changes, dependencies, staffing, procurement requirements, training needs, and.</a:t>
+              <a:t>Use the concept to clarify workflow changes, dependencies, staffing, procurement requirements, training needs, and implementation checkpoints.</a:t>
             </a:r>
             <a:endParaRPr lang="en-US" sz="1320" dirty="0"/>
           </a:p>
@@ -4128,11 +4344,11 @@
         <p:spPr>
           <a:xfrm>
             <a:off x="7635240" y="1325880"/>
-            <a:ext cx="3474720" cy="1325880"/>
+            <a:ext cx="3474720" cy="1207008"/>
           </a:xfrm>
           <a:prstGeom prst="roundRect">
             <a:avLst>
-              <a:gd name="adj" fmla="val 8276"/>
+              <a:gd name="adj" fmla="val 9091"/>
             </a:avLst>
           </a:prstGeom>
           <a:solidFill>
@@ -4194,7 +4410,7 @@
         <p:spPr>
           <a:xfrm>
             <a:off x="7799832" y="1801368"/>
-            <a:ext cx="3145536" cy="758952"/>
+            <a:ext cx="3145536" cy="640080"/>
           </a:xfrm>
           <a:prstGeom prst="rect">
             <a:avLst/>
@@ -4234,12 +4450,12 @@
         </p:nvSpPr>
         <p:spPr>
           <a:xfrm>
-            <a:off x="7635240" y="2788920"/>
-            <a:ext cx="3474720" cy="1536192"/>
+            <a:off x="7635240" y="2670048"/>
+            <a:ext cx="3474720" cy="1377086"/>
           </a:xfrm>
           <a:prstGeom prst="roundRect">
             <a:avLst>
-              <a:gd name="adj" fmla="val 7143"/>
+              <a:gd name="adj" fmla="val 7968"/>
             </a:avLst>
           </a:prstGeom>
           <a:solidFill>
@@ -4261,7 +4477,7 @@
         </p:nvSpPr>
         <p:spPr>
           <a:xfrm>
-            <a:off x="7799832" y="2935224"/>
+            <a:off x="7799832" y="2816352"/>
             <a:ext cx="3145536" cy="256032"/>
           </a:xfrm>
           <a:prstGeom prst="rect">
@@ -4300,8 +4516,8 @@
         </p:nvSpPr>
         <p:spPr>
           <a:xfrm>
-            <a:off x="7818120" y="3300984"/>
-            <a:ext cx="3090672" cy="877824"/>
+            <a:off x="7818120" y="3182112"/>
+            <a:ext cx="3090672" cy="718718"/>
           </a:xfrm>
           <a:prstGeom prst="rect">
             <a:avLst/>
@@ -4375,12 +4591,12 @@
         </p:nvSpPr>
         <p:spPr>
           <a:xfrm>
-            <a:off x="7635240" y="4498848"/>
-            <a:ext cx="3474720" cy="1143000"/>
+            <a:off x="7635240" y="4184294"/>
+            <a:ext cx="3474720" cy="1466698"/>
           </a:xfrm>
           <a:prstGeom prst="roundRect">
             <a:avLst>
-              <a:gd name="adj" fmla="val 9600"/>
+              <a:gd name="adj" fmla="val 7481"/>
             </a:avLst>
           </a:prstGeom>
           <a:solidFill>
@@ -4402,7 +4618,7 @@
         </p:nvSpPr>
         <p:spPr>
           <a:xfrm>
-            <a:off x="7799832" y="4645152"/>
+            <a:off x="7799832" y="4330598"/>
             <a:ext cx="3145536" cy="256032"/>
           </a:xfrm>
           <a:prstGeom prst="rect">
@@ -4441,8 +4657,8 @@
         </p:nvSpPr>
         <p:spPr>
           <a:xfrm>
-            <a:off x="7799832" y="4974336"/>
-            <a:ext cx="3145536" cy="576072"/>
+            <a:off x="7799832" y="4659782"/>
+            <a:ext cx="3145536" cy="899770"/>
           </a:xfrm>
           <a:prstGeom prst="rect">
             <a:avLst/>
@@ -4468,7 +4684,7 @@
                 <a:ea typeface="Aptos" pitchFamily="34" charset="-122"/>
                 <a:cs typeface="Aptos" pitchFamily="34" charset="-120"/>
               </a:rPr>
-              <a:t>Use the concept to clarify workflow changes, dependencies, staffing, procurement requirements, training needs, and.</a:t>
+              <a:t>Use the concept to clarify workflow changes, dependencies, staffing, procurement requirements, training needs, and implementation checkpoints.</a:t>
             </a:r>
             <a:endParaRPr lang="en-US" sz="1320" dirty="0"/>
           </a:p>
@@ -4837,11 +5053,11 @@
         <p:spPr>
           <a:xfrm>
             <a:off x="7635240" y="1325880"/>
-            <a:ext cx="3474720" cy="1325880"/>
+            <a:ext cx="3474720" cy="1207008"/>
           </a:xfrm>
           <a:prstGeom prst="roundRect">
             <a:avLst>
-              <a:gd name="adj" fmla="val 8276"/>
+              <a:gd name="adj" fmla="val 9091"/>
             </a:avLst>
           </a:prstGeom>
           <a:solidFill>
@@ -4903,7 +5119,7 @@
         <p:spPr>
           <a:xfrm>
             <a:off x="7799832" y="1801368"/>
-            <a:ext cx="3145536" cy="758952"/>
+            <a:ext cx="3145536" cy="640080"/>
           </a:xfrm>
           <a:prstGeom prst="rect">
             <a:avLst/>
@@ -4943,7 +5159,7 @@
         </p:nvSpPr>
         <p:spPr>
           <a:xfrm>
-            <a:off x="7635240" y="2788920"/>
+            <a:off x="7635240" y="2670048"/>
             <a:ext cx="3474720" cy="1536192"/>
           </a:xfrm>
           <a:prstGeom prst="roundRect">
@@ -4970,7 +5186,7 @@
         </p:nvSpPr>
         <p:spPr>
           <a:xfrm>
-            <a:off x="7799832" y="2935224"/>
+            <a:off x="7799832" y="2816352"/>
             <a:ext cx="3145536" cy="256032"/>
           </a:xfrm>
           <a:prstGeom prst="rect">
@@ -5009,7 +5225,7 @@
         </p:nvSpPr>
         <p:spPr>
           <a:xfrm>
-            <a:off x="7818120" y="3300984"/>
+            <a:off x="7818120" y="3182112"/>
             <a:ext cx="3090672" cy="877824"/>
           </a:xfrm>
           <a:prstGeom prst="rect">
@@ -5084,12 +5300,12 @@
         </p:nvSpPr>
         <p:spPr>
           <a:xfrm>
-            <a:off x="7635240" y="4498848"/>
-            <a:ext cx="3474720" cy="1143000"/>
+            <a:off x="7635240" y="4343400"/>
+            <a:ext cx="3474720" cy="1255471"/>
           </a:xfrm>
           <a:prstGeom prst="roundRect">
             <a:avLst>
-              <a:gd name="adj" fmla="val 9600"/>
+              <a:gd name="adj" fmla="val 8740"/>
             </a:avLst>
           </a:prstGeom>
           <a:solidFill>
@@ -5111,7 +5327,7 @@
         </p:nvSpPr>
         <p:spPr>
           <a:xfrm>
-            <a:off x="7799832" y="4645152"/>
+            <a:off x="7799832" y="4489704"/>
             <a:ext cx="3145536" cy="256032"/>
           </a:xfrm>
           <a:prstGeom prst="rect">
@@ -5150,8 +5366,8 @@
         </p:nvSpPr>
         <p:spPr>
           <a:xfrm>
-            <a:off x="7799832" y="4974336"/>
-            <a:ext cx="3145536" cy="576072"/>
+            <a:off x="7799832" y="4818888"/>
+            <a:ext cx="3145536" cy="688543"/>
           </a:xfrm>
           <a:prstGeom prst="rect">
             <a:avLst/>
@@ -5177,7 +5393,7 @@
                 <a:ea typeface="Aptos" pitchFamily="34" charset="-122"/>
                 <a:cs typeface="Aptos" pitchFamily="34" charset="-120"/>
               </a:rPr>
-              <a:t>Identify what could go wrong, who could be affected, what safeguards are needed, and what evidence should be reviewed.</a:t>
+              <a:t>Identify what could go wrong, who could be affected, what safeguards are needed, and what evidence should be reviewed before use.</a:t>
             </a:r>
             <a:endParaRPr lang="en-US" sz="1320" dirty="0"/>
           </a:p>
@@ -5546,11 +5762,11 @@
         <p:spPr>
           <a:xfrm>
             <a:off x="7635240" y="1325880"/>
-            <a:ext cx="3474720" cy="1325880"/>
+            <a:ext cx="3474720" cy="1207008"/>
           </a:xfrm>
           <a:prstGeom prst="roundRect">
             <a:avLst>
-              <a:gd name="adj" fmla="val 8276"/>
+              <a:gd name="adj" fmla="val 9091"/>
             </a:avLst>
           </a:prstGeom>
           <a:solidFill>
@@ -5612,7 +5828,7 @@
         <p:spPr>
           <a:xfrm>
             <a:off x="7799832" y="1801368"/>
-            <a:ext cx="3145536" cy="758952"/>
+            <a:ext cx="3145536" cy="640080"/>
           </a:xfrm>
           <a:prstGeom prst="rect">
             <a:avLst/>
@@ -5652,7 +5868,7 @@
         </p:nvSpPr>
         <p:spPr>
           <a:xfrm>
-            <a:off x="7635240" y="2788920"/>
+            <a:off x="7635240" y="2670048"/>
             <a:ext cx="3474720" cy="1536192"/>
           </a:xfrm>
           <a:prstGeom prst="roundRect">
@@ -5679,7 +5895,7 @@
         </p:nvSpPr>
         <p:spPr>
           <a:xfrm>
-            <a:off x="7799832" y="2935224"/>
+            <a:off x="7799832" y="2816352"/>
             <a:ext cx="3145536" cy="256032"/>
           </a:xfrm>
           <a:prstGeom prst="rect">
@@ -5718,7 +5934,7 @@
         </p:nvSpPr>
         <p:spPr>
           <a:xfrm>
-            <a:off x="7818120" y="3300984"/>
+            <a:off x="7818120" y="3182112"/>
             <a:ext cx="3090672" cy="877824"/>
           </a:xfrm>
           <a:prstGeom prst="rect">
@@ -5793,12 +6009,12 @@
         </p:nvSpPr>
         <p:spPr>
           <a:xfrm>
-            <a:off x="7635240" y="4498848"/>
-            <a:ext cx="3474720" cy="1143000"/>
+            <a:off x="7635240" y="4343400"/>
+            <a:ext cx="3474720" cy="1255471"/>
           </a:xfrm>
           <a:prstGeom prst="roundRect">
             <a:avLst>
-              <a:gd name="adj" fmla="val 9600"/>
+              <a:gd name="adj" fmla="val 8740"/>
             </a:avLst>
           </a:prstGeom>
           <a:solidFill>
@@ -5820,7 +6036,7 @@
         </p:nvSpPr>
         <p:spPr>
           <a:xfrm>
-            <a:off x="7799832" y="4645152"/>
+            <a:off x="7799832" y="4489704"/>
             <a:ext cx="3145536" cy="256032"/>
           </a:xfrm>
           <a:prstGeom prst="rect">
@@ -5859,8 +6075,8 @@
         </p:nvSpPr>
         <p:spPr>
           <a:xfrm>
-            <a:off x="7799832" y="4974336"/>
-            <a:ext cx="3145536" cy="576072"/>
+            <a:off x="7799832" y="4818888"/>
+            <a:ext cx="3145536" cy="688543"/>
           </a:xfrm>
           <a:prstGeom prst="rect">
             <a:avLst/>
@@ -5886,7 +6102,7 @@
                 <a:ea typeface="Aptos" pitchFamily="34" charset="-122"/>
                 <a:cs typeface="Aptos" pitchFamily="34" charset="-120"/>
               </a:rPr>
-              <a:t>Identify what could go wrong, who could be affected, what safeguards are needed, and what evidence should be reviewed.</a:t>
+              <a:t>Identify what could go wrong, who could be affected, what safeguards are needed, and what evidence should be reviewed before use.</a:t>
             </a:r>
             <a:endParaRPr lang="en-US" sz="1320" dirty="0"/>
           </a:p>
@@ -6255,11 +6471,11 @@
         <p:spPr>
           <a:xfrm>
             <a:off x="7635240" y="1325880"/>
-            <a:ext cx="3474720" cy="1325880"/>
+            <a:ext cx="3474720" cy="1255471"/>
           </a:xfrm>
           <a:prstGeom prst="roundRect">
             <a:avLst>
-              <a:gd name="adj" fmla="val 8276"/>
+              <a:gd name="adj" fmla="val 8740"/>
             </a:avLst>
           </a:prstGeom>
           <a:solidFill>
@@ -6321,7 +6537,7 @@
         <p:spPr>
           <a:xfrm>
             <a:off x="7799832" y="1801368"/>
-            <a:ext cx="3145536" cy="758952"/>
+            <a:ext cx="3145536" cy="688543"/>
           </a:xfrm>
           <a:prstGeom prst="rect">
             <a:avLst/>
@@ -6361,12 +6577,12 @@
         </p:nvSpPr>
         <p:spPr>
           <a:xfrm>
-            <a:off x="7635240" y="2788920"/>
-            <a:ext cx="3474720" cy="1536192"/>
+            <a:off x="7635240" y="2718511"/>
+            <a:ext cx="3474720" cy="1328623"/>
           </a:xfrm>
           <a:prstGeom prst="roundRect">
             <a:avLst>
-              <a:gd name="adj" fmla="val 7143"/>
+              <a:gd name="adj" fmla="val 8259"/>
             </a:avLst>
           </a:prstGeom>
           <a:solidFill>
@@ -6388,7 +6604,7 @@
         </p:nvSpPr>
         <p:spPr>
           <a:xfrm>
-            <a:off x="7799832" y="2935224"/>
+            <a:off x="7799832" y="2864815"/>
             <a:ext cx="3145536" cy="256032"/>
           </a:xfrm>
           <a:prstGeom prst="rect">
@@ -6427,8 +6643,8 @@
         </p:nvSpPr>
         <p:spPr>
           <a:xfrm>
-            <a:off x="7818120" y="3300984"/>
-            <a:ext cx="3090672" cy="877824"/>
+            <a:off x="7818120" y="3230575"/>
+            <a:ext cx="3090672" cy="670255"/>
           </a:xfrm>
           <a:prstGeom prst="rect">
             <a:avLst/>
@@ -6502,12 +6718,12 @@
         </p:nvSpPr>
         <p:spPr>
           <a:xfrm>
-            <a:off x="7635240" y="4498848"/>
-            <a:ext cx="3474720" cy="1143000"/>
+            <a:off x="7635240" y="4184294"/>
+            <a:ext cx="3474720" cy="1466698"/>
           </a:xfrm>
           <a:prstGeom prst="roundRect">
             <a:avLst>
-              <a:gd name="adj" fmla="val 9600"/>
+              <a:gd name="adj" fmla="val 7481"/>
             </a:avLst>
           </a:prstGeom>
           <a:solidFill>
@@ -6529,7 +6745,7 @@
         </p:nvSpPr>
         <p:spPr>
           <a:xfrm>
-            <a:off x="7799832" y="4645152"/>
+            <a:off x="7799832" y="4330598"/>
             <a:ext cx="3145536" cy="256032"/>
           </a:xfrm>
           <a:prstGeom prst="rect">
@@ -6568,8 +6784,8 @@
         </p:nvSpPr>
         <p:spPr>
           <a:xfrm>
-            <a:off x="7799832" y="4974336"/>
-            <a:ext cx="3145536" cy="576072"/>
+            <a:off x="7799832" y="4659782"/>
+            <a:ext cx="3145536" cy="899770"/>
           </a:xfrm>
           <a:prstGeom prst="rect">
             <a:avLst/>
@@ -6595,7 +6811,7 @@
                 <a:ea typeface="Aptos" pitchFamily="34" charset="-122"/>
                 <a:cs typeface="Aptos" pitchFamily="34" charset="-120"/>
               </a:rPr>
-              <a:t>Use the concept to clarify workflow changes, dependencies, staffing, procurement requirements, training needs, and.</a:t>
+              <a:t>Use the concept to clarify workflow changes, dependencies, staffing, procurement requirements, training needs, and implementation checkpoints.</a:t>
             </a:r>
             <a:endParaRPr lang="en-US" sz="1320" dirty="0"/>
           </a:p>
@@ -6964,11 +7180,11 @@
         <p:spPr>
           <a:xfrm>
             <a:off x="7635240" y="1325880"/>
-            <a:ext cx="3474720" cy="1325880"/>
+            <a:ext cx="3474720" cy="1207008"/>
           </a:xfrm>
           <a:prstGeom prst="roundRect">
             <a:avLst>
-              <a:gd name="adj" fmla="val 8276"/>
+              <a:gd name="adj" fmla="val 9091"/>
             </a:avLst>
           </a:prstGeom>
           <a:solidFill>
@@ -7030,7 +7246,7 @@
         <p:spPr>
           <a:xfrm>
             <a:off x="7799832" y="1801368"/>
-            <a:ext cx="3145536" cy="758952"/>
+            <a:ext cx="3145536" cy="640080"/>
           </a:xfrm>
           <a:prstGeom prst="rect">
             <a:avLst/>
@@ -7070,12 +7286,12 @@
         </p:nvSpPr>
         <p:spPr>
           <a:xfrm>
-            <a:off x="7635240" y="2788920"/>
-            <a:ext cx="3474720" cy="1536192"/>
+            <a:off x="7635240" y="2670048"/>
+            <a:ext cx="3474720" cy="1377086"/>
           </a:xfrm>
           <a:prstGeom prst="roundRect">
             <a:avLst>
-              <a:gd name="adj" fmla="val 7143"/>
+              <a:gd name="adj" fmla="val 7968"/>
             </a:avLst>
           </a:prstGeom>
           <a:solidFill>
@@ -7097,7 +7313,7 @@
         </p:nvSpPr>
         <p:spPr>
           <a:xfrm>
-            <a:off x="7799832" y="2935224"/>
+            <a:off x="7799832" y="2816352"/>
             <a:ext cx="3145536" cy="256032"/>
           </a:xfrm>
           <a:prstGeom prst="rect">
@@ -7136,8 +7352,8 @@
         </p:nvSpPr>
         <p:spPr>
           <a:xfrm>
-            <a:off x="7818120" y="3300984"/>
-            <a:ext cx="3090672" cy="877824"/>
+            <a:off x="7818120" y="3182112"/>
+            <a:ext cx="3090672" cy="718718"/>
           </a:xfrm>
           <a:prstGeom prst="rect">
             <a:avLst/>
@@ -7211,12 +7427,12 @@
         </p:nvSpPr>
         <p:spPr>
           <a:xfrm>
-            <a:off x="7635240" y="4498848"/>
-            <a:ext cx="3474720" cy="1143000"/>
+            <a:off x="7635240" y="4184294"/>
+            <a:ext cx="3474720" cy="1466698"/>
           </a:xfrm>
           <a:prstGeom prst="roundRect">
             <a:avLst>
-              <a:gd name="adj" fmla="val 9600"/>
+              <a:gd name="adj" fmla="val 7481"/>
             </a:avLst>
           </a:prstGeom>
           <a:solidFill>
@@ -7238,7 +7454,7 @@
         </p:nvSpPr>
         <p:spPr>
           <a:xfrm>
-            <a:off x="7799832" y="4645152"/>
+            <a:off x="7799832" y="4330598"/>
             <a:ext cx="3145536" cy="256032"/>
           </a:xfrm>
           <a:prstGeom prst="rect">
@@ -7277,8 +7493,8 @@
         </p:nvSpPr>
         <p:spPr>
           <a:xfrm>
-            <a:off x="7799832" y="4974336"/>
-            <a:ext cx="3145536" cy="576072"/>
+            <a:off x="7799832" y="4659782"/>
+            <a:ext cx="3145536" cy="899770"/>
           </a:xfrm>
           <a:prstGeom prst="rect">
             <a:avLst/>
@@ -7304,7 +7520,7 @@
                 <a:ea typeface="Aptos" pitchFamily="34" charset="-122"/>
                 <a:cs typeface="Aptos" pitchFamily="34" charset="-120"/>
               </a:rPr>
-              <a:t>Use the concept to clarify workflow changes, dependencies, staffing, procurement requirements, training needs, and.</a:t>
+              <a:t>Use the concept to clarify workflow changes, dependencies, staffing, procurement requirements, training needs, and implementation checkpoints.</a:t>
             </a:r>
             <a:endParaRPr lang="en-US" sz="1320" dirty="0"/>
           </a:p>
@@ -7656,11 +7872,11 @@
         <p:spPr>
           <a:xfrm>
             <a:off x="7635240" y="1325880"/>
-            <a:ext cx="3474720" cy="1325880"/>
+            <a:ext cx="3474720" cy="1207008"/>
           </a:xfrm>
           <a:prstGeom prst="roundRect">
             <a:avLst>
-              <a:gd name="adj" fmla="val 8276"/>
+              <a:gd name="adj" fmla="val 9091"/>
             </a:avLst>
           </a:prstGeom>
           <a:solidFill>
@@ -7722,7 +7938,7 @@
         <p:spPr>
           <a:xfrm>
             <a:off x="7799832" y="1801368"/>
-            <a:ext cx="3145536" cy="758952"/>
+            <a:ext cx="3145536" cy="640080"/>
           </a:xfrm>
           <a:prstGeom prst="rect">
             <a:avLst/>
@@ -7762,12 +7978,12 @@
         </p:nvSpPr>
         <p:spPr>
           <a:xfrm>
-            <a:off x="7635240" y="2788920"/>
-            <a:ext cx="3474720" cy="1536192"/>
+            <a:off x="7635240" y="2670048"/>
+            <a:ext cx="3474720" cy="1377086"/>
           </a:xfrm>
           <a:prstGeom prst="roundRect">
             <a:avLst>
-              <a:gd name="adj" fmla="val 7143"/>
+              <a:gd name="adj" fmla="val 7968"/>
             </a:avLst>
           </a:prstGeom>
           <a:solidFill>
@@ -7789,7 +8005,7 @@
         </p:nvSpPr>
         <p:spPr>
           <a:xfrm>
-            <a:off x="7799832" y="2935224"/>
+            <a:off x="7799832" y="2816352"/>
             <a:ext cx="3145536" cy="256032"/>
           </a:xfrm>
           <a:prstGeom prst="rect">
@@ -7828,8 +8044,8 @@
         </p:nvSpPr>
         <p:spPr>
           <a:xfrm>
-            <a:off x="7818120" y="3300984"/>
-            <a:ext cx="3090672" cy="877824"/>
+            <a:off x="7818120" y="3182112"/>
+            <a:ext cx="3090672" cy="718718"/>
           </a:xfrm>
           <a:prstGeom prst="rect">
             <a:avLst/>
@@ -7886,12 +8102,12 @@
         </p:nvSpPr>
         <p:spPr>
           <a:xfrm>
-            <a:off x="7635240" y="4498848"/>
-            <a:ext cx="3474720" cy="1143000"/>
+            <a:off x="7635240" y="4184294"/>
+            <a:ext cx="3474720" cy="1466698"/>
           </a:xfrm>
           <a:prstGeom prst="roundRect">
             <a:avLst>
-              <a:gd name="adj" fmla="val 9600"/>
+              <a:gd name="adj" fmla="val 7481"/>
             </a:avLst>
           </a:prstGeom>
           <a:solidFill>
@@ -7913,7 +8129,7 @@
         </p:nvSpPr>
         <p:spPr>
           <a:xfrm>
-            <a:off x="7799832" y="4645152"/>
+            <a:off x="7799832" y="4330598"/>
             <a:ext cx="3145536" cy="256032"/>
           </a:xfrm>
           <a:prstGeom prst="rect">
@@ -7952,8 +8168,8 @@
         </p:nvSpPr>
         <p:spPr>
           <a:xfrm>
-            <a:off x="7799832" y="4974336"/>
-            <a:ext cx="3145536" cy="576072"/>
+            <a:off x="7799832" y="4659782"/>
+            <a:ext cx="3145536" cy="899770"/>
           </a:xfrm>
           <a:prstGeom prst="rect">
             <a:avLst/>
@@ -7979,7 +8195,7 @@
                 <a:ea typeface="Aptos" pitchFamily="34" charset="-122"/>
                 <a:cs typeface="Aptos" pitchFamily="34" charset="-120"/>
               </a:rPr>
-              <a:t>Use the concept to clarify workflow changes, dependencies, staffing, procurement requirements, training needs, and.</a:t>
+              <a:t>Use the concept to clarify workflow changes, dependencies, staffing, procurement requirements, training needs, and implementation checkpoints.</a:t>
             </a:r>
             <a:endParaRPr lang="en-US" sz="1320" dirty="0"/>
           </a:p>
@@ -8348,11 +8564,11 @@
         <p:spPr>
           <a:xfrm>
             <a:off x="7635240" y="1325880"/>
-            <a:ext cx="3474720" cy="1325880"/>
+            <a:ext cx="3474720" cy="1207008"/>
           </a:xfrm>
           <a:prstGeom prst="roundRect">
             <a:avLst>
-              <a:gd name="adj" fmla="val 8276"/>
+              <a:gd name="adj" fmla="val 9091"/>
             </a:avLst>
           </a:prstGeom>
           <a:solidFill>
@@ -8414,7 +8630,7 @@
         <p:spPr>
           <a:xfrm>
             <a:off x="7799832" y="1801368"/>
-            <a:ext cx="3145536" cy="758952"/>
+            <a:ext cx="3145536" cy="640080"/>
           </a:xfrm>
           <a:prstGeom prst="rect">
             <a:avLst/>
@@ -8454,12 +8670,12 @@
         </p:nvSpPr>
         <p:spPr>
           <a:xfrm>
-            <a:off x="7635240" y="2788920"/>
-            <a:ext cx="3474720" cy="1536192"/>
+            <a:off x="7635240" y="2670048"/>
+            <a:ext cx="3474720" cy="1377086"/>
           </a:xfrm>
           <a:prstGeom prst="roundRect">
             <a:avLst>
-              <a:gd name="adj" fmla="val 7143"/>
+              <a:gd name="adj" fmla="val 7968"/>
             </a:avLst>
           </a:prstGeom>
           <a:solidFill>
@@ -8481,7 +8697,7 @@
         </p:nvSpPr>
         <p:spPr>
           <a:xfrm>
-            <a:off x="7799832" y="2935224"/>
+            <a:off x="7799832" y="2816352"/>
             <a:ext cx="3145536" cy="256032"/>
           </a:xfrm>
           <a:prstGeom prst="rect">
@@ -8520,8 +8736,8 @@
         </p:nvSpPr>
         <p:spPr>
           <a:xfrm>
-            <a:off x="7818120" y="3300984"/>
-            <a:ext cx="3090672" cy="877824"/>
+            <a:off x="7818120" y="3182112"/>
+            <a:ext cx="3090672" cy="718718"/>
           </a:xfrm>
           <a:prstGeom prst="rect">
             <a:avLst/>
@@ -8578,12 +8794,12 @@
         </p:nvSpPr>
         <p:spPr>
           <a:xfrm>
-            <a:off x="7635240" y="4498848"/>
-            <a:ext cx="3474720" cy="1143000"/>
+            <a:off x="7635240" y="4184294"/>
+            <a:ext cx="3474720" cy="1466698"/>
           </a:xfrm>
           <a:prstGeom prst="roundRect">
             <a:avLst>
-              <a:gd name="adj" fmla="val 9600"/>
+              <a:gd name="adj" fmla="val 7481"/>
             </a:avLst>
           </a:prstGeom>
           <a:solidFill>
@@ -8605,7 +8821,7 @@
         </p:nvSpPr>
         <p:spPr>
           <a:xfrm>
-            <a:off x="7799832" y="4645152"/>
+            <a:off x="7799832" y="4330598"/>
             <a:ext cx="3145536" cy="256032"/>
           </a:xfrm>
           <a:prstGeom prst="rect">
@@ -8644,8 +8860,8 @@
         </p:nvSpPr>
         <p:spPr>
           <a:xfrm>
-            <a:off x="7799832" y="4974336"/>
-            <a:ext cx="3145536" cy="576072"/>
+            <a:off x="7799832" y="4659782"/>
+            <a:ext cx="3145536" cy="899770"/>
           </a:xfrm>
           <a:prstGeom prst="rect">
             <a:avLst/>
@@ -8671,7 +8887,7 @@
                 <a:ea typeface="Aptos" pitchFamily="34" charset="-122"/>
                 <a:cs typeface="Aptos" pitchFamily="34" charset="-120"/>
               </a:rPr>
-              <a:t>Use the assignment to test whether you can explain the concept, apply it to a realistic public health situation, and.</a:t>
+              <a:t>Use the assignment to test whether you can explain the concept, apply it to a realistic public health situation, and identify what would need review before the work moves forward.</a:t>
             </a:r>
             <a:endParaRPr lang="en-US" sz="1320" dirty="0"/>
           </a:p>
@@ -9040,11 +9256,11 @@
         <p:spPr>
           <a:xfrm>
             <a:off x="7635240" y="1325880"/>
-            <a:ext cx="3474720" cy="1325880"/>
+            <a:ext cx="3474720" cy="1207008"/>
           </a:xfrm>
           <a:prstGeom prst="roundRect">
             <a:avLst>
-              <a:gd name="adj" fmla="val 8276"/>
+              <a:gd name="adj" fmla="val 9091"/>
             </a:avLst>
           </a:prstGeom>
           <a:solidFill>
@@ -9106,7 +9322,7 @@
         <p:spPr>
           <a:xfrm>
             <a:off x="7799832" y="1801368"/>
-            <a:ext cx="3145536" cy="758952"/>
+            <a:ext cx="3145536" cy="640080"/>
           </a:xfrm>
           <a:prstGeom prst="rect">
             <a:avLst/>
@@ -9146,12 +9362,12 @@
         </p:nvSpPr>
         <p:spPr>
           <a:xfrm>
-            <a:off x="7635240" y="2788920"/>
-            <a:ext cx="3474720" cy="1536192"/>
+            <a:off x="7635240" y="2670048"/>
+            <a:ext cx="3474720" cy="1377086"/>
           </a:xfrm>
           <a:prstGeom prst="roundRect">
             <a:avLst>
-              <a:gd name="adj" fmla="val 7143"/>
+              <a:gd name="adj" fmla="val 7968"/>
             </a:avLst>
           </a:prstGeom>
           <a:solidFill>
@@ -9173,7 +9389,7 @@
         </p:nvSpPr>
         <p:spPr>
           <a:xfrm>
-            <a:off x="7799832" y="2935224"/>
+            <a:off x="7799832" y="2816352"/>
             <a:ext cx="3145536" cy="256032"/>
           </a:xfrm>
           <a:prstGeom prst="rect">
@@ -9212,8 +9428,8 @@
         </p:nvSpPr>
         <p:spPr>
           <a:xfrm>
-            <a:off x="7818120" y="3300984"/>
-            <a:ext cx="3090672" cy="877824"/>
+            <a:off x="7818120" y="3182112"/>
+            <a:ext cx="3090672" cy="718718"/>
           </a:xfrm>
           <a:prstGeom prst="rect">
             <a:avLst/>
@@ -9287,12 +9503,12 @@
         </p:nvSpPr>
         <p:spPr>
           <a:xfrm>
-            <a:off x="7635240" y="4498848"/>
-            <a:ext cx="3474720" cy="1143000"/>
+            <a:off x="7635240" y="4184294"/>
+            <a:ext cx="3474720" cy="1466698"/>
           </a:xfrm>
           <a:prstGeom prst="roundRect">
             <a:avLst>
-              <a:gd name="adj" fmla="val 9600"/>
+              <a:gd name="adj" fmla="val 7481"/>
             </a:avLst>
           </a:prstGeom>
           <a:solidFill>
@@ -9314,7 +9530,7 @@
         </p:nvSpPr>
         <p:spPr>
           <a:xfrm>
-            <a:off x="7799832" y="4645152"/>
+            <a:off x="7799832" y="4330598"/>
             <a:ext cx="3145536" cy="256032"/>
           </a:xfrm>
           <a:prstGeom prst="rect">
@@ -9353,8 +9569,8 @@
         </p:nvSpPr>
         <p:spPr>
           <a:xfrm>
-            <a:off x="7799832" y="4974336"/>
-            <a:ext cx="3145536" cy="576072"/>
+            <a:off x="7799832" y="4659782"/>
+            <a:ext cx="3145536" cy="899770"/>
           </a:xfrm>
           <a:prstGeom prst="rect">
             <a:avLst/>
@@ -9380,7 +9596,7 @@
                 <a:ea typeface="Aptos" pitchFamily="34" charset="-122"/>
                 <a:cs typeface="Aptos" pitchFamily="34" charset="-120"/>
               </a:rPr>
-              <a:t>Use the concept to clarify workflow changes, dependencies, staffing, procurement requirements, training needs, and.</a:t>
+              <a:t>Use the concept to clarify workflow changes, dependencies, staffing, procurement requirements, training needs, and implementation checkpoints.</a:t>
             </a:r>
             <a:endParaRPr lang="en-US" sz="1320" dirty="0"/>
           </a:p>
@@ -9715,11 +9931,11 @@
         <p:spPr>
           <a:xfrm>
             <a:off x="7635240" y="1325880"/>
-            <a:ext cx="3474720" cy="1325880"/>
+            <a:ext cx="3474720" cy="1207008"/>
           </a:xfrm>
           <a:prstGeom prst="roundRect">
             <a:avLst>
-              <a:gd name="adj" fmla="val 8276"/>
+              <a:gd name="adj" fmla="val 9091"/>
             </a:avLst>
           </a:prstGeom>
           <a:solidFill>
@@ -9781,7 +9997,7 @@
         <p:spPr>
           <a:xfrm>
             <a:off x="7799832" y="1801368"/>
-            <a:ext cx="3145536" cy="758952"/>
+            <a:ext cx="3145536" cy="640080"/>
           </a:xfrm>
           <a:prstGeom prst="rect">
             <a:avLst/>
@@ -9821,12 +10037,12 @@
         </p:nvSpPr>
         <p:spPr>
           <a:xfrm>
-            <a:off x="7635240" y="2788920"/>
-            <a:ext cx="3474720" cy="1536192"/>
+            <a:off x="7635240" y="2670048"/>
+            <a:ext cx="3474720" cy="1377086"/>
           </a:xfrm>
           <a:prstGeom prst="roundRect">
             <a:avLst>
-              <a:gd name="adj" fmla="val 7143"/>
+              <a:gd name="adj" fmla="val 7968"/>
             </a:avLst>
           </a:prstGeom>
           <a:solidFill>
@@ -9848,7 +10064,7 @@
         </p:nvSpPr>
         <p:spPr>
           <a:xfrm>
-            <a:off x="7799832" y="2935224"/>
+            <a:off x="7799832" y="2816352"/>
             <a:ext cx="3145536" cy="256032"/>
           </a:xfrm>
           <a:prstGeom prst="rect">
@@ -9887,8 +10103,8 @@
         </p:nvSpPr>
         <p:spPr>
           <a:xfrm>
-            <a:off x="7818120" y="3300984"/>
-            <a:ext cx="3090672" cy="877824"/>
+            <a:off x="7818120" y="3182112"/>
+            <a:ext cx="3090672" cy="718718"/>
           </a:xfrm>
           <a:prstGeom prst="rect">
             <a:avLst/>
@@ -9928,12 +10144,12 @@
         </p:nvSpPr>
         <p:spPr>
           <a:xfrm>
-            <a:off x="7635240" y="4498848"/>
-            <a:ext cx="3474720" cy="1143000"/>
+            <a:off x="7635240" y="4184294"/>
+            <a:ext cx="3474720" cy="1466698"/>
           </a:xfrm>
           <a:prstGeom prst="roundRect">
             <a:avLst>
-              <a:gd name="adj" fmla="val 9600"/>
+              <a:gd name="adj" fmla="val 7481"/>
             </a:avLst>
           </a:prstGeom>
           <a:solidFill>
@@ -9955,7 +10171,7 @@
         </p:nvSpPr>
         <p:spPr>
           <a:xfrm>
-            <a:off x="7799832" y="4645152"/>
+            <a:off x="7799832" y="4330598"/>
             <a:ext cx="3145536" cy="256032"/>
           </a:xfrm>
           <a:prstGeom prst="rect">
@@ -9994,8 +10210,8 @@
         </p:nvSpPr>
         <p:spPr>
           <a:xfrm>
-            <a:off x="7799832" y="4974336"/>
-            <a:ext cx="3145536" cy="576072"/>
+            <a:off x="7799832" y="4659782"/>
+            <a:ext cx="3145536" cy="899770"/>
           </a:xfrm>
           <a:prstGeom prst="rect">
             <a:avLst/>
@@ -10021,7 +10237,7 @@
                 <a:ea typeface="Aptos" pitchFamily="34" charset="-122"/>
                 <a:cs typeface="Aptos" pitchFamily="34" charset="-120"/>
               </a:rPr>
-              <a:t>Use the concept to clarify workflow changes, dependencies, staffing, procurement requirements, training needs, and.</a:t>
+              <a:t>Use the concept to clarify workflow changes, dependencies, staffing, procurement requirements, training needs, and implementation checkpoints.</a:t>
             </a:r>
             <a:endParaRPr lang="en-US" sz="1320" dirty="0"/>
           </a:p>
@@ -10992,11 +11208,11 @@
         <p:spPr>
           <a:xfrm>
             <a:off x="7635240" y="1325880"/>
-            <a:ext cx="3474720" cy="1325880"/>
+            <a:ext cx="3474720" cy="1207008"/>
           </a:xfrm>
           <a:prstGeom prst="roundRect">
             <a:avLst>
-              <a:gd name="adj" fmla="val 8276"/>
+              <a:gd name="adj" fmla="val 9091"/>
             </a:avLst>
           </a:prstGeom>
           <a:solidFill>
@@ -11058,7 +11274,7 @@
         <p:spPr>
           <a:xfrm>
             <a:off x="7799832" y="1801368"/>
-            <a:ext cx="3145536" cy="758952"/>
+            <a:ext cx="3145536" cy="640080"/>
           </a:xfrm>
           <a:prstGeom prst="rect">
             <a:avLst/>
@@ -11098,12 +11314,12 @@
         </p:nvSpPr>
         <p:spPr>
           <a:xfrm>
-            <a:off x="7635240" y="2788920"/>
-            <a:ext cx="3474720" cy="1536192"/>
+            <a:off x="7635240" y="2670048"/>
+            <a:ext cx="3474720" cy="1377086"/>
           </a:xfrm>
           <a:prstGeom prst="roundRect">
             <a:avLst>
-              <a:gd name="adj" fmla="val 7143"/>
+              <a:gd name="adj" fmla="val 7968"/>
             </a:avLst>
           </a:prstGeom>
           <a:solidFill>
@@ -11125,7 +11341,7 @@
         </p:nvSpPr>
         <p:spPr>
           <a:xfrm>
-            <a:off x="7799832" y="2935224"/>
+            <a:off x="7799832" y="2816352"/>
             <a:ext cx="3145536" cy="256032"/>
           </a:xfrm>
           <a:prstGeom prst="rect">
@@ -11164,8 +11380,8 @@
         </p:nvSpPr>
         <p:spPr>
           <a:xfrm>
-            <a:off x="7818120" y="3300984"/>
-            <a:ext cx="3090672" cy="877824"/>
+            <a:off x="7818120" y="3182112"/>
+            <a:ext cx="3090672" cy="718718"/>
           </a:xfrm>
           <a:prstGeom prst="rect">
             <a:avLst/>
@@ -11239,12 +11455,12 @@
         </p:nvSpPr>
         <p:spPr>
           <a:xfrm>
-            <a:off x="7635240" y="4498848"/>
-            <a:ext cx="3474720" cy="1143000"/>
+            <a:off x="7635240" y="4184294"/>
+            <a:ext cx="3474720" cy="1466698"/>
           </a:xfrm>
           <a:prstGeom prst="roundRect">
             <a:avLst>
-              <a:gd name="adj" fmla="val 9600"/>
+              <a:gd name="adj" fmla="val 7481"/>
             </a:avLst>
           </a:prstGeom>
           <a:solidFill>
@@ -11266,7 +11482,7 @@
         </p:nvSpPr>
         <p:spPr>
           <a:xfrm>
-            <a:off x="7799832" y="4645152"/>
+            <a:off x="7799832" y="4330598"/>
             <a:ext cx="3145536" cy="256032"/>
           </a:xfrm>
           <a:prstGeom prst="rect">
@@ -11305,8 +11521,8 @@
         </p:nvSpPr>
         <p:spPr>
           <a:xfrm>
-            <a:off x="7799832" y="4974336"/>
-            <a:ext cx="3145536" cy="576072"/>
+            <a:off x="7799832" y="4659782"/>
+            <a:ext cx="3145536" cy="899770"/>
           </a:xfrm>
           <a:prstGeom prst="rect">
             <a:avLst/>
@@ -11332,7 +11548,7 @@
                 <a:ea typeface="Aptos" pitchFamily="34" charset="-122"/>
                 <a:cs typeface="Aptos" pitchFamily="34" charset="-120"/>
               </a:rPr>
-              <a:t>Use the assignment to test whether you can explain the concept, apply it to a realistic public health situation, and.</a:t>
+              <a:t>Use the assignment to test whether you can explain the concept, apply it to a realistic public health situation, and identify what would need review before the work moves forward.</a:t>
             </a:r>
             <a:endParaRPr lang="en-US" sz="1320" dirty="0"/>
           </a:p>
@@ -11701,11 +11917,11 @@
         <p:spPr>
           <a:xfrm>
             <a:off x="7635240" y="1325880"/>
-            <a:ext cx="3474720" cy="1325880"/>
+            <a:ext cx="3474720" cy="1207008"/>
           </a:xfrm>
           <a:prstGeom prst="roundRect">
             <a:avLst>
-              <a:gd name="adj" fmla="val 8276"/>
+              <a:gd name="adj" fmla="val 9091"/>
             </a:avLst>
           </a:prstGeom>
           <a:solidFill>
@@ -11767,7 +11983,7 @@
         <p:spPr>
           <a:xfrm>
             <a:off x="7799832" y="1801368"/>
-            <a:ext cx="3145536" cy="758952"/>
+            <a:ext cx="3145536" cy="640080"/>
           </a:xfrm>
           <a:prstGeom prst="rect">
             <a:avLst/>
@@ -11807,12 +12023,12 @@
         </p:nvSpPr>
         <p:spPr>
           <a:xfrm>
-            <a:off x="7635240" y="2788920"/>
-            <a:ext cx="3474720" cy="1536192"/>
+            <a:off x="7635240" y="2670048"/>
+            <a:ext cx="3474720" cy="1377086"/>
           </a:xfrm>
           <a:prstGeom prst="roundRect">
             <a:avLst>
-              <a:gd name="adj" fmla="val 7143"/>
+              <a:gd name="adj" fmla="val 7968"/>
             </a:avLst>
           </a:prstGeom>
           <a:solidFill>
@@ -11834,7 +12050,7 @@
         </p:nvSpPr>
         <p:spPr>
           <a:xfrm>
-            <a:off x="7799832" y="2935224"/>
+            <a:off x="7799832" y="2816352"/>
             <a:ext cx="3145536" cy="256032"/>
           </a:xfrm>
           <a:prstGeom prst="rect">
@@ -11873,8 +12089,8 @@
         </p:nvSpPr>
         <p:spPr>
           <a:xfrm>
-            <a:off x="7818120" y="3300984"/>
-            <a:ext cx="3090672" cy="877824"/>
+            <a:off x="7818120" y="3182112"/>
+            <a:ext cx="3090672" cy="718718"/>
           </a:xfrm>
           <a:prstGeom prst="rect">
             <a:avLst/>
@@ -11948,12 +12164,12 @@
         </p:nvSpPr>
         <p:spPr>
           <a:xfrm>
-            <a:off x="7635240" y="4498848"/>
-            <a:ext cx="3474720" cy="1143000"/>
+            <a:off x="7635240" y="4184294"/>
+            <a:ext cx="3474720" cy="1466698"/>
           </a:xfrm>
           <a:prstGeom prst="roundRect">
             <a:avLst>
-              <a:gd name="adj" fmla="val 9600"/>
+              <a:gd name="adj" fmla="val 7481"/>
             </a:avLst>
           </a:prstGeom>
           <a:solidFill>
@@ -11975,7 +12191,7 @@
         </p:nvSpPr>
         <p:spPr>
           <a:xfrm>
-            <a:off x="7799832" y="4645152"/>
+            <a:off x="7799832" y="4330598"/>
             <a:ext cx="3145536" cy="256032"/>
           </a:xfrm>
           <a:prstGeom prst="rect">
@@ -12014,8 +12230,8 @@
         </p:nvSpPr>
         <p:spPr>
           <a:xfrm>
-            <a:off x="7799832" y="4974336"/>
-            <a:ext cx="3145536" cy="576072"/>
+            <a:off x="7799832" y="4659782"/>
+            <a:ext cx="3145536" cy="899770"/>
           </a:xfrm>
           <a:prstGeom prst="rect">
             <a:avLst/>
@@ -12041,7 +12257,7 @@
                 <a:ea typeface="Aptos" pitchFamily="34" charset="-122"/>
                 <a:cs typeface="Aptos" pitchFamily="34" charset="-120"/>
               </a:rPr>
-              <a:t>Use the assignment to test whether you can explain the concept, apply it to a realistic public health situation, and.</a:t>
+              <a:t>Use the assignment to test whether you can explain the concept, apply it to a realistic public health situation, and identify what would need review before the work moves forward.</a:t>
             </a:r>
             <a:endParaRPr lang="en-US" sz="1320" dirty="0"/>
           </a:p>
@@ -12410,11 +12626,11 @@
         <p:spPr>
           <a:xfrm>
             <a:off x="7635240" y="1325880"/>
-            <a:ext cx="3474720" cy="1325880"/>
+            <a:ext cx="3474720" cy="1207008"/>
           </a:xfrm>
           <a:prstGeom prst="roundRect">
             <a:avLst>
-              <a:gd name="adj" fmla="val 8276"/>
+              <a:gd name="adj" fmla="val 9091"/>
             </a:avLst>
           </a:prstGeom>
           <a:solidFill>
@@ -12476,7 +12692,7 @@
         <p:spPr>
           <a:xfrm>
             <a:off x="7799832" y="1801368"/>
-            <a:ext cx="3145536" cy="758952"/>
+            <a:ext cx="3145536" cy="640080"/>
           </a:xfrm>
           <a:prstGeom prst="rect">
             <a:avLst/>
@@ -12516,12 +12732,12 @@
         </p:nvSpPr>
         <p:spPr>
           <a:xfrm>
-            <a:off x="7635240" y="2788920"/>
-            <a:ext cx="3474720" cy="1536192"/>
+            <a:off x="7635240" y="2670048"/>
+            <a:ext cx="3474720" cy="1377086"/>
           </a:xfrm>
           <a:prstGeom prst="roundRect">
             <a:avLst>
-              <a:gd name="adj" fmla="val 7143"/>
+              <a:gd name="adj" fmla="val 7968"/>
             </a:avLst>
           </a:prstGeom>
           <a:solidFill>
@@ -12543,7 +12759,7 @@
         </p:nvSpPr>
         <p:spPr>
           <a:xfrm>
-            <a:off x="7799832" y="2935224"/>
+            <a:off x="7799832" y="2816352"/>
             <a:ext cx="3145536" cy="256032"/>
           </a:xfrm>
           <a:prstGeom prst="rect">
@@ -12582,8 +12798,8 @@
         </p:nvSpPr>
         <p:spPr>
           <a:xfrm>
-            <a:off x="7818120" y="3300984"/>
-            <a:ext cx="3090672" cy="877824"/>
+            <a:off x="7818120" y="3182112"/>
+            <a:ext cx="3090672" cy="718718"/>
           </a:xfrm>
           <a:prstGeom prst="rect">
             <a:avLst/>
@@ -12640,12 +12856,12 @@
         </p:nvSpPr>
         <p:spPr>
           <a:xfrm>
-            <a:off x="7635240" y="4498848"/>
-            <a:ext cx="3474720" cy="1143000"/>
+            <a:off x="7635240" y="4184294"/>
+            <a:ext cx="3474720" cy="1466698"/>
           </a:xfrm>
           <a:prstGeom prst="roundRect">
             <a:avLst>
-              <a:gd name="adj" fmla="val 9600"/>
+              <a:gd name="adj" fmla="val 7481"/>
             </a:avLst>
           </a:prstGeom>
           <a:solidFill>
@@ -12667,7 +12883,7 @@
         </p:nvSpPr>
         <p:spPr>
           <a:xfrm>
-            <a:off x="7799832" y="4645152"/>
+            <a:off x="7799832" y="4330598"/>
             <a:ext cx="3145536" cy="256032"/>
           </a:xfrm>
           <a:prstGeom prst="rect">
@@ -12706,8 +12922,8 @@
         </p:nvSpPr>
         <p:spPr>
           <a:xfrm>
-            <a:off x="7799832" y="4974336"/>
-            <a:ext cx="3145536" cy="576072"/>
+            <a:off x="7799832" y="4659782"/>
+            <a:ext cx="3145536" cy="899770"/>
           </a:xfrm>
           <a:prstGeom prst="rect">
             <a:avLst/>
@@ -12733,7 +12949,7 @@
                 <a:ea typeface="Aptos" pitchFamily="34" charset="-122"/>
                 <a:cs typeface="Aptos" pitchFamily="34" charset="-120"/>
               </a:rPr>
-              <a:t>Use the concept to clarify workflow changes, dependencies, staffing, procurement requirements, training needs, and.</a:t>
+              <a:t>Use the concept to clarify workflow changes, dependencies, staffing, procurement requirements, training needs, and implementation checkpoints.</a:t>
             </a:r>
             <a:endParaRPr lang="en-US" sz="1320" dirty="0"/>
           </a:p>
@@ -13211,7 +13427,7 @@
                 <a:ea typeface="Aptos" pitchFamily="34" charset="-122"/>
                 <a:cs typeface="Aptos" pitchFamily="34" charset="-120"/>
               </a:rPr>
-              <a:t>Use the related plays to identify decisions, participants, timing, approvals, and documentation needed for responsible.</a:t>
+              <a:t>Use the related plays to identify decisions, participants, timing, approvals, and documentation needed for responsible implementation.</a:t>
             </a:r>
             <a:endParaRPr lang="en-US" sz="1320" dirty="0"/>
           </a:p>
@@ -13830,7 +14046,7 @@
                 <a:ea typeface="Aptos" pitchFamily="34" charset="-122"/>
                 <a:cs typeface="Aptos" pitchFamily="34" charset="-120"/>
               </a:rPr>
-              <a:t>Use linked tools when your department needs a structured worksheet, template, checklist, review process, or.</a:t>
+              <a:t>Use linked tools when your department needs a structured worksheet, template, checklist, review process, or documentation artifact.</a:t>
             </a:r>
             <a:endParaRPr lang="en-US" sz="1320" dirty="0"/>
           </a:p>
@@ -14340,11 +14556,11 @@
         <p:spPr>
           <a:xfrm>
             <a:off x="7635240" y="1325880"/>
-            <a:ext cx="3474720" cy="1325880"/>
+            <a:ext cx="3474720" cy="1207008"/>
           </a:xfrm>
           <a:prstGeom prst="roundRect">
             <a:avLst>
-              <a:gd name="adj" fmla="val 8276"/>
+              <a:gd name="adj" fmla="val 9091"/>
             </a:avLst>
           </a:prstGeom>
           <a:solidFill>
@@ -14406,7 +14622,7 @@
         <p:spPr>
           <a:xfrm>
             <a:off x="7799832" y="1801368"/>
-            <a:ext cx="3145536" cy="758952"/>
+            <a:ext cx="3145536" cy="640080"/>
           </a:xfrm>
           <a:prstGeom prst="rect">
             <a:avLst/>
@@ -14446,12 +14662,12 @@
         </p:nvSpPr>
         <p:spPr>
           <a:xfrm>
-            <a:off x="7635240" y="2788920"/>
-            <a:ext cx="3474720" cy="1536192"/>
+            <a:off x="7635240" y="2670048"/>
+            <a:ext cx="3474720" cy="1377086"/>
           </a:xfrm>
           <a:prstGeom prst="roundRect">
             <a:avLst>
-              <a:gd name="adj" fmla="val 7143"/>
+              <a:gd name="adj" fmla="val 7968"/>
             </a:avLst>
           </a:prstGeom>
           <a:solidFill>
@@ -14473,7 +14689,7 @@
         </p:nvSpPr>
         <p:spPr>
           <a:xfrm>
-            <a:off x="7799832" y="2935224"/>
+            <a:off x="7799832" y="2816352"/>
             <a:ext cx="3145536" cy="256032"/>
           </a:xfrm>
           <a:prstGeom prst="rect">
@@ -14512,8 +14728,8 @@
         </p:nvSpPr>
         <p:spPr>
           <a:xfrm>
-            <a:off x="7818120" y="3300984"/>
-            <a:ext cx="3090672" cy="877824"/>
+            <a:off x="7818120" y="3182112"/>
+            <a:ext cx="3090672" cy="718718"/>
           </a:xfrm>
           <a:prstGeom prst="rect">
             <a:avLst/>
@@ -14587,12 +14803,12 @@
         </p:nvSpPr>
         <p:spPr>
           <a:xfrm>
-            <a:off x="7635240" y="4498848"/>
-            <a:ext cx="3474720" cy="1143000"/>
+            <a:off x="7635240" y="4184294"/>
+            <a:ext cx="3474720" cy="1466698"/>
           </a:xfrm>
           <a:prstGeom prst="roundRect">
             <a:avLst>
-              <a:gd name="adj" fmla="val 9600"/>
+              <a:gd name="adj" fmla="val 7481"/>
             </a:avLst>
           </a:prstGeom>
           <a:solidFill>
@@ -14614,7 +14830,7 @@
         </p:nvSpPr>
         <p:spPr>
           <a:xfrm>
-            <a:off x="7799832" y="4645152"/>
+            <a:off x="7799832" y="4330598"/>
             <a:ext cx="3145536" cy="256032"/>
           </a:xfrm>
           <a:prstGeom prst="rect">
@@ -14653,8 +14869,8 @@
         </p:nvSpPr>
         <p:spPr>
           <a:xfrm>
-            <a:off x="7799832" y="4974336"/>
-            <a:ext cx="3145536" cy="576072"/>
+            <a:off x="7799832" y="4659782"/>
+            <a:ext cx="3145536" cy="899770"/>
           </a:xfrm>
           <a:prstGeom prst="rect">
             <a:avLst/>
@@ -14680,7 +14896,7 @@
                 <a:ea typeface="Aptos" pitchFamily="34" charset="-122"/>
                 <a:cs typeface="Aptos" pitchFamily="34" charset="-120"/>
               </a:rPr>
-              <a:t>Use the assignment to test whether you can explain the concept, apply it to a realistic public health situation, and.</a:t>
+              <a:t>Use the assignment to test whether you can explain the concept, apply it to a realistic public health situation, and identify what would need review before the work moves forward.</a:t>
             </a:r>
             <a:endParaRPr lang="en-US" sz="1320" dirty="0"/>
           </a:p>
@@ -15015,11 +15231,11 @@
         <p:spPr>
           <a:xfrm>
             <a:off x="7635240" y="1325880"/>
-            <a:ext cx="3474720" cy="1325880"/>
+            <a:ext cx="3474720" cy="1207008"/>
           </a:xfrm>
           <a:prstGeom prst="roundRect">
             <a:avLst>
-              <a:gd name="adj" fmla="val 8276"/>
+              <a:gd name="adj" fmla="val 9091"/>
             </a:avLst>
           </a:prstGeom>
           <a:solidFill>
@@ -15081,7 +15297,7 @@
         <p:spPr>
           <a:xfrm>
             <a:off x="7799832" y="1801368"/>
-            <a:ext cx="3145536" cy="758952"/>
+            <a:ext cx="3145536" cy="640080"/>
           </a:xfrm>
           <a:prstGeom prst="rect">
             <a:avLst/>
@@ -15121,12 +15337,12 @@
         </p:nvSpPr>
         <p:spPr>
           <a:xfrm>
-            <a:off x="7635240" y="2788920"/>
-            <a:ext cx="3474720" cy="1536192"/>
+            <a:off x="7635240" y="2670048"/>
+            <a:ext cx="3474720" cy="1377086"/>
           </a:xfrm>
           <a:prstGeom prst="roundRect">
             <a:avLst>
-              <a:gd name="adj" fmla="val 7143"/>
+              <a:gd name="adj" fmla="val 7968"/>
             </a:avLst>
           </a:prstGeom>
           <a:solidFill>
@@ -15148,7 +15364,7 @@
         </p:nvSpPr>
         <p:spPr>
           <a:xfrm>
-            <a:off x="7799832" y="2935224"/>
+            <a:off x="7799832" y="2816352"/>
             <a:ext cx="3145536" cy="256032"/>
           </a:xfrm>
           <a:prstGeom prst="rect">
@@ -15187,8 +15403,8 @@
         </p:nvSpPr>
         <p:spPr>
           <a:xfrm>
-            <a:off x="7818120" y="3300984"/>
-            <a:ext cx="3090672" cy="877824"/>
+            <a:off x="7818120" y="3182112"/>
+            <a:ext cx="3090672" cy="718718"/>
           </a:xfrm>
           <a:prstGeom prst="rect">
             <a:avLst/>
@@ -15228,12 +15444,12 @@
         </p:nvSpPr>
         <p:spPr>
           <a:xfrm>
-            <a:off x="7635240" y="4498848"/>
-            <a:ext cx="3474720" cy="1143000"/>
+            <a:off x="7635240" y="4184294"/>
+            <a:ext cx="3474720" cy="1466698"/>
           </a:xfrm>
           <a:prstGeom prst="roundRect">
             <a:avLst>
-              <a:gd name="adj" fmla="val 9600"/>
+              <a:gd name="adj" fmla="val 7481"/>
             </a:avLst>
           </a:prstGeom>
           <a:solidFill>
@@ -15255,7 +15471,7 @@
         </p:nvSpPr>
         <p:spPr>
           <a:xfrm>
-            <a:off x="7799832" y="4645152"/>
+            <a:off x="7799832" y="4330598"/>
             <a:ext cx="3145536" cy="256032"/>
           </a:xfrm>
           <a:prstGeom prst="rect">
@@ -15294,8 +15510,8 @@
         </p:nvSpPr>
         <p:spPr>
           <a:xfrm>
-            <a:off x="7799832" y="4974336"/>
-            <a:ext cx="3145536" cy="576072"/>
+            <a:off x="7799832" y="4659782"/>
+            <a:ext cx="3145536" cy="899770"/>
           </a:xfrm>
           <a:prstGeom prst="rect">
             <a:avLst/>
@@ -15321,7 +15537,7 @@
                 <a:ea typeface="Aptos" pitchFamily="34" charset="-122"/>
                 <a:cs typeface="Aptos" pitchFamily="34" charset="-120"/>
               </a:rPr>
-              <a:t>Use the assignment to test whether you can explain the concept, apply it to a realistic public health situation, and.</a:t>
+              <a:t>Use the assignment to test whether you can explain the concept, apply it to a realistic public health situation, and identify what would need review before the work moves forward.</a:t>
             </a:r>
             <a:endParaRPr lang="en-US" sz="1320" dirty="0"/>
           </a:p>
@@ -15690,11 +15906,11 @@
         <p:spPr>
           <a:xfrm>
             <a:off x="7635240" y="1325880"/>
-            <a:ext cx="3474720" cy="1325880"/>
+            <a:ext cx="3474720" cy="1255471"/>
           </a:xfrm>
           <a:prstGeom prst="roundRect">
             <a:avLst>
-              <a:gd name="adj" fmla="val 8276"/>
+              <a:gd name="adj" fmla="val 8740"/>
             </a:avLst>
           </a:prstGeom>
           <a:solidFill>
@@ -15756,7 +15972,7 @@
         <p:spPr>
           <a:xfrm>
             <a:off x="7799832" y="1801368"/>
-            <a:ext cx="3145536" cy="758952"/>
+            <a:ext cx="3145536" cy="688543"/>
           </a:xfrm>
           <a:prstGeom prst="rect">
             <a:avLst/>
@@ -15796,12 +16012,12 @@
         </p:nvSpPr>
         <p:spPr>
           <a:xfrm>
-            <a:off x="7635240" y="2788920"/>
-            <a:ext cx="3474720" cy="1536192"/>
+            <a:off x="7635240" y="2718511"/>
+            <a:ext cx="3474720" cy="1328623"/>
           </a:xfrm>
           <a:prstGeom prst="roundRect">
             <a:avLst>
-              <a:gd name="adj" fmla="val 7143"/>
+              <a:gd name="adj" fmla="val 8259"/>
             </a:avLst>
           </a:prstGeom>
           <a:solidFill>
@@ -15823,8 +16039,8 @@
         </p:nvSpPr>
         <p:spPr>
           <a:xfrm>
-            <a:off x="7799832" y="2935224"/>
-            <a:ext cx="3145536" cy="256032"/>
+            <a:off x="7799832" y="2846527"/>
+            <a:ext cx="3145536" cy="237744"/>
           </a:xfrm>
           <a:prstGeom prst="rect">
             <a:avLst/>
@@ -15840,7 +16056,7 @@
               <a:buNone/>
             </a:pPr>
             <a:r>
-              <a:rPr lang="en-US" sz="1300" b="1" dirty="0">
+              <a:rPr lang="en-US" sz="1250" b="1" dirty="0">
                 <a:solidFill>
                   <a:srgbClr val="0068B7"/>
                 </a:solidFill>
@@ -15848,101 +16064,317 @@
                 <a:ea typeface="Aptos" pitchFamily="34" charset="-122"/>
                 <a:cs typeface="Aptos" pitchFamily="34" charset="-120"/>
               </a:rPr>
-              <a:t>Concept checkpoints</a:t>
-            </a:r>
-            <a:endParaRPr lang="en-US" sz="1300" dirty="0"/>
-          </a:p>
-        </p:txBody>
-      </p:sp>
-      <p:sp>
-        <p:nvSpPr>
-          <p:cNvPr id="15" name="Text 13"/>
-          <p:cNvSpPr/>
-          <p:nvPr/>
-        </p:nvSpPr>
-        <p:spPr>
-          <a:xfrm>
-            <a:off x="7818120" y="3300984"/>
-            <a:ext cx="3090672" cy="877824"/>
-          </a:xfrm>
-          <a:prstGeom prst="rect">
-            <a:avLst/>
-          </a:prstGeom>
-          <a:noFill/>
-          <a:ln/>
-        </p:spPr>
-        <p:txBody>
-          <a:bodyPr wrap="square" lIns="508" tIns="508" rIns="508" bIns="508" rtlCol="0" anchor="t">
+              <a:t>Implementation path</a:t>
+            </a:r>
+            <a:endParaRPr lang="en-US" sz="1250" dirty="0"/>
+          </a:p>
+        </p:txBody>
+      </p:sp>
+      <p:sp>
+        <p:nvSpPr>
+          <p:cNvPr id="15" name="Shape 13"/>
+          <p:cNvSpPr/>
+          <p:nvPr/>
+        </p:nvSpPr>
+        <p:spPr>
+          <a:xfrm>
+            <a:off x="8763000" y="3399739"/>
+            <a:ext cx="164592" cy="0"/>
+          </a:xfrm>
+          <a:prstGeom prst="line">
+            <a:avLst/>
+          </a:prstGeom>
+          <a:noFill/>
+          <a:ln w="15240">
+            <a:solidFill>
+              <a:srgbClr val="8ABBD8"/>
+            </a:solidFill>
+            <a:prstDash val="solid"/>
+          </a:ln>
+        </p:spPr>
+      </p:sp>
+      <p:sp>
+        <p:nvSpPr>
+          <p:cNvPr id="16" name="Shape 14"/>
+          <p:cNvSpPr/>
+          <p:nvPr/>
+        </p:nvSpPr>
+        <p:spPr>
+          <a:xfrm>
+            <a:off x="7872984" y="3248863"/>
+            <a:ext cx="890016" cy="301752"/>
+          </a:xfrm>
+          <a:prstGeom prst="roundRect">
+            <a:avLst>
+              <a:gd name="adj" fmla="val 24242"/>
+            </a:avLst>
+          </a:prstGeom>
+          <a:solidFill>
+            <a:srgbClr val="0068B7"/>
+          </a:solidFill>
+          <a:ln w="12700">
+            <a:solidFill>
+              <a:srgbClr val="0068B7"/>
+            </a:solidFill>
+            <a:prstDash val="solid"/>
+          </a:ln>
+        </p:spPr>
+      </p:sp>
+      <p:sp>
+        <p:nvSpPr>
+          <p:cNvPr id="17" name="Text 15"/>
+          <p:cNvSpPr/>
+          <p:nvPr/>
+        </p:nvSpPr>
+        <p:spPr>
+          <a:xfrm>
+            <a:off x="7909560" y="3322015"/>
+            <a:ext cx="816864" cy="146304"/>
+          </a:xfrm>
+          <a:prstGeom prst="rect">
+            <a:avLst/>
+          </a:prstGeom>
+          <a:noFill/>
+          <a:ln/>
+        </p:spPr>
+        <p:txBody>
+          <a:bodyPr wrap="square" lIns="0" tIns="0" rIns="0" bIns="0" rtlCol="0" anchor="ctr">
             <a:normAutofit/>
           </a:bodyPr>
           <a:lstStyle/>
           <a:p>
-            <a:pPr indent="0" marL="0">
-              <a:buNone/>
-            </a:pPr>
-            <a:r>
-              <a:rPr lang="en-US" sz="1220" dirty="0">
-                <a:solidFill>
-                  <a:srgbClr val="17364A"/>
-                </a:solidFill>
-                <a:latin typeface="Aptos" pitchFamily="34" charset="0"/>
-                <a:ea typeface="Aptos" pitchFamily="34" charset="-122"/>
-                <a:cs typeface="Aptos" pitchFamily="34" charset="-120"/>
-              </a:rPr>
-              <a:t>Agentic AI refers to AI systems configured to pursue a goal.</a:t>
-            </a:r>
-            <a:endParaRPr lang="en-US" sz="1220" dirty="0"/>
-          </a:p>
-          <a:p>
-            <a:pPr indent="0" marL="0">
-              <a:buNone/>
-            </a:pPr>
-            <a:r>
-              <a:rPr lang="en-US" sz="1220" dirty="0">
-                <a:solidFill>
-                  <a:srgbClr val="17364A"/>
-                </a:solidFill>
-                <a:latin typeface="Aptos" pitchFamily="34" charset="0"/>
-                <a:ea typeface="Aptos" pitchFamily="34" charset="-122"/>
-                <a:cs typeface="Aptos" pitchFamily="34" charset="-120"/>
-              </a:rPr>
-              <a:t>In public health, agentic workflows may eventually support intake.</a:t>
-            </a:r>
-            <a:endParaRPr lang="en-US" sz="1220" dirty="0"/>
-          </a:p>
-          <a:p>
-            <a:pPr indent="0" marL="0">
-              <a:buNone/>
-            </a:pPr>
-            <a:r>
-              <a:rPr lang="en-US" sz="1220" dirty="0">
-                <a:solidFill>
-                  <a:srgbClr val="17364A"/>
-                </a:solidFill>
-                <a:latin typeface="Aptos" pitchFamily="34" charset="0"/>
-                <a:ea typeface="Aptos" pitchFamily="34" charset="-122"/>
-                <a:cs typeface="Aptos" pitchFamily="34" charset="-120"/>
-              </a:rPr>
-              <a:t>This module teaches learners how to design agentic workflows with.</a:t>
-            </a:r>
-            <a:endParaRPr lang="en-US" sz="1220" dirty="0"/>
-          </a:p>
-        </p:txBody>
-      </p:sp>
-      <p:sp>
-        <p:nvSpPr>
-          <p:cNvPr id="16" name="Shape 14"/>
-          <p:cNvSpPr/>
-          <p:nvPr/>
-        </p:nvSpPr>
-        <p:spPr>
-          <a:xfrm>
-            <a:off x="7635240" y="4498848"/>
-            <a:ext cx="3474720" cy="1143000"/>
+            <a:pPr algn="ctr" indent="0" marL="0">
+              <a:buNone/>
+            </a:pPr>
+            <a:r>
+              <a:rPr lang="en-US" sz="880" b="1" dirty="0">
+                <a:solidFill>
+                  <a:srgbClr val="FFFFFF"/>
+                </a:solidFill>
+                <a:latin typeface="Aptos" pitchFamily="34" charset="0"/>
+                <a:ea typeface="Aptos" pitchFamily="34" charset="-122"/>
+                <a:cs typeface="Aptos" pitchFamily="34" charset="-120"/>
+              </a:rPr>
+              <a:t>Need</a:t>
+            </a:r>
+            <a:endParaRPr lang="en-US" sz="880" dirty="0"/>
+          </a:p>
+        </p:txBody>
+      </p:sp>
+      <p:sp>
+        <p:nvSpPr>
+          <p:cNvPr id="18" name="Shape 16"/>
+          <p:cNvSpPr/>
+          <p:nvPr/>
+        </p:nvSpPr>
+        <p:spPr>
+          <a:xfrm>
+            <a:off x="9817608" y="3399739"/>
+            <a:ext cx="164592" cy="0"/>
+          </a:xfrm>
+          <a:prstGeom prst="line">
+            <a:avLst/>
+          </a:prstGeom>
+          <a:noFill/>
+          <a:ln w="15240">
+            <a:solidFill>
+              <a:srgbClr val="8ABBD8"/>
+            </a:solidFill>
+            <a:prstDash val="solid"/>
+          </a:ln>
+        </p:spPr>
+      </p:sp>
+      <p:sp>
+        <p:nvSpPr>
+          <p:cNvPr id="19" name="Shape 17"/>
+          <p:cNvSpPr/>
+          <p:nvPr/>
+        </p:nvSpPr>
+        <p:spPr>
+          <a:xfrm>
+            <a:off x="8927592" y="3248863"/>
+            <a:ext cx="890016" cy="301752"/>
           </a:xfrm>
           <a:prstGeom prst="roundRect">
             <a:avLst>
-              <a:gd name="adj" fmla="val 9600"/>
+              <a:gd name="adj" fmla="val 24242"/>
+            </a:avLst>
+          </a:prstGeom>
+          <a:solidFill>
+            <a:srgbClr val="2F8A28"/>
+          </a:solidFill>
+          <a:ln w="12700">
+            <a:solidFill>
+              <a:srgbClr val="2F8A28"/>
+            </a:solidFill>
+            <a:prstDash val="solid"/>
+          </a:ln>
+        </p:spPr>
+      </p:sp>
+      <p:sp>
+        <p:nvSpPr>
+          <p:cNvPr id="20" name="Text 18"/>
+          <p:cNvSpPr/>
+          <p:nvPr/>
+        </p:nvSpPr>
+        <p:spPr>
+          <a:xfrm>
+            <a:off x="8964168" y="3322015"/>
+            <a:ext cx="816864" cy="146304"/>
+          </a:xfrm>
+          <a:prstGeom prst="rect">
+            <a:avLst/>
+          </a:prstGeom>
+          <a:noFill/>
+          <a:ln/>
+        </p:spPr>
+        <p:txBody>
+          <a:bodyPr wrap="square" lIns="0" tIns="0" rIns="0" bIns="0" rtlCol="0" anchor="ctr">
+            <a:normAutofit/>
+          </a:bodyPr>
+          <a:lstStyle/>
+          <a:p>
+            <a:pPr algn="ctr" indent="0" marL="0">
+              <a:buNone/>
+            </a:pPr>
+            <a:r>
+              <a:rPr lang="en-US" sz="880" b="1" dirty="0">
+                <a:solidFill>
+                  <a:srgbClr val="FFFFFF"/>
+                </a:solidFill>
+                <a:latin typeface="Aptos" pitchFamily="34" charset="0"/>
+                <a:ea typeface="Aptos" pitchFamily="34" charset="-122"/>
+                <a:cs typeface="Aptos" pitchFamily="34" charset="-120"/>
+              </a:rPr>
+              <a:t>Build</a:t>
+            </a:r>
+            <a:endParaRPr lang="en-US" sz="880" dirty="0"/>
+          </a:p>
+        </p:txBody>
+      </p:sp>
+      <p:sp>
+        <p:nvSpPr>
+          <p:cNvPr id="21" name="Shape 19"/>
+          <p:cNvSpPr/>
+          <p:nvPr/>
+        </p:nvSpPr>
+        <p:spPr>
+          <a:xfrm>
+            <a:off x="9982200" y="3248863"/>
+            <a:ext cx="890016" cy="301752"/>
+          </a:xfrm>
+          <a:prstGeom prst="roundRect">
+            <a:avLst>
+              <a:gd name="adj" fmla="val 24242"/>
+            </a:avLst>
+          </a:prstGeom>
+          <a:solidFill>
+            <a:srgbClr val="6A4CA3"/>
+          </a:solidFill>
+          <a:ln w="12700">
+            <a:solidFill>
+              <a:srgbClr val="6A4CA3"/>
+            </a:solidFill>
+            <a:prstDash val="solid"/>
+          </a:ln>
+        </p:spPr>
+      </p:sp>
+      <p:sp>
+        <p:nvSpPr>
+          <p:cNvPr id="22" name="Text 20"/>
+          <p:cNvSpPr/>
+          <p:nvPr/>
+        </p:nvSpPr>
+        <p:spPr>
+          <a:xfrm>
+            <a:off x="10018776" y="3322015"/>
+            <a:ext cx="816864" cy="146304"/>
+          </a:xfrm>
+          <a:prstGeom prst="rect">
+            <a:avLst/>
+          </a:prstGeom>
+          <a:noFill/>
+          <a:ln/>
+        </p:spPr>
+        <p:txBody>
+          <a:bodyPr wrap="square" lIns="0" tIns="0" rIns="0" bIns="0" rtlCol="0" anchor="ctr">
+            <a:normAutofit/>
+          </a:bodyPr>
+          <a:lstStyle/>
+          <a:p>
+            <a:pPr algn="ctr" indent="0" marL="0">
+              <a:buNone/>
+            </a:pPr>
+            <a:r>
+              <a:rPr lang="en-US" sz="880" b="1" dirty="0">
+                <a:solidFill>
+                  <a:srgbClr val="FFFFFF"/>
+                </a:solidFill>
+                <a:latin typeface="Aptos" pitchFamily="34" charset="0"/>
+                <a:ea typeface="Aptos" pitchFamily="34" charset="-122"/>
+                <a:cs typeface="Aptos" pitchFamily="34" charset="-120"/>
+              </a:rPr>
+              <a:t>Adopt</a:t>
+            </a:r>
+            <a:endParaRPr lang="en-US" sz="880" dirty="0"/>
+          </a:p>
+        </p:txBody>
+      </p:sp>
+      <p:sp>
+        <p:nvSpPr>
+          <p:cNvPr id="23" name="Text 21"/>
+          <p:cNvSpPr/>
+          <p:nvPr/>
+        </p:nvSpPr>
+        <p:spPr>
+          <a:xfrm>
+            <a:off x="7854696" y="3742639"/>
+            <a:ext cx="3035808" cy="158191"/>
+          </a:xfrm>
+          <a:prstGeom prst="rect">
+            <a:avLst/>
+          </a:prstGeom>
+          <a:noFill/>
+          <a:ln/>
+        </p:spPr>
+        <p:txBody>
+          <a:bodyPr wrap="square" lIns="254" tIns="254" rIns="254" bIns="254" rtlCol="0" anchor="t">
+            <a:normAutofit/>
+          </a:bodyPr>
+          <a:lstStyle/>
+          <a:p>
+            <a:pPr indent="0" marL="0">
+              <a:buNone/>
+            </a:pPr>
+            <a:r>
+              <a:rPr lang="en-US" sz="1120" dirty="0">
+                <a:solidFill>
+                  <a:srgbClr val="17364A"/>
+                </a:solidFill>
+                <a:latin typeface="Aptos" pitchFamily="34" charset="0"/>
+                <a:ea typeface="Aptos" pitchFamily="34" charset="-122"/>
+                <a:cs typeface="Aptos" pitchFamily="34" charset="-120"/>
+              </a:rPr>
+              <a:t>Implementation work should make dependencies, approvals, training, and sustainment visible before launch.</a:t>
+            </a:r>
+            <a:endParaRPr lang="en-US" sz="1120" dirty="0"/>
+          </a:p>
+        </p:txBody>
+      </p:sp>
+      <p:sp>
+        <p:nvSpPr>
+          <p:cNvPr id="24" name="Shape 22"/>
+          <p:cNvSpPr/>
+          <p:nvPr/>
+        </p:nvSpPr>
+        <p:spPr>
+          <a:xfrm>
+            <a:off x="7635240" y="4184294"/>
+            <a:ext cx="3474720" cy="1466698"/>
+          </a:xfrm>
+          <a:prstGeom prst="roundRect">
+            <a:avLst>
+              <a:gd name="adj" fmla="val 7481"/>
             </a:avLst>
           </a:prstGeom>
           <a:solidFill>
@@ -15958,13 +16390,13 @@
       </p:sp>
       <p:sp>
         <p:nvSpPr>
-          <p:cNvPr id="17" name="Text 15"/>
-          <p:cNvSpPr/>
-          <p:nvPr/>
-        </p:nvSpPr>
-        <p:spPr>
-          <a:xfrm>
-            <a:off x="7799832" y="4645152"/>
+          <p:cNvPr id="25" name="Text 23"/>
+          <p:cNvSpPr/>
+          <p:nvPr/>
+        </p:nvSpPr>
+        <p:spPr>
+          <a:xfrm>
+            <a:off x="7799832" y="4330598"/>
             <a:ext cx="3145536" cy="256032"/>
           </a:xfrm>
           <a:prstGeom prst="rect">
@@ -15997,14 +16429,14 @@
       </p:sp>
       <p:sp>
         <p:nvSpPr>
-          <p:cNvPr id="18" name="Text 16"/>
-          <p:cNvSpPr/>
-          <p:nvPr/>
-        </p:nvSpPr>
-        <p:spPr>
-          <a:xfrm>
-            <a:off x="7799832" y="4974336"/>
-            <a:ext cx="3145536" cy="576072"/>
+          <p:cNvPr id="26" name="Text 24"/>
+          <p:cNvSpPr/>
+          <p:nvPr/>
+        </p:nvSpPr>
+        <p:spPr>
+          <a:xfrm>
+            <a:off x="7799832" y="4659782"/>
+            <a:ext cx="3145536" cy="899770"/>
           </a:xfrm>
           <a:prstGeom prst="rect">
             <a:avLst/>
@@ -16030,7 +16462,7 @@
                 <a:ea typeface="Aptos" pitchFamily="34" charset="-122"/>
                 <a:cs typeface="Aptos" pitchFamily="34" charset="-120"/>
               </a:rPr>
-              <a:t>Use the concept to clarify workflow changes, dependencies, staffing, procurement requirements, training needs, and.</a:t>
+              <a:t>Use the concept to clarify workflow changes, dependencies, staffing, procurement requirements, training needs, and implementation checkpoints.</a:t>
             </a:r>
             <a:endParaRPr lang="en-US" sz="1320" dirty="0"/>
           </a:p>
@@ -16399,11 +16831,11 @@
         <p:spPr>
           <a:xfrm>
             <a:off x="7635240" y="1325880"/>
-            <a:ext cx="3474720" cy="1325880"/>
+            <a:ext cx="3474720" cy="1207008"/>
           </a:xfrm>
           <a:prstGeom prst="roundRect">
             <a:avLst>
-              <a:gd name="adj" fmla="val 8276"/>
+              <a:gd name="adj" fmla="val 9091"/>
             </a:avLst>
           </a:prstGeom>
           <a:solidFill>
@@ -16465,7 +16897,7 @@
         <p:spPr>
           <a:xfrm>
             <a:off x="7799832" y="1801368"/>
-            <a:ext cx="3145536" cy="758952"/>
+            <a:ext cx="3145536" cy="640080"/>
           </a:xfrm>
           <a:prstGeom prst="rect">
             <a:avLst/>
@@ -16491,7 +16923,7 @@
                 <a:ea typeface="Aptos" pitchFamily="34" charset="-122"/>
                 <a:cs typeface="Aptos" pitchFamily="34" charset="-120"/>
               </a:rPr>
-              <a:t>Agentic AI matters because it shifts AI from generating outputs to participating in workflows.</a:t>
+              <a:t>Agentic AI matters because it shifts AI from generating outputs to participating in.</a:t>
             </a:r>
             <a:endParaRPr lang="en-US" sz="1320" dirty="0"/>
           </a:p>
@@ -16505,12 +16937,12 @@
         </p:nvSpPr>
         <p:spPr>
           <a:xfrm>
-            <a:off x="7635240" y="2788920"/>
-            <a:ext cx="3474720" cy="1536192"/>
+            <a:off x="7635240" y="2670048"/>
+            <a:ext cx="3474720" cy="1377086"/>
           </a:xfrm>
           <a:prstGeom prst="roundRect">
             <a:avLst>
-              <a:gd name="adj" fmla="val 7143"/>
+              <a:gd name="adj" fmla="val 7968"/>
             </a:avLst>
           </a:prstGeom>
           <a:solidFill>
@@ -16532,8 +16964,8 @@
         </p:nvSpPr>
         <p:spPr>
           <a:xfrm>
-            <a:off x="7799832" y="2935224"/>
-            <a:ext cx="3145536" cy="256032"/>
+            <a:off x="7799832" y="2798064"/>
+            <a:ext cx="3145536" cy="237744"/>
           </a:xfrm>
           <a:prstGeom prst="rect">
             <a:avLst/>
@@ -16549,7 +16981,7 @@
               <a:buNone/>
             </a:pPr>
             <a:r>
-              <a:rPr lang="en-US" sz="1300" b="1" dirty="0">
+              <a:rPr lang="en-US" sz="1250" b="1" dirty="0">
                 <a:solidFill>
                   <a:srgbClr val="0068B7"/>
                 </a:solidFill>
@@ -16557,101 +16989,317 @@
                 <a:ea typeface="Aptos" pitchFamily="34" charset="-122"/>
                 <a:cs typeface="Aptos" pitchFamily="34" charset="-120"/>
               </a:rPr>
-              <a:t>Concept checkpoints</a:t>
-            </a:r>
-            <a:endParaRPr lang="en-US" sz="1300" dirty="0"/>
-          </a:p>
-        </p:txBody>
-      </p:sp>
-      <p:sp>
-        <p:nvSpPr>
-          <p:cNvPr id="15" name="Text 13"/>
-          <p:cNvSpPr/>
-          <p:nvPr/>
-        </p:nvSpPr>
-        <p:spPr>
-          <a:xfrm>
-            <a:off x="7818120" y="3300984"/>
-            <a:ext cx="3090672" cy="877824"/>
-          </a:xfrm>
-          <a:prstGeom prst="rect">
-            <a:avLst/>
-          </a:prstGeom>
-          <a:noFill/>
-          <a:ln/>
-        </p:spPr>
-        <p:txBody>
-          <a:bodyPr wrap="square" lIns="508" tIns="508" rIns="508" bIns="508" rtlCol="0" anchor="t">
+              <a:t>Implementation path</a:t>
+            </a:r>
+            <a:endParaRPr lang="en-US" sz="1250" dirty="0"/>
+          </a:p>
+        </p:txBody>
+      </p:sp>
+      <p:sp>
+        <p:nvSpPr>
+          <p:cNvPr id="15" name="Shape 13"/>
+          <p:cNvSpPr/>
+          <p:nvPr/>
+        </p:nvSpPr>
+        <p:spPr>
+          <a:xfrm>
+            <a:off x="8763000" y="3351276"/>
+            <a:ext cx="164592" cy="0"/>
+          </a:xfrm>
+          <a:prstGeom prst="line">
+            <a:avLst/>
+          </a:prstGeom>
+          <a:noFill/>
+          <a:ln w="15240">
+            <a:solidFill>
+              <a:srgbClr val="8ABBD8"/>
+            </a:solidFill>
+            <a:prstDash val="solid"/>
+          </a:ln>
+        </p:spPr>
+      </p:sp>
+      <p:sp>
+        <p:nvSpPr>
+          <p:cNvPr id="16" name="Shape 14"/>
+          <p:cNvSpPr/>
+          <p:nvPr/>
+        </p:nvSpPr>
+        <p:spPr>
+          <a:xfrm>
+            <a:off x="7872984" y="3200400"/>
+            <a:ext cx="890016" cy="301752"/>
+          </a:xfrm>
+          <a:prstGeom prst="roundRect">
+            <a:avLst>
+              <a:gd name="adj" fmla="val 24242"/>
+            </a:avLst>
+          </a:prstGeom>
+          <a:solidFill>
+            <a:srgbClr val="0068B7"/>
+          </a:solidFill>
+          <a:ln w="12700">
+            <a:solidFill>
+              <a:srgbClr val="0068B7"/>
+            </a:solidFill>
+            <a:prstDash val="solid"/>
+          </a:ln>
+        </p:spPr>
+      </p:sp>
+      <p:sp>
+        <p:nvSpPr>
+          <p:cNvPr id="17" name="Text 15"/>
+          <p:cNvSpPr/>
+          <p:nvPr/>
+        </p:nvSpPr>
+        <p:spPr>
+          <a:xfrm>
+            <a:off x="7909560" y="3273552"/>
+            <a:ext cx="816864" cy="146304"/>
+          </a:xfrm>
+          <a:prstGeom prst="rect">
+            <a:avLst/>
+          </a:prstGeom>
+          <a:noFill/>
+          <a:ln/>
+        </p:spPr>
+        <p:txBody>
+          <a:bodyPr wrap="square" lIns="0" tIns="0" rIns="0" bIns="0" rtlCol="0" anchor="ctr">
             <a:normAutofit/>
           </a:bodyPr>
           <a:lstStyle/>
           <a:p>
-            <a:pPr indent="0" marL="0">
-              <a:buNone/>
-            </a:pPr>
-            <a:r>
-              <a:rPr lang="en-US" sz="1220" dirty="0">
-                <a:solidFill>
-                  <a:srgbClr val="17364A"/>
-                </a:solidFill>
-                <a:latin typeface="Aptos" pitchFamily="34" charset="0"/>
-                <a:ea typeface="Aptos" pitchFamily="34" charset="-122"/>
-                <a:cs typeface="Aptos" pitchFamily="34" charset="-120"/>
-              </a:rPr>
-              <a:t>An agent that sends the message, updates a case record, creates a.</a:t>
-            </a:r>
-            <a:endParaRPr lang="en-US" sz="1220" dirty="0"/>
-          </a:p>
-          <a:p>
-            <a:pPr indent="0" marL="0">
-              <a:buNone/>
-            </a:pPr>
-            <a:r>
-              <a:rPr lang="en-US" sz="1220" dirty="0">
-                <a:solidFill>
-                  <a:srgbClr val="17364A"/>
-                </a:solidFill>
-                <a:latin typeface="Aptos" pitchFamily="34" charset="0"/>
-                <a:ea typeface="Aptos" pitchFamily="34" charset="-122"/>
-                <a:cs typeface="Aptos" pitchFamily="34" charset="-120"/>
-              </a:rPr>
-              <a:t>Action-taking systems require explicit governance because errors.</a:t>
-            </a:r>
-            <a:endParaRPr lang="en-US" sz="1220" dirty="0"/>
-          </a:p>
-          <a:p>
-            <a:pPr indent="0" marL="0">
-              <a:buNone/>
-            </a:pPr>
-            <a:r>
-              <a:rPr lang="en-US" sz="1220" dirty="0">
-                <a:solidFill>
-                  <a:srgbClr val="17364A"/>
-                </a:solidFill>
-                <a:latin typeface="Aptos" pitchFamily="34" charset="0"/>
-                <a:ea typeface="Aptos" pitchFamily="34" charset="-122"/>
-                <a:cs typeface="Aptos" pitchFamily="34" charset="-120"/>
-              </a:rPr>
-              <a:t>Public health workflows often involve legal authority, sensitive.</a:t>
-            </a:r>
-            <a:endParaRPr lang="en-US" sz="1220" dirty="0"/>
-          </a:p>
-        </p:txBody>
-      </p:sp>
-      <p:sp>
-        <p:nvSpPr>
-          <p:cNvPr id="16" name="Shape 14"/>
-          <p:cNvSpPr/>
-          <p:nvPr/>
-        </p:nvSpPr>
-        <p:spPr>
-          <a:xfrm>
-            <a:off x="7635240" y="4498848"/>
-            <a:ext cx="3474720" cy="1143000"/>
+            <a:pPr algn="ctr" indent="0" marL="0">
+              <a:buNone/>
+            </a:pPr>
+            <a:r>
+              <a:rPr lang="en-US" sz="880" b="1" dirty="0">
+                <a:solidFill>
+                  <a:srgbClr val="FFFFFF"/>
+                </a:solidFill>
+                <a:latin typeface="Aptos" pitchFamily="34" charset="0"/>
+                <a:ea typeface="Aptos" pitchFamily="34" charset="-122"/>
+                <a:cs typeface="Aptos" pitchFamily="34" charset="-120"/>
+              </a:rPr>
+              <a:t>Need</a:t>
+            </a:r>
+            <a:endParaRPr lang="en-US" sz="880" dirty="0"/>
+          </a:p>
+        </p:txBody>
+      </p:sp>
+      <p:sp>
+        <p:nvSpPr>
+          <p:cNvPr id="18" name="Shape 16"/>
+          <p:cNvSpPr/>
+          <p:nvPr/>
+        </p:nvSpPr>
+        <p:spPr>
+          <a:xfrm>
+            <a:off x="9817608" y="3351276"/>
+            <a:ext cx="164592" cy="0"/>
+          </a:xfrm>
+          <a:prstGeom prst="line">
+            <a:avLst/>
+          </a:prstGeom>
+          <a:noFill/>
+          <a:ln w="15240">
+            <a:solidFill>
+              <a:srgbClr val="8ABBD8"/>
+            </a:solidFill>
+            <a:prstDash val="solid"/>
+          </a:ln>
+        </p:spPr>
+      </p:sp>
+      <p:sp>
+        <p:nvSpPr>
+          <p:cNvPr id="19" name="Shape 17"/>
+          <p:cNvSpPr/>
+          <p:nvPr/>
+        </p:nvSpPr>
+        <p:spPr>
+          <a:xfrm>
+            <a:off x="8927592" y="3200400"/>
+            <a:ext cx="890016" cy="301752"/>
           </a:xfrm>
           <a:prstGeom prst="roundRect">
             <a:avLst>
-              <a:gd name="adj" fmla="val 9600"/>
+              <a:gd name="adj" fmla="val 24242"/>
+            </a:avLst>
+          </a:prstGeom>
+          <a:solidFill>
+            <a:srgbClr val="2F8A28"/>
+          </a:solidFill>
+          <a:ln w="12700">
+            <a:solidFill>
+              <a:srgbClr val="2F8A28"/>
+            </a:solidFill>
+            <a:prstDash val="solid"/>
+          </a:ln>
+        </p:spPr>
+      </p:sp>
+      <p:sp>
+        <p:nvSpPr>
+          <p:cNvPr id="20" name="Text 18"/>
+          <p:cNvSpPr/>
+          <p:nvPr/>
+        </p:nvSpPr>
+        <p:spPr>
+          <a:xfrm>
+            <a:off x="8964168" y="3273552"/>
+            <a:ext cx="816864" cy="146304"/>
+          </a:xfrm>
+          <a:prstGeom prst="rect">
+            <a:avLst/>
+          </a:prstGeom>
+          <a:noFill/>
+          <a:ln/>
+        </p:spPr>
+        <p:txBody>
+          <a:bodyPr wrap="square" lIns="0" tIns="0" rIns="0" bIns="0" rtlCol="0" anchor="ctr">
+            <a:normAutofit/>
+          </a:bodyPr>
+          <a:lstStyle/>
+          <a:p>
+            <a:pPr algn="ctr" indent="0" marL="0">
+              <a:buNone/>
+            </a:pPr>
+            <a:r>
+              <a:rPr lang="en-US" sz="880" b="1" dirty="0">
+                <a:solidFill>
+                  <a:srgbClr val="FFFFFF"/>
+                </a:solidFill>
+                <a:latin typeface="Aptos" pitchFamily="34" charset="0"/>
+                <a:ea typeface="Aptos" pitchFamily="34" charset="-122"/>
+                <a:cs typeface="Aptos" pitchFamily="34" charset="-120"/>
+              </a:rPr>
+              <a:t>Build</a:t>
+            </a:r>
+            <a:endParaRPr lang="en-US" sz="880" dirty="0"/>
+          </a:p>
+        </p:txBody>
+      </p:sp>
+      <p:sp>
+        <p:nvSpPr>
+          <p:cNvPr id="21" name="Shape 19"/>
+          <p:cNvSpPr/>
+          <p:nvPr/>
+        </p:nvSpPr>
+        <p:spPr>
+          <a:xfrm>
+            <a:off x="9982200" y="3200400"/>
+            <a:ext cx="890016" cy="301752"/>
+          </a:xfrm>
+          <a:prstGeom prst="roundRect">
+            <a:avLst>
+              <a:gd name="adj" fmla="val 24242"/>
+            </a:avLst>
+          </a:prstGeom>
+          <a:solidFill>
+            <a:srgbClr val="6A4CA3"/>
+          </a:solidFill>
+          <a:ln w="12700">
+            <a:solidFill>
+              <a:srgbClr val="6A4CA3"/>
+            </a:solidFill>
+            <a:prstDash val="solid"/>
+          </a:ln>
+        </p:spPr>
+      </p:sp>
+      <p:sp>
+        <p:nvSpPr>
+          <p:cNvPr id="22" name="Text 20"/>
+          <p:cNvSpPr/>
+          <p:nvPr/>
+        </p:nvSpPr>
+        <p:spPr>
+          <a:xfrm>
+            <a:off x="10018776" y="3273552"/>
+            <a:ext cx="816864" cy="146304"/>
+          </a:xfrm>
+          <a:prstGeom prst="rect">
+            <a:avLst/>
+          </a:prstGeom>
+          <a:noFill/>
+          <a:ln/>
+        </p:spPr>
+        <p:txBody>
+          <a:bodyPr wrap="square" lIns="0" tIns="0" rIns="0" bIns="0" rtlCol="0" anchor="ctr">
+            <a:normAutofit/>
+          </a:bodyPr>
+          <a:lstStyle/>
+          <a:p>
+            <a:pPr algn="ctr" indent="0" marL="0">
+              <a:buNone/>
+            </a:pPr>
+            <a:r>
+              <a:rPr lang="en-US" sz="880" b="1" dirty="0">
+                <a:solidFill>
+                  <a:srgbClr val="FFFFFF"/>
+                </a:solidFill>
+                <a:latin typeface="Aptos" pitchFamily="34" charset="0"/>
+                <a:ea typeface="Aptos" pitchFamily="34" charset="-122"/>
+                <a:cs typeface="Aptos" pitchFamily="34" charset="-120"/>
+              </a:rPr>
+              <a:t>Adopt</a:t>
+            </a:r>
+            <a:endParaRPr lang="en-US" sz="880" dirty="0"/>
+          </a:p>
+        </p:txBody>
+      </p:sp>
+      <p:sp>
+        <p:nvSpPr>
+          <p:cNvPr id="23" name="Text 21"/>
+          <p:cNvSpPr/>
+          <p:nvPr/>
+        </p:nvSpPr>
+        <p:spPr>
+          <a:xfrm>
+            <a:off x="7854696" y="3694176"/>
+            <a:ext cx="3035808" cy="206654"/>
+          </a:xfrm>
+          <a:prstGeom prst="rect">
+            <a:avLst/>
+          </a:prstGeom>
+          <a:noFill/>
+          <a:ln/>
+        </p:spPr>
+        <p:txBody>
+          <a:bodyPr wrap="square" lIns="254" tIns="254" rIns="254" bIns="254" rtlCol="0" anchor="t">
+            <a:normAutofit/>
+          </a:bodyPr>
+          <a:lstStyle/>
+          <a:p>
+            <a:pPr indent="0" marL="0">
+              <a:buNone/>
+            </a:pPr>
+            <a:r>
+              <a:rPr lang="en-US" sz="1120" dirty="0">
+                <a:solidFill>
+                  <a:srgbClr val="17364A"/>
+                </a:solidFill>
+                <a:latin typeface="Aptos" pitchFamily="34" charset="0"/>
+                <a:ea typeface="Aptos" pitchFamily="34" charset="-122"/>
+                <a:cs typeface="Aptos" pitchFamily="34" charset="-120"/>
+              </a:rPr>
+              <a:t>Implementation work should make dependencies, approvals, training, and sustainment visible before launch.</a:t>
+            </a:r>
+            <a:endParaRPr lang="en-US" sz="1120" dirty="0"/>
+          </a:p>
+        </p:txBody>
+      </p:sp>
+      <p:sp>
+        <p:nvSpPr>
+          <p:cNvPr id="24" name="Shape 22"/>
+          <p:cNvSpPr/>
+          <p:nvPr/>
+        </p:nvSpPr>
+        <p:spPr>
+          <a:xfrm>
+            <a:off x="7635240" y="4184294"/>
+            <a:ext cx="3474720" cy="1466698"/>
+          </a:xfrm>
+          <a:prstGeom prst="roundRect">
+            <a:avLst>
+              <a:gd name="adj" fmla="val 7481"/>
             </a:avLst>
           </a:prstGeom>
           <a:solidFill>
@@ -16667,13 +17315,13 @@
       </p:sp>
       <p:sp>
         <p:nvSpPr>
-          <p:cNvPr id="17" name="Text 15"/>
-          <p:cNvSpPr/>
-          <p:nvPr/>
-        </p:nvSpPr>
-        <p:spPr>
-          <a:xfrm>
-            <a:off x="7799832" y="4645152"/>
+          <p:cNvPr id="25" name="Text 23"/>
+          <p:cNvSpPr/>
+          <p:nvPr/>
+        </p:nvSpPr>
+        <p:spPr>
+          <a:xfrm>
+            <a:off x="7799832" y="4330598"/>
             <a:ext cx="3145536" cy="256032"/>
           </a:xfrm>
           <a:prstGeom prst="rect">
@@ -16706,14 +17354,14 @@
       </p:sp>
       <p:sp>
         <p:nvSpPr>
-          <p:cNvPr id="18" name="Text 16"/>
-          <p:cNvSpPr/>
-          <p:nvPr/>
-        </p:nvSpPr>
-        <p:spPr>
-          <a:xfrm>
-            <a:off x="7799832" y="4974336"/>
-            <a:ext cx="3145536" cy="576072"/>
+          <p:cNvPr id="26" name="Text 24"/>
+          <p:cNvSpPr/>
+          <p:nvPr/>
+        </p:nvSpPr>
+        <p:spPr>
+          <a:xfrm>
+            <a:off x="7799832" y="4659782"/>
+            <a:ext cx="3145536" cy="899770"/>
           </a:xfrm>
           <a:prstGeom prst="rect">
             <a:avLst/>
@@ -16739,7 +17387,7 @@
                 <a:ea typeface="Aptos" pitchFamily="34" charset="-122"/>
                 <a:cs typeface="Aptos" pitchFamily="34" charset="-120"/>
               </a:rPr>
-              <a:t>Use the concept to clarify workflow changes, dependencies, staffing, procurement requirements, training needs, and.</a:t>
+              <a:t>Use the concept to clarify workflow changes, dependencies, staffing, procurement requirements, training needs, and implementation checkpoints.</a:t>
             </a:r>
             <a:endParaRPr lang="en-US" sz="1320" dirty="0"/>
           </a:p>
@@ -17108,11 +17756,11 @@
         <p:spPr>
           <a:xfrm>
             <a:off x="7635240" y="1325880"/>
-            <a:ext cx="3474720" cy="1325880"/>
+            <a:ext cx="3474720" cy="1207008"/>
           </a:xfrm>
           <a:prstGeom prst="roundRect">
             <a:avLst>
-              <a:gd name="adj" fmla="val 8276"/>
+              <a:gd name="adj" fmla="val 9091"/>
             </a:avLst>
           </a:prstGeom>
           <a:solidFill>
@@ -17174,7 +17822,7 @@
         <p:spPr>
           <a:xfrm>
             <a:off x="7799832" y="1801368"/>
-            <a:ext cx="3145536" cy="758952"/>
+            <a:ext cx="3145536" cy="640080"/>
           </a:xfrm>
           <a:prstGeom prst="rect">
             <a:avLst/>
@@ -17200,7 +17848,7 @@
                 <a:ea typeface="Aptos" pitchFamily="34" charset="-122"/>
                 <a:cs typeface="Aptos" pitchFamily="34" charset="-120"/>
               </a:rPr>
-              <a:t>A health department may consider an agentic workflow for incoming public health inquiries.</a:t>
+              <a:t>A health department may consider an agentic workflow for incoming public health.</a:t>
             </a:r>
             <a:endParaRPr lang="en-US" sz="1320" dirty="0"/>
           </a:p>
@@ -17214,12 +17862,12 @@
         </p:nvSpPr>
         <p:spPr>
           <a:xfrm>
-            <a:off x="7635240" y="2788920"/>
-            <a:ext cx="3474720" cy="1536192"/>
+            <a:off x="7635240" y="2670048"/>
+            <a:ext cx="3474720" cy="1377086"/>
           </a:xfrm>
           <a:prstGeom prst="roundRect">
             <a:avLst>
-              <a:gd name="adj" fmla="val 7143"/>
+              <a:gd name="adj" fmla="val 7968"/>
             </a:avLst>
           </a:prstGeom>
           <a:solidFill>
@@ -17241,7 +17889,7 @@
         </p:nvSpPr>
         <p:spPr>
           <a:xfrm>
-            <a:off x="7799832" y="2935224"/>
+            <a:off x="7799832" y="2816352"/>
             <a:ext cx="3145536" cy="256032"/>
           </a:xfrm>
           <a:prstGeom prst="rect">
@@ -17280,8 +17928,8 @@
         </p:nvSpPr>
         <p:spPr>
           <a:xfrm>
-            <a:off x="7818120" y="3300984"/>
-            <a:ext cx="3090672" cy="877824"/>
+            <a:off x="7818120" y="3182112"/>
+            <a:ext cx="3090672" cy="718718"/>
           </a:xfrm>
           <a:prstGeom prst="rect">
             <a:avLst/>
@@ -17355,12 +18003,12 @@
         </p:nvSpPr>
         <p:spPr>
           <a:xfrm>
-            <a:off x="7635240" y="4498848"/>
-            <a:ext cx="3474720" cy="1143000"/>
+            <a:off x="7635240" y="4184294"/>
+            <a:ext cx="3474720" cy="1466698"/>
           </a:xfrm>
           <a:prstGeom prst="roundRect">
             <a:avLst>
-              <a:gd name="adj" fmla="val 9600"/>
+              <a:gd name="adj" fmla="val 7481"/>
             </a:avLst>
           </a:prstGeom>
           <a:solidFill>
@@ -17382,7 +18030,7 @@
         </p:nvSpPr>
         <p:spPr>
           <a:xfrm>
-            <a:off x="7799832" y="4645152"/>
+            <a:off x="7799832" y="4330598"/>
             <a:ext cx="3145536" cy="256032"/>
           </a:xfrm>
           <a:prstGeom prst="rect">
@@ -17421,8 +18069,8 @@
         </p:nvSpPr>
         <p:spPr>
           <a:xfrm>
-            <a:off x="7799832" y="4974336"/>
-            <a:ext cx="3145536" cy="576072"/>
+            <a:off x="7799832" y="4659782"/>
+            <a:ext cx="3145536" cy="899770"/>
           </a:xfrm>
           <a:prstGeom prst="rect">
             <a:avLst/>
@@ -17448,7 +18096,7 @@
                 <a:ea typeface="Aptos" pitchFamily="34" charset="-122"/>
                 <a:cs typeface="Aptos" pitchFamily="34" charset="-120"/>
               </a:rPr>
-              <a:t>Use the concept to clarify workflow changes, dependencies, staffing, procurement requirements, training needs, and.</a:t>
+              <a:t>Use the concept to clarify workflow changes, dependencies, staffing, procurement requirements, training needs, and implementation checkpoints.</a:t>
             </a:r>
             <a:endParaRPr lang="en-US" sz="1320" dirty="0"/>
           </a:p>

--- a/downloads/presentations/modules/arc-320.pptx
+++ b/downloads/presentations/modules/arc-320.pptx
@@ -3343,8 +3343,8 @@
         </p:nvSpPr>
         <p:spPr>
           <a:xfrm>
-            <a:off x="868680" y="1508760"/>
-            <a:ext cx="6309360" cy="4160520"/>
+            <a:off x="822960" y="1463040"/>
+            <a:ext cx="6565392" cy="4343400"/>
           </a:xfrm>
           <a:prstGeom prst="rect">
             <a:avLst/>
@@ -3362,7 +3362,7 @@
               <a:buNone/>
             </a:pPr>
             <a:r>
-              <a:rPr lang="en-US" sz="2100" dirty="0">
+              <a:rPr lang="en-US" sz="1920" dirty="0">
                 <a:solidFill>
                   <a:srgbClr val="003A63"/>
                 </a:solidFill>
@@ -3372,14 +3372,14 @@
               </a:rPr>
               <a:t>• Agentic workflow design begins with the goal.</a:t>
             </a:r>
-            <a:endParaRPr lang="en-US" sz="2100" dirty="0"/>
-          </a:p>
-          <a:p>
-            <a:pPr indent="0" marL="0">
-              <a:buNone/>
-            </a:pPr>
-            <a:r>
-              <a:rPr lang="en-US" sz="2100" dirty="0">
+            <a:endParaRPr lang="en-US" sz="1920" dirty="0"/>
+          </a:p>
+          <a:p>
+            <a:pPr indent="0" marL="0">
+              <a:buNone/>
+            </a:pPr>
+            <a:r>
+              <a:rPr lang="en-US" sz="1920" dirty="0">
                 <a:solidFill>
                   <a:srgbClr val="003A63"/>
                 </a:solidFill>
@@ -3387,16 +3387,16 @@
                 <a:ea typeface="Aptos" pitchFamily="34" charset="-122"/>
                 <a:cs typeface="Aptos" pitchFamily="34" charset="-120"/>
               </a:rPr>
-              <a:t>• The goal should be narrow and operationally defined. “Help with surveillance” is too broad..</a:t>
-            </a:r>
-            <a:endParaRPr lang="en-US" sz="2100" dirty="0"/>
-          </a:p>
-          <a:p>
-            <a:pPr indent="0" marL="0">
-              <a:buNone/>
-            </a:pPr>
-            <a:r>
-              <a:rPr lang="en-US" sz="2100" dirty="0">
+              <a:t>• The goal should be narrow and operationally defined. “Help with.</a:t>
+            </a:r>
+            <a:endParaRPr lang="en-US" sz="1920" dirty="0"/>
+          </a:p>
+          <a:p>
+            <a:pPr indent="0" marL="0">
+              <a:buNone/>
+            </a:pPr>
+            <a:r>
+              <a:rPr lang="en-US" sz="1920" dirty="0">
                 <a:solidFill>
                   <a:srgbClr val="003A63"/>
                 </a:solidFill>
@@ -3404,9 +3404,9 @@
                 <a:ea typeface="Aptos" pitchFamily="34" charset="-122"/>
                 <a:cs typeface="Aptos" pitchFamily="34" charset="-120"/>
               </a:rPr>
-              <a:t>• Narrow goals make it easier to define tools, permissions, validation, and monitoring.</a:t>
-            </a:r>
-            <a:endParaRPr lang="en-US" sz="2100" dirty="0"/>
+              <a:t>• Narrow goals make it easier to define tools, permissions, validation, and.</a:t>
+            </a:r>
+            <a:endParaRPr lang="en-US" sz="1920" dirty="0"/>
           </a:p>
         </p:txBody>
       </p:sp>
@@ -3418,12 +3418,12 @@
         </p:nvSpPr>
         <p:spPr>
           <a:xfrm>
-            <a:off x="7635240" y="1325880"/>
-            <a:ext cx="3474720" cy="1207008"/>
+            <a:off x="7543800" y="1325880"/>
+            <a:ext cx="3611880" cy="1261872"/>
           </a:xfrm>
           <a:prstGeom prst="roundRect">
             <a:avLst>
-              <a:gd name="adj" fmla="val 9091"/>
+              <a:gd name="adj" fmla="val 8696"/>
             </a:avLst>
           </a:prstGeom>
           <a:solidFill>
@@ -3445,8 +3445,8 @@
         </p:nvSpPr>
         <p:spPr>
           <a:xfrm>
-            <a:off x="7799832" y="1472184"/>
-            <a:ext cx="3145536" cy="256032"/>
+            <a:off x="7708392" y="1453896"/>
+            <a:ext cx="3282696" cy="228600"/>
           </a:xfrm>
           <a:prstGeom prst="rect">
             <a:avLst/>
@@ -3462,7 +3462,7 @@
               <a:buNone/>
             </a:pPr>
             <a:r>
-              <a:rPr lang="en-US" sz="1300" b="1" dirty="0">
+              <a:rPr lang="en-US" sz="1220" b="1" dirty="0">
                 <a:solidFill>
                   <a:srgbClr val="0068B7"/>
                 </a:solidFill>
@@ -3472,7 +3472,7 @@
               </a:rPr>
               <a:t>Implementation cue</a:t>
             </a:r>
-            <a:endParaRPr lang="en-US" sz="1300" dirty="0"/>
+            <a:endParaRPr lang="en-US" sz="1220" dirty="0"/>
           </a:p>
         </p:txBody>
       </p:sp>
@@ -3484,8 +3484,8 @@
         </p:nvSpPr>
         <p:spPr>
           <a:xfrm>
-            <a:off x="7799832" y="1801368"/>
-            <a:ext cx="3145536" cy="640080"/>
+            <a:off x="7708392" y="1764792"/>
+            <a:ext cx="3282696" cy="749808"/>
           </a:xfrm>
           <a:prstGeom prst="rect">
             <a:avLst/>
@@ -3503,7 +3503,7 @@
               <a:buNone/>
             </a:pPr>
             <a:r>
-              <a:rPr lang="en-US" sz="1320" dirty="0">
+              <a:rPr lang="en-US" sz="1220" dirty="0">
                 <a:solidFill>
                   <a:srgbClr val="17364A"/>
                 </a:solidFill>
@@ -3513,7 +3513,7 @@
               </a:rPr>
               <a:t>Agentic workflow design begins with the goal.</a:t>
             </a:r>
-            <a:endParaRPr lang="en-US" sz="1320" dirty="0"/>
+            <a:endParaRPr lang="en-US" sz="1220" dirty="0"/>
           </a:p>
         </p:txBody>
       </p:sp>
@@ -3525,12 +3525,12 @@
         </p:nvSpPr>
         <p:spPr>
           <a:xfrm>
-            <a:off x="7635240" y="2670048"/>
-            <a:ext cx="3474720" cy="1377086"/>
+            <a:off x="7543800" y="2724912"/>
+            <a:ext cx="3611880" cy="1527048"/>
           </a:xfrm>
           <a:prstGeom prst="roundRect">
             <a:avLst>
-              <a:gd name="adj" fmla="val 7968"/>
+              <a:gd name="adj" fmla="val 7186"/>
             </a:avLst>
           </a:prstGeom>
           <a:solidFill>
@@ -3552,24 +3552,26 @@
         </p:nvSpPr>
         <p:spPr>
           <a:xfrm>
-            <a:off x="7799832" y="2798064"/>
-            <a:ext cx="3145536" cy="237744"/>
-          </a:xfrm>
-          <a:prstGeom prst="rect">
-            <a:avLst/>
-          </a:prstGeom>
-          <a:noFill/>
-          <a:ln/>
-        </p:spPr>
-        <p:txBody>
-          <a:bodyPr wrap="square" lIns="0" tIns="0" rIns="0" bIns="0" rtlCol="0" anchor="ctr"/>
-          <a:lstStyle/>
-          <a:p>
-            <a:pPr indent="0" marL="0">
-              <a:buNone/>
-            </a:pPr>
-            <a:r>
-              <a:rPr lang="en-US" sz="1250" b="1" dirty="0">
+            <a:off x="7708392" y="2852928"/>
+            <a:ext cx="3282696" cy="219456"/>
+          </a:xfrm>
+          <a:prstGeom prst="rect">
+            <a:avLst/>
+          </a:prstGeom>
+          <a:noFill/>
+          <a:ln/>
+        </p:spPr>
+        <p:txBody>
+          <a:bodyPr wrap="square" lIns="0" tIns="0" rIns="0" bIns="0" rtlCol="0" anchor="ctr">
+            <a:normAutofit/>
+          </a:bodyPr>
+          <a:lstStyle/>
+          <a:p>
+            <a:pPr indent="0" marL="0">
+              <a:buNone/>
+            </a:pPr>
+            <a:r>
+              <a:rPr lang="en-US" sz="1160" b="1" dirty="0">
                 <a:solidFill>
                   <a:srgbClr val="0068B7"/>
                 </a:solidFill>
@@ -3579,7 +3581,7 @@
               </a:rPr>
               <a:t>Implementation path</a:t>
             </a:r>
-            <a:endParaRPr lang="en-US" sz="1250" dirty="0"/>
+            <a:endParaRPr lang="en-US" sz="1160" dirty="0"/>
           </a:p>
         </p:txBody>
       </p:sp>
@@ -3591,7 +3593,7 @@
         </p:nvSpPr>
         <p:spPr>
           <a:xfrm>
-            <a:off x="8763000" y="3351276"/>
+            <a:off x="8717280" y="3406140"/>
             <a:ext cx="164592" cy="0"/>
           </a:xfrm>
           <a:prstGeom prst="line">
@@ -3614,8 +3616,8 @@
         </p:nvSpPr>
         <p:spPr>
           <a:xfrm>
-            <a:off x="7872984" y="3200400"/>
-            <a:ext cx="890016" cy="301752"/>
+            <a:off x="7781544" y="3255264"/>
+            <a:ext cx="935736" cy="301752"/>
           </a:xfrm>
           <a:prstGeom prst="roundRect">
             <a:avLst>
@@ -3641,8 +3643,8 @@
         </p:nvSpPr>
         <p:spPr>
           <a:xfrm>
-            <a:off x="7909560" y="3273552"/>
-            <a:ext cx="816864" cy="146304"/>
+            <a:off x="7818120" y="3328416"/>
+            <a:ext cx="862584" cy="146304"/>
           </a:xfrm>
           <a:prstGeom prst="rect">
             <a:avLst/>
@@ -3682,7 +3684,7 @@
         </p:nvSpPr>
         <p:spPr>
           <a:xfrm>
-            <a:off x="9817608" y="3351276"/>
+            <a:off x="9817608" y="3406140"/>
             <a:ext cx="164592" cy="0"/>
           </a:xfrm>
           <a:prstGeom prst="line">
@@ -3705,8 +3707,8 @@
         </p:nvSpPr>
         <p:spPr>
           <a:xfrm>
-            <a:off x="8927592" y="3200400"/>
-            <a:ext cx="890016" cy="301752"/>
+            <a:off x="8881872" y="3255264"/>
+            <a:ext cx="935736" cy="301752"/>
           </a:xfrm>
           <a:prstGeom prst="roundRect">
             <a:avLst>
@@ -3732,8 +3734,8 @@
         </p:nvSpPr>
         <p:spPr>
           <a:xfrm>
-            <a:off x="8964168" y="3273552"/>
-            <a:ext cx="816864" cy="146304"/>
+            <a:off x="8918448" y="3328416"/>
+            <a:ext cx="862584" cy="146304"/>
           </a:xfrm>
           <a:prstGeom prst="rect">
             <a:avLst/>
@@ -3773,8 +3775,8 @@
         </p:nvSpPr>
         <p:spPr>
           <a:xfrm>
-            <a:off x="9982200" y="3200400"/>
-            <a:ext cx="890016" cy="301752"/>
+            <a:off x="9982200" y="3255264"/>
+            <a:ext cx="935736" cy="301752"/>
           </a:xfrm>
           <a:prstGeom prst="roundRect">
             <a:avLst>
@@ -3800,8 +3802,8 @@
         </p:nvSpPr>
         <p:spPr>
           <a:xfrm>
-            <a:off x="10018776" y="3273552"/>
-            <a:ext cx="816864" cy="146304"/>
+            <a:off x="10018776" y="3328416"/>
+            <a:ext cx="862584" cy="146304"/>
           </a:xfrm>
           <a:prstGeom prst="rect">
             <a:avLst/>
@@ -3841,8 +3843,8 @@
         </p:nvSpPr>
         <p:spPr>
           <a:xfrm>
-            <a:off x="7854696" y="3694176"/>
-            <a:ext cx="3035808" cy="206654"/>
+            <a:off x="7763256" y="3749040"/>
+            <a:ext cx="3172968" cy="356616"/>
           </a:xfrm>
           <a:prstGeom prst="rect">
             <a:avLst/>
@@ -3860,7 +3862,7 @@
               <a:buNone/>
             </a:pPr>
             <a:r>
-              <a:rPr lang="en-US" sz="1120" dirty="0">
+              <a:rPr lang="en-US" sz="1040" dirty="0">
                 <a:solidFill>
                   <a:srgbClr val="17364A"/>
                 </a:solidFill>
@@ -3868,9 +3870,9 @@
                 <a:ea typeface="Aptos" pitchFamily="34" charset="-122"/>
                 <a:cs typeface="Aptos" pitchFamily="34" charset="-120"/>
               </a:rPr>
-              <a:t>Implementation work should make dependencies, approvals, training, and sustainment visible before launch.</a:t>
-            </a:r>
-            <a:endParaRPr lang="en-US" sz="1120" dirty="0"/>
+              <a:t>Implementation work should make dependencies, approvals, training, and.</a:t>
+            </a:r>
+            <a:endParaRPr lang="en-US" sz="1040" dirty="0"/>
           </a:p>
         </p:txBody>
       </p:sp>
@@ -3882,12 +3884,12 @@
         </p:nvSpPr>
         <p:spPr>
           <a:xfrm>
-            <a:off x="7635240" y="4184294"/>
-            <a:ext cx="3474720" cy="1466698"/>
+            <a:off x="7543800" y="4389120"/>
+            <a:ext cx="3611880" cy="1261872"/>
           </a:xfrm>
           <a:prstGeom prst="roundRect">
             <a:avLst>
-              <a:gd name="adj" fmla="val 7481"/>
+              <a:gd name="adj" fmla="val 8696"/>
             </a:avLst>
           </a:prstGeom>
           <a:solidFill>
@@ -3909,8 +3911,8 @@
         </p:nvSpPr>
         <p:spPr>
           <a:xfrm>
-            <a:off x="7799832" y="4330598"/>
-            <a:ext cx="3145536" cy="256032"/>
+            <a:off x="7708392" y="4517136"/>
+            <a:ext cx="3282696" cy="228600"/>
           </a:xfrm>
           <a:prstGeom prst="rect">
             <a:avLst/>
@@ -3926,7 +3928,7 @@
               <a:buNone/>
             </a:pPr>
             <a:r>
-              <a:rPr lang="en-US" sz="1300" b="1" dirty="0">
+              <a:rPr lang="en-US" sz="1220" b="1" dirty="0">
                 <a:solidFill>
                   <a:srgbClr val="0068B7"/>
                 </a:solidFill>
@@ -3936,7 +3938,7 @@
               </a:rPr>
               <a:t>Next action</a:t>
             </a:r>
-            <a:endParaRPr lang="en-US" sz="1300" dirty="0"/>
+            <a:endParaRPr lang="en-US" sz="1220" dirty="0"/>
           </a:p>
         </p:txBody>
       </p:sp>
@@ -3948,8 +3950,8 @@
         </p:nvSpPr>
         <p:spPr>
           <a:xfrm>
-            <a:off x="7799832" y="4659782"/>
-            <a:ext cx="3145536" cy="899770"/>
+            <a:off x="7708392" y="4828032"/>
+            <a:ext cx="3282696" cy="749808"/>
           </a:xfrm>
           <a:prstGeom prst="rect">
             <a:avLst/>
@@ -3967,7 +3969,7 @@
               <a:buNone/>
             </a:pPr>
             <a:r>
-              <a:rPr lang="en-US" sz="1320" dirty="0">
+              <a:rPr lang="en-US" sz="1220" dirty="0">
                 <a:solidFill>
                   <a:srgbClr val="17364A"/>
                 </a:solidFill>
@@ -3975,9 +3977,9 @@
                 <a:ea typeface="Aptos" pitchFamily="34" charset="-122"/>
                 <a:cs typeface="Aptos" pitchFamily="34" charset="-120"/>
               </a:rPr>
-              <a:t>Use the concept to clarify workflow changes, dependencies, staffing, procurement requirements, training needs, and implementation checkpoints.</a:t>
-            </a:r>
-            <a:endParaRPr lang="en-US" sz="1320" dirty="0"/>
+              <a:t>Use the concept to clarify workflow changes, dependencies, staffing, procurement.</a:t>
+            </a:r>
+            <a:endParaRPr lang="en-US" sz="1220" dirty="0"/>
           </a:p>
         </p:txBody>
       </p:sp>
@@ -4268,8 +4270,8 @@
         </p:nvSpPr>
         <p:spPr>
           <a:xfrm>
-            <a:off x="868680" y="1508760"/>
-            <a:ext cx="6309360" cy="4160520"/>
+            <a:off x="822960" y="1463040"/>
+            <a:ext cx="6565392" cy="4343400"/>
           </a:xfrm>
           <a:prstGeom prst="rect">
             <a:avLst/>
@@ -4287,7 +4289,7 @@
               <a:buNone/>
             </a:pPr>
             <a:r>
-              <a:rPr lang="en-US" sz="2100" dirty="0">
+              <a:rPr lang="en-US" sz="1920" dirty="0">
                 <a:solidFill>
                   <a:srgbClr val="003A63"/>
                 </a:solidFill>
@@ -4297,14 +4299,14 @@
               </a:rPr>
               <a:t>• Human oversight should match risk.</a:t>
             </a:r>
-            <a:endParaRPr lang="en-US" sz="2100" dirty="0"/>
-          </a:p>
-          <a:p>
-            <a:pPr indent="0" marL="0">
-              <a:buNone/>
-            </a:pPr>
-            <a:r>
-              <a:rPr lang="en-US" sz="2100" dirty="0">
+            <a:endParaRPr lang="en-US" sz="1920" dirty="0"/>
+          </a:p>
+          <a:p>
+            <a:pPr indent="0" marL="0">
+              <a:buNone/>
+            </a:pPr>
+            <a:r>
+              <a:rPr lang="en-US" sz="1920" dirty="0">
                 <a:solidFill>
                   <a:srgbClr val="003A63"/>
                 </a:solidFill>
@@ -4312,16 +4314,16 @@
                 <a:ea typeface="Aptos" pitchFamily="34" charset="-122"/>
                 <a:cs typeface="Aptos" pitchFamily="34" charset="-120"/>
               </a:rPr>
-              <a:t>• Human-in-the-loop approval is appropriate for actions that affect records, services, public.</a:t>
-            </a:r>
-            <a:endParaRPr lang="en-US" sz="2100" dirty="0"/>
-          </a:p>
-          <a:p>
-            <a:pPr indent="0" marL="0">
-              <a:buNone/>
-            </a:pPr>
-            <a:r>
-              <a:rPr lang="en-US" sz="2100" dirty="0">
+              <a:t>• Human-in-the-loop approval is appropriate for actions that affect records,.</a:t>
+            </a:r>
+            <a:endParaRPr lang="en-US" sz="1920" dirty="0"/>
+          </a:p>
+          <a:p>
+            <a:pPr indent="0" marL="0">
+              <a:buNone/>
+            </a:pPr>
+            <a:r>
+              <a:rPr lang="en-US" sz="1920" dirty="0">
                 <a:solidFill>
                   <a:srgbClr val="003A63"/>
                 </a:solidFill>
@@ -4329,9 +4331,9 @@
                 <a:ea typeface="Aptos" pitchFamily="34" charset="-122"/>
                 <a:cs typeface="Aptos" pitchFamily="34" charset="-120"/>
               </a:rPr>
-              <a:t>• Human-on-the-loop monitoring may be appropriate for lower-risk background tasks if users can.</a:t>
-            </a:r>
-            <a:endParaRPr lang="en-US" sz="2100" dirty="0"/>
+              <a:t>• Human-on-the-loop monitoring may be appropriate for lower-risk background.</a:t>
+            </a:r>
+            <a:endParaRPr lang="en-US" sz="1920" dirty="0"/>
           </a:p>
         </p:txBody>
       </p:sp>
@@ -4343,12 +4345,12 @@
         </p:nvSpPr>
         <p:spPr>
           <a:xfrm>
-            <a:off x="7635240" y="1325880"/>
-            <a:ext cx="3474720" cy="1207008"/>
+            <a:off x="7543800" y="1325880"/>
+            <a:ext cx="3611880" cy="1261872"/>
           </a:xfrm>
           <a:prstGeom prst="roundRect">
             <a:avLst>
-              <a:gd name="adj" fmla="val 9091"/>
+              <a:gd name="adj" fmla="val 8696"/>
             </a:avLst>
           </a:prstGeom>
           <a:solidFill>
@@ -4370,8 +4372,8 @@
         </p:nvSpPr>
         <p:spPr>
           <a:xfrm>
-            <a:off x="7799832" y="1472184"/>
-            <a:ext cx="3145536" cy="256032"/>
+            <a:off x="7708392" y="1453896"/>
+            <a:ext cx="3282696" cy="228600"/>
           </a:xfrm>
           <a:prstGeom prst="rect">
             <a:avLst/>
@@ -4387,7 +4389,7 @@
               <a:buNone/>
             </a:pPr>
             <a:r>
-              <a:rPr lang="en-US" sz="1300" b="1" dirty="0">
+              <a:rPr lang="en-US" sz="1220" b="1" dirty="0">
                 <a:solidFill>
                   <a:srgbClr val="0068B7"/>
                 </a:solidFill>
@@ -4397,7 +4399,7 @@
               </a:rPr>
               <a:t>Implementation cue</a:t>
             </a:r>
-            <a:endParaRPr lang="en-US" sz="1300" dirty="0"/>
+            <a:endParaRPr lang="en-US" sz="1220" dirty="0"/>
           </a:p>
         </p:txBody>
       </p:sp>
@@ -4409,8 +4411,8 @@
         </p:nvSpPr>
         <p:spPr>
           <a:xfrm>
-            <a:off x="7799832" y="1801368"/>
-            <a:ext cx="3145536" cy="640080"/>
+            <a:off x="7708392" y="1764792"/>
+            <a:ext cx="3282696" cy="749808"/>
           </a:xfrm>
           <a:prstGeom prst="rect">
             <a:avLst/>
@@ -4428,7 +4430,7 @@
               <a:buNone/>
             </a:pPr>
             <a:r>
-              <a:rPr lang="en-US" sz="1320" dirty="0">
+              <a:rPr lang="en-US" sz="1220" dirty="0">
                 <a:solidFill>
                   <a:srgbClr val="17364A"/>
                 </a:solidFill>
@@ -4438,7 +4440,7 @@
               </a:rPr>
               <a:t>Human oversight should match risk.</a:t>
             </a:r>
-            <a:endParaRPr lang="en-US" sz="1320" dirty="0"/>
+            <a:endParaRPr lang="en-US" sz="1220" dirty="0"/>
           </a:p>
         </p:txBody>
       </p:sp>
@@ -4450,12 +4452,12 @@
         </p:nvSpPr>
         <p:spPr>
           <a:xfrm>
-            <a:off x="7635240" y="2670048"/>
-            <a:ext cx="3474720" cy="1377086"/>
+            <a:off x="7543800" y="2724912"/>
+            <a:ext cx="3611880" cy="1527048"/>
           </a:xfrm>
           <a:prstGeom prst="roundRect">
             <a:avLst>
-              <a:gd name="adj" fmla="val 7968"/>
+              <a:gd name="adj" fmla="val 7186"/>
             </a:avLst>
           </a:prstGeom>
           <a:solidFill>
@@ -4477,8 +4479,8 @@
         </p:nvSpPr>
         <p:spPr>
           <a:xfrm>
-            <a:off x="7799832" y="2816352"/>
-            <a:ext cx="3145536" cy="256032"/>
+            <a:off x="7708392" y="2852928"/>
+            <a:ext cx="3282696" cy="228600"/>
           </a:xfrm>
           <a:prstGeom prst="rect">
             <a:avLst/>
@@ -4494,7 +4496,7 @@
               <a:buNone/>
             </a:pPr>
             <a:r>
-              <a:rPr lang="en-US" sz="1300" b="1" dirty="0">
+              <a:rPr lang="en-US" sz="1220" b="1" dirty="0">
                 <a:solidFill>
                   <a:srgbClr val="0068B7"/>
                 </a:solidFill>
@@ -4504,7 +4506,7 @@
               </a:rPr>
               <a:t>Concept checkpoints</a:t>
             </a:r>
-            <a:endParaRPr lang="en-US" sz="1300" dirty="0"/>
+            <a:endParaRPr lang="en-US" sz="1220" dirty="0"/>
           </a:p>
         </p:txBody>
       </p:sp>
@@ -4516,8 +4518,8 @@
         </p:nvSpPr>
         <p:spPr>
           <a:xfrm>
-            <a:off x="7818120" y="3182112"/>
-            <a:ext cx="3090672" cy="718718"/>
+            <a:off x="7726680" y="3182112"/>
+            <a:ext cx="3227832" cy="960120"/>
           </a:xfrm>
           <a:prstGeom prst="rect">
             <a:avLst/>
@@ -4535,7 +4537,7 @@
               <a:buNone/>
             </a:pPr>
             <a:r>
-              <a:rPr lang="en-US" sz="1220" dirty="0">
+              <a:rPr lang="en-US" sz="1140" dirty="0">
                 <a:solidFill>
                   <a:srgbClr val="17364A"/>
                 </a:solidFill>
@@ -4543,16 +4545,16 @@
                 <a:ea typeface="Aptos" pitchFamily="34" charset="-122"/>
                 <a:cs typeface="Aptos" pitchFamily="34" charset="-120"/>
               </a:rPr>
-              <a:t>Human-in-the-loop approval is appropriate for actions that affect.</a:t>
-            </a:r>
-            <a:endParaRPr lang="en-US" sz="1220" dirty="0"/>
-          </a:p>
-          <a:p>
-            <a:pPr indent="0" marL="0">
-              <a:buNone/>
-            </a:pPr>
-            <a:r>
-              <a:rPr lang="en-US" sz="1220" dirty="0">
+              <a:t>Human-in-the-loop approval is appropriate for.</a:t>
+            </a:r>
+            <a:endParaRPr lang="en-US" sz="1140" dirty="0"/>
+          </a:p>
+          <a:p>
+            <a:pPr indent="0" marL="0">
+              <a:buNone/>
+            </a:pPr>
+            <a:r>
+              <a:rPr lang="en-US" sz="1140" dirty="0">
                 <a:solidFill>
                   <a:srgbClr val="17364A"/>
                 </a:solidFill>
@@ -4560,16 +4562,16 @@
                 <a:ea typeface="Aptos" pitchFamily="34" charset="-122"/>
                 <a:cs typeface="Aptos" pitchFamily="34" charset="-120"/>
               </a:rPr>
-              <a:t>Human-on-the-loop monitoring may be appropriate for lower-risk.</a:t>
-            </a:r>
-            <a:endParaRPr lang="en-US" sz="1220" dirty="0"/>
-          </a:p>
-          <a:p>
-            <a:pPr indent="0" marL="0">
-              <a:buNone/>
-            </a:pPr>
-            <a:r>
-              <a:rPr lang="en-US" sz="1220" dirty="0">
+              <a:t>Human-on-the-loop monitoring may be appropriate.</a:t>
+            </a:r>
+            <a:endParaRPr lang="en-US" sz="1140" dirty="0"/>
+          </a:p>
+          <a:p>
+            <a:pPr indent="0" marL="0">
+              <a:buNone/>
+            </a:pPr>
+            <a:r>
+              <a:rPr lang="en-US" sz="1140" dirty="0">
                 <a:solidFill>
                   <a:srgbClr val="17364A"/>
                 </a:solidFill>
@@ -4577,9 +4579,9 @@
                 <a:ea typeface="Aptos" pitchFamily="34" charset="-122"/>
                 <a:cs typeface="Aptos" pitchFamily="34" charset="-120"/>
               </a:rPr>
-              <a:t>Fully automated action should be limited to low-risk, well-tested,.</a:t>
-            </a:r>
-            <a:endParaRPr lang="en-US" sz="1220" dirty="0"/>
+              <a:t>Fully automated action should be limited to.</a:t>
+            </a:r>
+            <a:endParaRPr lang="en-US" sz="1140" dirty="0"/>
           </a:p>
         </p:txBody>
       </p:sp>
@@ -4591,12 +4593,12 @@
         </p:nvSpPr>
         <p:spPr>
           <a:xfrm>
-            <a:off x="7635240" y="4184294"/>
-            <a:ext cx="3474720" cy="1466698"/>
+            <a:off x="7543800" y="4389120"/>
+            <a:ext cx="3611880" cy="1261872"/>
           </a:xfrm>
           <a:prstGeom prst="roundRect">
             <a:avLst>
-              <a:gd name="adj" fmla="val 7481"/>
+              <a:gd name="adj" fmla="val 8696"/>
             </a:avLst>
           </a:prstGeom>
           <a:solidFill>
@@ -4618,8 +4620,8 @@
         </p:nvSpPr>
         <p:spPr>
           <a:xfrm>
-            <a:off x="7799832" y="4330598"/>
-            <a:ext cx="3145536" cy="256032"/>
+            <a:off x="7708392" y="4517136"/>
+            <a:ext cx="3282696" cy="228600"/>
           </a:xfrm>
           <a:prstGeom prst="rect">
             <a:avLst/>
@@ -4635,7 +4637,7 @@
               <a:buNone/>
             </a:pPr>
             <a:r>
-              <a:rPr lang="en-US" sz="1300" b="1" dirty="0">
+              <a:rPr lang="en-US" sz="1220" b="1" dirty="0">
                 <a:solidFill>
                   <a:srgbClr val="0068B7"/>
                 </a:solidFill>
@@ -4645,7 +4647,7 @@
               </a:rPr>
               <a:t>Next action</a:t>
             </a:r>
-            <a:endParaRPr lang="en-US" sz="1300" dirty="0"/>
+            <a:endParaRPr lang="en-US" sz="1220" dirty="0"/>
           </a:p>
         </p:txBody>
       </p:sp>
@@ -4657,8 +4659,8 @@
         </p:nvSpPr>
         <p:spPr>
           <a:xfrm>
-            <a:off x="7799832" y="4659782"/>
-            <a:ext cx="3145536" cy="899770"/>
+            <a:off x="7708392" y="4828032"/>
+            <a:ext cx="3282696" cy="749808"/>
           </a:xfrm>
           <a:prstGeom prst="rect">
             <a:avLst/>
@@ -4676,7 +4678,7 @@
               <a:buNone/>
             </a:pPr>
             <a:r>
-              <a:rPr lang="en-US" sz="1320" dirty="0">
+              <a:rPr lang="en-US" sz="1220" dirty="0">
                 <a:solidFill>
                   <a:srgbClr val="17364A"/>
                 </a:solidFill>
@@ -4684,9 +4686,9 @@
                 <a:ea typeface="Aptos" pitchFamily="34" charset="-122"/>
                 <a:cs typeface="Aptos" pitchFamily="34" charset="-120"/>
               </a:rPr>
-              <a:t>Use the concept to clarify workflow changes, dependencies, staffing, procurement requirements, training needs, and implementation checkpoints.</a:t>
-            </a:r>
-            <a:endParaRPr lang="en-US" sz="1320" dirty="0"/>
+              <a:t>Use the concept to clarify workflow changes, dependencies, staffing, procurement.</a:t>
+            </a:r>
+            <a:endParaRPr lang="en-US" sz="1220" dirty="0"/>
           </a:p>
         </p:txBody>
       </p:sp>
@@ -4977,8 +4979,8 @@
         </p:nvSpPr>
         <p:spPr>
           <a:xfrm>
-            <a:off x="868680" y="1508760"/>
-            <a:ext cx="6309360" cy="4160520"/>
+            <a:off x="822960" y="1463040"/>
+            <a:ext cx="6565392" cy="4343400"/>
           </a:xfrm>
           <a:prstGeom prst="rect">
             <a:avLst/>
@@ -4996,7 +4998,7 @@
               <a:buNone/>
             </a:pPr>
             <a:r>
-              <a:rPr lang="en-US" sz="2100" dirty="0">
+              <a:rPr lang="en-US" sz="1920" dirty="0">
                 <a:solidFill>
                   <a:srgbClr val="003A63"/>
                 </a:solidFill>
@@ -5006,14 +5008,14 @@
               </a:rPr>
               <a:t>• Excessive agency.</a:t>
             </a:r>
-            <a:endParaRPr lang="en-US" sz="2100" dirty="0"/>
-          </a:p>
-          <a:p>
-            <a:pPr indent="0" marL="0">
-              <a:buNone/>
-            </a:pPr>
-            <a:r>
-              <a:rPr lang="en-US" sz="2100" dirty="0">
+            <a:endParaRPr lang="en-US" sz="1920" dirty="0"/>
+          </a:p>
+          <a:p>
+            <a:pPr indent="0" marL="0">
+              <a:buNone/>
+            </a:pPr>
+            <a:r>
+              <a:rPr lang="en-US" sz="1920" dirty="0">
                 <a:solidFill>
                   <a:srgbClr val="003A63"/>
                 </a:solidFill>
@@ -5023,14 +5025,14 @@
               </a:rPr>
               <a:t>• An agent may take actions beyond intended scope.</a:t>
             </a:r>
-            <a:endParaRPr lang="en-US" sz="2100" dirty="0"/>
-          </a:p>
-          <a:p>
-            <a:pPr indent="0" marL="0">
-              <a:buNone/>
-            </a:pPr>
-            <a:r>
-              <a:rPr lang="en-US" sz="2100" dirty="0">
+            <a:endParaRPr lang="en-US" sz="1920" dirty="0"/>
+          </a:p>
+          <a:p>
+            <a:pPr indent="0" marL="0">
+              <a:buNone/>
+            </a:pPr>
+            <a:r>
+              <a:rPr lang="en-US" sz="1920" dirty="0">
                 <a:solidFill>
                   <a:srgbClr val="003A63"/>
                 </a:solidFill>
@@ -5038,9 +5040,9 @@
                 <a:ea typeface="Aptos" pitchFamily="34" charset="-122"/>
                 <a:cs typeface="Aptos" pitchFamily="34" charset="-120"/>
               </a:rPr>
-              <a:t>• Guardrails include narrow goals, allowed-action lists, prohibited actions, and approval gates.</a:t>
-            </a:r>
-            <a:endParaRPr lang="en-US" sz="2100" dirty="0"/>
+              <a:t>• Guardrails include narrow goals, allowed-action lists, prohibited actions,.</a:t>
+            </a:r>
+            <a:endParaRPr lang="en-US" sz="1920" dirty="0"/>
           </a:p>
         </p:txBody>
       </p:sp>
@@ -5052,12 +5054,12 @@
         </p:nvSpPr>
         <p:spPr>
           <a:xfrm>
-            <a:off x="7635240" y="1325880"/>
-            <a:ext cx="3474720" cy="1207008"/>
+            <a:off x="7543800" y="1325880"/>
+            <a:ext cx="3611880" cy="1261872"/>
           </a:xfrm>
           <a:prstGeom prst="roundRect">
             <a:avLst>
-              <a:gd name="adj" fmla="val 9091"/>
+              <a:gd name="adj" fmla="val 8696"/>
             </a:avLst>
           </a:prstGeom>
           <a:solidFill>
@@ -5079,8 +5081,8 @@
         </p:nvSpPr>
         <p:spPr>
           <a:xfrm>
-            <a:off x="7799832" y="1472184"/>
-            <a:ext cx="3145536" cy="256032"/>
+            <a:off x="7708392" y="1453896"/>
+            <a:ext cx="3282696" cy="228600"/>
           </a:xfrm>
           <a:prstGeom prst="rect">
             <a:avLst/>
@@ -5096,7 +5098,7 @@
               <a:buNone/>
             </a:pPr>
             <a:r>
-              <a:rPr lang="en-US" sz="1300" b="1" dirty="0">
+              <a:rPr lang="en-US" sz="1220" b="1" dirty="0">
                 <a:solidFill>
                   <a:srgbClr val="0068B7"/>
                 </a:solidFill>
@@ -5106,7 +5108,7 @@
               </a:rPr>
               <a:t>Risk check</a:t>
             </a:r>
-            <a:endParaRPr lang="en-US" sz="1300" dirty="0"/>
+            <a:endParaRPr lang="en-US" sz="1220" dirty="0"/>
           </a:p>
         </p:txBody>
       </p:sp>
@@ -5118,8 +5120,8 @@
         </p:nvSpPr>
         <p:spPr>
           <a:xfrm>
-            <a:off x="7799832" y="1801368"/>
-            <a:ext cx="3145536" cy="640080"/>
+            <a:off x="7708392" y="1764792"/>
+            <a:ext cx="3282696" cy="749808"/>
           </a:xfrm>
           <a:prstGeom prst="rect">
             <a:avLst/>
@@ -5137,7 +5139,7 @@
               <a:buNone/>
             </a:pPr>
             <a:r>
-              <a:rPr lang="en-US" sz="1320" dirty="0">
+              <a:rPr lang="en-US" sz="1220" dirty="0">
                 <a:solidFill>
                   <a:srgbClr val="17364A"/>
                 </a:solidFill>
@@ -5147,7 +5149,7 @@
               </a:rPr>
               <a:t>Excessive agency.</a:t>
             </a:r>
-            <a:endParaRPr lang="en-US" sz="1320" dirty="0"/>
+            <a:endParaRPr lang="en-US" sz="1220" dirty="0"/>
           </a:p>
         </p:txBody>
       </p:sp>
@@ -5159,12 +5161,12 @@
         </p:nvSpPr>
         <p:spPr>
           <a:xfrm>
-            <a:off x="7635240" y="2670048"/>
-            <a:ext cx="3474720" cy="1536192"/>
+            <a:off x="7543800" y="2724912"/>
+            <a:ext cx="3611880" cy="1527048"/>
           </a:xfrm>
           <a:prstGeom prst="roundRect">
             <a:avLst>
-              <a:gd name="adj" fmla="val 7143"/>
+              <a:gd name="adj" fmla="val 7186"/>
             </a:avLst>
           </a:prstGeom>
           <a:solidFill>
@@ -5186,8 +5188,8 @@
         </p:nvSpPr>
         <p:spPr>
           <a:xfrm>
-            <a:off x="7799832" y="2816352"/>
-            <a:ext cx="3145536" cy="256032"/>
+            <a:off x="7708392" y="2852928"/>
+            <a:ext cx="3282696" cy="228600"/>
           </a:xfrm>
           <a:prstGeom prst="rect">
             <a:avLst/>
@@ -5203,7 +5205,7 @@
               <a:buNone/>
             </a:pPr>
             <a:r>
-              <a:rPr lang="en-US" sz="1300" b="1" dirty="0">
+              <a:rPr lang="en-US" sz="1220" b="1" dirty="0">
                 <a:solidFill>
                   <a:srgbClr val="0068B7"/>
                 </a:solidFill>
@@ -5213,7 +5215,7 @@
               </a:rPr>
               <a:t>Concept checkpoints</a:t>
             </a:r>
-            <a:endParaRPr lang="en-US" sz="1300" dirty="0"/>
+            <a:endParaRPr lang="en-US" sz="1220" dirty="0"/>
           </a:p>
         </p:txBody>
       </p:sp>
@@ -5225,8 +5227,8 @@
         </p:nvSpPr>
         <p:spPr>
           <a:xfrm>
-            <a:off x="7818120" y="3182112"/>
-            <a:ext cx="3090672" cy="877824"/>
+            <a:off x="7726680" y="3182112"/>
+            <a:ext cx="3227832" cy="960120"/>
           </a:xfrm>
           <a:prstGeom prst="rect">
             <a:avLst/>
@@ -5244,7 +5246,7 @@
               <a:buNone/>
             </a:pPr>
             <a:r>
-              <a:rPr lang="en-US" sz="1220" dirty="0">
+              <a:rPr lang="en-US" sz="1140" dirty="0">
                 <a:solidFill>
                   <a:srgbClr val="17364A"/>
                 </a:solidFill>
@@ -5254,14 +5256,14 @@
               </a:rPr>
               <a:t>Unauthorized system access.</a:t>
             </a:r>
-            <a:endParaRPr lang="en-US" sz="1220" dirty="0"/>
-          </a:p>
-          <a:p>
-            <a:pPr indent="0" marL="0">
-              <a:buNone/>
-            </a:pPr>
-            <a:r>
-              <a:rPr lang="en-US" sz="1220" dirty="0">
+            <a:endParaRPr lang="en-US" sz="1140" dirty="0"/>
+          </a:p>
+          <a:p>
+            <a:pPr indent="0" marL="0">
+              <a:buNone/>
+            </a:pPr>
+            <a:r>
+              <a:rPr lang="en-US" sz="1140" dirty="0">
                 <a:solidFill>
                   <a:srgbClr val="17364A"/>
                 </a:solidFill>
@@ -5271,14 +5273,14 @@
               </a:rPr>
               <a:t>Tool access may expose sensitive data or functions.</a:t>
             </a:r>
-            <a:endParaRPr lang="en-US" sz="1220" dirty="0"/>
-          </a:p>
-          <a:p>
-            <a:pPr indent="0" marL="0">
-              <a:buNone/>
-            </a:pPr>
-            <a:r>
-              <a:rPr lang="en-US" sz="1220" dirty="0">
+            <a:endParaRPr lang="en-US" sz="1140" dirty="0"/>
+          </a:p>
+          <a:p>
+            <a:pPr indent="0" marL="0">
+              <a:buNone/>
+            </a:pPr>
+            <a:r>
+              <a:rPr lang="en-US" sz="1140" dirty="0">
                 <a:solidFill>
                   <a:srgbClr val="17364A"/>
                 </a:solidFill>
@@ -5286,9 +5288,9 @@
                 <a:ea typeface="Aptos" pitchFamily="34" charset="-122"/>
                 <a:cs typeface="Aptos" pitchFamily="34" charset="-120"/>
               </a:rPr>
-              <a:t>Guardrails include least privilege, scoped credentials, role-based.</a:t>
-            </a:r>
-            <a:endParaRPr lang="en-US" sz="1220" dirty="0"/>
+              <a:t>Guardrails include least privilege, scoped.</a:t>
+            </a:r>
+            <a:endParaRPr lang="en-US" sz="1140" dirty="0"/>
           </a:p>
         </p:txBody>
       </p:sp>
@@ -5300,12 +5302,12 @@
         </p:nvSpPr>
         <p:spPr>
           <a:xfrm>
-            <a:off x="7635240" y="4343400"/>
-            <a:ext cx="3474720" cy="1255471"/>
+            <a:off x="7543800" y="4389120"/>
+            <a:ext cx="3611880" cy="1261872"/>
           </a:xfrm>
           <a:prstGeom prst="roundRect">
             <a:avLst>
-              <a:gd name="adj" fmla="val 8740"/>
+              <a:gd name="adj" fmla="val 8696"/>
             </a:avLst>
           </a:prstGeom>
           <a:solidFill>
@@ -5327,8 +5329,8 @@
         </p:nvSpPr>
         <p:spPr>
           <a:xfrm>
-            <a:off x="7799832" y="4489704"/>
-            <a:ext cx="3145536" cy="256032"/>
+            <a:off x="7708392" y="4517136"/>
+            <a:ext cx="3282696" cy="228600"/>
           </a:xfrm>
           <a:prstGeom prst="rect">
             <a:avLst/>
@@ -5344,7 +5346,7 @@
               <a:buNone/>
             </a:pPr>
             <a:r>
-              <a:rPr lang="en-US" sz="1300" b="1" dirty="0">
+              <a:rPr lang="en-US" sz="1220" b="1" dirty="0">
                 <a:solidFill>
                   <a:srgbClr val="0068B7"/>
                 </a:solidFill>
@@ -5354,7 +5356,7 @@
               </a:rPr>
               <a:t>Safeguard to plan</a:t>
             </a:r>
-            <a:endParaRPr lang="en-US" sz="1300" dirty="0"/>
+            <a:endParaRPr lang="en-US" sz="1220" dirty="0"/>
           </a:p>
         </p:txBody>
       </p:sp>
@@ -5366,8 +5368,8 @@
         </p:nvSpPr>
         <p:spPr>
           <a:xfrm>
-            <a:off x="7799832" y="4818888"/>
-            <a:ext cx="3145536" cy="688543"/>
+            <a:off x="7708392" y="4828032"/>
+            <a:ext cx="3282696" cy="749808"/>
           </a:xfrm>
           <a:prstGeom prst="rect">
             <a:avLst/>
@@ -5385,7 +5387,7 @@
               <a:buNone/>
             </a:pPr>
             <a:r>
-              <a:rPr lang="en-US" sz="1320" dirty="0">
+              <a:rPr lang="en-US" sz="1220" dirty="0">
                 <a:solidFill>
                   <a:srgbClr val="17364A"/>
                 </a:solidFill>
@@ -5393,9 +5395,9 @@
                 <a:ea typeface="Aptos" pitchFamily="34" charset="-122"/>
                 <a:cs typeface="Aptos" pitchFamily="34" charset="-120"/>
               </a:rPr>
-              <a:t>Identify what could go wrong, who could be affected, what safeguards are needed, and what evidence should be reviewed before use.</a:t>
-            </a:r>
-            <a:endParaRPr lang="en-US" sz="1320" dirty="0"/>
+              <a:t>Identify what could go wrong, who could be affected, what safeguards are needed,.</a:t>
+            </a:r>
+            <a:endParaRPr lang="en-US" sz="1220" dirty="0"/>
           </a:p>
         </p:txBody>
       </p:sp>
@@ -5686,8 +5688,8 @@
         </p:nvSpPr>
         <p:spPr>
           <a:xfrm>
-            <a:off x="868680" y="1508760"/>
-            <a:ext cx="6309360" cy="4160520"/>
+            <a:off x="822960" y="1463040"/>
+            <a:ext cx="6565392" cy="4343400"/>
           </a:xfrm>
           <a:prstGeom prst="rect">
             <a:avLst/>
@@ -5705,7 +5707,7 @@
               <a:buNone/>
             </a:pPr>
             <a:r>
-              <a:rPr lang="en-US" sz="2100" dirty="0">
+              <a:rPr lang="en-US" sz="1920" dirty="0">
                 <a:solidFill>
                   <a:srgbClr val="003A63"/>
                 </a:solidFill>
@@ -5715,14 +5717,14 @@
               </a:rPr>
               <a:t>• Unclear accountability.</a:t>
             </a:r>
-            <a:endParaRPr lang="en-US" sz="2100" dirty="0"/>
-          </a:p>
-          <a:p>
-            <a:pPr indent="0" marL="0">
-              <a:buNone/>
-            </a:pPr>
-            <a:r>
-              <a:rPr lang="en-US" sz="2100" dirty="0">
+            <a:endParaRPr lang="en-US" sz="1920" dirty="0"/>
+          </a:p>
+          <a:p>
+            <a:pPr indent="0" marL="0">
+              <a:buNone/>
+            </a:pPr>
+            <a:r>
+              <a:rPr lang="en-US" sz="1920" dirty="0">
                 <a:solidFill>
                   <a:srgbClr val="003A63"/>
                 </a:solidFill>
@@ -5732,14 +5734,14 @@
               </a:rPr>
               <a:t>• Staff may not know who is responsible for agent actions.</a:t>
             </a:r>
-            <a:endParaRPr lang="en-US" sz="2100" dirty="0"/>
-          </a:p>
-          <a:p>
-            <a:pPr indent="0" marL="0">
-              <a:buNone/>
-            </a:pPr>
-            <a:r>
-              <a:rPr lang="en-US" sz="2100" dirty="0">
+            <a:endParaRPr lang="en-US" sz="1920" dirty="0"/>
+          </a:p>
+          <a:p>
+            <a:pPr indent="0" marL="0">
+              <a:buNone/>
+            </a:pPr>
+            <a:r>
+              <a:rPr lang="en-US" sz="1920" dirty="0">
                 <a:solidFill>
                   <a:srgbClr val="003A63"/>
                 </a:solidFill>
@@ -5749,7 +5751,7 @@
               </a:rPr>
               <a:t>• Guardrails include role definitions, review records, and governance ownership.</a:t>
             </a:r>
-            <a:endParaRPr lang="en-US" sz="2100" dirty="0"/>
+            <a:endParaRPr lang="en-US" sz="1920" dirty="0"/>
           </a:p>
         </p:txBody>
       </p:sp>
@@ -5761,12 +5763,12 @@
         </p:nvSpPr>
         <p:spPr>
           <a:xfrm>
-            <a:off x="7635240" y="1325880"/>
-            <a:ext cx="3474720" cy="1207008"/>
+            <a:off x="7543800" y="1325880"/>
+            <a:ext cx="3611880" cy="1261872"/>
           </a:xfrm>
           <a:prstGeom prst="roundRect">
             <a:avLst>
-              <a:gd name="adj" fmla="val 9091"/>
+              <a:gd name="adj" fmla="val 8696"/>
             </a:avLst>
           </a:prstGeom>
           <a:solidFill>
@@ -5788,8 +5790,8 @@
         </p:nvSpPr>
         <p:spPr>
           <a:xfrm>
-            <a:off x="7799832" y="1472184"/>
-            <a:ext cx="3145536" cy="256032"/>
+            <a:off x="7708392" y="1453896"/>
+            <a:ext cx="3282696" cy="228600"/>
           </a:xfrm>
           <a:prstGeom prst="rect">
             <a:avLst/>
@@ -5805,7 +5807,7 @@
               <a:buNone/>
             </a:pPr>
             <a:r>
-              <a:rPr lang="en-US" sz="1300" b="1" dirty="0">
+              <a:rPr lang="en-US" sz="1220" b="1" dirty="0">
                 <a:solidFill>
                   <a:srgbClr val="0068B7"/>
                 </a:solidFill>
@@ -5815,7 +5817,7 @@
               </a:rPr>
               <a:t>Risk check</a:t>
             </a:r>
-            <a:endParaRPr lang="en-US" sz="1300" dirty="0"/>
+            <a:endParaRPr lang="en-US" sz="1220" dirty="0"/>
           </a:p>
         </p:txBody>
       </p:sp>
@@ -5827,8 +5829,8 @@
         </p:nvSpPr>
         <p:spPr>
           <a:xfrm>
-            <a:off x="7799832" y="1801368"/>
-            <a:ext cx="3145536" cy="640080"/>
+            <a:off x="7708392" y="1764792"/>
+            <a:ext cx="3282696" cy="749808"/>
           </a:xfrm>
           <a:prstGeom prst="rect">
             <a:avLst/>
@@ -5846,7 +5848,7 @@
               <a:buNone/>
             </a:pPr>
             <a:r>
-              <a:rPr lang="en-US" sz="1320" dirty="0">
+              <a:rPr lang="en-US" sz="1220" dirty="0">
                 <a:solidFill>
                   <a:srgbClr val="17364A"/>
                 </a:solidFill>
@@ -5856,7 +5858,7 @@
               </a:rPr>
               <a:t>Unclear accountability.</a:t>
             </a:r>
-            <a:endParaRPr lang="en-US" sz="1320" dirty="0"/>
+            <a:endParaRPr lang="en-US" sz="1220" dirty="0"/>
           </a:p>
         </p:txBody>
       </p:sp>
@@ -5868,12 +5870,12 @@
         </p:nvSpPr>
         <p:spPr>
           <a:xfrm>
-            <a:off x="7635240" y="2670048"/>
-            <a:ext cx="3474720" cy="1536192"/>
+            <a:off x="7543800" y="2724912"/>
+            <a:ext cx="3611880" cy="1527048"/>
           </a:xfrm>
           <a:prstGeom prst="roundRect">
             <a:avLst>
-              <a:gd name="adj" fmla="val 7143"/>
+              <a:gd name="adj" fmla="val 7186"/>
             </a:avLst>
           </a:prstGeom>
           <a:solidFill>
@@ -5895,8 +5897,8 @@
         </p:nvSpPr>
         <p:spPr>
           <a:xfrm>
-            <a:off x="7799832" y="2816352"/>
-            <a:ext cx="3145536" cy="256032"/>
+            <a:off x="7708392" y="2852928"/>
+            <a:ext cx="3282696" cy="228600"/>
           </a:xfrm>
           <a:prstGeom prst="rect">
             <a:avLst/>
@@ -5912,7 +5914,7 @@
               <a:buNone/>
             </a:pPr>
             <a:r>
-              <a:rPr lang="en-US" sz="1300" b="1" dirty="0">
+              <a:rPr lang="en-US" sz="1220" b="1" dirty="0">
                 <a:solidFill>
                   <a:srgbClr val="0068B7"/>
                 </a:solidFill>
@@ -5922,7 +5924,7 @@
               </a:rPr>
               <a:t>Concept checkpoints</a:t>
             </a:r>
-            <a:endParaRPr lang="en-US" sz="1300" dirty="0"/>
+            <a:endParaRPr lang="en-US" sz="1220" dirty="0"/>
           </a:p>
         </p:txBody>
       </p:sp>
@@ -5934,8 +5936,8 @@
         </p:nvSpPr>
         <p:spPr>
           <a:xfrm>
-            <a:off x="7818120" y="3182112"/>
-            <a:ext cx="3090672" cy="877824"/>
+            <a:off x="7726680" y="3182112"/>
+            <a:ext cx="3227832" cy="960120"/>
           </a:xfrm>
           <a:prstGeom prst="rect">
             <a:avLst/>
@@ -5953,7 +5955,7 @@
               <a:buNone/>
             </a:pPr>
             <a:r>
-              <a:rPr lang="en-US" sz="1220" dirty="0">
+              <a:rPr lang="en-US" sz="1140" dirty="0">
                 <a:solidFill>
                   <a:srgbClr val="17364A"/>
                 </a:solidFill>
@@ -5963,14 +5965,14 @@
               </a:rPr>
               <a:t>Unclear accountability.</a:t>
             </a:r>
-            <a:endParaRPr lang="en-US" sz="1220" dirty="0"/>
-          </a:p>
-          <a:p>
-            <a:pPr indent="0" marL="0">
-              <a:buNone/>
-            </a:pPr>
-            <a:r>
-              <a:rPr lang="en-US" sz="1220" dirty="0">
+            <a:endParaRPr lang="en-US" sz="1140" dirty="0"/>
+          </a:p>
+          <a:p>
+            <a:pPr indent="0" marL="0">
+              <a:buNone/>
+            </a:pPr>
+            <a:r>
+              <a:rPr lang="en-US" sz="1140" dirty="0">
                 <a:solidFill>
                   <a:srgbClr val="17364A"/>
                 </a:solidFill>
@@ -5978,16 +5980,16 @@
                 <a:ea typeface="Aptos" pitchFamily="34" charset="-122"/>
                 <a:cs typeface="Aptos" pitchFamily="34" charset="-120"/>
               </a:rPr>
-              <a:t>Staff may not know who is responsible for agent actions.</a:t>
-            </a:r>
-            <a:endParaRPr lang="en-US" sz="1220" dirty="0"/>
-          </a:p>
-          <a:p>
-            <a:pPr indent="0" marL="0">
-              <a:buNone/>
-            </a:pPr>
-            <a:r>
-              <a:rPr lang="en-US" sz="1220" dirty="0">
+              <a:t>Staff may not know who is responsible for agent.</a:t>
+            </a:r>
+            <a:endParaRPr lang="en-US" sz="1140" dirty="0"/>
+          </a:p>
+          <a:p>
+            <a:pPr indent="0" marL="0">
+              <a:buNone/>
+            </a:pPr>
+            <a:r>
+              <a:rPr lang="en-US" sz="1140" dirty="0">
                 <a:solidFill>
                   <a:srgbClr val="17364A"/>
                 </a:solidFill>
@@ -5995,9 +5997,9 @@
                 <a:ea typeface="Aptos" pitchFamily="34" charset="-122"/>
                 <a:cs typeface="Aptos" pitchFamily="34" charset="-120"/>
               </a:rPr>
-              <a:t>Guardrails include role definitions, review records, and.</a:t>
-            </a:r>
-            <a:endParaRPr lang="en-US" sz="1220" dirty="0"/>
+              <a:t>Guardrails include role definitions, review.</a:t>
+            </a:r>
+            <a:endParaRPr lang="en-US" sz="1140" dirty="0"/>
           </a:p>
         </p:txBody>
       </p:sp>
@@ -6009,12 +6011,12 @@
         </p:nvSpPr>
         <p:spPr>
           <a:xfrm>
-            <a:off x="7635240" y="4343400"/>
-            <a:ext cx="3474720" cy="1255471"/>
+            <a:off x="7543800" y="4389120"/>
+            <a:ext cx="3611880" cy="1261872"/>
           </a:xfrm>
           <a:prstGeom prst="roundRect">
             <a:avLst>
-              <a:gd name="adj" fmla="val 8740"/>
+              <a:gd name="adj" fmla="val 8696"/>
             </a:avLst>
           </a:prstGeom>
           <a:solidFill>
@@ -6036,8 +6038,8 @@
         </p:nvSpPr>
         <p:spPr>
           <a:xfrm>
-            <a:off x="7799832" y="4489704"/>
-            <a:ext cx="3145536" cy="256032"/>
+            <a:off x="7708392" y="4517136"/>
+            <a:ext cx="3282696" cy="228600"/>
           </a:xfrm>
           <a:prstGeom prst="rect">
             <a:avLst/>
@@ -6053,7 +6055,7 @@
               <a:buNone/>
             </a:pPr>
             <a:r>
-              <a:rPr lang="en-US" sz="1300" b="1" dirty="0">
+              <a:rPr lang="en-US" sz="1220" b="1" dirty="0">
                 <a:solidFill>
                   <a:srgbClr val="0068B7"/>
                 </a:solidFill>
@@ -6063,7 +6065,7 @@
               </a:rPr>
               <a:t>Safeguard to plan</a:t>
             </a:r>
-            <a:endParaRPr lang="en-US" sz="1300" dirty="0"/>
+            <a:endParaRPr lang="en-US" sz="1220" dirty="0"/>
           </a:p>
         </p:txBody>
       </p:sp>
@@ -6075,8 +6077,8 @@
         </p:nvSpPr>
         <p:spPr>
           <a:xfrm>
-            <a:off x="7799832" y="4818888"/>
-            <a:ext cx="3145536" cy="688543"/>
+            <a:off x="7708392" y="4828032"/>
+            <a:ext cx="3282696" cy="749808"/>
           </a:xfrm>
           <a:prstGeom prst="rect">
             <a:avLst/>
@@ -6094,7 +6096,7 @@
               <a:buNone/>
             </a:pPr>
             <a:r>
-              <a:rPr lang="en-US" sz="1320" dirty="0">
+              <a:rPr lang="en-US" sz="1220" dirty="0">
                 <a:solidFill>
                   <a:srgbClr val="17364A"/>
                 </a:solidFill>
@@ -6102,9 +6104,9 @@
                 <a:ea typeface="Aptos" pitchFamily="34" charset="-122"/>
                 <a:cs typeface="Aptos" pitchFamily="34" charset="-120"/>
               </a:rPr>
-              <a:t>Identify what could go wrong, who could be affected, what safeguards are needed, and what evidence should be reviewed before use.</a:t>
-            </a:r>
-            <a:endParaRPr lang="en-US" sz="1320" dirty="0"/>
+              <a:t>Identify what could go wrong, who could be affected, what safeguards are needed,.</a:t>
+            </a:r>
+            <a:endParaRPr lang="en-US" sz="1220" dirty="0"/>
           </a:p>
         </p:txBody>
       </p:sp>
@@ -6395,8 +6397,8 @@
         </p:nvSpPr>
         <p:spPr>
           <a:xfrm>
-            <a:off x="868680" y="1508760"/>
-            <a:ext cx="6309360" cy="4160520"/>
+            <a:off x="822960" y="1463040"/>
+            <a:ext cx="6565392" cy="4343400"/>
           </a:xfrm>
           <a:prstGeom prst="rect">
             <a:avLst/>
@@ -6414,7 +6416,7 @@
               <a:buNone/>
             </a:pPr>
             <a:r>
-              <a:rPr lang="en-US" sz="2100" dirty="0">
+              <a:rPr lang="en-US" sz="1920" dirty="0">
                 <a:solidFill>
                   <a:srgbClr val="003A63"/>
                 </a:solidFill>
@@ -6422,16 +6424,16 @@
                 <a:ea typeface="Aptos" pitchFamily="34" charset="-122"/>
                 <a:cs typeface="Aptos" pitchFamily="34" charset="-120"/>
               </a:rPr>
-              <a:t>• Agentic workflows may combine RAG, APIs, prompts, classification models, workflow rules, and.</a:t>
-            </a:r>
-            <a:endParaRPr lang="en-US" sz="2100" dirty="0"/>
-          </a:p>
-          <a:p>
-            <a:pPr indent="0" marL="0">
-              <a:buNone/>
-            </a:pPr>
-            <a:r>
-              <a:rPr lang="en-US" sz="2100" dirty="0">
+              <a:t>• Agentic workflows may combine RAG, APIs, prompts, classification models,.</a:t>
+            </a:r>
+            <a:endParaRPr lang="en-US" sz="1920" dirty="0"/>
+          </a:p>
+          <a:p>
+            <a:pPr indent="0" marL="0">
+              <a:buNone/>
+            </a:pPr>
+            <a:r>
+              <a:rPr lang="en-US" sz="1920" dirty="0">
                 <a:solidFill>
                   <a:srgbClr val="003A63"/>
                 </a:solidFill>
@@ -6439,16 +6441,16 @@
                 <a:ea typeface="Aptos" pitchFamily="34" charset="-122"/>
                 <a:cs typeface="Aptos" pitchFamily="34" charset="-120"/>
               </a:rPr>
-              <a:t>• They are most appropriate when tasks are repetitive, bounded, reviewable, and supported by.</a:t>
-            </a:r>
-            <a:endParaRPr lang="en-US" sz="2100" dirty="0"/>
-          </a:p>
-          <a:p>
-            <a:pPr indent="0" marL="0">
-              <a:buNone/>
-            </a:pPr>
-            <a:r>
-              <a:rPr lang="en-US" sz="2100" dirty="0">
+              <a:t>• They are most appropriate when tasks are repetitive, bounded, reviewable,.</a:t>
+            </a:r>
+            <a:endParaRPr lang="en-US" sz="1920" dirty="0"/>
+          </a:p>
+          <a:p>
+            <a:pPr indent="0" marL="0">
+              <a:buNone/>
+            </a:pPr>
+            <a:r>
+              <a:rPr lang="en-US" sz="1920" dirty="0">
                 <a:solidFill>
                   <a:srgbClr val="003A63"/>
                 </a:solidFill>
@@ -6456,9 +6458,9 @@
                 <a:ea typeface="Aptos" pitchFamily="34" charset="-122"/>
                 <a:cs typeface="Aptos" pitchFamily="34" charset="-120"/>
               </a:rPr>
-              <a:t>• They are least appropriate when the task requires complex judgment, legal interpretation,.</a:t>
-            </a:r>
-            <a:endParaRPr lang="en-US" sz="2100" dirty="0"/>
+              <a:t>• They are least appropriate when the task requires complex judgment, legal.</a:t>
+            </a:r>
+            <a:endParaRPr lang="en-US" sz="1920" dirty="0"/>
           </a:p>
         </p:txBody>
       </p:sp>
@@ -6470,12 +6472,12 @@
         </p:nvSpPr>
         <p:spPr>
           <a:xfrm>
-            <a:off x="7635240" y="1325880"/>
-            <a:ext cx="3474720" cy="1255471"/>
+            <a:off x="7543800" y="1325880"/>
+            <a:ext cx="3611880" cy="1261872"/>
           </a:xfrm>
           <a:prstGeom prst="roundRect">
             <a:avLst>
-              <a:gd name="adj" fmla="val 8740"/>
+              <a:gd name="adj" fmla="val 8696"/>
             </a:avLst>
           </a:prstGeom>
           <a:solidFill>
@@ -6497,8 +6499,8 @@
         </p:nvSpPr>
         <p:spPr>
           <a:xfrm>
-            <a:off x="7799832" y="1472184"/>
-            <a:ext cx="3145536" cy="256032"/>
+            <a:off x="7708392" y="1453896"/>
+            <a:ext cx="3282696" cy="228600"/>
           </a:xfrm>
           <a:prstGeom prst="rect">
             <a:avLst/>
@@ -6514,7 +6516,7 @@
               <a:buNone/>
             </a:pPr>
             <a:r>
-              <a:rPr lang="en-US" sz="1300" b="1" dirty="0">
+              <a:rPr lang="en-US" sz="1220" b="1" dirty="0">
                 <a:solidFill>
                   <a:srgbClr val="0068B7"/>
                 </a:solidFill>
@@ -6524,7 +6526,7 @@
               </a:rPr>
               <a:t>Implementation cue</a:t>
             </a:r>
-            <a:endParaRPr lang="en-US" sz="1300" dirty="0"/>
+            <a:endParaRPr lang="en-US" sz="1220" dirty="0"/>
           </a:p>
         </p:txBody>
       </p:sp>
@@ -6536,8 +6538,8 @@
         </p:nvSpPr>
         <p:spPr>
           <a:xfrm>
-            <a:off x="7799832" y="1801368"/>
-            <a:ext cx="3145536" cy="688543"/>
+            <a:off x="7708392" y="1764792"/>
+            <a:ext cx="3282696" cy="749808"/>
           </a:xfrm>
           <a:prstGeom prst="rect">
             <a:avLst/>
@@ -6555,7 +6557,7 @@
               <a:buNone/>
             </a:pPr>
             <a:r>
-              <a:rPr lang="en-US" sz="1320" dirty="0">
+              <a:rPr lang="en-US" sz="1220" dirty="0">
                 <a:solidFill>
                   <a:srgbClr val="17364A"/>
                 </a:solidFill>
@@ -6563,9 +6565,9 @@
                 <a:ea typeface="Aptos" pitchFamily="34" charset="-122"/>
                 <a:cs typeface="Aptos" pitchFamily="34" charset="-120"/>
               </a:rPr>
-              <a:t>Agentic workflows may combine RAG, APIs, prompts, classification models, workflow rules, and messaging.</a:t>
-            </a:r>
-            <a:endParaRPr lang="en-US" sz="1320" dirty="0"/>
+              <a:t>Agentic workflows may combine RAG, APIs, prompts, classification models,.</a:t>
+            </a:r>
+            <a:endParaRPr lang="en-US" sz="1220" dirty="0"/>
           </a:p>
         </p:txBody>
       </p:sp>
@@ -6577,12 +6579,12 @@
         </p:nvSpPr>
         <p:spPr>
           <a:xfrm>
-            <a:off x="7635240" y="2718511"/>
-            <a:ext cx="3474720" cy="1328623"/>
+            <a:off x="7543800" y="2724912"/>
+            <a:ext cx="3611880" cy="1527048"/>
           </a:xfrm>
           <a:prstGeom prst="roundRect">
             <a:avLst>
-              <a:gd name="adj" fmla="val 8259"/>
+              <a:gd name="adj" fmla="val 7186"/>
             </a:avLst>
           </a:prstGeom>
           <a:solidFill>
@@ -6604,8 +6606,8 @@
         </p:nvSpPr>
         <p:spPr>
           <a:xfrm>
-            <a:off x="7799832" y="2864815"/>
-            <a:ext cx="3145536" cy="256032"/>
+            <a:off x="7708392" y="2852928"/>
+            <a:ext cx="3282696" cy="228600"/>
           </a:xfrm>
           <a:prstGeom prst="rect">
             <a:avLst/>
@@ -6621,7 +6623,7 @@
               <a:buNone/>
             </a:pPr>
             <a:r>
-              <a:rPr lang="en-US" sz="1300" b="1" dirty="0">
+              <a:rPr lang="en-US" sz="1220" b="1" dirty="0">
                 <a:solidFill>
                   <a:srgbClr val="0068B7"/>
                 </a:solidFill>
@@ -6631,7 +6633,7 @@
               </a:rPr>
               <a:t>Concept checkpoints</a:t>
             </a:r>
-            <a:endParaRPr lang="en-US" sz="1300" dirty="0"/>
+            <a:endParaRPr lang="en-US" sz="1220" dirty="0"/>
           </a:p>
         </p:txBody>
       </p:sp>
@@ -6643,8 +6645,8 @@
         </p:nvSpPr>
         <p:spPr>
           <a:xfrm>
-            <a:off x="7818120" y="3230575"/>
-            <a:ext cx="3090672" cy="670255"/>
+            <a:off x="7726680" y="3182112"/>
+            <a:ext cx="3227832" cy="960120"/>
           </a:xfrm>
           <a:prstGeom prst="rect">
             <a:avLst/>
@@ -6662,7 +6664,7 @@
               <a:buNone/>
             </a:pPr>
             <a:r>
-              <a:rPr lang="en-US" sz="1220" dirty="0">
+              <a:rPr lang="en-US" sz="1140" dirty="0">
                 <a:solidFill>
                   <a:srgbClr val="17364A"/>
                 </a:solidFill>
@@ -6670,16 +6672,16 @@
                 <a:ea typeface="Aptos" pitchFamily="34" charset="-122"/>
                 <a:cs typeface="Aptos" pitchFamily="34" charset="-120"/>
               </a:rPr>
-              <a:t>Agentic workflows may combine RAG, APIs, prompts, classification.</a:t>
-            </a:r>
-            <a:endParaRPr lang="en-US" sz="1220" dirty="0"/>
-          </a:p>
-          <a:p>
-            <a:pPr indent="0" marL="0">
-              <a:buNone/>
-            </a:pPr>
-            <a:r>
-              <a:rPr lang="en-US" sz="1220" dirty="0">
+              <a:t>Agentic workflows may combine RAG, APIs, prompts,.</a:t>
+            </a:r>
+            <a:endParaRPr lang="en-US" sz="1140" dirty="0"/>
+          </a:p>
+          <a:p>
+            <a:pPr indent="0" marL="0">
+              <a:buNone/>
+            </a:pPr>
+            <a:r>
+              <a:rPr lang="en-US" sz="1140" dirty="0">
                 <a:solidFill>
                   <a:srgbClr val="17364A"/>
                 </a:solidFill>
@@ -6687,16 +6689,16 @@
                 <a:ea typeface="Aptos" pitchFamily="34" charset="-122"/>
                 <a:cs typeface="Aptos" pitchFamily="34" charset="-120"/>
               </a:rPr>
-              <a:t>They are least appropriate when the task requires complex.</a:t>
-            </a:r>
-            <a:endParaRPr lang="en-US" sz="1220" dirty="0"/>
-          </a:p>
-          <a:p>
-            <a:pPr indent="0" marL="0">
-              <a:buNone/>
-            </a:pPr>
-            <a:r>
-              <a:rPr lang="en-US" sz="1220" dirty="0">
+              <a:t>They are least appropriate when the task requires.</a:t>
+            </a:r>
+            <a:endParaRPr lang="en-US" sz="1140" dirty="0"/>
+          </a:p>
+          <a:p>
+            <a:pPr indent="0" marL="0">
+              <a:buNone/>
+            </a:pPr>
+            <a:r>
+              <a:rPr lang="en-US" sz="1140" dirty="0">
                 <a:solidFill>
                   <a:srgbClr val="17364A"/>
                 </a:solidFill>
@@ -6704,9 +6706,9 @@
                 <a:ea typeface="Aptos" pitchFamily="34" charset="-122"/>
                 <a:cs typeface="Aptos" pitchFamily="34" charset="-120"/>
               </a:rPr>
-              <a:t>Public health agencies should pilot agentic workflows in limited,.</a:t>
-            </a:r>
-            <a:endParaRPr lang="en-US" sz="1220" dirty="0"/>
+              <a:t>Public health agencies should pilot agentic.</a:t>
+            </a:r>
+            <a:endParaRPr lang="en-US" sz="1140" dirty="0"/>
           </a:p>
         </p:txBody>
       </p:sp>
@@ -6718,12 +6720,12 @@
         </p:nvSpPr>
         <p:spPr>
           <a:xfrm>
-            <a:off x="7635240" y="4184294"/>
-            <a:ext cx="3474720" cy="1466698"/>
+            <a:off x="7543800" y="4389120"/>
+            <a:ext cx="3611880" cy="1261872"/>
           </a:xfrm>
           <a:prstGeom prst="roundRect">
             <a:avLst>
-              <a:gd name="adj" fmla="val 7481"/>
+              <a:gd name="adj" fmla="val 8696"/>
             </a:avLst>
           </a:prstGeom>
           <a:solidFill>
@@ -6745,8 +6747,8 @@
         </p:nvSpPr>
         <p:spPr>
           <a:xfrm>
-            <a:off x="7799832" y="4330598"/>
-            <a:ext cx="3145536" cy="256032"/>
+            <a:off x="7708392" y="4517136"/>
+            <a:ext cx="3282696" cy="228600"/>
           </a:xfrm>
           <a:prstGeom prst="rect">
             <a:avLst/>
@@ -6762,7 +6764,7 @@
               <a:buNone/>
             </a:pPr>
             <a:r>
-              <a:rPr lang="en-US" sz="1300" b="1" dirty="0">
+              <a:rPr lang="en-US" sz="1220" b="1" dirty="0">
                 <a:solidFill>
                   <a:srgbClr val="0068B7"/>
                 </a:solidFill>
@@ -6772,7 +6774,7 @@
               </a:rPr>
               <a:t>Next action</a:t>
             </a:r>
-            <a:endParaRPr lang="en-US" sz="1300" dirty="0"/>
+            <a:endParaRPr lang="en-US" sz="1220" dirty="0"/>
           </a:p>
         </p:txBody>
       </p:sp>
@@ -6784,8 +6786,8 @@
         </p:nvSpPr>
         <p:spPr>
           <a:xfrm>
-            <a:off x="7799832" y="4659782"/>
-            <a:ext cx="3145536" cy="899770"/>
+            <a:off x="7708392" y="4828032"/>
+            <a:ext cx="3282696" cy="749808"/>
           </a:xfrm>
           <a:prstGeom prst="rect">
             <a:avLst/>
@@ -6803,7 +6805,7 @@
               <a:buNone/>
             </a:pPr>
             <a:r>
-              <a:rPr lang="en-US" sz="1320" dirty="0">
+              <a:rPr lang="en-US" sz="1220" dirty="0">
                 <a:solidFill>
                   <a:srgbClr val="17364A"/>
                 </a:solidFill>
@@ -6811,9 +6813,9 @@
                 <a:ea typeface="Aptos" pitchFamily="34" charset="-122"/>
                 <a:cs typeface="Aptos" pitchFamily="34" charset="-120"/>
               </a:rPr>
-              <a:t>Use the concept to clarify workflow changes, dependencies, staffing, procurement requirements, training needs, and implementation checkpoints.</a:t>
-            </a:r>
-            <a:endParaRPr lang="en-US" sz="1320" dirty="0"/>
+              <a:t>Use the concept to clarify workflow changes, dependencies, staffing, procurement.</a:t>
+            </a:r>
+            <a:endParaRPr lang="en-US" sz="1220" dirty="0"/>
           </a:p>
         </p:txBody>
       </p:sp>
@@ -7104,8 +7106,8 @@
         </p:nvSpPr>
         <p:spPr>
           <a:xfrm>
-            <a:off x="868680" y="1508760"/>
-            <a:ext cx="6309360" cy="4160520"/>
+            <a:off x="822960" y="1463040"/>
+            <a:ext cx="6565392" cy="4343400"/>
           </a:xfrm>
           <a:prstGeom prst="rect">
             <a:avLst/>
@@ -7123,7 +7125,7 @@
               <a:buNone/>
             </a:pPr>
             <a:r>
-              <a:rPr lang="en-US" sz="2100" dirty="0">
+              <a:rPr lang="en-US" sz="1920" dirty="0">
                 <a:solidFill>
                   <a:srgbClr val="003A63"/>
                 </a:solidFill>
@@ -7133,14 +7135,14 @@
               </a:rPr>
               <a:t>• What goal would the agent pursue, and how narrowly can it be defined?</a:t>
             </a:r>
-            <a:endParaRPr lang="en-US" sz="2100" dirty="0"/>
-          </a:p>
-          <a:p>
-            <a:pPr indent="0" marL="0">
-              <a:buNone/>
-            </a:pPr>
-            <a:r>
-              <a:rPr lang="en-US" sz="2100" dirty="0">
+            <a:endParaRPr lang="en-US" sz="1920" dirty="0"/>
+          </a:p>
+          <a:p>
+            <a:pPr indent="0" marL="0">
+              <a:buNone/>
+            </a:pPr>
+            <a:r>
+              <a:rPr lang="en-US" sz="1920" dirty="0">
                 <a:solidFill>
                   <a:srgbClr val="003A63"/>
                 </a:solidFill>
@@ -7150,14 +7152,14 @@
               </a:rPr>
               <a:t>• Which tools or systems would the agent access?</a:t>
             </a:r>
-            <a:endParaRPr lang="en-US" sz="2100" dirty="0"/>
-          </a:p>
-          <a:p>
-            <a:pPr indent="0" marL="0">
-              <a:buNone/>
-            </a:pPr>
-            <a:r>
-              <a:rPr lang="en-US" sz="2100" dirty="0">
+            <a:endParaRPr lang="en-US" sz="1920" dirty="0"/>
+          </a:p>
+          <a:p>
+            <a:pPr indent="0" marL="0">
+              <a:buNone/>
+            </a:pPr>
+            <a:r>
+              <a:rPr lang="en-US" sz="1920" dirty="0">
                 <a:solidFill>
                   <a:srgbClr val="003A63"/>
                 </a:solidFill>
@@ -7167,7 +7169,7 @@
               </a:rPr>
               <a:t>• Which actions are allowed, prohibited, or require human approval?</a:t>
             </a:r>
-            <a:endParaRPr lang="en-US" sz="2100" dirty="0"/>
+            <a:endParaRPr lang="en-US" sz="1920" dirty="0"/>
           </a:p>
         </p:txBody>
       </p:sp>
@@ -7179,12 +7181,12 @@
         </p:nvSpPr>
         <p:spPr>
           <a:xfrm>
-            <a:off x="7635240" y="1325880"/>
-            <a:ext cx="3474720" cy="1207008"/>
+            <a:off x="7543800" y="1325880"/>
+            <a:ext cx="3611880" cy="1261872"/>
           </a:xfrm>
           <a:prstGeom prst="roundRect">
             <a:avLst>
-              <a:gd name="adj" fmla="val 9091"/>
+              <a:gd name="adj" fmla="val 8696"/>
             </a:avLst>
           </a:prstGeom>
           <a:solidFill>
@@ -7206,8 +7208,8 @@
         </p:nvSpPr>
         <p:spPr>
           <a:xfrm>
-            <a:off x="7799832" y="1472184"/>
-            <a:ext cx="3145536" cy="256032"/>
+            <a:off x="7708392" y="1453896"/>
+            <a:ext cx="3282696" cy="228600"/>
           </a:xfrm>
           <a:prstGeom prst="rect">
             <a:avLst/>
@@ -7223,7 +7225,7 @@
               <a:buNone/>
             </a:pPr>
             <a:r>
-              <a:rPr lang="en-US" sz="1300" b="1" dirty="0">
+              <a:rPr lang="en-US" sz="1220" b="1" dirty="0">
                 <a:solidFill>
                   <a:srgbClr val="0068B7"/>
                 </a:solidFill>
@@ -7233,7 +7235,7 @@
               </a:rPr>
               <a:t>Implementation cue</a:t>
             </a:r>
-            <a:endParaRPr lang="en-US" sz="1300" dirty="0"/>
+            <a:endParaRPr lang="en-US" sz="1220" dirty="0"/>
           </a:p>
         </p:txBody>
       </p:sp>
@@ -7245,8 +7247,8 @@
         </p:nvSpPr>
         <p:spPr>
           <a:xfrm>
-            <a:off x="7799832" y="1801368"/>
-            <a:ext cx="3145536" cy="640080"/>
+            <a:off x="7708392" y="1764792"/>
+            <a:ext cx="3282696" cy="749808"/>
           </a:xfrm>
           <a:prstGeom prst="rect">
             <a:avLst/>
@@ -7264,7 +7266,7 @@
               <a:buNone/>
             </a:pPr>
             <a:r>
-              <a:rPr lang="en-US" sz="1320" dirty="0">
+              <a:rPr lang="en-US" sz="1220" dirty="0">
                 <a:solidFill>
                   <a:srgbClr val="17364A"/>
                 </a:solidFill>
@@ -7274,7 +7276,7 @@
               </a:rPr>
               <a:t>What goal would the agent pursue, and how narrowly can it be defined?</a:t>
             </a:r>
-            <a:endParaRPr lang="en-US" sz="1320" dirty="0"/>
+            <a:endParaRPr lang="en-US" sz="1220" dirty="0"/>
           </a:p>
         </p:txBody>
       </p:sp>
@@ -7286,12 +7288,12 @@
         </p:nvSpPr>
         <p:spPr>
           <a:xfrm>
-            <a:off x="7635240" y="2670048"/>
-            <a:ext cx="3474720" cy="1377086"/>
+            <a:off x="7543800" y="2724912"/>
+            <a:ext cx="3611880" cy="1527048"/>
           </a:xfrm>
           <a:prstGeom prst="roundRect">
             <a:avLst>
-              <a:gd name="adj" fmla="val 7968"/>
+              <a:gd name="adj" fmla="val 7186"/>
             </a:avLst>
           </a:prstGeom>
           <a:solidFill>
@@ -7313,8 +7315,8 @@
         </p:nvSpPr>
         <p:spPr>
           <a:xfrm>
-            <a:off x="7799832" y="2816352"/>
-            <a:ext cx="3145536" cy="256032"/>
+            <a:off x="7708392" y="2852928"/>
+            <a:ext cx="3282696" cy="228600"/>
           </a:xfrm>
           <a:prstGeom prst="rect">
             <a:avLst/>
@@ -7330,7 +7332,7 @@
               <a:buNone/>
             </a:pPr>
             <a:r>
-              <a:rPr lang="en-US" sz="1300" b="1" dirty="0">
+              <a:rPr lang="en-US" sz="1220" b="1" dirty="0">
                 <a:solidFill>
                   <a:srgbClr val="0068B7"/>
                 </a:solidFill>
@@ -7340,7 +7342,7 @@
               </a:rPr>
               <a:t>Concept checkpoints</a:t>
             </a:r>
-            <a:endParaRPr lang="en-US" sz="1300" dirty="0"/>
+            <a:endParaRPr lang="en-US" sz="1220" dirty="0"/>
           </a:p>
         </p:txBody>
       </p:sp>
@@ -7352,8 +7354,8 @@
         </p:nvSpPr>
         <p:spPr>
           <a:xfrm>
-            <a:off x="7818120" y="3182112"/>
-            <a:ext cx="3090672" cy="718718"/>
+            <a:off x="7726680" y="3182112"/>
+            <a:ext cx="3227832" cy="960120"/>
           </a:xfrm>
           <a:prstGeom prst="rect">
             <a:avLst/>
@@ -7371,7 +7373,7 @@
               <a:buNone/>
             </a:pPr>
             <a:r>
-              <a:rPr lang="en-US" sz="1220" dirty="0">
+              <a:rPr lang="en-US" sz="1140" dirty="0">
                 <a:solidFill>
                   <a:srgbClr val="17364A"/>
                 </a:solidFill>
@@ -7379,16 +7381,16 @@
                 <a:ea typeface="Aptos" pitchFamily="34" charset="-122"/>
                 <a:cs typeface="Aptos" pitchFamily="34" charset="-120"/>
               </a:rPr>
-              <a:t>What goal would the agent pursue, and how narrowly can it be.</a:t>
-            </a:r>
-            <a:endParaRPr lang="en-US" sz="1220" dirty="0"/>
-          </a:p>
-          <a:p>
-            <a:pPr indent="0" marL="0">
-              <a:buNone/>
-            </a:pPr>
-            <a:r>
-              <a:rPr lang="en-US" sz="1220" dirty="0">
+              <a:t>What goal would the agent pursue, and how narrowly.</a:t>
+            </a:r>
+            <a:endParaRPr lang="en-US" sz="1140" dirty="0"/>
+          </a:p>
+          <a:p>
+            <a:pPr indent="0" marL="0">
+              <a:buNone/>
+            </a:pPr>
+            <a:r>
+              <a:rPr lang="en-US" sz="1140" dirty="0">
                 <a:solidFill>
                   <a:srgbClr val="17364A"/>
                 </a:solidFill>
@@ -7398,14 +7400,14 @@
               </a:rPr>
               <a:t>Which tools or systems would the agent access?</a:t>
             </a:r>
-            <a:endParaRPr lang="en-US" sz="1220" dirty="0"/>
-          </a:p>
-          <a:p>
-            <a:pPr indent="0" marL="0">
-              <a:buNone/>
-            </a:pPr>
-            <a:r>
-              <a:rPr lang="en-US" sz="1220" dirty="0">
+            <a:endParaRPr lang="en-US" sz="1140" dirty="0"/>
+          </a:p>
+          <a:p>
+            <a:pPr indent="0" marL="0">
+              <a:buNone/>
+            </a:pPr>
+            <a:r>
+              <a:rPr lang="en-US" sz="1140" dirty="0">
                 <a:solidFill>
                   <a:srgbClr val="17364A"/>
                 </a:solidFill>
@@ -7413,9 +7415,9 @@
                 <a:ea typeface="Aptos" pitchFamily="34" charset="-122"/>
                 <a:cs typeface="Aptos" pitchFamily="34" charset="-120"/>
               </a:rPr>
-              <a:t>Which actions are allowed, prohibited, or require human approval?</a:t>
-            </a:r>
-            <a:endParaRPr lang="en-US" sz="1220" dirty="0"/>
+              <a:t>Which actions are allowed, prohibited, or require.</a:t>
+            </a:r>
+            <a:endParaRPr lang="en-US" sz="1140" dirty="0"/>
           </a:p>
         </p:txBody>
       </p:sp>
@@ -7427,12 +7429,12 @@
         </p:nvSpPr>
         <p:spPr>
           <a:xfrm>
-            <a:off x="7635240" y="4184294"/>
-            <a:ext cx="3474720" cy="1466698"/>
+            <a:off x="7543800" y="4389120"/>
+            <a:ext cx="3611880" cy="1261872"/>
           </a:xfrm>
           <a:prstGeom prst="roundRect">
             <a:avLst>
-              <a:gd name="adj" fmla="val 7481"/>
+              <a:gd name="adj" fmla="val 8696"/>
             </a:avLst>
           </a:prstGeom>
           <a:solidFill>
@@ -7454,8 +7456,8 @@
         </p:nvSpPr>
         <p:spPr>
           <a:xfrm>
-            <a:off x="7799832" y="4330598"/>
-            <a:ext cx="3145536" cy="256032"/>
+            <a:off x="7708392" y="4517136"/>
+            <a:ext cx="3282696" cy="228600"/>
           </a:xfrm>
           <a:prstGeom prst="rect">
             <a:avLst/>
@@ -7471,7 +7473,7 @@
               <a:buNone/>
             </a:pPr>
             <a:r>
-              <a:rPr lang="en-US" sz="1300" b="1" dirty="0">
+              <a:rPr lang="en-US" sz="1220" b="1" dirty="0">
                 <a:solidFill>
                   <a:srgbClr val="0068B7"/>
                 </a:solidFill>
@@ -7481,7 +7483,7 @@
               </a:rPr>
               <a:t>Next action</a:t>
             </a:r>
-            <a:endParaRPr lang="en-US" sz="1300" dirty="0"/>
+            <a:endParaRPr lang="en-US" sz="1220" dirty="0"/>
           </a:p>
         </p:txBody>
       </p:sp>
@@ -7493,8 +7495,8 @@
         </p:nvSpPr>
         <p:spPr>
           <a:xfrm>
-            <a:off x="7799832" y="4659782"/>
-            <a:ext cx="3145536" cy="899770"/>
+            <a:off x="7708392" y="4828032"/>
+            <a:ext cx="3282696" cy="749808"/>
           </a:xfrm>
           <a:prstGeom prst="rect">
             <a:avLst/>
@@ -7512,7 +7514,7 @@
               <a:buNone/>
             </a:pPr>
             <a:r>
-              <a:rPr lang="en-US" sz="1320" dirty="0">
+              <a:rPr lang="en-US" sz="1220" dirty="0">
                 <a:solidFill>
                   <a:srgbClr val="17364A"/>
                 </a:solidFill>
@@ -7520,9 +7522,9 @@
                 <a:ea typeface="Aptos" pitchFamily="34" charset="-122"/>
                 <a:cs typeface="Aptos" pitchFamily="34" charset="-120"/>
               </a:rPr>
-              <a:t>Use the concept to clarify workflow changes, dependencies, staffing, procurement requirements, training needs, and implementation checkpoints.</a:t>
-            </a:r>
-            <a:endParaRPr lang="en-US" sz="1320" dirty="0"/>
+              <a:t>Use the concept to clarify workflow changes, dependencies, staffing, procurement.</a:t>
+            </a:r>
+            <a:endParaRPr lang="en-US" sz="1220" dirty="0"/>
           </a:p>
         </p:txBody>
       </p:sp>
@@ -7813,8 +7815,8 @@
         </p:nvSpPr>
         <p:spPr>
           <a:xfrm>
-            <a:off x="868680" y="1508760"/>
-            <a:ext cx="6309360" cy="4160520"/>
+            <a:off x="822960" y="1463040"/>
+            <a:ext cx="6565392" cy="4343400"/>
           </a:xfrm>
           <a:prstGeom prst="rect">
             <a:avLst/>
@@ -7832,7 +7834,7 @@
               <a:buNone/>
             </a:pPr>
             <a:r>
-              <a:rPr lang="en-US" sz="2100" dirty="0">
+              <a:rPr lang="en-US" sz="1920" dirty="0">
                 <a:solidFill>
                   <a:srgbClr val="003A63"/>
                 </a:solidFill>
@@ -7842,14 +7844,14 @@
               </a:rPr>
               <a:t>• What logs are needed to reconstruct agent behavior?</a:t>
             </a:r>
-            <a:endParaRPr lang="en-US" sz="2100" dirty="0"/>
-          </a:p>
-          <a:p>
-            <a:pPr indent="0" marL="0">
-              <a:buNone/>
-            </a:pPr>
-            <a:r>
-              <a:rPr lang="en-US" sz="2100" dirty="0">
+            <a:endParaRPr lang="en-US" sz="1920" dirty="0"/>
+          </a:p>
+          <a:p>
+            <a:pPr indent="0" marL="0">
+              <a:buNone/>
+            </a:pPr>
+            <a:r>
+              <a:rPr lang="en-US" sz="1920" dirty="0">
                 <a:solidFill>
                   <a:srgbClr val="003A63"/>
                 </a:solidFill>
@@ -7859,7 +7861,7 @@
               </a:rPr>
               <a:t>• What rollback or correction process is needed if the agent makes an error?</a:t>
             </a:r>
-            <a:endParaRPr lang="en-US" sz="2100" dirty="0"/>
+            <a:endParaRPr lang="en-US" sz="1920" dirty="0"/>
           </a:p>
         </p:txBody>
       </p:sp>
@@ -7871,12 +7873,12 @@
         </p:nvSpPr>
         <p:spPr>
           <a:xfrm>
-            <a:off x="7635240" y="1325880"/>
-            <a:ext cx="3474720" cy="1207008"/>
+            <a:off x="7543800" y="1325880"/>
+            <a:ext cx="3611880" cy="1261872"/>
           </a:xfrm>
           <a:prstGeom prst="roundRect">
             <a:avLst>
-              <a:gd name="adj" fmla="val 9091"/>
+              <a:gd name="adj" fmla="val 8696"/>
             </a:avLst>
           </a:prstGeom>
           <a:solidFill>
@@ -7898,8 +7900,8 @@
         </p:nvSpPr>
         <p:spPr>
           <a:xfrm>
-            <a:off x="7799832" y="1472184"/>
-            <a:ext cx="3145536" cy="256032"/>
+            <a:off x="7708392" y="1453896"/>
+            <a:ext cx="3282696" cy="228600"/>
           </a:xfrm>
           <a:prstGeom prst="rect">
             <a:avLst/>
@@ -7915,7 +7917,7 @@
               <a:buNone/>
             </a:pPr>
             <a:r>
-              <a:rPr lang="en-US" sz="1300" b="1" dirty="0">
+              <a:rPr lang="en-US" sz="1220" b="1" dirty="0">
                 <a:solidFill>
                   <a:srgbClr val="0068B7"/>
                 </a:solidFill>
@@ -7925,7 +7927,7 @@
               </a:rPr>
               <a:t>Implementation cue</a:t>
             </a:r>
-            <a:endParaRPr lang="en-US" sz="1300" dirty="0"/>
+            <a:endParaRPr lang="en-US" sz="1220" dirty="0"/>
           </a:p>
         </p:txBody>
       </p:sp>
@@ -7937,8 +7939,8 @@
         </p:nvSpPr>
         <p:spPr>
           <a:xfrm>
-            <a:off x="7799832" y="1801368"/>
-            <a:ext cx="3145536" cy="640080"/>
+            <a:off x="7708392" y="1764792"/>
+            <a:ext cx="3282696" cy="749808"/>
           </a:xfrm>
           <a:prstGeom prst="rect">
             <a:avLst/>
@@ -7956,7 +7958,7 @@
               <a:buNone/>
             </a:pPr>
             <a:r>
-              <a:rPr lang="en-US" sz="1320" dirty="0">
+              <a:rPr lang="en-US" sz="1220" dirty="0">
                 <a:solidFill>
                   <a:srgbClr val="17364A"/>
                 </a:solidFill>
@@ -7966,7 +7968,7 @@
               </a:rPr>
               <a:t>What logs are needed to reconstruct agent behavior?</a:t>
             </a:r>
-            <a:endParaRPr lang="en-US" sz="1320" dirty="0"/>
+            <a:endParaRPr lang="en-US" sz="1220" dirty="0"/>
           </a:p>
         </p:txBody>
       </p:sp>
@@ -7978,12 +7980,12 @@
         </p:nvSpPr>
         <p:spPr>
           <a:xfrm>
-            <a:off x="7635240" y="2670048"/>
-            <a:ext cx="3474720" cy="1377086"/>
+            <a:off x="7543800" y="2724912"/>
+            <a:ext cx="3611880" cy="1527048"/>
           </a:xfrm>
           <a:prstGeom prst="roundRect">
             <a:avLst>
-              <a:gd name="adj" fmla="val 7968"/>
+              <a:gd name="adj" fmla="val 7186"/>
             </a:avLst>
           </a:prstGeom>
           <a:solidFill>
@@ -8005,8 +8007,8 @@
         </p:nvSpPr>
         <p:spPr>
           <a:xfrm>
-            <a:off x="7799832" y="2816352"/>
-            <a:ext cx="3145536" cy="256032"/>
+            <a:off x="7708392" y="2852928"/>
+            <a:ext cx="3282696" cy="228600"/>
           </a:xfrm>
           <a:prstGeom prst="rect">
             <a:avLst/>
@@ -8022,7 +8024,7 @@
               <a:buNone/>
             </a:pPr>
             <a:r>
-              <a:rPr lang="en-US" sz="1300" b="1" dirty="0">
+              <a:rPr lang="en-US" sz="1220" b="1" dirty="0">
                 <a:solidFill>
                   <a:srgbClr val="0068B7"/>
                 </a:solidFill>
@@ -8032,7 +8034,7 @@
               </a:rPr>
               <a:t>Concept checkpoints</a:t>
             </a:r>
-            <a:endParaRPr lang="en-US" sz="1300" dirty="0"/>
+            <a:endParaRPr lang="en-US" sz="1220" dirty="0"/>
           </a:p>
         </p:txBody>
       </p:sp>
@@ -8044,8 +8046,8 @@
         </p:nvSpPr>
         <p:spPr>
           <a:xfrm>
-            <a:off x="7818120" y="3182112"/>
-            <a:ext cx="3090672" cy="718718"/>
+            <a:off x="7726680" y="3182112"/>
+            <a:ext cx="3227832" cy="960120"/>
           </a:xfrm>
           <a:prstGeom prst="rect">
             <a:avLst/>
@@ -8063,7 +8065,7 @@
               <a:buNone/>
             </a:pPr>
             <a:r>
-              <a:rPr lang="en-US" sz="1220" dirty="0">
+              <a:rPr lang="en-US" sz="1140" dirty="0">
                 <a:solidFill>
                   <a:srgbClr val="17364A"/>
                 </a:solidFill>
@@ -8073,14 +8075,14 @@
               </a:rPr>
               <a:t>What logs are needed to reconstruct agent behavior?</a:t>
             </a:r>
-            <a:endParaRPr lang="en-US" sz="1220" dirty="0"/>
-          </a:p>
-          <a:p>
-            <a:pPr indent="0" marL="0">
-              <a:buNone/>
-            </a:pPr>
-            <a:r>
-              <a:rPr lang="en-US" sz="1220" dirty="0">
+            <a:endParaRPr lang="en-US" sz="1140" dirty="0"/>
+          </a:p>
+          <a:p>
+            <a:pPr indent="0" marL="0">
+              <a:buNone/>
+            </a:pPr>
+            <a:r>
+              <a:rPr lang="en-US" sz="1140" dirty="0">
                 <a:solidFill>
                   <a:srgbClr val="17364A"/>
                 </a:solidFill>
@@ -8088,9 +8090,9 @@
                 <a:ea typeface="Aptos" pitchFamily="34" charset="-122"/>
                 <a:cs typeface="Aptos" pitchFamily="34" charset="-120"/>
               </a:rPr>
-              <a:t>What rollback or correction process is needed if the agent makes.</a:t>
-            </a:r>
-            <a:endParaRPr lang="en-US" sz="1220" dirty="0"/>
+              <a:t>What rollback or correction process is needed if.</a:t>
+            </a:r>
+            <a:endParaRPr lang="en-US" sz="1140" dirty="0"/>
           </a:p>
         </p:txBody>
       </p:sp>
@@ -8102,12 +8104,12 @@
         </p:nvSpPr>
         <p:spPr>
           <a:xfrm>
-            <a:off x="7635240" y="4184294"/>
-            <a:ext cx="3474720" cy="1466698"/>
+            <a:off x="7543800" y="4389120"/>
+            <a:ext cx="3611880" cy="1261872"/>
           </a:xfrm>
           <a:prstGeom prst="roundRect">
             <a:avLst>
-              <a:gd name="adj" fmla="val 7481"/>
+              <a:gd name="adj" fmla="val 8696"/>
             </a:avLst>
           </a:prstGeom>
           <a:solidFill>
@@ -8129,8 +8131,8 @@
         </p:nvSpPr>
         <p:spPr>
           <a:xfrm>
-            <a:off x="7799832" y="4330598"/>
-            <a:ext cx="3145536" cy="256032"/>
+            <a:off x="7708392" y="4517136"/>
+            <a:ext cx="3282696" cy="228600"/>
           </a:xfrm>
           <a:prstGeom prst="rect">
             <a:avLst/>
@@ -8146,7 +8148,7 @@
               <a:buNone/>
             </a:pPr>
             <a:r>
-              <a:rPr lang="en-US" sz="1300" b="1" dirty="0">
+              <a:rPr lang="en-US" sz="1220" b="1" dirty="0">
                 <a:solidFill>
                   <a:srgbClr val="0068B7"/>
                 </a:solidFill>
@@ -8156,7 +8158,7 @@
               </a:rPr>
               <a:t>Next action</a:t>
             </a:r>
-            <a:endParaRPr lang="en-US" sz="1300" dirty="0"/>
+            <a:endParaRPr lang="en-US" sz="1220" dirty="0"/>
           </a:p>
         </p:txBody>
       </p:sp>
@@ -8168,8 +8170,8 @@
         </p:nvSpPr>
         <p:spPr>
           <a:xfrm>
-            <a:off x="7799832" y="4659782"/>
-            <a:ext cx="3145536" cy="899770"/>
+            <a:off x="7708392" y="4828032"/>
+            <a:ext cx="3282696" cy="749808"/>
           </a:xfrm>
           <a:prstGeom prst="rect">
             <a:avLst/>
@@ -8187,7 +8189,7 @@
               <a:buNone/>
             </a:pPr>
             <a:r>
-              <a:rPr lang="en-US" sz="1320" dirty="0">
+              <a:rPr lang="en-US" sz="1220" dirty="0">
                 <a:solidFill>
                   <a:srgbClr val="17364A"/>
                 </a:solidFill>
@@ -8195,9 +8197,9 @@
                 <a:ea typeface="Aptos" pitchFamily="34" charset="-122"/>
                 <a:cs typeface="Aptos" pitchFamily="34" charset="-120"/>
               </a:rPr>
-              <a:t>Use the concept to clarify workflow changes, dependencies, staffing, procurement requirements, training needs, and implementation checkpoints.</a:t>
-            </a:r>
-            <a:endParaRPr lang="en-US" sz="1320" dirty="0"/>
+              <a:t>Use the concept to clarify workflow changes, dependencies, staffing, procurement.</a:t>
+            </a:r>
+            <a:endParaRPr lang="en-US" sz="1220" dirty="0"/>
           </a:p>
         </p:txBody>
       </p:sp>
@@ -8488,8 +8490,8 @@
         </p:nvSpPr>
         <p:spPr>
           <a:xfrm>
-            <a:off x="868680" y="1508760"/>
-            <a:ext cx="6309360" cy="4160520"/>
+            <a:off x="822960" y="1463040"/>
+            <a:ext cx="6565392" cy="4343400"/>
           </a:xfrm>
           <a:prstGeom prst="rect">
             <a:avLst/>
@@ -8507,7 +8509,7 @@
               <a:buNone/>
             </a:pPr>
             <a:r>
-              <a:rPr lang="en-US" sz="2100" dirty="0">
+              <a:rPr lang="en-US" sz="1920" dirty="0">
                 <a:solidFill>
                   <a:srgbClr val="003A63"/>
                 </a:solidFill>
@@ -8517,14 +8519,14 @@
               </a:rPr>
               <a:t>• Create an agentic workflow control plan.</a:t>
             </a:r>
-            <a:endParaRPr lang="en-US" sz="2100" dirty="0"/>
-          </a:p>
-          <a:p>
-            <a:pPr indent="0" marL="0">
-              <a:buNone/>
-            </a:pPr>
-            <a:r>
-              <a:rPr lang="en-US" sz="2100" dirty="0">
+            <a:endParaRPr lang="en-US" sz="1920" dirty="0"/>
+          </a:p>
+          <a:p>
+            <a:pPr indent="0" marL="0">
+              <a:buNone/>
+            </a:pPr>
+            <a:r>
+              <a:rPr lang="en-US" sz="1920" dirty="0">
                 <a:solidFill>
                   <a:srgbClr val="003A63"/>
                 </a:solidFill>
@@ -8532,16 +8534,16 @@
                 <a:ea typeface="Aptos" pitchFamily="34" charset="-122"/>
                 <a:cs typeface="Aptos" pitchFamily="34" charset="-120"/>
               </a:rPr>
-              <a:t>• Include the goal, trigger, data sources, tools, allowed actions, prohibited actions, approval.</a:t>
-            </a:r>
-            <a:endParaRPr lang="en-US" sz="2100" dirty="0"/>
-          </a:p>
-          <a:p>
-            <a:pPr indent="0" marL="0">
-              <a:buNone/>
-            </a:pPr>
-            <a:r>
-              <a:rPr lang="en-US" sz="2100" dirty="0">
+              <a:t>• Include the goal, trigger, data sources, tools, allowed actions, prohibited.</a:t>
+            </a:r>
+            <a:endParaRPr lang="en-US" sz="1920" dirty="0"/>
+          </a:p>
+          <a:p>
+            <a:pPr indent="0" marL="0">
+              <a:buNone/>
+            </a:pPr>
+            <a:r>
+              <a:rPr lang="en-US" sz="1920" dirty="0">
                 <a:solidFill>
                   <a:srgbClr val="003A63"/>
                 </a:solidFill>
@@ -8549,9 +8551,9 @@
                 <a:ea typeface="Aptos" pitchFamily="34" charset="-122"/>
                 <a:cs typeface="Aptos" pitchFamily="34" charset="-120"/>
               </a:rPr>
-              <a:t>• The plan should identify at least one low-risk pilot boundary and one condition that would.</a:t>
-            </a:r>
-            <a:endParaRPr lang="en-US" sz="2100" dirty="0"/>
+              <a:t>• The plan should identify at least one low-risk pilot boundary and one.</a:t>
+            </a:r>
+            <a:endParaRPr lang="en-US" sz="1920" dirty="0"/>
           </a:p>
         </p:txBody>
       </p:sp>
@@ -8563,12 +8565,12 @@
         </p:nvSpPr>
         <p:spPr>
           <a:xfrm>
-            <a:off x="7635240" y="1325880"/>
-            <a:ext cx="3474720" cy="1207008"/>
+            <a:off x="7543800" y="1325880"/>
+            <a:ext cx="3611880" cy="1261872"/>
           </a:xfrm>
           <a:prstGeom prst="roundRect">
             <a:avLst>
-              <a:gd name="adj" fmla="val 9091"/>
+              <a:gd name="adj" fmla="val 8696"/>
             </a:avLst>
           </a:prstGeom>
           <a:solidFill>
@@ -8590,8 +8592,8 @@
         </p:nvSpPr>
         <p:spPr>
           <a:xfrm>
-            <a:off x="7799832" y="1472184"/>
-            <a:ext cx="3145536" cy="256032"/>
+            <a:off x="7708392" y="1453896"/>
+            <a:ext cx="3282696" cy="228600"/>
           </a:xfrm>
           <a:prstGeom prst="rect">
             <a:avLst/>
@@ -8607,7 +8609,7 @@
               <a:buNone/>
             </a:pPr>
             <a:r>
-              <a:rPr lang="en-US" sz="1300" b="1" dirty="0">
+              <a:rPr lang="en-US" sz="1220" b="1" dirty="0">
                 <a:solidFill>
                   <a:srgbClr val="0068B7"/>
                 </a:solidFill>
@@ -8617,7 +8619,7 @@
               </a:rPr>
               <a:t>Implementation cue</a:t>
             </a:r>
-            <a:endParaRPr lang="en-US" sz="1300" dirty="0"/>
+            <a:endParaRPr lang="en-US" sz="1220" dirty="0"/>
           </a:p>
         </p:txBody>
       </p:sp>
@@ -8629,8 +8631,8 @@
         </p:nvSpPr>
         <p:spPr>
           <a:xfrm>
-            <a:off x="7799832" y="1801368"/>
-            <a:ext cx="3145536" cy="640080"/>
+            <a:off x="7708392" y="1764792"/>
+            <a:ext cx="3282696" cy="749808"/>
           </a:xfrm>
           <a:prstGeom prst="rect">
             <a:avLst/>
@@ -8648,7 +8650,7 @@
               <a:buNone/>
             </a:pPr>
             <a:r>
-              <a:rPr lang="en-US" sz="1320" dirty="0">
+              <a:rPr lang="en-US" sz="1220" dirty="0">
                 <a:solidFill>
                   <a:srgbClr val="17364A"/>
                 </a:solidFill>
@@ -8658,7 +8660,7 @@
               </a:rPr>
               <a:t>Create an agentic workflow control plan.</a:t>
             </a:r>
-            <a:endParaRPr lang="en-US" sz="1320" dirty="0"/>
+            <a:endParaRPr lang="en-US" sz="1220" dirty="0"/>
           </a:p>
         </p:txBody>
       </p:sp>
@@ -8670,12 +8672,12 @@
         </p:nvSpPr>
         <p:spPr>
           <a:xfrm>
-            <a:off x="7635240" y="2670048"/>
-            <a:ext cx="3474720" cy="1377086"/>
+            <a:off x="7543800" y="2724912"/>
+            <a:ext cx="3611880" cy="1527048"/>
           </a:xfrm>
           <a:prstGeom prst="roundRect">
             <a:avLst>
-              <a:gd name="adj" fmla="val 7968"/>
+              <a:gd name="adj" fmla="val 7186"/>
             </a:avLst>
           </a:prstGeom>
           <a:solidFill>
@@ -8697,8 +8699,8 @@
         </p:nvSpPr>
         <p:spPr>
           <a:xfrm>
-            <a:off x="7799832" y="2816352"/>
-            <a:ext cx="3145536" cy="256032"/>
+            <a:off x="7708392" y="2852928"/>
+            <a:ext cx="3282696" cy="228600"/>
           </a:xfrm>
           <a:prstGeom prst="rect">
             <a:avLst/>
@@ -8714,7 +8716,7 @@
               <a:buNone/>
             </a:pPr>
             <a:r>
-              <a:rPr lang="en-US" sz="1300" b="1" dirty="0">
+              <a:rPr lang="en-US" sz="1220" b="1" dirty="0">
                 <a:solidFill>
                   <a:srgbClr val="0068B7"/>
                 </a:solidFill>
@@ -8724,7 +8726,7 @@
               </a:rPr>
               <a:t>Concept checkpoints</a:t>
             </a:r>
-            <a:endParaRPr lang="en-US" sz="1300" dirty="0"/>
+            <a:endParaRPr lang="en-US" sz="1220" dirty="0"/>
           </a:p>
         </p:txBody>
       </p:sp>
@@ -8736,8 +8738,8 @@
         </p:nvSpPr>
         <p:spPr>
           <a:xfrm>
-            <a:off x="7818120" y="3182112"/>
-            <a:ext cx="3090672" cy="718718"/>
+            <a:off x="7726680" y="3182112"/>
+            <a:ext cx="3227832" cy="960120"/>
           </a:xfrm>
           <a:prstGeom prst="rect">
             <a:avLst/>
@@ -8755,7 +8757,7 @@
               <a:buNone/>
             </a:pPr>
             <a:r>
-              <a:rPr lang="en-US" sz="1220" dirty="0">
+              <a:rPr lang="en-US" sz="1140" dirty="0">
                 <a:solidFill>
                   <a:srgbClr val="17364A"/>
                 </a:solidFill>
@@ -8763,16 +8765,16 @@
                 <a:ea typeface="Aptos" pitchFamily="34" charset="-122"/>
                 <a:cs typeface="Aptos" pitchFamily="34" charset="-120"/>
               </a:rPr>
-              <a:t>Include the goal, trigger, data sources, tools, allowed actions,.</a:t>
-            </a:r>
-            <a:endParaRPr lang="en-US" sz="1220" dirty="0"/>
-          </a:p>
-          <a:p>
-            <a:pPr indent="0" marL="0">
-              <a:buNone/>
-            </a:pPr>
-            <a:r>
-              <a:rPr lang="en-US" sz="1220" dirty="0">
+              <a:t>Include the goal, trigger, data sources, tools,.</a:t>
+            </a:r>
+            <a:endParaRPr lang="en-US" sz="1140" dirty="0"/>
+          </a:p>
+          <a:p>
+            <a:pPr indent="0" marL="0">
+              <a:buNone/>
+            </a:pPr>
+            <a:r>
+              <a:rPr lang="en-US" sz="1140" dirty="0">
                 <a:solidFill>
                   <a:srgbClr val="17364A"/>
                 </a:solidFill>
@@ -8780,9 +8782,9 @@
                 <a:ea typeface="Aptos" pitchFamily="34" charset="-122"/>
                 <a:cs typeface="Aptos" pitchFamily="34" charset="-120"/>
               </a:rPr>
-              <a:t>The plan should identify at least one low-risk pilot boundary and.</a:t>
-            </a:r>
-            <a:endParaRPr lang="en-US" sz="1220" dirty="0"/>
+              <a:t>The plan should identify at least one low-risk.</a:t>
+            </a:r>
+            <a:endParaRPr lang="en-US" sz="1140" dirty="0"/>
           </a:p>
         </p:txBody>
       </p:sp>
@@ -8794,12 +8796,12 @@
         </p:nvSpPr>
         <p:spPr>
           <a:xfrm>
-            <a:off x="7635240" y="4184294"/>
-            <a:ext cx="3474720" cy="1466698"/>
+            <a:off x="7543800" y="4389120"/>
+            <a:ext cx="3611880" cy="1261872"/>
           </a:xfrm>
           <a:prstGeom prst="roundRect">
             <a:avLst>
-              <a:gd name="adj" fmla="val 7481"/>
+              <a:gd name="adj" fmla="val 8696"/>
             </a:avLst>
           </a:prstGeom>
           <a:solidFill>
@@ -8821,8 +8823,8 @@
         </p:nvSpPr>
         <p:spPr>
           <a:xfrm>
-            <a:off x="7799832" y="4330598"/>
-            <a:ext cx="3145536" cy="256032"/>
+            <a:off x="7708392" y="4517136"/>
+            <a:ext cx="3282696" cy="228600"/>
           </a:xfrm>
           <a:prstGeom prst="rect">
             <a:avLst/>
@@ -8838,7 +8840,7 @@
               <a:buNone/>
             </a:pPr>
             <a:r>
-              <a:rPr lang="en-US" sz="1300" b="1" dirty="0">
+              <a:rPr lang="en-US" sz="1220" b="1" dirty="0">
                 <a:solidFill>
                   <a:srgbClr val="0068B7"/>
                 </a:solidFill>
@@ -8848,7 +8850,7 @@
               </a:rPr>
               <a:t>Next action</a:t>
             </a:r>
-            <a:endParaRPr lang="en-US" sz="1300" dirty="0"/>
+            <a:endParaRPr lang="en-US" sz="1220" dirty="0"/>
           </a:p>
         </p:txBody>
       </p:sp>
@@ -8860,8 +8862,8 @@
         </p:nvSpPr>
         <p:spPr>
           <a:xfrm>
-            <a:off x="7799832" y="4659782"/>
-            <a:ext cx="3145536" cy="899770"/>
+            <a:off x="7708392" y="4828032"/>
+            <a:ext cx="3282696" cy="749808"/>
           </a:xfrm>
           <a:prstGeom prst="rect">
             <a:avLst/>
@@ -8879,7 +8881,7 @@
               <a:buNone/>
             </a:pPr>
             <a:r>
-              <a:rPr lang="en-US" sz="1320" dirty="0">
+              <a:rPr lang="en-US" sz="1220" dirty="0">
                 <a:solidFill>
                   <a:srgbClr val="17364A"/>
                 </a:solidFill>
@@ -8887,9 +8889,9 @@
                 <a:ea typeface="Aptos" pitchFamily="34" charset="-122"/>
                 <a:cs typeface="Aptos" pitchFamily="34" charset="-120"/>
               </a:rPr>
-              <a:t>Use the assignment to test whether you can explain the concept, apply it to a realistic public health situation, and identify what would need review before the work moves forward.</a:t>
-            </a:r>
-            <a:endParaRPr lang="en-US" sz="1320" dirty="0"/>
+              <a:t>Use the assignment to test whether you can explain the concept, apply it to a.</a:t>
+            </a:r>
+            <a:endParaRPr lang="en-US" sz="1220" dirty="0"/>
           </a:p>
         </p:txBody>
       </p:sp>
@@ -9180,8 +9182,8 @@
         </p:nvSpPr>
         <p:spPr>
           <a:xfrm>
-            <a:off x="868680" y="1508760"/>
-            <a:ext cx="6309360" cy="4160520"/>
+            <a:off x="822960" y="1463040"/>
+            <a:ext cx="6565392" cy="4343400"/>
           </a:xfrm>
           <a:prstGeom prst="rect">
             <a:avLst/>
@@ -9199,7 +9201,7 @@
               <a:buNone/>
             </a:pPr>
             <a:r>
-              <a:rPr lang="en-US" sz="2100" dirty="0">
+              <a:rPr lang="en-US" sz="1920" dirty="0">
                 <a:solidFill>
                   <a:srgbClr val="003A63"/>
                 </a:solidFill>
@@ -9209,14 +9211,14 @@
               </a:rPr>
               <a:t>• Agentic workflow control plan</a:t>
             </a:r>
-            <a:endParaRPr lang="en-US" sz="2100" dirty="0"/>
-          </a:p>
-          <a:p>
-            <a:pPr indent="0" marL="0">
-              <a:buNone/>
-            </a:pPr>
-            <a:r>
-              <a:rPr lang="en-US" sz="2100" dirty="0">
+            <a:endParaRPr lang="en-US" sz="1920" dirty="0"/>
+          </a:p>
+          <a:p>
+            <a:pPr indent="0" marL="0">
+              <a:buNone/>
+            </a:pPr>
+            <a:r>
+              <a:rPr lang="en-US" sz="1920" dirty="0">
                 <a:solidFill>
                   <a:srgbClr val="003A63"/>
                 </a:solidFill>
@@ -9226,14 +9228,14 @@
               </a:rPr>
               <a:t>• Allowed/prohibited action list</a:t>
             </a:r>
-            <a:endParaRPr lang="en-US" sz="2100" dirty="0"/>
-          </a:p>
-          <a:p>
-            <a:pPr indent="0" marL="0">
-              <a:buNone/>
-            </a:pPr>
-            <a:r>
-              <a:rPr lang="en-US" sz="2100" dirty="0">
+            <a:endParaRPr lang="en-US" sz="1920" dirty="0"/>
+          </a:p>
+          <a:p>
+            <a:pPr indent="0" marL="0">
+              <a:buNone/>
+            </a:pPr>
+            <a:r>
+              <a:rPr lang="en-US" sz="1920" dirty="0">
                 <a:solidFill>
                   <a:srgbClr val="003A63"/>
                 </a:solidFill>
@@ -9243,7 +9245,7 @@
               </a:rPr>
               <a:t>• Human approval and escalation map</a:t>
             </a:r>
-            <a:endParaRPr lang="en-US" sz="2100" dirty="0"/>
+            <a:endParaRPr lang="en-US" sz="1920" dirty="0"/>
           </a:p>
         </p:txBody>
       </p:sp>
@@ -9255,12 +9257,12 @@
         </p:nvSpPr>
         <p:spPr>
           <a:xfrm>
-            <a:off x="7635240" y="1325880"/>
-            <a:ext cx="3474720" cy="1207008"/>
+            <a:off x="7543800" y="1325880"/>
+            <a:ext cx="3611880" cy="1261872"/>
           </a:xfrm>
           <a:prstGeom prst="roundRect">
             <a:avLst>
-              <a:gd name="adj" fmla="val 9091"/>
+              <a:gd name="adj" fmla="val 8696"/>
             </a:avLst>
           </a:prstGeom>
           <a:solidFill>
@@ -9282,8 +9284,8 @@
         </p:nvSpPr>
         <p:spPr>
           <a:xfrm>
-            <a:off x="7799832" y="1472184"/>
-            <a:ext cx="3145536" cy="256032"/>
+            <a:off x="7708392" y="1453896"/>
+            <a:ext cx="3282696" cy="228600"/>
           </a:xfrm>
           <a:prstGeom prst="rect">
             <a:avLst/>
@@ -9299,7 +9301,7 @@
               <a:buNone/>
             </a:pPr>
             <a:r>
-              <a:rPr lang="en-US" sz="1300" b="1" dirty="0">
+              <a:rPr lang="en-US" sz="1220" b="1" dirty="0">
                 <a:solidFill>
                   <a:srgbClr val="0068B7"/>
                 </a:solidFill>
@@ -9309,7 +9311,7 @@
               </a:rPr>
               <a:t>Implementation cue</a:t>
             </a:r>
-            <a:endParaRPr lang="en-US" sz="1300" dirty="0"/>
+            <a:endParaRPr lang="en-US" sz="1220" dirty="0"/>
           </a:p>
         </p:txBody>
       </p:sp>
@@ -9321,8 +9323,8 @@
         </p:nvSpPr>
         <p:spPr>
           <a:xfrm>
-            <a:off x="7799832" y="1801368"/>
-            <a:ext cx="3145536" cy="640080"/>
+            <a:off x="7708392" y="1764792"/>
+            <a:ext cx="3282696" cy="749808"/>
           </a:xfrm>
           <a:prstGeom prst="rect">
             <a:avLst/>
@@ -9340,7 +9342,7 @@
               <a:buNone/>
             </a:pPr>
             <a:r>
-              <a:rPr lang="en-US" sz="1320" dirty="0">
+              <a:rPr lang="en-US" sz="1220" dirty="0">
                 <a:solidFill>
                   <a:srgbClr val="17364A"/>
                 </a:solidFill>
@@ -9350,7 +9352,7 @@
               </a:rPr>
               <a:t>Agentic workflow control plan</a:t>
             </a:r>
-            <a:endParaRPr lang="en-US" sz="1320" dirty="0"/>
+            <a:endParaRPr lang="en-US" sz="1220" dirty="0"/>
           </a:p>
         </p:txBody>
       </p:sp>
@@ -9362,12 +9364,12 @@
         </p:nvSpPr>
         <p:spPr>
           <a:xfrm>
-            <a:off x="7635240" y="2670048"/>
-            <a:ext cx="3474720" cy="1377086"/>
+            <a:off x="7543800" y="2724912"/>
+            <a:ext cx="3611880" cy="1527048"/>
           </a:xfrm>
           <a:prstGeom prst="roundRect">
             <a:avLst>
-              <a:gd name="adj" fmla="val 7968"/>
+              <a:gd name="adj" fmla="val 7186"/>
             </a:avLst>
           </a:prstGeom>
           <a:solidFill>
@@ -9389,8 +9391,8 @@
         </p:nvSpPr>
         <p:spPr>
           <a:xfrm>
-            <a:off x="7799832" y="2816352"/>
-            <a:ext cx="3145536" cy="256032"/>
+            <a:off x="7708392" y="2852928"/>
+            <a:ext cx="3282696" cy="228600"/>
           </a:xfrm>
           <a:prstGeom prst="rect">
             <a:avLst/>
@@ -9406,7 +9408,7 @@
               <a:buNone/>
             </a:pPr>
             <a:r>
-              <a:rPr lang="en-US" sz="1300" b="1" dirty="0">
+              <a:rPr lang="en-US" sz="1220" b="1" dirty="0">
                 <a:solidFill>
                   <a:srgbClr val="0068B7"/>
                 </a:solidFill>
@@ -9416,7 +9418,7 @@
               </a:rPr>
               <a:t>Concept checkpoints</a:t>
             </a:r>
-            <a:endParaRPr lang="en-US" sz="1300" dirty="0"/>
+            <a:endParaRPr lang="en-US" sz="1220" dirty="0"/>
           </a:p>
         </p:txBody>
       </p:sp>
@@ -9428,8 +9430,8 @@
         </p:nvSpPr>
         <p:spPr>
           <a:xfrm>
-            <a:off x="7818120" y="3182112"/>
-            <a:ext cx="3090672" cy="718718"/>
+            <a:off x="7726680" y="3182112"/>
+            <a:ext cx="3227832" cy="960120"/>
           </a:xfrm>
           <a:prstGeom prst="rect">
             <a:avLst/>
@@ -9447,7 +9449,7 @@
               <a:buNone/>
             </a:pPr>
             <a:r>
-              <a:rPr lang="en-US" sz="1220" dirty="0">
+              <a:rPr lang="en-US" sz="1140" dirty="0">
                 <a:solidFill>
                   <a:srgbClr val="17364A"/>
                 </a:solidFill>
@@ -9457,14 +9459,14 @@
               </a:rPr>
               <a:t>Agentic workflow control plan</a:t>
             </a:r>
-            <a:endParaRPr lang="en-US" sz="1220" dirty="0"/>
-          </a:p>
-          <a:p>
-            <a:pPr indent="0" marL="0">
-              <a:buNone/>
-            </a:pPr>
-            <a:r>
-              <a:rPr lang="en-US" sz="1220" dirty="0">
+            <a:endParaRPr lang="en-US" sz="1140" dirty="0"/>
+          </a:p>
+          <a:p>
+            <a:pPr indent="0" marL="0">
+              <a:buNone/>
+            </a:pPr>
+            <a:r>
+              <a:rPr lang="en-US" sz="1140" dirty="0">
                 <a:solidFill>
                   <a:srgbClr val="17364A"/>
                 </a:solidFill>
@@ -9474,14 +9476,14 @@
               </a:rPr>
               <a:t>Allowed/prohibited action list</a:t>
             </a:r>
-            <a:endParaRPr lang="en-US" sz="1220" dirty="0"/>
-          </a:p>
-          <a:p>
-            <a:pPr indent="0" marL="0">
-              <a:buNone/>
-            </a:pPr>
-            <a:r>
-              <a:rPr lang="en-US" sz="1220" dirty="0">
+            <a:endParaRPr lang="en-US" sz="1140" dirty="0"/>
+          </a:p>
+          <a:p>
+            <a:pPr indent="0" marL="0">
+              <a:buNone/>
+            </a:pPr>
+            <a:r>
+              <a:rPr lang="en-US" sz="1140" dirty="0">
                 <a:solidFill>
                   <a:srgbClr val="17364A"/>
                 </a:solidFill>
@@ -9491,7 +9493,7 @@
               </a:rPr>
               <a:t>Human approval and escalation map</a:t>
             </a:r>
-            <a:endParaRPr lang="en-US" sz="1220" dirty="0"/>
+            <a:endParaRPr lang="en-US" sz="1140" dirty="0"/>
           </a:p>
         </p:txBody>
       </p:sp>
@@ -9503,12 +9505,12 @@
         </p:nvSpPr>
         <p:spPr>
           <a:xfrm>
-            <a:off x="7635240" y="4184294"/>
-            <a:ext cx="3474720" cy="1466698"/>
+            <a:off x="7543800" y="4389120"/>
+            <a:ext cx="3611880" cy="1261872"/>
           </a:xfrm>
           <a:prstGeom prst="roundRect">
             <a:avLst>
-              <a:gd name="adj" fmla="val 7481"/>
+              <a:gd name="adj" fmla="val 8696"/>
             </a:avLst>
           </a:prstGeom>
           <a:solidFill>
@@ -9530,8 +9532,8 @@
         </p:nvSpPr>
         <p:spPr>
           <a:xfrm>
-            <a:off x="7799832" y="4330598"/>
-            <a:ext cx="3145536" cy="256032"/>
+            <a:off x="7708392" y="4517136"/>
+            <a:ext cx="3282696" cy="228600"/>
           </a:xfrm>
           <a:prstGeom prst="rect">
             <a:avLst/>
@@ -9547,7 +9549,7 @@
               <a:buNone/>
             </a:pPr>
             <a:r>
-              <a:rPr lang="en-US" sz="1300" b="1" dirty="0">
+              <a:rPr lang="en-US" sz="1220" b="1" dirty="0">
                 <a:solidFill>
                   <a:srgbClr val="0068B7"/>
                 </a:solidFill>
@@ -9557,7 +9559,7 @@
               </a:rPr>
               <a:t>Next action</a:t>
             </a:r>
-            <a:endParaRPr lang="en-US" sz="1300" dirty="0"/>
+            <a:endParaRPr lang="en-US" sz="1220" dirty="0"/>
           </a:p>
         </p:txBody>
       </p:sp>
@@ -9569,8 +9571,8 @@
         </p:nvSpPr>
         <p:spPr>
           <a:xfrm>
-            <a:off x="7799832" y="4659782"/>
-            <a:ext cx="3145536" cy="899770"/>
+            <a:off x="7708392" y="4828032"/>
+            <a:ext cx="3282696" cy="749808"/>
           </a:xfrm>
           <a:prstGeom prst="rect">
             <a:avLst/>
@@ -9588,7 +9590,7 @@
               <a:buNone/>
             </a:pPr>
             <a:r>
-              <a:rPr lang="en-US" sz="1320" dirty="0">
+              <a:rPr lang="en-US" sz="1220" dirty="0">
                 <a:solidFill>
                   <a:srgbClr val="17364A"/>
                 </a:solidFill>
@@ -9596,9 +9598,9 @@
                 <a:ea typeface="Aptos" pitchFamily="34" charset="-122"/>
                 <a:cs typeface="Aptos" pitchFamily="34" charset="-120"/>
               </a:rPr>
-              <a:t>Use the concept to clarify workflow changes, dependencies, staffing, procurement requirements, training needs, and implementation checkpoints.</a:t>
-            </a:r>
-            <a:endParaRPr lang="en-US" sz="1320" dirty="0"/>
+              <a:t>Use the concept to clarify workflow changes, dependencies, staffing, procurement.</a:t>
+            </a:r>
+            <a:endParaRPr lang="en-US" sz="1220" dirty="0"/>
           </a:p>
         </p:txBody>
       </p:sp>
@@ -9889,8 +9891,8 @@
         </p:nvSpPr>
         <p:spPr>
           <a:xfrm>
-            <a:off x="868680" y="1508760"/>
-            <a:ext cx="6309360" cy="4160520"/>
+            <a:off x="822960" y="1463040"/>
+            <a:ext cx="6565392" cy="4343400"/>
           </a:xfrm>
           <a:prstGeom prst="rect">
             <a:avLst/>
@@ -9908,7 +9910,7 @@
               <a:buNone/>
             </a:pPr>
             <a:r>
-              <a:rPr lang="en-US" sz="2100" dirty="0">
+              <a:rPr lang="en-US" sz="1920" dirty="0">
                 <a:solidFill>
                   <a:srgbClr val="003A63"/>
                 </a:solidFill>
@@ -9918,7 +9920,7 @@
               </a:rPr>
               <a:t>• Tool-call logging requirements</a:t>
             </a:r>
-            <a:endParaRPr lang="en-US" sz="2100" dirty="0"/>
+            <a:endParaRPr lang="en-US" sz="1920" dirty="0"/>
           </a:p>
         </p:txBody>
       </p:sp>
@@ -9930,12 +9932,12 @@
         </p:nvSpPr>
         <p:spPr>
           <a:xfrm>
-            <a:off x="7635240" y="1325880"/>
-            <a:ext cx="3474720" cy="1207008"/>
+            <a:off x="7543800" y="1325880"/>
+            <a:ext cx="3611880" cy="1261872"/>
           </a:xfrm>
           <a:prstGeom prst="roundRect">
             <a:avLst>
-              <a:gd name="adj" fmla="val 9091"/>
+              <a:gd name="adj" fmla="val 8696"/>
             </a:avLst>
           </a:prstGeom>
           <a:solidFill>
@@ -9957,8 +9959,8 @@
         </p:nvSpPr>
         <p:spPr>
           <a:xfrm>
-            <a:off x="7799832" y="1472184"/>
-            <a:ext cx="3145536" cy="256032"/>
+            <a:off x="7708392" y="1453896"/>
+            <a:ext cx="3282696" cy="228600"/>
           </a:xfrm>
           <a:prstGeom prst="rect">
             <a:avLst/>
@@ -9974,7 +9976,7 @@
               <a:buNone/>
             </a:pPr>
             <a:r>
-              <a:rPr lang="en-US" sz="1300" b="1" dirty="0">
+              <a:rPr lang="en-US" sz="1220" b="1" dirty="0">
                 <a:solidFill>
                   <a:srgbClr val="0068B7"/>
                 </a:solidFill>
@@ -9984,7 +9986,7 @@
               </a:rPr>
               <a:t>Implementation cue</a:t>
             </a:r>
-            <a:endParaRPr lang="en-US" sz="1300" dirty="0"/>
+            <a:endParaRPr lang="en-US" sz="1220" dirty="0"/>
           </a:p>
         </p:txBody>
       </p:sp>
@@ -9996,8 +9998,8 @@
         </p:nvSpPr>
         <p:spPr>
           <a:xfrm>
-            <a:off x="7799832" y="1801368"/>
-            <a:ext cx="3145536" cy="640080"/>
+            <a:off x="7708392" y="1764792"/>
+            <a:ext cx="3282696" cy="749808"/>
           </a:xfrm>
           <a:prstGeom prst="rect">
             <a:avLst/>
@@ -10015,7 +10017,7 @@
               <a:buNone/>
             </a:pPr>
             <a:r>
-              <a:rPr lang="en-US" sz="1320" dirty="0">
+              <a:rPr lang="en-US" sz="1220" dirty="0">
                 <a:solidFill>
                   <a:srgbClr val="17364A"/>
                 </a:solidFill>
@@ -10025,7 +10027,7 @@
               </a:rPr>
               <a:t>Tool-call logging requirements</a:t>
             </a:r>
-            <a:endParaRPr lang="en-US" sz="1320" dirty="0"/>
+            <a:endParaRPr lang="en-US" sz="1220" dirty="0"/>
           </a:p>
         </p:txBody>
       </p:sp>
@@ -10037,12 +10039,12 @@
         </p:nvSpPr>
         <p:spPr>
           <a:xfrm>
-            <a:off x="7635240" y="2670048"/>
-            <a:ext cx="3474720" cy="1377086"/>
+            <a:off x="7543800" y="2724912"/>
+            <a:ext cx="3611880" cy="1527048"/>
           </a:xfrm>
           <a:prstGeom prst="roundRect">
             <a:avLst>
-              <a:gd name="adj" fmla="val 7968"/>
+              <a:gd name="adj" fmla="val 7186"/>
             </a:avLst>
           </a:prstGeom>
           <a:solidFill>
@@ -10064,8 +10066,8 @@
         </p:nvSpPr>
         <p:spPr>
           <a:xfrm>
-            <a:off x="7799832" y="2816352"/>
-            <a:ext cx="3145536" cy="256032"/>
+            <a:off x="7708392" y="2852928"/>
+            <a:ext cx="3282696" cy="228600"/>
           </a:xfrm>
           <a:prstGeom prst="rect">
             <a:avLst/>
@@ -10081,7 +10083,7 @@
               <a:buNone/>
             </a:pPr>
             <a:r>
-              <a:rPr lang="en-US" sz="1300" b="1" dirty="0">
+              <a:rPr lang="en-US" sz="1220" b="1" dirty="0">
                 <a:solidFill>
                   <a:srgbClr val="0068B7"/>
                 </a:solidFill>
@@ -10091,7 +10093,7 @@
               </a:rPr>
               <a:t>Concept checkpoints</a:t>
             </a:r>
-            <a:endParaRPr lang="en-US" sz="1300" dirty="0"/>
+            <a:endParaRPr lang="en-US" sz="1220" dirty="0"/>
           </a:p>
         </p:txBody>
       </p:sp>
@@ -10103,8 +10105,8 @@
         </p:nvSpPr>
         <p:spPr>
           <a:xfrm>
-            <a:off x="7818120" y="3182112"/>
-            <a:ext cx="3090672" cy="718718"/>
+            <a:off x="7726680" y="3182112"/>
+            <a:ext cx="3227832" cy="960120"/>
           </a:xfrm>
           <a:prstGeom prst="rect">
             <a:avLst/>
@@ -10122,7 +10124,7 @@
               <a:buNone/>
             </a:pPr>
             <a:r>
-              <a:rPr lang="en-US" sz="1220" dirty="0">
+              <a:rPr lang="en-US" sz="1140" dirty="0">
                 <a:solidFill>
                   <a:srgbClr val="17364A"/>
                 </a:solidFill>
@@ -10132,7 +10134,7 @@
               </a:rPr>
               <a:t>Tool-call logging requirements</a:t>
             </a:r>
-            <a:endParaRPr lang="en-US" sz="1220" dirty="0"/>
+            <a:endParaRPr lang="en-US" sz="1140" dirty="0"/>
           </a:p>
         </p:txBody>
       </p:sp>
@@ -10144,12 +10146,12 @@
         </p:nvSpPr>
         <p:spPr>
           <a:xfrm>
-            <a:off x="7635240" y="4184294"/>
-            <a:ext cx="3474720" cy="1466698"/>
+            <a:off x="7543800" y="4389120"/>
+            <a:ext cx="3611880" cy="1261872"/>
           </a:xfrm>
           <a:prstGeom prst="roundRect">
             <a:avLst>
-              <a:gd name="adj" fmla="val 7481"/>
+              <a:gd name="adj" fmla="val 8696"/>
             </a:avLst>
           </a:prstGeom>
           <a:solidFill>
@@ -10171,8 +10173,8 @@
         </p:nvSpPr>
         <p:spPr>
           <a:xfrm>
-            <a:off x="7799832" y="4330598"/>
-            <a:ext cx="3145536" cy="256032"/>
+            <a:off x="7708392" y="4517136"/>
+            <a:ext cx="3282696" cy="228600"/>
           </a:xfrm>
           <a:prstGeom prst="rect">
             <a:avLst/>
@@ -10188,7 +10190,7 @@
               <a:buNone/>
             </a:pPr>
             <a:r>
-              <a:rPr lang="en-US" sz="1300" b="1" dirty="0">
+              <a:rPr lang="en-US" sz="1220" b="1" dirty="0">
                 <a:solidFill>
                   <a:srgbClr val="0068B7"/>
                 </a:solidFill>
@@ -10198,7 +10200,7 @@
               </a:rPr>
               <a:t>Next action</a:t>
             </a:r>
-            <a:endParaRPr lang="en-US" sz="1300" dirty="0"/>
+            <a:endParaRPr lang="en-US" sz="1220" dirty="0"/>
           </a:p>
         </p:txBody>
       </p:sp>
@@ -10210,8 +10212,8 @@
         </p:nvSpPr>
         <p:spPr>
           <a:xfrm>
-            <a:off x="7799832" y="4659782"/>
-            <a:ext cx="3145536" cy="899770"/>
+            <a:off x="7708392" y="4828032"/>
+            <a:ext cx="3282696" cy="749808"/>
           </a:xfrm>
           <a:prstGeom prst="rect">
             <a:avLst/>
@@ -10229,7 +10231,7 @@
               <a:buNone/>
             </a:pPr>
             <a:r>
-              <a:rPr lang="en-US" sz="1320" dirty="0">
+              <a:rPr lang="en-US" sz="1220" dirty="0">
                 <a:solidFill>
                   <a:srgbClr val="17364A"/>
                 </a:solidFill>
@@ -10237,9 +10239,9 @@
                 <a:ea typeface="Aptos" pitchFamily="34" charset="-122"/>
                 <a:cs typeface="Aptos" pitchFamily="34" charset="-120"/>
               </a:rPr>
-              <a:t>Use the concept to clarify workflow changes, dependencies, staffing, procurement requirements, training needs, and implementation checkpoints.</a:t>
-            </a:r>
-            <a:endParaRPr lang="en-US" sz="1320" dirty="0"/>
+              <a:t>Use the concept to clarify workflow changes, dependencies, staffing, procurement.</a:t>
+            </a:r>
+            <a:endParaRPr lang="en-US" sz="1220" dirty="0"/>
           </a:p>
         </p:txBody>
       </p:sp>
@@ -10557,7 +10559,7 @@
                 <a:ea typeface="Aptos" pitchFamily="34" charset="-122"/>
                 <a:cs typeface="Aptos" pitchFamily="34" charset="-120"/>
               </a:rPr>
-              <a:t>• Agentic AI refers to AI systems configured to pursue a goal through multiple steps, often by.</a:t>
+              <a:t>• Agentic AI refers to AI systems configured to pursue a goal through multiple.</a:t>
             </a:r>
             <a:endParaRPr lang="en-US" sz="2100" dirty="0"/>
           </a:p>
@@ -10574,7 +10576,7 @@
                 <a:ea typeface="Aptos" pitchFamily="34" charset="-122"/>
                 <a:cs typeface="Aptos" pitchFamily="34" charset="-120"/>
               </a:rPr>
-              <a:t>• In public health, agentic workflows may eventually support intake triage, document routing,.</a:t>
+              <a:t>• In public health, agentic workflows may eventually support intake triage,.</a:t>
             </a:r>
             <a:endParaRPr lang="en-US" sz="2100" dirty="0"/>
           </a:p>
@@ -10632,8 +10634,8 @@
         </p:nvSpPr>
         <p:spPr>
           <a:xfrm>
-            <a:off x="8074152" y="1563624"/>
-            <a:ext cx="2825496" cy="256032"/>
+            <a:off x="8074152" y="1545336"/>
+            <a:ext cx="2825496" cy="228600"/>
           </a:xfrm>
           <a:prstGeom prst="rect">
             <a:avLst/>
@@ -10649,7 +10651,7 @@
               <a:buNone/>
             </a:pPr>
             <a:r>
-              <a:rPr lang="en-US" sz="1300" b="1" dirty="0">
+              <a:rPr lang="en-US" sz="1220" b="1" dirty="0">
                 <a:solidFill>
                   <a:srgbClr val="0068B7"/>
                 </a:solidFill>
@@ -10659,7 +10661,7 @@
               </a:rPr>
               <a:t>Module details</a:t>
             </a:r>
-            <a:endParaRPr lang="en-US" sz="1300" dirty="0"/>
+            <a:endParaRPr lang="en-US" sz="1220" dirty="0"/>
           </a:p>
         </p:txBody>
       </p:sp>
@@ -10671,8 +10673,8 @@
         </p:nvSpPr>
         <p:spPr>
           <a:xfrm>
-            <a:off x="8074152" y="1892808"/>
-            <a:ext cx="2825496" cy="1353312"/>
+            <a:off x="8074152" y="1856232"/>
+            <a:ext cx="2825496" cy="1408176"/>
           </a:xfrm>
           <a:prstGeom prst="rect">
             <a:avLst/>
@@ -10690,7 +10692,7 @@
               <a:buNone/>
             </a:pPr>
             <a:r>
-              <a:rPr lang="en-US" sz="1320" dirty="0">
+              <a:rPr lang="en-US" sz="1220" dirty="0">
                 <a:solidFill>
                   <a:srgbClr val="17364A"/>
                 </a:solidFill>
@@ -10698,9 +10700,9 @@
                 <a:ea typeface="Aptos" pitchFamily="34" charset="-122"/>
                 <a:cs typeface="Aptos" pitchFamily="34" charset="-120"/>
               </a:rPr>
-              <a:t>Level: intermediate/practitioner Primary track: Technical Architecture Track Appears in tracks: analytics-modeling</a:t>
-            </a:r>
-            <a:endParaRPr lang="en-US" sz="1320" dirty="0"/>
+              <a:t>Level: intermediate/practitioner Primary track: Technical Architecture Track.</a:t>
+            </a:r>
+            <a:endParaRPr lang="en-US" sz="1220" dirty="0"/>
           </a:p>
         </p:txBody>
       </p:sp>
@@ -10739,8 +10741,8 @@
         </p:nvSpPr>
         <p:spPr>
           <a:xfrm>
-            <a:off x="8074152" y="3822192"/>
-            <a:ext cx="2825496" cy="256032"/>
+            <a:off x="8074152" y="3803904"/>
+            <a:ext cx="2825496" cy="228600"/>
           </a:xfrm>
           <a:prstGeom prst="rect">
             <a:avLst/>
@@ -10756,7 +10758,7 @@
               <a:buNone/>
             </a:pPr>
             <a:r>
-              <a:rPr lang="en-US" sz="1300" b="1" dirty="0">
+              <a:rPr lang="en-US" sz="1220" b="1" dirty="0">
                 <a:solidFill>
                   <a:srgbClr val="0068B7"/>
                 </a:solidFill>
@@ -10766,7 +10768,7 @@
               </a:rPr>
               <a:t>Learning sequence</a:t>
             </a:r>
-            <a:endParaRPr lang="en-US" sz="1300" dirty="0"/>
+            <a:endParaRPr lang="en-US" sz="1220" dirty="0"/>
           </a:p>
         </p:txBody>
       </p:sp>
@@ -10778,8 +10780,8 @@
         </p:nvSpPr>
         <p:spPr>
           <a:xfrm>
-            <a:off x="8092440" y="4187952"/>
-            <a:ext cx="2770632" cy="1033272"/>
+            <a:off x="8092440" y="4133088"/>
+            <a:ext cx="2770632" cy="1124712"/>
           </a:xfrm>
           <a:prstGeom prst="rect">
             <a:avLst/>
@@ -10797,7 +10799,7 @@
               <a:buNone/>
             </a:pPr>
             <a:r>
-              <a:rPr lang="en-US" sz="1220" dirty="0">
+              <a:rPr lang="en-US" sz="1140" dirty="0">
                 <a:solidFill>
                   <a:srgbClr val="17364A"/>
                 </a:solidFill>
@@ -10807,14 +10809,14 @@
               </a:rPr>
               <a:t>Read the module for shared vocabulary and context.</a:t>
             </a:r>
-            <a:endParaRPr lang="en-US" sz="1220" dirty="0"/>
-          </a:p>
-          <a:p>
-            <a:pPr indent="0" marL="0">
-              <a:buNone/>
-            </a:pPr>
-            <a:r>
-              <a:rPr lang="en-US" sz="1220" dirty="0">
+            <a:endParaRPr lang="en-US" sz="1140" dirty="0"/>
+          </a:p>
+          <a:p>
+            <a:pPr indent="0" marL="0">
+              <a:buNone/>
+            </a:pPr>
+            <a:r>
+              <a:rPr lang="en-US" sz="1140" dirty="0">
                 <a:solidFill>
                   <a:srgbClr val="17364A"/>
                 </a:solidFill>
@@ -10822,16 +10824,16 @@
                 <a:ea typeface="Aptos" pitchFamily="34" charset="-122"/>
                 <a:cs typeface="Aptos" pitchFamily="34" charset="-120"/>
               </a:rPr>
-              <a:t>Complete the practical exercise to apply the concept.</a:t>
-            </a:r>
-            <a:endParaRPr lang="en-US" sz="1220" dirty="0"/>
-          </a:p>
-          <a:p>
-            <a:pPr indent="0" marL="0">
-              <a:buNone/>
-            </a:pPr>
-            <a:r>
-              <a:rPr lang="en-US" sz="1220" dirty="0">
+              <a:t>Complete the practical exercise to apply the.</a:t>
+            </a:r>
+            <a:endParaRPr lang="en-US" sz="1140" dirty="0"/>
+          </a:p>
+          <a:p>
+            <a:pPr indent="0" marL="0">
+              <a:buNone/>
+            </a:pPr>
+            <a:r>
+              <a:rPr lang="en-US" sz="1140" dirty="0">
                 <a:solidFill>
                   <a:srgbClr val="17364A"/>
                 </a:solidFill>
@@ -10841,7 +10843,7 @@
               </a:rPr>
               <a:t>Use the notes and references for deeper review.</a:t>
             </a:r>
-            <a:endParaRPr lang="en-US" sz="1220" dirty="0"/>
+            <a:endParaRPr lang="en-US" sz="1140" dirty="0"/>
           </a:p>
         </p:txBody>
       </p:sp>
@@ -11132,8 +11134,8 @@
         </p:nvSpPr>
         <p:spPr>
           <a:xfrm>
-            <a:off x="868680" y="1508760"/>
-            <a:ext cx="6309360" cy="4160520"/>
+            <a:off x="822960" y="1463040"/>
+            <a:ext cx="6565392" cy="4343400"/>
           </a:xfrm>
           <a:prstGeom prst="rect">
             <a:avLst/>
@@ -11151,7 +11153,7 @@
               <a:buNone/>
             </a:pPr>
             <a:r>
-              <a:rPr lang="en-US" sz="2100" dirty="0">
+              <a:rPr lang="en-US" sz="1920" dirty="0">
                 <a:solidFill>
                   <a:srgbClr val="003A63"/>
                 </a:solidFill>
@@ -11161,14 +11163,14 @@
               </a:rPr>
               <a:t>• Agentic workflow control plan</a:t>
             </a:r>
-            <a:endParaRPr lang="en-US" sz="2100" dirty="0"/>
-          </a:p>
-          <a:p>
-            <a:pPr indent="0" marL="0">
-              <a:buNone/>
-            </a:pPr>
-            <a:r>
-              <a:rPr lang="en-US" sz="2100" dirty="0">
+            <a:endParaRPr lang="en-US" sz="1920" dirty="0"/>
+          </a:p>
+          <a:p>
+            <a:pPr indent="0" marL="0">
+              <a:buNone/>
+            </a:pPr>
+            <a:r>
+              <a:rPr lang="en-US" sz="1920" dirty="0">
                 <a:solidFill>
                   <a:srgbClr val="003A63"/>
                 </a:solidFill>
@@ -11178,14 +11180,14 @@
               </a:rPr>
               <a:t>• Allowed/prohibited action list</a:t>
             </a:r>
-            <a:endParaRPr lang="en-US" sz="2100" dirty="0"/>
-          </a:p>
-          <a:p>
-            <a:pPr indent="0" marL="0">
-              <a:buNone/>
-            </a:pPr>
-            <a:r>
-              <a:rPr lang="en-US" sz="2100" dirty="0">
+            <a:endParaRPr lang="en-US" sz="1920" dirty="0"/>
+          </a:p>
+          <a:p>
+            <a:pPr indent="0" marL="0">
+              <a:buNone/>
+            </a:pPr>
+            <a:r>
+              <a:rPr lang="en-US" sz="1920" dirty="0">
                 <a:solidFill>
                   <a:srgbClr val="003A63"/>
                 </a:solidFill>
@@ -11195,7 +11197,7 @@
               </a:rPr>
               <a:t>• Human approval and escalation map</a:t>
             </a:r>
-            <a:endParaRPr lang="en-US" sz="2100" dirty="0"/>
+            <a:endParaRPr lang="en-US" sz="1920" dirty="0"/>
           </a:p>
         </p:txBody>
       </p:sp>
@@ -11207,12 +11209,12 @@
         </p:nvSpPr>
         <p:spPr>
           <a:xfrm>
-            <a:off x="7635240" y="1325880"/>
-            <a:ext cx="3474720" cy="1207008"/>
+            <a:off x="7543800" y="1325880"/>
+            <a:ext cx="3611880" cy="1261872"/>
           </a:xfrm>
           <a:prstGeom prst="roundRect">
             <a:avLst>
-              <a:gd name="adj" fmla="val 9091"/>
+              <a:gd name="adj" fmla="val 8696"/>
             </a:avLst>
           </a:prstGeom>
           <a:solidFill>
@@ -11234,8 +11236,8 @@
         </p:nvSpPr>
         <p:spPr>
           <a:xfrm>
-            <a:off x="7799832" y="1472184"/>
-            <a:ext cx="3145536" cy="256032"/>
+            <a:off x="7708392" y="1453896"/>
+            <a:ext cx="3282696" cy="228600"/>
           </a:xfrm>
           <a:prstGeom prst="rect">
             <a:avLst/>
@@ -11251,7 +11253,7 @@
               <a:buNone/>
             </a:pPr>
             <a:r>
-              <a:rPr lang="en-US" sz="1300" b="1" dirty="0">
+              <a:rPr lang="en-US" sz="1220" b="1" dirty="0">
                 <a:solidFill>
                   <a:srgbClr val="0068B7"/>
                 </a:solidFill>
@@ -11261,7 +11263,7 @@
               </a:rPr>
               <a:t>Implementation cue</a:t>
             </a:r>
-            <a:endParaRPr lang="en-US" sz="1300" dirty="0"/>
+            <a:endParaRPr lang="en-US" sz="1220" dirty="0"/>
           </a:p>
         </p:txBody>
       </p:sp>
@@ -11273,8 +11275,8 @@
         </p:nvSpPr>
         <p:spPr>
           <a:xfrm>
-            <a:off x="7799832" y="1801368"/>
-            <a:ext cx="3145536" cy="640080"/>
+            <a:off x="7708392" y="1764792"/>
+            <a:ext cx="3282696" cy="749808"/>
           </a:xfrm>
           <a:prstGeom prst="rect">
             <a:avLst/>
@@ -11292,7 +11294,7 @@
               <a:buNone/>
             </a:pPr>
             <a:r>
-              <a:rPr lang="en-US" sz="1320" dirty="0">
+              <a:rPr lang="en-US" sz="1220" dirty="0">
                 <a:solidFill>
                   <a:srgbClr val="17364A"/>
                 </a:solidFill>
@@ -11302,7 +11304,7 @@
               </a:rPr>
               <a:t>Agentic workflow control plan</a:t>
             </a:r>
-            <a:endParaRPr lang="en-US" sz="1320" dirty="0"/>
+            <a:endParaRPr lang="en-US" sz="1220" dirty="0"/>
           </a:p>
         </p:txBody>
       </p:sp>
@@ -11314,12 +11316,12 @@
         </p:nvSpPr>
         <p:spPr>
           <a:xfrm>
-            <a:off x="7635240" y="2670048"/>
-            <a:ext cx="3474720" cy="1377086"/>
+            <a:off x="7543800" y="2724912"/>
+            <a:ext cx="3611880" cy="1527048"/>
           </a:xfrm>
           <a:prstGeom prst="roundRect">
             <a:avLst>
-              <a:gd name="adj" fmla="val 7968"/>
+              <a:gd name="adj" fmla="val 7186"/>
             </a:avLst>
           </a:prstGeom>
           <a:solidFill>
@@ -11341,8 +11343,8 @@
         </p:nvSpPr>
         <p:spPr>
           <a:xfrm>
-            <a:off x="7799832" y="2816352"/>
-            <a:ext cx="3145536" cy="256032"/>
+            <a:off x="7708392" y="2852928"/>
+            <a:ext cx="3282696" cy="228600"/>
           </a:xfrm>
           <a:prstGeom prst="rect">
             <a:avLst/>
@@ -11358,7 +11360,7 @@
               <a:buNone/>
             </a:pPr>
             <a:r>
-              <a:rPr lang="en-US" sz="1300" b="1" dirty="0">
+              <a:rPr lang="en-US" sz="1220" b="1" dirty="0">
                 <a:solidFill>
                   <a:srgbClr val="0068B7"/>
                 </a:solidFill>
@@ -11368,7 +11370,7 @@
               </a:rPr>
               <a:t>Concept checkpoints</a:t>
             </a:r>
-            <a:endParaRPr lang="en-US" sz="1300" dirty="0"/>
+            <a:endParaRPr lang="en-US" sz="1220" dirty="0"/>
           </a:p>
         </p:txBody>
       </p:sp>
@@ -11380,8 +11382,8 @@
         </p:nvSpPr>
         <p:spPr>
           <a:xfrm>
-            <a:off x="7818120" y="3182112"/>
-            <a:ext cx="3090672" cy="718718"/>
+            <a:off x="7726680" y="3182112"/>
+            <a:ext cx="3227832" cy="960120"/>
           </a:xfrm>
           <a:prstGeom prst="rect">
             <a:avLst/>
@@ -11399,7 +11401,7 @@
               <a:buNone/>
             </a:pPr>
             <a:r>
-              <a:rPr lang="en-US" sz="1220" dirty="0">
+              <a:rPr lang="en-US" sz="1140" dirty="0">
                 <a:solidFill>
                   <a:srgbClr val="17364A"/>
                 </a:solidFill>
@@ -11409,14 +11411,14 @@
               </a:rPr>
               <a:t>Agentic workflow control plan</a:t>
             </a:r>
-            <a:endParaRPr lang="en-US" sz="1220" dirty="0"/>
-          </a:p>
-          <a:p>
-            <a:pPr indent="0" marL="0">
-              <a:buNone/>
-            </a:pPr>
-            <a:r>
-              <a:rPr lang="en-US" sz="1220" dirty="0">
+            <a:endParaRPr lang="en-US" sz="1140" dirty="0"/>
+          </a:p>
+          <a:p>
+            <a:pPr indent="0" marL="0">
+              <a:buNone/>
+            </a:pPr>
+            <a:r>
+              <a:rPr lang="en-US" sz="1140" dirty="0">
                 <a:solidFill>
                   <a:srgbClr val="17364A"/>
                 </a:solidFill>
@@ -11426,14 +11428,14 @@
               </a:rPr>
               <a:t>Allowed/prohibited action list</a:t>
             </a:r>
-            <a:endParaRPr lang="en-US" sz="1220" dirty="0"/>
-          </a:p>
-          <a:p>
-            <a:pPr indent="0" marL="0">
-              <a:buNone/>
-            </a:pPr>
-            <a:r>
-              <a:rPr lang="en-US" sz="1220" dirty="0">
+            <a:endParaRPr lang="en-US" sz="1140" dirty="0"/>
+          </a:p>
+          <a:p>
+            <a:pPr indent="0" marL="0">
+              <a:buNone/>
+            </a:pPr>
+            <a:r>
+              <a:rPr lang="en-US" sz="1140" dirty="0">
                 <a:solidFill>
                   <a:srgbClr val="17364A"/>
                 </a:solidFill>
@@ -11443,7 +11445,7 @@
               </a:rPr>
               <a:t>Human approval and escalation map</a:t>
             </a:r>
-            <a:endParaRPr lang="en-US" sz="1220" dirty="0"/>
+            <a:endParaRPr lang="en-US" sz="1140" dirty="0"/>
           </a:p>
         </p:txBody>
       </p:sp>
@@ -11455,12 +11457,12 @@
         </p:nvSpPr>
         <p:spPr>
           <a:xfrm>
-            <a:off x="7635240" y="4184294"/>
-            <a:ext cx="3474720" cy="1466698"/>
+            <a:off x="7543800" y="4389120"/>
+            <a:ext cx="3611880" cy="1261872"/>
           </a:xfrm>
           <a:prstGeom prst="roundRect">
             <a:avLst>
-              <a:gd name="adj" fmla="val 7481"/>
+              <a:gd name="adj" fmla="val 8696"/>
             </a:avLst>
           </a:prstGeom>
           <a:solidFill>
@@ -11482,8 +11484,8 @@
         </p:nvSpPr>
         <p:spPr>
           <a:xfrm>
-            <a:off x="7799832" y="4330598"/>
-            <a:ext cx="3145536" cy="256032"/>
+            <a:off x="7708392" y="4517136"/>
+            <a:ext cx="3282696" cy="228600"/>
           </a:xfrm>
           <a:prstGeom prst="rect">
             <a:avLst/>
@@ -11499,7 +11501,7 @@
               <a:buNone/>
             </a:pPr>
             <a:r>
-              <a:rPr lang="en-US" sz="1300" b="1" dirty="0">
+              <a:rPr lang="en-US" sz="1220" b="1" dirty="0">
                 <a:solidFill>
                   <a:srgbClr val="0068B7"/>
                 </a:solidFill>
@@ -11509,7 +11511,7 @@
               </a:rPr>
               <a:t>Next action</a:t>
             </a:r>
-            <a:endParaRPr lang="en-US" sz="1300" dirty="0"/>
+            <a:endParaRPr lang="en-US" sz="1220" dirty="0"/>
           </a:p>
         </p:txBody>
       </p:sp>
@@ -11521,8 +11523,8 @@
         </p:nvSpPr>
         <p:spPr>
           <a:xfrm>
-            <a:off x="7799832" y="4659782"/>
-            <a:ext cx="3145536" cy="899770"/>
+            <a:off x="7708392" y="4828032"/>
+            <a:ext cx="3282696" cy="749808"/>
           </a:xfrm>
           <a:prstGeom prst="rect">
             <a:avLst/>
@@ -11540,7 +11542,7 @@
               <a:buNone/>
             </a:pPr>
             <a:r>
-              <a:rPr lang="en-US" sz="1320" dirty="0">
+              <a:rPr lang="en-US" sz="1220" dirty="0">
                 <a:solidFill>
                   <a:srgbClr val="17364A"/>
                 </a:solidFill>
@@ -11548,9 +11550,9 @@
                 <a:ea typeface="Aptos" pitchFamily="34" charset="-122"/>
                 <a:cs typeface="Aptos" pitchFamily="34" charset="-120"/>
               </a:rPr>
-              <a:t>Use the assignment to test whether you can explain the concept, apply it to a realistic public health situation, and identify what would need review before the work moves forward.</a:t>
-            </a:r>
-            <a:endParaRPr lang="en-US" sz="1320" dirty="0"/>
+              <a:t>Use the assignment to test whether you can explain the concept, apply it to a.</a:t>
+            </a:r>
+            <a:endParaRPr lang="en-US" sz="1220" dirty="0"/>
           </a:p>
         </p:txBody>
       </p:sp>
@@ -11841,8 +11843,8 @@
         </p:nvSpPr>
         <p:spPr>
           <a:xfrm>
-            <a:off x="868680" y="1508760"/>
-            <a:ext cx="6309360" cy="4160520"/>
+            <a:off x="822960" y="1463040"/>
+            <a:ext cx="6565392" cy="4343400"/>
           </a:xfrm>
           <a:prstGeom prst="rect">
             <a:avLst/>
@@ -11860,7 +11862,7 @@
               <a:buNone/>
             </a:pPr>
             <a:r>
-              <a:rPr lang="en-US" sz="2100" dirty="0">
+              <a:rPr lang="en-US" sz="1920" dirty="0">
                 <a:solidFill>
                   <a:srgbClr val="003A63"/>
                 </a:solidFill>
@@ -11870,14 +11872,14 @@
               </a:rPr>
               <a:t>• 1. What makes agentic AI different from simple drafting support?</a:t>
             </a:r>
-            <a:endParaRPr lang="en-US" sz="2100" dirty="0"/>
-          </a:p>
-          <a:p>
-            <a:pPr indent="0" marL="0">
-              <a:buNone/>
-            </a:pPr>
-            <a:r>
-              <a:rPr lang="en-US" sz="2100" dirty="0">
+            <a:endParaRPr lang="en-US" sz="1920" dirty="0"/>
+          </a:p>
+          <a:p>
+            <a:pPr indent="0" marL="0">
+              <a:buNone/>
+            </a:pPr>
+            <a:r>
+              <a:rPr lang="en-US" sz="1920" dirty="0">
                 <a:solidFill>
                   <a:srgbClr val="003A63"/>
                 </a:solidFill>
@@ -11887,14 +11889,14 @@
               </a:rPr>
               <a:t>• 2. Which action usually requires stronger oversight?</a:t>
             </a:r>
-            <a:endParaRPr lang="en-US" sz="2100" dirty="0"/>
-          </a:p>
-          <a:p>
-            <a:pPr indent="0" marL="0">
-              <a:buNone/>
-            </a:pPr>
-            <a:r>
-              <a:rPr lang="en-US" sz="2100" dirty="0">
+            <a:endParaRPr lang="en-US" sz="1920" dirty="0"/>
+          </a:p>
+          <a:p>
+            <a:pPr indent="0" marL="0">
+              <a:buNone/>
+            </a:pPr>
+            <a:r>
+              <a:rPr lang="en-US" sz="1920" dirty="0">
                 <a:solidFill>
                   <a:srgbClr val="003A63"/>
                 </a:solidFill>
@@ -11904,7 +11906,7 @@
               </a:rPr>
               <a:t>• 3. What is orchestration?</a:t>
             </a:r>
-            <a:endParaRPr lang="en-US" sz="2100" dirty="0"/>
+            <a:endParaRPr lang="en-US" sz="1920" dirty="0"/>
           </a:p>
         </p:txBody>
       </p:sp>
@@ -11916,12 +11918,12 @@
         </p:nvSpPr>
         <p:spPr>
           <a:xfrm>
-            <a:off x="7635240" y="1325880"/>
-            <a:ext cx="3474720" cy="1207008"/>
+            <a:off x="7543800" y="1325880"/>
+            <a:ext cx="3611880" cy="1261872"/>
           </a:xfrm>
           <a:prstGeom prst="roundRect">
             <a:avLst>
-              <a:gd name="adj" fmla="val 9091"/>
+              <a:gd name="adj" fmla="val 8696"/>
             </a:avLst>
           </a:prstGeom>
           <a:solidFill>
@@ -11943,8 +11945,8 @@
         </p:nvSpPr>
         <p:spPr>
           <a:xfrm>
-            <a:off x="7799832" y="1472184"/>
-            <a:ext cx="3145536" cy="256032"/>
+            <a:off x="7708392" y="1453896"/>
+            <a:ext cx="3282696" cy="228600"/>
           </a:xfrm>
           <a:prstGeom prst="rect">
             <a:avLst/>
@@ -11960,7 +11962,7 @@
               <a:buNone/>
             </a:pPr>
             <a:r>
-              <a:rPr lang="en-US" sz="1300" b="1" dirty="0">
+              <a:rPr lang="en-US" sz="1220" b="1" dirty="0">
                 <a:solidFill>
                   <a:srgbClr val="0068B7"/>
                 </a:solidFill>
@@ -11970,7 +11972,7 @@
               </a:rPr>
               <a:t>Implementation cue</a:t>
             </a:r>
-            <a:endParaRPr lang="en-US" sz="1300" dirty="0"/>
+            <a:endParaRPr lang="en-US" sz="1220" dirty="0"/>
           </a:p>
         </p:txBody>
       </p:sp>
@@ -11982,8 +11984,8 @@
         </p:nvSpPr>
         <p:spPr>
           <a:xfrm>
-            <a:off x="7799832" y="1801368"/>
-            <a:ext cx="3145536" cy="640080"/>
+            <a:off x="7708392" y="1764792"/>
+            <a:ext cx="3282696" cy="749808"/>
           </a:xfrm>
           <a:prstGeom prst="rect">
             <a:avLst/>
@@ -12001,7 +12003,7 @@
               <a:buNone/>
             </a:pPr>
             <a:r>
-              <a:rPr lang="en-US" sz="1320" dirty="0">
+              <a:rPr lang="en-US" sz="1220" dirty="0">
                 <a:solidFill>
                   <a:srgbClr val="17364A"/>
                 </a:solidFill>
@@ -12011,7 +12013,7 @@
               </a:rPr>
               <a:t>1. What makes agentic AI different from simple drafting support?</a:t>
             </a:r>
-            <a:endParaRPr lang="en-US" sz="1320" dirty="0"/>
+            <a:endParaRPr lang="en-US" sz="1220" dirty="0"/>
           </a:p>
         </p:txBody>
       </p:sp>
@@ -12023,12 +12025,12 @@
         </p:nvSpPr>
         <p:spPr>
           <a:xfrm>
-            <a:off x="7635240" y="2670048"/>
-            <a:ext cx="3474720" cy="1377086"/>
+            <a:off x="7543800" y="2724912"/>
+            <a:ext cx="3611880" cy="1527048"/>
           </a:xfrm>
           <a:prstGeom prst="roundRect">
             <a:avLst>
-              <a:gd name="adj" fmla="val 7968"/>
+              <a:gd name="adj" fmla="val 7186"/>
             </a:avLst>
           </a:prstGeom>
           <a:solidFill>
@@ -12050,8 +12052,8 @@
         </p:nvSpPr>
         <p:spPr>
           <a:xfrm>
-            <a:off x="7799832" y="2816352"/>
-            <a:ext cx="3145536" cy="256032"/>
+            <a:off x="7708392" y="2852928"/>
+            <a:ext cx="3282696" cy="228600"/>
           </a:xfrm>
           <a:prstGeom prst="rect">
             <a:avLst/>
@@ -12067,7 +12069,7 @@
               <a:buNone/>
             </a:pPr>
             <a:r>
-              <a:rPr lang="en-US" sz="1300" b="1" dirty="0">
+              <a:rPr lang="en-US" sz="1220" b="1" dirty="0">
                 <a:solidFill>
                   <a:srgbClr val="0068B7"/>
                 </a:solidFill>
@@ -12077,7 +12079,7 @@
               </a:rPr>
               <a:t>Concept checkpoints</a:t>
             </a:r>
-            <a:endParaRPr lang="en-US" sz="1300" dirty="0"/>
+            <a:endParaRPr lang="en-US" sz="1220" dirty="0"/>
           </a:p>
         </p:txBody>
       </p:sp>
@@ -12089,8 +12091,8 @@
         </p:nvSpPr>
         <p:spPr>
           <a:xfrm>
-            <a:off x="7818120" y="3182112"/>
-            <a:ext cx="3090672" cy="718718"/>
+            <a:off x="7726680" y="3182112"/>
+            <a:ext cx="3227832" cy="960120"/>
           </a:xfrm>
           <a:prstGeom prst="rect">
             <a:avLst/>
@@ -12108,7 +12110,7 @@
               <a:buNone/>
             </a:pPr>
             <a:r>
-              <a:rPr lang="en-US" sz="1220" dirty="0">
+              <a:rPr lang="en-US" sz="1140" dirty="0">
                 <a:solidFill>
                   <a:srgbClr val="17364A"/>
                 </a:solidFill>
@@ -12118,14 +12120,14 @@
               </a:rPr>
               <a:t>1.</a:t>
             </a:r>
-            <a:endParaRPr lang="en-US" sz="1220" dirty="0"/>
-          </a:p>
-          <a:p>
-            <a:pPr indent="0" marL="0">
-              <a:buNone/>
-            </a:pPr>
-            <a:r>
-              <a:rPr lang="en-US" sz="1220" dirty="0">
+            <a:endParaRPr lang="en-US" sz="1140" dirty="0"/>
+          </a:p>
+          <a:p>
+            <a:pPr indent="0" marL="0">
+              <a:buNone/>
+            </a:pPr>
+            <a:r>
+              <a:rPr lang="en-US" sz="1140" dirty="0">
                 <a:solidFill>
                   <a:srgbClr val="17364A"/>
                 </a:solidFill>
@@ -12133,16 +12135,16 @@
                 <a:ea typeface="Aptos" pitchFamily="34" charset="-122"/>
                 <a:cs typeface="Aptos" pitchFamily="34" charset="-120"/>
               </a:rPr>
-              <a:t>What makes agentic AI different from simple drafting support?</a:t>
-            </a:r>
-            <a:endParaRPr lang="en-US" sz="1220" dirty="0"/>
-          </a:p>
-          <a:p>
-            <a:pPr indent="0" marL="0">
-              <a:buNone/>
-            </a:pPr>
-            <a:r>
-              <a:rPr lang="en-US" sz="1220" dirty="0">
+              <a:t>What makes agentic AI different from simple.</a:t>
+            </a:r>
+            <a:endParaRPr lang="en-US" sz="1140" dirty="0"/>
+          </a:p>
+          <a:p>
+            <a:pPr indent="0" marL="0">
+              <a:buNone/>
+            </a:pPr>
+            <a:r>
+              <a:rPr lang="en-US" sz="1140" dirty="0">
                 <a:solidFill>
                   <a:srgbClr val="17364A"/>
                 </a:solidFill>
@@ -12152,7 +12154,7 @@
               </a:rPr>
               <a:t>2.</a:t>
             </a:r>
-            <a:endParaRPr lang="en-US" sz="1220" dirty="0"/>
+            <a:endParaRPr lang="en-US" sz="1140" dirty="0"/>
           </a:p>
         </p:txBody>
       </p:sp>
@@ -12164,12 +12166,12 @@
         </p:nvSpPr>
         <p:spPr>
           <a:xfrm>
-            <a:off x="7635240" y="4184294"/>
-            <a:ext cx="3474720" cy="1466698"/>
+            <a:off x="7543800" y="4389120"/>
+            <a:ext cx="3611880" cy="1261872"/>
           </a:xfrm>
           <a:prstGeom prst="roundRect">
             <a:avLst>
-              <a:gd name="adj" fmla="val 7481"/>
+              <a:gd name="adj" fmla="val 8696"/>
             </a:avLst>
           </a:prstGeom>
           <a:solidFill>
@@ -12191,8 +12193,8 @@
         </p:nvSpPr>
         <p:spPr>
           <a:xfrm>
-            <a:off x="7799832" y="4330598"/>
-            <a:ext cx="3145536" cy="256032"/>
+            <a:off x="7708392" y="4517136"/>
+            <a:ext cx="3282696" cy="228600"/>
           </a:xfrm>
           <a:prstGeom prst="rect">
             <a:avLst/>
@@ -12208,7 +12210,7 @@
               <a:buNone/>
             </a:pPr>
             <a:r>
-              <a:rPr lang="en-US" sz="1300" b="1" dirty="0">
+              <a:rPr lang="en-US" sz="1220" b="1" dirty="0">
                 <a:solidFill>
                   <a:srgbClr val="0068B7"/>
                 </a:solidFill>
@@ -12218,7 +12220,7 @@
               </a:rPr>
               <a:t>Next action</a:t>
             </a:r>
-            <a:endParaRPr lang="en-US" sz="1300" dirty="0"/>
+            <a:endParaRPr lang="en-US" sz="1220" dirty="0"/>
           </a:p>
         </p:txBody>
       </p:sp>
@@ -12230,8 +12232,8 @@
         </p:nvSpPr>
         <p:spPr>
           <a:xfrm>
-            <a:off x="7799832" y="4659782"/>
-            <a:ext cx="3145536" cy="899770"/>
+            <a:off x="7708392" y="4828032"/>
+            <a:ext cx="3282696" cy="749808"/>
           </a:xfrm>
           <a:prstGeom prst="rect">
             <a:avLst/>
@@ -12249,7 +12251,7 @@
               <a:buNone/>
             </a:pPr>
             <a:r>
-              <a:rPr lang="en-US" sz="1320" dirty="0">
+              <a:rPr lang="en-US" sz="1220" dirty="0">
                 <a:solidFill>
                   <a:srgbClr val="17364A"/>
                 </a:solidFill>
@@ -12257,9 +12259,9 @@
                 <a:ea typeface="Aptos" pitchFamily="34" charset="-122"/>
                 <a:cs typeface="Aptos" pitchFamily="34" charset="-120"/>
               </a:rPr>
-              <a:t>Use the assignment to test whether you can explain the concept, apply it to a realistic public health situation, and identify what would need review before the work moves forward.</a:t>
-            </a:r>
-            <a:endParaRPr lang="en-US" sz="1320" dirty="0"/>
+              <a:t>Use the assignment to test whether you can explain the concept, apply it to a.</a:t>
+            </a:r>
+            <a:endParaRPr lang="en-US" sz="1220" dirty="0"/>
           </a:p>
         </p:txBody>
       </p:sp>
@@ -12550,8 +12552,8 @@
         </p:nvSpPr>
         <p:spPr>
           <a:xfrm>
-            <a:off x="868680" y="1508760"/>
-            <a:ext cx="6309360" cy="4160520"/>
+            <a:off x="822960" y="1463040"/>
+            <a:ext cx="6565392" cy="4343400"/>
           </a:xfrm>
           <a:prstGeom prst="rect">
             <a:avLst/>
@@ -12569,7 +12571,7 @@
               <a:buNone/>
             </a:pPr>
             <a:r>
-              <a:rPr lang="en-US" sz="2100" dirty="0">
+              <a:rPr lang="en-US" sz="1920" dirty="0">
                 <a:solidFill>
                   <a:srgbClr val="003A63"/>
                 </a:solidFill>
@@ -12579,14 +12581,14 @@
               </a:rPr>
               <a:t>• OWASP Top 10 for Large Language Model Applications:.</a:t>
             </a:r>
-            <a:endParaRPr lang="en-US" sz="2100" dirty="0"/>
-          </a:p>
-          <a:p>
-            <a:pPr indent="0" marL="0">
-              <a:buNone/>
-            </a:pPr>
-            <a:r>
-              <a:rPr lang="en-US" sz="2100" dirty="0">
+            <a:endParaRPr lang="en-US" sz="1920" dirty="0"/>
+          </a:p>
+          <a:p>
+            <a:pPr indent="0" marL="0">
+              <a:buNone/>
+            </a:pPr>
+            <a:r>
+              <a:rPr lang="en-US" sz="1920" dirty="0">
                 <a:solidFill>
                   <a:srgbClr val="003A63"/>
                 </a:solidFill>
@@ -12596,14 +12598,14 @@
               </a:rPr>
               <a:t>• NIST AI RMF Generative AI Profile:.</a:t>
             </a:r>
-            <a:endParaRPr lang="en-US" sz="2100" dirty="0"/>
-          </a:p>
-          <a:p>
-            <a:pPr indent="0" marL="0">
-              <a:buNone/>
-            </a:pPr>
-            <a:r>
-              <a:rPr lang="en-US" sz="2100" dirty="0">
+            <a:endParaRPr lang="en-US" sz="1920" dirty="0"/>
+          </a:p>
+          <a:p>
+            <a:pPr indent="0" marL="0">
+              <a:buNone/>
+            </a:pPr>
+            <a:r>
+              <a:rPr lang="en-US" sz="1920" dirty="0">
                 <a:solidFill>
                   <a:srgbClr val="003A63"/>
                 </a:solidFill>
@@ -12613,7 +12615,7 @@
               </a:rPr>
               <a:t>• NIST Artificial Intelligence Risk Management Framework:.</a:t>
             </a:r>
-            <a:endParaRPr lang="en-US" sz="2100" dirty="0"/>
+            <a:endParaRPr lang="en-US" sz="1920" dirty="0"/>
           </a:p>
         </p:txBody>
       </p:sp>
@@ -12625,12 +12627,12 @@
         </p:nvSpPr>
         <p:spPr>
           <a:xfrm>
-            <a:off x="7635240" y="1325880"/>
-            <a:ext cx="3474720" cy="1207008"/>
+            <a:off x="7543800" y="1325880"/>
+            <a:ext cx="3611880" cy="1261872"/>
           </a:xfrm>
           <a:prstGeom prst="roundRect">
             <a:avLst>
-              <a:gd name="adj" fmla="val 9091"/>
+              <a:gd name="adj" fmla="val 8696"/>
             </a:avLst>
           </a:prstGeom>
           <a:solidFill>
@@ -12652,8 +12654,8 @@
         </p:nvSpPr>
         <p:spPr>
           <a:xfrm>
-            <a:off x="7799832" y="1472184"/>
-            <a:ext cx="3145536" cy="256032"/>
+            <a:off x="7708392" y="1453896"/>
+            <a:ext cx="3282696" cy="228600"/>
           </a:xfrm>
           <a:prstGeom prst="rect">
             <a:avLst/>
@@ -12669,7 +12671,7 @@
               <a:buNone/>
             </a:pPr>
             <a:r>
-              <a:rPr lang="en-US" sz="1300" b="1" dirty="0">
+              <a:rPr lang="en-US" sz="1220" b="1" dirty="0">
                 <a:solidFill>
                   <a:srgbClr val="0068B7"/>
                 </a:solidFill>
@@ -12679,7 +12681,7 @@
               </a:rPr>
               <a:t>Implementation cue</a:t>
             </a:r>
-            <a:endParaRPr lang="en-US" sz="1300" dirty="0"/>
+            <a:endParaRPr lang="en-US" sz="1220" dirty="0"/>
           </a:p>
         </p:txBody>
       </p:sp>
@@ -12691,8 +12693,8 @@
         </p:nvSpPr>
         <p:spPr>
           <a:xfrm>
-            <a:off x="7799832" y="1801368"/>
-            <a:ext cx="3145536" cy="640080"/>
+            <a:off x="7708392" y="1764792"/>
+            <a:ext cx="3282696" cy="749808"/>
           </a:xfrm>
           <a:prstGeom prst="rect">
             <a:avLst/>
@@ -12710,7 +12712,7 @@
               <a:buNone/>
             </a:pPr>
             <a:r>
-              <a:rPr lang="en-US" sz="1320" dirty="0">
+              <a:rPr lang="en-US" sz="1220" dirty="0">
                 <a:solidFill>
                   <a:srgbClr val="17364A"/>
                 </a:solidFill>
@@ -12720,7 +12722,7 @@
               </a:rPr>
               <a:t>OWASP Top 10 for Large Language Model Applications:.</a:t>
             </a:r>
-            <a:endParaRPr lang="en-US" sz="1320" dirty="0"/>
+            <a:endParaRPr lang="en-US" sz="1220" dirty="0"/>
           </a:p>
         </p:txBody>
       </p:sp>
@@ -12732,12 +12734,12 @@
         </p:nvSpPr>
         <p:spPr>
           <a:xfrm>
-            <a:off x="7635240" y="2670048"/>
-            <a:ext cx="3474720" cy="1377086"/>
+            <a:off x="7543800" y="2724912"/>
+            <a:ext cx="3611880" cy="1527048"/>
           </a:xfrm>
           <a:prstGeom prst="roundRect">
             <a:avLst>
-              <a:gd name="adj" fmla="val 7968"/>
+              <a:gd name="adj" fmla="val 7186"/>
             </a:avLst>
           </a:prstGeom>
           <a:solidFill>
@@ -12759,8 +12761,8 @@
         </p:nvSpPr>
         <p:spPr>
           <a:xfrm>
-            <a:off x="7799832" y="2816352"/>
-            <a:ext cx="3145536" cy="256032"/>
+            <a:off x="7708392" y="2852928"/>
+            <a:ext cx="3282696" cy="228600"/>
           </a:xfrm>
           <a:prstGeom prst="rect">
             <a:avLst/>
@@ -12776,7 +12778,7 @@
               <a:buNone/>
             </a:pPr>
             <a:r>
-              <a:rPr lang="en-US" sz="1300" b="1" dirty="0">
+              <a:rPr lang="en-US" sz="1220" b="1" dirty="0">
                 <a:solidFill>
                   <a:srgbClr val="0068B7"/>
                 </a:solidFill>
@@ -12786,7 +12788,7 @@
               </a:rPr>
               <a:t>Concept checkpoints</a:t>
             </a:r>
-            <a:endParaRPr lang="en-US" sz="1300" dirty="0"/>
+            <a:endParaRPr lang="en-US" sz="1220" dirty="0"/>
           </a:p>
         </p:txBody>
       </p:sp>
@@ -12798,8 +12800,8 @@
         </p:nvSpPr>
         <p:spPr>
           <a:xfrm>
-            <a:off x="7818120" y="3182112"/>
-            <a:ext cx="3090672" cy="718718"/>
+            <a:off x="7726680" y="3182112"/>
+            <a:ext cx="3227832" cy="960120"/>
           </a:xfrm>
           <a:prstGeom prst="rect">
             <a:avLst/>
@@ -12817,7 +12819,7 @@
               <a:buNone/>
             </a:pPr>
             <a:r>
-              <a:rPr lang="en-US" sz="1220" dirty="0">
+              <a:rPr lang="en-US" sz="1140" dirty="0">
                 <a:solidFill>
                   <a:srgbClr val="17364A"/>
                 </a:solidFill>
@@ -12825,16 +12827,16 @@
                 <a:ea typeface="Aptos" pitchFamily="34" charset="-122"/>
                 <a:cs typeface="Aptos" pitchFamily="34" charset="-120"/>
               </a:rPr>
-              <a:t>NIST Artificial Intelligence Risk Management Framework:.</a:t>
-            </a:r>
-            <a:endParaRPr lang="en-US" sz="1220" dirty="0"/>
-          </a:p>
-          <a:p>
-            <a:pPr indent="0" marL="0">
-              <a:buNone/>
-            </a:pPr>
-            <a:r>
-              <a:rPr lang="en-US" sz="1220" dirty="0">
+              <a:t>NIST Artificial Intelligence Risk Management.</a:t>
+            </a:r>
+            <a:endParaRPr lang="en-US" sz="1140" dirty="0"/>
+          </a:p>
+          <a:p>
+            <a:pPr indent="0" marL="0">
+              <a:buNone/>
+            </a:pPr>
+            <a:r>
+              <a:rPr lang="en-US" sz="1140" dirty="0">
                 <a:solidFill>
                   <a:srgbClr val="17364A"/>
                 </a:solidFill>
@@ -12842,9 +12844,9 @@
                 <a:ea typeface="Aptos" pitchFamily="34" charset="-122"/>
                 <a:cs typeface="Aptos" pitchFamily="34" charset="-120"/>
               </a:rPr>
-              <a:t>NIST Privacy Framework: https://www.nist.gov/privacy-framework</a:t>
-            </a:r>
-            <a:endParaRPr lang="en-US" sz="1220" dirty="0"/>
+              <a:t>NIST Privacy Framework:.</a:t>
+            </a:r>
+            <a:endParaRPr lang="en-US" sz="1140" dirty="0"/>
           </a:p>
         </p:txBody>
       </p:sp>
@@ -12856,12 +12858,12 @@
         </p:nvSpPr>
         <p:spPr>
           <a:xfrm>
-            <a:off x="7635240" y="4184294"/>
-            <a:ext cx="3474720" cy="1466698"/>
+            <a:off x="7543800" y="4389120"/>
+            <a:ext cx="3611880" cy="1261872"/>
           </a:xfrm>
           <a:prstGeom prst="roundRect">
             <a:avLst>
-              <a:gd name="adj" fmla="val 7481"/>
+              <a:gd name="adj" fmla="val 8696"/>
             </a:avLst>
           </a:prstGeom>
           <a:solidFill>
@@ -12883,8 +12885,8 @@
         </p:nvSpPr>
         <p:spPr>
           <a:xfrm>
-            <a:off x="7799832" y="4330598"/>
-            <a:ext cx="3145536" cy="256032"/>
+            <a:off x="7708392" y="4517136"/>
+            <a:ext cx="3282696" cy="228600"/>
           </a:xfrm>
           <a:prstGeom prst="rect">
             <a:avLst/>
@@ -12900,7 +12902,7 @@
               <a:buNone/>
             </a:pPr>
             <a:r>
-              <a:rPr lang="en-US" sz="1300" b="1" dirty="0">
+              <a:rPr lang="en-US" sz="1220" b="1" dirty="0">
                 <a:solidFill>
                   <a:srgbClr val="0068B7"/>
                 </a:solidFill>
@@ -12910,7 +12912,7 @@
               </a:rPr>
               <a:t>Next action</a:t>
             </a:r>
-            <a:endParaRPr lang="en-US" sz="1300" dirty="0"/>
+            <a:endParaRPr lang="en-US" sz="1220" dirty="0"/>
           </a:p>
         </p:txBody>
       </p:sp>
@@ -12922,8 +12924,8 @@
         </p:nvSpPr>
         <p:spPr>
           <a:xfrm>
-            <a:off x="7799832" y="4659782"/>
-            <a:ext cx="3145536" cy="899770"/>
+            <a:off x="7708392" y="4828032"/>
+            <a:ext cx="3282696" cy="749808"/>
           </a:xfrm>
           <a:prstGeom prst="rect">
             <a:avLst/>
@@ -12941,7 +12943,7 @@
               <a:buNone/>
             </a:pPr>
             <a:r>
-              <a:rPr lang="en-US" sz="1320" dirty="0">
+              <a:rPr lang="en-US" sz="1220" dirty="0">
                 <a:solidFill>
                   <a:srgbClr val="17364A"/>
                 </a:solidFill>
@@ -12949,9 +12951,9 @@
                 <a:ea typeface="Aptos" pitchFamily="34" charset="-122"/>
                 <a:cs typeface="Aptos" pitchFamily="34" charset="-120"/>
               </a:rPr>
-              <a:t>Use the concept to clarify workflow changes, dependencies, staffing, procurement requirements, training needs, and implementation checkpoints.</a:t>
-            </a:r>
-            <a:endParaRPr lang="en-US" sz="1320" dirty="0"/>
+              <a:t>Use the concept to clarify workflow changes, dependencies, staffing, procurement.</a:t>
+            </a:r>
+            <a:endParaRPr lang="en-US" sz="1220" dirty="0"/>
           </a:p>
         </p:txBody>
       </p:sp>
@@ -13269,7 +13271,7 @@
                 <a:ea typeface="Aptos" pitchFamily="34" charset="-122"/>
                 <a:cs typeface="Aptos" pitchFamily="34" charset="-120"/>
               </a:rPr>
-              <a:t>• Play 11: Build and Deploy AI Solutions - This lesson informs Play 11 by helping learners.</a:t>
+              <a:t>• Play 11: Build and Deploy AI Solutions - This lesson informs Play 11 by.</a:t>
             </a:r>
             <a:endParaRPr lang="en-US" sz="1900" dirty="0"/>
           </a:p>
@@ -13286,7 +13288,7 @@
                 <a:ea typeface="Aptos" pitchFamily="34" charset="-122"/>
                 <a:cs typeface="Aptos" pitchFamily="34" charset="-120"/>
               </a:rPr>
-              <a:t>• Play 3: Establish AI Governance - This lesson informs Play 3 by helping learners connect the.</a:t>
+              <a:t>• Play 3: Establish AI Governance - This lesson informs Play 3 by helping.</a:t>
             </a:r>
             <a:endParaRPr lang="en-US" sz="1900" dirty="0"/>
           </a:p>
@@ -13303,7 +13305,7 @@
                 <a:ea typeface="Aptos" pitchFamily="34" charset="-122"/>
                 <a:cs typeface="Aptos" pitchFamily="34" charset="-120"/>
               </a:rPr>
-              <a:t>• Play 12: Execute Governance and Oversight - This lesson informs Play 12 by helping learners.</a:t>
+              <a:t>• Play 12: Execute Governance and Oversight - This lesson informs Play 12 by.</a:t>
             </a:r>
             <a:endParaRPr lang="en-US" sz="1900" dirty="0"/>
           </a:p>
@@ -13320,7 +13322,7 @@
                 <a:ea typeface="Aptos" pitchFamily="34" charset="-122"/>
                 <a:cs typeface="Aptos" pitchFamily="34" charset="-120"/>
               </a:rPr>
-              <a:t>• Play 4: Engage Stakeholders - This lesson informs Play 4 by helping learners connect the.</a:t>
+              <a:t>• Play 4: Engage Stakeholders - This lesson informs Play 4 by helping learners.</a:t>
             </a:r>
             <a:endParaRPr lang="en-US" sz="1900" dirty="0"/>
           </a:p>
@@ -13361,8 +13363,8 @@
         </p:nvSpPr>
         <p:spPr>
           <a:xfrm>
-            <a:off x="8211312" y="1563624"/>
-            <a:ext cx="2734056" cy="256032"/>
+            <a:off x="8211312" y="1545336"/>
+            <a:ext cx="2734056" cy="228600"/>
           </a:xfrm>
           <a:prstGeom prst="rect">
             <a:avLst/>
@@ -13378,7 +13380,7 @@
               <a:buNone/>
             </a:pPr>
             <a:r>
-              <a:rPr lang="en-US" sz="1300" b="1" dirty="0">
+              <a:rPr lang="en-US" sz="1220" b="1" dirty="0">
                 <a:solidFill>
                   <a:srgbClr val="0068B7"/>
                 </a:solidFill>
@@ -13388,7 +13390,7 @@
               </a:rPr>
               <a:t>Apply the lesson</a:t>
             </a:r>
-            <a:endParaRPr lang="en-US" sz="1300" dirty="0"/>
+            <a:endParaRPr lang="en-US" sz="1220" dirty="0"/>
           </a:p>
         </p:txBody>
       </p:sp>
@@ -13400,8 +13402,8 @@
         </p:nvSpPr>
         <p:spPr>
           <a:xfrm>
-            <a:off x="8211312" y="1892808"/>
-            <a:ext cx="2734056" cy="1536192"/>
+            <a:off x="8211312" y="1856232"/>
+            <a:ext cx="2734056" cy="1591056"/>
           </a:xfrm>
           <a:prstGeom prst="rect">
             <a:avLst/>
@@ -13419,7 +13421,7 @@
               <a:buNone/>
             </a:pPr>
             <a:r>
-              <a:rPr lang="en-US" sz="1320" dirty="0">
+              <a:rPr lang="en-US" sz="1220" dirty="0">
                 <a:solidFill>
                   <a:srgbClr val="17364A"/>
                 </a:solidFill>
@@ -13427,9 +13429,9 @@
                 <a:ea typeface="Aptos" pitchFamily="34" charset="-122"/>
                 <a:cs typeface="Aptos" pitchFamily="34" charset="-120"/>
               </a:rPr>
-              <a:t>Use the related plays to identify decisions, participants, timing, approvals, and documentation needed for responsible implementation.</a:t>
-            </a:r>
-            <a:endParaRPr lang="en-US" sz="1320" dirty="0"/>
+              <a:t>Use the related plays to identify decisions, participants, timing, approvals,.</a:t>
+            </a:r>
+            <a:endParaRPr lang="en-US" sz="1220" dirty="0"/>
           </a:p>
         </p:txBody>
       </p:sp>
@@ -13468,8 +13470,8 @@
         </p:nvSpPr>
         <p:spPr>
           <a:xfrm>
-            <a:off x="8211312" y="3941064"/>
-            <a:ext cx="2734056" cy="256032"/>
+            <a:off x="8211312" y="3922776"/>
+            <a:ext cx="2734056" cy="228600"/>
           </a:xfrm>
           <a:prstGeom prst="rect">
             <a:avLst/>
@@ -13485,7 +13487,7 @@
               <a:buNone/>
             </a:pPr>
             <a:r>
-              <a:rPr lang="en-US" sz="1300" b="1" dirty="0">
+              <a:rPr lang="en-US" sz="1220" b="1" dirty="0">
                 <a:solidFill>
                   <a:srgbClr val="0068B7"/>
                 </a:solidFill>
@@ -13495,7 +13497,7 @@
               </a:rPr>
               <a:t>Use the play links to</a:t>
             </a:r>
-            <a:endParaRPr lang="en-US" sz="1300" dirty="0"/>
+            <a:endParaRPr lang="en-US" sz="1220" dirty="0"/>
           </a:p>
         </p:txBody>
       </p:sp>
@@ -13507,8 +13509,8 @@
         </p:nvSpPr>
         <p:spPr>
           <a:xfrm>
-            <a:off x="8229600" y="4306824"/>
-            <a:ext cx="2679192" cy="941832"/>
+            <a:off x="8229600" y="4251960"/>
+            <a:ext cx="2679192" cy="1033272"/>
           </a:xfrm>
           <a:prstGeom prst="rect">
             <a:avLst/>
@@ -13526,7 +13528,7 @@
               <a:buNone/>
             </a:pPr>
             <a:r>
-              <a:rPr lang="en-US" sz="1220" dirty="0">
+              <a:rPr lang="en-US" sz="1140" dirty="0">
                 <a:solidFill>
                   <a:srgbClr val="17364A"/>
                 </a:solidFill>
@@ -13536,14 +13538,14 @@
               </a:rPr>
               <a:t>Locate the decision point in the playbook sequence.</a:t>
             </a:r>
-            <a:endParaRPr lang="en-US" sz="1220" dirty="0"/>
-          </a:p>
-          <a:p>
-            <a:pPr indent="0" marL="0">
-              <a:buNone/>
-            </a:pPr>
-            <a:r>
-              <a:rPr lang="en-US" sz="1220" dirty="0">
+            <a:endParaRPr lang="en-US" sz="1140" dirty="0"/>
+          </a:p>
+          <a:p>
+            <a:pPr indent="0" marL="0">
+              <a:buNone/>
+            </a:pPr>
+            <a:r>
+              <a:rPr lang="en-US" sz="1140" dirty="0">
                 <a:solidFill>
                   <a:srgbClr val="17364A"/>
                 </a:solidFill>
@@ -13553,14 +13555,14 @@
               </a:rPr>
               <a:t>Identify who should participate in the work.</a:t>
             </a:r>
-            <a:endParaRPr lang="en-US" sz="1220" dirty="0"/>
-          </a:p>
-          <a:p>
-            <a:pPr indent="0" marL="0">
-              <a:buNone/>
-            </a:pPr>
-            <a:r>
-              <a:rPr lang="en-US" sz="1220" dirty="0">
+            <a:endParaRPr lang="en-US" sz="1140" dirty="0"/>
+          </a:p>
+          <a:p>
+            <a:pPr indent="0" marL="0">
+              <a:buNone/>
+            </a:pPr>
+            <a:r>
+              <a:rPr lang="en-US" sz="1140" dirty="0">
                 <a:solidFill>
                   <a:srgbClr val="17364A"/>
                 </a:solidFill>
@@ -13568,9 +13570,9 @@
                 <a:ea typeface="Aptos" pitchFamily="34" charset="-122"/>
                 <a:cs typeface="Aptos" pitchFamily="34" charset="-120"/>
               </a:rPr>
-              <a:t>Document the review, approval, or implementation step.</a:t>
-            </a:r>
-            <a:endParaRPr lang="en-US" sz="1220" dirty="0"/>
+              <a:t>Document the review, approval, or implementation.</a:t>
+            </a:r>
+            <a:endParaRPr lang="en-US" sz="1140" dirty="0"/>
           </a:p>
         </p:txBody>
       </p:sp>
@@ -13888,7 +13890,7 @@
                 <a:ea typeface="Aptos" pitchFamily="34" charset="-122"/>
                 <a:cs typeface="Aptos" pitchFamily="34" charset="-120"/>
               </a:rPr>
-              <a:t>• Tool 16: Incident Response Checklist (Checklist) - Use Incident Response Checklist to.</a:t>
+              <a:t>• Tool 16: Incident Response Checklist (Checklist) - Use Incident Response.</a:t>
             </a:r>
             <a:endParaRPr lang="en-US" sz="1850" dirty="0"/>
           </a:p>
@@ -13905,7 +13907,7 @@
                 <a:ea typeface="Aptos" pitchFamily="34" charset="-122"/>
                 <a:cs typeface="Aptos" pitchFamily="34" charset="-120"/>
               </a:rPr>
-              <a:t>• Tool 17: Compliance Audit Checklist (Checklist) - Use Compliance Audit Checklist to translate.</a:t>
+              <a:t>• Tool 17: Compliance Audit Checklist (Checklist) - Use Compliance Audit.</a:t>
             </a:r>
             <a:endParaRPr lang="en-US" sz="1850" dirty="0"/>
           </a:p>
@@ -13922,7 +13924,7 @@
                 <a:ea typeface="Aptos" pitchFamily="34" charset="-122"/>
                 <a:cs typeface="Aptos" pitchFamily="34" charset="-120"/>
               </a:rPr>
-              <a:t>• Tool 18: Policy Update &amp; Version Control Log (Log) - Use this tool to complete or strengthen.</a:t>
+              <a:t>• Tool 18: Policy Update &amp; Version Control Log (Log) - Use this tool to.</a:t>
             </a:r>
             <a:endParaRPr lang="en-US" sz="1850" dirty="0"/>
           </a:p>
@@ -13939,7 +13941,7 @@
                 <a:ea typeface="Aptos" pitchFamily="34" charset="-122"/>
                 <a:cs typeface="Aptos" pitchFamily="34" charset="-120"/>
               </a:rPr>
-              <a:t>• Tool 19: Plain-Language AI Public Notice Template (Template) - Use Plain-Language AI Public.</a:t>
+              <a:t>• Tool 19: Plain-Language AI Public Notice Template (Template) - Use.</a:t>
             </a:r>
             <a:endParaRPr lang="en-US" sz="1850" dirty="0"/>
           </a:p>
@@ -13980,8 +13982,8 @@
         </p:nvSpPr>
         <p:spPr>
           <a:xfrm>
-            <a:off x="8211312" y="1563624"/>
-            <a:ext cx="2734056" cy="256032"/>
+            <a:off x="8211312" y="1545336"/>
+            <a:ext cx="2734056" cy="228600"/>
           </a:xfrm>
           <a:prstGeom prst="rect">
             <a:avLst/>
@@ -13997,7 +13999,7 @@
               <a:buNone/>
             </a:pPr>
             <a:r>
-              <a:rPr lang="en-US" sz="1300" b="1" dirty="0">
+              <a:rPr lang="en-US" sz="1220" b="1" dirty="0">
                 <a:solidFill>
                   <a:srgbClr val="0068B7"/>
                 </a:solidFill>
@@ -14007,7 +14009,7 @@
               </a:rPr>
               <a:t>Use the tools</a:t>
             </a:r>
-            <a:endParaRPr lang="en-US" sz="1300" dirty="0"/>
+            <a:endParaRPr lang="en-US" sz="1220" dirty="0"/>
           </a:p>
         </p:txBody>
       </p:sp>
@@ -14019,8 +14021,8 @@
         </p:nvSpPr>
         <p:spPr>
           <a:xfrm>
-            <a:off x="8211312" y="1892808"/>
-            <a:ext cx="2734056" cy="1536192"/>
+            <a:off x="8211312" y="1856232"/>
+            <a:ext cx="2734056" cy="1591056"/>
           </a:xfrm>
           <a:prstGeom prst="rect">
             <a:avLst/>
@@ -14038,7 +14040,7 @@
               <a:buNone/>
             </a:pPr>
             <a:r>
-              <a:rPr lang="en-US" sz="1320" dirty="0">
+              <a:rPr lang="en-US" sz="1220" dirty="0">
                 <a:solidFill>
                   <a:srgbClr val="17364A"/>
                 </a:solidFill>
@@ -14046,9 +14048,9 @@
                 <a:ea typeface="Aptos" pitchFamily="34" charset="-122"/>
                 <a:cs typeface="Aptos" pitchFamily="34" charset="-120"/>
               </a:rPr>
-              <a:t>Use linked tools when your department needs a structured worksheet, template, checklist, review process, or documentation artifact.</a:t>
-            </a:r>
-            <a:endParaRPr lang="en-US" sz="1320" dirty="0"/>
+              <a:t>Use linked tools when your department needs a structured worksheet, template,.</a:t>
+            </a:r>
+            <a:endParaRPr lang="en-US" sz="1220" dirty="0"/>
           </a:p>
         </p:txBody>
       </p:sp>
@@ -14087,8 +14089,8 @@
         </p:nvSpPr>
         <p:spPr>
           <a:xfrm>
-            <a:off x="8211312" y="3941064"/>
-            <a:ext cx="2734056" cy="256032"/>
+            <a:off x="8211312" y="3922776"/>
+            <a:ext cx="2734056" cy="228600"/>
           </a:xfrm>
           <a:prstGeom prst="rect">
             <a:avLst/>
@@ -14104,7 +14106,7 @@
               <a:buNone/>
             </a:pPr>
             <a:r>
-              <a:rPr lang="en-US" sz="1300" b="1" dirty="0">
+              <a:rPr lang="en-US" sz="1220" b="1" dirty="0">
                 <a:solidFill>
                   <a:srgbClr val="0068B7"/>
                 </a:solidFill>
@@ -14114,7 +14116,7 @@
               </a:rPr>
               <a:t>Tool selection cues</a:t>
             </a:r>
-            <a:endParaRPr lang="en-US" sz="1300" dirty="0"/>
+            <a:endParaRPr lang="en-US" sz="1220" dirty="0"/>
           </a:p>
         </p:txBody>
       </p:sp>
@@ -14126,8 +14128,8 @@
         </p:nvSpPr>
         <p:spPr>
           <a:xfrm>
-            <a:off x="8229600" y="4306824"/>
-            <a:ext cx="2679192" cy="941832"/>
+            <a:off x="8229600" y="4251960"/>
+            <a:ext cx="2679192" cy="1033272"/>
           </a:xfrm>
           <a:prstGeom prst="rect">
             <a:avLst/>
@@ -14145,7 +14147,7 @@
               <a:buNone/>
             </a:pPr>
             <a:r>
-              <a:rPr lang="en-US" sz="1220" dirty="0">
+              <a:rPr lang="en-US" sz="1140" dirty="0">
                 <a:solidFill>
                   <a:srgbClr val="17364A"/>
                 </a:solidFill>
@@ -14155,14 +14157,14 @@
               </a:rPr>
               <a:t>Use a tool when no comparable local process exists.</a:t>
             </a:r>
-            <a:endParaRPr lang="en-US" sz="1220" dirty="0"/>
-          </a:p>
-          <a:p>
-            <a:pPr indent="0" marL="0">
-              <a:buNone/>
-            </a:pPr>
-            <a:r>
-              <a:rPr lang="en-US" sz="1220" dirty="0">
+            <a:endParaRPr lang="en-US" sz="1140" dirty="0"/>
+          </a:p>
+          <a:p>
+            <a:pPr indent="0" marL="0">
+              <a:buNone/>
+            </a:pPr>
+            <a:r>
+              <a:rPr lang="en-US" sz="1140" dirty="0">
                 <a:solidFill>
                   <a:srgbClr val="17364A"/>
                 </a:solidFill>
@@ -14170,16 +14172,16 @@
                 <a:ea typeface="Aptos" pitchFamily="34" charset="-122"/>
                 <a:cs typeface="Aptos" pitchFamily="34" charset="-120"/>
               </a:rPr>
-              <a:t>Adapt existing department templates when they already fit the.</a:t>
-            </a:r>
-            <a:endParaRPr lang="en-US" sz="1220" dirty="0"/>
-          </a:p>
-          <a:p>
-            <a:pPr indent="0" marL="0">
-              <a:buNone/>
-            </a:pPr>
-            <a:r>
-              <a:rPr lang="en-US" sz="1220" dirty="0">
+              <a:t>Adapt existing department templates when they.</a:t>
+            </a:r>
+            <a:endParaRPr lang="en-US" sz="1140" dirty="0"/>
+          </a:p>
+          <a:p>
+            <a:pPr indent="0" marL="0">
+              <a:buNone/>
+            </a:pPr>
+            <a:r>
+              <a:rPr lang="en-US" sz="1140" dirty="0">
                 <a:solidFill>
                   <a:srgbClr val="17364A"/>
                 </a:solidFill>
@@ -14187,9 +14189,9 @@
                 <a:ea typeface="Aptos" pitchFamily="34" charset="-122"/>
                 <a:cs typeface="Aptos" pitchFamily="34" charset="-120"/>
               </a:rPr>
-              <a:t>Save the completed artifact as evidence of the decision.</a:t>
-            </a:r>
-            <a:endParaRPr lang="en-US" sz="1220" dirty="0"/>
+              <a:t>Save the completed artifact as evidence of the.</a:t>
+            </a:r>
+            <a:endParaRPr lang="en-US" sz="1140" dirty="0"/>
           </a:p>
         </p:txBody>
       </p:sp>
@@ -14480,8 +14482,8 @@
         </p:nvSpPr>
         <p:spPr>
           <a:xfrm>
-            <a:off x="868680" y="1508760"/>
-            <a:ext cx="6309360" cy="4160520"/>
+            <a:off x="822960" y="1463040"/>
+            <a:ext cx="6565392" cy="4343400"/>
           </a:xfrm>
           <a:prstGeom prst="rect">
             <a:avLst/>
@@ -14499,7 +14501,7 @@
               <a:buNone/>
             </a:pPr>
             <a:r>
-              <a:rPr lang="en-US" sz="2100" dirty="0">
+              <a:rPr lang="en-US" sz="1920" dirty="0">
                 <a:solidFill>
                   <a:srgbClr val="003A63"/>
                 </a:solidFill>
@@ -14509,14 +14511,14 @@
               </a:rPr>
               <a:t>• Define agentic AI and orchestration in public health terms.</a:t>
             </a:r>
-            <a:endParaRPr lang="en-US" sz="2100" dirty="0"/>
-          </a:p>
-          <a:p>
-            <a:pPr indent="0" marL="0">
-              <a:buNone/>
-            </a:pPr>
-            <a:r>
-              <a:rPr lang="en-US" sz="2100" dirty="0">
+            <a:endParaRPr lang="en-US" sz="1920" dirty="0"/>
+          </a:p>
+          <a:p>
+            <a:pPr indent="0" marL="0">
+              <a:buNone/>
+            </a:pPr>
+            <a:r>
+              <a:rPr lang="en-US" sz="1920" dirty="0">
                 <a:solidFill>
                   <a:srgbClr val="003A63"/>
                 </a:solidFill>
@@ -14526,14 +14528,14 @@
               </a:rPr>
               <a:t>• Distinguish advisory outputs from tool-using or action-taking AI workflows.</a:t>
             </a:r>
-            <a:endParaRPr lang="en-US" sz="2100" dirty="0"/>
-          </a:p>
-          <a:p>
-            <a:pPr indent="0" marL="0">
-              <a:buNone/>
-            </a:pPr>
-            <a:r>
-              <a:rPr lang="en-US" sz="2100" dirty="0">
+            <a:endParaRPr lang="en-US" sz="1920" dirty="0"/>
+          </a:p>
+          <a:p>
+            <a:pPr indent="0" marL="0">
+              <a:buNone/>
+            </a:pPr>
+            <a:r>
+              <a:rPr lang="en-US" sz="1920" dirty="0">
                 <a:solidFill>
                   <a:srgbClr val="003A63"/>
                 </a:solidFill>
@@ -14541,9 +14543,9 @@
                 <a:ea typeface="Aptos" pitchFamily="34" charset="-122"/>
                 <a:cs typeface="Aptos" pitchFamily="34" charset="-120"/>
               </a:rPr>
-              <a:t>• Identify the components of an agentic workflow, including goals, tools, permissions, memory,.</a:t>
-            </a:r>
-            <a:endParaRPr lang="en-US" sz="2100" dirty="0"/>
+              <a:t>• Identify the components of an agentic workflow, including goals, tools,.</a:t>
+            </a:r>
+            <a:endParaRPr lang="en-US" sz="1920" dirty="0"/>
           </a:p>
         </p:txBody>
       </p:sp>
@@ -14555,12 +14557,12 @@
         </p:nvSpPr>
         <p:spPr>
           <a:xfrm>
-            <a:off x="7635240" y="1325880"/>
-            <a:ext cx="3474720" cy="1207008"/>
+            <a:off x="7543800" y="1325880"/>
+            <a:ext cx="3611880" cy="1261872"/>
           </a:xfrm>
           <a:prstGeom prst="roundRect">
             <a:avLst>
-              <a:gd name="adj" fmla="val 9091"/>
+              <a:gd name="adj" fmla="val 8696"/>
             </a:avLst>
           </a:prstGeom>
           <a:solidFill>
@@ -14582,8 +14584,8 @@
         </p:nvSpPr>
         <p:spPr>
           <a:xfrm>
-            <a:off x="7799832" y="1472184"/>
-            <a:ext cx="3145536" cy="256032"/>
+            <a:off x="7708392" y="1453896"/>
+            <a:ext cx="3282696" cy="228600"/>
           </a:xfrm>
           <a:prstGeom prst="rect">
             <a:avLst/>
@@ -14599,7 +14601,7 @@
               <a:buNone/>
             </a:pPr>
             <a:r>
-              <a:rPr lang="en-US" sz="1300" b="1" dirty="0">
+              <a:rPr lang="en-US" sz="1220" b="1" dirty="0">
                 <a:solidFill>
                   <a:srgbClr val="0068B7"/>
                 </a:solidFill>
@@ -14609,7 +14611,7 @@
               </a:rPr>
               <a:t>Implementation cue</a:t>
             </a:r>
-            <a:endParaRPr lang="en-US" sz="1300" dirty="0"/>
+            <a:endParaRPr lang="en-US" sz="1220" dirty="0"/>
           </a:p>
         </p:txBody>
       </p:sp>
@@ -14621,8 +14623,8 @@
         </p:nvSpPr>
         <p:spPr>
           <a:xfrm>
-            <a:off x="7799832" y="1801368"/>
-            <a:ext cx="3145536" cy="640080"/>
+            <a:off x="7708392" y="1764792"/>
+            <a:ext cx="3282696" cy="749808"/>
           </a:xfrm>
           <a:prstGeom prst="rect">
             <a:avLst/>
@@ -14640,7 +14642,7 @@
               <a:buNone/>
             </a:pPr>
             <a:r>
-              <a:rPr lang="en-US" sz="1320" dirty="0">
+              <a:rPr lang="en-US" sz="1220" dirty="0">
                 <a:solidFill>
                   <a:srgbClr val="17364A"/>
                 </a:solidFill>
@@ -14650,7 +14652,7 @@
               </a:rPr>
               <a:t>Define agentic AI and orchestration in public health terms.</a:t>
             </a:r>
-            <a:endParaRPr lang="en-US" sz="1320" dirty="0"/>
+            <a:endParaRPr lang="en-US" sz="1220" dirty="0"/>
           </a:p>
         </p:txBody>
       </p:sp>
@@ -14662,12 +14664,12 @@
         </p:nvSpPr>
         <p:spPr>
           <a:xfrm>
-            <a:off x="7635240" y="2670048"/>
-            <a:ext cx="3474720" cy="1377086"/>
+            <a:off x="7543800" y="2724912"/>
+            <a:ext cx="3611880" cy="1527048"/>
           </a:xfrm>
           <a:prstGeom prst="roundRect">
             <a:avLst>
-              <a:gd name="adj" fmla="val 7968"/>
+              <a:gd name="adj" fmla="val 7186"/>
             </a:avLst>
           </a:prstGeom>
           <a:solidFill>
@@ -14689,8 +14691,8 @@
         </p:nvSpPr>
         <p:spPr>
           <a:xfrm>
-            <a:off x="7799832" y="2816352"/>
-            <a:ext cx="3145536" cy="256032"/>
+            <a:off x="7708392" y="2852928"/>
+            <a:ext cx="3282696" cy="228600"/>
           </a:xfrm>
           <a:prstGeom prst="rect">
             <a:avLst/>
@@ -14706,7 +14708,7 @@
               <a:buNone/>
             </a:pPr>
             <a:r>
-              <a:rPr lang="en-US" sz="1300" b="1" dirty="0">
+              <a:rPr lang="en-US" sz="1220" b="1" dirty="0">
                 <a:solidFill>
                   <a:srgbClr val="0068B7"/>
                 </a:solidFill>
@@ -14716,7 +14718,7 @@
               </a:rPr>
               <a:t>Concept checkpoints</a:t>
             </a:r>
-            <a:endParaRPr lang="en-US" sz="1300" dirty="0"/>
+            <a:endParaRPr lang="en-US" sz="1220" dirty="0"/>
           </a:p>
         </p:txBody>
       </p:sp>
@@ -14728,8 +14730,8 @@
         </p:nvSpPr>
         <p:spPr>
           <a:xfrm>
-            <a:off x="7818120" y="3182112"/>
-            <a:ext cx="3090672" cy="718718"/>
+            <a:off x="7726680" y="3182112"/>
+            <a:ext cx="3227832" cy="960120"/>
           </a:xfrm>
           <a:prstGeom prst="rect">
             <a:avLst/>
@@ -14747,7 +14749,7 @@
               <a:buNone/>
             </a:pPr>
             <a:r>
-              <a:rPr lang="en-US" sz="1220" dirty="0">
+              <a:rPr lang="en-US" sz="1140" dirty="0">
                 <a:solidFill>
                   <a:srgbClr val="17364A"/>
                 </a:solidFill>
@@ -14755,16 +14757,16 @@
                 <a:ea typeface="Aptos" pitchFamily="34" charset="-122"/>
                 <a:cs typeface="Aptos" pitchFamily="34" charset="-120"/>
               </a:rPr>
-              <a:t>Identify the components of an agentic workflow, including goals,.</a:t>
-            </a:r>
-            <a:endParaRPr lang="en-US" sz="1220" dirty="0"/>
-          </a:p>
-          <a:p>
-            <a:pPr indent="0" marL="0">
-              <a:buNone/>
-            </a:pPr>
-            <a:r>
-              <a:rPr lang="en-US" sz="1220" dirty="0">
+              <a:t>Identify the components of an agentic workflow,.</a:t>
+            </a:r>
+            <a:endParaRPr lang="en-US" sz="1140" dirty="0"/>
+          </a:p>
+          <a:p>
+            <a:pPr indent="0" marL="0">
+              <a:buNone/>
+            </a:pPr>
+            <a:r>
+              <a:rPr lang="en-US" sz="1140" dirty="0">
                 <a:solidFill>
                   <a:srgbClr val="17364A"/>
                 </a:solidFill>
@@ -14772,16 +14774,16 @@
                 <a:ea typeface="Aptos" pitchFamily="34" charset="-122"/>
                 <a:cs typeface="Aptos" pitchFamily="34" charset="-120"/>
               </a:rPr>
-              <a:t>Assess risks from excessive agency, unauthorized actions, error.</a:t>
-            </a:r>
-            <a:endParaRPr lang="en-US" sz="1220" dirty="0"/>
-          </a:p>
-          <a:p>
-            <a:pPr indent="0" marL="0">
-              <a:buNone/>
-            </a:pPr>
-            <a:r>
-              <a:rPr lang="en-US" sz="1220" dirty="0">
+              <a:t>Assess risks from excessive agency, unauthorized.</a:t>
+            </a:r>
+            <a:endParaRPr lang="en-US" sz="1140" dirty="0"/>
+          </a:p>
+          <a:p>
+            <a:pPr indent="0" marL="0">
+              <a:buNone/>
+            </a:pPr>
+            <a:r>
+              <a:rPr lang="en-US" sz="1140" dirty="0">
                 <a:solidFill>
                   <a:srgbClr val="17364A"/>
                 </a:solidFill>
@@ -14789,9 +14791,9 @@
                 <a:ea typeface="Aptos" pitchFamily="34" charset="-122"/>
                 <a:cs typeface="Aptos" pitchFamily="34" charset="-120"/>
               </a:rPr>
-              <a:t>Design human-in-the-loop and human-on-the-loop controls for public.</a:t>
-            </a:r>
-            <a:endParaRPr lang="en-US" sz="1220" dirty="0"/>
+              <a:t>Design human-in-the-loop and human-on-the-loop.</a:t>
+            </a:r>
+            <a:endParaRPr lang="en-US" sz="1140" dirty="0"/>
           </a:p>
         </p:txBody>
       </p:sp>
@@ -14803,12 +14805,12 @@
         </p:nvSpPr>
         <p:spPr>
           <a:xfrm>
-            <a:off x="7635240" y="4184294"/>
-            <a:ext cx="3474720" cy="1466698"/>
+            <a:off x="7543800" y="4389120"/>
+            <a:ext cx="3611880" cy="1261872"/>
           </a:xfrm>
           <a:prstGeom prst="roundRect">
             <a:avLst>
-              <a:gd name="adj" fmla="val 7481"/>
+              <a:gd name="adj" fmla="val 8696"/>
             </a:avLst>
           </a:prstGeom>
           <a:solidFill>
@@ -14830,8 +14832,8 @@
         </p:nvSpPr>
         <p:spPr>
           <a:xfrm>
-            <a:off x="7799832" y="4330598"/>
-            <a:ext cx="3145536" cy="256032"/>
+            <a:off x="7708392" y="4517136"/>
+            <a:ext cx="3282696" cy="228600"/>
           </a:xfrm>
           <a:prstGeom prst="rect">
             <a:avLst/>
@@ -14847,7 +14849,7 @@
               <a:buNone/>
             </a:pPr>
             <a:r>
-              <a:rPr lang="en-US" sz="1300" b="1" dirty="0">
+              <a:rPr lang="en-US" sz="1220" b="1" dirty="0">
                 <a:solidFill>
                   <a:srgbClr val="0068B7"/>
                 </a:solidFill>
@@ -14857,7 +14859,7 @@
               </a:rPr>
               <a:t>Next action</a:t>
             </a:r>
-            <a:endParaRPr lang="en-US" sz="1300" dirty="0"/>
+            <a:endParaRPr lang="en-US" sz="1220" dirty="0"/>
           </a:p>
         </p:txBody>
       </p:sp>
@@ -14869,8 +14871,8 @@
         </p:nvSpPr>
         <p:spPr>
           <a:xfrm>
-            <a:off x="7799832" y="4659782"/>
-            <a:ext cx="3145536" cy="899770"/>
+            <a:off x="7708392" y="4828032"/>
+            <a:ext cx="3282696" cy="749808"/>
           </a:xfrm>
           <a:prstGeom prst="rect">
             <a:avLst/>
@@ -14888,7 +14890,7 @@
               <a:buNone/>
             </a:pPr>
             <a:r>
-              <a:rPr lang="en-US" sz="1320" dirty="0">
+              <a:rPr lang="en-US" sz="1220" dirty="0">
                 <a:solidFill>
                   <a:srgbClr val="17364A"/>
                 </a:solidFill>
@@ -14896,9 +14898,9 @@
                 <a:ea typeface="Aptos" pitchFamily="34" charset="-122"/>
                 <a:cs typeface="Aptos" pitchFamily="34" charset="-120"/>
               </a:rPr>
-              <a:t>Use the assignment to test whether you can explain the concept, apply it to a realistic public health situation, and identify what would need review before the work moves forward.</a:t>
-            </a:r>
-            <a:endParaRPr lang="en-US" sz="1320" dirty="0"/>
+              <a:t>Use the assignment to test whether you can explain the concept, apply it to a.</a:t>
+            </a:r>
+            <a:endParaRPr lang="en-US" sz="1220" dirty="0"/>
           </a:p>
         </p:txBody>
       </p:sp>
@@ -15189,8 +15191,8 @@
         </p:nvSpPr>
         <p:spPr>
           <a:xfrm>
-            <a:off x="868680" y="1508760"/>
-            <a:ext cx="6309360" cy="4160520"/>
+            <a:off x="822960" y="1463040"/>
+            <a:ext cx="6565392" cy="4343400"/>
           </a:xfrm>
           <a:prstGeom prst="rect">
             <a:avLst/>
@@ -15208,7 +15210,7 @@
               <a:buNone/>
             </a:pPr>
             <a:r>
-              <a:rPr lang="en-US" sz="2100" dirty="0">
+              <a:rPr lang="en-US" sz="1920" dirty="0">
                 <a:solidFill>
                   <a:srgbClr val="003A63"/>
                 </a:solidFill>
@@ -15218,7 +15220,7 @@
               </a:rPr>
               <a:t>• Produce an agentic workflow control plan.</a:t>
             </a:r>
-            <a:endParaRPr lang="en-US" sz="2100" dirty="0"/>
+            <a:endParaRPr lang="en-US" sz="1920" dirty="0"/>
           </a:p>
         </p:txBody>
       </p:sp>
@@ -15230,12 +15232,12 @@
         </p:nvSpPr>
         <p:spPr>
           <a:xfrm>
-            <a:off x="7635240" y="1325880"/>
-            <a:ext cx="3474720" cy="1207008"/>
+            <a:off x="7543800" y="1325880"/>
+            <a:ext cx="3611880" cy="1261872"/>
           </a:xfrm>
           <a:prstGeom prst="roundRect">
             <a:avLst>
-              <a:gd name="adj" fmla="val 9091"/>
+              <a:gd name="adj" fmla="val 8696"/>
             </a:avLst>
           </a:prstGeom>
           <a:solidFill>
@@ -15257,8 +15259,8 @@
         </p:nvSpPr>
         <p:spPr>
           <a:xfrm>
-            <a:off x="7799832" y="1472184"/>
-            <a:ext cx="3145536" cy="256032"/>
+            <a:off x="7708392" y="1453896"/>
+            <a:ext cx="3282696" cy="228600"/>
           </a:xfrm>
           <a:prstGeom prst="rect">
             <a:avLst/>
@@ -15274,7 +15276,7 @@
               <a:buNone/>
             </a:pPr>
             <a:r>
-              <a:rPr lang="en-US" sz="1300" b="1" dirty="0">
+              <a:rPr lang="en-US" sz="1220" b="1" dirty="0">
                 <a:solidFill>
                   <a:srgbClr val="0068B7"/>
                 </a:solidFill>
@@ -15284,7 +15286,7 @@
               </a:rPr>
               <a:t>Implementation cue</a:t>
             </a:r>
-            <a:endParaRPr lang="en-US" sz="1300" dirty="0"/>
+            <a:endParaRPr lang="en-US" sz="1220" dirty="0"/>
           </a:p>
         </p:txBody>
       </p:sp>
@@ -15296,8 +15298,8 @@
         </p:nvSpPr>
         <p:spPr>
           <a:xfrm>
-            <a:off x="7799832" y="1801368"/>
-            <a:ext cx="3145536" cy="640080"/>
+            <a:off x="7708392" y="1764792"/>
+            <a:ext cx="3282696" cy="749808"/>
           </a:xfrm>
           <a:prstGeom prst="rect">
             <a:avLst/>
@@ -15315,7 +15317,7 @@
               <a:buNone/>
             </a:pPr>
             <a:r>
-              <a:rPr lang="en-US" sz="1320" dirty="0">
+              <a:rPr lang="en-US" sz="1220" dirty="0">
                 <a:solidFill>
                   <a:srgbClr val="17364A"/>
                 </a:solidFill>
@@ -15325,7 +15327,7 @@
               </a:rPr>
               <a:t>Produce an agentic workflow control plan.</a:t>
             </a:r>
-            <a:endParaRPr lang="en-US" sz="1320" dirty="0"/>
+            <a:endParaRPr lang="en-US" sz="1220" dirty="0"/>
           </a:p>
         </p:txBody>
       </p:sp>
@@ -15337,12 +15339,12 @@
         </p:nvSpPr>
         <p:spPr>
           <a:xfrm>
-            <a:off x="7635240" y="2670048"/>
-            <a:ext cx="3474720" cy="1377086"/>
+            <a:off x="7543800" y="2724912"/>
+            <a:ext cx="3611880" cy="1527048"/>
           </a:xfrm>
           <a:prstGeom prst="roundRect">
             <a:avLst>
-              <a:gd name="adj" fmla="val 7968"/>
+              <a:gd name="adj" fmla="val 7186"/>
             </a:avLst>
           </a:prstGeom>
           <a:solidFill>
@@ -15364,8 +15366,8 @@
         </p:nvSpPr>
         <p:spPr>
           <a:xfrm>
-            <a:off x="7799832" y="2816352"/>
-            <a:ext cx="3145536" cy="256032"/>
+            <a:off x="7708392" y="2852928"/>
+            <a:ext cx="3282696" cy="228600"/>
           </a:xfrm>
           <a:prstGeom prst="rect">
             <a:avLst/>
@@ -15381,7 +15383,7 @@
               <a:buNone/>
             </a:pPr>
             <a:r>
-              <a:rPr lang="en-US" sz="1300" b="1" dirty="0">
+              <a:rPr lang="en-US" sz="1220" b="1" dirty="0">
                 <a:solidFill>
                   <a:srgbClr val="0068B7"/>
                 </a:solidFill>
@@ -15391,7 +15393,7 @@
               </a:rPr>
               <a:t>Concept checkpoints</a:t>
             </a:r>
-            <a:endParaRPr lang="en-US" sz="1300" dirty="0"/>
+            <a:endParaRPr lang="en-US" sz="1220" dirty="0"/>
           </a:p>
         </p:txBody>
       </p:sp>
@@ -15403,8 +15405,8 @@
         </p:nvSpPr>
         <p:spPr>
           <a:xfrm>
-            <a:off x="7818120" y="3182112"/>
-            <a:ext cx="3090672" cy="718718"/>
+            <a:off x="7726680" y="3182112"/>
+            <a:ext cx="3227832" cy="960120"/>
           </a:xfrm>
           <a:prstGeom prst="rect">
             <a:avLst/>
@@ -15422,7 +15424,7 @@
               <a:buNone/>
             </a:pPr>
             <a:r>
-              <a:rPr lang="en-US" sz="1220" dirty="0">
+              <a:rPr lang="en-US" sz="1140" dirty="0">
                 <a:solidFill>
                   <a:srgbClr val="17364A"/>
                 </a:solidFill>
@@ -15432,7 +15434,7 @@
               </a:rPr>
               <a:t>Produce an agentic workflow control plan.</a:t>
             </a:r>
-            <a:endParaRPr lang="en-US" sz="1220" dirty="0"/>
+            <a:endParaRPr lang="en-US" sz="1140" dirty="0"/>
           </a:p>
         </p:txBody>
       </p:sp>
@@ -15444,12 +15446,12 @@
         </p:nvSpPr>
         <p:spPr>
           <a:xfrm>
-            <a:off x="7635240" y="4184294"/>
-            <a:ext cx="3474720" cy="1466698"/>
+            <a:off x="7543800" y="4389120"/>
+            <a:ext cx="3611880" cy="1261872"/>
           </a:xfrm>
           <a:prstGeom prst="roundRect">
             <a:avLst>
-              <a:gd name="adj" fmla="val 7481"/>
+              <a:gd name="adj" fmla="val 8696"/>
             </a:avLst>
           </a:prstGeom>
           <a:solidFill>
@@ -15471,8 +15473,8 @@
         </p:nvSpPr>
         <p:spPr>
           <a:xfrm>
-            <a:off x="7799832" y="4330598"/>
-            <a:ext cx="3145536" cy="256032"/>
+            <a:off x="7708392" y="4517136"/>
+            <a:ext cx="3282696" cy="228600"/>
           </a:xfrm>
           <a:prstGeom prst="rect">
             <a:avLst/>
@@ -15488,7 +15490,7 @@
               <a:buNone/>
             </a:pPr>
             <a:r>
-              <a:rPr lang="en-US" sz="1300" b="1" dirty="0">
+              <a:rPr lang="en-US" sz="1220" b="1" dirty="0">
                 <a:solidFill>
                   <a:srgbClr val="0068B7"/>
                 </a:solidFill>
@@ -15498,7 +15500,7 @@
               </a:rPr>
               <a:t>Next action</a:t>
             </a:r>
-            <a:endParaRPr lang="en-US" sz="1300" dirty="0"/>
+            <a:endParaRPr lang="en-US" sz="1220" dirty="0"/>
           </a:p>
         </p:txBody>
       </p:sp>
@@ -15510,8 +15512,8 @@
         </p:nvSpPr>
         <p:spPr>
           <a:xfrm>
-            <a:off x="7799832" y="4659782"/>
-            <a:ext cx="3145536" cy="899770"/>
+            <a:off x="7708392" y="4828032"/>
+            <a:ext cx="3282696" cy="749808"/>
           </a:xfrm>
           <a:prstGeom prst="rect">
             <a:avLst/>
@@ -15529,7 +15531,7 @@
               <a:buNone/>
             </a:pPr>
             <a:r>
-              <a:rPr lang="en-US" sz="1320" dirty="0">
+              <a:rPr lang="en-US" sz="1220" dirty="0">
                 <a:solidFill>
                   <a:srgbClr val="17364A"/>
                 </a:solidFill>
@@ -15537,9 +15539,9 @@
                 <a:ea typeface="Aptos" pitchFamily="34" charset="-122"/>
                 <a:cs typeface="Aptos" pitchFamily="34" charset="-120"/>
               </a:rPr>
-              <a:t>Use the assignment to test whether you can explain the concept, apply it to a realistic public health situation, and identify what would need review before the work moves forward.</a:t>
-            </a:r>
-            <a:endParaRPr lang="en-US" sz="1320" dirty="0"/>
+              <a:t>Use the assignment to test whether you can explain the concept, apply it to a.</a:t>
+            </a:r>
+            <a:endParaRPr lang="en-US" sz="1220" dirty="0"/>
           </a:p>
         </p:txBody>
       </p:sp>
@@ -15830,8 +15832,8 @@
         </p:nvSpPr>
         <p:spPr>
           <a:xfrm>
-            <a:off x="868680" y="1508760"/>
-            <a:ext cx="6309360" cy="4160520"/>
+            <a:off x="822960" y="1463040"/>
+            <a:ext cx="6565392" cy="4343400"/>
           </a:xfrm>
           <a:prstGeom prst="rect">
             <a:avLst/>
@@ -15849,7 +15851,7 @@
               <a:buNone/>
             </a:pPr>
             <a:r>
-              <a:rPr lang="en-US" sz="2100" dirty="0">
+              <a:rPr lang="en-US" sz="1920" dirty="0">
                 <a:solidFill>
                   <a:srgbClr val="003A63"/>
                 </a:solidFill>
@@ -15857,16 +15859,16 @@
                 <a:ea typeface="Aptos" pitchFamily="34" charset="-122"/>
                 <a:cs typeface="Aptos" pitchFamily="34" charset="-120"/>
               </a:rPr>
-              <a:t>• Agentic AI refers to AI systems configured to pursue a goal through multiple steps, often by.</a:t>
-            </a:r>
-            <a:endParaRPr lang="en-US" sz="2100" dirty="0"/>
-          </a:p>
-          <a:p>
-            <a:pPr indent="0" marL="0">
-              <a:buNone/>
-            </a:pPr>
-            <a:r>
-              <a:rPr lang="en-US" sz="2100" dirty="0">
+              <a:t>• Agentic AI refers to AI systems configured to pursue a goal through multiple.</a:t>
+            </a:r>
+            <a:endParaRPr lang="en-US" sz="1920" dirty="0"/>
+          </a:p>
+          <a:p>
+            <a:pPr indent="0" marL="0">
+              <a:buNone/>
+            </a:pPr>
+            <a:r>
+              <a:rPr lang="en-US" sz="1920" dirty="0">
                 <a:solidFill>
                   <a:srgbClr val="003A63"/>
                 </a:solidFill>
@@ -15874,16 +15876,16 @@
                 <a:ea typeface="Aptos" pitchFamily="34" charset="-122"/>
                 <a:cs typeface="Aptos" pitchFamily="34" charset="-120"/>
               </a:rPr>
-              <a:t>• In public health, agentic workflows may eventually support intake triage, document routing,.</a:t>
-            </a:r>
-            <a:endParaRPr lang="en-US" sz="2100" dirty="0"/>
-          </a:p>
-          <a:p>
-            <a:pPr indent="0" marL="0">
-              <a:buNone/>
-            </a:pPr>
-            <a:r>
-              <a:rPr lang="en-US" sz="2100" dirty="0">
+              <a:t>• In public health, agentic workflows may eventually support intake triage,.</a:t>
+            </a:r>
+            <a:endParaRPr lang="en-US" sz="1920" dirty="0"/>
+          </a:p>
+          <a:p>
+            <a:pPr indent="0" marL="0">
+              <a:buNone/>
+            </a:pPr>
+            <a:r>
+              <a:rPr lang="en-US" sz="1920" dirty="0">
                 <a:solidFill>
                   <a:srgbClr val="003A63"/>
                 </a:solidFill>
@@ -15893,7 +15895,7 @@
               </a:rPr>
               <a:t>• These uses require stronger controls than simple drafting or summarization.</a:t>
             </a:r>
-            <a:endParaRPr lang="en-US" sz="2100" dirty="0"/>
+            <a:endParaRPr lang="en-US" sz="1920" dirty="0"/>
           </a:p>
         </p:txBody>
       </p:sp>
@@ -15905,12 +15907,12 @@
         </p:nvSpPr>
         <p:spPr>
           <a:xfrm>
-            <a:off x="7635240" y="1325880"/>
-            <a:ext cx="3474720" cy="1255471"/>
+            <a:off x="7543800" y="1325880"/>
+            <a:ext cx="3611880" cy="1261872"/>
           </a:xfrm>
           <a:prstGeom prst="roundRect">
             <a:avLst>
-              <a:gd name="adj" fmla="val 8740"/>
+              <a:gd name="adj" fmla="val 8696"/>
             </a:avLst>
           </a:prstGeom>
           <a:solidFill>
@@ -15932,8 +15934,8 @@
         </p:nvSpPr>
         <p:spPr>
           <a:xfrm>
-            <a:off x="7799832" y="1472184"/>
-            <a:ext cx="3145536" cy="256032"/>
+            <a:off x="7708392" y="1453896"/>
+            <a:ext cx="3282696" cy="228600"/>
           </a:xfrm>
           <a:prstGeom prst="rect">
             <a:avLst/>
@@ -15949,7 +15951,7 @@
               <a:buNone/>
             </a:pPr>
             <a:r>
-              <a:rPr lang="en-US" sz="1300" b="1" dirty="0">
+              <a:rPr lang="en-US" sz="1220" b="1" dirty="0">
                 <a:solidFill>
                   <a:srgbClr val="0068B7"/>
                 </a:solidFill>
@@ -15959,7 +15961,7 @@
               </a:rPr>
               <a:t>Implementation cue</a:t>
             </a:r>
-            <a:endParaRPr lang="en-US" sz="1300" dirty="0"/>
+            <a:endParaRPr lang="en-US" sz="1220" dirty="0"/>
           </a:p>
         </p:txBody>
       </p:sp>
@@ -15971,8 +15973,8 @@
         </p:nvSpPr>
         <p:spPr>
           <a:xfrm>
-            <a:off x="7799832" y="1801368"/>
-            <a:ext cx="3145536" cy="688543"/>
+            <a:off x="7708392" y="1764792"/>
+            <a:ext cx="3282696" cy="749808"/>
           </a:xfrm>
           <a:prstGeom prst="rect">
             <a:avLst/>
@@ -15990,7 +15992,7 @@
               <a:buNone/>
             </a:pPr>
             <a:r>
-              <a:rPr lang="en-US" sz="1320" dirty="0">
+              <a:rPr lang="en-US" sz="1220" dirty="0">
                 <a:solidFill>
                   <a:srgbClr val="17364A"/>
                 </a:solidFill>
@@ -15998,9 +16000,9 @@
                 <a:ea typeface="Aptos" pitchFamily="34" charset="-122"/>
                 <a:cs typeface="Aptos" pitchFamily="34" charset="-120"/>
               </a:rPr>
-              <a:t>Agentic AI refers to AI systems configured to pursue a goal through multiple steps, often by using.</a:t>
-            </a:r>
-            <a:endParaRPr lang="en-US" sz="1320" dirty="0"/>
+              <a:t>Agentic AI refers to AI systems configured to pursue a goal through multiple.</a:t>
+            </a:r>
+            <a:endParaRPr lang="en-US" sz="1220" dirty="0"/>
           </a:p>
         </p:txBody>
       </p:sp>
@@ -16012,12 +16014,12 @@
         </p:nvSpPr>
         <p:spPr>
           <a:xfrm>
-            <a:off x="7635240" y="2718511"/>
-            <a:ext cx="3474720" cy="1328623"/>
+            <a:off x="7543800" y="2724912"/>
+            <a:ext cx="3611880" cy="1527048"/>
           </a:xfrm>
           <a:prstGeom prst="roundRect">
             <a:avLst>
-              <a:gd name="adj" fmla="val 8259"/>
+              <a:gd name="adj" fmla="val 7186"/>
             </a:avLst>
           </a:prstGeom>
           <a:solidFill>
@@ -16039,24 +16041,26 @@
         </p:nvSpPr>
         <p:spPr>
           <a:xfrm>
-            <a:off x="7799832" y="2846527"/>
-            <a:ext cx="3145536" cy="237744"/>
-          </a:xfrm>
-          <a:prstGeom prst="rect">
-            <a:avLst/>
-          </a:prstGeom>
-          <a:noFill/>
-          <a:ln/>
-        </p:spPr>
-        <p:txBody>
-          <a:bodyPr wrap="square" lIns="0" tIns="0" rIns="0" bIns="0" rtlCol="0" anchor="ctr"/>
-          <a:lstStyle/>
-          <a:p>
-            <a:pPr indent="0" marL="0">
-              <a:buNone/>
-            </a:pPr>
-            <a:r>
-              <a:rPr lang="en-US" sz="1250" b="1" dirty="0">
+            <a:off x="7708392" y="2852928"/>
+            <a:ext cx="3282696" cy="219456"/>
+          </a:xfrm>
+          <a:prstGeom prst="rect">
+            <a:avLst/>
+          </a:prstGeom>
+          <a:noFill/>
+          <a:ln/>
+        </p:spPr>
+        <p:txBody>
+          <a:bodyPr wrap="square" lIns="0" tIns="0" rIns="0" bIns="0" rtlCol="0" anchor="ctr">
+            <a:normAutofit/>
+          </a:bodyPr>
+          <a:lstStyle/>
+          <a:p>
+            <a:pPr indent="0" marL="0">
+              <a:buNone/>
+            </a:pPr>
+            <a:r>
+              <a:rPr lang="en-US" sz="1160" b="1" dirty="0">
                 <a:solidFill>
                   <a:srgbClr val="0068B7"/>
                 </a:solidFill>
@@ -16066,7 +16070,7 @@
               </a:rPr>
               <a:t>Implementation path</a:t>
             </a:r>
-            <a:endParaRPr lang="en-US" sz="1250" dirty="0"/>
+            <a:endParaRPr lang="en-US" sz="1160" dirty="0"/>
           </a:p>
         </p:txBody>
       </p:sp>
@@ -16078,7 +16082,7 @@
         </p:nvSpPr>
         <p:spPr>
           <a:xfrm>
-            <a:off x="8763000" y="3399739"/>
+            <a:off x="8717280" y="3406140"/>
             <a:ext cx="164592" cy="0"/>
           </a:xfrm>
           <a:prstGeom prst="line">
@@ -16101,8 +16105,8 @@
         </p:nvSpPr>
         <p:spPr>
           <a:xfrm>
-            <a:off x="7872984" y="3248863"/>
-            <a:ext cx="890016" cy="301752"/>
+            <a:off x="7781544" y="3255264"/>
+            <a:ext cx="935736" cy="301752"/>
           </a:xfrm>
           <a:prstGeom prst="roundRect">
             <a:avLst>
@@ -16128,8 +16132,8 @@
         </p:nvSpPr>
         <p:spPr>
           <a:xfrm>
-            <a:off x="7909560" y="3322015"/>
-            <a:ext cx="816864" cy="146304"/>
+            <a:off x="7818120" y="3328416"/>
+            <a:ext cx="862584" cy="146304"/>
           </a:xfrm>
           <a:prstGeom prst="rect">
             <a:avLst/>
@@ -16169,7 +16173,7 @@
         </p:nvSpPr>
         <p:spPr>
           <a:xfrm>
-            <a:off x="9817608" y="3399739"/>
+            <a:off x="9817608" y="3406140"/>
             <a:ext cx="164592" cy="0"/>
           </a:xfrm>
           <a:prstGeom prst="line">
@@ -16192,8 +16196,8 @@
         </p:nvSpPr>
         <p:spPr>
           <a:xfrm>
-            <a:off x="8927592" y="3248863"/>
-            <a:ext cx="890016" cy="301752"/>
+            <a:off x="8881872" y="3255264"/>
+            <a:ext cx="935736" cy="301752"/>
           </a:xfrm>
           <a:prstGeom prst="roundRect">
             <a:avLst>
@@ -16219,8 +16223,8 @@
         </p:nvSpPr>
         <p:spPr>
           <a:xfrm>
-            <a:off x="8964168" y="3322015"/>
-            <a:ext cx="816864" cy="146304"/>
+            <a:off x="8918448" y="3328416"/>
+            <a:ext cx="862584" cy="146304"/>
           </a:xfrm>
           <a:prstGeom prst="rect">
             <a:avLst/>
@@ -16260,8 +16264,8 @@
         </p:nvSpPr>
         <p:spPr>
           <a:xfrm>
-            <a:off x="9982200" y="3248863"/>
-            <a:ext cx="890016" cy="301752"/>
+            <a:off x="9982200" y="3255264"/>
+            <a:ext cx="935736" cy="301752"/>
           </a:xfrm>
           <a:prstGeom prst="roundRect">
             <a:avLst>
@@ -16287,8 +16291,8 @@
         </p:nvSpPr>
         <p:spPr>
           <a:xfrm>
-            <a:off x="10018776" y="3322015"/>
-            <a:ext cx="816864" cy="146304"/>
+            <a:off x="10018776" y="3328416"/>
+            <a:ext cx="862584" cy="146304"/>
           </a:xfrm>
           <a:prstGeom prst="rect">
             <a:avLst/>
@@ -16328,8 +16332,8 @@
         </p:nvSpPr>
         <p:spPr>
           <a:xfrm>
-            <a:off x="7854696" y="3742639"/>
-            <a:ext cx="3035808" cy="158191"/>
+            <a:off x="7763256" y="3749040"/>
+            <a:ext cx="3172968" cy="356616"/>
           </a:xfrm>
           <a:prstGeom prst="rect">
             <a:avLst/>
@@ -16347,7 +16351,7 @@
               <a:buNone/>
             </a:pPr>
             <a:r>
-              <a:rPr lang="en-US" sz="1120" dirty="0">
+              <a:rPr lang="en-US" sz="1040" dirty="0">
                 <a:solidFill>
                   <a:srgbClr val="17364A"/>
                 </a:solidFill>
@@ -16355,9 +16359,9 @@
                 <a:ea typeface="Aptos" pitchFamily="34" charset="-122"/>
                 <a:cs typeface="Aptos" pitchFamily="34" charset="-120"/>
               </a:rPr>
-              <a:t>Implementation work should make dependencies, approvals, training, and sustainment visible before launch.</a:t>
-            </a:r>
-            <a:endParaRPr lang="en-US" sz="1120" dirty="0"/>
+              <a:t>Implementation work should make dependencies, approvals, training, and.</a:t>
+            </a:r>
+            <a:endParaRPr lang="en-US" sz="1040" dirty="0"/>
           </a:p>
         </p:txBody>
       </p:sp>
@@ -16369,12 +16373,12 @@
         </p:nvSpPr>
         <p:spPr>
           <a:xfrm>
-            <a:off x="7635240" y="4184294"/>
-            <a:ext cx="3474720" cy="1466698"/>
+            <a:off x="7543800" y="4389120"/>
+            <a:ext cx="3611880" cy="1261872"/>
           </a:xfrm>
           <a:prstGeom prst="roundRect">
             <a:avLst>
-              <a:gd name="adj" fmla="val 7481"/>
+              <a:gd name="adj" fmla="val 8696"/>
             </a:avLst>
           </a:prstGeom>
           <a:solidFill>
@@ -16396,8 +16400,8 @@
         </p:nvSpPr>
         <p:spPr>
           <a:xfrm>
-            <a:off x="7799832" y="4330598"/>
-            <a:ext cx="3145536" cy="256032"/>
+            <a:off x="7708392" y="4517136"/>
+            <a:ext cx="3282696" cy="228600"/>
           </a:xfrm>
           <a:prstGeom prst="rect">
             <a:avLst/>
@@ -16413,7 +16417,7 @@
               <a:buNone/>
             </a:pPr>
             <a:r>
-              <a:rPr lang="en-US" sz="1300" b="1" dirty="0">
+              <a:rPr lang="en-US" sz="1220" b="1" dirty="0">
                 <a:solidFill>
                   <a:srgbClr val="0068B7"/>
                 </a:solidFill>
@@ -16423,7 +16427,7 @@
               </a:rPr>
               <a:t>Next action</a:t>
             </a:r>
-            <a:endParaRPr lang="en-US" sz="1300" dirty="0"/>
+            <a:endParaRPr lang="en-US" sz="1220" dirty="0"/>
           </a:p>
         </p:txBody>
       </p:sp>
@@ -16435,8 +16439,8 @@
         </p:nvSpPr>
         <p:spPr>
           <a:xfrm>
-            <a:off x="7799832" y="4659782"/>
-            <a:ext cx="3145536" cy="899770"/>
+            <a:off x="7708392" y="4828032"/>
+            <a:ext cx="3282696" cy="749808"/>
           </a:xfrm>
           <a:prstGeom prst="rect">
             <a:avLst/>
@@ -16454,7 +16458,7 @@
               <a:buNone/>
             </a:pPr>
             <a:r>
-              <a:rPr lang="en-US" sz="1320" dirty="0">
+              <a:rPr lang="en-US" sz="1220" dirty="0">
                 <a:solidFill>
                   <a:srgbClr val="17364A"/>
                 </a:solidFill>
@@ -16462,9 +16466,9 @@
                 <a:ea typeface="Aptos" pitchFamily="34" charset="-122"/>
                 <a:cs typeface="Aptos" pitchFamily="34" charset="-120"/>
               </a:rPr>
-              <a:t>Use the concept to clarify workflow changes, dependencies, staffing, procurement requirements, training needs, and implementation checkpoints.</a:t>
-            </a:r>
-            <a:endParaRPr lang="en-US" sz="1320" dirty="0"/>
+              <a:t>Use the concept to clarify workflow changes, dependencies, staffing, procurement.</a:t>
+            </a:r>
+            <a:endParaRPr lang="en-US" sz="1220" dirty="0"/>
           </a:p>
         </p:txBody>
       </p:sp>
@@ -16755,8 +16759,8 @@
         </p:nvSpPr>
         <p:spPr>
           <a:xfrm>
-            <a:off x="868680" y="1508760"/>
-            <a:ext cx="6309360" cy="4160520"/>
+            <a:off x="822960" y="1463040"/>
+            <a:ext cx="6565392" cy="4343400"/>
           </a:xfrm>
           <a:prstGeom prst="rect">
             <a:avLst/>
@@ -16774,7 +16778,7 @@
               <a:buNone/>
             </a:pPr>
             <a:r>
-              <a:rPr lang="en-US" sz="2100" dirty="0">
+              <a:rPr lang="en-US" sz="1920" dirty="0">
                 <a:solidFill>
                   <a:srgbClr val="003A63"/>
                 </a:solidFill>
@@ -16782,16 +16786,16 @@
                 <a:ea typeface="Aptos" pitchFamily="34" charset="-122"/>
                 <a:cs typeface="Aptos" pitchFamily="34" charset="-120"/>
               </a:rPr>
-              <a:t>• Agentic AI matters because it shifts AI from generating outputs to participating in workflows.</a:t>
-            </a:r>
-            <a:endParaRPr lang="en-US" sz="2100" dirty="0"/>
-          </a:p>
-          <a:p>
-            <a:pPr indent="0" marL="0">
-              <a:buNone/>
-            </a:pPr>
-            <a:r>
-              <a:rPr lang="en-US" sz="2100" dirty="0">
+              <a:t>• Agentic AI matters because it shifts AI from generating outputs to.</a:t>
+            </a:r>
+            <a:endParaRPr lang="en-US" sz="1920" dirty="0"/>
+          </a:p>
+          <a:p>
+            <a:pPr indent="0" marL="0">
+              <a:buNone/>
+            </a:pPr>
+            <a:r>
+              <a:rPr lang="en-US" sz="1920" dirty="0">
                 <a:solidFill>
                   <a:srgbClr val="003A63"/>
                 </a:solidFill>
@@ -16801,14 +16805,14 @@
               </a:rPr>
               <a:t>• A chatbot that drafts a message is one level of risk.</a:t>
             </a:r>
-            <a:endParaRPr lang="en-US" sz="2100" dirty="0"/>
-          </a:p>
-          <a:p>
-            <a:pPr indent="0" marL="0">
-              <a:buNone/>
-            </a:pPr>
-            <a:r>
-              <a:rPr lang="en-US" sz="2100" dirty="0">
+            <a:endParaRPr lang="en-US" sz="1920" dirty="0"/>
+          </a:p>
+          <a:p>
+            <a:pPr indent="0" marL="0">
+              <a:buNone/>
+            </a:pPr>
+            <a:r>
+              <a:rPr lang="en-US" sz="1920" dirty="0">
                 <a:solidFill>
                   <a:srgbClr val="003A63"/>
                 </a:solidFill>
@@ -16816,9 +16820,9 @@
                 <a:ea typeface="Aptos" pitchFamily="34" charset="-122"/>
                 <a:cs typeface="Aptos" pitchFamily="34" charset="-120"/>
               </a:rPr>
-              <a:t>• An agent that sends the message, updates a case record, creates a task, or notifies a partner.</a:t>
-            </a:r>
-            <a:endParaRPr lang="en-US" sz="2100" dirty="0"/>
+              <a:t>• An agent that sends the message, updates a case record, creates a task, or.</a:t>
+            </a:r>
+            <a:endParaRPr lang="en-US" sz="1920" dirty="0"/>
           </a:p>
         </p:txBody>
       </p:sp>
@@ -16830,12 +16834,12 @@
         </p:nvSpPr>
         <p:spPr>
           <a:xfrm>
-            <a:off x="7635240" y="1325880"/>
-            <a:ext cx="3474720" cy="1207008"/>
+            <a:off x="7543800" y="1325880"/>
+            <a:ext cx="3611880" cy="1261872"/>
           </a:xfrm>
           <a:prstGeom prst="roundRect">
             <a:avLst>
-              <a:gd name="adj" fmla="val 9091"/>
+              <a:gd name="adj" fmla="val 8696"/>
             </a:avLst>
           </a:prstGeom>
           <a:solidFill>
@@ -16857,8 +16861,8 @@
         </p:nvSpPr>
         <p:spPr>
           <a:xfrm>
-            <a:off x="7799832" y="1472184"/>
-            <a:ext cx="3145536" cy="256032"/>
+            <a:off x="7708392" y="1453896"/>
+            <a:ext cx="3282696" cy="228600"/>
           </a:xfrm>
           <a:prstGeom prst="rect">
             <a:avLst/>
@@ -16874,7 +16878,7 @@
               <a:buNone/>
             </a:pPr>
             <a:r>
-              <a:rPr lang="en-US" sz="1300" b="1" dirty="0">
+              <a:rPr lang="en-US" sz="1220" b="1" dirty="0">
                 <a:solidFill>
                   <a:srgbClr val="0068B7"/>
                 </a:solidFill>
@@ -16884,7 +16888,7 @@
               </a:rPr>
               <a:t>Implementation cue</a:t>
             </a:r>
-            <a:endParaRPr lang="en-US" sz="1300" dirty="0"/>
+            <a:endParaRPr lang="en-US" sz="1220" dirty="0"/>
           </a:p>
         </p:txBody>
       </p:sp>
@@ -16896,8 +16900,8 @@
         </p:nvSpPr>
         <p:spPr>
           <a:xfrm>
-            <a:off x="7799832" y="1801368"/>
-            <a:ext cx="3145536" cy="640080"/>
+            <a:off x="7708392" y="1764792"/>
+            <a:ext cx="3282696" cy="749808"/>
           </a:xfrm>
           <a:prstGeom prst="rect">
             <a:avLst/>
@@ -16915,7 +16919,7 @@
               <a:buNone/>
             </a:pPr>
             <a:r>
-              <a:rPr lang="en-US" sz="1320" dirty="0">
+              <a:rPr lang="en-US" sz="1220" dirty="0">
                 <a:solidFill>
                   <a:srgbClr val="17364A"/>
                 </a:solidFill>
@@ -16923,9 +16927,9 @@
                 <a:ea typeface="Aptos" pitchFamily="34" charset="-122"/>
                 <a:cs typeface="Aptos" pitchFamily="34" charset="-120"/>
               </a:rPr>
-              <a:t>Agentic AI matters because it shifts AI from generating outputs to participating in.</a:t>
-            </a:r>
-            <a:endParaRPr lang="en-US" sz="1320" dirty="0"/>
+              <a:t>Agentic AI matters because it shifts AI from generating outputs to participating.</a:t>
+            </a:r>
+            <a:endParaRPr lang="en-US" sz="1220" dirty="0"/>
           </a:p>
         </p:txBody>
       </p:sp>
@@ -16937,12 +16941,12 @@
         </p:nvSpPr>
         <p:spPr>
           <a:xfrm>
-            <a:off x="7635240" y="2670048"/>
-            <a:ext cx="3474720" cy="1377086"/>
+            <a:off x="7543800" y="2724912"/>
+            <a:ext cx="3611880" cy="1527048"/>
           </a:xfrm>
           <a:prstGeom prst="roundRect">
             <a:avLst>
-              <a:gd name="adj" fmla="val 7968"/>
+              <a:gd name="adj" fmla="val 7186"/>
             </a:avLst>
           </a:prstGeom>
           <a:solidFill>
@@ -16964,24 +16968,26 @@
         </p:nvSpPr>
         <p:spPr>
           <a:xfrm>
-            <a:off x="7799832" y="2798064"/>
-            <a:ext cx="3145536" cy="237744"/>
-          </a:xfrm>
-          <a:prstGeom prst="rect">
-            <a:avLst/>
-          </a:prstGeom>
-          <a:noFill/>
-          <a:ln/>
-        </p:spPr>
-        <p:txBody>
-          <a:bodyPr wrap="square" lIns="0" tIns="0" rIns="0" bIns="0" rtlCol="0" anchor="ctr"/>
-          <a:lstStyle/>
-          <a:p>
-            <a:pPr indent="0" marL="0">
-              <a:buNone/>
-            </a:pPr>
-            <a:r>
-              <a:rPr lang="en-US" sz="1250" b="1" dirty="0">
+            <a:off x="7708392" y="2852928"/>
+            <a:ext cx="3282696" cy="219456"/>
+          </a:xfrm>
+          <a:prstGeom prst="rect">
+            <a:avLst/>
+          </a:prstGeom>
+          <a:noFill/>
+          <a:ln/>
+        </p:spPr>
+        <p:txBody>
+          <a:bodyPr wrap="square" lIns="0" tIns="0" rIns="0" bIns="0" rtlCol="0" anchor="ctr">
+            <a:normAutofit/>
+          </a:bodyPr>
+          <a:lstStyle/>
+          <a:p>
+            <a:pPr indent="0" marL="0">
+              <a:buNone/>
+            </a:pPr>
+            <a:r>
+              <a:rPr lang="en-US" sz="1160" b="1" dirty="0">
                 <a:solidFill>
                   <a:srgbClr val="0068B7"/>
                 </a:solidFill>
@@ -16991,7 +16997,7 @@
               </a:rPr>
               <a:t>Implementation path</a:t>
             </a:r>
-            <a:endParaRPr lang="en-US" sz="1250" dirty="0"/>
+            <a:endParaRPr lang="en-US" sz="1160" dirty="0"/>
           </a:p>
         </p:txBody>
       </p:sp>
@@ -17003,7 +17009,7 @@
         </p:nvSpPr>
         <p:spPr>
           <a:xfrm>
-            <a:off x="8763000" y="3351276"/>
+            <a:off x="8717280" y="3406140"/>
             <a:ext cx="164592" cy="0"/>
           </a:xfrm>
           <a:prstGeom prst="line">
@@ -17026,8 +17032,8 @@
         </p:nvSpPr>
         <p:spPr>
           <a:xfrm>
-            <a:off x="7872984" y="3200400"/>
-            <a:ext cx="890016" cy="301752"/>
+            <a:off x="7781544" y="3255264"/>
+            <a:ext cx="935736" cy="301752"/>
           </a:xfrm>
           <a:prstGeom prst="roundRect">
             <a:avLst>
@@ -17053,8 +17059,8 @@
         </p:nvSpPr>
         <p:spPr>
           <a:xfrm>
-            <a:off x="7909560" y="3273552"/>
-            <a:ext cx="816864" cy="146304"/>
+            <a:off x="7818120" y="3328416"/>
+            <a:ext cx="862584" cy="146304"/>
           </a:xfrm>
           <a:prstGeom prst="rect">
             <a:avLst/>
@@ -17094,7 +17100,7 @@
         </p:nvSpPr>
         <p:spPr>
           <a:xfrm>
-            <a:off x="9817608" y="3351276"/>
+            <a:off x="9817608" y="3406140"/>
             <a:ext cx="164592" cy="0"/>
           </a:xfrm>
           <a:prstGeom prst="line">
@@ -17117,8 +17123,8 @@
         </p:nvSpPr>
         <p:spPr>
           <a:xfrm>
-            <a:off x="8927592" y="3200400"/>
-            <a:ext cx="890016" cy="301752"/>
+            <a:off x="8881872" y="3255264"/>
+            <a:ext cx="935736" cy="301752"/>
           </a:xfrm>
           <a:prstGeom prst="roundRect">
             <a:avLst>
@@ -17144,8 +17150,8 @@
         </p:nvSpPr>
         <p:spPr>
           <a:xfrm>
-            <a:off x="8964168" y="3273552"/>
-            <a:ext cx="816864" cy="146304"/>
+            <a:off x="8918448" y="3328416"/>
+            <a:ext cx="862584" cy="146304"/>
           </a:xfrm>
           <a:prstGeom prst="rect">
             <a:avLst/>
@@ -17185,8 +17191,8 @@
         </p:nvSpPr>
         <p:spPr>
           <a:xfrm>
-            <a:off x="9982200" y="3200400"/>
-            <a:ext cx="890016" cy="301752"/>
+            <a:off x="9982200" y="3255264"/>
+            <a:ext cx="935736" cy="301752"/>
           </a:xfrm>
           <a:prstGeom prst="roundRect">
             <a:avLst>
@@ -17212,8 +17218,8 @@
         </p:nvSpPr>
         <p:spPr>
           <a:xfrm>
-            <a:off x="10018776" y="3273552"/>
-            <a:ext cx="816864" cy="146304"/>
+            <a:off x="10018776" y="3328416"/>
+            <a:ext cx="862584" cy="146304"/>
           </a:xfrm>
           <a:prstGeom prst="rect">
             <a:avLst/>
@@ -17253,8 +17259,8 @@
         </p:nvSpPr>
         <p:spPr>
           <a:xfrm>
-            <a:off x="7854696" y="3694176"/>
-            <a:ext cx="3035808" cy="206654"/>
+            <a:off x="7763256" y="3749040"/>
+            <a:ext cx="3172968" cy="356616"/>
           </a:xfrm>
           <a:prstGeom prst="rect">
             <a:avLst/>
@@ -17272,7 +17278,7 @@
               <a:buNone/>
             </a:pPr>
             <a:r>
-              <a:rPr lang="en-US" sz="1120" dirty="0">
+              <a:rPr lang="en-US" sz="1040" dirty="0">
                 <a:solidFill>
                   <a:srgbClr val="17364A"/>
                 </a:solidFill>
@@ -17280,9 +17286,9 @@
                 <a:ea typeface="Aptos" pitchFamily="34" charset="-122"/>
                 <a:cs typeface="Aptos" pitchFamily="34" charset="-120"/>
               </a:rPr>
-              <a:t>Implementation work should make dependencies, approvals, training, and sustainment visible before launch.</a:t>
-            </a:r>
-            <a:endParaRPr lang="en-US" sz="1120" dirty="0"/>
+              <a:t>Implementation work should make dependencies, approvals, training, and.</a:t>
+            </a:r>
+            <a:endParaRPr lang="en-US" sz="1040" dirty="0"/>
           </a:p>
         </p:txBody>
       </p:sp>
@@ -17294,12 +17300,12 @@
         </p:nvSpPr>
         <p:spPr>
           <a:xfrm>
-            <a:off x="7635240" y="4184294"/>
-            <a:ext cx="3474720" cy="1466698"/>
+            <a:off x="7543800" y="4389120"/>
+            <a:ext cx="3611880" cy="1261872"/>
           </a:xfrm>
           <a:prstGeom prst="roundRect">
             <a:avLst>
-              <a:gd name="adj" fmla="val 7481"/>
+              <a:gd name="adj" fmla="val 8696"/>
             </a:avLst>
           </a:prstGeom>
           <a:solidFill>
@@ -17321,8 +17327,8 @@
         </p:nvSpPr>
         <p:spPr>
           <a:xfrm>
-            <a:off x="7799832" y="4330598"/>
-            <a:ext cx="3145536" cy="256032"/>
+            <a:off x="7708392" y="4517136"/>
+            <a:ext cx="3282696" cy="228600"/>
           </a:xfrm>
           <a:prstGeom prst="rect">
             <a:avLst/>
@@ -17338,7 +17344,7 @@
               <a:buNone/>
             </a:pPr>
             <a:r>
-              <a:rPr lang="en-US" sz="1300" b="1" dirty="0">
+              <a:rPr lang="en-US" sz="1220" b="1" dirty="0">
                 <a:solidFill>
                   <a:srgbClr val="0068B7"/>
                 </a:solidFill>
@@ -17348,7 +17354,7 @@
               </a:rPr>
               <a:t>Next action</a:t>
             </a:r>
-            <a:endParaRPr lang="en-US" sz="1300" dirty="0"/>
+            <a:endParaRPr lang="en-US" sz="1220" dirty="0"/>
           </a:p>
         </p:txBody>
       </p:sp>
@@ -17360,8 +17366,8 @@
         </p:nvSpPr>
         <p:spPr>
           <a:xfrm>
-            <a:off x="7799832" y="4659782"/>
-            <a:ext cx="3145536" cy="899770"/>
+            <a:off x="7708392" y="4828032"/>
+            <a:ext cx="3282696" cy="749808"/>
           </a:xfrm>
           <a:prstGeom prst="rect">
             <a:avLst/>
@@ -17379,7 +17385,7 @@
               <a:buNone/>
             </a:pPr>
             <a:r>
-              <a:rPr lang="en-US" sz="1320" dirty="0">
+              <a:rPr lang="en-US" sz="1220" dirty="0">
                 <a:solidFill>
                   <a:srgbClr val="17364A"/>
                 </a:solidFill>
@@ -17387,9 +17393,9 @@
                 <a:ea typeface="Aptos" pitchFamily="34" charset="-122"/>
                 <a:cs typeface="Aptos" pitchFamily="34" charset="-120"/>
               </a:rPr>
-              <a:t>Use the concept to clarify workflow changes, dependencies, staffing, procurement requirements, training needs, and implementation checkpoints.</a:t>
-            </a:r>
-            <a:endParaRPr lang="en-US" sz="1320" dirty="0"/>
+              <a:t>Use the concept to clarify workflow changes, dependencies, staffing, procurement.</a:t>
+            </a:r>
+            <a:endParaRPr lang="en-US" sz="1220" dirty="0"/>
           </a:p>
         </p:txBody>
       </p:sp>
@@ -17680,8 +17686,8 @@
         </p:nvSpPr>
         <p:spPr>
           <a:xfrm>
-            <a:off x="868680" y="1508760"/>
-            <a:ext cx="6309360" cy="4160520"/>
+            <a:off x="822960" y="1463040"/>
+            <a:ext cx="6565392" cy="4343400"/>
           </a:xfrm>
           <a:prstGeom prst="rect">
             <a:avLst/>
@@ -17699,7 +17705,7 @@
               <a:buNone/>
             </a:pPr>
             <a:r>
-              <a:rPr lang="en-US" sz="2100" dirty="0">
+              <a:rPr lang="en-US" sz="1920" dirty="0">
                 <a:solidFill>
                   <a:srgbClr val="003A63"/>
                 </a:solidFill>
@@ -17707,16 +17713,16 @@
                 <a:ea typeface="Aptos" pitchFamily="34" charset="-122"/>
                 <a:cs typeface="Aptos" pitchFamily="34" charset="-120"/>
               </a:rPr>
-              <a:t>• A health department may consider an agentic workflow for incoming public health inquiries.</a:t>
-            </a:r>
-            <a:endParaRPr lang="en-US" sz="2100" dirty="0"/>
-          </a:p>
-          <a:p>
-            <a:pPr indent="0" marL="0">
-              <a:buNone/>
-            </a:pPr>
-            <a:r>
-              <a:rPr lang="en-US" sz="2100" dirty="0">
+              <a:t>• A health department may consider an agentic workflow for incoming public.</a:t>
+            </a:r>
+            <a:endParaRPr lang="en-US" sz="1920" dirty="0"/>
+          </a:p>
+          <a:p>
+            <a:pPr indent="0" marL="0">
+              <a:buNone/>
+            </a:pPr>
+            <a:r>
+              <a:rPr lang="en-US" sz="1920" dirty="0">
                 <a:solidFill>
                   <a:srgbClr val="003A63"/>
                 </a:solidFill>
@@ -17724,16 +17730,16 @@
                 <a:ea typeface="Aptos" pitchFamily="34" charset="-122"/>
                 <a:cs typeface="Aptos" pitchFamily="34" charset="-120"/>
               </a:rPr>
-              <a:t>• The agent could classify the inquiry, retrieve relevant approved guidance, draft a response,.</a:t>
-            </a:r>
-            <a:endParaRPr lang="en-US" sz="2100" dirty="0"/>
-          </a:p>
-          <a:p>
-            <a:pPr indent="0" marL="0">
-              <a:buNone/>
-            </a:pPr>
-            <a:r>
-              <a:rPr lang="en-US" sz="2100" dirty="0">
+              <a:t>• The agent could classify the inquiry, retrieve relevant approved guidance,.</a:t>
+            </a:r>
+            <a:endParaRPr lang="en-US" sz="1920" dirty="0"/>
+          </a:p>
+          <a:p>
+            <a:pPr indent="0" marL="0">
+              <a:buNone/>
+            </a:pPr>
+            <a:r>
+              <a:rPr lang="en-US" sz="1920" dirty="0">
                 <a:solidFill>
                   <a:srgbClr val="003A63"/>
                 </a:solidFill>
@@ -17741,9 +17747,9 @@
                 <a:ea typeface="Aptos" pitchFamily="34" charset="-122"/>
                 <a:cs typeface="Aptos" pitchFamily="34" charset="-120"/>
               </a:rPr>
-              <a:t>• For low-risk general information, the agent might prepare a draft for staff review.</a:t>
-            </a:r>
-            <a:endParaRPr lang="en-US" sz="2100" dirty="0"/>
+              <a:t>• For low-risk general information, the agent might prepare a draft for staff.</a:t>
+            </a:r>
+            <a:endParaRPr lang="en-US" sz="1920" dirty="0"/>
           </a:p>
         </p:txBody>
       </p:sp>
@@ -17755,12 +17761,12 @@
         </p:nvSpPr>
         <p:spPr>
           <a:xfrm>
-            <a:off x="7635240" y="1325880"/>
-            <a:ext cx="3474720" cy="1207008"/>
+            <a:off x="7543800" y="1325880"/>
+            <a:ext cx="3611880" cy="1261872"/>
           </a:xfrm>
           <a:prstGeom prst="roundRect">
             <a:avLst>
-              <a:gd name="adj" fmla="val 9091"/>
+              <a:gd name="adj" fmla="val 8696"/>
             </a:avLst>
           </a:prstGeom>
           <a:solidFill>
@@ -17782,8 +17788,8 @@
         </p:nvSpPr>
         <p:spPr>
           <a:xfrm>
-            <a:off x="7799832" y="1472184"/>
-            <a:ext cx="3145536" cy="256032"/>
+            <a:off x="7708392" y="1453896"/>
+            <a:ext cx="3282696" cy="228600"/>
           </a:xfrm>
           <a:prstGeom prst="rect">
             <a:avLst/>
@@ -17799,7 +17805,7 @@
               <a:buNone/>
             </a:pPr>
             <a:r>
-              <a:rPr lang="en-US" sz="1300" b="1" dirty="0">
+              <a:rPr lang="en-US" sz="1220" b="1" dirty="0">
                 <a:solidFill>
                   <a:srgbClr val="0068B7"/>
                 </a:solidFill>
@@ -17809,7 +17815,7 @@
               </a:rPr>
               <a:t>Implementation cue</a:t>
             </a:r>
-            <a:endParaRPr lang="en-US" sz="1300" dirty="0"/>
+            <a:endParaRPr lang="en-US" sz="1220" dirty="0"/>
           </a:p>
         </p:txBody>
       </p:sp>
@@ -17821,8 +17827,8 @@
         </p:nvSpPr>
         <p:spPr>
           <a:xfrm>
-            <a:off x="7799832" y="1801368"/>
-            <a:ext cx="3145536" cy="640080"/>
+            <a:off x="7708392" y="1764792"/>
+            <a:ext cx="3282696" cy="749808"/>
           </a:xfrm>
           <a:prstGeom prst="rect">
             <a:avLst/>
@@ -17840,7 +17846,7 @@
               <a:buNone/>
             </a:pPr>
             <a:r>
-              <a:rPr lang="en-US" sz="1320" dirty="0">
+              <a:rPr lang="en-US" sz="1220" dirty="0">
                 <a:solidFill>
                   <a:srgbClr val="17364A"/>
                 </a:solidFill>
@@ -17850,7 +17856,7 @@
               </a:rPr>
               <a:t>A health department may consider an agentic workflow for incoming public health.</a:t>
             </a:r>
-            <a:endParaRPr lang="en-US" sz="1320" dirty="0"/>
+            <a:endParaRPr lang="en-US" sz="1220" dirty="0"/>
           </a:p>
         </p:txBody>
       </p:sp>
@@ -17862,12 +17868,12 @@
         </p:nvSpPr>
         <p:spPr>
           <a:xfrm>
-            <a:off x="7635240" y="2670048"/>
-            <a:ext cx="3474720" cy="1377086"/>
+            <a:off x="7543800" y="2724912"/>
+            <a:ext cx="3611880" cy="1527048"/>
           </a:xfrm>
           <a:prstGeom prst="roundRect">
             <a:avLst>
-              <a:gd name="adj" fmla="val 7968"/>
+              <a:gd name="adj" fmla="val 7186"/>
             </a:avLst>
           </a:prstGeom>
           <a:solidFill>
@@ -17889,8 +17895,8 @@
         </p:nvSpPr>
         <p:spPr>
           <a:xfrm>
-            <a:off x="7799832" y="2816352"/>
-            <a:ext cx="3145536" cy="256032"/>
+            <a:off x="7708392" y="2852928"/>
+            <a:ext cx="3282696" cy="228600"/>
           </a:xfrm>
           <a:prstGeom prst="rect">
             <a:avLst/>
@@ -17906,7 +17912,7 @@
               <a:buNone/>
             </a:pPr>
             <a:r>
-              <a:rPr lang="en-US" sz="1300" b="1" dirty="0">
+              <a:rPr lang="en-US" sz="1220" b="1" dirty="0">
                 <a:solidFill>
                   <a:srgbClr val="0068B7"/>
                 </a:solidFill>
@@ -17916,7 +17922,7 @@
               </a:rPr>
               <a:t>Concept checkpoints</a:t>
             </a:r>
-            <a:endParaRPr lang="en-US" sz="1300" dirty="0"/>
+            <a:endParaRPr lang="en-US" sz="1220" dirty="0"/>
           </a:p>
         </p:txBody>
       </p:sp>
@@ -17928,8 +17934,8 @@
         </p:nvSpPr>
         <p:spPr>
           <a:xfrm>
-            <a:off x="7818120" y="3182112"/>
-            <a:ext cx="3090672" cy="718718"/>
+            <a:off x="7726680" y="3182112"/>
+            <a:ext cx="3227832" cy="960120"/>
           </a:xfrm>
           <a:prstGeom prst="rect">
             <a:avLst/>
@@ -17947,7 +17953,7 @@
               <a:buNone/>
             </a:pPr>
             <a:r>
-              <a:rPr lang="en-US" sz="1220" dirty="0">
+              <a:rPr lang="en-US" sz="1140" dirty="0">
                 <a:solidFill>
                   <a:srgbClr val="17364A"/>
                 </a:solidFill>
@@ -17955,16 +17961,16 @@
                 <a:ea typeface="Aptos" pitchFamily="34" charset="-122"/>
                 <a:cs typeface="Aptos" pitchFamily="34" charset="-120"/>
               </a:rPr>
-              <a:t>The agent could classify the inquiry, retrieve relevant approved.</a:t>
-            </a:r>
-            <a:endParaRPr lang="en-US" sz="1220" dirty="0"/>
-          </a:p>
-          <a:p>
-            <a:pPr indent="0" marL="0">
-              <a:buNone/>
-            </a:pPr>
-            <a:r>
-              <a:rPr lang="en-US" sz="1220" dirty="0">
+              <a:t>The agent could classify the inquiry, retrieve.</a:t>
+            </a:r>
+            <a:endParaRPr lang="en-US" sz="1140" dirty="0"/>
+          </a:p>
+          <a:p>
+            <a:pPr indent="0" marL="0">
+              <a:buNone/>
+            </a:pPr>
+            <a:r>
+              <a:rPr lang="en-US" sz="1140" dirty="0">
                 <a:solidFill>
                   <a:srgbClr val="17364A"/>
                 </a:solidFill>
@@ -17972,16 +17978,16 @@
                 <a:ea typeface="Aptos" pitchFamily="34" charset="-122"/>
                 <a:cs typeface="Aptos" pitchFamily="34" charset="-120"/>
               </a:rPr>
-              <a:t>For sensitive complaints, reportable disease concerns, media.</a:t>
-            </a:r>
-            <a:endParaRPr lang="en-US" sz="1220" dirty="0"/>
-          </a:p>
-          <a:p>
-            <a:pPr indent="0" marL="0">
-              <a:buNone/>
-            </a:pPr>
-            <a:r>
-              <a:rPr lang="en-US" sz="1220" dirty="0">
+              <a:t>For sensitive complaints, reportable disease.</a:t>
+            </a:r>
+            <a:endParaRPr lang="en-US" sz="1140" dirty="0"/>
+          </a:p>
+          <a:p>
+            <a:pPr indent="0" marL="0">
+              <a:buNone/>
+            </a:pPr>
+            <a:r>
+              <a:rPr lang="en-US" sz="1140" dirty="0">
                 <a:solidFill>
                   <a:srgbClr val="17364A"/>
                 </a:solidFill>
@@ -17991,7 +17997,7 @@
               </a:rPr>
               <a:t>This design requires orchestration rules.</a:t>
             </a:r>
-            <a:endParaRPr lang="en-US" sz="1220" dirty="0"/>
+            <a:endParaRPr lang="en-US" sz="1140" dirty="0"/>
           </a:p>
         </p:txBody>
       </p:sp>
@@ -18003,12 +18009,12 @@
         </p:nvSpPr>
         <p:spPr>
           <a:xfrm>
-            <a:off x="7635240" y="4184294"/>
-            <a:ext cx="3474720" cy="1466698"/>
+            <a:off x="7543800" y="4389120"/>
+            <a:ext cx="3611880" cy="1261872"/>
           </a:xfrm>
           <a:prstGeom prst="roundRect">
             <a:avLst>
-              <a:gd name="adj" fmla="val 7481"/>
+              <a:gd name="adj" fmla="val 8696"/>
             </a:avLst>
           </a:prstGeom>
           <a:solidFill>
@@ -18030,8 +18036,8 @@
         </p:nvSpPr>
         <p:spPr>
           <a:xfrm>
-            <a:off x="7799832" y="4330598"/>
-            <a:ext cx="3145536" cy="256032"/>
+            <a:off x="7708392" y="4517136"/>
+            <a:ext cx="3282696" cy="228600"/>
           </a:xfrm>
           <a:prstGeom prst="rect">
             <a:avLst/>
@@ -18047,7 +18053,7 @@
               <a:buNone/>
             </a:pPr>
             <a:r>
-              <a:rPr lang="en-US" sz="1300" b="1" dirty="0">
+              <a:rPr lang="en-US" sz="1220" b="1" dirty="0">
                 <a:solidFill>
                   <a:srgbClr val="0068B7"/>
                 </a:solidFill>
@@ -18057,7 +18063,7 @@
               </a:rPr>
               <a:t>Next action</a:t>
             </a:r>
-            <a:endParaRPr lang="en-US" sz="1300" dirty="0"/>
+            <a:endParaRPr lang="en-US" sz="1220" dirty="0"/>
           </a:p>
         </p:txBody>
       </p:sp>
@@ -18069,8 +18075,8 @@
         </p:nvSpPr>
         <p:spPr>
           <a:xfrm>
-            <a:off x="7799832" y="4659782"/>
-            <a:ext cx="3145536" cy="899770"/>
+            <a:off x="7708392" y="4828032"/>
+            <a:ext cx="3282696" cy="749808"/>
           </a:xfrm>
           <a:prstGeom prst="rect">
             <a:avLst/>
@@ -18088,7 +18094,7 @@
               <a:buNone/>
             </a:pPr>
             <a:r>
-              <a:rPr lang="en-US" sz="1320" dirty="0">
+              <a:rPr lang="en-US" sz="1220" dirty="0">
                 <a:solidFill>
                   <a:srgbClr val="17364A"/>
                 </a:solidFill>
@@ -18096,9 +18102,9 @@
                 <a:ea typeface="Aptos" pitchFamily="34" charset="-122"/>
                 <a:cs typeface="Aptos" pitchFamily="34" charset="-120"/>
               </a:rPr>
-              <a:t>Use the concept to clarify workflow changes, dependencies, staffing, procurement requirements, training needs, and implementation checkpoints.</a:t>
-            </a:r>
-            <a:endParaRPr lang="en-US" sz="1320" dirty="0"/>
+              <a:t>Use the concept to clarify workflow changes, dependencies, staffing, procurement.</a:t>
+            </a:r>
+            <a:endParaRPr lang="en-US" sz="1220" dirty="0"/>
           </a:p>
         </p:txBody>
       </p:sp>

--- a/downloads/presentations/modules/arc-320.pptx
+++ b/downloads/presentations/modules/arc-320.pptx
@@ -11870,7 +11870,7 @@
                 <a:ea typeface="Aptos" pitchFamily="34" charset="-122"/>
                 <a:cs typeface="Aptos" pitchFamily="34" charset="-120"/>
               </a:rPr>
-              <a:t>• 1. What makes agentic AI different from simple drafting support?</a:t>
+              <a:t>1. What makes agentic AI different from simple drafting support?</a:t>
             </a:r>
             <a:endParaRPr lang="en-US" sz="1920" dirty="0"/>
           </a:p>
@@ -11887,7 +11887,7 @@
                 <a:ea typeface="Aptos" pitchFamily="34" charset="-122"/>
                 <a:cs typeface="Aptos" pitchFamily="34" charset="-120"/>
               </a:rPr>
-              <a:t>• 2. Which action usually requires stronger oversight?</a:t>
+              <a:t>2. Which action usually requires stronger oversight?</a:t>
             </a:r>
             <a:endParaRPr lang="en-US" sz="1920" dirty="0"/>
           </a:p>
@@ -11904,7 +11904,7 @@
                 <a:ea typeface="Aptos" pitchFamily="34" charset="-122"/>
                 <a:cs typeface="Aptos" pitchFamily="34" charset="-120"/>
               </a:rPr>
-              <a:t>• 3. What is orchestration?</a:t>
+              <a:t>3. What is orchestration?</a:t>
             </a:r>
             <a:endParaRPr lang="en-US" sz="1920" dirty="0"/>
           </a:p>
@@ -12011,7 +12011,7 @@
                 <a:ea typeface="Aptos" pitchFamily="34" charset="-122"/>
                 <a:cs typeface="Aptos" pitchFamily="34" charset="-120"/>
               </a:rPr>
-              <a:t>1. What makes agentic AI different from simple drafting support?</a:t>
+              <a:t>What makes agentic AI different from simple drafting support?</a:t>
             </a:r>
             <a:endParaRPr lang="en-US" sz="1220" dirty="0"/>
           </a:p>
@@ -12118,41 +12118,7 @@
                 <a:ea typeface="Aptos" pitchFamily="34" charset="-122"/>
                 <a:cs typeface="Aptos" pitchFamily="34" charset="-120"/>
               </a:rPr>
-              <a:t>1.</a:t>
-            </a:r>
-            <a:endParaRPr lang="en-US" sz="1140" dirty="0"/>
-          </a:p>
-          <a:p>
-            <a:pPr indent="0" marL="0">
-              <a:buNone/>
-            </a:pPr>
-            <a:r>
-              <a:rPr lang="en-US" sz="1140" dirty="0">
-                <a:solidFill>
-                  <a:srgbClr val="17364A"/>
-                </a:solidFill>
-                <a:latin typeface="Aptos" pitchFamily="34" charset="0"/>
-                <a:ea typeface="Aptos" pitchFamily="34" charset="-122"/>
-                <a:cs typeface="Aptos" pitchFamily="34" charset="-120"/>
-              </a:rPr>
               <a:t>What makes agentic AI different from simple.</a:t>
-            </a:r>
-            <a:endParaRPr lang="en-US" sz="1140" dirty="0"/>
-          </a:p>
-          <a:p>
-            <a:pPr indent="0" marL="0">
-              <a:buNone/>
-            </a:pPr>
-            <a:r>
-              <a:rPr lang="en-US" sz="1140" dirty="0">
-                <a:solidFill>
-                  <a:srgbClr val="17364A"/>
-                </a:solidFill>
-                <a:latin typeface="Aptos" pitchFamily="34" charset="0"/>
-                <a:ea typeface="Aptos" pitchFamily="34" charset="-122"/>
-                <a:cs typeface="Aptos" pitchFamily="34" charset="-120"/>
-              </a:rPr>
-              <a:t>2.</a:t>
             </a:r>
             <a:endParaRPr lang="en-US" sz="1140" dirty="0"/>
           </a:p>
